--- a/assets/pa45/P011_PA45_RunHistory_20260521.pptx
+++ b/assets/pa45/P011_PA45_RunHistory_20260521.pptx
@@ -5,7 +5,7 @@
     <p:sldMasterId id="2147483648" r:id="rId1"/>
   </p:sldMasterIdLst>
   <p:notesMasterIdLst>
-    <p:notesMasterId r:id="rId19"/>
+    <p:notesMasterId r:id="rId20"/>
   </p:notesMasterIdLst>
   <p:sldIdLst>
     <p:sldId id="279" r:id="rId2"/>
@@ -16,16 +16,16 @@
     <p:sldId id="271" r:id="rId7"/>
     <p:sldId id="261" r:id="rId8"/>
     <p:sldId id="280" r:id="rId9"/>
-    <p:sldId id="289" r:id="rId10"/>
-    <p:sldId id="290" r:id="rId11"/>
-    <p:sldId id="286" r:id="rId12"/>
-    <p:sldId id="287" r:id="rId13"/>
-    <p:sldId id="288" r:id="rId14"/>
-    <p:sldId id="284" r:id="rId15"/>
-    <p:sldId id="272" r:id="rId16"/>
-    <p:sldId id="268" r:id="rId17"/>
-    <p:sldId id="269" r:id="rId18"/>
-    <p:sldId id="291" r:id="rId26"/>
+    <p:sldId id="291" r:id="rId10"/>
+    <p:sldId id="289" r:id="rId11"/>
+    <p:sldId id="290" r:id="rId12"/>
+    <p:sldId id="286" r:id="rId13"/>
+    <p:sldId id="287" r:id="rId14"/>
+    <p:sldId id="288" r:id="rId15"/>
+    <p:sldId id="284" r:id="rId16"/>
+    <p:sldId id="272" r:id="rId17"/>
+    <p:sldId id="268" r:id="rId18"/>
+    <p:sldId id="269" r:id="rId19"/>
   </p:sldIdLst>
   <p:sldSz cx="12192000" cy="6858000"/>
   <p:notesSz cx="6858000" cy="12192000"/>
@@ -1647,7 +1647,7 @@
           <a:p>
             <a:fld id="{F7021451-1387-4CA6-816F-3879F97B5CBC}" type="slidenum">
               <a:rPr lang="en-US"/>
-              <a:t>15</a:t>
+              <a:t>16</a:t>
             </a:fld>
             <a:endParaRPr lang="en-US"/>
           </a:p>
@@ -1848,7 +1848,7 @@
           <a:p>
             <a:fld id="{F7021451-1387-4CA6-816F-3879F97B5CBC}" type="slidenum">
               <a:rPr lang="en-US"/>
-              <a:t>16</a:t>
+              <a:t>17</a:t>
             </a:fld>
             <a:endParaRPr lang="en-US"/>
           </a:p>
@@ -2019,7 +2019,7 @@
           <a:p>
             <a:fld id="{F7021451-1387-4CA6-816F-3879F97B5CBC}" type="slidenum">
               <a:rPr lang="en-US"/>
-              <a:t>17</a:t>
+              <a:t>18</a:t>
             </a:fld>
             <a:endParaRPr lang="en-US"/>
           </a:p>
@@ -2395,137 +2395,753 @@
       </p:grpSpPr>
       <p:sp>
         <p:nvSpPr>
-          <p:cNvPr id="2" name="テキスト ボックス 1">
-            <a:extLst>
-              <a:ext uri="{FF2B5EF4-FFF2-40B4-BE49-F238E27FC236}">
-                <a16:creationId xmlns:a16="http://schemas.microsoft.com/office/drawing/2014/main" id="{E7009479-6313-ABD6-833D-A3E138A01A61}"/>
-              </a:ext>
-            </a:extLst>
-          </p:cNvPr>
+          <p:cNvPr id="2" name="Rectangle 1"/>
+          <p:cNvSpPr/>
+          <p:nvPr/>
+        </p:nvSpPr>
+        <p:spPr>
+          <a:xfrm>
+            <a:off x="0" y="0"/>
+            <a:ext cx="12192000" cy="6858000"/>
+          </a:xfrm>
+          <a:prstGeom prst="rect">
+            <a:avLst/>
+          </a:prstGeom>
+          <a:solidFill>
+            <a:srgbClr val="F6F9FF"/>
+          </a:solidFill>
+          <a:ln>
+            <a:noFill/>
+          </a:ln>
+        </p:spPr>
+        <p:style>
+          <a:lnRef idx="1">
+            <a:schemeClr val="accent1"/>
+          </a:lnRef>
+          <a:fillRef idx="3">
+            <a:schemeClr val="accent1"/>
+          </a:fillRef>
+          <a:effectRef idx="2">
+            <a:schemeClr val="accent1"/>
+          </a:effectRef>
+          <a:fontRef idx="minor">
+            <a:schemeClr val="lt1"/>
+          </a:fontRef>
+        </p:style>
+        <p:txBody>
+          <a:bodyPr rtlCol="0" anchor="ctr"/>
+          <a:lstStyle/>
+          <a:p>
+            <a:pPr algn="ctr"/>
+          </a:p>
+        </p:txBody>
+      </p:sp>
+      <p:sp>
+        <p:nvSpPr>
+          <p:cNvPr id="3" name="Rectangle 2"/>
+          <p:cNvSpPr/>
+          <p:nvPr/>
+        </p:nvSpPr>
+        <p:spPr>
+          <a:xfrm>
+            <a:off x="0" y="0"/>
+            <a:ext cx="12192000" cy="380000"/>
+          </a:xfrm>
+          <a:prstGeom prst="rect">
+            <a:avLst/>
+          </a:prstGeom>
+          <a:solidFill>
+            <a:srgbClr val="1E3A8A"/>
+          </a:solidFill>
+          <a:ln>
+            <a:noFill/>
+          </a:ln>
+        </p:spPr>
+        <p:style>
+          <a:lnRef idx="1">
+            <a:schemeClr val="accent1"/>
+          </a:lnRef>
+          <a:fillRef idx="3">
+            <a:schemeClr val="accent1"/>
+          </a:fillRef>
+          <a:effectRef idx="2">
+            <a:schemeClr val="accent1"/>
+          </a:effectRef>
+          <a:fontRef idx="minor">
+            <a:schemeClr val="lt1"/>
+          </a:fontRef>
+        </p:style>
+        <p:txBody>
+          <a:bodyPr rtlCol="0" anchor="ctr"/>
+          <a:lstStyle/>
+          <a:p>
+            <a:pPr algn="ctr"/>
+          </a:p>
+        </p:txBody>
+      </p:sp>
+      <p:sp>
+        <p:nvSpPr>
+          <p:cNvPr id="4" name="TextBox 3"/>
           <p:cNvSpPr txBox="1"/>
           <p:nvPr/>
         </p:nvSpPr>
         <p:spPr>
           <a:xfrm>
-            <a:off x="337457" y="338916"/>
-            <a:ext cx="11765280" cy="5755422"/>
+            <a:off x="457200" y="0"/>
+            <a:ext cx="3500000" cy="380000"/>
           </a:xfrm>
           <a:prstGeom prst="rect">
             <a:avLst/>
           </a:prstGeom>
           <a:noFill/>
-        </p:spPr>
-        <p:txBody>
-          <a:bodyPr wrap="square" rtlCol="0">
+          <a:ln>
+            <a:noFill/>
+          </a:ln>
+        </p:spPr>
+        <p:txBody>
+          <a:bodyPr wrap="square" anchor="ctr" lIns="20000" rIns="20000" tIns="0" bIns="0">
             <a:spAutoFit/>
           </a:bodyPr>
           <a:lstStyle/>
           <a:p>
-            <a:r>
-              <a:rPr kumimoji="1" lang="en-US" altLang="ja-JP" sz="4000"/>
-              <a:t>20:15</a:t>
-            </a:r>
-            <a:r>
-              <a:rPr kumimoji="1" lang="ja-JP" altLang="en-US" sz="4000"/>
-              <a:t>～スタートします</a:t>
-            </a:r>
-            <a:endParaRPr kumimoji="1" lang="en-US" altLang="ja-JP" sz="4000"/>
-          </a:p>
-          <a:p>
-            <a:endParaRPr kumimoji="1" lang="en-US" altLang="ja-JP" sz="4000"/>
-          </a:p>
-          <a:p>
-            <a:r>
-              <a:rPr kumimoji="1" lang="en-US" altLang="ja-JP" sz="4000">
-                <a:solidFill>
-                  <a:srgbClr val="FF0000"/>
-                </a:solidFill>
-              </a:rPr>
-              <a:t>Power Automate・Teams を使いますので</a:t>
-            </a:r>
-            <a:r>
-              <a:rPr kumimoji="1" lang="ja-JP" altLang="en-US" sz="4000"/>
-              <a:t/>
-            </a:r>
-            <a:r>
-              <a:rPr kumimoji="1" lang="en-US" altLang="ja-JP" sz="4000">
-                <a:solidFill>
-                  <a:srgbClr val="FF0000"/>
-                </a:solidFill>
-              </a:rPr>
-              <a:t/>
-            </a:r>
-            <a:r>
-              <a:rPr kumimoji="1" lang="ja-JP" altLang="en-US" sz="4000"/>
-              <a:t/>
-            </a:r>
-            <a:endParaRPr kumimoji="1" lang="en-US" altLang="ja-JP" sz="4000"/>
-          </a:p>
-          <a:p>
-            <a:r>
-              <a:rPr kumimoji="1" lang="ja-JP" altLang="en-US" sz="4000"/>
-              <a:t>ハンズオンされる方は、事前に立ち上げておくと</a:t>
-            </a:r>
-            <a:endParaRPr kumimoji="1" lang="en-US" altLang="ja-JP" sz="4000"/>
-          </a:p>
-          <a:p>
-            <a:r>
-              <a:rPr kumimoji="1" lang="ja-JP" altLang="en-US" sz="4000"/>
-              <a:t>スムーズです！</a:t>
-            </a:r>
-            <a:r>
-              <a:rPr kumimoji="1" lang="en-US" altLang="ja-JP" sz="4000"/>
-              <a:t>(●´ω</a:t>
-            </a:r>
-            <a:r>
-              <a:rPr kumimoji="1" lang="ja-JP" altLang="en-US" sz="4000"/>
-              <a:t>｀●</a:t>
-            </a:r>
-            <a:r>
-              <a:rPr kumimoji="1" lang="en-US" altLang="ja-JP" sz="4000"/>
-              <a:t>)</a:t>
-            </a:r>
-          </a:p>
-          <a:p>
-            <a:endParaRPr kumimoji="1" lang="en-US" altLang="ja-JP" sz="4000"/>
-          </a:p>
-          <a:p>
-            <a:r>
-              <a:rPr kumimoji="1" lang="ja-JP" altLang="en-US" sz="3200"/>
-              <a:t>後日アーカイブ動画を公開予定です。</a:t>
-            </a:r>
-            <a:endParaRPr kumimoji="1" lang="en-US" altLang="ja-JP" sz="3200"/>
-          </a:p>
-          <a:p>
-            <a:r>
-              <a:rPr kumimoji="1" lang="en-US" altLang="ja-JP" sz="3200"/>
-              <a:t>Teams</a:t>
-            </a:r>
-            <a:r>
-              <a:rPr kumimoji="1" lang="ja-JP" altLang="en-US" sz="3200"/>
-              <a:t>表示名が映る場合がありますので、</a:t>
-            </a:r>
-            <a:endParaRPr kumimoji="1" lang="en-US" altLang="ja-JP" sz="3200"/>
-          </a:p>
-          <a:p>
-            <a:r>
-              <a:rPr kumimoji="1" lang="ja-JP" altLang="en-US" sz="3200"/>
-              <a:t>お名前が表示</a:t>
-            </a:r>
-            <a:r>
-              <a:rPr kumimoji="1" lang="en-US" altLang="ja-JP" sz="3200"/>
-              <a:t>NG</a:t>
-            </a:r>
-            <a:r>
-              <a:rPr kumimoji="1" lang="ja-JP" altLang="en-US" sz="3200"/>
-              <a:t>の場合は、匿名での</a:t>
-            </a:r>
-            <a:endParaRPr kumimoji="1" lang="en-US" altLang="ja-JP" sz="3200"/>
-          </a:p>
-          <a:p>
-            <a:r>
-              <a:rPr kumimoji="1" lang="ja-JP" altLang="en-US" sz="3200"/>
-              <a:t>参加をお願い致します。</a:t>
+            <a:pPr algn="l"/>
+            <a:r>
+              <a:rPr sz="1400" b="1">
+                <a:solidFill>
+                  <a:srgbClr val="FFFFFF"/>
+                </a:solidFill>
+                <a:latin typeface="Yu Gothic UI"/>
+              </a:rPr>
+              <a:t>PA45 — Power Automate 45</a:t>
+            </a:r>
+          </a:p>
+        </p:txBody>
+      </p:sp>
+      <p:sp>
+        <p:nvSpPr>
+          <p:cNvPr id="5" name="TextBox 4"/>
+          <p:cNvSpPr txBox="1"/>
+          <p:nvPr/>
+        </p:nvSpPr>
+        <p:spPr>
+          <a:xfrm>
+            <a:off x="8234800" y="0"/>
+            <a:ext cx="3500000" cy="380000"/>
+          </a:xfrm>
+          <a:prstGeom prst="rect">
+            <a:avLst/>
+          </a:prstGeom>
+          <a:noFill/>
+          <a:ln>
+            <a:noFill/>
+          </a:ln>
+        </p:spPr>
+        <p:txBody>
+          <a:bodyPr wrap="square" anchor="ctr" lIns="20000" rIns="20000" tIns="0" bIns="0">
+            <a:spAutoFit/>
+          </a:bodyPr>
+          <a:lstStyle/>
+          <a:p>
+            <a:pPr algn="r"/>
+            <a:r>
+              <a:rPr sz="1400" b="0">
+                <a:solidFill>
+                  <a:srgbClr val="C7D8FF"/>
+                </a:solidFill>
+                <a:latin typeface="Yu Gothic UI"/>
+              </a:rPr>
+              <a:t>第11回 / Vol.11</a:t>
+            </a:r>
+          </a:p>
+        </p:txBody>
+      </p:sp>
+      <p:sp>
+        <p:nvSpPr>
+          <p:cNvPr id="6" name="TextBox 5"/>
+          <p:cNvSpPr txBox="1"/>
+          <p:nvPr/>
+        </p:nvSpPr>
+        <p:spPr>
+          <a:xfrm>
+            <a:off x="0" y="1100000"/>
+            <a:ext cx="12192000" cy="360000"/>
+          </a:xfrm>
+          <a:prstGeom prst="rect">
+            <a:avLst/>
+          </a:prstGeom>
+          <a:noFill/>
+          <a:ln>
+            <a:noFill/>
+          </a:ln>
+        </p:spPr>
+        <p:txBody>
+          <a:bodyPr wrap="square" anchor="ctr" lIns="20000" rIns="20000" tIns="0" bIns="0">
+            <a:spAutoFit/>
+          </a:bodyPr>
+          <a:lstStyle/>
+          <a:p>
+            <a:pPr algn="ctr"/>
+            <a:r>
+              <a:rPr sz="2200" b="0">
+                <a:solidFill>
+                  <a:srgbClr val="475569"/>
+                </a:solidFill>
+                <a:latin typeface="Yu Gothic UI"/>
+              </a:rPr>
+              <a:t>まもなく開始します</a:t>
+            </a:r>
+          </a:p>
+        </p:txBody>
+      </p:sp>
+      <p:sp>
+        <p:nvSpPr>
+          <p:cNvPr id="7" name="TextBox 6"/>
+          <p:cNvSpPr txBox="1"/>
+          <p:nvPr/>
+        </p:nvSpPr>
+        <p:spPr>
+          <a:xfrm>
+            <a:off x="0" y="1700000"/>
+            <a:ext cx="12192000" cy="1700000"/>
+          </a:xfrm>
+          <a:prstGeom prst="rect">
+            <a:avLst/>
+          </a:prstGeom>
+          <a:noFill/>
+          <a:ln>
+            <a:noFill/>
+          </a:ln>
+        </p:spPr>
+        <p:txBody>
+          <a:bodyPr wrap="square" anchor="ctr" lIns="20000" rIns="20000" tIns="0" bIns="0">
+            <a:spAutoFit/>
+          </a:bodyPr>
+          <a:lstStyle/>
+          <a:p>
+            <a:pPr algn="ctr"/>
+            <a:r>
+              <a:rPr sz="9600" b="1">
+                <a:solidFill>
+                  <a:srgbClr val="1E3A8A"/>
+                </a:solidFill>
+                <a:latin typeface="Yu Gothic UI"/>
+              </a:rPr>
+              <a:t>20:15 START</a:t>
+            </a:r>
+          </a:p>
+        </p:txBody>
+      </p:sp>
+      <p:sp>
+        <p:nvSpPr>
+          <p:cNvPr id="8" name="TextBox 7"/>
+          <p:cNvSpPr txBox="1"/>
+          <p:nvPr/>
+        </p:nvSpPr>
+        <p:spPr>
+          <a:xfrm>
+            <a:off x="0" y="3700000"/>
+            <a:ext cx="12192000" cy="500000"/>
+          </a:xfrm>
+          <a:prstGeom prst="rect">
+            <a:avLst/>
+          </a:prstGeom>
+          <a:noFill/>
+          <a:ln>
+            <a:noFill/>
+          </a:ln>
+        </p:spPr>
+        <p:txBody>
+          <a:bodyPr wrap="square" anchor="ctr" lIns="20000" rIns="20000" tIns="0" bIns="0">
+            <a:spAutoFit/>
+          </a:bodyPr>
+          <a:lstStyle/>
+          <a:p>
+            <a:pPr algn="ctr"/>
+            <a:r>
+              <a:rPr sz="2600" b="1">
+                <a:solidFill>
+                  <a:srgbClr val="0F172A"/>
+                </a:solidFill>
+                <a:latin typeface="Yu Gothic UI"/>
+              </a:rPr>
+              <a:t>第11回｜実行履歴を読めると自動化が楽しくなる</a:t>
+            </a:r>
+          </a:p>
+        </p:txBody>
+      </p:sp>
+      <p:sp>
+        <p:nvSpPr>
+          <p:cNvPr id="9" name="TextBox 8"/>
+          <p:cNvSpPr txBox="1"/>
+          <p:nvPr/>
+        </p:nvSpPr>
+        <p:spPr>
+          <a:xfrm>
+            <a:off x="0" y="4250000"/>
+            <a:ext cx="12192000" cy="400000"/>
+          </a:xfrm>
+          <a:prstGeom prst="rect">
+            <a:avLst/>
+          </a:prstGeom>
+          <a:noFill/>
+          <a:ln>
+            <a:noFill/>
+          </a:ln>
+        </p:spPr>
+        <p:txBody>
+          <a:bodyPr wrap="square" anchor="ctr" lIns="20000" rIns="20000" tIns="0" bIns="0">
+            <a:spAutoFit/>
+          </a:bodyPr>
+          <a:lstStyle/>
+          <a:p>
+            <a:pPr algn="ctr"/>
+            <a:r>
+              <a:rPr sz="1600" b="0">
+                <a:solidFill>
+                  <a:srgbClr val="475569"/>
+                </a:solidFill>
+                <a:latin typeface="Yu Gothic UI"/>
+              </a:rPr>
+              <a:t>失敗しないフロー設計｜メールの重要度で振り分け</a:t>
+            </a:r>
+          </a:p>
+        </p:txBody>
+      </p:sp>
+      <p:sp>
+        <p:nvSpPr>
+          <p:cNvPr id="10" name="Rounded Rectangle 9"/>
+          <p:cNvSpPr/>
+          <p:nvPr/>
+        </p:nvSpPr>
+        <p:spPr>
+          <a:xfrm>
+            <a:off x="796000" y="5300000"/>
+            <a:ext cx="3400000" cy="650000"/>
+          </a:xfrm>
+          <a:prstGeom prst="roundRect">
+            <a:avLst/>
+          </a:prstGeom>
+          <a:solidFill>
+            <a:srgbClr val="FFFFFF"/>
+          </a:solidFill>
+          <a:ln w="12700">
+            <a:solidFill>
+              <a:srgbClr val="C7D8FF"/>
+            </a:solidFill>
+          </a:ln>
+          <a:effectLst/>
+        </p:spPr>
+        <p:style>
+          <a:lnRef idx="1">
+            <a:schemeClr val="accent1"/>
+          </a:lnRef>
+          <a:fillRef idx="3">
+            <a:schemeClr val="accent1"/>
+          </a:fillRef>
+          <a:effectRef idx="2">
+            <a:schemeClr val="accent1"/>
+          </a:effectRef>
+          <a:fontRef idx="minor">
+            <a:schemeClr val="lt1"/>
+          </a:fontRef>
+        </p:style>
+        <p:txBody>
+          <a:bodyPr rtlCol="0" anchor="ctr"/>
+          <a:lstStyle/>
+          <a:p>
+            <a:pPr algn="ctr"/>
+          </a:p>
+        </p:txBody>
+      </p:sp>
+      <p:sp>
+        <p:nvSpPr>
+          <p:cNvPr id="11" name="TextBox 10"/>
+          <p:cNvSpPr txBox="1"/>
+          <p:nvPr/>
+        </p:nvSpPr>
+        <p:spPr>
+          <a:xfrm>
+            <a:off x="916000" y="5300000"/>
+            <a:ext cx="550000" cy="650000"/>
+          </a:xfrm>
+          <a:prstGeom prst="rect">
+            <a:avLst/>
+          </a:prstGeom>
+          <a:noFill/>
+          <a:ln>
+            <a:noFill/>
+          </a:ln>
+        </p:spPr>
+        <p:txBody>
+          <a:bodyPr wrap="square" anchor="ctr" lIns="20000" rIns="20000" tIns="0" bIns="0">
+            <a:spAutoFit/>
+          </a:bodyPr>
+          <a:lstStyle/>
+          <a:p>
+            <a:pPr algn="ctr"/>
+            <a:r>
+              <a:rPr sz="2200" b="0">
+                <a:solidFill>
+                  <a:srgbClr val="1E3A8A"/>
+                </a:solidFill>
+                <a:latin typeface="Yu Gothic UI"/>
+              </a:rPr>
+              <a:t>📥</a:t>
+            </a:r>
+          </a:p>
+        </p:txBody>
+      </p:sp>
+      <p:sp>
+        <p:nvSpPr>
+          <p:cNvPr id="12" name="TextBox 11"/>
+          <p:cNvSpPr txBox="1"/>
+          <p:nvPr/>
+        </p:nvSpPr>
+        <p:spPr>
+          <a:xfrm>
+            <a:off x="1476000" y="5300000"/>
+            <a:ext cx="2700000" cy="650000"/>
+          </a:xfrm>
+          <a:prstGeom prst="rect">
+            <a:avLst/>
+          </a:prstGeom>
+          <a:noFill/>
+          <a:ln>
+            <a:noFill/>
+          </a:ln>
+        </p:spPr>
+        <p:txBody>
+          <a:bodyPr wrap="square" anchor="ctr">
+            <a:spAutoFit/>
+          </a:bodyPr>
+          <a:lstStyle/>
+          <a:p>
+            <a:pPr algn="l"/>
+            <a:r>
+              <a:rPr sz="1100" b="1">
+                <a:solidFill>
+                  <a:srgbClr val="0F172A"/>
+                </a:solidFill>
+                <a:latin typeface="Yu Gothic UI"/>
+              </a:rPr>
+              <a:t>Power Automate と Outlook を</a:t>
+            </a:r>
+          </a:p>
+          <a:p>
+            <a:r>
+              <a:rPr sz="1100" b="1">
+                <a:solidFill>
+                  <a:srgbClr val="0F172A"/>
+                </a:solidFill>
+                <a:latin typeface="Yu Gothic UI"/>
+              </a:rPr>
+              <a:t>事前に起動しておくとスムーズ</a:t>
+            </a:r>
+          </a:p>
+        </p:txBody>
+      </p:sp>
+      <p:sp>
+        <p:nvSpPr>
+          <p:cNvPr id="13" name="Rounded Rectangle 12"/>
+          <p:cNvSpPr/>
+          <p:nvPr/>
+        </p:nvSpPr>
+        <p:spPr>
+          <a:xfrm>
+            <a:off x="4396000" y="5300000"/>
+            <a:ext cx="3400000" cy="650000"/>
+          </a:xfrm>
+          <a:prstGeom prst="roundRect">
+            <a:avLst/>
+          </a:prstGeom>
+          <a:solidFill>
+            <a:srgbClr val="FFFFFF"/>
+          </a:solidFill>
+          <a:ln w="12700">
+            <a:solidFill>
+              <a:srgbClr val="C7D8FF"/>
+            </a:solidFill>
+          </a:ln>
+          <a:effectLst/>
+        </p:spPr>
+        <p:style>
+          <a:lnRef idx="1">
+            <a:schemeClr val="accent1"/>
+          </a:lnRef>
+          <a:fillRef idx="3">
+            <a:schemeClr val="accent1"/>
+          </a:fillRef>
+          <a:effectRef idx="2">
+            <a:schemeClr val="accent1"/>
+          </a:effectRef>
+          <a:fontRef idx="minor">
+            <a:schemeClr val="lt1"/>
+          </a:fontRef>
+        </p:style>
+        <p:txBody>
+          <a:bodyPr rtlCol="0" anchor="ctr"/>
+          <a:lstStyle/>
+          <a:p>
+            <a:pPr algn="ctr"/>
+          </a:p>
+        </p:txBody>
+      </p:sp>
+      <p:sp>
+        <p:nvSpPr>
+          <p:cNvPr id="14" name="TextBox 13"/>
+          <p:cNvSpPr txBox="1"/>
+          <p:nvPr/>
+        </p:nvSpPr>
+        <p:spPr>
+          <a:xfrm>
+            <a:off x="4516000" y="5300000"/>
+            <a:ext cx="550000" cy="650000"/>
+          </a:xfrm>
+          <a:prstGeom prst="rect">
+            <a:avLst/>
+          </a:prstGeom>
+          <a:noFill/>
+          <a:ln>
+            <a:noFill/>
+          </a:ln>
+        </p:spPr>
+        <p:txBody>
+          <a:bodyPr wrap="square" anchor="ctr" lIns="20000" rIns="20000" tIns="0" bIns="0">
+            <a:spAutoFit/>
+          </a:bodyPr>
+          <a:lstStyle/>
+          <a:p>
+            <a:pPr algn="ctr"/>
+            <a:r>
+              <a:rPr sz="2200" b="0">
+                <a:solidFill>
+                  <a:srgbClr val="1E3A8A"/>
+                </a:solidFill>
+                <a:latin typeface="Yu Gothic UI"/>
+              </a:rPr>
+              <a:t>🎥</a:t>
+            </a:r>
+          </a:p>
+        </p:txBody>
+      </p:sp>
+      <p:sp>
+        <p:nvSpPr>
+          <p:cNvPr id="15" name="TextBox 14"/>
+          <p:cNvSpPr txBox="1"/>
+          <p:nvPr/>
+        </p:nvSpPr>
+        <p:spPr>
+          <a:xfrm>
+            <a:off x="5076000" y="5300000"/>
+            <a:ext cx="2700000" cy="650000"/>
+          </a:xfrm>
+          <a:prstGeom prst="rect">
+            <a:avLst/>
+          </a:prstGeom>
+          <a:noFill/>
+          <a:ln>
+            <a:noFill/>
+          </a:ln>
+        </p:spPr>
+        <p:txBody>
+          <a:bodyPr wrap="square" anchor="ctr">
+            <a:spAutoFit/>
+          </a:bodyPr>
+          <a:lstStyle/>
+          <a:p>
+            <a:pPr algn="l"/>
+            <a:r>
+              <a:rPr sz="1100" b="1">
+                <a:solidFill>
+                  <a:srgbClr val="0F172A"/>
+                </a:solidFill>
+                <a:latin typeface="Yu Gothic UI"/>
+              </a:rPr>
+              <a:t>後日YouTubeで</a:t>
+            </a:r>
+          </a:p>
+          <a:p>
+            <a:pPr algn="l"/>
+            <a:r>
+              <a:rPr sz="1000" b="0">
+                <a:solidFill>
+                  <a:srgbClr val="475569"/>
+                </a:solidFill>
+                <a:latin typeface="Yu Gothic UI"/>
+              </a:rPr>
+              <a:t>アーカイブ動画を公開予定</a:t>
+            </a:r>
+          </a:p>
+        </p:txBody>
+      </p:sp>
+      <p:sp>
+        <p:nvSpPr>
+          <p:cNvPr id="16" name="Rounded Rectangle 15"/>
+          <p:cNvSpPr/>
+          <p:nvPr/>
+        </p:nvSpPr>
+        <p:spPr>
+          <a:xfrm>
+            <a:off x="7996000" y="5300000"/>
+            <a:ext cx="3400000" cy="650000"/>
+          </a:xfrm>
+          <a:prstGeom prst="roundRect">
+            <a:avLst/>
+          </a:prstGeom>
+          <a:solidFill>
+            <a:srgbClr val="FFFFFF"/>
+          </a:solidFill>
+          <a:ln w="12700">
+            <a:solidFill>
+              <a:srgbClr val="C7D8FF"/>
+            </a:solidFill>
+          </a:ln>
+          <a:effectLst/>
+        </p:spPr>
+        <p:style>
+          <a:lnRef idx="1">
+            <a:schemeClr val="accent1"/>
+          </a:lnRef>
+          <a:fillRef idx="3">
+            <a:schemeClr val="accent1"/>
+          </a:fillRef>
+          <a:effectRef idx="2">
+            <a:schemeClr val="accent1"/>
+          </a:effectRef>
+          <a:fontRef idx="minor">
+            <a:schemeClr val="lt1"/>
+          </a:fontRef>
+        </p:style>
+        <p:txBody>
+          <a:bodyPr rtlCol="0" anchor="ctr"/>
+          <a:lstStyle/>
+          <a:p>
+            <a:pPr algn="ctr"/>
+          </a:p>
+        </p:txBody>
+      </p:sp>
+      <p:sp>
+        <p:nvSpPr>
+          <p:cNvPr id="17" name="TextBox 16"/>
+          <p:cNvSpPr txBox="1"/>
+          <p:nvPr/>
+        </p:nvSpPr>
+        <p:spPr>
+          <a:xfrm>
+            <a:off x="8116000" y="5300000"/>
+            <a:ext cx="550000" cy="650000"/>
+          </a:xfrm>
+          <a:prstGeom prst="rect">
+            <a:avLst/>
+          </a:prstGeom>
+          <a:noFill/>
+          <a:ln>
+            <a:noFill/>
+          </a:ln>
+        </p:spPr>
+        <p:txBody>
+          <a:bodyPr wrap="square" anchor="ctr" lIns="20000" rIns="20000" tIns="0" bIns="0">
+            <a:spAutoFit/>
+          </a:bodyPr>
+          <a:lstStyle/>
+          <a:p>
+            <a:pPr algn="ctr"/>
+            <a:r>
+              <a:rPr sz="2200" b="0">
+                <a:solidFill>
+                  <a:srgbClr val="1E3A8A"/>
+                </a:solidFill>
+                <a:latin typeface="Yu Gothic UI"/>
+              </a:rPr>
+              <a:t>🕵</a:t>
+            </a:r>
+          </a:p>
+        </p:txBody>
+      </p:sp>
+      <p:sp>
+        <p:nvSpPr>
+          <p:cNvPr id="18" name="TextBox 17"/>
+          <p:cNvSpPr txBox="1"/>
+          <p:nvPr/>
+        </p:nvSpPr>
+        <p:spPr>
+          <a:xfrm>
+            <a:off x="8676000" y="5300000"/>
+            <a:ext cx="2700000" cy="650000"/>
+          </a:xfrm>
+          <a:prstGeom prst="rect">
+            <a:avLst/>
+          </a:prstGeom>
+          <a:noFill/>
+          <a:ln>
+            <a:noFill/>
+          </a:ln>
+        </p:spPr>
+        <p:txBody>
+          <a:bodyPr wrap="square" anchor="ctr">
+            <a:spAutoFit/>
+          </a:bodyPr>
+          <a:lstStyle/>
+          <a:p>
+            <a:pPr algn="l"/>
+            <a:r>
+              <a:rPr sz="1100" b="1">
+                <a:solidFill>
+                  <a:srgbClr val="0F172A"/>
+                </a:solidFill>
+                <a:latin typeface="Yu Gothic UI"/>
+              </a:rPr>
+              <a:t>Teams表示名がNGの方は</a:t>
+            </a:r>
+          </a:p>
+          <a:p>
+            <a:pPr algn="l"/>
+            <a:r>
+              <a:rPr sz="1000" b="0">
+                <a:solidFill>
+                  <a:srgbClr val="475569"/>
+                </a:solidFill>
+                <a:latin typeface="Yu Gothic UI"/>
+              </a:rPr>
+              <a:t>匿名参加でOKです</a:t>
+            </a:r>
+          </a:p>
+        </p:txBody>
+      </p:sp>
+      <p:sp>
+        <p:nvSpPr>
+          <p:cNvPr id="19" name="TextBox 18"/>
+          <p:cNvSpPr txBox="1"/>
+          <p:nvPr/>
+        </p:nvSpPr>
+        <p:spPr>
+          <a:xfrm>
+            <a:off x="0" y="6478000"/>
+            <a:ext cx="12192000" cy="360000"/>
+          </a:xfrm>
+          <a:prstGeom prst="rect">
+            <a:avLst/>
+          </a:prstGeom>
+          <a:noFill/>
+          <a:ln>
+            <a:noFill/>
+          </a:ln>
+        </p:spPr>
+        <p:txBody>
+          <a:bodyPr wrap="square" anchor="ctr" lIns="20000" rIns="20000" tIns="0" bIns="0">
+            <a:spAutoFit/>
+          </a:bodyPr>
+          <a:lstStyle/>
+          <a:p>
+            <a:pPr algn="ctr"/>
+            <a:r>
+              <a:rPr sz="1000" b="0">
+                <a:solidFill>
+                  <a:srgbClr val="94A3B8"/>
+                </a:solidFill>
+                <a:latin typeface="Yu Gothic UI"/>
+              </a:rPr>
+              <a:t>Power Automate 45  |  Copyright © PA45</a:t>
             </a:r>
           </a:p>
         </p:txBody>
@@ -2643,7 +3259,7 @@
         </p:nvSpPr>
         <p:spPr>
           <a:xfrm>
-            <a:off x="0" y="0"/>
+            <a:off x="305" y="-9144"/>
             <a:ext cx="12191695" cy="1485900"/>
           </a:xfrm>
           <a:prstGeom prst="rect">
@@ -2743,8 +3359,8 @@
         </p:nvSpPr>
         <p:spPr>
           <a:xfrm>
-            <a:off x="457200" y="533095"/>
-            <a:ext cx="7781544" cy="715061"/>
+            <a:off x="322110" y="628650"/>
+            <a:ext cx="9601200" cy="715061"/>
           </a:xfrm>
           <a:prstGeom prst="rect">
             <a:avLst/>
@@ -2760,7 +3376,7 @@
               <a:buNone/>
             </a:pPr>
             <a:r>
-              <a:rPr lang="en-US" sz="3200" b="1" dirty="0">
+              <a:rPr lang="en-US" sz="3000" b="1" dirty="0">
                 <a:solidFill>
                   <a:srgbClr val="1F2937"/>
                 </a:solidFill>
@@ -2768,9 +3384,9 @@
                 <a:ea typeface="Noto Sans JP" pitchFamily="34" charset="-122"/>
                 <a:cs typeface="Noto Sans JP" pitchFamily="34" charset="-120"/>
               </a:rPr>
-              <a:t>事前準備 ②  今回使うSharePointリスト</a:t>
-            </a:r>
-            <a:endParaRPr lang="en-US" sz="3200" dirty="0"/>
+              <a:t>入力と出力って何？</a:t>
+            </a:r>
+            <a:endParaRPr lang="en-US" sz="2800" dirty="0"/>
           </a:p>
         </p:txBody>
       </p:sp>
@@ -2855,7 +3471,7 @@
         </p:nvSpPr>
         <p:spPr>
           <a:xfrm>
-            <a:off x="-37948" y="1494313"/>
+            <a:off x="305" y="1485900"/>
             <a:ext cx="12191695" cy="4914900"/>
           </a:xfrm>
           <a:prstGeom prst="rect">
@@ -3260,8 +3876,8 @@
         </p:nvSpPr>
         <p:spPr>
           <a:xfrm>
-            <a:off x="265580" y="1714500"/>
-            <a:ext cx="6971243" cy="4428037"/>
+            <a:off x="204620" y="1781251"/>
+            <a:ext cx="6544523" cy="3947047"/>
           </a:xfrm>
           <a:prstGeom prst="rect">
             <a:avLst/>
@@ -3285,7 +3901,7 @@
                 <a:ea typeface="Noto Sans JP" pitchFamily="34" charset="-122"/>
                 <a:cs typeface="Noto Sans JP" pitchFamily="34" charset="-120"/>
               </a:rPr>
-              <a:t>🎯 目的：複数件のデータが入った状態で、配列のJSONを観察できるようにする</a:t>
+              <a:t>🎯 アクションには「入力」と「出力」があります</a:t>
             </a:r>
             <a:endParaRPr lang="en-US" altLang="ja-JP" sz="2000">
               <a:solidFill>
@@ -3297,263 +3913,139 @@
             </a:endParaRPr>
           </a:p>
           <a:p>
-            <a:pPr marL="0" indent="0" algn="l">
-              <a:buNone/>
-            </a:pPr>
-            <a:r>
-              <a:rPr lang="ja-JP" altLang="en-US" sz="2000">
+            <a:r>
+              <a:rPr sz="2000">
                 <a:solidFill>
                   <a:srgbClr val="1F2937"/>
                 </a:solidFill>
-                <a:latin typeface="Noto Sans JP" pitchFamily="34" charset="0"/>
-                <a:ea typeface="Noto Sans JP" pitchFamily="34" charset="-122"/>
-                <a:cs typeface="Noto Sans JP" pitchFamily="34" charset="-120"/>
-              </a:rPr>
-              <a:t/>
-            </a:r>
-            <a:endParaRPr lang="en-US" altLang="ja-JP" sz="2000">
-              <a:solidFill>
-                <a:srgbClr val="1F2937"/>
-              </a:solidFill>
-              <a:latin typeface="Noto Sans JP" pitchFamily="34" charset="0"/>
-              <a:ea typeface="Noto Sans JP" pitchFamily="34" charset="-122"/>
-              <a:cs typeface="Noto Sans JP" pitchFamily="34" charset="-120"/>
-            </a:endParaRPr>
-          </a:p>
-          <a:p>
-            <a:pPr marL="0" indent="0" algn="l">
-              <a:buNone/>
-            </a:pPr>
-            <a:r>
-              <a:t>・Vol.10で作った「経費申請」リストをそのまま使用</a:t>
-            </a:r>
-            <a:endParaRPr lang="en-US" altLang="ja-JP" sz="2000">
-              <a:solidFill>
-                <a:srgbClr val="1F2937"/>
-              </a:solidFill>
-              <a:latin typeface="Noto Sans JP" pitchFamily="34" charset="0"/>
-              <a:ea typeface="Noto Sans JP" pitchFamily="34" charset="-122"/>
-              <a:cs typeface="Noto Sans JP" pitchFamily="34" charset="-120"/>
-            </a:endParaRPr>
-          </a:p>
-          <a:p>
-            <a:pPr marL="0" indent="0" algn="l">
-              <a:buNone/>
-            </a:pPr>
-            <a:r>
-              <a:rPr lang="ja-JP" altLang="en-US" sz="2000">
+                <a:latin typeface="Noto Sans JP"/>
+              </a:rPr>
+              <a:t>・入力：そのアクションが受け取った値</a:t>
+            </a:r>
+          </a:p>
+          <a:p>
+            <a:r>
+              <a:rPr sz="2000">
                 <a:solidFill>
                   <a:srgbClr val="1F2937"/>
                 </a:solidFill>
-                <a:latin typeface="Noto Sans JP" pitchFamily="34" charset="0"/>
-                <a:ea typeface="Noto Sans JP" pitchFamily="34" charset="-122"/>
-                <a:cs typeface="Noto Sans JP" pitchFamily="34" charset="-120"/>
-              </a:rPr>
-              <a:t>・列：Title / Detail / Status の3つ</a:t>
-            </a:r>
-            <a:endParaRPr lang="en-US" altLang="ja-JP" sz="2000">
-              <a:solidFill>
-                <a:srgbClr val="1F2937"/>
-              </a:solidFill>
-              <a:latin typeface="Noto Sans JP" pitchFamily="34" charset="0"/>
-              <a:ea typeface="Noto Sans JP" pitchFamily="34" charset="-122"/>
-              <a:cs typeface="Noto Sans JP" pitchFamily="34" charset="-120"/>
-            </a:endParaRPr>
-          </a:p>
-          <a:p>
-            <a:pPr marL="0" indent="0" algn="l">
-              <a:buNone/>
-            </a:pPr>
-            <a:r>
-              <a:t>・テストデータを3〜5件登録しておく</a:t>
-            </a:r>
-            <a:endParaRPr lang="en-US" altLang="ja-JP" sz="2000">
-              <a:solidFill>
-                <a:srgbClr val="1F2937"/>
-              </a:solidFill>
-              <a:latin typeface="Noto Sans JP" pitchFamily="34" charset="0"/>
-              <a:ea typeface="Noto Sans JP" pitchFamily="34" charset="-122"/>
-              <a:cs typeface="Noto Sans JP" pitchFamily="34" charset="-120"/>
-            </a:endParaRPr>
-          </a:p>
-          <a:p>
-            <a:pPr marL="0" indent="0" algn="l">
-              <a:buNone/>
-            </a:pPr>
-            <a:r>
-              <a:t>・件数が多いほど、出力JSONの配列構造が体感しやすい</a:t>
-            </a:r>
-            <a:endParaRPr lang="en-US"/>
-          </a:p>
-          <a:p>
-            <a:pPr marL="0" indent="0" algn="l">
-              <a:buNone/>
-            </a:pPr>
-            <a:endParaRPr lang="ja-JP" altLang="en-US" sz="2000">
-              <a:solidFill>
-                <a:srgbClr val="1F2937"/>
-              </a:solidFill>
-              <a:latin typeface="Noto Sans JP" pitchFamily="34" charset="0"/>
-              <a:ea typeface="Noto Sans JP" pitchFamily="34" charset="-122"/>
-              <a:cs typeface="Noto Sans JP" pitchFamily="34" charset="-120"/>
-            </a:endParaRPr>
-          </a:p>
-          <a:p>
-            <a:pPr marL="0" indent="0" algn="l">
-              <a:buNone/>
-            </a:pPr>
-            <a:r>
-              <a:rPr lang="ja-JP" altLang="en-US" sz="2000">
+                <a:latin typeface="Noto Sans JP"/>
+              </a:rPr>
+              <a:t>　例）条件アクションの入力 ＝「重要度」と「高」</a:t>
+            </a:r>
+          </a:p>
+          <a:p>
+            <a:r>
+              <a:rPr sz="2000">
                 <a:solidFill>
                   <a:srgbClr val="1F2937"/>
                 </a:solidFill>
-                <a:latin typeface="Noto Sans JP" pitchFamily="34" charset="0"/>
-                <a:ea typeface="Noto Sans JP" pitchFamily="34" charset="-122"/>
-                <a:cs typeface="Noto Sans JP" pitchFamily="34" charset="-120"/>
-              </a:rPr>
-              <a:t/>
-            </a:r>
-          </a:p>
-          <a:p>
-            <a:pPr marL="0" indent="0" algn="l">
-              <a:buNone/>
-            </a:pPr>
-            <a:r>
-              <a:t/>
-            </a:r>
-            <a:endParaRPr lang="en-US"/>
-          </a:p>
-          <a:p>
-            <a:pPr marL="0" indent="0" algn="l">
-              <a:buNone/>
-            </a:pPr>
-            <a:r>
-              <a:rPr lang="ja-JP" altLang="en-US"/>
-              <a:t/>
-            </a:r>
-            <a:r>
-              <a:t/>
-            </a:r>
-            <a:endParaRPr lang="en-US" altLang="ja-JP" sz="2000">
-              <a:solidFill>
-                <a:srgbClr val="1F2937"/>
-              </a:solidFill>
-              <a:latin typeface="Noto Sans JP" pitchFamily="34" charset="0"/>
-              <a:ea typeface="Noto Sans JP" pitchFamily="34" charset="-122"/>
-              <a:cs typeface="Noto Sans JP" pitchFamily="34" charset="-120"/>
-            </a:endParaRPr>
-          </a:p>
-          <a:p>
-            <a:pPr marL="0" indent="0" algn="l">
-              <a:buNone/>
-            </a:pPr>
-            <a:r>
-              <a:rPr lang="ja-JP" altLang="en-US" sz="2000">
+                <a:latin typeface="Noto Sans JP"/>
+              </a:rPr>
+              <a:t>・出力：そのアクションが次に渡す値</a:t>
+            </a:r>
+          </a:p>
+          <a:p>
+            <a:r>
+              <a:rPr sz="2000">
                 <a:solidFill>
                   <a:srgbClr val="1F2937"/>
                 </a:solidFill>
-                <a:latin typeface="Noto Sans JP" pitchFamily="34" charset="0"/>
-                <a:ea typeface="Noto Sans JP" pitchFamily="34" charset="-122"/>
-                <a:cs typeface="Noto Sans JP" pitchFamily="34" charset="-120"/>
-              </a:rPr>
-              <a:t/>
-            </a:r>
-            <a:endParaRPr lang="en-US" altLang="ja-JP" sz="2000">
-              <a:solidFill>
-                <a:srgbClr val="1F2937"/>
-              </a:solidFill>
-              <a:latin typeface="Noto Sans JP" pitchFamily="34" charset="0"/>
-              <a:ea typeface="Noto Sans JP" pitchFamily="34" charset="-122"/>
-              <a:cs typeface="Noto Sans JP" pitchFamily="34" charset="-120"/>
-            </a:endParaRPr>
-          </a:p>
-          <a:p>
-            <a:pPr marL="0" indent="0" algn="l">
-              <a:buNone/>
-            </a:pPr>
-            <a:r>
-              <a:t/>
-            </a:r>
-            <a:endParaRPr lang="ja-JP" altLang="en-US" sz="2000">
-              <a:solidFill>
-                <a:srgbClr val="1F2937"/>
-              </a:solidFill>
-              <a:latin typeface="Noto Sans JP" pitchFamily="34" charset="0"/>
-              <a:ea typeface="Noto Sans JP" pitchFamily="34" charset="-122"/>
-              <a:cs typeface="Noto Sans JP" pitchFamily="34" charset="-120"/>
-            </a:endParaRPr>
-          </a:p>
-          <a:p>
-            <a:pPr marL="0" indent="0" algn="l">
-              <a:buNone/>
-            </a:pPr>
-            <a:r>
-              <a:t/>
-            </a:r>
-            <a:endParaRPr lang="ja-JP" altLang="en-US" sz="2000">
-              <a:solidFill>
-                <a:srgbClr val="1F2937"/>
-              </a:solidFill>
-              <a:latin typeface="Noto Sans JP" pitchFamily="34" charset="0"/>
-              <a:ea typeface="Noto Sans JP" pitchFamily="34" charset="-122"/>
-              <a:cs typeface="Noto Sans JP" pitchFamily="34" charset="-120"/>
-            </a:endParaRPr>
-          </a:p>
-          <a:p>
-            <a:pPr marL="0" indent="0" algn="l">
-              <a:buNone/>
-            </a:pPr>
-            <a:endParaRPr lang="ja-JP" altLang="en-US" sz="2000" b="1" dirty="0">
-              <a:solidFill>
-                <a:srgbClr val="1F2937"/>
-              </a:solidFill>
-              <a:latin typeface="Noto Sans JP" pitchFamily="34" charset="0"/>
-              <a:ea typeface="Noto Sans JP" pitchFamily="34" charset="-122"/>
-              <a:cs typeface="Noto Sans JP" pitchFamily="34" charset="-120"/>
-            </a:endParaRPr>
-          </a:p>
-        </p:txBody>
-      </p:sp>
-      <p:pic>
-        <p:nvPicPr>
-          <p:cNvPr id="14" name="図 13" descr="No10 Expense Claim List&#10;&#10;AI 生成コンテンツは誤りを含む可能性があります。">
-            <a:extLst>
-              <a:ext uri="{FF2B5EF4-FFF2-40B4-BE49-F238E27FC236}">
-                <a16:creationId xmlns:a16="http://schemas.microsoft.com/office/drawing/2014/main" id="{C2EF7902-2BBE-0FB4-C1D1-D35830F898C7}"/>
-              </a:ext>
-            </a:extLst>
-          </p:cNvPr>
-          <p:cNvPicPr>
-            <a:picLocks noChangeAspect="1"/>
-          </p:cNvPicPr>
-          <p:nvPr/>
-        </p:nvPicPr>
-        <p:blipFill>
-          <a:blip r:embed="rId2"/>
-          <a:stretch>
-            <a:fillRect/>
-          </a:stretch>
-        </p:blipFill>
-        <p:spPr>
-          <a:xfrm>
-            <a:off x="7009653" y="1864303"/>
-            <a:ext cx="4810796" cy="3915321"/>
-          </a:xfrm>
-          <a:prstGeom prst="rect">
-            <a:avLst/>
-          </a:prstGeom>
-          <a:ln>
-            <a:noFill/>
+                <a:latin typeface="Noto Sans JP"/>
+              </a:rPr>
+              <a:t>　例）トリガーの出力 ＝ 届いたメールの件名・差出人・重要度 など</a:t>
+            </a:r>
+          </a:p>
+          <a:p>
+            <a:r>
+              <a:rPr sz="2000">
+                <a:solidFill>
+                  <a:srgbClr val="1F2937"/>
+                </a:solidFill>
+                <a:latin typeface="Noto Sans JP"/>
+              </a:rPr>
+              <a:t>・前のアクションの「出力」が、次のアクションの「入力」に</a:t>
+            </a:r>
+          </a:p>
+          <a:p>
+            <a:r>
+              <a:rPr sz="2000">
+                <a:solidFill>
+                  <a:srgbClr val="1F2937"/>
+                </a:solidFill>
+                <a:latin typeface="Noto Sans JP"/>
+              </a:rPr>
+              <a:t>　なります。この受け渡しでフローは動いています。</a:t>
+            </a:r>
+          </a:p>
+        </p:txBody>
+      </p:sp>
+      <p:sp>
+        <p:nvSpPr>
+          <p:cNvPr id="52" name="Rounded Rectangle 51"/>
+          <p:cNvSpPr/>
+          <p:nvPr/>
+        </p:nvSpPr>
+        <p:spPr>
+          <a:xfrm>
+            <a:off x="7040880" y="1737360"/>
+            <a:ext cx="4572000" cy="4114800"/>
+          </a:xfrm>
+          <a:prstGeom prst="roundRect">
+            <a:avLst/>
+          </a:prstGeom>
+          <a:solidFill>
+            <a:srgbClr val="F1F5FB"/>
+          </a:solidFill>
+          <a:ln w="19050">
+            <a:solidFill>
+              <a:srgbClr val="9CB8D8"/>
+            </a:solidFill>
           </a:ln>
-          <a:effectLst>
-            <a:outerShdw blurRad="190500" algn="tl" rotWithShape="0">
-              <a:srgbClr val="000000">
-                <a:alpha val="70000"/>
-              </a:srgbClr>
-            </a:outerShdw>
-          </a:effectLst>
-        </p:spPr>
-      </p:pic>
+          <a:effectLst/>
+        </p:spPr>
+        <p:style>
+          <a:lnRef idx="1">
+            <a:schemeClr val="accent1"/>
+          </a:lnRef>
+          <a:fillRef idx="3">
+            <a:schemeClr val="accent1"/>
+          </a:fillRef>
+          <a:effectRef idx="2">
+            <a:schemeClr val="accent1"/>
+          </a:effectRef>
+          <a:fontRef idx="minor">
+            <a:schemeClr val="lt1"/>
+          </a:fontRef>
+        </p:style>
+        <p:txBody>
+          <a:bodyPr rtlCol="0" anchor="ctr" wrap="square"/>
+          <a:lstStyle/>
+          <a:p>
+            <a:pPr algn="ctr"/>
+            <a:r>
+              <a:rPr sz="1800" b="1">
+                <a:solidFill>
+                  <a:srgbClr val="2A5E9E"/>
+                </a:solidFill>
+              </a:rPr>
+              <a:t>📷 ここにスクショを貼る</a:t>
+            </a:r>
+          </a:p>
+          <a:p>
+            <a:pPr algn="ctr"/>
+            <a:r>
+              <a:rPr sz="1400">
+                <a:solidFill>
+                  <a:srgbClr val="556677"/>
+                </a:solidFill>
+              </a:rPr>
+              <a:t>アクションを開いて
+「入力」「出力」が見えている画面</a:t>
+            </a:r>
+          </a:p>
+        </p:txBody>
+      </p:sp>
     </p:spTree>
   </p:cSld>
   <p:clrMapOvr>
@@ -3762,7 +4254,7 @@
         </p:nvSpPr>
         <p:spPr>
           <a:xfrm>
-            <a:off x="457200" y="533095"/>
+            <a:off x="371551" y="636536"/>
             <a:ext cx="7781544" cy="715061"/>
           </a:xfrm>
           <a:prstGeom prst="rect">
@@ -3779,7 +4271,7 @@
               <a:buNone/>
             </a:pPr>
             <a:r>
-              <a:rPr lang="en-US" sz="2400" b="1" dirty="0">
+              <a:rPr lang="en-US" sz="3000" b="1" dirty="0">
                 <a:solidFill>
                   <a:srgbClr val="1F2937"/>
                 </a:solidFill>
@@ -3787,9 +4279,9 @@
                 <a:ea typeface="Noto Sans JP" pitchFamily="34" charset="-122"/>
                 <a:cs typeface="Noto Sans JP" pitchFamily="34" charset="-120"/>
               </a:rPr>
-              <a:t>フロー解説 ①  実行履歴を開く</a:t>
-            </a:r>
-            <a:endParaRPr lang="en-US" sz="2400" dirty="0"/>
+              <a:t>実行履歴で入力・出力を見る</a:t>
+            </a:r>
+            <a:endParaRPr lang="en-US" sz="3200" dirty="0"/>
           </a:p>
         </p:txBody>
       </p:sp>
@@ -3874,7 +4366,7 @@
         </p:nvSpPr>
         <p:spPr>
           <a:xfrm>
-            <a:off x="305" y="1485900"/>
+            <a:off x="-37948" y="1494313"/>
             <a:ext cx="12191695" cy="4914900"/>
           </a:xfrm>
           <a:prstGeom prst="rect">
@@ -4279,8 +4771,8 @@
         </p:nvSpPr>
         <p:spPr>
           <a:xfrm>
-            <a:off x="126243" y="1705357"/>
-            <a:ext cx="7058328" cy="4260686"/>
+            <a:off x="371551" y="1664075"/>
+            <a:ext cx="6971243" cy="4428037"/>
           </a:xfrm>
           <a:prstGeom prst="rect">
             <a:avLst/>
@@ -4296,314 +4788,157 @@
               <a:buNone/>
             </a:pPr>
             <a:r>
-              <a:rPr lang="ja-JP" altLang="en-US">
+              <a:rPr lang="ja-JP" altLang="en-US" sz="2000" b="1">
                 <a:solidFill>
                   <a:srgbClr val="1F2937"/>
                 </a:solidFill>
-                <a:latin typeface="Noto Sans JP" pitchFamily="34" charset="0"/>
-                <a:ea typeface="Noto Sans JP" pitchFamily="34" charset="-122"/>
+                <a:latin typeface="+mn-ea"/>
                 <a:cs typeface="Noto Sans JP" pitchFamily="34" charset="-120"/>
               </a:rPr>
-              <a:t>🎯 目的：フローの動きをアクション単位で追えるようにする</a:t>
-            </a:r>
-            <a:endParaRPr lang="en-US" altLang="ja-JP">
+              <a:t>🎯 実行履歴を開くと、入力・出力が全部見えます</a:t>
+            </a:r>
+            <a:endParaRPr lang="en-US" altLang="ja-JP" sz="2000" b="1">
               <a:solidFill>
                 <a:srgbClr val="1F2937"/>
               </a:solidFill>
-              <a:latin typeface="Noto Sans JP" pitchFamily="34" charset="0"/>
-              <a:ea typeface="Noto Sans JP" pitchFamily="34" charset="-122"/>
+              <a:latin typeface="+mn-ea"/>
               <a:cs typeface="Noto Sans JP" pitchFamily="34" charset="-120"/>
             </a:endParaRPr>
           </a:p>
           <a:p>
-            <a:pPr marL="0" indent="0" algn="l">
-              <a:buNone/>
-            </a:pPr>
-            <a:r>
-              <a:rPr lang="ja-JP" altLang="en-US">
+            <a:r>
+              <a:rPr sz="2000" b="1">
                 <a:solidFill>
                   <a:srgbClr val="1F2937"/>
                 </a:solidFill>
-                <a:latin typeface="Noto Sans JP" pitchFamily="34" charset="0"/>
-                <a:ea typeface="Noto Sans JP" pitchFamily="34" charset="-122"/>
-                <a:cs typeface="Noto Sans JP" pitchFamily="34" charset="-120"/>
-              </a:rPr>
-              <a:t/>
-            </a:r>
-            <a:endParaRPr lang="en-US" altLang="ja-JP">
-              <a:solidFill>
-                <a:srgbClr val="1F2937"/>
-              </a:solidFill>
-              <a:latin typeface="Noto Sans JP" pitchFamily="34" charset="0"/>
-              <a:ea typeface="Noto Sans JP" pitchFamily="34" charset="-122"/>
-              <a:cs typeface="Noto Sans JP" pitchFamily="34" charset="-120"/>
-            </a:endParaRPr>
-          </a:p>
-          <a:p>
-            <a:pPr marL="0" indent="0" algn="l">
-              <a:buNone/>
-            </a:pPr>
-            <a:r>
-              <a:t>・フローを1回実行する → 実行履歴に新しい行が増える</a:t>
-            </a:r>
-            <a:endParaRPr lang="en-US" altLang="ja-JP">
-              <a:solidFill>
-                <a:srgbClr val="1F2937"/>
-              </a:solidFill>
-              <a:latin typeface="Noto Sans JP" pitchFamily="34" charset="0"/>
-              <a:ea typeface="Noto Sans JP" pitchFamily="34" charset="-122"/>
-              <a:cs typeface="Noto Sans JP" pitchFamily="34" charset="-120"/>
-            </a:endParaRPr>
-          </a:p>
-          <a:p>
-            <a:pPr marL="0" indent="0" algn="l">
-              <a:buNone/>
-            </a:pPr>
-            <a:r>
-              <a:t>・行をクリック → アクションごとのカードが縦に並ぶ</a:t>
-            </a:r>
-            <a:endParaRPr lang="en-US"/>
-          </a:p>
-          <a:p>
-            <a:pPr marL="0" indent="0" algn="l">
-              <a:buNone/>
-            </a:pPr>
-            <a:r>
-              <a:t>・✅緑カード = そのアクションは成功 / ❌赤カード = 失敗</a:t>
-            </a:r>
-            <a:endParaRPr lang="en-US" altLang="ja-JP">
-              <a:solidFill>
-                <a:srgbClr val="1F2937"/>
-              </a:solidFill>
-              <a:latin typeface="Noto Sans JP" pitchFamily="34" charset="0"/>
-              <a:ea typeface="Noto Sans JP" pitchFamily="34" charset="-122"/>
-              <a:cs typeface="Noto Sans JP" pitchFamily="34" charset="-120"/>
-            </a:endParaRPr>
-          </a:p>
-          <a:p>
-            <a:pPr marL="0" indent="0" algn="l">
-              <a:buNone/>
-            </a:pPr>
-            <a:r>
-              <a:rPr sz="1600"/>
-              <a:t>・カードを展開すると「入力」と「出力」の2タブが表示される</a:t>
-            </a:r>
-            <a:endParaRPr lang="en-US" sz="1600"/>
-          </a:p>
-          <a:p>
-            <a:pPr marL="0" indent="0" algn="l">
-              <a:buNone/>
-            </a:pPr>
-            <a:endParaRPr lang="ja-JP" altLang="en-US">
-              <a:solidFill>
-                <a:srgbClr val="1F2937"/>
-              </a:solidFill>
-              <a:latin typeface="Noto Sans JP" pitchFamily="34" charset="0"/>
-              <a:ea typeface="Noto Sans JP" pitchFamily="34" charset="-122"/>
-              <a:cs typeface="Noto Sans JP" pitchFamily="34" charset="-120"/>
-            </a:endParaRPr>
-          </a:p>
-          <a:p>
-            <a:pPr marL="0" indent="0" algn="l">
-              <a:buNone/>
-            </a:pPr>
-            <a:r>
-              <a:rPr lang="ja-JP" altLang="en-US">
+                <a:latin typeface="+mn-ea"/>
+              </a:rPr>
+              <a:t>・フローを実行 →  左メニューの「実行履歴」を開く</a:t>
+            </a:r>
+          </a:p>
+          <a:p>
+            <a:r>
+              <a:rPr sz="2000" b="1">
                 <a:solidFill>
                   <a:srgbClr val="1F2937"/>
                 </a:solidFill>
-                <a:latin typeface="Noto Sans JP" pitchFamily="34" charset="0"/>
-                <a:ea typeface="Noto Sans JP" pitchFamily="34" charset="-122"/>
-                <a:cs typeface="Noto Sans JP" pitchFamily="34" charset="-120"/>
-              </a:rPr>
-              <a:t/>
-            </a:r>
-            <a:endParaRPr lang="en-US" altLang="ja-JP">
-              <a:solidFill>
-                <a:srgbClr val="1F2937"/>
-              </a:solidFill>
-              <a:latin typeface="Noto Sans JP" pitchFamily="34" charset="0"/>
-              <a:ea typeface="Noto Sans JP" pitchFamily="34" charset="-122"/>
-              <a:cs typeface="Noto Sans JP" pitchFamily="34" charset="-120"/>
-            </a:endParaRPr>
-          </a:p>
-          <a:p>
-            <a:pPr marL="0" indent="0" algn="l">
-              <a:buNone/>
-            </a:pPr>
-            <a:r>
-              <a:rPr lang="ja-JP" altLang="en-US">
+                <a:latin typeface="+mn-ea"/>
+              </a:rPr>
+              <a:t>・見たい実行をクリック →  各アクションをクリック</a:t>
+            </a:r>
+          </a:p>
+          <a:p>
+            <a:r>
+              <a:rPr sz="2000" b="1">
                 <a:solidFill>
                   <a:srgbClr val="1F2937"/>
                 </a:solidFill>
-                <a:latin typeface="Noto Sans JP" pitchFamily="34" charset="0"/>
-                <a:ea typeface="Noto Sans JP" pitchFamily="34" charset="-122"/>
-                <a:cs typeface="Noto Sans JP" pitchFamily="34" charset="-120"/>
-              </a:rPr>
-              <a:t/>
-            </a:r>
-            <a:endParaRPr lang="en-US" altLang="ja-JP">
-              <a:solidFill>
-                <a:srgbClr val="1F2937"/>
-              </a:solidFill>
-              <a:latin typeface="Noto Sans JP" pitchFamily="34" charset="0"/>
-              <a:ea typeface="Noto Sans JP" pitchFamily="34" charset="-122"/>
-              <a:cs typeface="Noto Sans JP" pitchFamily="34" charset="-120"/>
-            </a:endParaRPr>
-          </a:p>
-          <a:p>
-            <a:pPr marL="0" indent="0" algn="l">
-              <a:buNone/>
-            </a:pPr>
-            <a:endParaRPr lang="ja-JP" altLang="en-US">
-              <a:solidFill>
-                <a:srgbClr val="1F2937"/>
-              </a:solidFill>
-              <a:latin typeface="Noto Sans JP" pitchFamily="34" charset="0"/>
-              <a:ea typeface="Noto Sans JP" pitchFamily="34" charset="-122"/>
-              <a:cs typeface="Noto Sans JP" pitchFamily="34" charset="-120"/>
-            </a:endParaRPr>
-          </a:p>
-          <a:p>
-            <a:pPr marL="0" indent="0" algn="l">
-              <a:buNone/>
-            </a:pPr>
-            <a:r>
-              <a:t/>
-            </a:r>
-            <a:endParaRPr lang="en-US" altLang="ja-JP">
-              <a:solidFill>
-                <a:srgbClr val="1F2937"/>
-              </a:solidFill>
-              <a:latin typeface="Noto Sans JP" pitchFamily="34" charset="0"/>
-              <a:ea typeface="Noto Sans JP" pitchFamily="34" charset="-122"/>
-              <a:cs typeface="Noto Sans JP" pitchFamily="34" charset="-120"/>
-            </a:endParaRPr>
-          </a:p>
-          <a:p>
-            <a:pPr marL="0" indent="0" algn="l">
-              <a:buNone/>
-            </a:pPr>
-            <a:endParaRPr lang="en-US" altLang="ja-JP" b="1">
-              <a:solidFill>
-                <a:srgbClr val="1F2937"/>
-              </a:solidFill>
-              <a:latin typeface="Noto Sans JP" pitchFamily="34" charset="0"/>
-              <a:ea typeface="Noto Sans JP" pitchFamily="34" charset="-122"/>
-              <a:cs typeface="Noto Sans JP" pitchFamily="34" charset="-120"/>
-            </a:endParaRPr>
-          </a:p>
-          <a:p>
-            <a:pPr marL="0" indent="0" algn="l">
-              <a:buNone/>
-            </a:pPr>
-            <a:endParaRPr lang="ja-JP" altLang="en-US" b="1">
-              <a:solidFill>
-                <a:srgbClr val="1F2937"/>
-              </a:solidFill>
-              <a:latin typeface="Noto Sans JP" pitchFamily="34" charset="0"/>
-              <a:ea typeface="Noto Sans JP" pitchFamily="34" charset="-122"/>
-              <a:cs typeface="Noto Sans JP" pitchFamily="34" charset="-120"/>
-            </a:endParaRPr>
-          </a:p>
-          <a:p>
-            <a:pPr marL="0" indent="0" algn="l">
-              <a:buNone/>
-            </a:pPr>
-            <a:endParaRPr lang="ja-JP" altLang="en-US" b="1">
-              <a:solidFill>
-                <a:srgbClr val="1F2937"/>
-              </a:solidFill>
-              <a:latin typeface="Noto Sans JP" pitchFamily="34" charset="0"/>
-              <a:ea typeface="Noto Sans JP" pitchFamily="34" charset="-122"/>
-              <a:cs typeface="Noto Sans JP" pitchFamily="34" charset="-120"/>
-            </a:endParaRPr>
-          </a:p>
-          <a:p>
-            <a:pPr marL="0" indent="0" algn="l">
-              <a:buNone/>
-            </a:pPr>
-            <a:endParaRPr lang="ja-JP" altLang="en-US" b="1" dirty="0">
-              <a:solidFill>
-                <a:srgbClr val="1F2937"/>
-              </a:solidFill>
-              <a:latin typeface="Noto Sans JP" pitchFamily="34" charset="0"/>
-              <a:ea typeface="Noto Sans JP" pitchFamily="34" charset="-122"/>
-              <a:cs typeface="Noto Sans JP" pitchFamily="34" charset="-120"/>
-            </a:endParaRPr>
-          </a:p>
-        </p:txBody>
-      </p:sp>
-      <p:pic>
-        <p:nvPicPr>
-          <p:cNvPr id="11" name="図 10" descr="The image depicts a user interface with two sections, each containing a text field for inputting responses, with instructions to retrieve and summarize application details.&#10;&#10;AI 生成コンテンツは誤りを含む可能性があります。">
-            <a:extLst>
-              <a:ext uri="{FF2B5EF4-FFF2-40B4-BE49-F238E27FC236}">
-                <a16:creationId xmlns:a16="http://schemas.microsoft.com/office/drawing/2014/main" id="{E3F313C9-ADB6-6A37-504D-0DE5F3B6BA73}"/>
-              </a:ext>
-            </a:extLst>
-          </p:cNvPr>
-          <p:cNvPicPr>
-            <a:picLocks noChangeAspect="1"/>
-          </p:cNvPicPr>
-          <p:nvPr/>
-        </p:nvPicPr>
-        <p:blipFill>
-          <a:blip r:embed="rId2"/>
-          <a:stretch>
-            <a:fillRect/>
-          </a:stretch>
-        </p:blipFill>
-        <p:spPr>
-          <a:xfrm>
-            <a:off x="6959252" y="674831"/>
-            <a:ext cx="3488397" cy="5357469"/>
-          </a:xfrm>
-          <a:prstGeom prst="rect">
-            <a:avLst/>
-          </a:prstGeom>
-          <a:ln>
-            <a:noFill/>
+                <a:latin typeface="+mn-ea"/>
+              </a:rPr>
+              <a:t>・そのアクションの「入力」と「出力」が表示される</a:t>
+            </a:r>
+          </a:p>
+          <a:p>
+            <a:r>
+              <a:rPr sz="2000" b="1">
+                <a:solidFill>
+                  <a:srgbClr val="1F2937"/>
+                </a:solidFill>
+                <a:latin typeface="+mn-ea"/>
+              </a:rPr>
+              <a:t>　例）トリガーの出力に、重要度の値 "High" が入っている</a:t>
+            </a:r>
+          </a:p>
+          <a:p>
+            <a:r>
+              <a:rPr sz="2000" b="1">
+                <a:solidFill>
+                  <a:srgbClr val="1F2937"/>
+                </a:solidFill>
+                <a:latin typeface="+mn-ea"/>
+              </a:rPr>
+              <a:t>・思ったとおりに動かないときは、まずここを見る。</a:t>
+            </a:r>
+          </a:p>
+          <a:p>
+            <a:r>
+              <a:rPr sz="2000" b="1">
+                <a:solidFill>
+                  <a:srgbClr val="1F2937"/>
+                </a:solidFill>
+                <a:latin typeface="+mn-ea"/>
+              </a:rPr>
+              <a:t>　食い違っている値が、必ずここに写っています。</a:t>
+            </a:r>
+          </a:p>
+        </p:txBody>
+      </p:sp>
+      <p:sp>
+        <p:nvSpPr>
+          <p:cNvPr id="52" name="Rounded Rectangle 51"/>
+          <p:cNvSpPr/>
+          <p:nvPr/>
+        </p:nvSpPr>
+        <p:spPr>
+          <a:xfrm>
+            <a:off x="7040880" y="1737360"/>
+            <a:ext cx="4572000" cy="4114800"/>
+          </a:xfrm>
+          <a:prstGeom prst="roundRect">
+            <a:avLst/>
+          </a:prstGeom>
+          <a:solidFill>
+            <a:srgbClr val="F1F5FB"/>
+          </a:solidFill>
+          <a:ln w="19050">
+            <a:solidFill>
+              <a:srgbClr val="9CB8D8"/>
+            </a:solidFill>
           </a:ln>
-          <a:effectLst>
-            <a:outerShdw blurRad="190500" algn="tl" rotWithShape="0">
-              <a:srgbClr val="000000">
-                <a:alpha val="70000"/>
-              </a:srgbClr>
-            </a:outerShdw>
-          </a:effectLst>
-        </p:spPr>
-      </p:pic>
-      <p:pic>
-        <p:nvPicPr>
-          <p:cNvPr id="14" name="図 13" descr="A child in green clothing is depicted sitting on the floor, relaxing with a laptop open and on, while lying down.&#10;&#10;AI 生成コンテンツは誤りを含む可能性があります。">
-            <a:extLst>
-              <a:ext uri="{FF2B5EF4-FFF2-40B4-BE49-F238E27FC236}">
-                <a16:creationId xmlns:a16="http://schemas.microsoft.com/office/drawing/2014/main" id="{49EE4930-6C21-6EBF-82EA-02FB98532560}"/>
-              </a:ext>
-            </a:extLst>
-          </p:cNvPr>
-          <p:cNvPicPr>
-            <a:picLocks noChangeAspect="1"/>
-          </p:cNvPicPr>
-          <p:nvPr/>
-        </p:nvPicPr>
-        <p:blipFill>
-          <a:blip r:embed="rId3"/>
-          <a:stretch>
-            <a:fillRect/>
-          </a:stretch>
-        </p:blipFill>
-        <p:spPr>
-          <a:xfrm>
-            <a:off x="9869707" y="3353565"/>
-            <a:ext cx="2106190" cy="1441570"/>
-          </a:xfrm>
-          <a:prstGeom prst="rect">
-            <a:avLst/>
-          </a:prstGeom>
-        </p:spPr>
-      </p:pic>
+          <a:effectLst/>
+        </p:spPr>
+        <p:style>
+          <a:lnRef idx="1">
+            <a:schemeClr val="accent1"/>
+          </a:lnRef>
+          <a:fillRef idx="3">
+            <a:schemeClr val="accent1"/>
+          </a:fillRef>
+          <a:effectRef idx="2">
+            <a:schemeClr val="accent1"/>
+          </a:effectRef>
+          <a:fontRef idx="minor">
+            <a:schemeClr val="lt1"/>
+          </a:fontRef>
+        </p:style>
+        <p:txBody>
+          <a:bodyPr rtlCol="0" anchor="ctr" wrap="square"/>
+          <a:lstStyle/>
+          <a:p>
+            <a:pPr algn="ctr"/>
+            <a:r>
+              <a:rPr sz="1800" b="1">
+                <a:solidFill>
+                  <a:srgbClr val="2A5E9E"/>
+                </a:solidFill>
+              </a:rPr>
+              <a:t>📷 ここにスクショを貼る</a:t>
+            </a:r>
+          </a:p>
+          <a:p>
+            <a:pPr algn="ctr"/>
+            <a:r>
+              <a:rPr sz="1400">
+                <a:solidFill>
+                  <a:srgbClr val="556677"/>
+                </a:solidFill>
+              </a:rPr>
+              <a:t>実行履歴で トリガーの出力
+が見えている画面</a:t>
+            </a:r>
+          </a:p>
+        </p:txBody>
+      </p:sp>
     </p:spTree>
   </p:cSld>
   <p:clrMapOvr>
@@ -4813,7 +5148,7 @@
         <p:spPr>
           <a:xfrm>
             <a:off x="457200" y="533095"/>
-            <a:ext cx="11038114" cy="715061"/>
+            <a:ext cx="7781544" cy="715061"/>
           </a:xfrm>
           <a:prstGeom prst="rect">
             <a:avLst/>
@@ -4829,7 +5164,7 @@
               <a:buNone/>
             </a:pPr>
             <a:r>
-              <a:rPr lang="en-US" sz="3200" b="1" dirty="0">
+              <a:rPr lang="en-US" sz="3000" b="1" dirty="0">
                 <a:solidFill>
                   <a:srgbClr val="1F2937"/>
                 </a:solidFill>
@@ -4837,9 +5172,9 @@
                 <a:ea typeface="Noto Sans JP" pitchFamily="34" charset="-122"/>
                 <a:cs typeface="Noto Sans JP" pitchFamily="34" charset="-120"/>
               </a:rPr>
-              <a:t>フロー解説 ②  出力JSONを読む</a:t>
-            </a:r>
-            <a:endParaRPr lang="en-US" sz="3200" dirty="0"/>
+              <a:t>フロー解説 ①  トリガーと条件を置く</a:t>
+            </a:r>
+            <a:endParaRPr lang="en-US" sz="2400" dirty="0"/>
           </a:p>
         </p:txBody>
       </p:sp>
@@ -5329,8 +5664,8 @@
         </p:nvSpPr>
         <p:spPr>
           <a:xfrm>
-            <a:off x="265580" y="2195490"/>
-            <a:ext cx="7380546" cy="3947047"/>
+            <a:off x="126243" y="1705357"/>
+            <a:ext cx="7058328" cy="4260686"/>
           </a:xfrm>
           <a:prstGeom prst="rect">
             <a:avLst/>
@@ -5354,7 +5689,7 @@
                 <a:ea typeface="Noto Sans JP" pitchFamily="34" charset="-122"/>
                 <a:cs typeface="Noto Sans JP" pitchFamily="34" charset="-120"/>
               </a:rPr>
-              <a:t>🎯 目的：後続のアクションで何を取り出せるかが分かるようになる</a:t>
+              <a:t>🎯 目的：メールが届いたら重要度で</a:t>
             </a:r>
             <a:endParaRPr lang="en-US" altLang="ja-JP">
               <a:solidFill>
@@ -5366,258 +5701,139 @@
             </a:endParaRPr>
           </a:p>
           <a:p>
-            <a:pPr marL="0" indent="0" algn="l">
-              <a:buNone/>
-            </a:pPr>
-            <a:endParaRPr lang="en-US" altLang="ja-JP">
-              <a:solidFill>
-                <a:srgbClr val="1F2937"/>
-              </a:solidFill>
-              <a:latin typeface="Noto Sans JP" pitchFamily="34" charset="0"/>
-              <a:ea typeface="Noto Sans JP" pitchFamily="34" charset="-122"/>
-              <a:cs typeface="Noto Sans JP" pitchFamily="34" charset="-120"/>
-            </a:endParaRPr>
-          </a:p>
-          <a:p>
-            <a:pPr marL="0" indent="0" algn="l">
-              <a:buNone/>
-            </a:pPr>
-            <a:r>
-              <a:t>・「出力」タブを開くとJSONが表示される</a:t>
-            </a:r>
-            <a:endParaRPr lang="en-US" altLang="ja-JP">
-              <a:solidFill>
-                <a:srgbClr val="1F2937"/>
-              </a:solidFill>
-              <a:latin typeface="Noto Sans JP" pitchFamily="34" charset="0"/>
-              <a:ea typeface="Noto Sans JP" pitchFamily="34" charset="-122"/>
-              <a:cs typeface="Noto Sans JP" pitchFamily="34" charset="-120"/>
-            </a:endParaRPr>
-          </a:p>
-          <a:p>
-            <a:pPr marL="0" indent="0" algn="l">
-              <a:buNone/>
-            </a:pPr>
-            <a:r>
-              <a:t>・SharePoint「複数の項目の取得」の出力は body.value が【配列】</a:t>
-            </a:r>
-            <a:endParaRPr lang="ja-JP" altLang="en-US">
-              <a:solidFill>
-                <a:srgbClr val="1F2937"/>
-              </a:solidFill>
-              <a:latin typeface="Noto Sans JP" pitchFamily="34" charset="0"/>
-              <a:ea typeface="Noto Sans JP" pitchFamily="34" charset="-122"/>
-              <a:cs typeface="Noto Sans JP" pitchFamily="34" charset="-120"/>
-            </a:endParaRPr>
-          </a:p>
-          <a:p>
-            <a:pPr marL="0" indent="0" algn="l">
-              <a:buNone/>
-            </a:pPr>
-            <a:r>
-              <a:rPr lang="ja-JP" altLang="en-US">
+            <a:r>
+              <a:rPr>
                 <a:solidFill>
                   <a:srgbClr val="1F2937"/>
                 </a:solidFill>
-                <a:latin typeface="Noto Sans JP" pitchFamily="34" charset="0"/>
-                <a:ea typeface="Noto Sans JP" pitchFamily="34" charset="-122"/>
-                <a:cs typeface="Noto Sans JP" pitchFamily="34" charset="-120"/>
-              </a:rPr>
-              <a:t>・配列の中身は { Title, Detail, Status, ID, ... } の【オブジェクト】が複数</a:t>
-            </a:r>
-            <a:endParaRPr lang="en-US" altLang="ja-JP">
-              <a:solidFill>
-                <a:srgbClr val="1F2937"/>
-              </a:solidFill>
-              <a:latin typeface="Noto Sans JP" pitchFamily="34" charset="0"/>
-              <a:ea typeface="Noto Sans JP" pitchFamily="34" charset="-122"/>
-              <a:cs typeface="Noto Sans JP" pitchFamily="34" charset="-120"/>
-            </a:endParaRPr>
-          </a:p>
-          <a:p>
-            <a:pPr marL="0" indent="0" algn="l">
-              <a:buNone/>
-            </a:pPr>
-            <a:r>
-              <a:t>・「[ ]」が配列、「{ }」がオブジェクト。インデントで階層が分かる</a:t>
-            </a:r>
-            <a:endParaRPr lang="ja-JP" altLang="en-US">
-              <a:solidFill>
-                <a:srgbClr val="1F2937"/>
-              </a:solidFill>
-              <a:latin typeface="Noto Sans JP" pitchFamily="34" charset="0"/>
-              <a:ea typeface="Noto Sans JP" pitchFamily="34" charset="-122"/>
-              <a:cs typeface="Noto Sans JP" pitchFamily="34" charset="-120"/>
-            </a:endParaRPr>
-          </a:p>
-          <a:p>
-            <a:pPr marL="0" indent="0" algn="l">
-              <a:buNone/>
-            </a:pPr>
-            <a:r>
-              <a:t>・キー名（"Title" など）が動的コンテンツや式で使うパスになる</a:t>
-            </a:r>
-            <a:endParaRPr lang="en-US" altLang="ja-JP">
-              <a:solidFill>
-                <a:srgbClr val="1F2937"/>
-              </a:solidFill>
-              <a:latin typeface="Noto Sans JP" pitchFamily="34" charset="0"/>
-              <a:ea typeface="Noto Sans JP" pitchFamily="34" charset="-122"/>
-              <a:cs typeface="Noto Sans JP" pitchFamily="34" charset="-120"/>
-            </a:endParaRPr>
-          </a:p>
-          <a:p>
-            <a:pPr marL="0" indent="0" algn="l">
-              <a:buNone/>
-            </a:pPr>
-            <a:r>
-              <a:rPr lang="ja-JP" altLang="en-US">
+                <a:latin typeface="Noto Sans JP"/>
+              </a:rPr>
+              <a:t>　仕分けるフローの形を作る</a:t>
+            </a:r>
+          </a:p>
+          <a:p>
+            <a:r>
+              <a:rPr>
                 <a:solidFill>
                   <a:srgbClr val="1F2937"/>
                 </a:solidFill>
-                <a:latin typeface="Noto Sans JP" pitchFamily="34" charset="0"/>
-                <a:ea typeface="Noto Sans JP" pitchFamily="34" charset="-122"/>
-                <a:cs typeface="Noto Sans JP" pitchFamily="34" charset="-120"/>
-              </a:rPr>
-              <a:t/>
-            </a:r>
-            <a:endParaRPr lang="en-US" altLang="ja-JP">
-              <a:solidFill>
-                <a:srgbClr val="1F2937"/>
-              </a:solidFill>
-              <a:latin typeface="Noto Sans JP" pitchFamily="34" charset="0"/>
-              <a:ea typeface="Noto Sans JP" pitchFamily="34" charset="-122"/>
-              <a:cs typeface="Noto Sans JP" pitchFamily="34" charset="-120"/>
-            </a:endParaRPr>
-          </a:p>
-          <a:p>
-            <a:pPr marL="0" indent="0" algn="l">
-              <a:buNone/>
-            </a:pPr>
-            <a:endParaRPr lang="ja-JP" altLang="en-US" b="1">
-              <a:solidFill>
-                <a:srgbClr val="1F2937"/>
-              </a:solidFill>
-              <a:latin typeface="Noto Sans JP" pitchFamily="34" charset="0"/>
-              <a:ea typeface="Noto Sans JP" pitchFamily="34" charset="-122"/>
-              <a:cs typeface="Noto Sans JP" pitchFamily="34" charset="-120"/>
-            </a:endParaRPr>
-          </a:p>
-          <a:p>
-            <a:pPr marL="0" indent="0" algn="l">
-              <a:buNone/>
-            </a:pPr>
-            <a:endParaRPr lang="ja-JP" altLang="en-US" b="1" dirty="0">
-              <a:solidFill>
-                <a:srgbClr val="1F2937"/>
-              </a:solidFill>
-              <a:latin typeface="Noto Sans JP" pitchFamily="34" charset="0"/>
-              <a:ea typeface="Noto Sans JP" pitchFamily="34" charset="-122"/>
-              <a:cs typeface="Noto Sans JP" pitchFamily="34" charset="-120"/>
-            </a:endParaRPr>
-          </a:p>
-        </p:txBody>
-      </p:sp>
-      <p:pic>
-        <p:nvPicPr>
-          <p:cNvPr id="11" name="図 10" descr="Submitted&#10;&#10;AI 生成コンテンツは誤りを含む可能性があります。">
-            <a:extLst>
-              <a:ext uri="{FF2B5EF4-FFF2-40B4-BE49-F238E27FC236}">
-                <a16:creationId xmlns:a16="http://schemas.microsoft.com/office/drawing/2014/main" id="{0DD0D0D2-FD45-AE74-8E14-81FC75DD9F8F}"/>
-              </a:ext>
-            </a:extLst>
-          </p:cNvPr>
-          <p:cNvPicPr>
-            <a:picLocks noChangeAspect="1"/>
-          </p:cNvPicPr>
-          <p:nvPr/>
-        </p:nvPicPr>
-        <p:blipFill>
-          <a:blip r:embed="rId2"/>
-          <a:stretch>
-            <a:fillRect/>
-          </a:stretch>
-        </p:blipFill>
-        <p:spPr>
-          <a:xfrm>
-            <a:off x="7007936" y="1794289"/>
-            <a:ext cx="4115374" cy="4210638"/>
-          </a:xfrm>
-          <a:prstGeom prst="rect">
-            <a:avLst/>
-          </a:prstGeom>
-          <a:ln>
-            <a:noFill/>
+                <a:latin typeface="Noto Sans JP"/>
+              </a:rPr>
+              <a:t>・トリガー「新しいメールが届いたとき」を置く</a:t>
+            </a:r>
+          </a:p>
+          <a:p>
+            <a:r>
+              <a:rPr>
+                <a:solidFill>
+                  <a:srgbClr val="1F2937"/>
+                </a:solidFill>
+                <a:latin typeface="Noto Sans JP"/>
+              </a:rPr>
+              <a:t>・「条件」アクションを追加する</a:t>
+            </a:r>
+          </a:p>
+          <a:p>
+            <a:r>
+              <a:rPr>
+                <a:solidFill>
+                  <a:srgbClr val="1F2937"/>
+                </a:solidFill>
+                <a:latin typeface="Noto Sans JP"/>
+              </a:rPr>
+              <a:t>・条件：メールの重要度 が次の値に等しい「高」</a:t>
+            </a:r>
+          </a:p>
+          <a:p>
+            <a:r>
+              <a:rPr>
+                <a:solidFill>
+                  <a:srgbClr val="1F2937"/>
+                </a:solidFill>
+                <a:latin typeface="Noto Sans JP"/>
+              </a:rPr>
+              <a:t>　（まずは、わざと日本語の「高」と書きます）</a:t>
+            </a:r>
+          </a:p>
+          <a:p>
+            <a:r>
+              <a:rPr>
+                <a:solidFill>
+                  <a:srgbClr val="1F2937"/>
+                </a:solidFill>
+                <a:latin typeface="Noto Sans JP"/>
+              </a:rPr>
+              <a:t>・はい／いいえ それぞれに「作成」でメッセージを置く</a:t>
+            </a:r>
+          </a:p>
+        </p:txBody>
+      </p:sp>
+      <p:sp>
+        <p:nvSpPr>
+          <p:cNvPr id="52" name="Rounded Rectangle 51"/>
+          <p:cNvSpPr/>
+          <p:nvPr/>
+        </p:nvSpPr>
+        <p:spPr>
+          <a:xfrm>
+            <a:off x="7040880" y="1737360"/>
+            <a:ext cx="4572000" cy="4114800"/>
+          </a:xfrm>
+          <a:prstGeom prst="roundRect">
+            <a:avLst/>
+          </a:prstGeom>
+          <a:solidFill>
+            <a:srgbClr val="F1F5FB"/>
+          </a:solidFill>
+          <a:ln w="19050">
+            <a:solidFill>
+              <a:srgbClr val="9CB8D8"/>
+            </a:solidFill>
           </a:ln>
-          <a:effectLst>
-            <a:outerShdw blurRad="190500" algn="tl" rotWithShape="0">
-              <a:srgbClr val="000000">
-                <a:alpha val="70000"/>
-              </a:srgbClr>
-            </a:outerShdw>
-          </a:effectLst>
-        </p:spPr>
-      </p:pic>
-      <p:pic>
-        <p:nvPicPr>
-          <p:cNvPr id="14" name="図 13" descr="A hand holding a document with Japanese characters and a form with checkboxes and numbers.&#10;&#10;AI 生成コンテンツは誤りを含む可能性があります。">
-            <a:extLst>
-              <a:ext uri="{FF2B5EF4-FFF2-40B4-BE49-F238E27FC236}">
-                <a16:creationId xmlns:a16="http://schemas.microsoft.com/office/drawing/2014/main" id="{59479EB1-0E7C-C3B6-9DC4-512C3E02CC01}"/>
-              </a:ext>
-            </a:extLst>
-          </p:cNvPr>
-          <p:cNvPicPr>
-            <a:picLocks noChangeAspect="1"/>
-          </p:cNvPicPr>
-          <p:nvPr/>
-        </p:nvPicPr>
-        <p:blipFill>
-          <a:blip r:embed="rId3"/>
-          <a:stretch>
-            <a:fillRect/>
-          </a:stretch>
-        </p:blipFill>
-        <p:spPr>
-          <a:xfrm>
-            <a:off x="10490911" y="3675016"/>
-            <a:ext cx="1639567" cy="1490184"/>
-          </a:xfrm>
-          <a:prstGeom prst="rect">
-            <a:avLst/>
-          </a:prstGeom>
-        </p:spPr>
-      </p:pic>
-      <p:pic>
-        <p:nvPicPr>
-          <p:cNvPr id="16" name="図 15" descr="The image depicts a child in a blue shirt, sitting at a desk, looking confused and holding a smartphone, with an open email notification and a question mark above his head.&#10;&#10;AI 生成コンテンツは誤りを含む可能性があります。">
-            <a:extLst>
-              <a:ext uri="{FF2B5EF4-FFF2-40B4-BE49-F238E27FC236}">
-                <a16:creationId xmlns:a16="http://schemas.microsoft.com/office/drawing/2014/main" id="{F06833EB-62C0-688B-7E01-15829AD707AB}"/>
-              </a:ext>
-            </a:extLst>
-          </p:cNvPr>
-          <p:cNvPicPr>
-            <a:picLocks noChangeAspect="1"/>
-          </p:cNvPicPr>
-          <p:nvPr/>
-        </p:nvPicPr>
-        <p:blipFill>
-          <a:blip r:embed="rId4"/>
-          <a:stretch>
-            <a:fillRect/>
-          </a:stretch>
-        </p:blipFill>
-        <p:spPr>
-          <a:xfrm>
-            <a:off x="10494656" y="4994690"/>
-            <a:ext cx="1490185" cy="1490185"/>
-          </a:xfrm>
-          <a:prstGeom prst="rect">
-            <a:avLst/>
-          </a:prstGeom>
-        </p:spPr>
-      </p:pic>
+          <a:effectLst/>
+        </p:spPr>
+        <p:style>
+          <a:lnRef idx="1">
+            <a:schemeClr val="accent1"/>
+          </a:lnRef>
+          <a:fillRef idx="3">
+            <a:schemeClr val="accent1"/>
+          </a:fillRef>
+          <a:effectRef idx="2">
+            <a:schemeClr val="accent1"/>
+          </a:effectRef>
+          <a:fontRef idx="minor">
+            <a:schemeClr val="lt1"/>
+          </a:fontRef>
+        </p:style>
+        <p:txBody>
+          <a:bodyPr rtlCol="0" anchor="ctr" wrap="square"/>
+          <a:lstStyle/>
+          <a:p>
+            <a:pPr algn="ctr"/>
+            <a:r>
+              <a:rPr sz="1800" b="1">
+                <a:solidFill>
+                  <a:srgbClr val="2A5E9E"/>
+                </a:solidFill>
+              </a:rPr>
+              <a:t>📷 ここにスクショを貼る</a:t>
+            </a:r>
+          </a:p>
+          <a:p>
+            <a:pPr algn="ctr"/>
+            <a:r>
+              <a:rPr sz="1400">
+                <a:solidFill>
+                  <a:srgbClr val="556677"/>
+                </a:solidFill>
+              </a:rPr>
+              <a:t>完成したフロー全体
+（トリガー＋条件＋作成）</a:t>
+            </a:r>
+          </a:p>
+        </p:txBody>
+      </p:sp>
     </p:spTree>
   </p:cSld>
   <p:clrMapOvr>
@@ -5826,8 +6042,8 @@
         </p:nvSpPr>
         <p:spPr>
           <a:xfrm>
-            <a:off x="457199" y="533095"/>
-            <a:ext cx="10837817" cy="715061"/>
+            <a:off x="457200" y="533095"/>
+            <a:ext cx="11038114" cy="715061"/>
           </a:xfrm>
           <a:prstGeom prst="rect">
             <a:avLst/>
@@ -5843,7 +6059,7 @@
               <a:buNone/>
             </a:pPr>
             <a:r>
-              <a:rPr lang="en-US" sz="2800" b="1" dirty="0">
+              <a:rPr lang="en-US" sz="3000" b="1" dirty="0">
                 <a:solidFill>
                   <a:srgbClr val="1F2937"/>
                 </a:solidFill>
@@ -5851,9 +6067,9 @@
                 <a:ea typeface="Noto Sans JP" pitchFamily="34" charset="-122"/>
                 <a:cs typeface="Noto Sans JP" pitchFamily="34" charset="-120"/>
               </a:rPr>
-              <a:t>フロー解説 ③  式で値を取り出す</a:t>
-            </a:r>
-            <a:endParaRPr lang="en-US" sz="2800" dirty="0"/>
+              <a:t>フロー解説 ②  わざと失敗させてみる</a:t>
+            </a:r>
+            <a:endParaRPr lang="en-US" sz="3200" dirty="0"/>
           </a:p>
         </p:txBody>
       </p:sp>
@@ -5938,8 +6154,8 @@
         </p:nvSpPr>
         <p:spPr>
           <a:xfrm>
-            <a:off x="0" y="1523390"/>
-            <a:ext cx="11975897" cy="4914900"/>
+            <a:off x="305" y="1485900"/>
+            <a:ext cx="12191695" cy="4914900"/>
           </a:xfrm>
           <a:prstGeom prst="rect">
             <a:avLst/>
@@ -6343,8 +6559,8 @@
         </p:nvSpPr>
         <p:spPr>
           <a:xfrm>
-            <a:off x="94417" y="2164046"/>
-            <a:ext cx="6915983" cy="3947047"/>
+            <a:off x="207159" y="1948175"/>
+            <a:ext cx="7380546" cy="3947047"/>
           </a:xfrm>
           <a:prstGeom prst="rect">
             <a:avLst/>
@@ -6360,7 +6576,7 @@
               <a:buNone/>
             </a:pPr>
             <a:r>
-              <a:rPr lang="ja-JP" altLang="en-US">
+              <a:rPr lang="ja-JP" altLang="en-US" sz="2000">
                 <a:solidFill>
                   <a:srgbClr val="1F2937"/>
                 </a:solidFill>
@@ -6368,9 +6584,9 @@
                 <a:ea typeface="Noto Sans JP" pitchFamily="34" charset="-122"/>
                 <a:cs typeface="Noto Sans JP" pitchFamily="34" charset="-120"/>
               </a:rPr>
-              <a:t>🎯 目的：動的コンテンツに出てこない値も、自分で書いて取り出せるようにする</a:t>
-            </a:r>
-            <a:endParaRPr lang="en-US" altLang="ja-JP">
+              <a:t>🎯 目的：思いどおりに動かない場面を体験する</a:t>
+            </a:r>
+            <a:endParaRPr lang="en-US" altLang="ja-JP" sz="2000">
               <a:solidFill>
                 <a:srgbClr val="1F2937"/>
               </a:solidFill>
@@ -6380,293 +6596,128 @@
             </a:endParaRPr>
           </a:p>
           <a:p>
-            <a:pPr marL="0" indent="0" algn="l">
-              <a:buNone/>
-            </a:pPr>
-            <a:r>
-              <a:rPr lang="ja-JP" altLang="en-US">
+            <a:r>
+              <a:rPr sz="2000">
                 <a:solidFill>
                   <a:srgbClr val="1F2937"/>
                 </a:solidFill>
-                <a:latin typeface="Noto Sans JP" pitchFamily="34" charset="0"/>
-                <a:ea typeface="Noto Sans JP" pitchFamily="34" charset="-122"/>
-                <a:cs typeface="Noto Sans JP" pitchFamily="34" charset="-120"/>
-              </a:rPr>
-              <a:t/>
-            </a:r>
-            <a:endParaRPr lang="en-US" altLang="ja-JP">
-              <a:solidFill>
-                <a:srgbClr val="1F2937"/>
-              </a:solidFill>
-              <a:latin typeface="Noto Sans JP" pitchFamily="34" charset="0"/>
-              <a:ea typeface="Noto Sans JP" pitchFamily="34" charset="-122"/>
-              <a:cs typeface="Noto Sans JP" pitchFamily="34" charset="-120"/>
-            </a:endParaRPr>
-          </a:p>
-          <a:p>
-            <a:pPr marL="0" indent="0" algn="l">
-              <a:buNone/>
-            </a:pPr>
-            <a:r>
-              <a:t>・基本パス: outputs('複数の項目の取得')?['body/value']</a:t>
-            </a:r>
-            <a:endParaRPr lang="en-US" altLang="ja-JP">
-              <a:solidFill>
-                <a:srgbClr val="1F2937"/>
-              </a:solidFill>
-              <a:latin typeface="Noto Sans JP" pitchFamily="34" charset="0"/>
-              <a:ea typeface="Noto Sans JP" pitchFamily="34" charset="-122"/>
-              <a:cs typeface="Noto Sans JP" pitchFamily="34" charset="-120"/>
-            </a:endParaRPr>
-          </a:p>
-          <a:p>
-            <a:pPr marL="0" indent="0" algn="l">
-              <a:buNone/>
-            </a:pPr>
-            <a:r>
-              <a:t>・1件目を取り出す: first(...)?['Title']</a:t>
-            </a:r>
-            <a:endParaRPr lang="en-US" altLang="ja-JP">
-              <a:solidFill>
-                <a:srgbClr val="1F2937"/>
-              </a:solidFill>
-              <a:latin typeface="Noto Sans JP" pitchFamily="34" charset="0"/>
-              <a:ea typeface="Noto Sans JP" pitchFamily="34" charset="-122"/>
-              <a:cs typeface="Noto Sans JP" pitchFamily="34" charset="-120"/>
-            </a:endParaRPr>
-          </a:p>
-          <a:p>
-            <a:pPr marL="0" indent="0" algn="l">
-              <a:buNone/>
-            </a:pPr>
-            <a:r>
-              <a:t>・件数を数える: length(...)</a:t>
-            </a:r>
-            <a:endParaRPr lang="en-US"/>
-          </a:p>
-          <a:p>
-            <a:pPr marL="0" indent="0" algn="l">
-              <a:buNone/>
-            </a:pPr>
-            <a:r>
-              <a:t>・[0] でN件目を指定（[0]=1件目、[1]=2件目）</a:t>
-            </a:r>
-            <a:endParaRPr lang="en-US"/>
-          </a:p>
-          <a:p>
-            <a:pPr marL="0" indent="0" algn="l">
-              <a:buNone/>
-            </a:pPr>
-            <a:r>
-              <a:t>・取り出した値は「作成（Compose）」に入れておくと、後続が動的コンテンツで使える</a:t>
-            </a:r>
-            <a:endParaRPr lang="en-US"/>
-          </a:p>
-          <a:p>
-            <a:pPr marL="0" indent="0" algn="l">
-              <a:buNone/>
-            </a:pPr>
-            <a:endParaRPr lang="ja-JP" altLang="en-US">
-              <a:solidFill>
-                <a:srgbClr val="1F2937"/>
-              </a:solidFill>
-              <a:latin typeface="Noto Sans JP" pitchFamily="34" charset="0"/>
-              <a:ea typeface="Noto Sans JP" pitchFamily="34" charset="-122"/>
-              <a:cs typeface="Noto Sans JP" pitchFamily="34" charset="-120"/>
-            </a:endParaRPr>
-          </a:p>
-          <a:p>
-            <a:pPr marL="0" indent="0" algn="l">
-              <a:buNone/>
-            </a:pPr>
-            <a:r>
-              <a:t/>
-            </a:r>
-            <a:endParaRPr lang="en-US"/>
-          </a:p>
-          <a:p>
-            <a:pPr marL="0" indent="0" algn="l">
-              <a:buNone/>
-            </a:pPr>
-            <a:endParaRPr lang="ja-JP" altLang="en-US">
-              <a:solidFill>
-                <a:srgbClr val="1F2937"/>
-              </a:solidFill>
-              <a:latin typeface="Noto Sans JP" pitchFamily="34" charset="0"/>
-              <a:ea typeface="Noto Sans JP" pitchFamily="34" charset="-122"/>
-              <a:cs typeface="Noto Sans JP" pitchFamily="34" charset="-120"/>
-            </a:endParaRPr>
-          </a:p>
-          <a:p>
-            <a:pPr marL="0" indent="0" algn="l">
-              <a:buNone/>
-            </a:pPr>
-            <a:r>
-              <a:t/>
-            </a:r>
-            <a:endParaRPr lang="en-US" altLang="ja-JP">
-              <a:solidFill>
-                <a:srgbClr val="1F2937"/>
-              </a:solidFill>
-              <a:latin typeface="Noto Sans JP" pitchFamily="34" charset="0"/>
-              <a:ea typeface="Noto Sans JP" pitchFamily="34" charset="-122"/>
-              <a:cs typeface="Noto Sans JP" pitchFamily="34" charset="-120"/>
-            </a:endParaRPr>
-          </a:p>
-          <a:p>
-            <a:pPr marL="0" indent="0" algn="l">
-              <a:buNone/>
-            </a:pPr>
-            <a:endParaRPr lang="en-US" altLang="ja-JP" sz="2000" b="1">
-              <a:solidFill>
-                <a:srgbClr val="1F2937"/>
-              </a:solidFill>
-              <a:latin typeface="Noto Sans JP" pitchFamily="34" charset="0"/>
-              <a:ea typeface="Noto Sans JP" pitchFamily="34" charset="-122"/>
-              <a:cs typeface="Noto Sans JP" pitchFamily="34" charset="-120"/>
-            </a:endParaRPr>
-          </a:p>
-          <a:p>
-            <a:pPr marL="0" indent="0" algn="l">
-              <a:buNone/>
-            </a:pPr>
-            <a:endParaRPr lang="ja-JP" altLang="en-US" sz="2000" b="1">
-              <a:solidFill>
-                <a:srgbClr val="1F2937"/>
-              </a:solidFill>
-              <a:latin typeface="Noto Sans JP" pitchFamily="34" charset="0"/>
-              <a:ea typeface="Noto Sans JP" pitchFamily="34" charset="-122"/>
-              <a:cs typeface="Noto Sans JP" pitchFamily="34" charset="-120"/>
-            </a:endParaRPr>
-          </a:p>
-          <a:p>
-            <a:pPr marL="0" indent="0" algn="l">
-              <a:buNone/>
-            </a:pPr>
-            <a:endParaRPr lang="ja-JP" altLang="en-US" sz="2000" b="1">
-              <a:solidFill>
-                <a:srgbClr val="1F2937"/>
-              </a:solidFill>
-              <a:latin typeface="Noto Sans JP" pitchFamily="34" charset="0"/>
-              <a:ea typeface="Noto Sans JP" pitchFamily="34" charset="-122"/>
-              <a:cs typeface="Noto Sans JP" pitchFamily="34" charset="-120"/>
-            </a:endParaRPr>
-          </a:p>
-          <a:p>
-            <a:pPr marL="0" indent="0" algn="l">
-              <a:buNone/>
-            </a:pPr>
-            <a:endParaRPr lang="ja-JP" altLang="en-US" sz="2000" b="1" dirty="0">
-              <a:solidFill>
-                <a:srgbClr val="1F2937"/>
-              </a:solidFill>
-              <a:latin typeface="Noto Sans JP" pitchFamily="34" charset="0"/>
-              <a:ea typeface="Noto Sans JP" pitchFamily="34" charset="-122"/>
-              <a:cs typeface="Noto Sans JP" pitchFamily="34" charset="-120"/>
-            </a:endParaRPr>
-          </a:p>
-        </p:txBody>
-      </p:sp>
-      <p:pic>
-        <p:nvPicPr>
-          <p:cNvPr id="11" name="図 10" descr="Reject&#10;&#10;AI 生成コンテンツは誤りを含む可能性があります。">
-            <a:extLst>
-              <a:ext uri="{FF2B5EF4-FFF2-40B4-BE49-F238E27FC236}">
-                <a16:creationId xmlns:a16="http://schemas.microsoft.com/office/drawing/2014/main" id="{51253969-DE5D-4A72-3C6D-1FEDC2D2951F}"/>
-              </a:ext>
-            </a:extLst>
-          </p:cNvPr>
-          <p:cNvPicPr>
-            <a:picLocks noChangeAspect="1"/>
-          </p:cNvPicPr>
-          <p:nvPr/>
-        </p:nvPicPr>
-        <p:blipFill>
-          <a:blip r:embed="rId2"/>
-          <a:stretch>
-            <a:fillRect/>
-          </a:stretch>
-        </p:blipFill>
-        <p:spPr>
-          <a:xfrm>
-            <a:off x="6997489" y="1740257"/>
-            <a:ext cx="4941984" cy="4304459"/>
-          </a:xfrm>
-          <a:prstGeom prst="rect">
-            <a:avLst/>
-          </a:prstGeom>
-          <a:ln>
-            <a:noFill/>
+                <a:latin typeface="Noto Sans JP"/>
+              </a:rPr>
+              <a:t>・フローを保存して、自分宛に「重要度＝高」の</a:t>
+            </a:r>
+          </a:p>
+          <a:p>
+            <a:r>
+              <a:rPr sz="2000">
+                <a:solidFill>
+                  <a:srgbClr val="1F2937"/>
+                </a:solidFill>
+                <a:latin typeface="Noto Sans JP"/>
+              </a:rPr>
+              <a:t>　メールを1通送ります</a:t>
+            </a:r>
+          </a:p>
+          <a:p>
+            <a:r>
+              <a:rPr sz="2000">
+                <a:solidFill>
+                  <a:srgbClr val="1F2937"/>
+                </a:solidFill>
+                <a:latin typeface="Noto Sans JP"/>
+              </a:rPr>
+              <a:t>・フローは成功（緑）します。でも結果は「通常メール」！</a:t>
+            </a:r>
+          </a:p>
+          <a:p>
+            <a:r>
+              <a:rPr sz="2000">
+                <a:solidFill>
+                  <a:srgbClr val="1F2937"/>
+                </a:solidFill>
+                <a:latin typeface="Noto Sans JP"/>
+              </a:rPr>
+              <a:t>・「重要にして送ったのに、なぜ？」</a:t>
+            </a:r>
+          </a:p>
+          <a:p>
+            <a:r>
+              <a:rPr sz="2000">
+                <a:solidFill>
+                  <a:srgbClr val="1F2937"/>
+                </a:solidFill>
+                <a:latin typeface="Noto Sans JP"/>
+              </a:rPr>
+              <a:t>　→ ここで実行履歴の出番です</a:t>
+            </a:r>
+          </a:p>
+        </p:txBody>
+      </p:sp>
+      <p:sp>
+        <p:nvSpPr>
+          <p:cNvPr id="52" name="Rounded Rectangle 51"/>
+          <p:cNvSpPr/>
+          <p:nvPr/>
+        </p:nvSpPr>
+        <p:spPr>
+          <a:xfrm>
+            <a:off x="7040880" y="1737360"/>
+            <a:ext cx="4572000" cy="4114800"/>
+          </a:xfrm>
+          <a:prstGeom prst="roundRect">
+            <a:avLst/>
+          </a:prstGeom>
+          <a:solidFill>
+            <a:srgbClr val="F1F5FB"/>
+          </a:solidFill>
+          <a:ln w="19050">
+            <a:solidFill>
+              <a:srgbClr val="9CB8D8"/>
+            </a:solidFill>
           </a:ln>
-          <a:effectLst>
-            <a:outerShdw blurRad="190500" algn="tl" rotWithShape="0">
-              <a:srgbClr val="000000">
-                <a:alpha val="70000"/>
-              </a:srgbClr>
-            </a:outerShdw>
-          </a:effectLst>
-        </p:spPr>
-      </p:pic>
-      <p:pic>
-        <p:nvPicPr>
-          <p:cNvPr id="14" name="図 13" descr="The image depicts a cute, cartoonish cat holding a target with a cheerful expression.&#10;&#10;AI 生成コンテンツは誤りを含む可能性があります。">
-            <a:extLst>
-              <a:ext uri="{FF2B5EF4-FFF2-40B4-BE49-F238E27FC236}">
-                <a16:creationId xmlns:a16="http://schemas.microsoft.com/office/drawing/2014/main" id="{DB25A7B8-36CA-2E8D-1D22-11781740D9F7}"/>
-              </a:ext>
-            </a:extLst>
-          </p:cNvPr>
-          <p:cNvPicPr>
-            <a:picLocks noChangeAspect="1"/>
-          </p:cNvPicPr>
-          <p:nvPr/>
-        </p:nvPicPr>
-        <p:blipFill>
-          <a:blip r:embed="rId3"/>
-          <a:stretch>
-            <a:fillRect/>
-          </a:stretch>
-        </p:blipFill>
-        <p:spPr>
-          <a:xfrm>
-            <a:off x="6781691" y="5173320"/>
-            <a:ext cx="1122182" cy="1181244"/>
-          </a:xfrm>
-          <a:prstGeom prst="rect">
-            <a:avLst/>
-          </a:prstGeom>
-        </p:spPr>
-      </p:pic>
-      <p:pic>
-        <p:nvPicPr>
-          <p:cNvPr id="16" name="図 15" descr="The image depicts a gray cartoon cat with a red circle and cross, holding a magnifying glass.&#10;&#10;AI 生成コンテンツは誤りを含む可能性があります。">
-            <a:extLst>
-              <a:ext uri="{FF2B5EF4-FFF2-40B4-BE49-F238E27FC236}">
-                <a16:creationId xmlns:a16="http://schemas.microsoft.com/office/drawing/2014/main" id="{AF3E22CA-FF0B-8F71-3F0B-A922DEFAE5BA}"/>
-              </a:ext>
-            </a:extLst>
-          </p:cNvPr>
-          <p:cNvPicPr>
-            <a:picLocks noChangeAspect="1"/>
-          </p:cNvPicPr>
-          <p:nvPr/>
-        </p:nvPicPr>
-        <p:blipFill>
-          <a:blip r:embed="rId4"/>
-          <a:stretch>
-            <a:fillRect/>
-          </a:stretch>
-        </p:blipFill>
-        <p:spPr>
-          <a:xfrm>
-            <a:off x="10939206" y="5237266"/>
-            <a:ext cx="1052236" cy="1107617"/>
-          </a:xfrm>
-          <a:prstGeom prst="rect">
-            <a:avLst/>
-          </a:prstGeom>
-        </p:spPr>
-      </p:pic>
+          <a:effectLst/>
+        </p:spPr>
+        <p:style>
+          <a:lnRef idx="1">
+            <a:schemeClr val="accent1"/>
+          </a:lnRef>
+          <a:fillRef idx="3">
+            <a:schemeClr val="accent1"/>
+          </a:fillRef>
+          <a:effectRef idx="2">
+            <a:schemeClr val="accent1"/>
+          </a:effectRef>
+          <a:fontRef idx="minor">
+            <a:schemeClr val="lt1"/>
+          </a:fontRef>
+        </p:style>
+        <p:txBody>
+          <a:bodyPr rtlCol="0" anchor="ctr" wrap="square"/>
+          <a:lstStyle/>
+          <a:p>
+            <a:pPr algn="ctr"/>
+            <a:r>
+              <a:rPr sz="1800" b="1">
+                <a:solidFill>
+                  <a:srgbClr val="2A5E9E"/>
+                </a:solidFill>
+              </a:rPr>
+              <a:t>📷 ここにスクショを貼る</a:t>
+            </a:r>
+          </a:p>
+          <a:p>
+            <a:pPr algn="ctr"/>
+            <a:r>
+              <a:rPr sz="1400">
+                <a:solidFill>
+                  <a:srgbClr val="556677"/>
+                </a:solidFill>
+              </a:rPr>
+              <a:t>実行結果：成功（緑）なのに
+「通常メール」になっている画面</a:t>
+            </a:r>
+          </a:p>
+        </p:txBody>
+      </p:sp>
     </p:spTree>
   </p:cSld>
   <p:clrMapOvr>
@@ -6676,6 +6727,890 @@
 </file>
 
 <file path=ppt/slides/slide14.xml><?xml version="1.0" encoding="utf-8"?>
+<p:sld xmlns:a="http://schemas.openxmlformats.org/drawingml/2006/main" xmlns:r="http://schemas.openxmlformats.org/officeDocument/2006/relationships" xmlns:p="http://schemas.openxmlformats.org/presentationml/2006/main">
+  <p:cSld>
+    <p:spTree>
+      <p:nvGrpSpPr>
+        <p:cNvPr id="1" name=""/>
+        <p:cNvGrpSpPr/>
+        <p:nvPr/>
+      </p:nvGrpSpPr>
+      <p:grpSpPr>
+        <a:xfrm>
+          <a:off x="0" y="0"/>
+          <a:ext cx="0" cy="0"/>
+          <a:chOff x="0" y="0"/>
+          <a:chExt cx="0" cy="0"/>
+        </a:xfrm>
+      </p:grpSpPr>
+      <p:sp>
+        <p:nvSpPr>
+          <p:cNvPr id="2" name="Shape 0"/>
+          <p:cNvSpPr/>
+          <p:nvPr/>
+        </p:nvSpPr>
+        <p:spPr>
+          <a:xfrm>
+            <a:off x="0" y="0"/>
+            <a:ext cx="12191695" cy="6858000"/>
+          </a:xfrm>
+          <a:prstGeom prst="rect">
+            <a:avLst/>
+          </a:prstGeom>
+          <a:solidFill>
+            <a:srgbClr val="F3F4F6"/>
+          </a:solidFill>
+          <a:ln w="12700">
+            <a:solidFill>
+              <a:srgbClr val="FFFFFF">
+                <a:alpha val="0"/>
+              </a:srgbClr>
+            </a:solidFill>
+            <a:prstDash val="solid"/>
+          </a:ln>
+        </p:spPr>
+        <p:txBody>
+          <a:bodyPr/>
+          <a:lstStyle/>
+          <a:p>
+            <a:endParaRPr lang="ja-JP" altLang="en-US"/>
+          </a:p>
+        </p:txBody>
+      </p:sp>
+      <p:sp>
+        <p:nvSpPr>
+          <p:cNvPr id="3" name="Shape 1"/>
+          <p:cNvSpPr/>
+          <p:nvPr/>
+        </p:nvSpPr>
+        <p:spPr>
+          <a:xfrm>
+            <a:off x="0" y="0"/>
+            <a:ext cx="12191695" cy="6858000"/>
+          </a:xfrm>
+          <a:prstGeom prst="rect">
+            <a:avLst/>
+          </a:prstGeom>
+          <a:solidFill>
+            <a:srgbClr val="FFFFFF"/>
+          </a:solidFill>
+          <a:ln w="12700">
+            <a:solidFill>
+              <a:srgbClr val="FFFFFF">
+                <a:alpha val="0"/>
+              </a:srgbClr>
+            </a:solidFill>
+            <a:prstDash val="solid"/>
+          </a:ln>
+          <a:effectLst>
+            <a:outerShdw blurRad="63500" dist="38100" dir="16200000" algn="bl" rotWithShape="0">
+              <a:srgbClr val="000000">
+                <a:alpha val="10000"/>
+              </a:srgbClr>
+            </a:outerShdw>
+          </a:effectLst>
+        </p:spPr>
+        <p:txBody>
+          <a:bodyPr/>
+          <a:lstStyle/>
+          <a:p>
+            <a:endParaRPr lang="ja-JP" altLang="en-US"/>
+          </a:p>
+        </p:txBody>
+      </p:sp>
+      <p:sp>
+        <p:nvSpPr>
+          <p:cNvPr id="4" name="Shape 2"/>
+          <p:cNvSpPr/>
+          <p:nvPr/>
+        </p:nvSpPr>
+        <p:spPr>
+          <a:xfrm>
+            <a:off x="0" y="0"/>
+            <a:ext cx="12191695" cy="1485900"/>
+          </a:xfrm>
+          <a:prstGeom prst="rect">
+            <a:avLst/>
+          </a:prstGeom>
+          <a:solidFill>
+            <a:srgbClr val="FFFFFF"/>
+          </a:solidFill>
+          <a:ln/>
+        </p:spPr>
+        <p:txBody>
+          <a:bodyPr/>
+          <a:lstStyle/>
+          <a:p>
+            <a:endParaRPr lang="ja-JP" altLang="en-US"/>
+          </a:p>
+        </p:txBody>
+      </p:sp>
+      <p:sp>
+        <p:nvSpPr>
+          <p:cNvPr id="5" name="Shape 3"/>
+          <p:cNvSpPr/>
+          <p:nvPr/>
+        </p:nvSpPr>
+        <p:spPr>
+          <a:xfrm>
+            <a:off x="0" y="1476756"/>
+            <a:ext cx="12191695" cy="9144"/>
+          </a:xfrm>
+          <a:prstGeom prst="rect">
+            <a:avLst/>
+          </a:prstGeom>
+          <a:solidFill>
+            <a:srgbClr val="F3F4F6"/>
+          </a:solidFill>
+          <a:ln w="12700">
+            <a:solidFill>
+              <a:srgbClr val="F3F4F6">
+                <a:alpha val="0"/>
+              </a:srgbClr>
+            </a:solidFill>
+            <a:prstDash val="solid"/>
+          </a:ln>
+        </p:spPr>
+        <p:txBody>
+          <a:bodyPr/>
+          <a:lstStyle/>
+          <a:p>
+            <a:endParaRPr lang="ja-JP" altLang="en-US"/>
+          </a:p>
+        </p:txBody>
+      </p:sp>
+      <p:sp>
+        <p:nvSpPr>
+          <p:cNvPr id="6" name="Text 4"/>
+          <p:cNvSpPr txBox="1"/>
+          <p:nvPr/>
+        </p:nvSpPr>
+        <p:spPr>
+          <a:xfrm>
+            <a:off x="457200" y="228600"/>
+            <a:ext cx="5600700" cy="267005"/>
+          </a:xfrm>
+          <a:prstGeom prst="rect">
+            <a:avLst/>
+          </a:prstGeom>
+          <a:noFill/>
+          <a:ln/>
+        </p:spPr>
+        <p:txBody>
+          <a:bodyPr wrap="square" lIns="0" tIns="0" rIns="0" bIns="0" rtlCol="0" anchor="ctr"/>
+          <a:lstStyle/>
+          <a:p>
+            <a:pPr marL="0" indent="0" algn="l">
+              <a:buNone/>
+            </a:pPr>
+            <a:r>
+              <a:rPr lang="en-US" sz="1600" b="1" kern="0" spc="150" dirty="0">
+                <a:solidFill>
+                  <a:srgbClr val="6B7280"/>
+                </a:solidFill>
+                <a:latin typeface="Noto Sans JP" pitchFamily="34" charset="0"/>
+                <a:ea typeface="Noto Sans JP" pitchFamily="34" charset="-122"/>
+                <a:cs typeface="Noto Sans JP" pitchFamily="34" charset="-120"/>
+              </a:rPr>
+              <a:t>PA45｜第11回</a:t>
+            </a:r>
+            <a:endParaRPr lang="en-US" sz="1500" dirty="0"/>
+          </a:p>
+        </p:txBody>
+      </p:sp>
+      <p:sp>
+        <p:nvSpPr>
+          <p:cNvPr id="7" name="Text 5"/>
+          <p:cNvSpPr txBox="1"/>
+          <p:nvPr/>
+        </p:nvSpPr>
+        <p:spPr>
+          <a:xfrm>
+            <a:off x="457199" y="533095"/>
+            <a:ext cx="10837817" cy="715061"/>
+          </a:xfrm>
+          <a:prstGeom prst="rect">
+            <a:avLst/>
+          </a:prstGeom>
+          <a:noFill/>
+          <a:ln/>
+        </p:spPr>
+        <p:txBody>
+          <a:bodyPr wrap="square" lIns="0" tIns="0" rIns="0" bIns="0" rtlCol="0" anchor="ctr"/>
+          <a:lstStyle/>
+          <a:p>
+            <a:pPr marL="0" indent="0" algn="l">
+              <a:buNone/>
+            </a:pPr>
+            <a:r>
+              <a:rPr lang="en-US" sz="3000" b="1" dirty="0">
+                <a:solidFill>
+                  <a:srgbClr val="1F2937"/>
+                </a:solidFill>
+                <a:latin typeface="Noto Sans JP" pitchFamily="34" charset="0"/>
+                <a:ea typeface="Noto Sans JP" pitchFamily="34" charset="-122"/>
+                <a:cs typeface="Noto Sans JP" pitchFamily="34" charset="-120"/>
+              </a:rPr>
+              <a:t>フロー解説 ③  出力で原因を見つけて直す</a:t>
+            </a:r>
+            <a:endParaRPr lang="en-US" sz="2800" dirty="0"/>
+          </a:p>
+        </p:txBody>
+      </p:sp>
+      <p:sp>
+        <p:nvSpPr>
+          <p:cNvPr id="8" name="Shape 6"/>
+          <p:cNvSpPr/>
+          <p:nvPr/>
+        </p:nvSpPr>
+        <p:spPr>
+          <a:xfrm>
+            <a:off x="10858500" y="828446"/>
+            <a:ext cx="114300" cy="114300"/>
+          </a:xfrm>
+          <a:prstGeom prst="ellipse">
+            <a:avLst/>
+          </a:prstGeom>
+          <a:solidFill>
+            <a:srgbClr val="0078D4"/>
+          </a:solidFill>
+          <a:ln w="12700">
+            <a:solidFill>
+              <a:srgbClr val="FFFFFF">
+                <a:alpha val="0"/>
+              </a:srgbClr>
+            </a:solidFill>
+            <a:prstDash val="solid"/>
+          </a:ln>
+        </p:spPr>
+        <p:txBody>
+          <a:bodyPr/>
+          <a:lstStyle/>
+          <a:p>
+            <a:endParaRPr lang="ja-JP" altLang="en-US"/>
+          </a:p>
+        </p:txBody>
+      </p:sp>
+      <p:sp>
+        <p:nvSpPr>
+          <p:cNvPr id="9" name="Text 7"/>
+          <p:cNvSpPr txBox="1"/>
+          <p:nvPr/>
+        </p:nvSpPr>
+        <p:spPr>
+          <a:xfrm>
+            <a:off x="11048695" y="752551"/>
+            <a:ext cx="771754" cy="267005"/>
+          </a:xfrm>
+          <a:prstGeom prst="rect">
+            <a:avLst/>
+          </a:prstGeom>
+          <a:noFill/>
+          <a:ln/>
+        </p:spPr>
+        <p:txBody>
+          <a:bodyPr wrap="square" lIns="0" tIns="0" rIns="0" bIns="0" rtlCol="0" anchor="ctr"/>
+          <a:lstStyle/>
+          <a:p>
+            <a:pPr marL="0" indent="0" algn="l">
+              <a:buNone/>
+            </a:pPr>
+            <a:r>
+              <a:rPr lang="en-US" sz="1600" dirty="0">
+                <a:solidFill>
+                  <a:srgbClr val="9CA3AF"/>
+                </a:solidFill>
+                <a:latin typeface="ui-monospace" pitchFamily="34" charset="0"/>
+                <a:ea typeface="ui-monospace" pitchFamily="34" charset="-122"/>
+                <a:cs typeface="ui-monospace" pitchFamily="34" charset="-120"/>
+              </a:rPr>
+              <a:t>Concept</a:t>
+            </a:r>
+            <a:endParaRPr lang="en-US" sz="1500" dirty="0"/>
+          </a:p>
+        </p:txBody>
+      </p:sp>
+      <p:sp>
+        <p:nvSpPr>
+          <p:cNvPr id="13" name="Shape 9"/>
+          <p:cNvSpPr/>
+          <p:nvPr/>
+        </p:nvSpPr>
+        <p:spPr>
+          <a:xfrm>
+            <a:off x="0" y="1523390"/>
+            <a:ext cx="11975897" cy="4914900"/>
+          </a:xfrm>
+          <a:prstGeom prst="rect">
+            <a:avLst/>
+          </a:prstGeom>
+          <a:solidFill>
+            <a:srgbClr val="F9FAFB"/>
+          </a:solidFill>
+          <a:ln w="12700">
+            <a:solidFill>
+              <a:srgbClr val="FFFFFF">
+                <a:alpha val="0"/>
+              </a:srgbClr>
+            </a:solidFill>
+            <a:prstDash val="solid"/>
+          </a:ln>
+        </p:spPr>
+        <p:txBody>
+          <a:bodyPr/>
+          <a:lstStyle/>
+          <a:p>
+            <a:endParaRPr lang="ja-JP" altLang="en-US"/>
+          </a:p>
+        </p:txBody>
+      </p:sp>
+      <p:pic>
+        <p:nvPicPr>
+          <p:cNvPr id="23" name="Image 8" descr="preencoded.png"/>
+          <p:cNvPicPr>
+            <a:picLocks noChangeAspect="1"/>
+          </p:cNvPicPr>
+          <p:nvPr/>
+        </p:nvPicPr>
+        <p:blipFill>
+          <a:blip/>
+          <a:srcRect t="-401" b="-401"/>
+          <a:stretch/>
+        </p:blipFill>
+        <p:spPr>
+          <a:xfrm>
+            <a:off x="0" y="6801307"/>
+            <a:ext cx="12191695" cy="57607"/>
+          </a:xfrm>
+          <a:prstGeom prst="rect">
+            <a:avLst/>
+          </a:prstGeom>
+        </p:spPr>
+      </p:pic>
+      <p:sp>
+        <p:nvSpPr>
+          <p:cNvPr id="39" name="Shape 22"/>
+          <p:cNvSpPr/>
+          <p:nvPr/>
+        </p:nvSpPr>
+        <p:spPr>
+          <a:xfrm>
+            <a:off x="0" y="6400800"/>
+            <a:ext cx="12191695" cy="457200"/>
+          </a:xfrm>
+          <a:prstGeom prst="rect">
+            <a:avLst/>
+          </a:prstGeom>
+          <a:solidFill>
+            <a:srgbClr val="FFFFFF"/>
+          </a:solidFill>
+          <a:ln/>
+        </p:spPr>
+        <p:txBody>
+          <a:bodyPr/>
+          <a:lstStyle/>
+          <a:p>
+            <a:endParaRPr lang="ja-JP" altLang="en-US"/>
+          </a:p>
+        </p:txBody>
+      </p:sp>
+      <p:sp>
+        <p:nvSpPr>
+          <p:cNvPr id="40" name="Shape 23"/>
+          <p:cNvSpPr/>
+          <p:nvPr/>
+        </p:nvSpPr>
+        <p:spPr>
+          <a:xfrm>
+            <a:off x="0" y="6400800"/>
+            <a:ext cx="12191695" cy="9144"/>
+          </a:xfrm>
+          <a:prstGeom prst="rect">
+            <a:avLst/>
+          </a:prstGeom>
+          <a:solidFill>
+            <a:srgbClr val="E5E7EB"/>
+          </a:solidFill>
+          <a:ln w="12700">
+            <a:solidFill>
+              <a:srgbClr val="E5E7EB">
+                <a:alpha val="0"/>
+              </a:srgbClr>
+            </a:solidFill>
+            <a:prstDash val="solid"/>
+          </a:ln>
+        </p:spPr>
+        <p:txBody>
+          <a:bodyPr/>
+          <a:lstStyle/>
+          <a:p>
+            <a:endParaRPr lang="ja-JP" altLang="en-US"/>
+          </a:p>
+        </p:txBody>
+      </p:sp>
+      <p:sp>
+        <p:nvSpPr>
+          <p:cNvPr id="41" name="Text 24"/>
+          <p:cNvSpPr txBox="1"/>
+          <p:nvPr/>
+        </p:nvSpPr>
+        <p:spPr>
+          <a:xfrm>
+            <a:off x="457200" y="6519672"/>
+            <a:ext cx="2573122" cy="228600"/>
+          </a:xfrm>
+          <a:prstGeom prst="rect">
+            <a:avLst/>
+          </a:prstGeom>
+          <a:noFill/>
+          <a:ln/>
+        </p:spPr>
+        <p:txBody>
+          <a:bodyPr wrap="square" lIns="0" tIns="0" rIns="0" bIns="0" rtlCol="0" anchor="ctr"/>
+          <a:lstStyle/>
+          <a:p>
+            <a:pPr marL="0" indent="0" algn="l">
+              <a:buNone/>
+            </a:pPr>
+            <a:r>
+              <a:rPr lang="en-US" sz="1600" dirty="0">
+                <a:solidFill>
+                  <a:srgbClr val="9CA3AF"/>
+                </a:solidFill>
+                <a:latin typeface="Noto Sans JP" pitchFamily="34" charset="0"/>
+                <a:ea typeface="Noto Sans JP" pitchFamily="34" charset="-122"/>
+                <a:cs typeface="Noto Sans JP" pitchFamily="34" charset="-120"/>
+              </a:rPr>
+              <a:t>Power Automate for Beginners</a:t>
+            </a:r>
+            <a:endParaRPr lang="en-US" sz="1200" dirty="0"/>
+          </a:p>
+        </p:txBody>
+      </p:sp>
+      <p:sp>
+        <p:nvSpPr>
+          <p:cNvPr id="42" name="Text 25"/>
+          <p:cNvSpPr txBox="1"/>
+          <p:nvPr/>
+        </p:nvSpPr>
+        <p:spPr>
+          <a:xfrm>
+            <a:off x="10490911" y="6519672"/>
+            <a:ext cx="1484986" cy="228600"/>
+          </a:xfrm>
+          <a:prstGeom prst="rect">
+            <a:avLst/>
+          </a:prstGeom>
+          <a:noFill/>
+          <a:ln/>
+        </p:spPr>
+        <p:txBody>
+          <a:bodyPr wrap="square" lIns="0" tIns="0" rIns="0" bIns="0" rtlCol="0" anchor="ctr"/>
+          <a:lstStyle/>
+          <a:p>
+            <a:pPr marL="0" indent="0" algn="l">
+              <a:buNone/>
+            </a:pPr>
+            <a:r>
+              <a:rPr lang="en-US" sz="1600" dirty="0">
+                <a:solidFill>
+                  <a:srgbClr val="9CA3AF"/>
+                </a:solidFill>
+                <a:latin typeface="Noto Sans JP" pitchFamily="34" charset="0"/>
+                <a:ea typeface="Noto Sans JP" pitchFamily="34" charset="-122"/>
+                <a:cs typeface="Noto Sans JP" pitchFamily="34" charset="-120"/>
+              </a:rPr>
+              <a:t>Copyright © PA45</a:t>
+            </a:r>
+            <a:endParaRPr lang="en-US" sz="1200" dirty="0"/>
+          </a:p>
+        </p:txBody>
+      </p:sp>
+      <p:grpSp>
+        <p:nvGrpSpPr>
+          <p:cNvPr id="47" name="グループ化 46">
+            <a:extLst>
+              <a:ext uri="{FF2B5EF4-FFF2-40B4-BE49-F238E27FC236}">
+                <a16:creationId xmlns:a16="http://schemas.microsoft.com/office/drawing/2014/main" id="{722FBEAE-8CB7-7493-F595-CD1F2E21BD05}"/>
+              </a:ext>
+            </a:extLst>
+          </p:cNvPr>
+          <p:cNvGrpSpPr/>
+          <p:nvPr/>
+        </p:nvGrpSpPr>
+        <p:grpSpPr>
+          <a:xfrm>
+            <a:off x="4603551" y="6322778"/>
+            <a:ext cx="7350682" cy="405017"/>
+            <a:chOff x="5861349" y="604238"/>
+            <a:chExt cx="6035909" cy="405017"/>
+          </a:xfrm>
+        </p:grpSpPr>
+        <p:sp>
+          <p:nvSpPr>
+            <p:cNvPr id="48" name="Shape 31">
+              <a:extLst>
+                <a:ext uri="{FF2B5EF4-FFF2-40B4-BE49-F238E27FC236}">
+                  <a16:creationId xmlns:a16="http://schemas.microsoft.com/office/drawing/2014/main" id="{DD44BB3C-F859-7A5E-7E34-CC1C35ECEA4D}"/>
+                </a:ext>
+              </a:extLst>
+            </p:cNvPr>
+            <p:cNvSpPr/>
+            <p:nvPr/>
+          </p:nvSpPr>
+          <p:spPr>
+            <a:xfrm>
+              <a:off x="6034969" y="604238"/>
+              <a:ext cx="5854549" cy="386057"/>
+            </a:xfrm>
+            <a:prstGeom prst="roundRect">
+              <a:avLst>
+                <a:gd name="adj" fmla="val 342465"/>
+              </a:avLst>
+            </a:prstGeom>
+            <a:solidFill>
+              <a:srgbClr val="EFF6FF"/>
+            </a:solidFill>
+            <a:ln w="12700">
+              <a:solidFill>
+                <a:srgbClr val="FFFFFF">
+                  <a:alpha val="0"/>
+                </a:srgbClr>
+              </a:solidFill>
+              <a:prstDash val="solid"/>
+            </a:ln>
+          </p:spPr>
+          <p:txBody>
+            <a:bodyPr/>
+            <a:lstStyle/>
+            <a:p>
+              <a:endParaRPr lang="ja-JP" altLang="en-US"/>
+            </a:p>
+          </p:txBody>
+        </p:sp>
+        <p:sp>
+          <p:nvSpPr>
+            <p:cNvPr id="49" name="Text 21">
+              <a:extLst>
+                <a:ext uri="{FF2B5EF4-FFF2-40B4-BE49-F238E27FC236}">
+                  <a16:creationId xmlns:a16="http://schemas.microsoft.com/office/drawing/2014/main" id="{A7F44BB1-1667-BB85-557B-D7C1AAD8A0FA}"/>
+                </a:ext>
+              </a:extLst>
+            </p:cNvPr>
+            <p:cNvSpPr txBox="1"/>
+            <p:nvPr/>
+          </p:nvSpPr>
+          <p:spPr>
+            <a:xfrm>
+              <a:off x="6287649" y="612651"/>
+              <a:ext cx="5609609" cy="396593"/>
+            </a:xfrm>
+            <a:prstGeom prst="rect">
+              <a:avLst/>
+            </a:prstGeom>
+            <a:noFill/>
+            <a:ln/>
+          </p:spPr>
+          <p:txBody>
+            <a:bodyPr wrap="square" lIns="0" tIns="0" rIns="0" bIns="0" rtlCol="0" anchor="ctr"/>
+            <a:lstStyle/>
+            <a:p>
+              <a:pPr marL="0" indent="0" algn="l">
+                <a:buNone/>
+              </a:pPr>
+              <a:r>
+                <a:rPr lang="en-US" sz="1400" b="1" dirty="0">
+                  <a:solidFill>
+                    <a:srgbClr val="2563EB"/>
+                  </a:solidFill>
+                  <a:latin typeface="Noto Sans JP" pitchFamily="34" charset="0"/>
+                  <a:ea typeface="Noto Sans JP" pitchFamily="34" charset="-122"/>
+                  <a:cs typeface="Noto Sans JP" pitchFamily="34" charset="-120"/>
+                </a:rPr>
+                <a:t>学んだこと・気づいたことを #</a:t>
+              </a:r>
+              <a:r>
+                <a:rPr lang="en-US" sz="1400" b="1">
+                  <a:solidFill>
+                    <a:srgbClr val="2563EB"/>
+                  </a:solidFill>
+                  <a:latin typeface="Noto Sans JP" pitchFamily="34" charset="0"/>
+                  <a:ea typeface="Noto Sans JP" pitchFamily="34" charset="-122"/>
+                  <a:cs typeface="Noto Sans JP" pitchFamily="34" charset="-120"/>
+                </a:rPr>
+                <a:t>PA45 で</a:t>
+              </a:r>
+              <a:r>
+                <a:rPr lang="ja-JP" altLang="en-US" sz="1400" b="1">
+                  <a:solidFill>
+                    <a:srgbClr val="2563EB"/>
+                  </a:solidFill>
+                  <a:latin typeface="Noto Sans JP" pitchFamily="34" charset="0"/>
+                  <a:ea typeface="Noto Sans JP" pitchFamily="34" charset="-122"/>
+                  <a:cs typeface="Noto Sans JP" pitchFamily="34" charset="-120"/>
+                </a:rPr>
+                <a:t>リアルタイムに</a:t>
+              </a:r>
+              <a:r>
+                <a:rPr lang="en-US" sz="1400" b="1">
+                  <a:solidFill>
+                    <a:srgbClr val="2563EB"/>
+                  </a:solidFill>
+                  <a:latin typeface="Noto Sans JP" pitchFamily="34" charset="0"/>
+                  <a:ea typeface="Noto Sans JP" pitchFamily="34" charset="-122"/>
+                  <a:cs typeface="Noto Sans JP" pitchFamily="34" charset="-120"/>
+                </a:rPr>
+                <a:t>投稿しよう！</a:t>
+              </a:r>
+              <a:r>
+                <a:rPr lang="ja-JP" altLang="en-US" sz="1400" b="1">
+                  <a:solidFill>
+                    <a:srgbClr val="2563EB"/>
+                  </a:solidFill>
+                  <a:latin typeface="Noto Sans JP" pitchFamily="34" charset="0"/>
+                  <a:ea typeface="Noto Sans JP" pitchFamily="34" charset="-122"/>
+                  <a:cs typeface="Noto Sans JP" pitchFamily="34" charset="-120"/>
+                </a:rPr>
+                <a:t>スクショ</a:t>
+              </a:r>
+              <a:r>
+                <a:rPr lang="en-US" altLang="ja-JP" sz="1400" b="1">
+                  <a:solidFill>
+                    <a:srgbClr val="2563EB"/>
+                  </a:solidFill>
+                  <a:latin typeface="Noto Sans JP" pitchFamily="34" charset="0"/>
+                  <a:ea typeface="Noto Sans JP" pitchFamily="34" charset="-122"/>
+                  <a:cs typeface="Noto Sans JP" pitchFamily="34" charset="-120"/>
+                </a:rPr>
+                <a:t>OK</a:t>
+              </a:r>
+              <a:r>
+                <a:rPr lang="ja-JP" altLang="en-US" sz="1400" b="1">
+                  <a:solidFill>
+                    <a:srgbClr val="2563EB"/>
+                  </a:solidFill>
+                  <a:latin typeface="Noto Sans JP" pitchFamily="34" charset="0"/>
+                  <a:ea typeface="Noto Sans JP" pitchFamily="34" charset="-122"/>
+                  <a:cs typeface="Noto Sans JP" pitchFamily="34" charset="-120"/>
+                </a:rPr>
+                <a:t>！</a:t>
+              </a:r>
+              <a:endParaRPr lang="en-US" sz="1400" dirty="0"/>
+            </a:p>
+          </p:txBody>
+        </p:sp>
+        <p:pic>
+          <p:nvPicPr>
+            <p:cNvPr id="50" name="Image 2" descr="preencoded.png">
+              <a:extLst>
+                <a:ext uri="{FF2B5EF4-FFF2-40B4-BE49-F238E27FC236}">
+                  <a16:creationId xmlns:a16="http://schemas.microsoft.com/office/drawing/2014/main" id="{003A3C3D-15E3-1F1A-D918-AB2472E8059D}"/>
+                </a:ext>
+              </a:extLst>
+            </p:cNvPr>
+            <p:cNvPicPr>
+              <a:picLocks noChangeAspect="1"/>
+            </p:cNvPicPr>
+            <p:nvPr/>
+          </p:nvPicPr>
+          <p:blipFill>
+            <a:blip/>
+            <a:srcRect/>
+            <a:stretch/>
+          </p:blipFill>
+          <p:spPr>
+            <a:xfrm>
+              <a:off x="5861349" y="619679"/>
+              <a:ext cx="263236" cy="389576"/>
+            </a:xfrm>
+            <a:prstGeom prst="rect">
+              <a:avLst/>
+            </a:prstGeom>
+          </p:spPr>
+        </p:pic>
+      </p:grpSp>
+      <p:sp>
+        <p:nvSpPr>
+          <p:cNvPr id="51" name="Text 5">
+            <a:extLst>
+              <a:ext uri="{FF2B5EF4-FFF2-40B4-BE49-F238E27FC236}">
+                <a16:creationId xmlns:a16="http://schemas.microsoft.com/office/drawing/2014/main" id="{F34FF253-528E-97DF-BF89-4A55B2E7EBC4}"/>
+              </a:ext>
+            </a:extLst>
+          </p:cNvPr>
+          <p:cNvSpPr txBox="1"/>
+          <p:nvPr/>
+        </p:nvSpPr>
+        <p:spPr>
+          <a:xfrm>
+            <a:off x="94417" y="2164046"/>
+            <a:ext cx="6915983" cy="3947047"/>
+          </a:xfrm>
+          <a:prstGeom prst="rect">
+            <a:avLst/>
+          </a:prstGeom>
+          <a:noFill/>
+          <a:ln/>
+        </p:spPr>
+        <p:txBody>
+          <a:bodyPr wrap="square" lIns="0" tIns="0" rIns="0" bIns="0" rtlCol="0" anchor="ctr"/>
+          <a:lstStyle/>
+          <a:p>
+            <a:pPr marL="0" indent="0" algn="l">
+              <a:buNone/>
+            </a:pPr>
+            <a:r>
+              <a:rPr lang="ja-JP" altLang="en-US">
+                <a:solidFill>
+                  <a:srgbClr val="1F2937"/>
+                </a:solidFill>
+                <a:latin typeface="Noto Sans JP" pitchFamily="34" charset="0"/>
+                <a:ea typeface="Noto Sans JP" pitchFamily="34" charset="-122"/>
+                <a:cs typeface="Noto Sans JP" pitchFamily="34" charset="-120"/>
+              </a:rPr>
+              <a:t>🎯 目的：実行履歴の出力から原因を突き止める</a:t>
+            </a:r>
+            <a:endParaRPr lang="en-US" altLang="ja-JP">
+              <a:solidFill>
+                <a:srgbClr val="1F2937"/>
+              </a:solidFill>
+              <a:latin typeface="Noto Sans JP" pitchFamily="34" charset="0"/>
+              <a:ea typeface="Noto Sans JP" pitchFamily="34" charset="-122"/>
+              <a:cs typeface="Noto Sans JP" pitchFamily="34" charset="-120"/>
+            </a:endParaRPr>
+          </a:p>
+          <a:p>
+            <a:r>
+              <a:rPr>
+                <a:solidFill>
+                  <a:srgbClr val="1F2937"/>
+                </a:solidFill>
+                <a:latin typeface="Noto Sans JP"/>
+              </a:rPr>
+              <a:t>・実行履歴を開き、トリガーの「出力」を見る</a:t>
+            </a:r>
+          </a:p>
+          <a:p>
+            <a:r>
+              <a:rPr>
+                <a:solidFill>
+                  <a:srgbClr val="1F2937"/>
+                </a:solidFill>
+                <a:latin typeface="Noto Sans JP"/>
+              </a:rPr>
+              <a:t>・重要度（Importance）の値が "High"（英語）だと分かる</a:t>
+            </a:r>
+          </a:p>
+          <a:p>
+            <a:r>
+              <a:rPr>
+                <a:solidFill>
+                  <a:srgbClr val="1F2937"/>
+                </a:solidFill>
+                <a:latin typeface="Noto Sans JP"/>
+              </a:rPr>
+              <a:t>・条件の「高」を "High" に直す</a:t>
+            </a:r>
+          </a:p>
+          <a:p>
+            <a:r>
+              <a:rPr>
+                <a:solidFill>
+                  <a:srgbClr val="1F2937"/>
+                </a:solidFill>
+                <a:latin typeface="Noto Sans JP"/>
+              </a:rPr>
+              <a:t>・もう一度、重要度＝高のメールを送る</a:t>
+            </a:r>
+          </a:p>
+          <a:p>
+            <a:r>
+              <a:rPr>
+                <a:solidFill>
+                  <a:srgbClr val="1F2937"/>
+                </a:solidFill>
+                <a:latin typeface="Noto Sans JP"/>
+              </a:rPr>
+              <a:t>　→ 今度こそ「⚠️ 重要メールです」に進む。直った！</a:t>
+            </a:r>
+          </a:p>
+        </p:txBody>
+      </p:sp>
+      <p:sp>
+        <p:nvSpPr>
+          <p:cNvPr id="52" name="Rounded Rectangle 51"/>
+          <p:cNvSpPr/>
+          <p:nvPr/>
+        </p:nvSpPr>
+        <p:spPr>
+          <a:xfrm>
+            <a:off x="7040880" y="1737360"/>
+            <a:ext cx="4572000" cy="4114800"/>
+          </a:xfrm>
+          <a:prstGeom prst="roundRect">
+            <a:avLst/>
+          </a:prstGeom>
+          <a:solidFill>
+            <a:srgbClr val="F1F5FB"/>
+          </a:solidFill>
+          <a:ln w="19050">
+            <a:solidFill>
+              <a:srgbClr val="9CB8D8"/>
+            </a:solidFill>
+          </a:ln>
+          <a:effectLst/>
+        </p:spPr>
+        <p:style>
+          <a:lnRef idx="1">
+            <a:schemeClr val="accent1"/>
+          </a:lnRef>
+          <a:fillRef idx="3">
+            <a:schemeClr val="accent1"/>
+          </a:fillRef>
+          <a:effectRef idx="2">
+            <a:schemeClr val="accent1"/>
+          </a:effectRef>
+          <a:fontRef idx="minor">
+            <a:schemeClr val="lt1"/>
+          </a:fontRef>
+        </p:style>
+        <p:txBody>
+          <a:bodyPr rtlCol="0" anchor="ctr" wrap="square"/>
+          <a:lstStyle/>
+          <a:p>
+            <a:pPr algn="ctr"/>
+            <a:r>
+              <a:rPr sz="1800" b="1">
+                <a:solidFill>
+                  <a:srgbClr val="2A5E9E"/>
+                </a:solidFill>
+              </a:rPr>
+              <a:t>📷 ここにスクショを貼る</a:t>
+            </a:r>
+          </a:p>
+          <a:p>
+            <a:pPr algn="ctr"/>
+            <a:r>
+              <a:rPr sz="1400">
+                <a:solidFill>
+                  <a:srgbClr val="556677"/>
+                </a:solidFill>
+              </a:rPr>
+              <a:t>トリガーの出力で 重要度が
+"High" になっている箇所</a:t>
+            </a:r>
+          </a:p>
+        </p:txBody>
+      </p:sp>
+    </p:spTree>
+  </p:cSld>
+  <p:clrMapOvr>
+    <a:masterClrMapping/>
+  </p:clrMapOvr>
+</p:sld>
+</file>
+
+<file path=ppt/slides/slide15.xml><?xml version="1.0" encoding="utf-8"?>
 <p:sld xmlns:a="http://schemas.openxmlformats.org/drawingml/2006/main" xmlns:r="http://schemas.openxmlformats.org/officeDocument/2006/relationships" xmlns:p="http://schemas.openxmlformats.org/presentationml/2006/main">
   <p:cSld>
     <p:spTree>
@@ -7367,7 +8302,7 @@
 </p:sld>
 </file>
 
-<file path=ppt/slides/slide15.xml><?xml version="1.0" encoding="utf-8"?>
+<file path=ppt/slides/slide16.xml><?xml version="1.0" encoding="utf-8"?>
 <p:sld xmlns:a="http://schemas.openxmlformats.org/drawingml/2006/main" xmlns:r="http://schemas.openxmlformats.org/officeDocument/2006/relationships" xmlns:p="http://schemas.openxmlformats.org/presentationml/2006/main">
   <p:cSld>
     <p:spTree>
@@ -7747,7 +8682,7 @@
               <a:buNone/>
             </a:pPr>
             <a:r>
-              <a:rPr lang="ja-JP" altLang="en-US" sz="3100" b="1">
+              <a:rPr lang="ja-JP" altLang="en-US" sz="3000" b="1">
                 <a:solidFill>
                   <a:srgbClr val="1F2937"/>
                 </a:solidFill>
@@ -7816,7 +8751,7 @@
                 <a:ea typeface="Noto Sans JP" pitchFamily="34" charset="-122"/>
                 <a:cs typeface="Noto Sans JP" pitchFamily="34" charset="-120"/>
               </a:rPr>
-              <a:t>① Formsは「申請の受け皿」、SharePointは「データの置き場所」</a:t>
+              <a:t>① フローが成功（緑）でも、結果が正しいとは限らない</a:t>
             </a:r>
             <a:endParaRPr lang="en-US" sz="2100" dirty="0"/>
           </a:p>
@@ -7831,7 +8766,7 @@
         <p:spPr>
           <a:xfrm>
             <a:off x="2381098" y="2124151"/>
-            <a:ext cx="9063416" cy="685800"/>
+            <a:ext cx="9544202" cy="685800"/>
           </a:xfrm>
           <a:prstGeom prst="rect">
             <a:avLst/>
@@ -7858,10 +8793,105 @@
                 <a:ea typeface="Noto Sans JP" pitchFamily="34" charset="-122"/>
                 <a:cs typeface="Noto Sans JP" pitchFamily="34" charset="-120"/>
               </a:rPr>
-              <a:t>Formsで入力 → SharePointに保存 の流れは、社内のあらゆる申請フローに使い回せます。</a:t>
+              <a:t>赤いエラーが出なくても、間違った方へ静かに進むことがあります。</a:t>
             </a:r>
             <a:endParaRPr lang="en-US" sz="1800" dirty="0"/>
           </a:p>
+          <a:p>
+            <a:r>
+              <a:rPr sz="1800">
+                <a:solidFill>
+                  <a:srgbClr val="4B5563"/>
+                </a:solidFill>
+                <a:latin typeface="Noto Sans JP"/>
+              </a:rPr>
+              <a:t>結果を信じる前に、実行履歴の出力で「本当に合っているか」を確かめましょう。</a:t>
+            </a:r>
+          </a:p>
+        </p:txBody>
+      </p:sp>
+      <p:pic>
+        <p:nvPicPr>
+          <p:cNvPr id="16" name="Image 1" descr="preencoded.png"/>
+          <p:cNvPicPr>
+            <a:picLocks noChangeAspect="1"/>
+          </p:cNvPicPr>
+          <p:nvPr/>
+        </p:nvPicPr>
+        <p:blipFill>
+          <a:blip r:embed="rId4"/>
+          <a:srcRect/>
+          <a:stretch/>
+        </p:blipFill>
+        <p:spPr>
+          <a:xfrm>
+            <a:off x="1429207" y="3642970"/>
+            <a:ext cx="571500" cy="571500"/>
+          </a:xfrm>
+          <a:prstGeom prst="rect">
+            <a:avLst/>
+          </a:prstGeom>
+        </p:spPr>
+      </p:pic>
+      <p:sp>
+        <p:nvSpPr>
+          <p:cNvPr id="17" name="Text 13"/>
+          <p:cNvSpPr txBox="1"/>
+          <p:nvPr/>
+        </p:nvSpPr>
+        <p:spPr>
+          <a:xfrm>
+            <a:off x="2371953" y="3163346"/>
+            <a:ext cx="8686800" cy="381305"/>
+          </a:xfrm>
+          <a:prstGeom prst="rect">
+            <a:avLst/>
+          </a:prstGeom>
+          <a:noFill/>
+          <a:ln/>
+        </p:spPr>
+        <p:txBody>
+          <a:bodyPr wrap="square" lIns="0" tIns="0" rIns="0" bIns="0" rtlCol="0" anchor="ctr"/>
+          <a:lstStyle/>
+          <a:p>
+            <a:pPr marL="0" indent="0" algn="l">
+              <a:buNone/>
+            </a:pPr>
+            <a:r>
+              <a:rPr lang="en-US" sz="2100" b="1" dirty="0">
+                <a:solidFill>
+                  <a:srgbClr val="1F2937"/>
+                </a:solidFill>
+                <a:latin typeface="Noto Sans JP" pitchFamily="34" charset="0"/>
+                <a:ea typeface="Noto Sans JP" pitchFamily="34" charset="-122"/>
+                <a:cs typeface="Noto Sans JP" pitchFamily="34" charset="-120"/>
+              </a:rPr>
+              <a:t>② 後続に値を渡すアクションは、まず出力で「本当の値」を確認</a:t>
+            </a:r>
+            <a:endParaRPr lang="en-US" sz="2100" dirty="0"/>
+          </a:p>
+        </p:txBody>
+      </p:sp>
+      <p:sp>
+        <p:nvSpPr>
+          <p:cNvPr id="18" name="Text 14"/>
+          <p:cNvSpPr txBox="1"/>
+          <p:nvPr/>
+        </p:nvSpPr>
+        <p:spPr>
+          <a:xfrm>
+            <a:off x="2444844" y="3742639"/>
+            <a:ext cx="10172090" cy="685800"/>
+          </a:xfrm>
+          <a:prstGeom prst="rect">
+            <a:avLst/>
+          </a:prstGeom>
+          <a:noFill/>
+          <a:ln/>
+        </p:spPr>
+        <p:txBody>
+          <a:bodyPr wrap="square" lIns="0" tIns="0" rIns="0" bIns="0" rtlCol="0" anchor="ctr"/>
+          <a:lstStyle/>
           <a:p>
             <a:pPr marL="0" indent="0" algn="l">
               <a:lnSpc>
@@ -7870,37 +8900,47 @@
               <a:buNone/>
             </a:pPr>
             <a:r>
-              <a:rPr lang="en-US" sz="1800" b="1" dirty="0">
-                <a:solidFill>
-                  <a:srgbClr val="2563EB"/>
+              <a:rPr lang="en-US" sz="1800" dirty="0">
+                <a:solidFill>
+                  <a:srgbClr val="4B5563"/>
                 </a:solidFill>
                 <a:latin typeface="Noto Sans JP" pitchFamily="34" charset="0"/>
                 <a:ea typeface="Noto Sans JP" pitchFamily="34" charset="-122"/>
                 <a:cs typeface="Noto Sans JP" pitchFamily="34" charset="-120"/>
               </a:rPr>
-              <a:t>今回作るのは経費申請ですが、有休・稟議・備品にもそのまま応用できます。</a:t>
-            </a:r>
-            <a:endParaRPr lang="en-US" sz="1800" dirty="0"/>
+              <a:t>条件に書く前に、実行履歴でそのアクションの出力を見る。</a:t>
+            </a:r>
+          </a:p>
+          <a:p>
+            <a:r>
+              <a:rPr sz="1800">
+                <a:solidFill>
+                  <a:srgbClr val="4B5563"/>
+                </a:solidFill>
+                <a:latin typeface="Noto Sans JP"/>
+              </a:rPr>
+              <a:t>「画面の表示」と「渡る値」は違うことがある、と知っておく。</a:t>
+            </a:r>
           </a:p>
         </p:txBody>
       </p:sp>
       <p:pic>
         <p:nvPicPr>
-          <p:cNvPr id="16" name="Image 1" descr="preencoded.png"/>
+          <p:cNvPr id="19" name="Image 2" descr="preencoded.png"/>
           <p:cNvPicPr>
             <a:picLocks noChangeAspect="1"/>
           </p:cNvPicPr>
           <p:nvPr/>
         </p:nvPicPr>
         <p:blipFill>
-          <a:blip r:embed="rId4"/>
-          <a:srcRect/>
+          <a:blip r:embed="rId5"/>
+          <a:srcRect l="-469" r="-469"/>
           <a:stretch/>
         </p:blipFill>
         <p:spPr>
           <a:xfrm>
-            <a:off x="1429207" y="3642970"/>
-            <a:ext cx="571500" cy="571500"/>
+            <a:off x="1462126" y="5262372"/>
+            <a:ext cx="504749" cy="571500"/>
           </a:xfrm>
           <a:prstGeom prst="rect">
             <a:avLst/>
@@ -7909,14 +8949,14 @@
       </p:pic>
       <p:sp>
         <p:nvSpPr>
-          <p:cNvPr id="17" name="Text 13"/>
+          <p:cNvPr id="20" name="Text 15"/>
           <p:cNvSpPr txBox="1"/>
           <p:nvPr/>
         </p:nvSpPr>
         <p:spPr>
           <a:xfrm>
-            <a:off x="2381098" y="3286354"/>
-            <a:ext cx="8686800" cy="381305"/>
+            <a:off x="2381098" y="4905756"/>
+            <a:ext cx="9544202" cy="381305"/>
           </a:xfrm>
           <a:prstGeom prst="rect">
             <a:avLst/>
@@ -7940,7 +8980,7 @@
                 <a:ea typeface="Noto Sans JP" pitchFamily="34" charset="-122"/>
                 <a:cs typeface="Noto Sans JP" pitchFamily="34" charset="-120"/>
               </a:rPr>
-              <a:t>② 承認結果（outcome）は英語固定「Approve / Reject」</a:t>
+              <a:t>③ 表示と値は違う ── 同じ罠があちこちに</a:t>
             </a:r>
             <a:endParaRPr lang="en-US" sz="2100" dirty="0"/>
           </a:p>
@@ -7948,14 +8988,14 @@
       </p:sp>
       <p:sp>
         <p:nvSpPr>
-          <p:cNvPr id="18" name="Text 14"/>
+          <p:cNvPr id="21" name="Text 16"/>
           <p:cNvSpPr txBox="1"/>
           <p:nvPr/>
         </p:nvSpPr>
         <p:spPr>
           <a:xfrm>
-            <a:off x="2381097" y="3743554"/>
-            <a:ext cx="9810903" cy="685800"/>
+            <a:off x="2381097" y="5362956"/>
+            <a:ext cx="9810597" cy="685800"/>
           </a:xfrm>
           <a:prstGeom prst="rect">
             <a:avLst/>
@@ -7982,153 +9022,20 @@
                 <a:ea typeface="Noto Sans JP" pitchFamily="34" charset="-122"/>
                 <a:cs typeface="Noto Sans JP" pitchFamily="34" charset="-120"/>
               </a:rPr>
-              <a:t>条件分岐で日本語「承認」と比較するとハマります。outcomeは英語Approve/Rejectで比較すること。</a:t>
+              <a:t>重要度＝High/Normal/Low、承認結果＝Approve/Reject、はい・いいえ列＝true/false。</a:t>
             </a:r>
             <a:endParaRPr lang="en-US" sz="1800" dirty="0"/>
           </a:p>
           <a:p>
-            <a:pPr marL="0" indent="0" algn="l">
-              <a:lnSpc>
-                <a:spcPct val="150000"/>
-              </a:lnSpc>
-              <a:buNone/>
-            </a:pPr>
-            <a:r>
-              <a:rPr lang="en-US" sz="1800" b="1" dirty="0">
-                <a:solidFill>
-                  <a:srgbClr val="2563EB"/>
-                </a:solidFill>
-                <a:latin typeface="Noto Sans JP" pitchFamily="34" charset="0"/>
-                <a:ea typeface="Noto Sans JP" pitchFamily="34" charset="-122"/>
-                <a:cs typeface="Noto Sans JP" pitchFamily="34" charset="-120"/>
-              </a:rPr>
-              <a:t>これだけ覚えれば承認フローでつまずきません。</a:t>
-            </a:r>
-            <a:endParaRPr lang="en-US" sz="1800" dirty="0"/>
-          </a:p>
-        </p:txBody>
-      </p:sp>
-      <p:pic>
-        <p:nvPicPr>
-          <p:cNvPr id="19" name="Image 2" descr="preencoded.png"/>
-          <p:cNvPicPr>
-            <a:picLocks noChangeAspect="1"/>
-          </p:cNvPicPr>
-          <p:nvPr/>
-        </p:nvPicPr>
-        <p:blipFill>
-          <a:blip r:embed="rId5"/>
-          <a:srcRect l="-469" r="-469"/>
-          <a:stretch/>
-        </p:blipFill>
-        <p:spPr>
-          <a:xfrm>
-            <a:off x="1462126" y="5262372"/>
-            <a:ext cx="504749" cy="571500"/>
-          </a:xfrm>
-          <a:prstGeom prst="rect">
-            <a:avLst/>
-          </a:prstGeom>
-        </p:spPr>
-      </p:pic>
-      <p:sp>
-        <p:nvSpPr>
-          <p:cNvPr id="20" name="Text 15"/>
-          <p:cNvSpPr txBox="1"/>
-          <p:nvPr/>
-        </p:nvSpPr>
-        <p:spPr>
-          <a:xfrm>
-            <a:off x="2381098" y="4905756"/>
-            <a:ext cx="9544202" cy="381305"/>
-          </a:xfrm>
-          <a:prstGeom prst="rect">
-            <a:avLst/>
-          </a:prstGeom>
-          <a:noFill/>
-          <a:ln/>
-        </p:spPr>
-        <p:txBody>
-          <a:bodyPr wrap="square" lIns="0" tIns="0" rIns="0" bIns="0" rtlCol="0" anchor="ctr"/>
-          <a:lstStyle/>
-          <a:p>
-            <a:pPr marL="0" indent="0" algn="l">
-              <a:buNone/>
-            </a:pPr>
-            <a:r>
-              <a:rPr lang="en-US" sz="2100" b="1" dirty="0">
-                <a:solidFill>
-                  <a:srgbClr val="1F2937"/>
-                </a:solidFill>
-                <a:latin typeface="Noto Sans JP" pitchFamily="34" charset="0"/>
-                <a:ea typeface="Noto Sans JP" pitchFamily="34" charset="-122"/>
-                <a:cs typeface="Noto Sans JP" pitchFamily="34" charset="-120"/>
-              </a:rPr>
-              <a:t>③ 「項目の作成」の {Link} を承認カードに入れる</a:t>
-            </a:r>
-            <a:endParaRPr lang="en-US" sz="2100" dirty="0"/>
-          </a:p>
-        </p:txBody>
-      </p:sp>
-      <p:sp>
-        <p:nvSpPr>
-          <p:cNvPr id="21" name="Text 16"/>
-          <p:cNvSpPr txBox="1"/>
-          <p:nvPr/>
-        </p:nvSpPr>
-        <p:spPr>
-          <a:xfrm>
-            <a:off x="2381097" y="5362956"/>
-            <a:ext cx="9810597" cy="685800"/>
-          </a:xfrm>
-          <a:prstGeom prst="rect">
-            <a:avLst/>
-          </a:prstGeom>
-          <a:noFill/>
-          <a:ln/>
-        </p:spPr>
-        <p:txBody>
-          <a:bodyPr wrap="square" lIns="0" tIns="0" rIns="0" bIns="0" rtlCol="0" anchor="ctr"/>
-          <a:lstStyle/>
-          <a:p>
-            <a:pPr marL="0" indent="0" algn="l">
-              <a:lnSpc>
-                <a:spcPct val="150000"/>
-              </a:lnSpc>
-              <a:buNone/>
-            </a:pPr>
-            <a:r>
-              <a:rPr lang="en-US" sz="1800" dirty="0">
+            <a:r>
+              <a:rPr sz="1800">
                 <a:solidFill>
                   <a:srgbClr val="4B5563"/>
                 </a:solidFill>
-                <a:latin typeface="Noto Sans JP" pitchFamily="34" charset="0"/>
-                <a:ea typeface="Noto Sans JP" pitchFamily="34" charset="-122"/>
-                <a:cs typeface="Noto Sans JP" pitchFamily="34" charset="-120"/>
-              </a:rPr>
-              <a:t>承認カードに項目のリンクを入れておくと、承認者がTeamsから直接SharePointへ飛べます。</a:t>
-            </a:r>
-            <a:endParaRPr lang="en-US" sz="1800" dirty="0"/>
-          </a:p>
-          <a:p>
-            <a:pPr marL="0" indent="0" algn="l">
-              <a:lnSpc>
-                <a:spcPct val="150000"/>
-              </a:lnSpc>
-              <a:buNone/>
-            </a:pPr>
-            <a:r>
-              <a:rPr lang="en-US" sz="1800" b="1" dirty="0">
-                <a:solidFill>
-                  <a:srgbClr val="2563EB"/>
-                </a:solidFill>
-                <a:latin typeface="Noto Sans JP" pitchFamily="34" charset="0"/>
-                <a:ea typeface="Noto Sans JP" pitchFamily="34" charset="-122"/>
-                <a:cs typeface="Noto Sans JP" pitchFamily="34" charset="-120"/>
-              </a:rPr>
-              <a:t>小さな工夫ですが、運用ストレスがぐっと減ります。</a:t>
-            </a:r>
-            <a:endParaRPr lang="en-US" sz="1800" dirty="0"/>
+                <a:latin typeface="Noto Sans JP"/>
+              </a:rPr>
+              <a:t>どれも英語や真偽値。出力を見れば「本当の値」が分かります。</a:t>
+            </a:r>
           </a:p>
         </p:txBody>
       </p:sp>
@@ -8179,7 +9086,7 @@
 </p:sld>
 </file>
 
-<file path=ppt/slides/slide16.xml><?xml version="1.0" encoding="utf-8"?>
+<file path=ppt/slides/slide17.xml><?xml version="1.0" encoding="utf-8"?>
 <p:sld xmlns:a="http://schemas.openxmlformats.org/drawingml/2006/main" xmlns:r="http://schemas.openxmlformats.org/officeDocument/2006/relationships" xmlns:p="http://schemas.openxmlformats.org/presentationml/2006/main">
   <p:cSld name="Slide 13">
     <p:spTree>
@@ -8413,8 +9320,8 @@
         </p:nvSpPr>
         <p:spPr>
           <a:xfrm>
-            <a:off x="1552652" y="2066544"/>
-            <a:ext cx="2563063" cy="637793"/>
+            <a:off x="1417320" y="2066544"/>
+            <a:ext cx="2468880" cy="637793"/>
           </a:xfrm>
           <a:prstGeom prst="roundRect">
             <a:avLst>
@@ -8449,8 +9356,8 @@
         </p:nvSpPr>
         <p:spPr>
           <a:xfrm>
-            <a:off x="1428292" y="2138930"/>
-            <a:ext cx="2781605" cy="399021"/>
+            <a:off x="1417320" y="2181647"/>
+            <a:ext cx="2468880" cy="399021"/>
           </a:xfrm>
           <a:prstGeom prst="rect">
             <a:avLst/>
@@ -8484,7 +9391,7 @@
                 <a:ea typeface="Noto Sans JP" pitchFamily="34" charset="-122"/>
                 <a:cs typeface="Noto Sans JP" pitchFamily="34" charset="-120"/>
               </a:rPr>
-              <a:t>経費申請の自動化</a:t>
+              <a:t>重要メール通知</a:t>
             </a:r>
             <a:endParaRPr lang="en-US" sz="3600" dirty="0"/>
           </a:p>
@@ -8523,25 +9430,18 @@
                 <a:ea typeface="Noto Sans JP" pitchFamily="34" charset="-122"/>
                 <a:cs typeface="Noto Sans JP" pitchFamily="34" charset="-120"/>
               </a:rPr>
-              <a:t>Forms入力→SP登録</a:t>
-            </a:r>
-          </a:p>
-          <a:p>
-            <a:pPr marL="0" indent="0" algn="l">
-              <a:buNone/>
-            </a:pPr>
-            <a:r>
-              <a:rPr lang="en-US" sz="2000" b="1">
+              <a:t>重要度が高いメールを</a:t>
+            </a:r>
+          </a:p>
+          <a:p>
+            <a:r>
+              <a:rPr sz="2000" b="1">
                 <a:solidFill>
                   <a:srgbClr val="1F2937"/>
                 </a:solidFill>
-                <a:latin typeface="Noto Sans JP" pitchFamily="34" charset="0"/>
-                <a:ea typeface="Noto Sans JP" pitchFamily="34" charset="-122"/>
-                <a:cs typeface="Noto Sans JP" pitchFamily="34" charset="-120"/>
-              </a:rPr>
-              <a:t>→上司承認→経理に通知</a:t>
-            </a:r>
-            <a:endParaRPr lang="en-US" sz="3600" dirty="0"/>
+              </a:rPr>
+              <a:t>Teams等へすぐ通知</a:t>
+            </a:r>
           </a:p>
         </p:txBody>
       </p:sp>
@@ -8553,7 +9453,7 @@
         </p:nvSpPr>
         <p:spPr>
           <a:xfrm>
-            <a:off x="421292" y="3873215"/>
+            <a:off x="619049" y="3858372"/>
             <a:ext cx="3594761" cy="1002424"/>
           </a:xfrm>
           <a:prstGeom prst="rect">
@@ -8581,65 +9481,20 @@
                 <a:ea typeface="Noto Sans JP" pitchFamily="34" charset="-122"/>
                 <a:cs typeface="Noto Sans JP" pitchFamily="34" charset="-120"/>
               </a:rPr>
-              <a:t>Forms＋SharePoint</a:t>
-            </a:r>
-          </a:p>
-          <a:p>
-            <a:pPr marL="0" indent="0" algn="l">
-              <a:lnSpc>
-                <a:spcPct val="150000"/>
-              </a:lnSpc>
-              <a:buNone/>
-            </a:pPr>
-            <a:r>
-              <a:rPr lang="en-US" sz="1600" b="1">
-                <a:solidFill>
-                  <a:srgbClr val="4B5563"/>
-                </a:solidFill>
-                <a:latin typeface="Noto Sans JP" pitchFamily="34" charset="0"/>
-                <a:ea typeface="Noto Sans JP" pitchFamily="34" charset="-122"/>
-                <a:cs typeface="Noto Sans JP" pitchFamily="34" charset="-120"/>
-              </a:rPr>
-              <a:t>→Approvals→Teams</a:t>
-            </a:r>
-          </a:p>
-          <a:p>
-            <a:pPr marL="0" indent="0" algn="l">
-              <a:lnSpc>
-                <a:spcPct val="150000"/>
-              </a:lnSpc>
-              <a:buNone/>
-            </a:pPr>
-            <a:r>
-              <a:rPr lang="en-US" sz="1600" b="1" dirty="0">
-                <a:solidFill>
-                  <a:srgbClr val="4B5563"/>
-                </a:solidFill>
-                <a:latin typeface="Noto Sans JP" pitchFamily="34" charset="0"/>
-                <a:ea typeface="Noto Sans JP" pitchFamily="34" charset="-122"/>
-                <a:cs typeface="Noto Sans JP" pitchFamily="34" charset="-120"/>
-              </a:rPr>
-              <a:t>結果でStatus更新まで自動</a:t>
-            </a:r>
-            <a:endParaRPr lang="en-US" sz="1600" b="1" dirty="0"/>
-          </a:p>
-          <a:p>
-            <a:pPr marL="0" indent="0" algn="l">
-              <a:lnSpc>
-                <a:spcPct val="150000"/>
-              </a:lnSpc>
-              <a:buNone/>
-            </a:pPr>
-            <a:endParaRPr lang="en-US" sz="1600" b="1" dirty="0"/>
-          </a:p>
-          <a:p>
-            <a:pPr marL="0" indent="0" algn="l">
-              <a:lnSpc>
-                <a:spcPct val="150000"/>
-              </a:lnSpc>
-              <a:buNone/>
-            </a:pPr>
-            <a:endParaRPr lang="en-US" sz="1600" b="1" dirty="0"/>
+              <a:t>新しいメールが届いたとき</a:t>
+            </a:r>
+          </a:p>
+          <a:p>
+            <a:r>
+              <a:rPr sz="1600" b="1"/>
+              <a:t>→ 条件（重要度）</a:t>
+            </a:r>
+          </a:p>
+          <a:p>
+            <a:r>
+              <a:rPr sz="1600" b="1"/>
+              <a:t>→ Teamsで通知</a:t>
+            </a:r>
           </a:p>
         </p:txBody>
       </p:sp>
@@ -8710,25 +9565,8 @@
                 <a:ea typeface="Noto Sans JP" pitchFamily="34" charset="-122"/>
                 <a:cs typeface="Noto Sans JP" pitchFamily="34" charset="-120"/>
               </a:rPr>
-              <a:t>Forms→SP→Approvals</a:t>
-            </a:r>
-          </a:p>
-          <a:p>
-            <a:pPr marL="0" indent="0" algn="l">
-              <a:buNone/>
-            </a:pPr>
-            <a:r>
-              <a:rPr lang="en-US" sz="2000" b="1" dirty="0">
-                <a:solidFill>
-                  <a:srgbClr val="A78BFA"/>
-                </a:solidFill>
-                <a:latin typeface="Noto Sans JP" pitchFamily="34" charset="0"/>
-                <a:ea typeface="Noto Sans JP" pitchFamily="34" charset="-122"/>
-                <a:cs typeface="Noto Sans JP" pitchFamily="34" charset="-120"/>
-              </a:rPr>
-              <a:t>→Teams</a:t>
-            </a:r>
-            <a:endParaRPr lang="en-US" sz="2800" dirty="0"/>
+              <a:t>メール → 条件 → 通知</a:t>
+            </a:r>
           </a:p>
         </p:txBody>
       </p:sp>
@@ -8805,9 +9643,6 @@
           <a:bodyPr wrap="square"/>
           <a:lstStyle/>
           <a:p>
-            <a:r>
-              <a:t>② 配列は first() / last() / [0]、件数は length()</a:t>
-            </a:r>
             <a:endParaRPr lang="ja-JP" altLang="en-US"/>
           </a:p>
         </p:txBody>
@@ -8843,8 +9678,8 @@
         </p:nvSpPr>
         <p:spPr>
           <a:xfrm>
-            <a:off x="5735387" y="1998232"/>
-            <a:ext cx="2063140" cy="588606"/>
+            <a:off x="5440680" y="1998232"/>
+            <a:ext cx="2468880" cy="588606"/>
           </a:xfrm>
           <a:prstGeom prst="roundRect">
             <a:avLst>
@@ -8879,8 +9714,8 @@
         </p:nvSpPr>
         <p:spPr>
           <a:xfrm>
-            <a:off x="6052555" y="2125428"/>
-            <a:ext cx="1544632" cy="334213"/>
+            <a:off x="5440680" y="2125428"/>
+            <a:ext cx="2468880" cy="334213"/>
           </a:xfrm>
           <a:prstGeom prst="rect">
             <a:avLst/>
@@ -8914,81 +9749,57 @@
                 <a:ea typeface="Noto Sans JP" pitchFamily="34" charset="-122"/>
                 <a:cs typeface="Noto Sans JP" pitchFamily="34" charset="-120"/>
               </a:rPr>
-              <a:t>③ outputs('アクション名')?['body/value'] が基本パス</a:t>
-            </a:r>
-          </a:p>
+              <a:t>差出人で振分け</a:t>
+            </a:r>
+          </a:p>
+        </p:txBody>
+      </p:sp>
+      <p:sp>
+        <p:nvSpPr>
+          <p:cNvPr id="21" name="Text 16"/>
+          <p:cNvSpPr txBox="1"/>
+          <p:nvPr/>
+        </p:nvSpPr>
+        <p:spPr>
+          <a:xfrm>
+            <a:off x="4416094" y="3038477"/>
+            <a:ext cx="3829965" cy="503999"/>
+          </a:xfrm>
+          <a:prstGeom prst="rect">
+            <a:avLst/>
+          </a:prstGeom>
+          <a:noFill/>
+          <a:ln/>
+        </p:spPr>
+        <p:txBody>
+          <a:bodyPr wrap="square" lIns="0" tIns="0" rIns="0" bIns="0" rtlCol="0" anchor="ctr"/>
+          <a:lstStyle/>
           <a:p>
             <a:pPr marL="0" indent="0" algn="l">
               <a:buNone/>
             </a:pPr>
             <a:r>
-              <a:rPr lang="en-US" sz="2000" b="1">
-                <a:solidFill>
-                  <a:srgbClr val="047857"/>
+              <a:rPr lang="en-US" sz="2000" b="1" dirty="0">
+                <a:solidFill>
+                  <a:srgbClr val="1F2937"/>
                 </a:solidFill>
                 <a:latin typeface="Noto Sans JP" pitchFamily="34" charset="0"/>
                 <a:ea typeface="Noto Sans JP" pitchFamily="34" charset="-122"/>
                 <a:cs typeface="Noto Sans JP" pitchFamily="34" charset="-120"/>
               </a:rPr>
-              <a:t>自動承認</a:t>
+              <a:t>上司・取引先のメールを</a:t>
             </a:r>
             <a:endParaRPr lang="en-US" sz="3600" dirty="0"/>
           </a:p>
-        </p:txBody>
-      </p:sp>
-      <p:sp>
-        <p:nvSpPr>
-          <p:cNvPr id="21" name="Text 16"/>
-          <p:cNvSpPr txBox="1"/>
-          <p:nvPr/>
-        </p:nvSpPr>
-        <p:spPr>
-          <a:xfrm>
-            <a:off x="4457241" y="3031102"/>
-            <a:ext cx="3829965" cy="503999"/>
-          </a:xfrm>
-          <a:prstGeom prst="rect">
-            <a:avLst/>
-          </a:prstGeom>
-          <a:noFill/>
-          <a:ln/>
-        </p:spPr>
-        <p:txBody>
-          <a:bodyPr wrap="square" lIns="0" tIns="0" rIns="0" bIns="0" rtlCol="0" anchor="ctr"/>
-          <a:lstStyle/>
-          <a:p>
-            <a:pPr marL="0" indent="0" algn="l">
-              <a:buNone/>
-            </a:pPr>
-            <a:r>
-              <a:rPr lang="en-US" sz="2000" b="1" dirty="0">
+          <a:p>
+            <a:r>
+              <a:rPr sz="2000" b="1">
                 <a:solidFill>
                   <a:srgbClr val="1F2937"/>
                 </a:solidFill>
-                <a:latin typeface="Noto Sans JP" pitchFamily="34" charset="0"/>
-                <a:ea typeface="Noto Sans JP" pitchFamily="34" charset="-122"/>
-                <a:cs typeface="Noto Sans JP" pitchFamily="34" charset="-120"/>
-              </a:rPr>
-              <a:t>出力タブのJSONを上から読みながら ? と / で繋いでいく、これだけ。</a:t>
-            </a:r>
-            <a:endParaRPr lang="en-US" sz="3600" dirty="0"/>
-          </a:p>
-          <a:p>
-            <a:pPr marL="0" indent="0" algn="l">
-              <a:buNone/>
-            </a:pPr>
-            <a:r>
-              <a:rPr lang="en-US" sz="2000" b="1" dirty="0">
-                <a:solidFill>
-                  <a:srgbClr val="1F2937"/>
-                </a:solidFill>
-                <a:latin typeface="Noto Sans JP" pitchFamily="34" charset="0"/>
-                <a:ea typeface="Noto Sans JP" pitchFamily="34" charset="-122"/>
-                <a:cs typeface="Noto Sans JP" pitchFamily="34" charset="-120"/>
-              </a:rPr>
-              <a:t>ネストが深くても、JSONの形と式の形は1対1で対応しているので恐れない。</a:t>
-            </a:r>
-            <a:endParaRPr lang="en-US" sz="3600" dirty="0"/>
+              </a:rPr>
+              <a:t>別フォルダへ自動仕分け</a:t>
+            </a:r>
           </a:p>
         </p:txBody>
       </p:sp>
@@ -9000,7 +9811,7 @@
         </p:nvSpPr>
         <p:spPr>
           <a:xfrm>
-            <a:off x="4312056" y="3873215"/>
+            <a:off x="4509813" y="3873215"/>
             <a:ext cx="3594761" cy="1105967"/>
           </a:xfrm>
           <a:prstGeom prst="rect">
@@ -9028,65 +9839,20 @@
                 <a:ea typeface="Noto Sans JP" pitchFamily="34" charset="-122"/>
                 <a:cs typeface="Noto Sans JP" pitchFamily="34" charset="-120"/>
               </a:rPr>
-              <a:t>Forms→SharePoint</a:t>
-            </a:r>
-          </a:p>
-          <a:p>
-            <a:pPr marL="0" indent="0" algn="l">
-              <a:lnSpc>
-                <a:spcPct val="150000"/>
-              </a:lnSpc>
-              <a:buNone/>
-            </a:pPr>
-            <a:r>
-              <a:rPr lang="en-US" sz="1600" b="1">
-                <a:solidFill>
-                  <a:srgbClr val="4B5563"/>
-                </a:solidFill>
-                <a:latin typeface="Noto Sans JP" pitchFamily="34" charset="0"/>
-                <a:ea typeface="Noto Sans JP" pitchFamily="34" charset="-122"/>
-                <a:cs typeface="Noto Sans JP" pitchFamily="34" charset="-120"/>
-              </a:rPr>
-              <a:t>→Approvals→Teams</a:t>
-            </a:r>
-          </a:p>
-          <a:p>
-            <a:pPr marL="0" indent="0" algn="l">
-              <a:lnSpc>
-                <a:spcPct val="150000"/>
-              </a:lnSpc>
-              <a:buNone/>
-            </a:pPr>
-            <a:r>
-              <a:rPr lang="en-US" sz="1600" b="1" dirty="0">
-                <a:solidFill>
-                  <a:srgbClr val="4B5563"/>
-                </a:solidFill>
-                <a:latin typeface="Noto Sans JP" pitchFamily="34" charset="0"/>
-                <a:ea typeface="Noto Sans JP" pitchFamily="34" charset="-122"/>
-                <a:cs typeface="Noto Sans JP" pitchFamily="34" charset="-120"/>
-              </a:rPr>
-              <a:t>承認結果で台帳更新</a:t>
-            </a:r>
-            <a:endParaRPr lang="en-US" sz="1600" b="1" dirty="0"/>
-          </a:p>
-          <a:p>
-            <a:pPr marL="0" indent="0" algn="l">
-              <a:lnSpc>
-                <a:spcPct val="150000"/>
-              </a:lnSpc>
-              <a:buNone/>
-            </a:pPr>
-            <a:endParaRPr lang="en-US" sz="1600" b="1" dirty="0"/>
-          </a:p>
-          <a:p>
-            <a:pPr marL="0" indent="0" algn="l">
-              <a:lnSpc>
-                <a:spcPct val="150000"/>
-              </a:lnSpc>
-              <a:buNone/>
-            </a:pPr>
-            <a:endParaRPr lang="en-US" sz="1600" b="1" dirty="0"/>
+              <a:t>新しいメールが届いたとき</a:t>
+            </a:r>
+          </a:p>
+          <a:p>
+            <a:r>
+              <a:rPr sz="1600" b="1"/>
+              <a:t>→ 条件（差出人）</a:t>
+            </a:r>
+          </a:p>
+          <a:p>
+            <a:r>
+              <a:rPr sz="1600" b="1"/>
+              <a:t>→ フォルダへ移動</a:t>
+            </a:r>
           </a:p>
         </p:txBody>
       </p:sp>
@@ -9157,25 +9923,8 @@
                 <a:ea typeface="Noto Sans JP" pitchFamily="34" charset="-122"/>
                 <a:cs typeface="Noto Sans JP" pitchFamily="34" charset="-120"/>
               </a:rPr>
-              <a:t>Forms→SP→Approvals</a:t>
-            </a:r>
-          </a:p>
-          <a:p>
-            <a:pPr marL="0" indent="0" algn="l">
-              <a:buNone/>
-            </a:pPr>
-            <a:r>
-              <a:rPr lang="en-US" sz="2000" b="1" dirty="0">
-                <a:solidFill>
-                  <a:srgbClr val="34D399"/>
-                </a:solidFill>
-                <a:latin typeface="Noto Sans JP" pitchFamily="34" charset="0"/>
-                <a:ea typeface="Noto Sans JP" pitchFamily="34" charset="-122"/>
-                <a:cs typeface="Noto Sans JP" pitchFamily="34" charset="-120"/>
-              </a:rPr>
-              <a:t>→Teams</a:t>
-            </a:r>
-            <a:endParaRPr lang="en-US" sz="2800" dirty="0"/>
+              <a:t>メール → 条件 → 仕分け</a:t>
+            </a:r>
           </a:p>
         </p:txBody>
       </p:sp>
@@ -9287,8 +10036,8 @@
         </p:nvSpPr>
         <p:spPr>
           <a:xfrm>
-            <a:off x="9591531" y="1952181"/>
-            <a:ext cx="2162878" cy="775966"/>
+            <a:off x="9372600" y="1952181"/>
+            <a:ext cx="2468880" cy="775966"/>
           </a:xfrm>
           <a:prstGeom prst="roundRect">
             <a:avLst>
@@ -9323,8 +10072,8 @@
         </p:nvSpPr>
         <p:spPr>
           <a:xfrm>
-            <a:off x="9635613" y="2215734"/>
-            <a:ext cx="2452753" cy="775966"/>
+            <a:off x="9372600" y="2215734"/>
+            <a:ext cx="2468880" cy="775966"/>
           </a:xfrm>
           <a:prstGeom prst="rect">
             <a:avLst/>
@@ -9358,9 +10107,31 @@
                 <a:ea typeface="Noto Sans JP" pitchFamily="34" charset="-122"/>
                 <a:cs typeface="Noto Sans JP" pitchFamily="34" charset="-120"/>
               </a:rPr>
-              <a:t>稟議書の</a:t>
-            </a:r>
-          </a:p>
+              <a:t>件名で仕分け</a:t>
+            </a:r>
+          </a:p>
+        </p:txBody>
+      </p:sp>
+      <p:sp>
+        <p:nvSpPr>
+          <p:cNvPr id="32" name="Text 25"/>
+          <p:cNvSpPr txBox="1"/>
+          <p:nvPr/>
+        </p:nvSpPr>
+        <p:spPr>
+          <a:xfrm>
+            <a:off x="8356532" y="3059349"/>
+            <a:ext cx="3294686" cy="503999"/>
+          </a:xfrm>
+          <a:prstGeom prst="rect">
+            <a:avLst/>
+          </a:prstGeom>
+          <a:noFill/>
+          <a:ln/>
+        </p:spPr>
+        <p:txBody>
+          <a:bodyPr wrap="square" lIns="0" tIns="0" rIns="0" bIns="0" rtlCol="0" anchor="ctr"/>
+          <a:lstStyle/>
           <a:p>
             <a:pPr marL="0" indent="0" algn="l">
               <a:buNone/>
@@ -9368,75 +10139,24 @@
             <a:r>
               <a:rPr lang="en-US" sz="2000" b="1">
                 <a:solidFill>
-                  <a:srgbClr val="1D4ED8"/>
+                  <a:srgbClr val="1F2937"/>
                 </a:solidFill>
                 <a:latin typeface="Noto Sans JP" pitchFamily="34" charset="0"/>
                 <a:ea typeface="Noto Sans JP" pitchFamily="34" charset="-122"/>
                 <a:cs typeface="Noto Sans JP" pitchFamily="34" charset="-120"/>
               </a:rPr>
-              <a:t>多段承認</a:t>
-            </a:r>
-          </a:p>
-          <a:p>
-            <a:pPr marL="0" indent="0" algn="l">
-              <a:buNone/>
-            </a:pPr>
-            <a:endParaRPr lang="en-US" sz="3600" dirty="0"/>
-          </a:p>
-        </p:txBody>
-      </p:sp>
-      <p:sp>
-        <p:nvSpPr>
-          <p:cNvPr id="32" name="Text 25"/>
-          <p:cNvSpPr txBox="1"/>
-          <p:nvPr/>
-        </p:nvSpPr>
-        <p:spPr>
-          <a:xfrm>
-            <a:off x="8356532" y="3059349"/>
-            <a:ext cx="3294686" cy="503999"/>
-          </a:xfrm>
-          <a:prstGeom prst="rect">
-            <a:avLst/>
-          </a:prstGeom>
-          <a:noFill/>
-          <a:ln/>
-        </p:spPr>
-        <p:txBody>
-          <a:bodyPr wrap="square" lIns="0" tIns="0" rIns="0" bIns="0" rtlCol="0" anchor="ctr"/>
-          <a:lstStyle/>
-          <a:p>
-            <a:pPr marL="0" indent="0" algn="l">
-              <a:buNone/>
-            </a:pPr>
-            <a:r>
-              <a:rPr lang="en-US" sz="2000" b="1">
+              <a:t>件名に特定の語を含む</a:t>
+            </a:r>
+          </a:p>
+          <a:p>
+            <a:r>
+              <a:rPr sz="2000" b="1">
                 <a:solidFill>
                   <a:srgbClr val="1F2937"/>
                 </a:solidFill>
-                <a:latin typeface="Noto Sans JP" pitchFamily="34" charset="0"/>
-                <a:ea typeface="Noto Sans JP" pitchFamily="34" charset="-122"/>
-                <a:cs typeface="Noto Sans JP" pitchFamily="34" charset="-120"/>
-              </a:rPr>
-              <a:t>稟議書をFormsで起票</a:t>
-            </a:r>
-          </a:p>
-          <a:p>
-            <a:pPr marL="0" indent="0" algn="l">
-              <a:buNone/>
-            </a:pPr>
-            <a:r>
-              <a:rPr lang="en-US" sz="2000" b="1">
-                <a:solidFill>
-                  <a:srgbClr val="1F2937"/>
-                </a:solidFill>
-                <a:latin typeface="Noto Sans JP" pitchFamily="34" charset="0"/>
-                <a:ea typeface="Noto Sans JP" pitchFamily="34" charset="-122"/>
-                <a:cs typeface="Noto Sans JP" pitchFamily="34" charset="-120"/>
-              </a:rPr>
-              <a:t>→課長→部長と順に承認</a:t>
-            </a:r>
-            <a:endParaRPr lang="en-US" sz="3600" dirty="0"/>
+              </a:rPr>
+              <a:t>メールを自動で記録</a:t>
+            </a:r>
           </a:p>
         </p:txBody>
       </p:sp>
@@ -9448,7 +10168,7 @@
         </p:nvSpPr>
         <p:spPr>
           <a:xfrm>
-            <a:off x="8318854" y="3885659"/>
+            <a:off x="8516611" y="3885659"/>
             <a:ext cx="3467202" cy="1415952"/>
           </a:xfrm>
           <a:prstGeom prst="rect">
@@ -9476,65 +10196,20 @@
                 <a:ea typeface="Noto Sans JP" pitchFamily="34" charset="-122"/>
                 <a:cs typeface="Noto Sans JP" pitchFamily="34" charset="-120"/>
               </a:rPr>
-              <a:t>Forms→SharePoint</a:t>
-            </a:r>
-          </a:p>
-          <a:p>
-            <a:pPr marL="0" indent="0" algn="l">
-              <a:lnSpc>
-                <a:spcPct val="150000"/>
-              </a:lnSpc>
-              <a:buNone/>
-            </a:pPr>
-            <a:r>
-              <a:rPr lang="en-US" sz="1600" b="1">
-                <a:solidFill>
-                  <a:srgbClr val="4B5563"/>
-                </a:solidFill>
-                <a:latin typeface="Noto Sans JP" pitchFamily="34" charset="0"/>
-                <a:ea typeface="Noto Sans JP" pitchFamily="34" charset="-122"/>
-                <a:cs typeface="Noto Sans JP" pitchFamily="34" charset="-120"/>
-              </a:rPr>
-              <a:t>→Approvals×複数</a:t>
-            </a:r>
-          </a:p>
-          <a:p>
-            <a:pPr marL="0" indent="0" algn="l">
-              <a:lnSpc>
-                <a:spcPct val="150000"/>
-              </a:lnSpc>
-              <a:buNone/>
-            </a:pPr>
-            <a:r>
-              <a:rPr lang="en-US" sz="1600" b="1" dirty="0">
-                <a:solidFill>
-                  <a:srgbClr val="4B5563"/>
-                </a:solidFill>
-                <a:latin typeface="Noto Sans JP" pitchFamily="34" charset="0"/>
-                <a:ea typeface="Noto Sans JP" pitchFamily="34" charset="-122"/>
-                <a:cs typeface="Noto Sans JP" pitchFamily="34" charset="-120"/>
-              </a:rPr>
-              <a:t>最終承認後にTeams通知</a:t>
-            </a:r>
-            <a:endParaRPr lang="en-US" sz="1600" b="1" dirty="0"/>
-          </a:p>
-          <a:p>
-            <a:pPr marL="0" indent="0" algn="l">
-              <a:lnSpc>
-                <a:spcPct val="150000"/>
-              </a:lnSpc>
-              <a:buNone/>
-            </a:pPr>
-            <a:endParaRPr lang="en-US" sz="1600" b="1" dirty="0"/>
-          </a:p>
-          <a:p>
-            <a:pPr marL="0" indent="0" algn="l">
-              <a:lnSpc>
-                <a:spcPct val="150000"/>
-              </a:lnSpc>
-              <a:buNone/>
-            </a:pPr>
-            <a:endParaRPr lang="en-US" sz="1600" b="1" dirty="0"/>
+              <a:t>新しいメールが届いたとき</a:t>
+            </a:r>
+          </a:p>
+          <a:p>
+            <a:r>
+              <a:rPr sz="1600" b="1"/>
+              <a:t>→ 条件（件名）</a:t>
+            </a:r>
+          </a:p>
+          <a:p>
+            <a:r>
+              <a:rPr sz="1600" b="1"/>
+              <a:t>→ リストに記録</a:t>
+            </a:r>
           </a:p>
         </p:txBody>
       </p:sp>
@@ -9652,7 +10327,7 @@
               <a:buNone/>
             </a:pPr>
             <a:r>
-              <a:rPr lang="en-US" sz="4500" b="1">
+              <a:rPr lang="en-US" sz="3000" b="1">
                 <a:solidFill>
                   <a:srgbClr val="1F2937"/>
                 </a:solidFill>
@@ -9660,25 +10335,8 @@
                 <a:ea typeface="Noto Sans JP" pitchFamily="34" charset="-122"/>
                 <a:cs typeface="Noto Sans JP" pitchFamily="34" charset="-120"/>
               </a:rPr>
-              <a:t>Forms × SharePoint × 承認 × Teams</a:t>
-            </a:r>
-          </a:p>
-          <a:p>
-            <a:pPr marL="0" indent="0" algn="l">
-              <a:buNone/>
-            </a:pPr>
-            <a:r>
-              <a:rPr lang="en-US" sz="4500" b="1">
-                <a:solidFill>
-                  <a:srgbClr val="1F2937"/>
-                </a:solidFill>
-                <a:latin typeface="Noto Sans JP" pitchFamily="34" charset="0"/>
-                <a:ea typeface="Noto Sans JP" pitchFamily="34" charset="-122"/>
-                <a:cs typeface="Noto Sans JP" pitchFamily="34" charset="-120"/>
-              </a:rPr>
-              <a:t>実務応用の総まとめ</a:t>
-            </a:r>
-            <a:endParaRPr lang="en-US" sz="4500" dirty="0"/>
+              <a:t>メールの仕分けは応用がきく</a:t>
+            </a:r>
           </a:p>
         </p:txBody>
       </p:sp>
@@ -10094,7 +10752,7 @@
 </p:sld>
 </file>
 
-<file path=ppt/slides/slide17.xml><?xml version="1.0" encoding="utf-8"?>
+<file path=ppt/slides/slide18.xml><?xml version="1.0" encoding="utf-8"?>
 <p:sld xmlns:a="http://schemas.openxmlformats.org/drawingml/2006/main" xmlns:r="http://schemas.openxmlformats.org/officeDocument/2006/relationships" xmlns:p="http://schemas.openxmlformats.org/presentationml/2006/main">
   <p:cSld>
     <p:spTree>
@@ -10364,7 +11022,7 @@
                 <a:ea typeface="Noto Sans JP" pitchFamily="34" charset="-122"/>
                 <a:cs typeface="Noto Sans JP" pitchFamily="34" charset="-120"/>
               </a:rPr>
-              <a:t>申請件数を毎朝Teams通知</a:t>
+              <a:t>チャットをご確認ください</a:t>
             </a:r>
             <a:endParaRPr lang="en-US" sz="2400" dirty="0"/>
           </a:p>
@@ -10403,7 +11061,7 @@
                 <a:ea typeface="Noto Sans JP" pitchFamily="34" charset="-122"/>
                 <a:cs typeface="Noto Sans JP" pitchFamily="34" charset="-120"/>
               </a:rPr>
-              <a:t>経費申請の未承認件数を</a:t>
+              <a:t>このあとチャット欄にアンケートURLを貼ります。</a:t>
             </a:r>
             <a:endParaRPr lang="en-US" sz="1200" dirty="0"/>
           </a:p>
@@ -10488,7 +11146,7 @@
                 <a:ea typeface="Noto Sans JP" pitchFamily="34" charset="-122"/>
                 <a:cs typeface="Noto Sans JP" pitchFamily="34" charset="-120"/>
               </a:rPr>
-              <a:t>length() を使う</a:t>
+              <a:t>安心の匿名フォーム</a:t>
             </a:r>
             <a:endParaRPr lang="en-US" sz="2400" dirty="0"/>
           </a:p>
@@ -10664,7 +11322,7 @@
                 <a:ea typeface="Noto Sans JP" pitchFamily="34" charset="-122"/>
                 <a:cs typeface="Noto Sans JP" pitchFamily="34" charset="-120"/>
               </a:rPr>
-              <a:t>配列の1件目を取得し</a:t>
+              <a:t>PA45 バッジ</a:t>
             </a:r>
             <a:endParaRPr lang="en-US" sz="3200" dirty="0"/>
           </a:p>
@@ -10894,7 +11552,7 @@
                 <a:ea typeface="Noto Sans JP" pitchFamily="34" charset="-122"/>
                 <a:cs typeface="Noto Sans JP" pitchFamily="34" charset="-120"/>
               </a:rPr>
-              <a:t>深いネストから</a:t>
+              <a:t>PA45｜第11回</a:t>
             </a:r>
             <a:endParaRPr lang="en-US" sz="1000" dirty="0"/>
           </a:p>
@@ -10933,7 +11591,7 @@
                 <a:ea typeface="Noto Sans JP" pitchFamily="34" charset="-122"/>
                 <a:cs typeface="Noto Sans JP" pitchFamily="34" charset="-120"/>
               </a:rPr>
-              <a:t>API応答の深いJSONを</a:t>
+              <a:t>|</a:t>
             </a:r>
             <a:endParaRPr lang="en-US" sz="1000" dirty="0"/>
           </a:p>
@@ -10972,7 +11630,7 @@
                 <a:ea typeface="Noto Sans JP" pitchFamily="34" charset="-122"/>
                 <a:cs typeface="Noto Sans JP" pitchFamily="34" charset="-120"/>
               </a:rPr>
-              <a:t>outputs('XX')</a:t>
+              <a:t>#PA45</a:t>
             </a:r>
             <a:endParaRPr lang="en-US" sz="1000" dirty="0"/>
           </a:p>
@@ -11402,1051 +12060,6 @@
 </p:sld>
 </file>
 
-<file path=ppt/slides/slide18.xml><?xml version="1.0" encoding="utf-8"?>
-<p:sld xmlns:a="http://schemas.openxmlformats.org/drawingml/2006/main" xmlns:p="http://schemas.openxmlformats.org/presentationml/2006/main" xmlns:r="http://schemas.openxmlformats.org/officeDocument/2006/relationships">
-  <p:cSld>
-    <p:spTree>
-      <p:nvGrpSpPr>
-        <p:cNvPr id="1" name=""/>
-        <p:cNvGrpSpPr/>
-        <p:nvPr/>
-      </p:nvGrpSpPr>
-      <p:grpSpPr/>
-      <p:sp>
-        <p:nvSpPr>
-          <p:cNvPr id="2" name="Shape 0"/>
-          <p:cNvSpPr/>
-          <p:nvPr/>
-        </p:nvSpPr>
-        <p:spPr>
-          <a:xfrm>
-            <a:off x="0" y="0"/>
-            <a:ext cx="12191695" cy="6858000"/>
-          </a:xfrm>
-          <a:prstGeom prst="rect">
-            <a:avLst/>
-          </a:prstGeom>
-          <a:solidFill>
-            <a:srgbClr val="F3F4F6"/>
-          </a:solidFill>
-          <a:ln w="12700">
-            <a:solidFill>
-              <a:srgbClr val="FFFFFF">
-                <a:alpha val="0"/>
-              </a:srgbClr>
-            </a:solidFill>
-            <a:prstDash val="solid"/>
-          </a:ln>
-        </p:spPr>
-        <p:txBody>
-          <a:bodyPr/>
-          <a:lstStyle/>
-          <a:p>
-            <a:endParaRPr lang="ja-JP" altLang="en-US"/>
-          </a:p>
-        </p:txBody>
-      </p:sp>
-      <p:sp>
-        <p:nvSpPr>
-          <p:cNvPr id="3" name="Shape 1"/>
-          <p:cNvSpPr/>
-          <p:nvPr/>
-        </p:nvSpPr>
-        <p:spPr>
-          <a:xfrm>
-            <a:off x="0" y="0"/>
-            <a:ext cx="12191695" cy="6858000"/>
-          </a:xfrm>
-          <a:prstGeom prst="rect">
-            <a:avLst/>
-          </a:prstGeom>
-          <a:solidFill>
-            <a:srgbClr val="FFFFFF"/>
-          </a:solidFill>
-          <a:ln w="12700">
-            <a:solidFill>
-              <a:srgbClr val="FFFFFF">
-                <a:alpha val="0"/>
-              </a:srgbClr>
-            </a:solidFill>
-            <a:prstDash val="solid"/>
-          </a:ln>
-          <a:effectLst>
-            <a:outerShdw blurRad="63500" dist="38100" dir="16200000" algn="bl" rotWithShape="0">
-              <a:srgbClr val="000000">
-                <a:alpha val="10000"/>
-              </a:srgbClr>
-            </a:outerShdw>
-          </a:effectLst>
-        </p:spPr>
-        <p:txBody>
-          <a:bodyPr/>
-          <a:lstStyle/>
-          <a:p>
-            <a:endParaRPr lang="ja-JP" altLang="en-US"/>
-          </a:p>
-        </p:txBody>
-      </p:sp>
-      <p:sp>
-        <p:nvSpPr>
-          <p:cNvPr id="4" name="Shape 2"/>
-          <p:cNvSpPr/>
-          <p:nvPr/>
-        </p:nvSpPr>
-        <p:spPr>
-          <a:xfrm>
-            <a:off x="0" y="0"/>
-            <a:ext cx="12191695" cy="1485900"/>
-          </a:xfrm>
-          <a:prstGeom prst="rect">
-            <a:avLst/>
-          </a:prstGeom>
-          <a:solidFill>
-            <a:srgbClr val="FFFFFF"/>
-          </a:solidFill>
-          <a:ln/>
-        </p:spPr>
-        <p:txBody>
-          <a:bodyPr/>
-          <a:lstStyle/>
-          <a:p>
-            <a:endParaRPr lang="ja-JP" altLang="en-US"/>
-          </a:p>
-        </p:txBody>
-      </p:sp>
-      <p:sp>
-        <p:nvSpPr>
-          <p:cNvPr id="5" name="Shape 3"/>
-          <p:cNvSpPr/>
-          <p:nvPr/>
-        </p:nvSpPr>
-        <p:spPr>
-          <a:xfrm>
-            <a:off x="0" y="1476756"/>
-            <a:ext cx="12191695" cy="9144"/>
-          </a:xfrm>
-          <a:prstGeom prst="rect">
-            <a:avLst/>
-          </a:prstGeom>
-          <a:solidFill>
-            <a:srgbClr val="F3F4F6"/>
-          </a:solidFill>
-          <a:ln w="12700">
-            <a:solidFill>
-              <a:srgbClr val="F3F4F6">
-                <a:alpha val="0"/>
-              </a:srgbClr>
-            </a:solidFill>
-            <a:prstDash val="solid"/>
-          </a:ln>
-        </p:spPr>
-        <p:txBody>
-          <a:bodyPr/>
-          <a:lstStyle/>
-          <a:p>
-            <a:endParaRPr lang="ja-JP" altLang="en-US"/>
-          </a:p>
-        </p:txBody>
-      </p:sp>
-      <p:sp>
-        <p:nvSpPr>
-          <p:cNvPr id="6" name="Text 4"/>
-          <p:cNvSpPr txBox="1"/>
-          <p:nvPr/>
-        </p:nvSpPr>
-        <p:spPr>
-          <a:xfrm>
-            <a:off x="457200" y="228600"/>
-            <a:ext cx="5600700" cy="267005"/>
-          </a:xfrm>
-          <a:prstGeom prst="rect">
-            <a:avLst/>
-          </a:prstGeom>
-          <a:noFill/>
-          <a:ln/>
-        </p:spPr>
-        <p:txBody>
-          <a:bodyPr wrap="square" lIns="0" tIns="0" rIns="0" bIns="0" rtlCol="0" anchor="ctr"/>
-          <a:lstStyle/>
-          <a:p>
-            <a:pPr marL="0" indent="0" algn="l">
-              <a:buNone/>
-            </a:pPr>
-            <a:r>
-              <a:rPr lang="en-US" sz="1600" b="1" kern="0" spc="150" dirty="0">
-                <a:solidFill>
-                  <a:srgbClr val="6B7280"/>
-                </a:solidFill>
-                <a:latin typeface="Noto Sans JP" pitchFamily="34" charset="0"/>
-                <a:ea typeface="Noto Sans JP" pitchFamily="34" charset="-122"/>
-                <a:cs typeface="Noto Sans JP" pitchFamily="34" charset="-120"/>
-              </a:rPr>
-              <a:t>PA45｜第11回</a:t>
-            </a:r>
-            <a:endParaRPr lang="en-US" sz="1500" dirty="0"/>
-          </a:p>
-        </p:txBody>
-      </p:sp>
-      <p:sp>
-        <p:nvSpPr>
-          <p:cNvPr id="7" name="Text 5"/>
-          <p:cNvSpPr txBox="1"/>
-          <p:nvPr/>
-        </p:nvSpPr>
-        <p:spPr>
-          <a:xfrm>
-            <a:off x="457199" y="533095"/>
-            <a:ext cx="10837817" cy="715061"/>
-          </a:xfrm>
-          <a:prstGeom prst="rect">
-            <a:avLst/>
-          </a:prstGeom>
-          <a:noFill/>
-          <a:ln/>
-        </p:spPr>
-        <p:txBody>
-          <a:bodyPr wrap="square" lIns="0" tIns="0" rIns="0" bIns="0" rtlCol="0" anchor="ctr"/>
-          <a:lstStyle/>
-          <a:p>
-            <a:pPr marL="0" indent="0" algn="l">
-              <a:buNone/>
-            </a:pPr>
-            <a:r>
-              <a:rPr lang="en-US" sz="2800" b="1" dirty="0">
-                <a:solidFill>
-                  <a:srgbClr val="1F2937"/>
-                </a:solidFill>
-                <a:latin typeface="Noto Sans JP" pitchFamily="34" charset="0"/>
-                <a:ea typeface="Noto Sans JP" pitchFamily="34" charset="-122"/>
-                <a:cs typeface="Noto Sans JP" pitchFamily="34" charset="-120"/>
-              </a:rPr>
-              <a:t>🛠 巻末（自分用）  サンプルフロー作成手順</a:t>
-            </a:r>
-            <a:endParaRPr lang="en-US" sz="2800" dirty="0"/>
-          </a:p>
-        </p:txBody>
-      </p:sp>
-      <p:sp>
-        <p:nvSpPr>
-          <p:cNvPr id="8" name="Shape 6"/>
-          <p:cNvSpPr/>
-          <p:nvPr/>
-        </p:nvSpPr>
-        <p:spPr>
-          <a:xfrm>
-            <a:off x="10858500" y="828446"/>
-            <a:ext cx="114300" cy="114300"/>
-          </a:xfrm>
-          <a:prstGeom prst="ellipse">
-            <a:avLst/>
-          </a:prstGeom>
-          <a:solidFill>
-            <a:srgbClr val="0078D4"/>
-          </a:solidFill>
-          <a:ln w="12700">
-            <a:solidFill>
-              <a:srgbClr val="FFFFFF">
-                <a:alpha val="0"/>
-              </a:srgbClr>
-            </a:solidFill>
-            <a:prstDash val="solid"/>
-          </a:ln>
-        </p:spPr>
-        <p:txBody>
-          <a:bodyPr/>
-          <a:lstStyle/>
-          <a:p>
-            <a:endParaRPr lang="ja-JP" altLang="en-US"/>
-          </a:p>
-        </p:txBody>
-      </p:sp>
-      <p:sp>
-        <p:nvSpPr>
-          <p:cNvPr id="9" name="Text 7"/>
-          <p:cNvSpPr txBox="1"/>
-          <p:nvPr/>
-        </p:nvSpPr>
-        <p:spPr>
-          <a:xfrm>
-            <a:off x="11048695" y="752551"/>
-            <a:ext cx="771754" cy="267005"/>
-          </a:xfrm>
-          <a:prstGeom prst="rect">
-            <a:avLst/>
-          </a:prstGeom>
-          <a:noFill/>
-          <a:ln/>
-        </p:spPr>
-        <p:txBody>
-          <a:bodyPr wrap="square" lIns="0" tIns="0" rIns="0" bIns="0" rtlCol="0" anchor="ctr"/>
-          <a:lstStyle/>
-          <a:p>
-            <a:pPr marL="0" indent="0" algn="l">
-              <a:buNone/>
-            </a:pPr>
-            <a:r>
-              <a:rPr lang="en-US" sz="1600" dirty="0">
-                <a:solidFill>
-                  <a:srgbClr val="9CA3AF"/>
-                </a:solidFill>
-                <a:latin typeface="ui-monospace" pitchFamily="34" charset="0"/>
-                <a:ea typeface="ui-monospace" pitchFamily="34" charset="-122"/>
-                <a:cs typeface="ui-monospace" pitchFamily="34" charset="-120"/>
-              </a:rPr>
-              <a:t>Concept</a:t>
-            </a:r>
-            <a:endParaRPr lang="en-US" sz="1500" dirty="0"/>
-          </a:p>
-        </p:txBody>
-      </p:sp>
-      <p:sp>
-        <p:nvSpPr>
-          <p:cNvPr id="13" name="Shape 9"/>
-          <p:cNvSpPr/>
-          <p:nvPr/>
-        </p:nvSpPr>
-        <p:spPr>
-          <a:xfrm>
-            <a:off x="0" y="1523390"/>
-            <a:ext cx="11975897" cy="4914900"/>
-          </a:xfrm>
-          <a:prstGeom prst="rect">
-            <a:avLst/>
-          </a:prstGeom>
-          <a:solidFill>
-            <a:srgbClr val="F9FAFB"/>
-          </a:solidFill>
-          <a:ln w="12700">
-            <a:solidFill>
-              <a:srgbClr val="FFFFFF">
-                <a:alpha val="0"/>
-              </a:srgbClr>
-            </a:solidFill>
-            <a:prstDash val="solid"/>
-          </a:ln>
-        </p:spPr>
-        <p:txBody>
-          <a:bodyPr/>
-          <a:lstStyle/>
-          <a:p>
-            <a:endParaRPr lang="ja-JP" altLang="en-US"/>
-          </a:p>
-        </p:txBody>
-      </p:sp>
-      <p:pic>
-        <p:nvPicPr>
-          <p:cNvPr id="23" name="Image 8" descr="preencoded.png"/>
-          <p:cNvPicPr>
-            <a:picLocks noChangeAspect="1"/>
-          </p:cNvPicPr>
-          <p:nvPr/>
-        </p:nvPicPr>
-        <p:blipFill>
-          <a:blip/>
-          <a:srcRect t="-401" b="-401"/>
-          <a:stretch/>
-        </p:blipFill>
-        <p:spPr>
-          <a:xfrm>
-            <a:off x="0" y="6801307"/>
-            <a:ext cx="12191695" cy="57607"/>
-          </a:xfrm>
-          <a:prstGeom prst="rect">
-            <a:avLst/>
-          </a:prstGeom>
-        </p:spPr>
-      </p:pic>
-      <p:sp>
-        <p:nvSpPr>
-          <p:cNvPr id="39" name="Shape 22"/>
-          <p:cNvSpPr/>
-          <p:nvPr/>
-        </p:nvSpPr>
-        <p:spPr>
-          <a:xfrm>
-            <a:off x="0" y="6400800"/>
-            <a:ext cx="12191695" cy="457200"/>
-          </a:xfrm>
-          <a:prstGeom prst="rect">
-            <a:avLst/>
-          </a:prstGeom>
-          <a:solidFill>
-            <a:srgbClr val="FFFFFF"/>
-          </a:solidFill>
-          <a:ln/>
-        </p:spPr>
-        <p:txBody>
-          <a:bodyPr/>
-          <a:lstStyle/>
-          <a:p>
-            <a:endParaRPr lang="ja-JP" altLang="en-US"/>
-          </a:p>
-        </p:txBody>
-      </p:sp>
-      <p:sp>
-        <p:nvSpPr>
-          <p:cNvPr id="40" name="Shape 23"/>
-          <p:cNvSpPr/>
-          <p:nvPr/>
-        </p:nvSpPr>
-        <p:spPr>
-          <a:xfrm>
-            <a:off x="0" y="6400800"/>
-            <a:ext cx="12191695" cy="9144"/>
-          </a:xfrm>
-          <a:prstGeom prst="rect">
-            <a:avLst/>
-          </a:prstGeom>
-          <a:solidFill>
-            <a:srgbClr val="E5E7EB"/>
-          </a:solidFill>
-          <a:ln w="12700">
-            <a:solidFill>
-              <a:srgbClr val="E5E7EB">
-                <a:alpha val="0"/>
-              </a:srgbClr>
-            </a:solidFill>
-            <a:prstDash val="solid"/>
-          </a:ln>
-        </p:spPr>
-        <p:txBody>
-          <a:bodyPr/>
-          <a:lstStyle/>
-          <a:p>
-            <a:endParaRPr lang="ja-JP" altLang="en-US"/>
-          </a:p>
-        </p:txBody>
-      </p:sp>
-      <p:sp>
-        <p:nvSpPr>
-          <p:cNvPr id="41" name="Text 24"/>
-          <p:cNvSpPr txBox="1"/>
-          <p:nvPr/>
-        </p:nvSpPr>
-        <p:spPr>
-          <a:xfrm>
-            <a:off x="457200" y="6519672"/>
-            <a:ext cx="2573122" cy="228600"/>
-          </a:xfrm>
-          <a:prstGeom prst="rect">
-            <a:avLst/>
-          </a:prstGeom>
-          <a:noFill/>
-          <a:ln/>
-        </p:spPr>
-        <p:txBody>
-          <a:bodyPr wrap="square" lIns="0" tIns="0" rIns="0" bIns="0" rtlCol="0" anchor="ctr"/>
-          <a:lstStyle/>
-          <a:p>
-            <a:pPr marL="0" indent="0" algn="l">
-              <a:buNone/>
-            </a:pPr>
-            <a:r>
-              <a:rPr lang="en-US" sz="1600" dirty="0">
-                <a:solidFill>
-                  <a:srgbClr val="9CA3AF"/>
-                </a:solidFill>
-                <a:latin typeface="Noto Sans JP" pitchFamily="34" charset="0"/>
-                <a:ea typeface="Noto Sans JP" pitchFamily="34" charset="-122"/>
-                <a:cs typeface="Noto Sans JP" pitchFamily="34" charset="-120"/>
-              </a:rPr>
-              <a:t>Power Automate for Beginners</a:t>
-            </a:r>
-            <a:endParaRPr lang="en-US" sz="1200" dirty="0"/>
-          </a:p>
-        </p:txBody>
-      </p:sp>
-      <p:sp>
-        <p:nvSpPr>
-          <p:cNvPr id="42" name="Text 25"/>
-          <p:cNvSpPr txBox="1"/>
-          <p:nvPr/>
-        </p:nvSpPr>
-        <p:spPr>
-          <a:xfrm>
-            <a:off x="10490911" y="6519672"/>
-            <a:ext cx="1484986" cy="228600"/>
-          </a:xfrm>
-          <a:prstGeom prst="rect">
-            <a:avLst/>
-          </a:prstGeom>
-          <a:noFill/>
-          <a:ln/>
-        </p:spPr>
-        <p:txBody>
-          <a:bodyPr wrap="square" lIns="0" tIns="0" rIns="0" bIns="0" rtlCol="0" anchor="ctr"/>
-          <a:lstStyle/>
-          <a:p>
-            <a:pPr marL="0" indent="0" algn="l">
-              <a:buNone/>
-            </a:pPr>
-            <a:r>
-              <a:rPr lang="en-US" sz="1600" dirty="0">
-                <a:solidFill>
-                  <a:srgbClr val="9CA3AF"/>
-                </a:solidFill>
-                <a:latin typeface="Noto Sans JP" pitchFamily="34" charset="0"/>
-                <a:ea typeface="Noto Sans JP" pitchFamily="34" charset="-122"/>
-                <a:cs typeface="Noto Sans JP" pitchFamily="34" charset="-120"/>
-              </a:rPr>
-              <a:t>Copyright © PA45</a:t>
-            </a:r>
-            <a:endParaRPr lang="en-US" sz="1200" dirty="0"/>
-          </a:p>
-        </p:txBody>
-      </p:sp>
-      <p:grpSp>
-        <p:nvGrpSpPr>
-          <p:cNvPr id="47" name="グループ化 46">
-            <a:extLst>
-              <a:ext uri="{FF2B5EF4-FFF2-40B4-BE49-F238E27FC236}">
-                <a16:creationId xmlns:a16="http://schemas.microsoft.com/office/drawing/2014/main" id="{722FBEAE-8CB7-7493-F595-CD1F2E21BD05}"/>
-              </a:ext>
-            </a:extLst>
-          </p:cNvPr>
-          <p:cNvGrpSpPr/>
-          <p:nvPr/>
-        </p:nvGrpSpPr>
-        <p:grpSpPr>
-          <a:xfrm>
-            <a:off x="4603551" y="6322778"/>
-            <a:ext cx="7350682" cy="405017"/>
-            <a:chOff x="5861349" y="604238"/>
-            <a:chExt cx="6035909" cy="405017"/>
-          </a:xfrm>
-        </p:grpSpPr>
-        <p:sp>
-          <p:nvSpPr>
-            <p:cNvPr id="48" name="Shape 31">
-              <a:extLst>
-                <a:ext uri="{FF2B5EF4-FFF2-40B4-BE49-F238E27FC236}">
-                  <a16:creationId xmlns:a16="http://schemas.microsoft.com/office/drawing/2014/main" id="{DD44BB3C-F859-7A5E-7E34-CC1C35ECEA4D}"/>
-                </a:ext>
-              </a:extLst>
-            </p:cNvPr>
-            <p:cNvSpPr/>
-            <p:nvPr/>
-          </p:nvSpPr>
-          <p:spPr>
-            <a:xfrm>
-              <a:off x="6034969" y="604238"/>
-              <a:ext cx="5854549" cy="386057"/>
-            </a:xfrm>
-            <a:prstGeom prst="roundRect">
-              <a:avLst>
-                <a:gd name="adj" fmla="val 342465"/>
-              </a:avLst>
-            </a:prstGeom>
-            <a:solidFill>
-              <a:srgbClr val="EFF6FF"/>
-            </a:solidFill>
-            <a:ln w="12700">
-              <a:solidFill>
-                <a:srgbClr val="FFFFFF">
-                  <a:alpha val="0"/>
-                </a:srgbClr>
-              </a:solidFill>
-              <a:prstDash val="solid"/>
-            </a:ln>
-          </p:spPr>
-          <p:txBody>
-            <a:bodyPr/>
-            <a:lstStyle/>
-            <a:p>
-              <a:endParaRPr lang="ja-JP" altLang="en-US"/>
-            </a:p>
-          </p:txBody>
-        </p:sp>
-        <p:sp>
-          <p:nvSpPr>
-            <p:cNvPr id="49" name="Text 21">
-              <a:extLst>
-                <a:ext uri="{FF2B5EF4-FFF2-40B4-BE49-F238E27FC236}">
-                  <a16:creationId xmlns:a16="http://schemas.microsoft.com/office/drawing/2014/main" id="{A7F44BB1-1667-BB85-557B-D7C1AAD8A0FA}"/>
-                </a:ext>
-              </a:extLst>
-            </p:cNvPr>
-            <p:cNvSpPr txBox="1"/>
-            <p:nvPr/>
-          </p:nvSpPr>
-          <p:spPr>
-            <a:xfrm>
-              <a:off x="6287649" y="612651"/>
-              <a:ext cx="5609609" cy="396593"/>
-            </a:xfrm>
-            <a:prstGeom prst="rect">
-              <a:avLst/>
-            </a:prstGeom>
-            <a:noFill/>
-            <a:ln/>
-          </p:spPr>
-          <p:txBody>
-            <a:bodyPr wrap="square" lIns="0" tIns="0" rIns="0" bIns="0" rtlCol="0" anchor="ctr"/>
-            <a:lstStyle/>
-            <a:p>
-              <a:pPr marL="0" indent="0" algn="l">
-                <a:buNone/>
-              </a:pPr>
-              <a:r>
-                <a:rPr lang="en-US" sz="1400" b="1" dirty="0">
-                  <a:solidFill>
-                    <a:srgbClr val="2563EB"/>
-                  </a:solidFill>
-                  <a:latin typeface="Noto Sans JP" pitchFamily="34" charset="0"/>
-                  <a:ea typeface="Noto Sans JP" pitchFamily="34" charset="-122"/>
-                  <a:cs typeface="Noto Sans JP" pitchFamily="34" charset="-120"/>
-                </a:rPr>
-                <a:t>学んだこと・気づいたことを #</a:t>
-              </a:r>
-              <a:r>
-                <a:rPr lang="en-US" sz="1400" b="1">
-                  <a:solidFill>
-                    <a:srgbClr val="2563EB"/>
-                  </a:solidFill>
-                  <a:latin typeface="Noto Sans JP" pitchFamily="34" charset="0"/>
-                  <a:ea typeface="Noto Sans JP" pitchFamily="34" charset="-122"/>
-                  <a:cs typeface="Noto Sans JP" pitchFamily="34" charset="-120"/>
-                </a:rPr>
-                <a:t>PA45 で</a:t>
-              </a:r>
-              <a:r>
-                <a:rPr lang="ja-JP" altLang="en-US" sz="1400" b="1">
-                  <a:solidFill>
-                    <a:srgbClr val="2563EB"/>
-                  </a:solidFill>
-                  <a:latin typeface="Noto Sans JP" pitchFamily="34" charset="0"/>
-                  <a:ea typeface="Noto Sans JP" pitchFamily="34" charset="-122"/>
-                  <a:cs typeface="Noto Sans JP" pitchFamily="34" charset="-120"/>
-                </a:rPr>
-                <a:t>リアルタイムに</a:t>
-              </a:r>
-              <a:r>
-                <a:rPr lang="en-US" sz="1400" b="1">
-                  <a:solidFill>
-                    <a:srgbClr val="2563EB"/>
-                  </a:solidFill>
-                  <a:latin typeface="Noto Sans JP" pitchFamily="34" charset="0"/>
-                  <a:ea typeface="Noto Sans JP" pitchFamily="34" charset="-122"/>
-                  <a:cs typeface="Noto Sans JP" pitchFamily="34" charset="-120"/>
-                </a:rPr>
-                <a:t>投稿しよう！</a:t>
-              </a:r>
-              <a:r>
-                <a:rPr lang="ja-JP" altLang="en-US" sz="1400" b="1">
-                  <a:solidFill>
-                    <a:srgbClr val="2563EB"/>
-                  </a:solidFill>
-                  <a:latin typeface="Noto Sans JP" pitchFamily="34" charset="0"/>
-                  <a:ea typeface="Noto Sans JP" pitchFamily="34" charset="-122"/>
-                  <a:cs typeface="Noto Sans JP" pitchFamily="34" charset="-120"/>
-                </a:rPr>
-                <a:t>スクショ</a:t>
-              </a:r>
-              <a:r>
-                <a:rPr lang="en-US" altLang="ja-JP" sz="1400" b="1">
-                  <a:solidFill>
-                    <a:srgbClr val="2563EB"/>
-                  </a:solidFill>
-                  <a:latin typeface="Noto Sans JP" pitchFamily="34" charset="0"/>
-                  <a:ea typeface="Noto Sans JP" pitchFamily="34" charset="-122"/>
-                  <a:cs typeface="Noto Sans JP" pitchFamily="34" charset="-120"/>
-                </a:rPr>
-                <a:t>OK</a:t>
-              </a:r>
-              <a:r>
-                <a:rPr lang="ja-JP" altLang="en-US" sz="1400" b="1">
-                  <a:solidFill>
-                    <a:srgbClr val="2563EB"/>
-                  </a:solidFill>
-                  <a:latin typeface="Noto Sans JP" pitchFamily="34" charset="0"/>
-                  <a:ea typeface="Noto Sans JP" pitchFamily="34" charset="-122"/>
-                  <a:cs typeface="Noto Sans JP" pitchFamily="34" charset="-120"/>
-                </a:rPr>
-                <a:t>！</a:t>
-              </a:r>
-              <a:endParaRPr lang="en-US" sz="1400" dirty="0"/>
-            </a:p>
-          </p:txBody>
-        </p:sp>
-        <p:pic>
-          <p:nvPicPr>
-            <p:cNvPr id="50" name="Image 2" descr="preencoded.png">
-              <a:extLst>
-                <a:ext uri="{FF2B5EF4-FFF2-40B4-BE49-F238E27FC236}">
-                  <a16:creationId xmlns:a16="http://schemas.microsoft.com/office/drawing/2014/main" id="{003A3C3D-15E3-1F1A-D918-AB2472E8059D}"/>
-                </a:ext>
-              </a:extLst>
-            </p:cNvPr>
-            <p:cNvPicPr>
-              <a:picLocks noChangeAspect="1"/>
-            </p:cNvPicPr>
-            <p:nvPr/>
-          </p:nvPicPr>
-          <p:blipFill>
-            <a:blip/>
-            <a:srcRect/>
-            <a:stretch/>
-          </p:blipFill>
-          <p:spPr>
-            <a:xfrm>
-              <a:off x="5861349" y="619679"/>
-              <a:ext cx="263236" cy="389576"/>
-            </a:xfrm>
-            <a:prstGeom prst="rect">
-              <a:avLst/>
-            </a:prstGeom>
-          </p:spPr>
-        </p:pic>
-      </p:grpSp>
-      <p:sp>
-        <p:nvSpPr>
-          <p:cNvPr id="51" name="Text 5">
-            <a:extLst>
-              <a:ext uri="{FF2B5EF4-FFF2-40B4-BE49-F238E27FC236}">
-                <a16:creationId xmlns:a16="http://schemas.microsoft.com/office/drawing/2014/main" id="{F34FF253-528E-97DF-BF89-4A55B2E7EBC4}"/>
-              </a:ext>
-            </a:extLst>
-          </p:cNvPr>
-          <p:cNvSpPr txBox="1"/>
-          <p:nvPr/>
-        </p:nvSpPr>
-        <p:spPr>
-          <a:xfrm>
-            <a:off x="94417" y="2164046"/>
-            <a:ext cx="6915983" cy="3947047"/>
-          </a:xfrm>
-          <a:prstGeom prst="rect">
-            <a:avLst/>
-          </a:prstGeom>
-          <a:noFill/>
-          <a:ln/>
-        </p:spPr>
-        <p:txBody>
-          <a:bodyPr wrap="square" lIns="0" tIns="0" rIns="0" bIns="0" rtlCol="0" anchor="ctr"/>
-          <a:lstStyle/>
-          <a:p>
-            <a:pPr marL="0" indent="0" algn="l">
-              <a:buNone/>
-            </a:pPr>
-            <a:r>
-              <a:rPr lang="ja-JP" altLang="en-US">
-                <a:solidFill>
-                  <a:srgbClr val="1F2937"/>
-                </a:solidFill>
-                <a:latin typeface="Noto Sans JP" pitchFamily="34" charset="0"/>
-                <a:ea typeface="Noto Sans JP" pitchFamily="34" charset="-122"/>
-                <a:cs typeface="Noto Sans JP" pitchFamily="34" charset="-120"/>
-              </a:rPr>
-              <a:t>※受講者には見せない・運営者自分用メモ</a:t>
-            </a:r>
-            <a:endParaRPr lang="en-US" altLang="ja-JP">
-              <a:solidFill>
-                <a:srgbClr val="1F2937"/>
-              </a:solidFill>
-              <a:latin typeface="Noto Sans JP" pitchFamily="34" charset="0"/>
-              <a:ea typeface="Noto Sans JP" pitchFamily="34" charset="-122"/>
-              <a:cs typeface="Noto Sans JP" pitchFamily="34" charset="-120"/>
-            </a:endParaRPr>
-          </a:p>
-          <a:p>
-            <a:pPr marL="0" indent="0" algn="l">
-              <a:buNone/>
-            </a:pPr>
-            <a:r>
-              <a:rPr lang="ja-JP" altLang="en-US">
-                <a:solidFill>
-                  <a:srgbClr val="1F2937"/>
-                </a:solidFill>
-                <a:latin typeface="Noto Sans JP" pitchFamily="34" charset="0"/>
-                <a:ea typeface="Noto Sans JP" pitchFamily="34" charset="-122"/>
-                <a:cs typeface="Noto Sans JP" pitchFamily="34" charset="-120"/>
-              </a:rPr>
-              <a:t/>
-            </a:r>
-            <a:endParaRPr lang="en-US" altLang="ja-JP">
-              <a:solidFill>
-                <a:srgbClr val="1F2937"/>
-              </a:solidFill>
-              <a:latin typeface="Noto Sans JP" pitchFamily="34" charset="0"/>
-              <a:ea typeface="Noto Sans JP" pitchFamily="34" charset="-122"/>
-              <a:cs typeface="Noto Sans JP" pitchFamily="34" charset="-120"/>
-            </a:endParaRPr>
-          </a:p>
-          <a:p>
-            <a:pPr marL="0" indent="0" algn="l">
-              <a:buNone/>
-            </a:pPr>
-            <a:r>
-              <a:t>① 手動トリガー（インスタント）を新規作成。フロー名 PA45-No11-RunHistory</a:t>
-            </a:r>
-            <a:endParaRPr lang="en-US" altLang="ja-JP">
-              <a:solidFill>
-                <a:srgbClr val="1F2937"/>
-              </a:solidFill>
-              <a:latin typeface="Noto Sans JP" pitchFamily="34" charset="0"/>
-              <a:ea typeface="Noto Sans JP" pitchFamily="34" charset="-122"/>
-              <a:cs typeface="Noto Sans JP" pitchFamily="34" charset="-120"/>
-            </a:endParaRPr>
-          </a:p>
-          <a:p>
-            <a:pPr marL="0" indent="0" algn="l">
-              <a:buNone/>
-            </a:pPr>
-            <a:r>
-              <a:t>② SharePoint「複数の項目の取得」追加。サイト=経費申請のSP / リスト=経費申請</a:t>
-            </a:r>
-            <a:endParaRPr lang="en-US" altLang="ja-JP">
-              <a:solidFill>
-                <a:srgbClr val="1F2937"/>
-              </a:solidFill>
-              <a:latin typeface="Noto Sans JP" pitchFamily="34" charset="0"/>
-              <a:ea typeface="Noto Sans JP" pitchFamily="34" charset="-122"/>
-              <a:cs typeface="Noto Sans JP" pitchFamily="34" charset="-120"/>
-            </a:endParaRPr>
-          </a:p>
-          <a:p>
-            <a:pPr marL="0" indent="0" algn="l">
-              <a:buNone/>
-            </a:pPr>
-            <a:r>
-              <a:t>③ 作成（Compose）追加・名前=1件目のタイトル / 式: first(outputs('複数の項目の取得')?['body/value'])?['Title']</a:t>
-            </a:r>
-            <a:endParaRPr lang="en-US"/>
-          </a:p>
-          <a:p>
-            <a:pPr marL="0" indent="0" algn="l">
-              <a:buNone/>
-            </a:pPr>
-            <a:r>
-              <a:t>④ 作成（Compose）追加・名前=全件数 / 式: length(outputs('複数の項目の取得')?['body/value'])</a:t>
-            </a:r>
-            <a:endParaRPr lang="en-US"/>
-          </a:p>
-          <a:p>
-            <a:pPr marL="0" indent="0" algn="l">
-              <a:buNone/>
-            </a:pPr>
-            <a:r>
-              <a:t>⑤ Teams投稿（チャネル）追加。本文: 全件数=@{outputs('全件数')} / 最新=@{outputs('1件目のタイトル')}</a:t>
-            </a:r>
-            <a:endParaRPr lang="en-US"/>
-          </a:p>
-          <a:p>
-            <a:pPr marL="0" indent="0" algn="l">
-              <a:buNone/>
-            </a:pPr>
-            <a:r>
-              <a:t>⑥ 保存→テスト実行→実行履歴の出力タブを開いて答え合わせ</a:t>
-            </a:r>
-            <a:endParaRPr lang="ja-JP" altLang="en-US">
-              <a:solidFill>
-                <a:srgbClr val="1F2937"/>
-              </a:solidFill>
-              <a:latin typeface="Noto Sans JP" pitchFamily="34" charset="0"/>
-              <a:ea typeface="Noto Sans JP" pitchFamily="34" charset="-122"/>
-              <a:cs typeface="Noto Sans JP" pitchFamily="34" charset="-120"/>
-            </a:endParaRPr>
-          </a:p>
-          <a:p>
-            <a:pPr marL="0" indent="0" algn="l">
-              <a:buNone/>
-            </a:pPr>
-            <a:r>
-              <a:t>※ 教えるのは「実行履歴の見方・式の書き方」に絞る。エラーハンドリングや並列分岐は触れない。</a:t>
-            </a:r>
-            <a:endParaRPr lang="en-US"/>
-          </a:p>
-          <a:p>
-            <a:pPr marL="0" indent="0" algn="l">
-              <a:buNone/>
-            </a:pPr>
-            <a:endParaRPr lang="ja-JP" altLang="en-US">
-              <a:solidFill>
-                <a:srgbClr val="1F2937"/>
-              </a:solidFill>
-              <a:latin typeface="Noto Sans JP" pitchFamily="34" charset="0"/>
-              <a:ea typeface="Noto Sans JP" pitchFamily="34" charset="-122"/>
-              <a:cs typeface="Noto Sans JP" pitchFamily="34" charset="-120"/>
-            </a:endParaRPr>
-          </a:p>
-          <a:p>
-            <a:pPr marL="0" indent="0" algn="l">
-              <a:buNone/>
-            </a:pPr>
-            <a:r>
-              <a:t/>
-            </a:r>
-            <a:endParaRPr lang="en-US" altLang="ja-JP">
-              <a:solidFill>
-                <a:srgbClr val="1F2937"/>
-              </a:solidFill>
-              <a:latin typeface="Noto Sans JP" pitchFamily="34" charset="0"/>
-              <a:ea typeface="Noto Sans JP" pitchFamily="34" charset="-122"/>
-              <a:cs typeface="Noto Sans JP" pitchFamily="34" charset="-120"/>
-            </a:endParaRPr>
-          </a:p>
-          <a:p>
-            <a:pPr marL="0" indent="0" algn="l">
-              <a:buNone/>
-            </a:pPr>
-            <a:endParaRPr lang="en-US" altLang="ja-JP" sz="2000" b="1">
-              <a:solidFill>
-                <a:srgbClr val="1F2937"/>
-              </a:solidFill>
-              <a:latin typeface="Noto Sans JP" pitchFamily="34" charset="0"/>
-              <a:ea typeface="Noto Sans JP" pitchFamily="34" charset="-122"/>
-              <a:cs typeface="Noto Sans JP" pitchFamily="34" charset="-120"/>
-            </a:endParaRPr>
-          </a:p>
-          <a:p>
-            <a:pPr marL="0" indent="0" algn="l">
-              <a:buNone/>
-            </a:pPr>
-            <a:endParaRPr lang="ja-JP" altLang="en-US" sz="2000" b="1">
-              <a:solidFill>
-                <a:srgbClr val="1F2937"/>
-              </a:solidFill>
-              <a:latin typeface="Noto Sans JP" pitchFamily="34" charset="0"/>
-              <a:ea typeface="Noto Sans JP" pitchFamily="34" charset="-122"/>
-              <a:cs typeface="Noto Sans JP" pitchFamily="34" charset="-120"/>
-            </a:endParaRPr>
-          </a:p>
-          <a:p>
-            <a:pPr marL="0" indent="0" algn="l">
-              <a:buNone/>
-            </a:pPr>
-            <a:endParaRPr lang="ja-JP" altLang="en-US" sz="2000" b="1">
-              <a:solidFill>
-                <a:srgbClr val="1F2937"/>
-              </a:solidFill>
-              <a:latin typeface="Noto Sans JP" pitchFamily="34" charset="0"/>
-              <a:ea typeface="Noto Sans JP" pitchFamily="34" charset="-122"/>
-              <a:cs typeface="Noto Sans JP" pitchFamily="34" charset="-120"/>
-            </a:endParaRPr>
-          </a:p>
-          <a:p>
-            <a:pPr marL="0" indent="0" algn="l">
-              <a:buNone/>
-            </a:pPr>
-            <a:endParaRPr lang="ja-JP" altLang="en-US" sz="2000" b="1" dirty="0">
-              <a:solidFill>
-                <a:srgbClr val="1F2937"/>
-              </a:solidFill>
-              <a:latin typeface="Noto Sans JP" pitchFamily="34" charset="0"/>
-              <a:ea typeface="Noto Sans JP" pitchFamily="34" charset="-122"/>
-              <a:cs typeface="Noto Sans JP" pitchFamily="34" charset="-120"/>
-            </a:endParaRPr>
-          </a:p>
-        </p:txBody>
-      </p:sp>
-      <p:pic>
-        <p:nvPicPr>
-          <p:cNvPr id="11" name="図 10" descr="Reject&#10;&#10;AI 生成コンテンツは誤りを含む可能性があります。">
-            <a:extLst>
-              <a:ext uri="{FF2B5EF4-FFF2-40B4-BE49-F238E27FC236}">
-                <a16:creationId xmlns:a16="http://schemas.microsoft.com/office/drawing/2014/main" id="{51253969-DE5D-4A72-3C6D-1FEDC2D2951F}"/>
-              </a:ext>
-            </a:extLst>
-          </p:cNvPr>
-          <p:cNvPicPr>
-            <a:picLocks noChangeAspect="1"/>
-          </p:cNvPicPr>
-          <p:nvPr/>
-        </p:nvPicPr>
-        <p:blipFill>
-          <a:blip r:embed="rId2"/>
-          <a:stretch>
-            <a:fillRect/>
-          </a:stretch>
-        </p:blipFill>
-        <p:spPr>
-          <a:xfrm>
-            <a:off x="6997489" y="1740257"/>
-            <a:ext cx="4941984" cy="4304459"/>
-          </a:xfrm>
-          <a:prstGeom prst="rect">
-            <a:avLst/>
-          </a:prstGeom>
-          <a:ln>
-            <a:noFill/>
-          </a:ln>
-          <a:effectLst>
-            <a:outerShdw blurRad="190500" algn="tl" rotWithShape="0">
-              <a:srgbClr val="000000">
-                <a:alpha val="70000"/>
-              </a:srgbClr>
-            </a:outerShdw>
-          </a:effectLst>
-        </p:spPr>
-      </p:pic>
-      <p:pic>
-        <p:nvPicPr>
-          <p:cNvPr id="14" name="図 13" descr="The image depicts a cute, cartoonish cat holding a target with a cheerful expression.&#10;&#10;AI 生成コンテンツは誤りを含む可能性があります。">
-            <a:extLst>
-              <a:ext uri="{FF2B5EF4-FFF2-40B4-BE49-F238E27FC236}">
-                <a16:creationId xmlns:a16="http://schemas.microsoft.com/office/drawing/2014/main" id="{DB25A7B8-36CA-2E8D-1D22-11781740D9F7}"/>
-              </a:ext>
-            </a:extLst>
-          </p:cNvPr>
-          <p:cNvPicPr>
-            <a:picLocks noChangeAspect="1"/>
-          </p:cNvPicPr>
-          <p:nvPr/>
-        </p:nvPicPr>
-        <p:blipFill>
-          <a:blip r:embed="rId3"/>
-          <a:stretch>
-            <a:fillRect/>
-          </a:stretch>
-        </p:blipFill>
-        <p:spPr>
-          <a:xfrm>
-            <a:off x="6781691" y="5173320"/>
-            <a:ext cx="1122182" cy="1181244"/>
-          </a:xfrm>
-          <a:prstGeom prst="rect">
-            <a:avLst/>
-          </a:prstGeom>
-        </p:spPr>
-      </p:pic>
-      <p:pic>
-        <p:nvPicPr>
-          <p:cNvPr id="16" name="図 15" descr="The image depicts a gray cartoon cat with a red circle and cross, holding a magnifying glass.&#10;&#10;AI 生成コンテンツは誤りを含む可能性があります。">
-            <a:extLst>
-              <a:ext uri="{FF2B5EF4-FFF2-40B4-BE49-F238E27FC236}">
-                <a16:creationId xmlns:a16="http://schemas.microsoft.com/office/drawing/2014/main" id="{AF3E22CA-FF0B-8F71-3F0B-A922DEFAE5BA}"/>
-              </a:ext>
-            </a:extLst>
-          </p:cNvPr>
-          <p:cNvPicPr>
-            <a:picLocks noChangeAspect="1"/>
-          </p:cNvPicPr>
-          <p:nvPr/>
-        </p:nvPicPr>
-        <p:blipFill>
-          <a:blip r:embed="rId4"/>
-          <a:stretch>
-            <a:fillRect/>
-          </a:stretch>
-        </p:blipFill>
-        <p:spPr>
-          <a:xfrm>
-            <a:off x="10939206" y="5237266"/>
-            <a:ext cx="1052236" cy="1107617"/>
-          </a:xfrm>
-          <a:prstGeom prst="rect">
-            <a:avLst/>
-          </a:prstGeom>
-        </p:spPr>
-      </p:pic>
-    </p:spTree>
-  </p:cSld>
-  <p:clrMapOvr>
-    <a:masterClrMapping/>
-  </p:clrMapOvr>
-</p:sld>
-</file>
-
 <file path=ppt/slides/slide2.xml><?xml version="1.0" encoding="utf-8"?>
 <p:sld xmlns:a="http://schemas.openxmlformats.org/drawingml/2006/main" xmlns:r="http://schemas.openxmlformats.org/officeDocument/2006/relationships" xmlns:p="http://schemas.openxmlformats.org/presentationml/2006/main">
   <p:cSld>
@@ -12518,7 +12131,7 @@
                   <a:srgbClr val="FFFFFF"/>
                 </a:solidFill>
               </a:rPr>
-              <a:t>ハンズオン 事前準備（3分でできます）</a:t>
+              <a:t>事前準備（今回はほぼ不要です）</a:t>
             </a:r>
           </a:p>
         </p:txBody>
@@ -12553,7 +12166,7 @@
                 <a:latin typeface="+mj-ea"/>
                 <a:ea typeface="+mj-ea"/>
               </a:rPr>
-              <a:t>今回は実行履歴を読む回。Vol.10で作った「経費申請」リストに、ダミーデータが3件以上入っている状態にしておくと進みが早いです</a:t>
+              <a:t>今回のハンズオンは特別な準備が要りません。下の2つだけ確認しておきましょう。</a:t>
             </a:r>
           </a:p>
         </p:txBody>
@@ -12608,57 +12221,19 @@
                 <a:latin typeface="+mj-ea"/>
                 <a:ea typeface="+mj-ea"/>
               </a:rPr>
-              <a:t>STEP 1   SharePoint「経費申請」リストを開く</a:t>
-            </a:r>
-          </a:p>
-          <a:p>
-            <a:pPr>
-              <a:spcBef>
-                <a:spcPts val="800"/>
-              </a:spcBef>
-            </a:pPr>
-            <a:r>
-              <a:rPr sz="1300" b="1">
-                <a:solidFill>
-                  <a:srgbClr val="555555"/>
+              <a:t>STEP 1   Power Automate にサインインできる</a:t>
+            </a:r>
+          </a:p>
+          <a:p>
+            <a:r>
+              <a:rPr sz="2000" b="1">
+                <a:solidFill>
+                  <a:srgbClr val="2A7DD4"/>
                 </a:solidFill>
                 <a:latin typeface="+mj-ea"/>
-                <a:ea typeface="+mj-ea"/>
-              </a:rPr>
-              <a:t>👉 Vol.10で作ったリストをそのまま使います（無い方は当日作成でOK）</a:t>
-            </a:r>
-          </a:p>
-          <a:p>
-            <a:pPr>
-              <a:spcBef>
-                <a:spcPts val="400"/>
-              </a:spcBef>
-            </a:pPr>
-            <a:endParaRPr sz="1300" b="1">
-              <a:solidFill>
-                <a:srgbClr val="555555"/>
-              </a:solidFill>
-              <a:latin typeface="+mj-ea"/>
-              <a:ea typeface="+mj-ea"/>
-            </a:endParaRPr>
-          </a:p>
-          <a:p>
-            <a:endParaRPr sz="1300" b="1">
-              <a:solidFill>
-                <a:srgbClr val="555555"/>
-              </a:solidFill>
-              <a:latin typeface="+mj-ea"/>
-              <a:ea typeface="+mj-ea"/>
-            </a:endParaRPr>
-          </a:p>
-          <a:p>
-            <a:endParaRPr sz="1300" b="1">
-              <a:solidFill>
-                <a:srgbClr val="555555"/>
-              </a:solidFill>
-              <a:latin typeface="+mj-ea"/>
-              <a:ea typeface="+mj-ea"/>
-            </a:endParaRPr>
+              </a:rPr>
+              <a:t>👉 make.powerautomate.com を開いて、サインインできる状態にしておきます</a:t>
+            </a:r>
           </a:p>
         </p:txBody>
       </p:sp>
@@ -12712,75 +12287,18 @@
                 <a:latin typeface="+mj-ea"/>
                 <a:ea typeface="+mj-ea"/>
               </a:rPr>
-              <a:t>STEP 2   テストデータを3件以上登録しておく</a:t>
-            </a:r>
-          </a:p>
-          <a:p>
-            <a:pPr>
-              <a:spcBef>
-                <a:spcPts val="400"/>
-              </a:spcBef>
-            </a:pPr>
-            <a:r>
-              <a:rPr sz="1400" b="1">
-                <a:solidFill>
-                  <a:srgbClr val="333333"/>
+              <a:t>STEP 2   自分のメール（Outlook）が使える</a:t>
+            </a:r>
+          </a:p>
+          <a:p>
+            <a:r>
+              <a:rPr sz="2000" b="1">
+                <a:solidFill>
+                  <a:srgbClr val="2A7DD4"/>
                 </a:solidFill>
                 <a:latin typeface="+mj-ea"/>
-                <a:ea typeface="+mj-ea"/>
-              </a:rPr>
-              <a:t>① 「+ 新規」から手動で 経費申請 を3〜5件 入力</a:t>
-            </a:r>
-          </a:p>
-          <a:p>
-            <a:pPr>
-              <a:spcBef>
-                <a:spcPts val="400"/>
-              </a:spcBef>
-            </a:pPr>
-            <a:r>
-              <a:rPr sz="1400" b="1">
-                <a:solidFill>
-                  <a:srgbClr val="333333"/>
-                </a:solidFill>
-                <a:latin typeface="+mj-ea"/>
-                <a:ea typeface="+mj-ea"/>
-              </a:rPr>
-              <a:t>   Title: テスト1〜テスト5 / Detail: 適当 / Status: 申請中</a:t>
-            </a:r>
-          </a:p>
-          <a:p>
-            <a:pPr>
-              <a:spcBef>
-                <a:spcPts val="400"/>
-              </a:spcBef>
-            </a:pPr>
-            <a:r>
-              <a:rPr sz="1400" b="1">
-                <a:solidFill>
-                  <a:srgbClr val="333333"/>
-                </a:solidFill>
-                <a:latin typeface="+mj-ea"/>
-                <a:ea typeface="+mj-ea"/>
-              </a:rPr>
-              <a:t>② 件数が多いほど、出力JSONの配列構造が体感しやすい</a:t>
-            </a:r>
-          </a:p>
-          <a:p>
-            <a:pPr>
-              <a:spcBef>
-                <a:spcPts val="400"/>
-              </a:spcBef>
-            </a:pPr>
-            <a:r>
-              <a:rPr sz="1400" b="1">
-                <a:solidFill>
-                  <a:srgbClr val="333333"/>
-                </a:solidFill>
-                <a:latin typeface="+mj-ea"/>
-                <a:ea typeface="+mj-ea"/>
-              </a:rPr>
-              <a:t>③ Vol.10のフローを動かして自動で増やしてもOK</a:t>
+              </a:rPr>
+              <a:t>👉 ハンズオン中、自分から自分へ1通メールを送ってフローを動かします。それだけです</a:t>
             </a:r>
           </a:p>
         </p:txBody>
@@ -13177,7 +12695,7 @@
         <p:spPr>
           <a:xfrm>
             <a:off x="684391" y="1363842"/>
-            <a:ext cx="11000000" cy="700000"/>
+            <a:ext cx="11269842" cy="700000"/>
           </a:xfrm>
           <a:prstGeom prst="rect">
             <a:avLst/>
@@ -13201,7 +12719,7 @@
                 <a:ea typeface="Noto Sans JP" pitchFamily="34" charset="-122"/>
                 <a:cs typeface="Noto Sans JP" pitchFamily="34" charset="-120"/>
               </a:rPr>
-              <a:t>PA45　　【実行履歴 × 出力JSON × パス指定】</a:t>
+              <a:t>PA45【メール受信 × 条件分岐 × 実行履歴】</a:t>
             </a:r>
             <a:endParaRPr lang="en-US" sz="3200" dirty="0"/>
           </a:p>
@@ -13216,7 +12734,7 @@
         <p:spPr>
           <a:xfrm>
             <a:off x="684391" y="2865204"/>
-            <a:ext cx="12536294" cy="715061"/>
+            <a:ext cx="12536294" cy="1515680"/>
           </a:xfrm>
           <a:prstGeom prst="rect">
             <a:avLst/>
@@ -13232,7 +12750,7 @@
               <a:buNone/>
             </a:pPr>
             <a:r>
-              <a:rPr lang="en-US" sz="4500" b="1" dirty="0">
+              <a:rPr lang="en-US" sz="3200" b="1" dirty="0">
                 <a:solidFill>
                   <a:srgbClr val="1F2937"/>
                 </a:solidFill>
@@ -13244,37 +12762,26 @@
             </a:r>
           </a:p>
           <a:p>
-            <a:pPr marL="0" indent="0" algn="l">
-              <a:buNone/>
-            </a:pPr>
-            <a:r>
-              <a:rPr lang="en-US" sz="4500" b="1">
+            <a:r>
+              <a:rPr sz="3200" b="1">
                 <a:solidFill>
                   <a:srgbClr val="1F2937"/>
                 </a:solidFill>
-                <a:latin typeface="Noto Sans JP" pitchFamily="34" charset="0"/>
-                <a:ea typeface="Noto Sans JP" pitchFamily="34" charset="-122"/>
-                <a:cs typeface="Noto Sans JP" pitchFamily="34" charset="-120"/>
-              </a:rPr>
-              <a:t>実行履歴の「出力」を読めると</a:t>
-            </a:r>
-          </a:p>
-          <a:p>
-            <a:pPr marL="0" indent="0" algn="l">
-              <a:buNone/>
-            </a:pPr>
-            <a:r>
-              <a:rPr lang="en-US" sz="4500" b="1">
+                <a:latin typeface="Noto Sans JP"/>
+              </a:rPr>
+              <a:t>失敗しないフロー設計</a:t>
+            </a:r>
+          </a:p>
+          <a:p>
+            <a:r>
+              <a:rPr sz="3200" b="1">
                 <a:solidFill>
                   <a:srgbClr val="1F2937"/>
                 </a:solidFill>
-                <a:latin typeface="Noto Sans JP" pitchFamily="34" charset="0"/>
-                <a:ea typeface="Noto Sans JP" pitchFamily="34" charset="-122"/>
-                <a:cs typeface="Noto Sans JP" pitchFamily="34" charset="-120"/>
-              </a:rPr>
-              <a:t>フローがつながる</a:t>
-            </a:r>
-            <a:endParaRPr lang="en-US" sz="4500" dirty="0"/>
+                <a:latin typeface="Noto Sans JP"/>
+              </a:rPr>
+              <a:t>実行履歴を読めるようになろう</a:t>
+            </a:r>
           </a:p>
         </p:txBody>
       </p:sp>
@@ -13345,7 +12852,7 @@
                 <a:ea typeface="Noto Sans JP" pitchFamily="34" charset="-122"/>
                 <a:cs typeface="Noto Sans JP" pitchFamily="34" charset="-120"/>
               </a:rPr>
-              <a:t>Theme　実行履歴の見方｜JSONとパス指定の基本</a:t>
+              <a:t>Theme　メールの重要度で条件分岐｜実行履歴の出力を読む</a:t>
             </a:r>
             <a:endParaRPr lang="en-US" dirty="0"/>
           </a:p>
@@ -13384,25 +12891,8 @@
                 <a:ea typeface="Noto Sans JP" pitchFamily="34" charset="-122"/>
                 <a:cs typeface="Noto Sans JP" pitchFamily="34" charset="-120"/>
               </a:rPr>
-              <a:t>Target　Vol.1〜10で作ったフローがある方／動的コンテンツに値が出なくて困った方</a:t>
-            </a:r>
-          </a:p>
-          <a:p>
-            <a:pPr marL="0" indent="0" algn="l">
-              <a:buNone/>
-            </a:pPr>
-            <a:r>
-              <a:rPr lang="ja-JP" altLang="en-US">
-                <a:solidFill>
-                  <a:srgbClr val="374151"/>
-                </a:solidFill>
-                <a:latin typeface="Noto Sans JP" pitchFamily="34" charset="0"/>
-                <a:ea typeface="Noto Sans JP" pitchFamily="34" charset="-122"/>
-                <a:cs typeface="Noto Sans JP" pitchFamily="34" charset="-120"/>
-              </a:rPr>
-              <a:t>　　　（プログラミング知識ゼロでOK）</a:t>
-            </a:r>
-            <a:endParaRPr lang="en-US" dirty="0"/>
+              <a:t>Target　条件分岐（Vol.3）を触った方／はじめての方も、見るだけでOK</a:t>
+            </a:r>
           </a:p>
         </p:txBody>
       </p:sp>
@@ -14048,56 +13538,6 @@
           </a:p>
         </p:txBody>
       </p:sp>
-      <p:pic>
-        <p:nvPicPr>
-          <p:cNvPr id="5" name="Image 0" descr="preencoded.png"/>
-          <p:cNvPicPr>
-            <a:picLocks noChangeAspect="1"/>
-          </p:cNvPicPr>
-          <p:nvPr/>
-        </p:nvPicPr>
-        <p:blipFill>
-          <a:blip r:embed="rId3">
-            <a:alphaModFix amt="50000"/>
-          </a:blip>
-          <a:srcRect/>
-          <a:stretch/>
-        </p:blipFill>
-        <p:spPr>
-          <a:xfrm>
-            <a:off x="10362895" y="-495605"/>
-            <a:ext cx="3657600" cy="3657600"/>
-          </a:xfrm>
-          <a:prstGeom prst="rect">
-            <a:avLst/>
-          </a:prstGeom>
-        </p:spPr>
-      </p:pic>
-      <p:pic>
-        <p:nvPicPr>
-          <p:cNvPr id="6" name="Image 1" descr="preencoded.png"/>
-          <p:cNvPicPr>
-            <a:picLocks noChangeAspect="1"/>
-          </p:cNvPicPr>
-          <p:nvPr/>
-        </p:nvPicPr>
-        <p:blipFill>
-          <a:blip r:embed="rId4">
-            <a:alphaModFix amt="50000"/>
-          </a:blip>
-          <a:srcRect/>
-          <a:stretch/>
-        </p:blipFill>
-        <p:spPr>
-          <a:xfrm>
-            <a:off x="-1828800" y="4419295"/>
-            <a:ext cx="3657600" cy="3657600"/>
-          </a:xfrm>
-          <a:prstGeom prst="rect">
-            <a:avLst/>
-          </a:prstGeom>
-        </p:spPr>
-      </p:pic>
       <p:sp>
         <p:nvSpPr>
           <p:cNvPr id="7" name="Text 3"/>
@@ -14163,7 +13603,7 @@
           <p:nvPr/>
         </p:nvPicPr>
         <p:blipFill>
-          <a:blip r:embed="rId5"/>
+          <a:blip r:embed="rId3"/>
           <a:srcRect l="-8" r="-8"/>
           <a:stretch/>
         </p:blipFill>
@@ -14222,7 +13662,7 @@
           <p:nvPr/>
         </p:nvPicPr>
         <p:blipFill>
-          <a:blip r:embed="rId6"/>
+          <a:blip r:embed="rId4"/>
           <a:srcRect l="-107" r="-107"/>
           <a:stretch/>
         </p:blipFill>
@@ -14357,7 +13797,7 @@
           <p:nvPr/>
         </p:nvPicPr>
         <p:blipFill>
-          <a:blip r:embed="rId5"/>
+          <a:blip r:embed="rId3"/>
           <a:srcRect l="-8" r="-8"/>
           <a:stretch/>
         </p:blipFill>
@@ -14416,7 +13856,7 @@
           <p:nvPr/>
         </p:nvPicPr>
         <p:blipFill>
-          <a:blip r:embed="rId7"/>
+          <a:blip r:embed="rId5"/>
           <a:srcRect l="-90" r="-90"/>
           <a:stretch/>
         </p:blipFill>
@@ -14551,7 +13991,7 @@
           <p:nvPr/>
         </p:nvPicPr>
         <p:blipFill>
-          <a:blip r:embed="rId5"/>
+          <a:blip r:embed="rId3"/>
           <a:srcRect l="-8" r="-8"/>
           <a:stretch/>
         </p:blipFill>
@@ -14610,7 +14050,7 @@
           <p:nvPr/>
         </p:nvPicPr>
         <p:blipFill>
-          <a:blip r:embed="rId8"/>
+          <a:blip r:embed="rId6"/>
           <a:srcRect l="-90" r="-90"/>
           <a:stretch/>
         </p:blipFill>
@@ -14745,7 +14185,7 @@
           <p:nvPr/>
         </p:nvPicPr>
         <p:blipFill>
-          <a:blip r:embed="rId9"/>
+          <a:blip r:embed="rId7"/>
           <a:srcRect t="-40" b="-40"/>
           <a:stretch/>
         </p:blipFill>
@@ -14843,7 +14283,7 @@
           <p:nvPr/>
         </p:nvPicPr>
         <p:blipFill>
-          <a:blip r:embed="rId10"/>
+          <a:blip r:embed="rId8"/>
           <a:srcRect l="-1648" r="-1648"/>
           <a:stretch/>
         </p:blipFill>
@@ -15228,7 +14668,7 @@
           <p:nvPr/>
         </p:nvPicPr>
         <p:blipFill>
-          <a:blip r:embed="rId11"/>
+          <a:blip r:embed="rId9"/>
           <a:srcRect t="-1" b="-1"/>
           <a:stretch/>
         </p:blipFill>
@@ -15430,7 +14870,7 @@
             <p:nvPr/>
           </p:nvPicPr>
           <p:blipFill>
-            <a:blip r:embed="rId12"/>
+            <a:blip r:embed="rId10"/>
             <a:srcRect/>
             <a:stretch/>
           </p:blipFill>
@@ -18699,7 +18139,18 @@
                 <a:ea typeface="BIZ UDGothic" pitchFamily="34" charset="-122"/>
                 <a:cs typeface="BIZ UDGothic" pitchFamily="34" charset="-120"/>
               </a:rPr>
-              <a:t>Power Automate 初心者支援が専門</a:t>
+              <a:t>Power </a:t>
+            </a:r>
+            <a:r>
+              <a:rPr lang="en-US" sz="1600" b="1">
+                <a:solidFill>
+                  <a:srgbClr val="1F2937"/>
+                </a:solidFill>
+                <a:latin typeface="BIZ UDGothic" pitchFamily="34" charset="0"/>
+                <a:ea typeface="BIZ UDGothic" pitchFamily="34" charset="-122"/>
+                <a:cs typeface="BIZ UDGothic" pitchFamily="34" charset="-120"/>
+              </a:rPr>
+              <a:t>Automate 支援が専門</a:t>
             </a:r>
             <a:endParaRPr lang="en-US" sz="1600" dirty="0"/>
           </a:p>
@@ -20047,7 +19498,7 @@
               <a:buNone/>
             </a:pPr>
             <a:r>
-              <a:rPr lang="en-US" sz="4500" b="1" dirty="0">
+              <a:rPr lang="en-US" sz="3000" b="1" dirty="0">
                 <a:solidFill>
                   <a:srgbClr val="1F2937"/>
                 </a:solidFill>
@@ -20540,7 +19991,7 @@
                 <a:ea typeface="Noto Sans JP" pitchFamily="34" charset="-122"/>
                 <a:cs typeface="Noto Sans JP" pitchFamily="34" charset="-120"/>
               </a:rPr>
-              <a:t>実行履歴の「出力」をのぞいてみる</a:t>
+              <a:t>メール受信でフローを作る</a:t>
             </a:r>
             <a:endParaRPr lang="en-US" sz="1400" dirty="0"/>
           </a:p>
@@ -20579,82 +20030,19 @@
                 <a:ea typeface="Noto Sans JP" pitchFamily="34" charset="-122"/>
                 <a:cs typeface="Noto Sans JP" pitchFamily="34" charset="-120"/>
               </a:rPr>
-              <a:t>マイフロー → 実行履歴 → 緑カードを開く。</a:t>
-            </a:r>
-          </a:p>
-          <a:p>
-            <a:pPr marL="0" indent="0">
-              <a:buNone/>
-            </a:pPr>
-            <a:r>
-              <a:rPr lang="en-US" sz="1600">
+              <a:t>「新しいメールが届いたとき」をトリガーに、</a:t>
+            </a:r>
+          </a:p>
+          <a:p>
+            <a:r>
+              <a:rPr sz="1600">
                 <a:solidFill>
                   <a:srgbClr val="6B7280"/>
                 </a:solidFill>
-                <a:latin typeface="Noto Sans JP" pitchFamily="34" charset="0"/>
-                <a:ea typeface="Noto Sans JP" pitchFamily="34" charset="-122"/>
-                <a:cs typeface="Noto Sans JP" pitchFamily="34" charset="-120"/>
-              </a:rPr>
-              <a:t>「入力」と「出力」タブの違いを体感します。</a:t>
-            </a:r>
-          </a:p>
-          <a:p>
-            <a:pPr marL="0" indent="0">
-              <a:buNone/>
-            </a:pPr>
-            <a:endParaRPr lang="en-US" sz="1600">
-              <a:solidFill>
-                <a:srgbClr val="6B7280"/>
-              </a:solidFill>
-              <a:latin typeface="Noto Sans JP" pitchFamily="34" charset="0"/>
-              <a:ea typeface="Noto Sans JP" pitchFamily="34" charset="-122"/>
-              <a:cs typeface="Noto Sans JP" pitchFamily="34" charset="-120"/>
-            </a:endParaRPr>
-          </a:p>
-          <a:p>
-            <a:pPr marL="0" indent="0">
-              <a:buNone/>
-            </a:pPr>
-            <a:r>
-              <a:rPr lang="en-US" sz="1600">
-                <a:solidFill>
-                  <a:srgbClr val="6B7280"/>
-                </a:solidFill>
-                <a:latin typeface="Noto Sans JP" pitchFamily="34" charset="0"/>
-                <a:ea typeface="Noto Sans JP" pitchFamily="34" charset="-122"/>
-                <a:cs typeface="Noto Sans JP" pitchFamily="34" charset="-120"/>
-              </a:rPr>
-              <a:t> </a:t>
-            </a:r>
-          </a:p>
-          <a:p>
-            <a:pPr marL="0" indent="0">
-              <a:buNone/>
-            </a:pPr>
-            <a:r>
-              <a:rPr lang="en-US" sz="1600" dirty="0">
-                <a:solidFill>
-                  <a:srgbClr val="6B7280"/>
-                </a:solidFill>
-                <a:latin typeface="Noto Sans JP" pitchFamily="34" charset="0"/>
-                <a:ea typeface="Noto Sans JP" pitchFamily="34" charset="-122"/>
-                <a:cs typeface="Noto Sans JP" pitchFamily="34" charset="-120"/>
-              </a:rPr>
-              <a:t> </a:t>
-            </a:r>
-            <a:endParaRPr lang="en-US" sz="1400" dirty="0"/>
-          </a:p>
-          <a:p>
-            <a:pPr marL="0" indent="0">
-              <a:buNone/>
-            </a:pPr>
-            <a:endParaRPr lang="en-US" sz="1400" dirty="0"/>
-          </a:p>
-          <a:p>
-            <a:pPr marL="0" indent="0">
-              <a:buNone/>
-            </a:pPr>
-            <a:endParaRPr lang="en-US" sz="1400" dirty="0"/>
+                <a:latin typeface="Noto Sans JP"/>
+              </a:rPr>
+              <a:t>届いたメールで動くフローを作ります。</a:t>
+            </a:r>
           </a:p>
         </p:txBody>
       </p:sp>
@@ -20778,7 +20166,7 @@
                 <a:ea typeface="Noto Sans JP" pitchFamily="34" charset="-122"/>
                 <a:cs typeface="Noto Sans JP" pitchFamily="34" charset="-120"/>
               </a:rPr>
-              <a:t>出力JSONから値を式で取り出す</a:t>
+              <a:t>重要度で条件分岐させる</a:t>
             </a:r>
             <a:endParaRPr lang="en-US" sz="1400" dirty="0"/>
           </a:p>
@@ -20817,37 +20205,19 @@
                 <a:ea typeface="Noto Sans JP" pitchFamily="34" charset="-122"/>
                 <a:cs typeface="Noto Sans JP" pitchFamily="34" charset="-120"/>
               </a:rPr>
-              <a:t>first() / [0] / length() を使って、</a:t>
-            </a:r>
-          </a:p>
-          <a:p>
-            <a:pPr marL="0" indent="0" algn="ctr">
-              <a:buNone/>
-            </a:pPr>
-            <a:r>
-              <a:rPr lang="en-US" sz="1600" dirty="0">
+              <a:t>「条件」アクションで、メールの重要度が</a:t>
+            </a:r>
+          </a:p>
+          <a:p>
+            <a:r>
+              <a:rPr sz="1600">
                 <a:solidFill>
                   <a:srgbClr val="6B7280"/>
                 </a:solidFill>
-                <a:latin typeface="Noto Sans JP" pitchFamily="34" charset="0"/>
-                <a:ea typeface="Noto Sans JP" pitchFamily="34" charset="-122"/>
-                <a:cs typeface="Noto Sans JP" pitchFamily="34" charset="-120"/>
-              </a:rPr>
-              <a:t>配列の中から欲しい値を1つ抜き出します。</a:t>
-            </a:r>
-            <a:endParaRPr lang="en-US" sz="1400" dirty="0"/>
-          </a:p>
-          <a:p>
-            <a:pPr marL="0" indent="0" algn="ctr">
-              <a:buNone/>
-            </a:pPr>
-            <a:endParaRPr lang="en-US" sz="1400" dirty="0"/>
-          </a:p>
-          <a:p>
-            <a:pPr marL="0" indent="0" algn="ctr">
-              <a:buNone/>
-            </a:pPr>
-            <a:endParaRPr lang="en-US" sz="1400" dirty="0"/>
+                <a:latin typeface="Noto Sans JP"/>
+              </a:rPr>
+              <a:t>「高」かどうかで処理を分けます。</a:t>
+            </a:r>
           </a:p>
         </p:txBody>
       </p:sp>
@@ -20971,7 +20341,7 @@
                 <a:ea typeface="Noto Sans JP" pitchFamily="34" charset="-122"/>
                 <a:cs typeface="Noto Sans JP" pitchFamily="34" charset="-120"/>
               </a:rPr>
-              <a:t>Teamsに「全件数・最新タイトル」を投稿</a:t>
+              <a:t>実行履歴の出力を読む</a:t>
             </a:r>
             <a:endParaRPr lang="en-US" sz="1400" dirty="0"/>
           </a:p>
@@ -21010,21 +20380,20 @@
                 <a:ea typeface="Noto Sans JP" pitchFamily="34" charset="-122"/>
                 <a:cs typeface="Noto Sans JP" pitchFamily="34" charset="-120"/>
               </a:rPr>
-              <a:t>取り出した値を後続のTeamsアクションで使う、までを通して体験！</a:t>
+              <a:t>わざと失敗させて、実行履歴の出力から</a:t>
             </a:r>
             <a:endParaRPr lang="en-US" sz="1400" dirty="0"/>
           </a:p>
           <a:p>
-            <a:pPr marL="0" indent="0" algn="ctr">
-              <a:buNone/>
-            </a:pPr>
-            <a:endParaRPr lang="en-US" sz="1400" dirty="0"/>
-          </a:p>
-          <a:p>
-            <a:pPr marL="0" indent="0" algn="ctr">
-              <a:buNone/>
-            </a:pPr>
-            <a:endParaRPr lang="en-US" sz="1400" dirty="0"/>
+            <a:r>
+              <a:rPr sz="1600">
+                <a:solidFill>
+                  <a:srgbClr val="6B7280"/>
+                </a:solidFill>
+                <a:latin typeface="Noto Sans JP"/>
+              </a:rPr>
+              <a:t>原因を見つけ、直します。</a:t>
+            </a:r>
           </a:p>
         </p:txBody>
       </p:sp>
@@ -21601,8 +20970,8 @@
         </p:nvSpPr>
         <p:spPr>
           <a:xfrm>
-            <a:off x="457200" y="533095"/>
-            <a:ext cx="7781544" cy="715061"/>
+            <a:off x="457199" y="533095"/>
+            <a:ext cx="10852951" cy="715061"/>
           </a:xfrm>
           <a:prstGeom prst="rect">
             <a:avLst/>
@@ -21618,7 +20987,7 @@
               <a:buNone/>
             </a:pPr>
             <a:r>
-              <a:rPr lang="en-US" sz="4500" b="1" dirty="0">
+              <a:rPr lang="en-US" sz="3000" b="1" dirty="0">
                 <a:solidFill>
                   <a:srgbClr val="1F2937"/>
                 </a:solidFill>
@@ -21626,20 +20995,9 @@
                 <a:ea typeface="Noto Sans JP" pitchFamily="34" charset="-122"/>
                 <a:cs typeface="Noto Sans JP" pitchFamily="34" charset="-120"/>
               </a:rPr>
-              <a:t>テーマ解説</a:t>
-            </a:r>
-            <a:r>
-              <a:rPr lang="en-US" sz="2700" b="1" dirty="0">
-                <a:solidFill>
-                  <a:srgbClr val="6B7280"/>
-                </a:solidFill>
-                <a:latin typeface="Noto Sans JP" pitchFamily="34" charset="0"/>
-                <a:ea typeface="Noto Sans JP" pitchFamily="34" charset="-122"/>
-                <a:cs typeface="Noto Sans JP" pitchFamily="34" charset="-120"/>
-              </a:rPr>
-              <a:t>（仕組みを理解しよう）</a:t>
-            </a:r>
-            <a:endParaRPr lang="en-US" sz="4500" dirty="0"/>
+              <a:t>テーマ解説 (1/2)：実行履歴って何？</a:t>
+            </a:r>
+            <a:endParaRPr lang="en-US" sz="3600" dirty="0"/>
           </a:p>
         </p:txBody>
       </p:sp>
@@ -22154,7 +21512,7 @@
                 <a:ea typeface="Noto Sans JP" pitchFamily="34" charset="-122"/>
                 <a:cs typeface="Noto Sans JP" pitchFamily="34" charset="-120"/>
               </a:rPr>
-              <a:t>①SharePoint「複数の項目の取得」でリストの全件を取り出す。</a:t>
+              <a:t>①「実行履歴」は、フローを動かした記録です。</a:t>
             </a:r>
             <a:endParaRPr lang="en-US" altLang="ja-JP" sz="2000" b="1">
               <a:solidFill>
@@ -22166,234 +21524,138 @@
             </a:endParaRPr>
           </a:p>
           <a:p>
-            <a:pPr marL="0" indent="0" algn="l">
-              <a:buNone/>
+            <a:r>
+              <a:rPr sz="2000" b="1">
+                <a:solidFill>
+                  <a:srgbClr val="1F2937"/>
+                </a:solidFill>
+                <a:latin typeface="Noto Sans JP"/>
+              </a:rPr>
+              <a:t>　いつ・どのアクションが・成功（緑）か失敗（赤）か が残ります。</a:t>
+            </a:r>
+          </a:p>
+          <a:p>
+            <a:pPr>
+              <a:spcBef>
+                <a:spcPts val="1000"/>
+              </a:spcBef>
             </a:pPr>
             <a:r>
-              <a:rPr lang="ja-JP" altLang="en-US" sz="2000" b="1">
+              <a:rPr sz="2000" b="1">
                 <a:solidFill>
                   <a:srgbClr val="1F2937"/>
                 </a:solidFill>
-                <a:latin typeface="Noto Sans JP" pitchFamily="34" charset="0"/>
-                <a:ea typeface="Noto Sans JP" pitchFamily="34" charset="-122"/>
-                <a:cs typeface="Noto Sans JP" pitchFamily="34" charset="-120"/>
-              </a:rPr>
-              <a:t>②実行履歴で出力タブを開いてJSONを見る（body.value が配列）。</a:t>
-            </a:r>
-            <a:endParaRPr lang="en-US" altLang="ja-JP" sz="2000" b="1">
-              <a:solidFill>
-                <a:srgbClr val="1F2937"/>
-              </a:solidFill>
-              <a:latin typeface="Noto Sans JP" pitchFamily="34" charset="0"/>
-              <a:ea typeface="Noto Sans JP" pitchFamily="34" charset="-122"/>
-              <a:cs typeface="Noto Sans JP" pitchFamily="34" charset="-120"/>
-            </a:endParaRPr>
-          </a:p>
-          <a:p>
-            <a:pPr marL="0" indent="0" algn="l">
-              <a:buNone/>
+                <a:latin typeface="Noto Sans JP"/>
+              </a:rPr>
+              <a:t>②各アクションを開くと「入力」と「出力」が見られます。</a:t>
+            </a:r>
+          </a:p>
+          <a:p>
+            <a:r>
+              <a:rPr sz="2000" b="1">
+                <a:solidFill>
+                  <a:srgbClr val="1F2937"/>
+                </a:solidFill>
+                <a:latin typeface="Noto Sans JP"/>
+              </a:rPr>
+              <a:t>　入力＝受け取った値、出力＝次に渡す値。</a:t>
+            </a:r>
+          </a:p>
+          <a:p>
+            <a:pPr>
+              <a:spcBef>
+                <a:spcPts val="1000"/>
+              </a:spcBef>
             </a:pPr>
             <a:r>
-              <a:rPr lang="ja-JP" altLang="en-US" sz="2000" b="1">
+              <a:rPr sz="2000" b="1">
                 <a:solidFill>
                   <a:srgbClr val="1F2937"/>
                 </a:solidFill>
-                <a:latin typeface="Noto Sans JP" pitchFamily="34" charset="0"/>
-                <a:ea typeface="Noto Sans JP" pitchFamily="34" charset="-122"/>
-                <a:cs typeface="Noto Sans JP" pitchFamily="34" charset="-120"/>
-              </a:rPr>
-              <a:t/>
-            </a:r>
-            <a:endParaRPr lang="en-US" altLang="ja-JP" sz="2000" b="1">
-              <a:solidFill>
-                <a:srgbClr val="1F2937"/>
-              </a:solidFill>
-              <a:latin typeface="Noto Sans JP" pitchFamily="34" charset="0"/>
-              <a:ea typeface="Noto Sans JP" pitchFamily="34" charset="-122"/>
-              <a:cs typeface="Noto Sans JP" pitchFamily="34" charset="-120"/>
-            </a:endParaRPr>
-          </a:p>
-          <a:p>
-            <a:pPr marL="0" indent="0" algn="l">
-              <a:buNone/>
-            </a:pPr>
-            <a:r>
-              <a:t>③「作成」アクションで式 first()/length() を書き、配列から値を抜く。</a:t>
-            </a:r>
-            <a:endParaRPr lang="ja-JP" altLang="en-US" sz="2000" b="1">
-              <a:solidFill>
-                <a:srgbClr val="1F2937"/>
-              </a:solidFill>
-              <a:latin typeface="Noto Sans JP" pitchFamily="34" charset="0"/>
-              <a:ea typeface="Noto Sans JP" pitchFamily="34" charset="-122"/>
-              <a:cs typeface="Noto Sans JP" pitchFamily="34" charset="-120"/>
-            </a:endParaRPr>
-          </a:p>
-          <a:p>
-            <a:pPr marL="0" indent="0" algn="l">
-              <a:buNone/>
-            </a:pPr>
-            <a:r>
-              <a:rPr lang="ja-JP" altLang="en-US" sz="2000" b="1">
+                <a:latin typeface="Noto Sans JP"/>
+              </a:rPr>
+              <a:t>③うまく動かないときは、実行履歴の入力・出力を見れば</a:t>
+            </a:r>
+          </a:p>
+          <a:p>
+            <a:r>
+              <a:rPr sz="2000" b="1">
                 <a:solidFill>
                   <a:srgbClr val="1F2937"/>
                 </a:solidFill>
-                <a:latin typeface="Noto Sans JP" pitchFamily="34" charset="0"/>
-                <a:ea typeface="Noto Sans JP" pitchFamily="34" charset="-122"/>
-                <a:cs typeface="Noto Sans JP" pitchFamily="34" charset="-120"/>
-              </a:rPr>
-              <a:t/>
-            </a:r>
-          </a:p>
-          <a:p>
-            <a:pPr marL="0" indent="0" algn="l">
-              <a:buNone/>
-            </a:pPr>
-            <a:r>
-              <a:t>④Teamsに「全件数・最新タイトル」を投稿して、抜き出した値が後続で使えることを確認。</a:t>
-            </a:r>
-            <a:endParaRPr lang="en-US" altLang="ja-JP" sz="2000" b="1">
-              <a:solidFill>
-                <a:srgbClr val="1F2937"/>
-              </a:solidFill>
-              <a:latin typeface="Noto Sans JP" pitchFamily="34" charset="0"/>
-              <a:ea typeface="Noto Sans JP" pitchFamily="34" charset="-122"/>
-              <a:cs typeface="Noto Sans JP" pitchFamily="34" charset="-120"/>
-            </a:endParaRPr>
-          </a:p>
-          <a:p>
-            <a:pPr marL="0" indent="0" algn="l">
-              <a:buNone/>
-            </a:pPr>
-            <a:r>
-              <a:rPr lang="ja-JP" altLang="en-US" sz="2000" b="1">
-                <a:solidFill>
-                  <a:srgbClr val="1F2937"/>
-                </a:solidFill>
-                <a:latin typeface="Noto Sans JP" pitchFamily="34" charset="0"/>
-                <a:ea typeface="Noto Sans JP" pitchFamily="34" charset="-122"/>
-                <a:cs typeface="Noto Sans JP" pitchFamily="34" charset="-120"/>
-              </a:rPr>
-              <a:t/>
-            </a:r>
-            <a:endParaRPr lang="en-US" altLang="ja-JP" sz="2000" b="1">
-              <a:solidFill>
-                <a:srgbClr val="1F2937"/>
-              </a:solidFill>
-              <a:latin typeface="Noto Sans JP" pitchFamily="34" charset="0"/>
-              <a:ea typeface="Noto Sans JP" pitchFamily="34" charset="-122"/>
-              <a:cs typeface="Noto Sans JP" pitchFamily="34" charset="-120"/>
-            </a:endParaRPr>
-          </a:p>
-          <a:p>
-            <a:pPr marL="0" indent="0" algn="l">
-              <a:buNone/>
-            </a:pPr>
-            <a:endParaRPr lang="ja-JP" altLang="en-US" sz="2000" b="1">
-              <a:solidFill>
-                <a:srgbClr val="1F2937"/>
-              </a:solidFill>
-              <a:latin typeface="Noto Sans JP" pitchFamily="34" charset="0"/>
-              <a:ea typeface="Noto Sans JP" pitchFamily="34" charset="-122"/>
-              <a:cs typeface="Noto Sans JP" pitchFamily="34" charset="-120"/>
-            </a:endParaRPr>
-          </a:p>
-          <a:p>
-            <a:pPr marL="0" indent="0" algn="l">
-              <a:buNone/>
-            </a:pPr>
-            <a:endParaRPr lang="ja-JP" altLang="en-US" sz="2000" b="1">
-              <a:solidFill>
-                <a:srgbClr val="1F2937"/>
-              </a:solidFill>
-              <a:latin typeface="Noto Sans JP" pitchFamily="34" charset="0"/>
-              <a:ea typeface="Noto Sans JP" pitchFamily="34" charset="-122"/>
-              <a:cs typeface="Noto Sans JP" pitchFamily="34" charset="-120"/>
-            </a:endParaRPr>
-          </a:p>
-          <a:p>
-            <a:pPr marL="0" indent="0" algn="l">
-              <a:buNone/>
-            </a:pPr>
-            <a:endParaRPr lang="ja-JP" altLang="en-US" sz="2000" b="1" dirty="0">
-              <a:solidFill>
-                <a:srgbClr val="1F2937"/>
-              </a:solidFill>
-              <a:latin typeface="Noto Sans JP" pitchFamily="34" charset="0"/>
-              <a:ea typeface="Noto Sans JP" pitchFamily="34" charset="-122"/>
-              <a:cs typeface="Noto Sans JP" pitchFamily="34" charset="-120"/>
-            </a:endParaRPr>
-          </a:p>
-        </p:txBody>
-      </p:sp>
-      <p:pic>
-        <p:nvPicPr>
-          <p:cNvPr id="11" name="図 10" descr="The image shows a user interface with a form containing a file input, a checkbox for a property condition, and buttons for posting messages in chat or channel.&#10;&#10;AI 生成コンテンツは誤りを含む可能性があります。">
-            <a:extLst>
-              <a:ext uri="{FF2B5EF4-FFF2-40B4-BE49-F238E27FC236}">
-                <a16:creationId xmlns:a16="http://schemas.microsoft.com/office/drawing/2014/main" id="{A17FFD3D-1303-2BC7-3253-E2DBE5E19F07}"/>
-              </a:ext>
-            </a:extLst>
-          </p:cNvPr>
-          <p:cNvPicPr>
-            <a:picLocks noChangeAspect="1"/>
-          </p:cNvPicPr>
-          <p:nvPr/>
-        </p:nvPicPr>
-        <p:blipFill>
-          <a:blip r:embed="rId2"/>
-          <a:stretch>
-            <a:fillRect/>
-          </a:stretch>
-        </p:blipFill>
-        <p:spPr>
-          <a:xfrm>
-            <a:off x="6575704" y="1709443"/>
-            <a:ext cx="4904373" cy="4568713"/>
-          </a:xfrm>
-          <a:prstGeom prst="rect">
-            <a:avLst/>
-          </a:prstGeom>
-          <a:ln>
+                <a:latin typeface="Noto Sans JP"/>
+              </a:rPr>
+              <a:t>　「どこで・何が起きたか」が分かります。</a:t>
+            </a:r>
+          </a:p>
+        </p:txBody>
+      </p:sp>
+      <p:sp>
+        <p:nvSpPr>
+          <p:cNvPr id="52" name="Rounded Rectangle 51"/>
+          <p:cNvSpPr/>
+          <p:nvPr/>
+        </p:nvSpPr>
+        <p:spPr>
+          <a:xfrm>
+            <a:off x="7040880" y="1737360"/>
+            <a:ext cx="4572000" cy="4114800"/>
+          </a:xfrm>
+          <a:prstGeom prst="roundRect">
+            <a:avLst/>
+          </a:prstGeom>
+          <a:solidFill>
+            <a:srgbClr val="F1F5FB"/>
+          </a:solidFill>
+          <a:ln w="19050">
             <a:solidFill>
-              <a:schemeClr val="tx1">
-                <a:lumMod val="65000"/>
-                <a:lumOff val="35000"/>
-              </a:schemeClr>
+              <a:srgbClr val="9CB8D8"/>
             </a:solidFill>
           </a:ln>
-        </p:spPr>
-      </p:pic>
-      <p:pic>
-        <p:nvPicPr>
-          <p:cNvPr id="12" name="図 11" descr="A cartoon child with a blue shirt is pointing towards an illustration of an open eye with a light bulb.&#10;&#10;AI 生成コンテンツは誤りを含む可能性があります。">
-            <a:extLst>
-              <a:ext uri="{FF2B5EF4-FFF2-40B4-BE49-F238E27FC236}">
-                <a16:creationId xmlns:a16="http://schemas.microsoft.com/office/drawing/2014/main" id="{DCFEA6E0-2BC7-E886-FA98-B0724535F1F3}"/>
-              </a:ext>
-            </a:extLst>
-          </p:cNvPr>
-          <p:cNvPicPr>
-            <a:picLocks noChangeAspect="1"/>
-          </p:cNvPicPr>
-          <p:nvPr/>
-        </p:nvPicPr>
-        <p:blipFill>
-          <a:blip r:embed="rId3"/>
-          <a:stretch>
-            <a:fillRect/>
-          </a:stretch>
-        </p:blipFill>
-        <p:spPr>
-          <a:xfrm>
-            <a:off x="9809006" y="4595962"/>
-            <a:ext cx="1363810" cy="1613976"/>
-          </a:xfrm>
-          <a:prstGeom prst="rect">
-            <a:avLst/>
-          </a:prstGeom>
-        </p:spPr>
-      </p:pic>
+          <a:effectLst/>
+        </p:spPr>
+        <p:style>
+          <a:lnRef idx="1">
+            <a:schemeClr val="accent1"/>
+          </a:lnRef>
+          <a:fillRef idx="3">
+            <a:schemeClr val="accent1"/>
+          </a:fillRef>
+          <a:effectRef idx="2">
+            <a:schemeClr val="accent1"/>
+          </a:effectRef>
+          <a:fontRef idx="minor">
+            <a:schemeClr val="lt1"/>
+          </a:fontRef>
+        </p:style>
+        <p:txBody>
+          <a:bodyPr rtlCol="0" anchor="ctr" wrap="square"/>
+          <a:lstStyle/>
+          <a:p>
+            <a:pPr algn="ctr"/>
+            <a:r>
+              <a:rPr sz="1800" b="1">
+                <a:solidFill>
+                  <a:srgbClr val="2A5E9E"/>
+                </a:solidFill>
+              </a:rPr>
+              <a:t>📷 ここにスクショを貼る</a:t>
+            </a:r>
+          </a:p>
+          <a:p>
+            <a:pPr algn="ctr"/>
+            <a:r>
+              <a:rPr sz="1400">
+                <a:solidFill>
+                  <a:srgbClr val="556677"/>
+                </a:solidFill>
+              </a:rPr>
+              <a:t>実行履歴の一覧画面
+（緑＝成功・赤＝失敗が見える画面）</a:t>
+            </a:r>
+          </a:p>
+        </p:txBody>
+      </p:sp>
     </p:spTree>
   </p:cSld>
   <p:clrMapOvr>
@@ -22502,7 +21764,7 @@
         </p:nvSpPr>
         <p:spPr>
           <a:xfrm>
-            <a:off x="305" y="-9144"/>
+            <a:off x="0" y="0"/>
             <a:ext cx="12191695" cy="1485900"/>
           </a:xfrm>
           <a:prstGeom prst="rect">
@@ -22602,8 +21864,8 @@
         </p:nvSpPr>
         <p:spPr>
           <a:xfrm>
-            <a:off x="322110" y="628650"/>
-            <a:ext cx="9601200" cy="715061"/>
+            <a:off x="457199" y="533095"/>
+            <a:ext cx="10815277" cy="715061"/>
           </a:xfrm>
           <a:prstGeom prst="rect">
             <a:avLst/>
@@ -22619,7 +21881,7 @@
               <a:buNone/>
             </a:pPr>
             <a:r>
-              <a:rPr lang="en-US" sz="3600" b="1" dirty="0">
+              <a:rPr lang="en-US" sz="3000" b="1" dirty="0">
                 <a:solidFill>
                   <a:srgbClr val="1F2937"/>
                 </a:solidFill>
@@ -22627,9 +21889,9 @@
                 <a:ea typeface="Noto Sans JP" pitchFamily="34" charset="-122"/>
                 <a:cs typeface="Noto Sans JP" pitchFamily="34" charset="-120"/>
               </a:rPr>
-              <a:t>事前準備 ①  実行履歴の場所を覚える</a:t>
-            </a:r>
-            <a:endParaRPr lang="en-US" sz="3600" dirty="0"/>
+              <a:t>テーマ解説 (2/2)：画面の「表示」と「値」は違う</a:t>
+            </a:r>
+            <a:endParaRPr lang="en-US" sz="2800" dirty="0"/>
           </a:p>
         </p:txBody>
       </p:sp>
@@ -23119,8 +22381,8 @@
         </p:nvSpPr>
         <p:spPr>
           <a:xfrm>
-            <a:off x="204620" y="1781251"/>
-            <a:ext cx="6544523" cy="3947047"/>
+            <a:off x="265579" y="2229307"/>
+            <a:ext cx="6248431" cy="3913230"/>
           </a:xfrm>
           <a:prstGeom prst="rect">
             <a:avLst/>
@@ -23136,7 +22398,7 @@
               <a:buNone/>
             </a:pPr>
             <a:r>
-              <a:rPr lang="ja-JP" altLang="en-US" sz="2000">
+              <a:rPr lang="ja-JP" altLang="en-US" sz="2000" b="1">
                 <a:solidFill>
                   <a:srgbClr val="1F2937"/>
                 </a:solidFill>
@@ -23144,9 +22406,9 @@
                 <a:ea typeface="Noto Sans JP" pitchFamily="34" charset="-122"/>
                 <a:cs typeface="Noto Sans JP" pitchFamily="34" charset="-120"/>
               </a:rPr>
-              <a:t>🎯 目的：「動いた / 動かなかった」が分かる場所を最初に押さえる</a:t>
-            </a:r>
-            <a:endParaRPr lang="en-US" altLang="ja-JP" sz="2000">
+              <a:t>④画面に見える「表示」と、フローに実際に渡る「値」は</a:t>
+            </a:r>
+            <a:endParaRPr lang="en-US" altLang="ja-JP" sz="2000" b="1">
               <a:solidFill>
                 <a:srgbClr val="1F2937"/>
               </a:solidFill>
@@ -23156,277 +22418,138 @@
             </a:endParaRPr>
           </a:p>
           <a:p>
-            <a:pPr marL="0" indent="0" algn="l">
-              <a:buNone/>
+            <a:r>
+              <a:rPr sz="2000" b="1">
+                <a:solidFill>
+                  <a:srgbClr val="1F2937"/>
+                </a:solidFill>
+                <a:latin typeface="Noto Sans JP"/>
+              </a:rPr>
+              <a:t>　違うことがあります。</a:t>
+            </a:r>
+          </a:p>
+          <a:p>
+            <a:pPr>
+              <a:spcBef>
+                <a:spcPts val="1000"/>
+              </a:spcBef>
             </a:pPr>
-            <a:endParaRPr lang="en-US" altLang="ja-JP" sz="2000">
-              <a:solidFill>
-                <a:srgbClr val="1F2937"/>
-              </a:solidFill>
-              <a:latin typeface="Noto Sans JP" pitchFamily="34" charset="0"/>
-              <a:ea typeface="Noto Sans JP" pitchFamily="34" charset="-122"/>
-              <a:cs typeface="Noto Sans JP" pitchFamily="34" charset="-120"/>
-            </a:endParaRPr>
-          </a:p>
-          <a:p>
-            <a:pPr marL="0" indent="0" algn="l">
-              <a:buNone/>
+            <a:r>
+              <a:rPr sz="2000" b="1">
+                <a:solidFill>
+                  <a:srgbClr val="1F2937"/>
+                </a:solidFill>
+                <a:latin typeface="Noto Sans JP"/>
+              </a:rPr>
+              <a:t>⑤例：メールの重要度。画面の表示は「高」でも、</a:t>
+            </a:r>
+          </a:p>
+          <a:p>
+            <a:r>
+              <a:rPr sz="2000" b="1">
+                <a:solidFill>
+                  <a:srgbClr val="1F2937"/>
+                </a:solidFill>
+                <a:latin typeface="Noto Sans JP"/>
+              </a:rPr>
+              <a:t>　出力に渡る値は英語の "High" です。</a:t>
+            </a:r>
+          </a:p>
+          <a:p>
+            <a:pPr>
+              <a:spcBef>
+                <a:spcPts val="1000"/>
+              </a:spcBef>
             </a:pPr>
             <a:r>
-              <a:rPr lang="ja-JP" altLang="en-US" sz="2000">
+              <a:rPr sz="2000" b="1">
                 <a:solidFill>
                   <a:srgbClr val="1F2937"/>
                 </a:solidFill>
-                <a:latin typeface="Noto Sans JP" pitchFamily="34" charset="0"/>
-                <a:ea typeface="Noto Sans JP" pitchFamily="34" charset="-122"/>
-                <a:cs typeface="Noto Sans JP" pitchFamily="34" charset="-120"/>
-                <a:hlinkClick r:id="rId2"/>
-              </a:rPr>
-              <a:t>・マイフロー画面でフロー名をクリック</a:t>
-            </a:r>
-            <a:r>
-              <a:rPr lang="ja-JP" altLang="en-US" sz="2000">
+                <a:latin typeface="Noto Sans JP"/>
+              </a:rPr>
+              <a:t>⑥条件に「高」と書くと一致せず、フローは赤くならないまま</a:t>
+            </a:r>
+          </a:p>
+          <a:p>
+            <a:r>
+              <a:rPr sz="2000" b="1">
                 <a:solidFill>
                   <a:srgbClr val="1F2937"/>
                 </a:solidFill>
-                <a:latin typeface="Noto Sans JP" pitchFamily="34" charset="0"/>
-                <a:ea typeface="Noto Sans JP" pitchFamily="34" charset="-122"/>
-                <a:cs typeface="Noto Sans JP" pitchFamily="34" charset="-120"/>
-              </a:rPr>
-              <a:t/>
-            </a:r>
-            <a:endParaRPr lang="en-US" altLang="ja-JP" sz="2000">
-              <a:solidFill>
-                <a:srgbClr val="1F2937"/>
-              </a:solidFill>
-              <a:latin typeface="Noto Sans JP" pitchFamily="34" charset="0"/>
-              <a:ea typeface="Noto Sans JP" pitchFamily="34" charset="-122"/>
-              <a:cs typeface="Noto Sans JP" pitchFamily="34" charset="-120"/>
-            </a:endParaRPr>
-          </a:p>
-          <a:p>
-            <a:pPr marL="0" indent="0" algn="l">
-              <a:buNone/>
-            </a:pPr>
-            <a:r>
-              <a:t>・画面右側に「28日間の実行履歴」が一覧で出る</a:t>
-            </a:r>
-            <a:endParaRPr lang="en-US" altLang="ja-JP" sz="2000">
-              <a:solidFill>
-                <a:srgbClr val="1F2937"/>
-              </a:solidFill>
-              <a:latin typeface="Noto Sans JP" pitchFamily="34" charset="0"/>
-              <a:ea typeface="Noto Sans JP" pitchFamily="34" charset="-122"/>
-              <a:cs typeface="Noto Sans JP" pitchFamily="34" charset="-120"/>
-            </a:endParaRPr>
-          </a:p>
-          <a:p>
-            <a:pPr marL="0" indent="0" algn="l">
-              <a:buNone/>
-            </a:pPr>
-            <a:r>
-              <a:rPr lang="ja-JP" altLang="en-US" sz="2000">
-                <a:solidFill>
-                  <a:srgbClr val="1F2937"/>
-                </a:solidFill>
-                <a:latin typeface="Noto Sans JP" pitchFamily="34" charset="0"/>
-                <a:ea typeface="Noto Sans JP" pitchFamily="34" charset="-122"/>
-                <a:cs typeface="Noto Sans JP" pitchFamily="34" charset="-120"/>
-              </a:rPr>
-              <a:t>・緑チェック＝成功、赤×＝失敗</a:t>
-            </a:r>
-            <a:endParaRPr lang="en-US" altLang="ja-JP" sz="2000">
-              <a:solidFill>
-                <a:srgbClr val="1F2937"/>
-              </a:solidFill>
-              <a:latin typeface="Noto Sans JP" pitchFamily="34" charset="0"/>
-              <a:ea typeface="Noto Sans JP" pitchFamily="34" charset="-122"/>
-              <a:cs typeface="Noto Sans JP" pitchFamily="34" charset="-120"/>
-            </a:endParaRPr>
-          </a:p>
-          <a:p>
-            <a:pPr marL="0" indent="0" algn="l">
-              <a:buNone/>
-            </a:pPr>
-            <a:r>
-              <a:t>・行をクリックすると、各アクションの「入力」「出力」が見られる詳細画面に飛ぶ</a:t>
-            </a:r>
-            <a:endParaRPr lang="ja-JP" altLang="en-US" sz="2000">
-              <a:solidFill>
-                <a:srgbClr val="1F2937"/>
-              </a:solidFill>
-              <a:latin typeface="Noto Sans JP" pitchFamily="34" charset="0"/>
-              <a:ea typeface="Noto Sans JP" pitchFamily="34" charset="-122"/>
-              <a:cs typeface="Noto Sans JP" pitchFamily="34" charset="-120"/>
-            </a:endParaRPr>
-          </a:p>
-          <a:p>
-            <a:pPr marL="0" indent="0" algn="l">
-              <a:buNone/>
-            </a:pPr>
-            <a:r>
-              <a:rPr lang="ja-JP" altLang="en-US" sz="2000">
-                <a:solidFill>
-                  <a:srgbClr val="1F2937"/>
-                </a:solidFill>
-                <a:latin typeface="Noto Sans JP" pitchFamily="34" charset="0"/>
-                <a:ea typeface="Noto Sans JP" pitchFamily="34" charset="-122"/>
-                <a:cs typeface="Noto Sans JP" pitchFamily="34" charset="-120"/>
-              </a:rPr>
-              <a:t/>
-            </a:r>
-          </a:p>
-          <a:p>
-            <a:pPr marL="0" indent="0" algn="l">
-              <a:buNone/>
-            </a:pPr>
-            <a:r>
-              <a:t/>
-            </a:r>
-            <a:endParaRPr lang="en-US" altLang="ja-JP" sz="2000">
-              <a:solidFill>
-                <a:srgbClr val="1F2937"/>
-              </a:solidFill>
-              <a:latin typeface="Noto Sans JP" pitchFamily="34" charset="0"/>
-              <a:ea typeface="Noto Sans JP" pitchFamily="34" charset="-122"/>
-              <a:cs typeface="Noto Sans JP" pitchFamily="34" charset="-120"/>
-            </a:endParaRPr>
-          </a:p>
-          <a:p>
-            <a:pPr marL="0" indent="0" algn="l">
-              <a:buNone/>
-            </a:pPr>
-            <a:r>
-              <a:rPr lang="ja-JP" altLang="en-US" sz="2000">
-                <a:solidFill>
-                  <a:srgbClr val="1F2937"/>
-                </a:solidFill>
-                <a:latin typeface="Noto Sans JP" pitchFamily="34" charset="0"/>
-                <a:ea typeface="Noto Sans JP" pitchFamily="34" charset="-122"/>
-                <a:cs typeface="Noto Sans JP" pitchFamily="34" charset="-120"/>
-              </a:rPr>
-              <a:t/>
-            </a:r>
-            <a:endParaRPr lang="en-US" altLang="ja-JP" sz="2000">
-              <a:solidFill>
-                <a:srgbClr val="1F2937"/>
-              </a:solidFill>
-              <a:latin typeface="Noto Sans JP" pitchFamily="34" charset="0"/>
-              <a:ea typeface="Noto Sans JP" pitchFamily="34" charset="-122"/>
-              <a:cs typeface="Noto Sans JP" pitchFamily="34" charset="-120"/>
-            </a:endParaRPr>
-          </a:p>
-          <a:p>
-            <a:pPr marL="0" indent="0" algn="l">
-              <a:buNone/>
-            </a:pPr>
-            <a:r>
-              <a:rPr lang="ja-JP" altLang="en-US" sz="2000">
-                <a:solidFill>
-                  <a:srgbClr val="1F2937"/>
-                </a:solidFill>
-                <a:latin typeface="Noto Sans JP" pitchFamily="34" charset="0"/>
-                <a:ea typeface="Noto Sans JP" pitchFamily="34" charset="-122"/>
-                <a:cs typeface="Noto Sans JP" pitchFamily="34" charset="-120"/>
-              </a:rPr>
-              <a:t/>
-            </a:r>
-            <a:endParaRPr lang="en-US" altLang="ja-JP" sz="2000">
-              <a:solidFill>
-                <a:srgbClr val="1F2937"/>
-              </a:solidFill>
-              <a:latin typeface="Noto Sans JP" pitchFamily="34" charset="0"/>
-              <a:ea typeface="Noto Sans JP" pitchFamily="34" charset="-122"/>
-              <a:cs typeface="Noto Sans JP" pitchFamily="34" charset="-120"/>
-            </a:endParaRPr>
-          </a:p>
-          <a:p>
-            <a:pPr marL="0" indent="0" algn="l">
-              <a:buNone/>
-            </a:pPr>
-            <a:r>
-              <a:t/>
-            </a:r>
-            <a:endParaRPr lang="ja-JP" altLang="en-US" sz="2000">
-              <a:solidFill>
-                <a:srgbClr val="1F2937"/>
-              </a:solidFill>
-              <a:latin typeface="Noto Sans JP" pitchFamily="34" charset="0"/>
-              <a:ea typeface="Noto Sans JP" pitchFamily="34" charset="-122"/>
-              <a:cs typeface="Noto Sans JP" pitchFamily="34" charset="-120"/>
-            </a:endParaRPr>
-          </a:p>
-          <a:p>
-            <a:pPr marL="0" indent="0" algn="l">
-              <a:buNone/>
-            </a:pPr>
-            <a:r>
-              <a:t/>
-            </a:r>
-            <a:endParaRPr lang="ja-JP" altLang="en-US" sz="2000">
-              <a:solidFill>
-                <a:srgbClr val="1F2937"/>
-              </a:solidFill>
-              <a:latin typeface="Noto Sans JP" pitchFamily="34" charset="0"/>
-              <a:ea typeface="Noto Sans JP" pitchFamily="34" charset="-122"/>
-              <a:cs typeface="Noto Sans JP" pitchFamily="34" charset="-120"/>
-            </a:endParaRPr>
-          </a:p>
-          <a:p>
-            <a:pPr marL="0" indent="0" algn="l">
-              <a:buNone/>
-            </a:pPr>
-            <a:endParaRPr lang="ja-JP" altLang="en-US" sz="2000" dirty="0">
-              <a:solidFill>
-                <a:srgbClr val="1F2937"/>
-              </a:solidFill>
-              <a:latin typeface="Noto Sans JP" pitchFamily="34" charset="0"/>
-              <a:ea typeface="Noto Sans JP" pitchFamily="34" charset="-122"/>
-              <a:cs typeface="Noto Sans JP" pitchFamily="34" charset="-120"/>
-            </a:endParaRPr>
-          </a:p>
-        </p:txBody>
-      </p:sp>
-      <p:pic>
-        <p:nvPicPr>
-          <p:cNvPr id="15" name="図 14" descr="The image shows a form with two proposals, a section for personal names, a field for monetary values, a section for purposes, and a field for additional details.&#10;&#10;AI 生成コンテンツは誤りを含む可能性があります。">
-            <a:extLst>
-              <a:ext uri="{FF2B5EF4-FFF2-40B4-BE49-F238E27FC236}">
-                <a16:creationId xmlns:a16="http://schemas.microsoft.com/office/drawing/2014/main" id="{689B1446-4E1D-9168-07ED-183171FE5DDA}"/>
-              </a:ext>
-            </a:extLst>
-          </p:cNvPr>
-          <p:cNvPicPr>
-            <a:picLocks noChangeAspect="1"/>
-          </p:cNvPicPr>
-          <p:nvPr/>
-        </p:nvPicPr>
-        <p:blipFill>
-          <a:blip r:embed="rId3"/>
-          <a:stretch>
-            <a:fillRect/>
-          </a:stretch>
-        </p:blipFill>
-        <p:spPr>
-          <a:xfrm>
-            <a:off x="7537497" y="644768"/>
-            <a:ext cx="3520006" cy="5457141"/>
-          </a:xfrm>
-          <a:prstGeom prst="rect">
-            <a:avLst/>
-          </a:prstGeom>
-          <a:ln>
-            <a:noFill/>
+                <a:latin typeface="Noto Sans JP"/>
+              </a:rPr>
+              <a:t>　間違った方へ進みます。出力を見ないと気づけません。</a:t>
+            </a:r>
+          </a:p>
+        </p:txBody>
+      </p:sp>
+      <p:sp>
+        <p:nvSpPr>
+          <p:cNvPr id="52" name="Rounded Rectangle 51"/>
+          <p:cNvSpPr/>
+          <p:nvPr/>
+        </p:nvSpPr>
+        <p:spPr>
+          <a:xfrm>
+            <a:off x="7040880" y="1737360"/>
+            <a:ext cx="4572000" cy="4114800"/>
+          </a:xfrm>
+          <a:prstGeom prst="roundRect">
+            <a:avLst/>
+          </a:prstGeom>
+          <a:solidFill>
+            <a:srgbClr val="F1F5FB"/>
+          </a:solidFill>
+          <a:ln w="19050">
+            <a:solidFill>
+              <a:srgbClr val="9CB8D8"/>
+            </a:solidFill>
           </a:ln>
-          <a:effectLst>
-            <a:outerShdw blurRad="190500" algn="tl" rotWithShape="0">
-              <a:srgbClr val="000000">
-                <a:alpha val="70000"/>
-              </a:srgbClr>
-            </a:outerShdw>
-          </a:effectLst>
-        </p:spPr>
-      </p:pic>
+          <a:effectLst/>
+        </p:spPr>
+        <p:style>
+          <a:lnRef idx="1">
+            <a:schemeClr val="accent1"/>
+          </a:lnRef>
+          <a:fillRef idx="3">
+            <a:schemeClr val="accent1"/>
+          </a:fillRef>
+          <a:effectRef idx="2">
+            <a:schemeClr val="accent1"/>
+          </a:effectRef>
+          <a:fontRef idx="minor">
+            <a:schemeClr val="lt1"/>
+          </a:fontRef>
+        </p:style>
+        <p:txBody>
+          <a:bodyPr rtlCol="0" anchor="ctr" wrap="square"/>
+          <a:lstStyle/>
+          <a:p>
+            <a:pPr algn="ctr"/>
+            <a:r>
+              <a:rPr sz="1800" b="1">
+                <a:solidFill>
+                  <a:srgbClr val="2A5E9E"/>
+                </a:solidFill>
+              </a:rPr>
+              <a:t>📷 ここにスクショを貼る</a:t>
+            </a:r>
+          </a:p>
+          <a:p>
+            <a:pPr algn="ctr"/>
+            <a:r>
+              <a:rPr sz="1400">
+                <a:solidFill>
+                  <a:srgbClr val="556677"/>
+                </a:solidFill>
+              </a:rPr>
+              <a:t>メールの重要度を「高」にしている画面
+または 条件アクションの設定画面</a:t>
+            </a:r>
+          </a:p>
+        </p:txBody>
+      </p:sp>
     </p:spTree>
   </p:cSld>
   <p:clrMapOvr>

--- a/assets/pa45/P011_PA45_RunHistory_20260521.pptx
+++ b/assets/pa45/P011_PA45_RunHistory_20260521.pptx
@@ -2510,7 +2510,8 @@
                 <a:solidFill>
                   <a:srgbClr val="FFFFFF"/>
                 </a:solidFill>
-                <a:latin typeface="Yu Gothic UI"/>
+                <a:latin typeface="游ゴシック Light"/>
+                <a:ea typeface="游ゴシック Light"/>
               </a:rPr>
               <a:t>PA45 — Power Automate 45</a:t>
             </a:r>
@@ -2548,7 +2549,8 @@
                 <a:solidFill>
                   <a:srgbClr val="C7D8FF"/>
                 </a:solidFill>
-                <a:latin typeface="Yu Gothic UI"/>
+                <a:latin typeface="游ゴシック Light"/>
+                <a:ea typeface="游ゴシック Light"/>
               </a:rPr>
               <a:t>第11回 / Vol.11</a:t>
             </a:r>
@@ -2586,7 +2588,8 @@
                 <a:solidFill>
                   <a:srgbClr val="475569"/>
                 </a:solidFill>
-                <a:latin typeface="Yu Gothic UI"/>
+                <a:latin typeface="游ゴシック Light"/>
+                <a:ea typeface="游ゴシック Light"/>
               </a:rPr>
               <a:t>まもなく開始します</a:t>
             </a:r>
@@ -2624,7 +2627,8 @@
                 <a:solidFill>
                   <a:srgbClr val="1E3A8A"/>
                 </a:solidFill>
-                <a:latin typeface="Yu Gothic UI"/>
+                <a:latin typeface="游ゴシック Light"/>
+                <a:ea typeface="游ゴシック Light"/>
               </a:rPr>
               <a:t>20:15 START</a:t>
             </a:r>
@@ -2662,7 +2666,8 @@
                 <a:solidFill>
                   <a:srgbClr val="0F172A"/>
                 </a:solidFill>
-                <a:latin typeface="Yu Gothic UI"/>
+                <a:latin typeface="游ゴシック Light"/>
+                <a:ea typeface="游ゴシック Light"/>
               </a:rPr>
               <a:t>第11回｜実行履歴を読めると自動化が楽しくなる</a:t>
             </a:r>
@@ -2700,7 +2705,8 @@
                 <a:solidFill>
                   <a:srgbClr val="475569"/>
                 </a:solidFill>
-                <a:latin typeface="Yu Gothic UI"/>
+                <a:latin typeface="游ゴシック Light"/>
+                <a:ea typeface="游ゴシック Light"/>
               </a:rPr>
               <a:t>失敗しないフロー設計｜メールの重要度で振り分け</a:t>
             </a:r>
@@ -2784,7 +2790,8 @@
                 <a:solidFill>
                   <a:srgbClr val="1E3A8A"/>
                 </a:solidFill>
-                <a:latin typeface="Yu Gothic UI"/>
+                <a:latin typeface="游ゴシック Light"/>
+                <a:ea typeface="游ゴシック Light"/>
               </a:rPr>
               <a:t>📥</a:t>
             </a:r>
@@ -2822,7 +2829,8 @@
                 <a:solidFill>
                   <a:srgbClr val="0F172A"/>
                 </a:solidFill>
-                <a:latin typeface="Yu Gothic UI"/>
+                <a:latin typeface="游ゴシック Light"/>
+                <a:ea typeface="游ゴシック Light"/>
               </a:rPr>
               <a:t>Power Automate と Outlook を</a:t>
             </a:r>
@@ -2833,7 +2841,8 @@
                 <a:solidFill>
                   <a:srgbClr val="0F172A"/>
                 </a:solidFill>
-                <a:latin typeface="Yu Gothic UI"/>
+                <a:latin typeface="游ゴシック Light"/>
+                <a:ea typeface="游ゴシック Light"/>
               </a:rPr>
               <a:t>事前に起動しておくとスムーズ</a:t>
             </a:r>
@@ -2917,7 +2926,8 @@
                 <a:solidFill>
                   <a:srgbClr val="1E3A8A"/>
                 </a:solidFill>
-                <a:latin typeface="Yu Gothic UI"/>
+                <a:latin typeface="游ゴシック Light"/>
+                <a:ea typeface="游ゴシック Light"/>
               </a:rPr>
               <a:t>🎥</a:t>
             </a:r>
@@ -2955,7 +2965,8 @@
                 <a:solidFill>
                   <a:srgbClr val="0F172A"/>
                 </a:solidFill>
-                <a:latin typeface="Yu Gothic UI"/>
+                <a:latin typeface="游ゴシック Light"/>
+                <a:ea typeface="游ゴシック Light"/>
               </a:rPr>
               <a:t>後日YouTubeで</a:t>
             </a:r>
@@ -2967,7 +2978,8 @@
                 <a:solidFill>
                   <a:srgbClr val="475569"/>
                 </a:solidFill>
-                <a:latin typeface="Yu Gothic UI"/>
+                <a:latin typeface="游ゴシック Light"/>
+                <a:ea typeface="游ゴシック Light"/>
               </a:rPr>
               <a:t>アーカイブ動画を公開予定</a:t>
             </a:r>
@@ -3051,7 +3063,8 @@
                 <a:solidFill>
                   <a:srgbClr val="1E3A8A"/>
                 </a:solidFill>
-                <a:latin typeface="Yu Gothic UI"/>
+                <a:latin typeface="游ゴシック Light"/>
+                <a:ea typeface="游ゴシック Light"/>
               </a:rPr>
               <a:t>🕵</a:t>
             </a:r>
@@ -3089,7 +3102,8 @@
                 <a:solidFill>
                   <a:srgbClr val="0F172A"/>
                 </a:solidFill>
-                <a:latin typeface="Yu Gothic UI"/>
+                <a:latin typeface="游ゴシック Light"/>
+                <a:ea typeface="游ゴシック Light"/>
               </a:rPr>
               <a:t>Teams表示名がNGの方は</a:t>
             </a:r>
@@ -3101,7 +3115,8 @@
                 <a:solidFill>
                   <a:srgbClr val="475569"/>
                 </a:solidFill>
-                <a:latin typeface="Yu Gothic UI"/>
+                <a:latin typeface="游ゴシック Light"/>
+                <a:ea typeface="游ゴシック Light"/>
               </a:rPr>
               <a:t>匿名参加でOKです</a:t>
             </a:r>
@@ -3139,7 +3154,8 @@
                 <a:solidFill>
                   <a:srgbClr val="94A3B8"/>
                 </a:solidFill>
-                <a:latin typeface="Yu Gothic UI"/>
+                <a:latin typeface="游ゴシック Light"/>
+                <a:ea typeface="游ゴシック Light"/>
               </a:rPr>
               <a:t>Power Automate 45  |  Copyright © PA45</a:t>
             </a:r>
@@ -3341,8 +3357,8 @@
                 <a:solidFill>
                   <a:srgbClr val="6B7280"/>
                 </a:solidFill>
-                <a:latin typeface="Noto Sans JP" pitchFamily="34" charset="0"/>
-                <a:ea typeface="Noto Sans JP" pitchFamily="34" charset="-122"/>
+                <a:latin typeface="游ゴシック Light" pitchFamily="34" charset="0"/>
+                <a:ea typeface="游ゴシック Light" pitchFamily="34" charset="-122"/>
                 <a:cs typeface="Noto Sans JP" pitchFamily="34" charset="-120"/>
               </a:rPr>
               <a:t>PA45｜第11回</a:t>
@@ -3380,8 +3396,8 @@
                 <a:solidFill>
                   <a:srgbClr val="1F2937"/>
                 </a:solidFill>
-                <a:latin typeface="Noto Sans JP" pitchFamily="34" charset="0"/>
-                <a:ea typeface="Noto Sans JP" pitchFamily="34" charset="-122"/>
+                <a:latin typeface="游ゴシック Light" pitchFamily="34" charset="0"/>
+                <a:ea typeface="游ゴシック Light" pitchFamily="34" charset="-122"/>
                 <a:cs typeface="Noto Sans JP" pitchFamily="34" charset="-120"/>
               </a:rPr>
               <a:t>入力と出力って何？</a:t>
@@ -3453,8 +3469,8 @@
                 <a:solidFill>
                   <a:srgbClr val="9CA3AF"/>
                 </a:solidFill>
-                <a:latin typeface="ui-monospace" pitchFamily="34" charset="0"/>
-                <a:ea typeface="ui-monospace" pitchFamily="34" charset="-122"/>
+                <a:latin typeface="游ゴシック Light" pitchFamily="34" charset="0"/>
+                <a:ea typeface="游ゴシック Light" pitchFamily="34" charset="-122"/>
                 <a:cs typeface="ui-monospace" pitchFamily="34" charset="-120"/>
               </a:rPr>
               <a:t>Concept</a:t>
@@ -3610,8 +3626,8 @@
                 <a:solidFill>
                   <a:srgbClr val="9CA3AF"/>
                 </a:solidFill>
-                <a:latin typeface="Noto Sans JP" pitchFamily="34" charset="0"/>
-                <a:ea typeface="Noto Sans JP" pitchFamily="34" charset="-122"/>
+                <a:latin typeface="游ゴシック Light" pitchFamily="34" charset="0"/>
+                <a:ea typeface="游ゴシック Light" pitchFamily="34" charset="-122"/>
                 <a:cs typeface="Noto Sans JP" pitchFamily="34" charset="-120"/>
               </a:rPr>
               <a:t>Power Automate for Beginners</a:t>
@@ -3649,8 +3665,8 @@
                 <a:solidFill>
                   <a:srgbClr val="9CA3AF"/>
                 </a:solidFill>
-                <a:latin typeface="Noto Sans JP" pitchFamily="34" charset="0"/>
-                <a:ea typeface="Noto Sans JP" pitchFamily="34" charset="-122"/>
+                <a:latin typeface="游ゴシック Light" pitchFamily="34" charset="0"/>
+                <a:ea typeface="游ゴシック Light" pitchFamily="34" charset="-122"/>
                 <a:cs typeface="Noto Sans JP" pitchFamily="34" charset="-120"/>
               </a:rPr>
               <a:t>Copyright © PA45</a:t>
@@ -3876,8 +3892,8 @@
         </p:nvSpPr>
         <p:spPr>
           <a:xfrm>
-            <a:off x="204620" y="1781251"/>
-            <a:ext cx="6544523" cy="3947047"/>
+            <a:off x="182880" y="1781251"/>
+            <a:ext cx="6583680" cy="3947047"/>
           </a:xfrm>
           <a:prstGeom prst="rect">
             <a:avLst/>
@@ -3890,16 +3906,18 @@
           <a:lstStyle/>
           <a:p>
             <a:pPr marL="0" indent="0" algn="l">
+              <a:spcBef>
+                <a:spcPts val="1000"/>
+              </a:spcBef>
               <a:buNone/>
             </a:pPr>
             <a:r>
-              <a:rPr lang="ja-JP" altLang="en-US" sz="2000">
+              <a:rPr sz="2000" b="0">
                 <a:solidFill>
                   <a:srgbClr val="1F2937"/>
                 </a:solidFill>
-                <a:latin typeface="Noto Sans JP" pitchFamily="34" charset="0"/>
-                <a:ea typeface="Noto Sans JP" pitchFamily="34" charset="-122"/>
-                <a:cs typeface="Noto Sans JP" pitchFamily="34" charset="-120"/>
+                <a:latin typeface="游ゴシック Light"/>
+                <a:ea typeface="游ゴシック Light"/>
               </a:rPr>
               <a:t>🎯 アクションには「入力」と「出力」があります</a:t>
             </a:r>
@@ -3914,68 +3932,38 @@
           </a:p>
           <a:p>
             <a:r>
-              <a:rPr sz="2000">
+              <a:rPr sz="2000" b="0">
                 <a:solidFill>
                   <a:srgbClr val="1F2937"/>
                 </a:solidFill>
-                <a:latin typeface="Noto Sans JP"/>
-              </a:rPr>
-              <a:t>・入力：そのアクションが受け取った値</a:t>
-            </a:r>
-          </a:p>
-          <a:p>
-            <a:r>
-              <a:rPr sz="2000">
+                <a:latin typeface="游ゴシック Light"/>
+                <a:ea typeface="游ゴシック Light"/>
+              </a:rPr>
+              <a:t>・入力：そのアクションが受け取った値（例：条件の入力 ＝「重要度」と「高」）</a:t>
+            </a:r>
+          </a:p>
+          <a:p>
+            <a:r>
+              <a:rPr sz="2000" b="0">
                 <a:solidFill>
                   <a:srgbClr val="1F2937"/>
                 </a:solidFill>
-                <a:latin typeface="Noto Sans JP"/>
-              </a:rPr>
-              <a:t>　例）条件アクションの入力 ＝「重要度」と「高」</a:t>
-            </a:r>
-          </a:p>
-          <a:p>
-            <a:r>
-              <a:rPr sz="2000">
+                <a:latin typeface="游ゴシック Light"/>
+                <a:ea typeface="游ゴシック Light"/>
+              </a:rPr>
+              <a:t>・出力：そのアクションが次に渡す値（例：トリガーの出力 ＝ 件名・差出人・重要度 など）</a:t>
+            </a:r>
+          </a:p>
+          <a:p>
+            <a:r>
+              <a:rPr sz="2000" b="0">
                 <a:solidFill>
                   <a:srgbClr val="1F2937"/>
                 </a:solidFill>
-                <a:latin typeface="Noto Sans JP"/>
-              </a:rPr>
-              <a:t>・出力：そのアクションが次に渡す値</a:t>
-            </a:r>
-          </a:p>
-          <a:p>
-            <a:r>
-              <a:rPr sz="2000">
-                <a:solidFill>
-                  <a:srgbClr val="1F2937"/>
-                </a:solidFill>
-                <a:latin typeface="Noto Sans JP"/>
-              </a:rPr>
-              <a:t>　例）トリガーの出力 ＝ 届いたメールの件名・差出人・重要度 など</a:t>
-            </a:r>
-          </a:p>
-          <a:p>
-            <a:r>
-              <a:rPr sz="2000">
-                <a:solidFill>
-                  <a:srgbClr val="1F2937"/>
-                </a:solidFill>
-                <a:latin typeface="Noto Sans JP"/>
-              </a:rPr>
-              <a:t>・前のアクションの「出力」が、次のアクションの「入力」に</a:t>
-            </a:r>
-          </a:p>
-          <a:p>
-            <a:r>
-              <a:rPr sz="2000">
-                <a:solidFill>
-                  <a:srgbClr val="1F2937"/>
-                </a:solidFill>
-                <a:latin typeface="Noto Sans JP"/>
-              </a:rPr>
-              <a:t>　なります。この受け渡しでフローは動いています。</a:t>
+                <a:latin typeface="游ゴシック Light"/>
+                <a:ea typeface="游ゴシック Light"/>
+              </a:rPr>
+              <a:t>・前のアクションの「出力」が、次のアクションの「入力」になる。この受け渡しでフローは動きます。</a:t>
             </a:r>
           </a:p>
         </p:txBody>
@@ -4028,6 +4016,8 @@
                 <a:solidFill>
                   <a:srgbClr val="2A5E9E"/>
                 </a:solidFill>
+                <a:latin typeface="游ゴシック Light"/>
+                <a:ea typeface="游ゴシック Light"/>
               </a:rPr>
               <a:t>📷 ここにスクショを貼る</a:t>
             </a:r>
@@ -4039,6 +4029,8 @@
                 <a:solidFill>
                   <a:srgbClr val="556677"/>
                 </a:solidFill>
+                <a:latin typeface="游ゴシック Light"/>
+                <a:ea typeface="游ゴシック Light"/>
               </a:rPr>
               <a:t>アクションを開いて
 「入力」「出力」が見えている画面</a:t>
@@ -4236,8 +4228,8 @@
                 <a:solidFill>
                   <a:srgbClr val="6B7280"/>
                 </a:solidFill>
-                <a:latin typeface="Noto Sans JP" pitchFamily="34" charset="0"/>
-                <a:ea typeface="Noto Sans JP" pitchFamily="34" charset="-122"/>
+                <a:latin typeface="游ゴシック Light" pitchFamily="34" charset="0"/>
+                <a:ea typeface="游ゴシック Light" pitchFamily="34" charset="-122"/>
                 <a:cs typeface="Noto Sans JP" pitchFamily="34" charset="-120"/>
               </a:rPr>
               <a:t>PA45｜第11回</a:t>
@@ -4275,8 +4267,8 @@
                 <a:solidFill>
                   <a:srgbClr val="1F2937"/>
                 </a:solidFill>
-                <a:latin typeface="Noto Sans JP" pitchFamily="34" charset="0"/>
-                <a:ea typeface="Noto Sans JP" pitchFamily="34" charset="-122"/>
+                <a:latin typeface="游ゴシック Light" pitchFamily="34" charset="0"/>
+                <a:ea typeface="游ゴシック Light" pitchFamily="34" charset="-122"/>
                 <a:cs typeface="Noto Sans JP" pitchFamily="34" charset="-120"/>
               </a:rPr>
               <a:t>実行履歴で入力・出力を見る</a:t>
@@ -4348,8 +4340,8 @@
                 <a:solidFill>
                   <a:srgbClr val="9CA3AF"/>
                 </a:solidFill>
-                <a:latin typeface="ui-monospace" pitchFamily="34" charset="0"/>
-                <a:ea typeface="ui-monospace" pitchFamily="34" charset="-122"/>
+                <a:latin typeface="游ゴシック Light" pitchFamily="34" charset="0"/>
+                <a:ea typeface="游ゴシック Light" pitchFamily="34" charset="-122"/>
                 <a:cs typeface="ui-monospace" pitchFamily="34" charset="-120"/>
               </a:rPr>
               <a:t>Concept</a:t>
@@ -4505,8 +4497,8 @@
                 <a:solidFill>
                   <a:srgbClr val="9CA3AF"/>
                 </a:solidFill>
-                <a:latin typeface="Noto Sans JP" pitchFamily="34" charset="0"/>
-                <a:ea typeface="Noto Sans JP" pitchFamily="34" charset="-122"/>
+                <a:latin typeface="游ゴシック Light" pitchFamily="34" charset="0"/>
+                <a:ea typeface="游ゴシック Light" pitchFamily="34" charset="-122"/>
                 <a:cs typeface="Noto Sans JP" pitchFamily="34" charset="-120"/>
               </a:rPr>
               <a:t>Power Automate for Beginners</a:t>
@@ -4544,8 +4536,8 @@
                 <a:solidFill>
                   <a:srgbClr val="9CA3AF"/>
                 </a:solidFill>
-                <a:latin typeface="Noto Sans JP" pitchFamily="34" charset="0"/>
-                <a:ea typeface="Noto Sans JP" pitchFamily="34" charset="-122"/>
+                <a:latin typeface="游ゴシック Light" pitchFamily="34" charset="0"/>
+                <a:ea typeface="游ゴシック Light" pitchFamily="34" charset="-122"/>
                 <a:cs typeface="Noto Sans JP" pitchFamily="34" charset="-120"/>
               </a:rPr>
               <a:t>Copyright © PA45</a:t>
@@ -4771,8 +4763,8 @@
         </p:nvSpPr>
         <p:spPr>
           <a:xfrm>
-            <a:off x="371551" y="1664075"/>
-            <a:ext cx="6971243" cy="4428037"/>
+            <a:off x="182880" y="1664075"/>
+            <a:ext cx="6583680" cy="4428037"/>
           </a:xfrm>
           <a:prstGeom prst="rect">
             <a:avLst/>
@@ -4785,15 +4777,18 @@
           <a:lstStyle/>
           <a:p>
             <a:pPr marL="0" indent="0" algn="l">
+              <a:spcBef>
+                <a:spcPts val="1000"/>
+              </a:spcBef>
               <a:buNone/>
             </a:pPr>
             <a:r>
-              <a:rPr lang="ja-JP" altLang="en-US" sz="2000" b="1">
+              <a:rPr sz="2000" b="0">
                 <a:solidFill>
                   <a:srgbClr val="1F2937"/>
                 </a:solidFill>
-                <a:latin typeface="+mn-ea"/>
-                <a:cs typeface="Noto Sans JP" pitchFamily="34" charset="-120"/>
+                <a:latin typeface="游ゴシック Light"/>
+                <a:ea typeface="游ゴシック Light"/>
               </a:rPr>
               <a:t>🎯 実行履歴を開くと、入力・出力が全部見えます</a:t>
             </a:r>
@@ -4807,68 +4802,50 @@
           </a:p>
           <a:p>
             <a:r>
-              <a:rPr sz="2000" b="1">
+              <a:rPr sz="2000" b="0">
                 <a:solidFill>
                   <a:srgbClr val="1F2937"/>
                 </a:solidFill>
-                <a:latin typeface="+mn-ea"/>
-              </a:rPr>
-              <a:t>・フローを実行 →  左メニューの「実行履歴」を開く</a:t>
-            </a:r>
-          </a:p>
-          <a:p>
-            <a:r>
-              <a:rPr sz="2000" b="1">
+                <a:latin typeface="游ゴシック Light"/>
+                <a:ea typeface="游ゴシック Light"/>
+              </a:rPr>
+              <a:t>・フローを実行 → 左メニューの「実行履歴」を開く</a:t>
+            </a:r>
+          </a:p>
+          <a:p>
+            <a:r>
+              <a:rPr sz="2000" b="0">
                 <a:solidFill>
                   <a:srgbClr val="1F2937"/>
                 </a:solidFill>
-                <a:latin typeface="+mn-ea"/>
-              </a:rPr>
-              <a:t>・見たい実行をクリック →  各アクションをクリック</a:t>
-            </a:r>
-          </a:p>
-          <a:p>
-            <a:r>
-              <a:rPr sz="2000" b="1">
+                <a:latin typeface="游ゴシック Light"/>
+                <a:ea typeface="游ゴシック Light"/>
+              </a:rPr>
+              <a:t>・見たい実行をクリック → 各アクションをクリック</a:t>
+            </a:r>
+          </a:p>
+          <a:p>
+            <a:r>
+              <a:rPr sz="2000" b="0">
                 <a:solidFill>
                   <a:srgbClr val="1F2937"/>
                 </a:solidFill>
-                <a:latin typeface="+mn-ea"/>
-              </a:rPr>
-              <a:t>・そのアクションの「入力」と「出力」が表示される</a:t>
-            </a:r>
-          </a:p>
-          <a:p>
-            <a:r>
-              <a:rPr sz="2000" b="1">
+                <a:latin typeface="游ゴシック Light"/>
+                <a:ea typeface="游ゴシック Light"/>
+              </a:rPr>
+              <a:t>・そのアクションの「入力」と「出力」が表示されます（例：トリガーの出力に "High" が入っている）</a:t>
+            </a:r>
+          </a:p>
+          <a:p>
+            <a:r>
+              <a:rPr sz="2000" b="0">
                 <a:solidFill>
                   <a:srgbClr val="1F2937"/>
                 </a:solidFill>
-                <a:latin typeface="+mn-ea"/>
-              </a:rPr>
-              <a:t>　例）トリガーの出力に、重要度の値 "High" が入っている</a:t>
-            </a:r>
-          </a:p>
-          <a:p>
-            <a:r>
-              <a:rPr sz="2000" b="1">
-                <a:solidFill>
-                  <a:srgbClr val="1F2937"/>
-                </a:solidFill>
-                <a:latin typeface="+mn-ea"/>
-              </a:rPr>
-              <a:t>・思ったとおりに動かないときは、まずここを見る。</a:t>
-            </a:r>
-          </a:p>
-          <a:p>
-            <a:r>
-              <a:rPr sz="2000" b="1">
-                <a:solidFill>
-                  <a:srgbClr val="1F2937"/>
-                </a:solidFill>
-                <a:latin typeface="+mn-ea"/>
-              </a:rPr>
-              <a:t>　食い違っている値が、必ずここに写っています。</a:t>
+                <a:latin typeface="游ゴシック Light"/>
+                <a:ea typeface="游ゴシック Light"/>
+              </a:rPr>
+              <a:t>・思ったとおりに動かないときは、まずここを見る。食い違っている値が必ず写っています。</a:t>
             </a:r>
           </a:p>
         </p:txBody>
@@ -4921,6 +4898,8 @@
                 <a:solidFill>
                   <a:srgbClr val="2A5E9E"/>
                 </a:solidFill>
+                <a:latin typeface="游ゴシック Light"/>
+                <a:ea typeface="游ゴシック Light"/>
               </a:rPr>
               <a:t>📷 ここにスクショを貼る</a:t>
             </a:r>
@@ -4932,6 +4911,8 @@
                 <a:solidFill>
                   <a:srgbClr val="556677"/>
                 </a:solidFill>
+                <a:latin typeface="游ゴシック Light"/>
+                <a:ea typeface="游ゴシック Light"/>
               </a:rPr>
               <a:t>実行履歴で トリガーの出力
 が見えている画面</a:t>
@@ -5129,8 +5110,8 @@
                 <a:solidFill>
                   <a:srgbClr val="6B7280"/>
                 </a:solidFill>
-                <a:latin typeface="Noto Sans JP" pitchFamily="34" charset="0"/>
-                <a:ea typeface="Noto Sans JP" pitchFamily="34" charset="-122"/>
+                <a:latin typeface="游ゴシック Light" pitchFamily="34" charset="0"/>
+                <a:ea typeface="游ゴシック Light" pitchFamily="34" charset="-122"/>
                 <a:cs typeface="Noto Sans JP" pitchFamily="34" charset="-120"/>
               </a:rPr>
               <a:t>PA45｜第11回</a:t>
@@ -5168,8 +5149,8 @@
                 <a:solidFill>
                   <a:srgbClr val="1F2937"/>
                 </a:solidFill>
-                <a:latin typeface="Noto Sans JP" pitchFamily="34" charset="0"/>
-                <a:ea typeface="Noto Sans JP" pitchFamily="34" charset="-122"/>
+                <a:latin typeface="游ゴシック Light" pitchFamily="34" charset="0"/>
+                <a:ea typeface="游ゴシック Light" pitchFamily="34" charset="-122"/>
                 <a:cs typeface="Noto Sans JP" pitchFamily="34" charset="-120"/>
               </a:rPr>
               <a:t>フロー解説 ①  トリガーと条件を置く</a:t>
@@ -5241,8 +5222,8 @@
                 <a:solidFill>
                   <a:srgbClr val="9CA3AF"/>
                 </a:solidFill>
-                <a:latin typeface="ui-monospace" pitchFamily="34" charset="0"/>
-                <a:ea typeface="ui-monospace" pitchFamily="34" charset="-122"/>
+                <a:latin typeface="游ゴシック Light" pitchFamily="34" charset="0"/>
+                <a:ea typeface="游ゴシック Light" pitchFamily="34" charset="-122"/>
                 <a:cs typeface="ui-monospace" pitchFamily="34" charset="-120"/>
               </a:rPr>
               <a:t>Concept</a:t>
@@ -5398,8 +5379,8 @@
                 <a:solidFill>
                   <a:srgbClr val="9CA3AF"/>
                 </a:solidFill>
-                <a:latin typeface="Noto Sans JP" pitchFamily="34" charset="0"/>
-                <a:ea typeface="Noto Sans JP" pitchFamily="34" charset="-122"/>
+                <a:latin typeface="游ゴシック Light" pitchFamily="34" charset="0"/>
+                <a:ea typeface="游ゴシック Light" pitchFamily="34" charset="-122"/>
                 <a:cs typeface="Noto Sans JP" pitchFamily="34" charset="-120"/>
               </a:rPr>
               <a:t>Power Automate for Beginners</a:t>
@@ -5437,8 +5418,8 @@
                 <a:solidFill>
                   <a:srgbClr val="9CA3AF"/>
                 </a:solidFill>
-                <a:latin typeface="Noto Sans JP" pitchFamily="34" charset="0"/>
-                <a:ea typeface="Noto Sans JP" pitchFamily="34" charset="-122"/>
+                <a:latin typeface="游ゴシック Light" pitchFamily="34" charset="0"/>
+                <a:ea typeface="游ゴシック Light" pitchFamily="34" charset="-122"/>
                 <a:cs typeface="Noto Sans JP" pitchFamily="34" charset="-120"/>
               </a:rPr>
               <a:t>Copyright © PA45</a:t>
@@ -5664,8 +5645,8 @@
         </p:nvSpPr>
         <p:spPr>
           <a:xfrm>
-            <a:off x="126243" y="1705357"/>
-            <a:ext cx="7058328" cy="4260686"/>
+            <a:off x="182880" y="1705357"/>
+            <a:ext cx="6583680" cy="4260686"/>
           </a:xfrm>
           <a:prstGeom prst="rect">
             <a:avLst/>
@@ -5678,18 +5659,20 @@
           <a:lstStyle/>
           <a:p>
             <a:pPr marL="0" indent="0" algn="l">
+              <a:spcBef>
+                <a:spcPts val="1000"/>
+              </a:spcBef>
               <a:buNone/>
             </a:pPr>
             <a:r>
-              <a:rPr lang="ja-JP" altLang="en-US">
+              <a:rPr b="0">
                 <a:solidFill>
                   <a:srgbClr val="1F2937"/>
                 </a:solidFill>
-                <a:latin typeface="Noto Sans JP" pitchFamily="34" charset="0"/>
-                <a:ea typeface="Noto Sans JP" pitchFamily="34" charset="-122"/>
-                <a:cs typeface="Noto Sans JP" pitchFamily="34" charset="-120"/>
-              </a:rPr>
-              <a:t>🎯 目的：メールが届いたら重要度で</a:t>
+                <a:latin typeface="游ゴシック Light"/>
+                <a:ea typeface="游ゴシック Light"/>
+              </a:rPr>
+              <a:t>🎯 目的：メールが届いたら重要度で仕分けるフローの形を作る</a:t>
             </a:r>
             <a:endParaRPr lang="en-US" altLang="ja-JP">
               <a:solidFill>
@@ -5702,66 +5685,48 @@
           </a:p>
           <a:p>
             <a:r>
-              <a:rPr>
+              <a:rPr b="0">
                 <a:solidFill>
                   <a:srgbClr val="1F2937"/>
                 </a:solidFill>
-                <a:latin typeface="Noto Sans JP"/>
-              </a:rPr>
-              <a:t>　仕分けるフローの形を作る</a:t>
-            </a:r>
-          </a:p>
-          <a:p>
-            <a:r>
-              <a:rPr>
+                <a:latin typeface="游ゴシック Light"/>
+                <a:ea typeface="游ゴシック Light"/>
+              </a:rPr>
+              <a:t>・トリガー「新しいメールが届いたとき」を置く</a:t>
+            </a:r>
+          </a:p>
+          <a:p>
+            <a:r>
+              <a:rPr b="0">
                 <a:solidFill>
                   <a:srgbClr val="1F2937"/>
                 </a:solidFill>
-                <a:latin typeface="Noto Sans JP"/>
-              </a:rPr>
-              <a:t>・トリガー「新しいメールが届いたとき」を置く</a:t>
-            </a:r>
-          </a:p>
-          <a:p>
-            <a:r>
-              <a:rPr>
+                <a:latin typeface="游ゴシック Light"/>
+                <a:ea typeface="游ゴシック Light"/>
+              </a:rPr>
+              <a:t>・「条件」アクションを追加する</a:t>
+            </a:r>
+          </a:p>
+          <a:p>
+            <a:r>
+              <a:rPr b="0">
                 <a:solidFill>
                   <a:srgbClr val="1F2937"/>
                 </a:solidFill>
-                <a:latin typeface="Noto Sans JP"/>
-              </a:rPr>
-              <a:t>・「条件」アクションを追加する</a:t>
-            </a:r>
-          </a:p>
-          <a:p>
-            <a:r>
-              <a:rPr>
+                <a:latin typeface="游ゴシック Light"/>
+                <a:ea typeface="游ゴシック Light"/>
+              </a:rPr>
+              <a:t>・条件：メールの重要度 が次の値に等しい「高」（まずは、わざと日本語の「高」と書きます）</a:t>
+            </a:r>
+          </a:p>
+          <a:p>
+            <a:r>
+              <a:rPr b="0">
                 <a:solidFill>
                   <a:srgbClr val="1F2937"/>
                 </a:solidFill>
-                <a:latin typeface="Noto Sans JP"/>
-              </a:rPr>
-              <a:t>・条件：メールの重要度 が次の値に等しい「高」</a:t>
-            </a:r>
-          </a:p>
-          <a:p>
-            <a:r>
-              <a:rPr>
-                <a:solidFill>
-                  <a:srgbClr val="1F2937"/>
-                </a:solidFill>
-                <a:latin typeface="Noto Sans JP"/>
-              </a:rPr>
-              <a:t>　（まずは、わざと日本語の「高」と書きます）</a:t>
-            </a:r>
-          </a:p>
-          <a:p>
-            <a:r>
-              <a:rPr>
-                <a:solidFill>
-                  <a:srgbClr val="1F2937"/>
-                </a:solidFill>
-                <a:latin typeface="Noto Sans JP"/>
+                <a:latin typeface="游ゴシック Light"/>
+                <a:ea typeface="游ゴシック Light"/>
               </a:rPr>
               <a:t>・はい／いいえ それぞれに「作成」でメッセージを置く</a:t>
             </a:r>
@@ -5816,6 +5781,8 @@
                 <a:solidFill>
                   <a:srgbClr val="2A5E9E"/>
                 </a:solidFill>
+                <a:latin typeface="游ゴシック Light"/>
+                <a:ea typeface="游ゴシック Light"/>
               </a:rPr>
               <a:t>📷 ここにスクショを貼る</a:t>
             </a:r>
@@ -5827,6 +5794,8 @@
                 <a:solidFill>
                   <a:srgbClr val="556677"/>
                 </a:solidFill>
+                <a:latin typeface="游ゴシック Light"/>
+                <a:ea typeface="游ゴシック Light"/>
               </a:rPr>
               <a:t>完成したフロー全体
 （トリガー＋条件＋作成）</a:t>
@@ -6024,8 +5993,8 @@
                 <a:solidFill>
                   <a:srgbClr val="6B7280"/>
                 </a:solidFill>
-                <a:latin typeface="Noto Sans JP" pitchFamily="34" charset="0"/>
-                <a:ea typeface="Noto Sans JP" pitchFamily="34" charset="-122"/>
+                <a:latin typeface="游ゴシック Light" pitchFamily="34" charset="0"/>
+                <a:ea typeface="游ゴシック Light" pitchFamily="34" charset="-122"/>
                 <a:cs typeface="Noto Sans JP" pitchFamily="34" charset="-120"/>
               </a:rPr>
               <a:t>PA45｜第11回</a:t>
@@ -6063,8 +6032,8 @@
                 <a:solidFill>
                   <a:srgbClr val="1F2937"/>
                 </a:solidFill>
-                <a:latin typeface="Noto Sans JP" pitchFamily="34" charset="0"/>
-                <a:ea typeface="Noto Sans JP" pitchFamily="34" charset="-122"/>
+                <a:latin typeface="游ゴシック Light" pitchFamily="34" charset="0"/>
+                <a:ea typeface="游ゴシック Light" pitchFamily="34" charset="-122"/>
                 <a:cs typeface="Noto Sans JP" pitchFamily="34" charset="-120"/>
               </a:rPr>
               <a:t>フロー解説 ②  わざと失敗させてみる</a:t>
@@ -6136,8 +6105,8 @@
                 <a:solidFill>
                   <a:srgbClr val="9CA3AF"/>
                 </a:solidFill>
-                <a:latin typeface="ui-monospace" pitchFamily="34" charset="0"/>
-                <a:ea typeface="ui-monospace" pitchFamily="34" charset="-122"/>
+                <a:latin typeface="游ゴシック Light" pitchFamily="34" charset="0"/>
+                <a:ea typeface="游ゴシック Light" pitchFamily="34" charset="-122"/>
                 <a:cs typeface="ui-monospace" pitchFamily="34" charset="-120"/>
               </a:rPr>
               <a:t>Concept</a:t>
@@ -6293,8 +6262,8 @@
                 <a:solidFill>
                   <a:srgbClr val="9CA3AF"/>
                 </a:solidFill>
-                <a:latin typeface="Noto Sans JP" pitchFamily="34" charset="0"/>
-                <a:ea typeface="Noto Sans JP" pitchFamily="34" charset="-122"/>
+                <a:latin typeface="游ゴシック Light" pitchFamily="34" charset="0"/>
+                <a:ea typeface="游ゴシック Light" pitchFamily="34" charset="-122"/>
                 <a:cs typeface="Noto Sans JP" pitchFamily="34" charset="-120"/>
               </a:rPr>
               <a:t>Power Automate for Beginners</a:t>
@@ -6332,8 +6301,8 @@
                 <a:solidFill>
                   <a:srgbClr val="9CA3AF"/>
                 </a:solidFill>
-                <a:latin typeface="Noto Sans JP" pitchFamily="34" charset="0"/>
-                <a:ea typeface="Noto Sans JP" pitchFamily="34" charset="-122"/>
+                <a:latin typeface="游ゴシック Light" pitchFamily="34" charset="0"/>
+                <a:ea typeface="游ゴシック Light" pitchFamily="34" charset="-122"/>
                 <a:cs typeface="Noto Sans JP" pitchFamily="34" charset="-120"/>
               </a:rPr>
               <a:t>Copyright © PA45</a:t>
@@ -6559,8 +6528,8 @@
         </p:nvSpPr>
         <p:spPr>
           <a:xfrm>
-            <a:off x="207159" y="1948175"/>
-            <a:ext cx="7380546" cy="3947047"/>
+            <a:off x="182880" y="1948175"/>
+            <a:ext cx="6583680" cy="3947047"/>
           </a:xfrm>
           <a:prstGeom prst="rect">
             <a:avLst/>
@@ -6573,16 +6542,18 @@
           <a:lstStyle/>
           <a:p>
             <a:pPr marL="0" indent="0" algn="l">
+              <a:spcBef>
+                <a:spcPts val="1000"/>
+              </a:spcBef>
               <a:buNone/>
             </a:pPr>
             <a:r>
-              <a:rPr lang="ja-JP" altLang="en-US" sz="2000">
+              <a:rPr sz="2000" b="0">
                 <a:solidFill>
                   <a:srgbClr val="1F2937"/>
                 </a:solidFill>
-                <a:latin typeface="Noto Sans JP" pitchFamily="34" charset="0"/>
-                <a:ea typeface="Noto Sans JP" pitchFamily="34" charset="-122"/>
-                <a:cs typeface="Noto Sans JP" pitchFamily="34" charset="-120"/>
+                <a:latin typeface="游ゴシック Light"/>
+                <a:ea typeface="游ゴシック Light"/>
               </a:rPr>
               <a:t>🎯 目的：思いどおりに動かない場面を体験する</a:t>
             </a:r>
@@ -6597,57 +6568,38 @@
           </a:p>
           <a:p>
             <a:r>
-              <a:rPr sz="2000">
+              <a:rPr sz="2000" b="0">
                 <a:solidFill>
                   <a:srgbClr val="1F2937"/>
                 </a:solidFill>
-                <a:latin typeface="Noto Sans JP"/>
-              </a:rPr>
-              <a:t>・フローを保存して、自分宛に「重要度＝高」の</a:t>
-            </a:r>
-          </a:p>
-          <a:p>
-            <a:r>
-              <a:rPr sz="2000">
+                <a:latin typeface="游ゴシック Light"/>
+                <a:ea typeface="游ゴシック Light"/>
+              </a:rPr>
+              <a:t>・フローを保存して、自分宛に「重要度＝高」のメールを1通送る</a:t>
+            </a:r>
+          </a:p>
+          <a:p>
+            <a:r>
+              <a:rPr sz="2000" b="0">
                 <a:solidFill>
                   <a:srgbClr val="1F2937"/>
                 </a:solidFill>
-                <a:latin typeface="Noto Sans JP"/>
-              </a:rPr>
-              <a:t>　メールを1通送ります</a:t>
-            </a:r>
-          </a:p>
-          <a:p>
-            <a:r>
-              <a:rPr sz="2000">
+                <a:latin typeface="游ゴシック Light"/>
+                <a:ea typeface="游ゴシック Light"/>
+              </a:rPr>
+              <a:t>・フローは成功（緑）します。でも結果は「通常メール」！</a:t>
+            </a:r>
+          </a:p>
+          <a:p>
+            <a:r>
+              <a:rPr sz="2000" b="0">
                 <a:solidFill>
                   <a:srgbClr val="1F2937"/>
                 </a:solidFill>
-                <a:latin typeface="Noto Sans JP"/>
-              </a:rPr>
-              <a:t>・フローは成功（緑）します。でも結果は「通常メール」！</a:t>
-            </a:r>
-          </a:p>
-          <a:p>
-            <a:r>
-              <a:rPr sz="2000">
-                <a:solidFill>
-                  <a:srgbClr val="1F2937"/>
-                </a:solidFill>
-                <a:latin typeface="Noto Sans JP"/>
-              </a:rPr>
-              <a:t>・「重要にして送ったのに、なぜ？」</a:t>
-            </a:r>
-          </a:p>
-          <a:p>
-            <a:r>
-              <a:rPr sz="2000">
-                <a:solidFill>
-                  <a:srgbClr val="1F2937"/>
-                </a:solidFill>
-                <a:latin typeface="Noto Sans JP"/>
-              </a:rPr>
-              <a:t>　→ ここで実行履歴の出番です</a:t>
+                <a:latin typeface="游ゴシック Light"/>
+                <a:ea typeface="游ゴシック Light"/>
+              </a:rPr>
+              <a:t>・「重要にして送ったのに、なぜ？」 → ここで実行履歴の出番です</a:t>
             </a:r>
           </a:p>
         </p:txBody>
@@ -6700,6 +6652,8 @@
                 <a:solidFill>
                   <a:srgbClr val="2A5E9E"/>
                 </a:solidFill>
+                <a:latin typeface="游ゴシック Light"/>
+                <a:ea typeface="游ゴシック Light"/>
               </a:rPr>
               <a:t>📷 ここにスクショを貼る</a:t>
             </a:r>
@@ -6711,6 +6665,8 @@
                 <a:solidFill>
                   <a:srgbClr val="556677"/>
                 </a:solidFill>
+                <a:latin typeface="游ゴシック Light"/>
+                <a:ea typeface="游ゴシック Light"/>
               </a:rPr>
               <a:t>実行結果：成功（緑）なのに
 「通常メール」になっている画面</a:t>
@@ -6908,8 +6864,8 @@
                 <a:solidFill>
                   <a:srgbClr val="6B7280"/>
                 </a:solidFill>
-                <a:latin typeface="Noto Sans JP" pitchFamily="34" charset="0"/>
-                <a:ea typeface="Noto Sans JP" pitchFamily="34" charset="-122"/>
+                <a:latin typeface="游ゴシック Light" pitchFamily="34" charset="0"/>
+                <a:ea typeface="游ゴシック Light" pitchFamily="34" charset="-122"/>
                 <a:cs typeface="Noto Sans JP" pitchFamily="34" charset="-120"/>
               </a:rPr>
               <a:t>PA45｜第11回</a:t>
@@ -6947,8 +6903,8 @@
                 <a:solidFill>
                   <a:srgbClr val="1F2937"/>
                 </a:solidFill>
-                <a:latin typeface="Noto Sans JP" pitchFamily="34" charset="0"/>
-                <a:ea typeface="Noto Sans JP" pitchFamily="34" charset="-122"/>
+                <a:latin typeface="游ゴシック Light" pitchFamily="34" charset="0"/>
+                <a:ea typeface="游ゴシック Light" pitchFamily="34" charset="-122"/>
                 <a:cs typeface="Noto Sans JP" pitchFamily="34" charset="-120"/>
               </a:rPr>
               <a:t>フロー解説 ③  出力で原因を見つけて直す</a:t>
@@ -7020,8 +6976,8 @@
                 <a:solidFill>
                   <a:srgbClr val="9CA3AF"/>
                 </a:solidFill>
-                <a:latin typeface="ui-monospace" pitchFamily="34" charset="0"/>
-                <a:ea typeface="ui-monospace" pitchFamily="34" charset="-122"/>
+                <a:latin typeface="游ゴシック Light" pitchFamily="34" charset="0"/>
+                <a:ea typeface="游ゴシック Light" pitchFamily="34" charset="-122"/>
                 <a:cs typeface="ui-monospace" pitchFamily="34" charset="-120"/>
               </a:rPr>
               <a:t>Concept</a:t>
@@ -7177,8 +7133,8 @@
                 <a:solidFill>
                   <a:srgbClr val="9CA3AF"/>
                 </a:solidFill>
-                <a:latin typeface="Noto Sans JP" pitchFamily="34" charset="0"/>
-                <a:ea typeface="Noto Sans JP" pitchFamily="34" charset="-122"/>
+                <a:latin typeface="游ゴシック Light" pitchFamily="34" charset="0"/>
+                <a:ea typeface="游ゴシック Light" pitchFamily="34" charset="-122"/>
                 <a:cs typeface="Noto Sans JP" pitchFamily="34" charset="-120"/>
               </a:rPr>
               <a:t>Power Automate for Beginners</a:t>
@@ -7216,8 +7172,8 @@
                 <a:solidFill>
                   <a:srgbClr val="9CA3AF"/>
                 </a:solidFill>
-                <a:latin typeface="Noto Sans JP" pitchFamily="34" charset="0"/>
-                <a:ea typeface="Noto Sans JP" pitchFamily="34" charset="-122"/>
+                <a:latin typeface="游ゴシック Light" pitchFamily="34" charset="0"/>
+                <a:ea typeface="游ゴシック Light" pitchFamily="34" charset="-122"/>
                 <a:cs typeface="Noto Sans JP" pitchFamily="34" charset="-120"/>
               </a:rPr>
               <a:t>Copyright © PA45</a:t>
@@ -7443,8 +7399,8 @@
         </p:nvSpPr>
         <p:spPr>
           <a:xfrm>
-            <a:off x="94417" y="2164046"/>
-            <a:ext cx="6915983" cy="3947047"/>
+            <a:off x="182880" y="2164046"/>
+            <a:ext cx="6583680" cy="3947047"/>
           </a:xfrm>
           <a:prstGeom prst="rect">
             <a:avLst/>
@@ -7457,16 +7413,18 @@
           <a:lstStyle/>
           <a:p>
             <a:pPr marL="0" indent="0" algn="l">
+              <a:spcBef>
+                <a:spcPts val="1000"/>
+              </a:spcBef>
               <a:buNone/>
             </a:pPr>
             <a:r>
-              <a:rPr lang="ja-JP" altLang="en-US">
+              <a:rPr b="0">
                 <a:solidFill>
                   <a:srgbClr val="1F2937"/>
                 </a:solidFill>
-                <a:latin typeface="Noto Sans JP" pitchFamily="34" charset="0"/>
-                <a:ea typeface="Noto Sans JP" pitchFamily="34" charset="-122"/>
-                <a:cs typeface="Noto Sans JP" pitchFamily="34" charset="-120"/>
+                <a:latin typeface="游ゴシック Light"/>
+                <a:ea typeface="游ゴシック Light"/>
               </a:rPr>
               <a:t>🎯 目的：実行履歴の出力から原因を突き止める</a:t>
             </a:r>
@@ -7481,57 +7439,50 @@
           </a:p>
           <a:p>
             <a:r>
-              <a:rPr>
+              <a:rPr b="0">
                 <a:solidFill>
                   <a:srgbClr val="1F2937"/>
                 </a:solidFill>
-                <a:latin typeface="Noto Sans JP"/>
+                <a:latin typeface="游ゴシック Light"/>
+                <a:ea typeface="游ゴシック Light"/>
               </a:rPr>
               <a:t>・実行履歴を開き、トリガーの「出力」を見る</a:t>
             </a:r>
           </a:p>
           <a:p>
             <a:r>
-              <a:rPr>
+              <a:rPr b="0">
                 <a:solidFill>
                   <a:srgbClr val="1F2937"/>
                 </a:solidFill>
-                <a:latin typeface="Noto Sans JP"/>
+                <a:latin typeface="游ゴシック Light"/>
+                <a:ea typeface="游ゴシック Light"/>
               </a:rPr>
               <a:t>・重要度（Importance）の値が "High"（英語）だと分かる</a:t>
             </a:r>
           </a:p>
           <a:p>
             <a:r>
-              <a:rPr>
+              <a:rPr b="0">
                 <a:solidFill>
                   <a:srgbClr val="1F2937"/>
                 </a:solidFill>
-                <a:latin typeface="Noto Sans JP"/>
+                <a:latin typeface="游ゴシック Light"/>
+                <a:ea typeface="游ゴシック Light"/>
               </a:rPr>
               <a:t>・条件の「高」を "High" に直す</a:t>
             </a:r>
           </a:p>
           <a:p>
             <a:r>
-              <a:rPr>
+              <a:rPr b="0">
                 <a:solidFill>
                   <a:srgbClr val="1F2937"/>
                 </a:solidFill>
-                <a:latin typeface="Noto Sans JP"/>
-              </a:rPr>
-              <a:t>・もう一度、重要度＝高のメールを送る</a:t>
-            </a:r>
-          </a:p>
-          <a:p>
-            <a:r>
-              <a:rPr>
-                <a:solidFill>
-                  <a:srgbClr val="1F2937"/>
-                </a:solidFill>
-                <a:latin typeface="Noto Sans JP"/>
-              </a:rPr>
-              <a:t>　→ 今度こそ「⚠️ 重要メールです」に進む。直った！</a:t>
+                <a:latin typeface="游ゴシック Light"/>
+                <a:ea typeface="游ゴシック Light"/>
+              </a:rPr>
+              <a:t>・もう一度、重要度＝高のメールを送る → 今度こそ「⚠️ 重要メールです」に進みます。直った！</a:t>
             </a:r>
           </a:p>
         </p:txBody>
@@ -7584,6 +7535,8 @@
                 <a:solidFill>
                   <a:srgbClr val="2A5E9E"/>
                 </a:solidFill>
+                <a:latin typeface="游ゴシック Light"/>
+                <a:ea typeface="游ゴシック Light"/>
               </a:rPr>
               <a:t>📷 ここにスクショを貼る</a:t>
             </a:r>
@@ -7595,6 +7548,8 @@
                 <a:solidFill>
                   <a:srgbClr val="556677"/>
                 </a:solidFill>
+                <a:latin typeface="游ゴシック Light"/>
+                <a:ea typeface="游ゴシック Light"/>
               </a:rPr>
               <a:t>トリガーの出力で 重要度が
 "High" になっている箇所</a:t>
@@ -7792,8 +7747,8 @@
                 <a:solidFill>
                   <a:srgbClr val="6B7280"/>
                 </a:solidFill>
-                <a:latin typeface="Noto Sans JP" pitchFamily="34" charset="0"/>
-                <a:ea typeface="Noto Sans JP" pitchFamily="34" charset="-122"/>
+                <a:latin typeface="游ゴシック Light" pitchFamily="34" charset="0"/>
+                <a:ea typeface="游ゴシック Light" pitchFamily="34" charset="-122"/>
                 <a:cs typeface="Noto Sans JP" pitchFamily="34" charset="-120"/>
               </a:rPr>
               <a:t>PA45｜第11回</a:t>
@@ -7865,8 +7820,8 @@
                 <a:solidFill>
                   <a:srgbClr val="9CA3AF"/>
                 </a:solidFill>
-                <a:latin typeface="ui-monospace" pitchFamily="34" charset="0"/>
-                <a:ea typeface="ui-monospace" pitchFamily="34" charset="-122"/>
+                <a:latin typeface="游ゴシック Light" pitchFamily="34" charset="0"/>
+                <a:ea typeface="游ゴシック Light" pitchFamily="34" charset="-122"/>
                 <a:cs typeface="ui-monospace" pitchFamily="34" charset="-120"/>
               </a:rPr>
               <a:t>Concept</a:t>
@@ -8022,8 +7977,8 @@
                 <a:solidFill>
                   <a:srgbClr val="9CA3AF"/>
                 </a:solidFill>
-                <a:latin typeface="Noto Sans JP" pitchFamily="34" charset="0"/>
-                <a:ea typeface="Noto Sans JP" pitchFamily="34" charset="-122"/>
+                <a:latin typeface="游ゴシック Light" pitchFamily="34" charset="0"/>
+                <a:ea typeface="游ゴシック Light" pitchFamily="34" charset="-122"/>
                 <a:cs typeface="Noto Sans JP" pitchFamily="34" charset="-120"/>
               </a:rPr>
               <a:t>Power Automate for Beginners</a:t>
@@ -8061,8 +8016,8 @@
                 <a:solidFill>
                   <a:srgbClr val="9CA3AF"/>
                 </a:solidFill>
-                <a:latin typeface="Noto Sans JP" pitchFamily="34" charset="0"/>
-                <a:ea typeface="Noto Sans JP" pitchFamily="34" charset="-122"/>
+                <a:latin typeface="游ゴシック Light" pitchFamily="34" charset="0"/>
+                <a:ea typeface="游ゴシック Light" pitchFamily="34" charset="-122"/>
                 <a:cs typeface="Noto Sans JP" pitchFamily="34" charset="-120"/>
               </a:rPr>
               <a:t>Copyright © PA45</a:t>
@@ -8280,8 +8235,8 @@
                 <a:solidFill>
                   <a:srgbClr val="6B7280"/>
                 </a:solidFill>
-                <a:latin typeface="Noto Sans JP" pitchFamily="34" charset="0"/>
-                <a:ea typeface="Noto Sans JP" pitchFamily="34" charset="-122"/>
+                <a:latin typeface="游ゴシック Light" pitchFamily="34" charset="0"/>
+                <a:ea typeface="游ゴシック Light" pitchFamily="34" charset="-122"/>
               </a:rPr>
               <a:t>ハンズオン行きましょう。</a:t>
             </a:r>
@@ -8647,8 +8602,8 @@
                 <a:solidFill>
                   <a:srgbClr val="FFFFFF"/>
                 </a:solidFill>
-                <a:latin typeface="Noto Sans JP" pitchFamily="34" charset="0"/>
-                <a:ea typeface="Noto Sans JP" pitchFamily="34" charset="-122"/>
+                <a:latin typeface="游ゴシック Light" pitchFamily="34" charset="0"/>
+                <a:ea typeface="游ゴシック Light" pitchFamily="34" charset="-122"/>
                 <a:cs typeface="Noto Sans JP" pitchFamily="34" charset="-120"/>
               </a:rPr>
               <a:t>Vol.11</a:t>
@@ -8686,8 +8641,8 @@
                 <a:solidFill>
                   <a:srgbClr val="1F2937"/>
                 </a:solidFill>
-                <a:latin typeface="Noto Sans JP" pitchFamily="34" charset="0"/>
-                <a:ea typeface="Noto Sans JP" pitchFamily="34" charset="-122"/>
+                <a:latin typeface="游ゴシック Light" pitchFamily="34" charset="0"/>
+                <a:ea typeface="游ゴシック Light" pitchFamily="34" charset="-122"/>
               </a:rPr>
               <a:t>今日のポイント　３つ</a:t>
             </a:r>
@@ -8747,8 +8702,8 @@
                 <a:solidFill>
                   <a:srgbClr val="1F2937"/>
                 </a:solidFill>
-                <a:latin typeface="Noto Sans JP" pitchFamily="34" charset="0"/>
-                <a:ea typeface="Noto Sans JP" pitchFamily="34" charset="-122"/>
+                <a:latin typeface="游ゴシック Light" pitchFamily="34" charset="0"/>
+                <a:ea typeface="游ゴシック Light" pitchFamily="34" charset="-122"/>
                 <a:cs typeface="Noto Sans JP" pitchFamily="34" charset="-120"/>
               </a:rPr>
               <a:t>① フローが成功（緑）でも、結果が正しいとは限らない</a:t>
@@ -8789,8 +8744,8 @@
                 <a:solidFill>
                   <a:srgbClr val="4B5563"/>
                 </a:solidFill>
-                <a:latin typeface="Noto Sans JP" pitchFamily="34" charset="0"/>
-                <a:ea typeface="Noto Sans JP" pitchFamily="34" charset="-122"/>
+                <a:latin typeface="游ゴシック Light" pitchFamily="34" charset="0"/>
+                <a:ea typeface="游ゴシック Light" pitchFamily="34" charset="-122"/>
                 <a:cs typeface="Noto Sans JP" pitchFamily="34" charset="-120"/>
               </a:rPr>
               <a:t>赤いエラーが出なくても、間違った方へ静かに進むことがあります。</a:t>
@@ -8803,7 +8758,8 @@
                 <a:solidFill>
                   <a:srgbClr val="4B5563"/>
                 </a:solidFill>
-                <a:latin typeface="Noto Sans JP"/>
+                <a:latin typeface="游ゴシック Light"/>
+                <a:ea typeface="游ゴシック Light"/>
               </a:rPr>
               <a:t>結果を信じる前に、実行履歴の出力で「本当に合っているか」を確かめましょう。</a:t>
             </a:r>
@@ -8862,8 +8818,8 @@
                 <a:solidFill>
                   <a:srgbClr val="1F2937"/>
                 </a:solidFill>
-                <a:latin typeface="Noto Sans JP" pitchFamily="34" charset="0"/>
-                <a:ea typeface="Noto Sans JP" pitchFamily="34" charset="-122"/>
+                <a:latin typeface="游ゴシック Light" pitchFamily="34" charset="0"/>
+                <a:ea typeface="游ゴシック Light" pitchFamily="34" charset="-122"/>
                 <a:cs typeface="Noto Sans JP" pitchFamily="34" charset="-120"/>
               </a:rPr>
               <a:t>② 後続に値を渡すアクションは、まず出力で「本当の値」を確認</a:t>
@@ -8904,8 +8860,8 @@
                 <a:solidFill>
                   <a:srgbClr val="4B5563"/>
                 </a:solidFill>
-                <a:latin typeface="Noto Sans JP" pitchFamily="34" charset="0"/>
-                <a:ea typeface="Noto Sans JP" pitchFamily="34" charset="-122"/>
+                <a:latin typeface="游ゴシック Light" pitchFamily="34" charset="0"/>
+                <a:ea typeface="游ゴシック Light" pitchFamily="34" charset="-122"/>
                 <a:cs typeface="Noto Sans JP" pitchFamily="34" charset="-120"/>
               </a:rPr>
               <a:t>条件に書く前に、実行履歴でそのアクションの出力を見る。</a:t>
@@ -8917,7 +8873,8 @@
                 <a:solidFill>
                   <a:srgbClr val="4B5563"/>
                 </a:solidFill>
-                <a:latin typeface="Noto Sans JP"/>
+                <a:latin typeface="游ゴシック Light"/>
+                <a:ea typeface="游ゴシック Light"/>
               </a:rPr>
               <a:t>「画面の表示」と「渡る値」は違うことがある、と知っておく。</a:t>
             </a:r>
@@ -8976,8 +8933,8 @@
                 <a:solidFill>
                   <a:srgbClr val="1F2937"/>
                 </a:solidFill>
-                <a:latin typeface="Noto Sans JP" pitchFamily="34" charset="0"/>
-                <a:ea typeface="Noto Sans JP" pitchFamily="34" charset="-122"/>
+                <a:latin typeface="游ゴシック Light" pitchFamily="34" charset="0"/>
+                <a:ea typeface="游ゴシック Light" pitchFamily="34" charset="-122"/>
                 <a:cs typeface="Noto Sans JP" pitchFamily="34" charset="-120"/>
               </a:rPr>
               <a:t>③ 表示と値は違う ── 同じ罠があちこちに</a:t>
@@ -9018,8 +8975,8 @@
                 <a:solidFill>
                   <a:srgbClr val="4B5563"/>
                 </a:solidFill>
-                <a:latin typeface="Noto Sans JP" pitchFamily="34" charset="0"/>
-                <a:ea typeface="Noto Sans JP" pitchFamily="34" charset="-122"/>
+                <a:latin typeface="游ゴシック Light" pitchFamily="34" charset="0"/>
+                <a:ea typeface="游ゴシック Light" pitchFamily="34" charset="-122"/>
                 <a:cs typeface="Noto Sans JP" pitchFamily="34" charset="-120"/>
               </a:rPr>
               <a:t>重要度＝High/Normal/Low、承認結果＝Approve/Reject、はい・いいえ列＝true/false。</a:t>
@@ -9032,7 +8989,8 @@
                 <a:solidFill>
                   <a:srgbClr val="4B5563"/>
                 </a:solidFill>
-                <a:latin typeface="Noto Sans JP"/>
+                <a:latin typeface="游ゴシック Light"/>
+                <a:ea typeface="游ゴシック Light"/>
               </a:rPr>
               <a:t>どれも英語や真偽値。出力を見れば「本当の値」が分かります。</a:t>
             </a:r>
@@ -9068,8 +9026,8 @@
                 <a:solidFill>
                   <a:srgbClr val="9CA3AF"/>
                 </a:solidFill>
-                <a:latin typeface="Noto Sans JP" pitchFamily="34" charset="0"/>
-                <a:ea typeface="Noto Sans JP" pitchFamily="34" charset="-122"/>
+                <a:latin typeface="游ゴシック Light" pitchFamily="34" charset="0"/>
+                <a:ea typeface="游ゴシック Light" pitchFamily="34" charset="-122"/>
                 <a:cs typeface="Noto Sans JP" pitchFamily="34" charset="-120"/>
               </a:rPr>
               <a:t>#PA45</a:t>
@@ -9387,8 +9345,8 @@
                 <a:solidFill>
                   <a:srgbClr val="6D28D9"/>
                 </a:solidFill>
-                <a:latin typeface="Noto Sans JP" pitchFamily="34" charset="0"/>
-                <a:ea typeface="Noto Sans JP" pitchFamily="34" charset="-122"/>
+                <a:latin typeface="游ゴシック Light" pitchFamily="34" charset="0"/>
+                <a:ea typeface="游ゴシック Light" pitchFamily="34" charset="-122"/>
                 <a:cs typeface="Noto Sans JP" pitchFamily="34" charset="-120"/>
               </a:rPr>
               <a:t>重要メール通知</a:t>
@@ -9426,8 +9384,8 @@
                 <a:solidFill>
                   <a:srgbClr val="1F2937"/>
                 </a:solidFill>
-                <a:latin typeface="Noto Sans JP" pitchFamily="34" charset="0"/>
-                <a:ea typeface="Noto Sans JP" pitchFamily="34" charset="-122"/>
+                <a:latin typeface="游ゴシック Light" pitchFamily="34" charset="0"/>
+                <a:ea typeface="游ゴシック Light" pitchFamily="34" charset="-122"/>
                 <a:cs typeface="Noto Sans JP" pitchFamily="34" charset="-120"/>
               </a:rPr>
               <a:t>重要度が高いメールを</a:t>
@@ -9439,6 +9397,8 @@
                 <a:solidFill>
                   <a:srgbClr val="1F2937"/>
                 </a:solidFill>
+                <a:latin typeface="游ゴシック Light"/>
+                <a:ea typeface="游ゴシック Light"/>
               </a:rPr>
               <a:t>Teams等へすぐ通知</a:t>
             </a:r>
@@ -9477,8 +9437,8 @@
                 <a:solidFill>
                   <a:srgbClr val="4B5563"/>
                 </a:solidFill>
-                <a:latin typeface="Noto Sans JP" pitchFamily="34" charset="0"/>
-                <a:ea typeface="Noto Sans JP" pitchFamily="34" charset="-122"/>
+                <a:latin typeface="游ゴシック Light" pitchFamily="34" charset="0"/>
+                <a:ea typeface="游ゴシック Light" pitchFamily="34" charset="-122"/>
                 <a:cs typeface="Noto Sans JP" pitchFamily="34" charset="-120"/>
               </a:rPr>
               <a:t>新しいメールが届いたとき</a:t>
@@ -9486,13 +9446,19 @@
           </a:p>
           <a:p>
             <a:r>
-              <a:rPr sz="1600" b="1"/>
+              <a:rPr sz="1600" b="1">
+                <a:latin typeface="游ゴシック Light"/>
+                <a:ea typeface="游ゴシック Light"/>
+              </a:rPr>
               <a:t>→ 条件（重要度）</a:t>
             </a:r>
           </a:p>
           <a:p>
             <a:r>
-              <a:rPr sz="1600" b="1"/>
+              <a:rPr sz="1600" b="1">
+                <a:latin typeface="游ゴシック Light"/>
+                <a:ea typeface="游ゴシック Light"/>
+              </a:rPr>
               <a:t>→ Teamsで通知</a:t>
             </a:r>
           </a:p>
@@ -9561,8 +9527,8 @@
                 <a:solidFill>
                   <a:srgbClr val="A78BFA"/>
                 </a:solidFill>
-                <a:latin typeface="Noto Sans JP" pitchFamily="34" charset="0"/>
-                <a:ea typeface="Noto Sans JP" pitchFamily="34" charset="-122"/>
+                <a:latin typeface="游ゴシック Light" pitchFamily="34" charset="0"/>
+                <a:ea typeface="游ゴシック Light" pitchFamily="34" charset="-122"/>
                 <a:cs typeface="Noto Sans JP" pitchFamily="34" charset="-120"/>
               </a:rPr>
               <a:t>メール → 条件 → 通知</a:t>
@@ -9745,8 +9711,8 @@
                 <a:solidFill>
                   <a:srgbClr val="047857"/>
                 </a:solidFill>
-                <a:latin typeface="Noto Sans JP" pitchFamily="34" charset="0"/>
-                <a:ea typeface="Noto Sans JP" pitchFamily="34" charset="-122"/>
+                <a:latin typeface="游ゴシック Light" pitchFamily="34" charset="0"/>
+                <a:ea typeface="游ゴシック Light" pitchFamily="34" charset="-122"/>
                 <a:cs typeface="Noto Sans JP" pitchFamily="34" charset="-120"/>
               </a:rPr>
               <a:t>差出人で振分け</a:t>
@@ -9783,8 +9749,8 @@
                 <a:solidFill>
                   <a:srgbClr val="1F2937"/>
                 </a:solidFill>
-                <a:latin typeface="Noto Sans JP" pitchFamily="34" charset="0"/>
-                <a:ea typeface="Noto Sans JP" pitchFamily="34" charset="-122"/>
+                <a:latin typeface="游ゴシック Light" pitchFamily="34" charset="0"/>
+                <a:ea typeface="游ゴシック Light" pitchFamily="34" charset="-122"/>
                 <a:cs typeface="Noto Sans JP" pitchFamily="34" charset="-120"/>
               </a:rPr>
               <a:t>上司・取引先のメールを</a:t>
@@ -9797,6 +9763,8 @@
                 <a:solidFill>
                   <a:srgbClr val="1F2937"/>
                 </a:solidFill>
+                <a:latin typeface="游ゴシック Light"/>
+                <a:ea typeface="游ゴシック Light"/>
               </a:rPr>
               <a:t>別フォルダへ自動仕分け</a:t>
             </a:r>
@@ -9835,8 +9803,8 @@
                 <a:solidFill>
                   <a:srgbClr val="4B5563"/>
                 </a:solidFill>
-                <a:latin typeface="Noto Sans JP" pitchFamily="34" charset="0"/>
-                <a:ea typeface="Noto Sans JP" pitchFamily="34" charset="-122"/>
+                <a:latin typeface="游ゴシック Light" pitchFamily="34" charset="0"/>
+                <a:ea typeface="游ゴシック Light" pitchFamily="34" charset="-122"/>
                 <a:cs typeface="Noto Sans JP" pitchFamily="34" charset="-120"/>
               </a:rPr>
               <a:t>新しいメールが届いたとき</a:t>
@@ -9844,13 +9812,19 @@
           </a:p>
           <a:p>
             <a:r>
-              <a:rPr sz="1600" b="1"/>
+              <a:rPr sz="1600" b="1">
+                <a:latin typeface="游ゴシック Light"/>
+                <a:ea typeface="游ゴシック Light"/>
+              </a:rPr>
               <a:t>→ 条件（差出人）</a:t>
             </a:r>
           </a:p>
           <a:p>
             <a:r>
-              <a:rPr sz="1600" b="1"/>
+              <a:rPr sz="1600" b="1">
+                <a:latin typeface="游ゴシック Light"/>
+                <a:ea typeface="游ゴシック Light"/>
+              </a:rPr>
               <a:t>→ フォルダへ移動</a:t>
             </a:r>
           </a:p>
@@ -9919,8 +9893,8 @@
                 <a:solidFill>
                   <a:srgbClr val="34D399"/>
                 </a:solidFill>
-                <a:latin typeface="Noto Sans JP" pitchFamily="34" charset="0"/>
-                <a:ea typeface="Noto Sans JP" pitchFamily="34" charset="-122"/>
+                <a:latin typeface="游ゴシック Light" pitchFamily="34" charset="0"/>
+                <a:ea typeface="游ゴシック Light" pitchFamily="34" charset="-122"/>
                 <a:cs typeface="Noto Sans JP" pitchFamily="34" charset="-120"/>
               </a:rPr>
               <a:t>メール → 条件 → 仕分け</a:t>
@@ -10103,8 +10077,8 @@
                 <a:solidFill>
                   <a:srgbClr val="1D4ED8"/>
                 </a:solidFill>
-                <a:latin typeface="Noto Sans JP" pitchFamily="34" charset="0"/>
-                <a:ea typeface="Noto Sans JP" pitchFamily="34" charset="-122"/>
+                <a:latin typeface="游ゴシック Light" pitchFamily="34" charset="0"/>
+                <a:ea typeface="游ゴシック Light" pitchFamily="34" charset="-122"/>
                 <a:cs typeface="Noto Sans JP" pitchFamily="34" charset="-120"/>
               </a:rPr>
               <a:t>件名で仕分け</a:t>
@@ -10141,8 +10115,8 @@
                 <a:solidFill>
                   <a:srgbClr val="1F2937"/>
                 </a:solidFill>
-                <a:latin typeface="Noto Sans JP" pitchFamily="34" charset="0"/>
-                <a:ea typeface="Noto Sans JP" pitchFamily="34" charset="-122"/>
+                <a:latin typeface="游ゴシック Light" pitchFamily="34" charset="0"/>
+                <a:ea typeface="游ゴシック Light" pitchFamily="34" charset="-122"/>
                 <a:cs typeface="Noto Sans JP" pitchFamily="34" charset="-120"/>
               </a:rPr>
               <a:t>件名に特定の語を含む</a:t>
@@ -10154,6 +10128,8 @@
                 <a:solidFill>
                   <a:srgbClr val="1F2937"/>
                 </a:solidFill>
+                <a:latin typeface="游ゴシック Light"/>
+                <a:ea typeface="游ゴシック Light"/>
               </a:rPr>
               <a:t>メールを自動で記録</a:t>
             </a:r>
@@ -10192,8 +10168,8 @@
                 <a:solidFill>
                   <a:srgbClr val="4B5563"/>
                 </a:solidFill>
-                <a:latin typeface="Noto Sans JP" pitchFamily="34" charset="0"/>
-                <a:ea typeface="Noto Sans JP" pitchFamily="34" charset="-122"/>
+                <a:latin typeface="游ゴシック Light" pitchFamily="34" charset="0"/>
+                <a:ea typeface="游ゴシック Light" pitchFamily="34" charset="-122"/>
                 <a:cs typeface="Noto Sans JP" pitchFamily="34" charset="-120"/>
               </a:rPr>
               <a:t>新しいメールが届いたとき</a:t>
@@ -10201,13 +10177,19 @@
           </a:p>
           <a:p>
             <a:r>
-              <a:rPr sz="1600" b="1"/>
+              <a:rPr sz="1600" b="1">
+                <a:latin typeface="游ゴシック Light"/>
+                <a:ea typeface="游ゴシック Light"/>
+              </a:rPr>
               <a:t>→ 条件（件名）</a:t>
             </a:r>
           </a:p>
           <a:p>
             <a:r>
-              <a:rPr sz="1600" b="1"/>
+              <a:rPr sz="1600" b="1">
+                <a:latin typeface="游ゴシック Light"/>
+                <a:ea typeface="游ゴシック Light"/>
+              </a:rPr>
               <a:t>→ リストに記録</a:t>
             </a:r>
           </a:p>
@@ -10331,8 +10313,8 @@
                 <a:solidFill>
                   <a:srgbClr val="1F2937"/>
                 </a:solidFill>
-                <a:latin typeface="Noto Sans JP" pitchFamily="34" charset="0"/>
-                <a:ea typeface="Noto Sans JP" pitchFamily="34" charset="-122"/>
+                <a:latin typeface="游ゴシック Light" pitchFamily="34" charset="0"/>
+                <a:ea typeface="游ゴシック Light" pitchFamily="34" charset="-122"/>
                 <a:cs typeface="Noto Sans JP" pitchFamily="34" charset="-120"/>
               </a:rPr>
               <a:t>メールの仕分けは応用がきく</a:t>
@@ -10369,8 +10351,8 @@
                 <a:solidFill>
                   <a:srgbClr val="9CA3AF"/>
                 </a:solidFill>
-                <a:latin typeface="ui-monospace" pitchFamily="34" charset="0"/>
-                <a:ea typeface="ui-monospace" pitchFamily="34" charset="-122"/>
+                <a:latin typeface="游ゴシック Light" pitchFamily="34" charset="0"/>
+                <a:ea typeface="游ゴシック Light" pitchFamily="34" charset="-122"/>
                 <a:cs typeface="ui-monospace" pitchFamily="34" charset="-120"/>
               </a:rPr>
               <a:t>Use Cases</a:t>
@@ -10469,8 +10451,8 @@
                 <a:solidFill>
                   <a:srgbClr val="9CA3AF"/>
                 </a:solidFill>
-                <a:latin typeface="Noto Sans JP" pitchFamily="34" charset="0"/>
-                <a:ea typeface="Noto Sans JP" pitchFamily="34" charset="-122"/>
+                <a:latin typeface="游ゴシック Light" pitchFamily="34" charset="0"/>
+                <a:ea typeface="游ゴシック Light" pitchFamily="34" charset="-122"/>
                 <a:cs typeface="Noto Sans JP" pitchFamily="34" charset="-120"/>
               </a:rPr>
               <a:t>Power Automate for Beginners</a:t>
@@ -10508,8 +10490,8 @@
                 <a:solidFill>
                   <a:srgbClr val="9CA3AF"/>
                 </a:solidFill>
-                <a:latin typeface="Noto Sans JP" pitchFamily="34" charset="0"/>
-                <a:ea typeface="Noto Sans JP" pitchFamily="34" charset="-122"/>
+                <a:latin typeface="游ゴシック Light" pitchFamily="34" charset="0"/>
+                <a:ea typeface="游ゴシック Light" pitchFamily="34" charset="-122"/>
                 <a:cs typeface="Noto Sans JP" pitchFamily="34" charset="-120"/>
               </a:rPr>
               <a:t>Copyright © PA45</a:t>
@@ -10855,8 +10837,8 @@
                 <a:solidFill>
                   <a:srgbClr val="9CA3AF"/>
                 </a:solidFill>
-                <a:latin typeface="Noto Sans JP" pitchFamily="34" charset="0"/>
-                <a:ea typeface="Noto Sans JP" pitchFamily="34" charset="-122"/>
+                <a:latin typeface="游ゴシック Light" pitchFamily="34" charset="0"/>
+                <a:ea typeface="游ゴシック Light" pitchFamily="34" charset="-122"/>
                 <a:cs typeface="Noto Sans JP" pitchFamily="34" charset="-120"/>
               </a:rPr>
               <a:t>Next Action</a:t>
@@ -10894,8 +10876,8 @@
                 <a:solidFill>
                   <a:srgbClr val="1F2937"/>
                 </a:solidFill>
-                <a:latin typeface="Noto Sans JP" pitchFamily="34" charset="0"/>
-                <a:ea typeface="Noto Sans JP" pitchFamily="34" charset="-122"/>
+                <a:latin typeface="游ゴシック Light" pitchFamily="34" charset="0"/>
+                <a:ea typeface="游ゴシック Light" pitchFamily="34" charset="-122"/>
                 <a:cs typeface="Noto Sans JP" pitchFamily="34" charset="-120"/>
               </a:rPr>
               <a:t>アンケートのお願い</a:t>
@@ -10933,8 +10915,8 @@
                 <a:solidFill>
                   <a:srgbClr val="6B7280"/>
                 </a:solidFill>
-                <a:latin typeface="Noto Sans JP" pitchFamily="34" charset="0"/>
-                <a:ea typeface="Noto Sans JP" pitchFamily="34" charset="-122"/>
+                <a:latin typeface="游ゴシック Light" pitchFamily="34" charset="0"/>
+                <a:ea typeface="游ゴシック Light" pitchFamily="34" charset="-122"/>
                 <a:cs typeface="Noto Sans JP" pitchFamily="34" charset="-120"/>
               </a:rPr>
               <a:t>所要時間：約1分</a:t>
@@ -11018,8 +11000,8 @@
                 <a:solidFill>
                   <a:srgbClr val="1F2937"/>
                 </a:solidFill>
-                <a:latin typeface="Noto Sans JP" pitchFamily="34" charset="0"/>
-                <a:ea typeface="Noto Sans JP" pitchFamily="34" charset="-122"/>
+                <a:latin typeface="游ゴシック Light" pitchFamily="34" charset="0"/>
+                <a:ea typeface="游ゴシック Light" pitchFamily="34" charset="-122"/>
                 <a:cs typeface="Noto Sans JP" pitchFamily="34" charset="-120"/>
               </a:rPr>
               <a:t>チャットをご確認ください</a:t>
@@ -11057,8 +11039,8 @@
                 <a:solidFill>
                   <a:srgbClr val="4B5563"/>
                 </a:solidFill>
-                <a:latin typeface="Noto Sans JP" pitchFamily="34" charset="0"/>
-                <a:ea typeface="Noto Sans JP" pitchFamily="34" charset="-122"/>
+                <a:latin typeface="游ゴシック Light" pitchFamily="34" charset="0"/>
+                <a:ea typeface="游ゴシック Light" pitchFamily="34" charset="-122"/>
                 <a:cs typeface="Noto Sans JP" pitchFamily="34" charset="-120"/>
               </a:rPr>
               <a:t>このあとチャット欄にアンケートURLを貼ります。</a:t>
@@ -11142,8 +11124,8 @@
                 <a:solidFill>
                   <a:srgbClr val="1F2937"/>
                 </a:solidFill>
-                <a:latin typeface="Noto Sans JP" pitchFamily="34" charset="0"/>
-                <a:ea typeface="Noto Sans JP" pitchFamily="34" charset="-122"/>
+                <a:latin typeface="游ゴシック Light" pitchFamily="34" charset="0"/>
+                <a:ea typeface="游ゴシック Light" pitchFamily="34" charset="-122"/>
                 <a:cs typeface="Noto Sans JP" pitchFamily="34" charset="-120"/>
               </a:rPr>
               <a:t>安心の匿名フォーム</a:t>
@@ -11177,7 +11159,10 @@
               <a:buNone/>
             </a:pPr>
             <a:r>
-              <a:rPr lang="ja-JP" altLang="en-US"/>
+              <a:rPr lang="ja-JP" altLang="en-US">
+                <a:latin typeface="游ゴシック Light"/>
+                <a:ea typeface="游ゴシック Light"/>
+              </a:rPr>
               <a:t>バッジ送付ご希望の方のみ送信用の</a:t>
             </a:r>
             <a:endParaRPr lang="en-US" altLang="ja-JP"/>
@@ -11187,7 +11172,10 @@
               <a:buNone/>
             </a:pPr>
             <a:r>
-              <a:rPr lang="ja-JP" altLang="en-US"/>
+              <a:rPr lang="ja-JP" altLang="en-US">
+                <a:latin typeface="游ゴシック Light"/>
+                <a:ea typeface="游ゴシック Light"/>
+              </a:rPr>
               <a:t>メールアドレスを記入（任意）</a:t>
             </a:r>
             <a:endParaRPr lang="en-US" dirty="0"/>
@@ -11223,8 +11211,8 @@
                 <a:solidFill>
                   <a:srgbClr val="9CA3AF"/>
                 </a:solidFill>
-                <a:latin typeface="Noto Sans JP" pitchFamily="34" charset="0"/>
-                <a:ea typeface="Noto Sans JP" pitchFamily="34" charset="-122"/>
+                <a:latin typeface="游ゴシック Light" pitchFamily="34" charset="0"/>
+                <a:ea typeface="游ゴシック Light" pitchFamily="34" charset="-122"/>
                 <a:cs typeface="Noto Sans JP" pitchFamily="34" charset="-120"/>
               </a:rPr>
               <a:t>🎁 </a:t>
@@ -11234,8 +11222,8 @@
                 <a:solidFill>
                   <a:srgbClr val="9CA3AF"/>
                 </a:solidFill>
-                <a:latin typeface="Noto Sans JP" pitchFamily="34" charset="0"/>
-                <a:ea typeface="Noto Sans JP" pitchFamily="34" charset="-122"/>
+                <a:latin typeface="游ゴシック Light" pitchFamily="34" charset="0"/>
+                <a:ea typeface="游ゴシック Light" pitchFamily="34" charset="-122"/>
                 <a:cs typeface="Noto Sans JP" pitchFamily="34" charset="-120"/>
               </a:rPr>
               <a:t>Special </a:t>
@@ -11245,8 +11233,8 @@
                 <a:solidFill>
                   <a:srgbClr val="9CA3AF"/>
                 </a:solidFill>
-                <a:latin typeface="Noto Sans JP" pitchFamily="34" charset="0"/>
-                <a:ea typeface="Noto Sans JP" pitchFamily="34" charset="-122"/>
+                <a:latin typeface="游ゴシック Light" pitchFamily="34" charset="0"/>
+                <a:ea typeface="游ゴシック Light" pitchFamily="34" charset="-122"/>
                 <a:cs typeface="Noto Sans JP" pitchFamily="34" charset="-120"/>
               </a:rPr>
               <a:t>Gift</a:t>
@@ -11318,8 +11306,8 @@
                 <a:solidFill>
                   <a:srgbClr val="374151"/>
                 </a:solidFill>
-                <a:latin typeface="Noto Sans JP" pitchFamily="34" charset="0"/>
-                <a:ea typeface="Noto Sans JP" pitchFamily="34" charset="-122"/>
+                <a:latin typeface="游ゴシック Light" pitchFamily="34" charset="0"/>
+                <a:ea typeface="游ゴシック Light" pitchFamily="34" charset="-122"/>
                 <a:cs typeface="Noto Sans JP" pitchFamily="34" charset="-120"/>
               </a:rPr>
               <a:t>PA45 バッジ</a:t>
@@ -11475,8 +11463,8 @@
                 <a:solidFill>
                   <a:srgbClr val="374151"/>
                 </a:solidFill>
-                <a:latin typeface="Noto Sans JP" pitchFamily="34" charset="0"/>
-                <a:ea typeface="Noto Sans JP" pitchFamily="34" charset="-122"/>
+                <a:latin typeface="游ゴシック Light" pitchFamily="34" charset="0"/>
+                <a:ea typeface="游ゴシック Light" pitchFamily="34" charset="-122"/>
                 <a:cs typeface="Noto Sans JP" pitchFamily="34" charset="-120"/>
               </a:rPr>
               <a:t>後日、お届けします</a:t>
@@ -11548,8 +11536,8 @@
                 <a:solidFill>
                   <a:srgbClr val="1F2937"/>
                 </a:solidFill>
-                <a:latin typeface="Noto Sans JP" pitchFamily="34" charset="0"/>
-                <a:ea typeface="Noto Sans JP" pitchFamily="34" charset="-122"/>
+                <a:latin typeface="游ゴシック Light" pitchFamily="34" charset="0"/>
+                <a:ea typeface="游ゴシック Light" pitchFamily="34" charset="-122"/>
                 <a:cs typeface="Noto Sans JP" pitchFamily="34" charset="-120"/>
               </a:rPr>
               <a:t>PA45｜第11回</a:t>
@@ -11587,8 +11575,8 @@
                 <a:solidFill>
                   <a:srgbClr val="9CA3AF"/>
                 </a:solidFill>
-                <a:latin typeface="Noto Sans JP" pitchFamily="34" charset="0"/>
-                <a:ea typeface="Noto Sans JP" pitchFamily="34" charset="-122"/>
+                <a:latin typeface="游ゴシック Light" pitchFamily="34" charset="0"/>
+                <a:ea typeface="游ゴシック Light" pitchFamily="34" charset="-122"/>
                 <a:cs typeface="Noto Sans JP" pitchFamily="34" charset="-120"/>
               </a:rPr>
               <a:t>|</a:t>
@@ -11626,8 +11614,8 @@
                 <a:solidFill>
                   <a:srgbClr val="2563EB"/>
                 </a:solidFill>
-                <a:latin typeface="Noto Sans JP" pitchFamily="34" charset="0"/>
-                <a:ea typeface="Noto Sans JP" pitchFamily="34" charset="-122"/>
+                <a:latin typeface="游ゴシック Light" pitchFamily="34" charset="0"/>
+                <a:ea typeface="游ゴシック Light" pitchFamily="34" charset="-122"/>
                 <a:cs typeface="Noto Sans JP" pitchFamily="34" charset="-120"/>
               </a:rPr>
               <a:t>#PA45</a:t>
@@ -11665,8 +11653,8 @@
                 <a:solidFill>
                   <a:srgbClr val="6B7280"/>
                 </a:solidFill>
-                <a:latin typeface="Noto Sans JP" pitchFamily="34" charset="0"/>
-                <a:ea typeface="Noto Sans JP" pitchFamily="34" charset="-122"/>
+                <a:latin typeface="游ゴシック Light" pitchFamily="34" charset="0"/>
+                <a:ea typeface="游ゴシック Light" pitchFamily="34" charset="-122"/>
                 <a:cs typeface="Noto Sans JP" pitchFamily="34" charset="-120"/>
               </a:rPr>
               <a:t>Power Automate for Beginners</a:t>
@@ -11704,8 +11692,8 @@
                 <a:solidFill>
                   <a:srgbClr val="9CA3AF"/>
                 </a:solidFill>
-                <a:latin typeface="Noto Sans JP" pitchFamily="34" charset="0"/>
-                <a:ea typeface="Noto Sans JP" pitchFamily="34" charset="-122"/>
+                <a:latin typeface="游ゴシック Light" pitchFamily="34" charset="0"/>
+                <a:ea typeface="游ゴシック Light" pitchFamily="34" charset="-122"/>
                 <a:cs typeface="Noto Sans JP" pitchFamily="34" charset="-120"/>
               </a:rPr>
               <a:t>Copyright © PA45</a:t>
@@ -11789,8 +11777,8 @@
                 <a:solidFill>
                   <a:schemeClr val="bg1"/>
                 </a:solidFill>
-                <a:latin typeface="Noto Sans JP" pitchFamily="34" charset="0"/>
-                <a:ea typeface="Noto Sans JP" pitchFamily="34" charset="-122"/>
+                <a:latin typeface="游ゴシック Light" pitchFamily="34" charset="0"/>
+                <a:ea typeface="游ゴシック Light" pitchFamily="34" charset="-122"/>
                 <a:cs typeface="Noto Sans JP" pitchFamily="34" charset="-120"/>
               </a:rPr>
               <a:t>？</a:t>
@@ -12037,15 +12025,24 @@
               <a:buNone/>
             </a:pPr>
             <a:r>
-              <a:rPr lang="ja-JP" altLang="en-US"/>
+              <a:rPr lang="ja-JP" altLang="en-US">
+                <a:latin typeface="游ゴシック Light"/>
+                <a:ea typeface="游ゴシック Light"/>
+              </a:rPr>
               <a:t>チャット欄に</a:t>
             </a:r>
             <a:r>
-              <a:rPr lang="en-US" altLang="ja-JP"/>
+              <a:rPr lang="en-US" altLang="ja-JP">
+                <a:latin typeface="游ゴシック Light"/>
+                <a:ea typeface="游ゴシック Light"/>
+              </a:rPr>
               <a:t>URL</a:t>
             </a:r>
             <a:r>
-              <a:rPr lang="ja-JP" altLang="en-US"/>
+              <a:rPr lang="ja-JP" altLang="en-US">
+                <a:latin typeface="游ゴシック Light"/>
+                <a:ea typeface="游ゴシック Light"/>
+              </a:rPr>
               <a:t>を貼り付けます</a:t>
             </a:r>
             <a:endParaRPr lang="en-US" dirty="0"/>
@@ -12130,6 +12127,8 @@
                 <a:solidFill>
                   <a:srgbClr val="FFFFFF"/>
                 </a:solidFill>
+                <a:latin typeface="游ゴシック Light"/>
+                <a:ea typeface="游ゴシック Light"/>
               </a:rPr>
               <a:t>事前準備（今回はほぼ不要です）</a:t>
             </a:r>
@@ -12163,8 +12162,8 @@
                 <a:solidFill>
                   <a:srgbClr val="333333"/>
                 </a:solidFill>
-                <a:latin typeface="+mj-ea"/>
-                <a:ea typeface="+mj-ea"/>
+                <a:latin typeface="游ゴシック Light"/>
+                <a:ea typeface="游ゴシック Light"/>
               </a:rPr>
               <a:t>今回のハンズオンは特別な準備が要りません。下の2つだけ確認しておきましょう。</a:t>
             </a:r>
@@ -12218,8 +12217,8 @@
                 <a:solidFill>
                   <a:srgbClr val="2A7DD4"/>
                 </a:solidFill>
-                <a:latin typeface="+mj-ea"/>
-                <a:ea typeface="+mj-ea"/>
+                <a:latin typeface="游ゴシック Light"/>
+                <a:ea typeface="游ゴシック Light"/>
               </a:rPr>
               <a:t>STEP 1   Power Automate にサインインできる</a:t>
             </a:r>
@@ -12230,7 +12229,8 @@
                 <a:solidFill>
                   <a:srgbClr val="2A7DD4"/>
                 </a:solidFill>
-                <a:latin typeface="+mj-ea"/>
+                <a:latin typeface="游ゴシック Light"/>
+                <a:ea typeface="游ゴシック Light"/>
               </a:rPr>
               <a:t>👉 make.powerautomate.com を開いて、サインインできる状態にしておきます</a:t>
             </a:r>
@@ -12284,8 +12284,8 @@
                 <a:solidFill>
                   <a:srgbClr val="2A7DD4"/>
                 </a:solidFill>
-                <a:latin typeface="+mj-ea"/>
-                <a:ea typeface="+mj-ea"/>
+                <a:latin typeface="游ゴシック Light"/>
+                <a:ea typeface="游ゴシック Light"/>
               </a:rPr>
               <a:t>STEP 2   自分のメール（Outlook）が使える</a:t>
             </a:r>
@@ -12296,7 +12296,8 @@
                 <a:solidFill>
                   <a:srgbClr val="2A7DD4"/>
                 </a:solidFill>
-                <a:latin typeface="+mj-ea"/>
+                <a:latin typeface="游ゴシック Light"/>
+                <a:ea typeface="游ゴシック Light"/>
               </a:rPr>
               <a:t>👉 ハンズオン中、自分から自分へ1通メールを送ってフローを動かします。それだけです</a:t>
             </a:r>
@@ -12589,8 +12590,8 @@
                 <a:solidFill>
                   <a:srgbClr val="1E40AF"/>
                 </a:solidFill>
-                <a:latin typeface="Noto Sans JP" pitchFamily="34" charset="0"/>
-                <a:ea typeface="Noto Sans JP" pitchFamily="34" charset="-122"/>
+                <a:latin typeface="游ゴシック Light" pitchFamily="34" charset="0"/>
+                <a:ea typeface="游ゴシック Light" pitchFamily="34" charset="-122"/>
                 <a:cs typeface="Noto Sans JP" pitchFamily="34" charset="-120"/>
               </a:rPr>
               <a:t>Power Automate 入門講座</a:t>
@@ -12676,8 +12677,8 @@
                 <a:solidFill>
                   <a:srgbClr val="4B5563"/>
                 </a:solidFill>
-                <a:latin typeface="Noto Sans JP" pitchFamily="34" charset="0"/>
-                <a:ea typeface="Noto Sans JP" pitchFamily="34" charset="-122"/>
+                <a:latin typeface="游ゴシック Light" pitchFamily="34" charset="0"/>
+                <a:ea typeface="游ゴシック Light" pitchFamily="34" charset="-122"/>
                 <a:cs typeface="Noto Sans JP" pitchFamily="34" charset="-120"/>
               </a:rPr>
               <a:t>Vol.11</a:t>
@@ -12715,8 +12716,8 @@
                 <a:solidFill>
                   <a:srgbClr val="0078D4"/>
                 </a:solidFill>
-                <a:latin typeface="Noto Sans JP" pitchFamily="34" charset="0"/>
-                <a:ea typeface="Noto Sans JP" pitchFamily="34" charset="-122"/>
+                <a:latin typeface="游ゴシック Light" pitchFamily="34" charset="0"/>
+                <a:ea typeface="游ゴシック Light" pitchFamily="34" charset="-122"/>
                 <a:cs typeface="Noto Sans JP" pitchFamily="34" charset="-120"/>
               </a:rPr>
               <a:t>PA45【メール受信 × 条件分岐 × 実行履歴】</a:t>
@@ -12754,8 +12755,8 @@
                 <a:solidFill>
                   <a:srgbClr val="1F2937"/>
                 </a:solidFill>
-                <a:latin typeface="Noto Sans JP" pitchFamily="34" charset="0"/>
-                <a:ea typeface="Noto Sans JP" pitchFamily="34" charset="-122"/>
+                <a:latin typeface="游ゴシック Light" pitchFamily="34" charset="0"/>
+                <a:ea typeface="游ゴシック Light" pitchFamily="34" charset="-122"/>
                 <a:cs typeface="Noto Sans JP" pitchFamily="34" charset="-120"/>
               </a:rPr>
               <a:t>第11回： </a:t>
@@ -12767,7 +12768,8 @@
                 <a:solidFill>
                   <a:srgbClr val="1F2937"/>
                 </a:solidFill>
-                <a:latin typeface="Noto Sans JP"/>
+                <a:latin typeface="游ゴシック Light"/>
+                <a:ea typeface="游ゴシック Light"/>
               </a:rPr>
               <a:t>失敗しないフロー設計</a:t>
             </a:r>
@@ -12778,7 +12780,8 @@
                 <a:solidFill>
                   <a:srgbClr val="1F2937"/>
                 </a:solidFill>
-                <a:latin typeface="Noto Sans JP"/>
+                <a:latin typeface="游ゴシック Light"/>
+                <a:ea typeface="游ゴシック Light"/>
               </a:rPr>
               <a:t>実行履歴を読めるようになろう</a:t>
             </a:r>
@@ -12848,8 +12851,8 @@
                 <a:solidFill>
                   <a:srgbClr val="9CA3AF"/>
                 </a:solidFill>
-                <a:latin typeface="Noto Sans JP" pitchFamily="34" charset="0"/>
-                <a:ea typeface="Noto Sans JP" pitchFamily="34" charset="-122"/>
+                <a:latin typeface="游ゴシック Light" pitchFamily="34" charset="0"/>
+                <a:ea typeface="游ゴシック Light" pitchFamily="34" charset="-122"/>
                 <a:cs typeface="Noto Sans JP" pitchFamily="34" charset="-120"/>
               </a:rPr>
               <a:t>Theme　メールの重要度で条件分岐｜実行履歴の出力を読む</a:t>
@@ -12887,8 +12890,8 @@
                 <a:solidFill>
                   <a:srgbClr val="9CA3AF"/>
                 </a:solidFill>
-                <a:latin typeface="Noto Sans JP" pitchFamily="34" charset="0"/>
-                <a:ea typeface="Noto Sans JP" pitchFamily="34" charset="-122"/>
+                <a:latin typeface="游ゴシック Light" pitchFamily="34" charset="0"/>
+                <a:ea typeface="游ゴシック Light" pitchFamily="34" charset="-122"/>
                 <a:cs typeface="Noto Sans JP" pitchFamily="34" charset="-120"/>
               </a:rPr>
               <a:t>Target　条件分岐（Vol.3）を触った方／はじめての方も、見るだけでOK</a:t>
@@ -12925,8 +12928,8 @@
                 <a:solidFill>
                   <a:srgbClr val="9CA3AF"/>
                 </a:solidFill>
-                <a:latin typeface="Noto Sans JP" pitchFamily="34" charset="0"/>
-                <a:ea typeface="Noto Sans JP" pitchFamily="34" charset="-122"/>
+                <a:latin typeface="游ゴシック Light" pitchFamily="34" charset="0"/>
+                <a:ea typeface="游ゴシック Light" pitchFamily="34" charset="-122"/>
                 <a:cs typeface="Noto Sans JP" pitchFamily="34" charset="-120"/>
               </a:rPr>
               <a:t>Time</a:t>
@@ -12936,8 +12939,8 @@
                 <a:solidFill>
                   <a:srgbClr val="374151"/>
                 </a:solidFill>
-                <a:latin typeface="Noto Sans JP" pitchFamily="34" charset="0"/>
-                <a:ea typeface="Noto Sans JP" pitchFamily="34" charset="-122"/>
+                <a:latin typeface="游ゴシック Light" pitchFamily="34" charset="0"/>
+                <a:ea typeface="游ゴシック Light" pitchFamily="34" charset="-122"/>
                 <a:cs typeface="Noto Sans JP" pitchFamily="34" charset="-120"/>
               </a:rPr>
               <a:t> </a:t>
@@ -12947,8 +12950,8 @@
                 <a:solidFill>
                   <a:srgbClr val="374151"/>
                 </a:solidFill>
-                <a:latin typeface="Noto Sans JP" pitchFamily="34" charset="0"/>
-                <a:ea typeface="Noto Sans JP" pitchFamily="34" charset="-122"/>
+                <a:latin typeface="游ゴシック Light" pitchFamily="34" charset="0"/>
+                <a:ea typeface="游ゴシック Light" pitchFamily="34" charset="-122"/>
                 <a:cs typeface="Noto Sans JP" pitchFamily="34" charset="-120"/>
               </a:rPr>
               <a:t>　</a:t>
@@ -12958,8 +12961,8 @@
                 <a:solidFill>
                   <a:srgbClr val="374151"/>
                 </a:solidFill>
-                <a:latin typeface="Noto Sans JP" pitchFamily="34" charset="0"/>
-                <a:ea typeface="Noto Sans JP" pitchFamily="34" charset="-122"/>
+                <a:latin typeface="游ゴシック Light" pitchFamily="34" charset="0"/>
+                <a:ea typeface="游ゴシック Light" pitchFamily="34" charset="-122"/>
                 <a:cs typeface="Noto Sans JP" pitchFamily="34" charset="-120"/>
               </a:rPr>
               <a:t>約</a:t>
@@ -12969,8 +12972,8 @@
                 <a:solidFill>
                   <a:srgbClr val="374151"/>
                 </a:solidFill>
-                <a:latin typeface="Noto Sans JP" pitchFamily="34" charset="0"/>
-                <a:ea typeface="Noto Sans JP" pitchFamily="34" charset="-122"/>
+                <a:latin typeface="游ゴシック Light" pitchFamily="34" charset="0"/>
+                <a:ea typeface="游ゴシック Light" pitchFamily="34" charset="-122"/>
                 <a:cs typeface="Noto Sans JP" pitchFamily="34" charset="-120"/>
               </a:rPr>
               <a:t>10分ハンズオン </a:t>
@@ -13567,8 +13570,8 @@
                 <a:solidFill>
                   <a:srgbClr val="1F2937"/>
                 </a:solidFill>
-                <a:latin typeface="Noto Sans JP" pitchFamily="34" charset="0"/>
-                <a:ea typeface="Noto Sans JP" pitchFamily="34" charset="-122"/>
+                <a:latin typeface="游ゴシック Light" pitchFamily="34" charset="0"/>
+                <a:ea typeface="游ゴシック Light" pitchFamily="34" charset="-122"/>
                 <a:cs typeface="Noto Sans JP" pitchFamily="34" charset="-120"/>
               </a:rPr>
               <a:t> 忙しい人のための</a:t>
@@ -13584,8 +13587,8 @@
                 <a:solidFill>
                   <a:srgbClr val="0078D4"/>
                 </a:solidFill>
-                <a:latin typeface="Noto Sans JP" pitchFamily="34" charset="0"/>
-                <a:ea typeface="Noto Sans JP" pitchFamily="34" charset="-122"/>
+                <a:latin typeface="游ゴシック Light" pitchFamily="34" charset="0"/>
+                <a:ea typeface="游ゴシック Light" pitchFamily="34" charset="-122"/>
                 <a:cs typeface="Noto Sans JP" pitchFamily="34" charset="-120"/>
               </a:rPr>
               <a:t>45分ハンズオン</a:t>
@@ -13705,8 +13708,8 @@
                 <a:solidFill>
                   <a:srgbClr val="1F2937"/>
                 </a:solidFill>
-                <a:latin typeface="Noto Sans JP" pitchFamily="34" charset="0"/>
-                <a:ea typeface="Noto Sans JP" pitchFamily="34" charset="-122"/>
+                <a:latin typeface="游ゴシック Light" pitchFamily="34" charset="0"/>
+                <a:ea typeface="游ゴシック Light" pitchFamily="34" charset="-122"/>
                 <a:cs typeface="Noto Sans JP" pitchFamily="34" charset="-120"/>
               </a:rPr>
               <a:t>45分完結</a:t>
@@ -13744,8 +13747,8 @@
                 <a:solidFill>
                   <a:srgbClr val="6B7280"/>
                 </a:solidFill>
-                <a:latin typeface="Noto Sans JP" pitchFamily="34" charset="0"/>
-                <a:ea typeface="Noto Sans JP" pitchFamily="34" charset="-122"/>
+                <a:latin typeface="游ゴシック Light" pitchFamily="34" charset="0"/>
+                <a:ea typeface="游ゴシック Light" pitchFamily="34" charset="-122"/>
                 <a:cs typeface="Noto Sans JP" pitchFamily="34" charset="-120"/>
               </a:rPr>
               <a:t> 長時間の研修は不要。</a:t>
@@ -13761,8 +13764,8 @@
                 <a:solidFill>
                   <a:srgbClr val="6B7280"/>
                 </a:solidFill>
-                <a:latin typeface="Noto Sans JP" pitchFamily="34" charset="0"/>
-                <a:ea typeface="Noto Sans JP" pitchFamily="34" charset="-122"/>
+                <a:latin typeface="游ゴシック Light" pitchFamily="34" charset="0"/>
+                <a:ea typeface="游ゴシック Light" pitchFamily="34" charset="-122"/>
                 <a:cs typeface="Noto Sans JP" pitchFamily="34" charset="-120"/>
               </a:rPr>
               <a:t> 要点だけを凝縮して</a:t>
@@ -13778,8 +13781,8 @@
                 <a:solidFill>
                   <a:srgbClr val="6B7280"/>
                 </a:solidFill>
-                <a:latin typeface="Noto Sans JP" pitchFamily="34" charset="0"/>
-                <a:ea typeface="Noto Sans JP" pitchFamily="34" charset="-122"/>
+                <a:latin typeface="游ゴシック Light" pitchFamily="34" charset="0"/>
+                <a:ea typeface="游ゴシック Light" pitchFamily="34" charset="-122"/>
                 <a:cs typeface="Noto Sans JP" pitchFamily="34" charset="-120"/>
               </a:rPr>
               <a:t> 最短でスキル習得。 </a:t>
@@ -13899,8 +13902,8 @@
                 <a:solidFill>
                   <a:srgbClr val="1F2937"/>
                 </a:solidFill>
-                <a:latin typeface="Noto Sans JP" pitchFamily="34" charset="0"/>
-                <a:ea typeface="Noto Sans JP" pitchFamily="34" charset="-122"/>
+                <a:latin typeface="游ゴシック Light" pitchFamily="34" charset="0"/>
+                <a:ea typeface="游ゴシック Light" pitchFamily="34" charset="-122"/>
                 <a:cs typeface="Noto Sans JP" pitchFamily="34" charset="-120"/>
               </a:rPr>
               <a:t>実践型ハンズオン</a:t>
@@ -13938,8 +13941,8 @@
                 <a:solidFill>
                   <a:srgbClr val="6B7280"/>
                 </a:solidFill>
-                <a:latin typeface="Noto Sans JP" pitchFamily="34" charset="0"/>
-                <a:ea typeface="Noto Sans JP" pitchFamily="34" charset="-122"/>
+                <a:latin typeface="游ゴシック Light" pitchFamily="34" charset="0"/>
+                <a:ea typeface="游ゴシック Light" pitchFamily="34" charset="-122"/>
                 <a:cs typeface="Noto Sans JP" pitchFamily="34" charset="-120"/>
               </a:rPr>
               <a:t> 座学だけではありません。</a:t>
@@ -13955,8 +13958,8 @@
                 <a:solidFill>
                   <a:srgbClr val="6B7280"/>
                 </a:solidFill>
-                <a:latin typeface="Noto Sans JP" pitchFamily="34" charset="0"/>
-                <a:ea typeface="Noto Sans JP" pitchFamily="34" charset="-122"/>
+                <a:latin typeface="游ゴシック Light" pitchFamily="34" charset="0"/>
+                <a:ea typeface="游ゴシック Light" pitchFamily="34" charset="-122"/>
                 <a:cs typeface="Noto Sans JP" pitchFamily="34" charset="-120"/>
               </a:rPr>
               <a:t> その場で実際に手を動かし</a:t>
@@ -13972,8 +13975,8 @@
                 <a:solidFill>
                   <a:srgbClr val="6B7280"/>
                 </a:solidFill>
-                <a:latin typeface="Noto Sans JP" pitchFamily="34" charset="0"/>
-                <a:ea typeface="Noto Sans JP" pitchFamily="34" charset="-122"/>
+                <a:latin typeface="游ゴシック Light" pitchFamily="34" charset="0"/>
+                <a:ea typeface="游ゴシック Light" pitchFamily="34" charset="-122"/>
                 <a:cs typeface="Noto Sans JP" pitchFamily="34" charset="-120"/>
               </a:rPr>
               <a:t> 「使える」技術を学びます。 </a:t>
@@ -14093,8 +14096,8 @@
                 <a:solidFill>
                   <a:srgbClr val="1F2937"/>
                 </a:solidFill>
-                <a:latin typeface="Noto Sans JP" pitchFamily="34" charset="0"/>
-                <a:ea typeface="Noto Sans JP" pitchFamily="34" charset="-122"/>
+                <a:latin typeface="游ゴシック Light" pitchFamily="34" charset="0"/>
+                <a:ea typeface="游ゴシック Light" pitchFamily="34" charset="-122"/>
                 <a:cs typeface="Noto Sans JP" pitchFamily="34" charset="-120"/>
               </a:rPr>
               <a:t>一緒に作る</a:t>
@@ -14138,8 +14141,8 @@
                 <a:solidFill>
                   <a:srgbClr val="6B7280"/>
                 </a:solidFill>
-                <a:latin typeface="Noto Sans JP" pitchFamily="34" charset="0"/>
-                <a:ea typeface="Noto Sans JP" pitchFamily="34" charset="-122"/>
+                <a:latin typeface="游ゴシック Light" pitchFamily="34" charset="0"/>
+                <a:ea typeface="游ゴシック Light" pitchFamily="34" charset="-122"/>
                 <a:cs typeface="Noto Sans JP" pitchFamily="34" charset="-120"/>
               </a:rPr>
               <a:t> ゼロから一緒に作ることで</a:t>
@@ -14155,8 +14158,8 @@
                 <a:solidFill>
                   <a:srgbClr val="6B7280"/>
                 </a:solidFill>
-                <a:latin typeface="Noto Sans JP" pitchFamily="34" charset="0"/>
-                <a:ea typeface="Noto Sans JP" pitchFamily="34" charset="-122"/>
+                <a:latin typeface="游ゴシック Light" pitchFamily="34" charset="0"/>
+                <a:ea typeface="游ゴシック Light" pitchFamily="34" charset="-122"/>
                 <a:cs typeface="Noto Sans JP" pitchFamily="34" charset="-120"/>
               </a:rPr>
               <a:t> 仕組みを理解します</a:t>
@@ -14166,8 +14169,8 @@
                 <a:solidFill>
                   <a:srgbClr val="6B7280"/>
                 </a:solidFill>
-                <a:latin typeface="Noto Sans JP" pitchFamily="34" charset="0"/>
-                <a:ea typeface="Noto Sans JP" pitchFamily="34" charset="-122"/>
+                <a:latin typeface="游ゴシック Light" pitchFamily="34" charset="0"/>
+                <a:ea typeface="游ゴシック Light" pitchFamily="34" charset="-122"/>
                 <a:cs typeface="Noto Sans JP" pitchFamily="34" charset="-120"/>
               </a:rPr>
               <a:t>。 </a:t>
@@ -14264,8 +14267,8 @@
                 <a:solidFill>
                   <a:srgbClr val="374151"/>
                 </a:solidFill>
-                <a:latin typeface="Noto Sans JP" pitchFamily="34" charset="0"/>
-                <a:ea typeface="Noto Sans JP" pitchFamily="34" charset="-122"/>
+                <a:latin typeface="游ゴシック Light" pitchFamily="34" charset="0"/>
+                <a:ea typeface="游ゴシック Light" pitchFamily="34" charset="-122"/>
                 <a:cs typeface="Noto Sans JP" pitchFamily="34" charset="-120"/>
               </a:rPr>
               <a:t>Power Automate 未経験・知識ゼロでも大丈夫！</a:t>
@@ -14387,8 +14390,8 @@
                 <a:solidFill>
                   <a:srgbClr val="6B7280"/>
                 </a:solidFill>
-                <a:latin typeface="Noto Sans JP" pitchFamily="34" charset="0"/>
-                <a:ea typeface="Noto Sans JP" pitchFamily="34" charset="-122"/>
+                <a:latin typeface="游ゴシック Light" pitchFamily="34" charset="0"/>
+                <a:ea typeface="游ゴシック Light" pitchFamily="34" charset="-122"/>
                 <a:cs typeface="Noto Sans JP" pitchFamily="34" charset="-120"/>
               </a:rPr>
               <a:t>INTRODUCTION</a:t>
@@ -14426,8 +14429,8 @@
                 <a:solidFill>
                   <a:srgbClr val="1F2937"/>
                 </a:solidFill>
-                <a:latin typeface="Noto Sans JP" pitchFamily="34" charset="0"/>
-                <a:ea typeface="Noto Sans JP" pitchFamily="34" charset="-122"/>
+                <a:latin typeface="游ゴシック Light" pitchFamily="34" charset="0"/>
+                <a:ea typeface="游ゴシック Light" pitchFamily="34" charset="-122"/>
                 <a:cs typeface="Noto Sans JP" pitchFamily="34" charset="-120"/>
               </a:rPr>
               <a:t>PA45</a:t>
@@ -14437,8 +14440,8 @@
                 <a:solidFill>
                   <a:srgbClr val="6B7280"/>
                 </a:solidFill>
-                <a:latin typeface="Noto Sans JP" pitchFamily="34" charset="0"/>
-                <a:ea typeface="Noto Sans JP" pitchFamily="34" charset="-122"/>
+                <a:latin typeface="游ゴシック Light" pitchFamily="34" charset="0"/>
+                <a:ea typeface="游ゴシック Light" pitchFamily="34" charset="-122"/>
                 <a:cs typeface="Noto Sans JP" pitchFamily="34" charset="-120"/>
               </a:rPr>
               <a:t>とは？</a:t>
@@ -14510,8 +14513,8 @@
                 <a:solidFill>
                   <a:srgbClr val="9CA3AF"/>
                 </a:solidFill>
-                <a:latin typeface="ui-monospace" pitchFamily="34" charset="0"/>
-                <a:ea typeface="ui-monospace" pitchFamily="34" charset="-122"/>
+                <a:latin typeface="游ゴシック Light" pitchFamily="34" charset="0"/>
+                <a:ea typeface="游ゴシック Light" pitchFamily="34" charset="-122"/>
                 <a:cs typeface="ui-monospace" pitchFamily="34" charset="-120"/>
               </a:rPr>
               <a:t>Concept</a:t>
@@ -14610,8 +14613,8 @@
                 <a:solidFill>
                   <a:srgbClr val="9CA3AF"/>
                 </a:solidFill>
-                <a:latin typeface="Noto Sans JP" pitchFamily="34" charset="0"/>
-                <a:ea typeface="Noto Sans JP" pitchFamily="34" charset="-122"/>
+                <a:latin typeface="游ゴシック Light" pitchFamily="34" charset="0"/>
+                <a:ea typeface="游ゴシック Light" pitchFamily="34" charset="-122"/>
                 <a:cs typeface="Noto Sans JP" pitchFamily="34" charset="-120"/>
               </a:rPr>
               <a:t>Power Automate for Beginners</a:t>
@@ -14649,8 +14652,8 @@
                 <a:solidFill>
                   <a:srgbClr val="9CA3AF"/>
                 </a:solidFill>
-                <a:latin typeface="Noto Sans JP" pitchFamily="34" charset="0"/>
-                <a:ea typeface="Noto Sans JP" pitchFamily="34" charset="-122"/>
+                <a:latin typeface="游ゴシック Light" pitchFamily="34" charset="0"/>
+                <a:ea typeface="游ゴシック Light" pitchFamily="34" charset="-122"/>
                 <a:cs typeface="Noto Sans JP" pitchFamily="34" charset="-120"/>
               </a:rPr>
               <a:t>Copyright © PA45</a:t>
@@ -15117,8 +15120,8 @@
                 <a:solidFill>
                   <a:srgbClr val="1F2937"/>
                 </a:solidFill>
-                <a:latin typeface="Noto Sans JP" pitchFamily="34" charset="0"/>
-                <a:ea typeface="Noto Sans JP" pitchFamily="34" charset="-122"/>
+                <a:latin typeface="游ゴシック Light" pitchFamily="34" charset="0"/>
+                <a:ea typeface="游ゴシック Light" pitchFamily="34" charset="-122"/>
                 <a:cs typeface="Noto Sans JP" pitchFamily="34" charset="-120"/>
               </a:rPr>
               <a:t>みんなで気持ちよく</a:t>
@@ -15134,8 +15137,8 @@
                 <a:solidFill>
                   <a:srgbClr val="1F2937"/>
                 </a:solidFill>
-                <a:latin typeface="Noto Sans JP" pitchFamily="34" charset="0"/>
-                <a:ea typeface="Noto Sans JP" pitchFamily="34" charset="-122"/>
+                <a:latin typeface="游ゴシック Light" pitchFamily="34" charset="0"/>
+                <a:ea typeface="游ゴシック Light" pitchFamily="34" charset="-122"/>
                 <a:cs typeface="Noto Sans JP" pitchFamily="34" charset="-120"/>
               </a:rPr>
               <a:t>学ぶために</a:t>
@@ -15173,8 +15176,8 @@
                 <a:solidFill>
                   <a:srgbClr val="4B5563"/>
                 </a:solidFill>
-                <a:latin typeface="Noto Sans JP" pitchFamily="34" charset="0"/>
-                <a:ea typeface="Noto Sans JP" pitchFamily="34" charset="-122"/>
+                <a:latin typeface="游ゴシック Light" pitchFamily="34" charset="0"/>
+                <a:ea typeface="游ゴシック Light" pitchFamily="34" charset="-122"/>
                 <a:cs typeface="Noto Sans JP" pitchFamily="34" charset="-120"/>
               </a:rPr>
               <a:t>誹謗中傷・不適切な発言は</a:t>
@@ -15184,8 +15187,8 @@
                 <a:solidFill>
                   <a:srgbClr val="2563EB"/>
                 </a:solidFill>
-                <a:latin typeface="Noto Sans JP" pitchFamily="34" charset="0"/>
-                <a:ea typeface="Noto Sans JP" pitchFamily="34" charset="-122"/>
+                <a:latin typeface="游ゴシック Light" pitchFamily="34" charset="0"/>
+                <a:ea typeface="游ゴシック Light" pitchFamily="34" charset="-122"/>
                 <a:cs typeface="Noto Sans JP" pitchFamily="34" charset="-120"/>
               </a:rPr>
               <a:t>禁止</a:t>
@@ -15246,8 +15249,8 @@
                 <a:solidFill>
                   <a:srgbClr val="4B5563"/>
                 </a:solidFill>
-                <a:latin typeface="Noto Sans JP" pitchFamily="34" charset="0"/>
-                <a:ea typeface="Noto Sans JP" pitchFamily="34" charset="-122"/>
+                <a:latin typeface="游ゴシック Light" pitchFamily="34" charset="0"/>
+                <a:ea typeface="游ゴシック Light" pitchFamily="34" charset="-122"/>
                 <a:cs typeface="Noto Sans JP" pitchFamily="34" charset="-120"/>
               </a:rPr>
               <a:t>お互いを尊重し合いましょう</a:t>
@@ -15377,8 +15380,8 @@
                 <a:solidFill>
                   <a:srgbClr val="1F2937"/>
                 </a:solidFill>
-                <a:latin typeface="Noto Sans JP" pitchFamily="34" charset="0"/>
-                <a:ea typeface="Noto Sans JP" pitchFamily="34" charset="-122"/>
+                <a:latin typeface="游ゴシック Light" pitchFamily="34" charset="0"/>
+                <a:ea typeface="游ゴシック Light" pitchFamily="34" charset="-122"/>
                 <a:cs typeface="Noto Sans JP" pitchFamily="34" charset="-120"/>
               </a:rPr>
               <a:t>講座の録画について</a:t>
@@ -15416,8 +15419,8 @@
                 <a:solidFill>
                   <a:srgbClr val="4B5563"/>
                 </a:solidFill>
-                <a:latin typeface="Noto Sans JP" pitchFamily="34" charset="0"/>
-                <a:ea typeface="Noto Sans JP" pitchFamily="34" charset="-122"/>
+                <a:latin typeface="游ゴシック Light" pitchFamily="34" charset="0"/>
+                <a:ea typeface="游ゴシック Light" pitchFamily="34" charset="-122"/>
                 <a:cs typeface="Noto Sans JP" pitchFamily="34" charset="-120"/>
               </a:rPr>
               <a:t>後日</a:t>
@@ -15427,8 +15430,8 @@
                 <a:solidFill>
                   <a:srgbClr val="4B5563"/>
                 </a:solidFill>
-                <a:latin typeface="Noto Sans JP" pitchFamily="34" charset="0"/>
-                <a:ea typeface="Noto Sans JP" pitchFamily="34" charset="-122"/>
+                <a:latin typeface="游ゴシック Light" pitchFamily="34" charset="0"/>
+                <a:ea typeface="游ゴシック Light" pitchFamily="34" charset="-122"/>
                 <a:cs typeface="Noto Sans JP" pitchFamily="34" charset="-120"/>
               </a:rPr>
               <a:t>YouTube公開</a:t>
@@ -15438,8 +15441,8 @@
                 <a:solidFill>
                   <a:srgbClr val="4B5563"/>
                 </a:solidFill>
-                <a:latin typeface="Noto Sans JP" pitchFamily="34" charset="0"/>
-                <a:ea typeface="Noto Sans JP" pitchFamily="34" charset="-122"/>
+                <a:latin typeface="游ゴシック Light" pitchFamily="34" charset="0"/>
+                <a:ea typeface="游ゴシック Light" pitchFamily="34" charset="-122"/>
                 <a:cs typeface="Noto Sans JP" pitchFamily="34" charset="-120"/>
               </a:rPr>
               <a:t>予定</a:t>
@@ -15500,8 +15503,8 @@
                 <a:solidFill>
                   <a:srgbClr val="4B5563"/>
                 </a:solidFill>
-                <a:latin typeface="Noto Sans JP" pitchFamily="34" charset="0"/>
-                <a:ea typeface="Noto Sans JP" pitchFamily="34" charset="-122"/>
+                <a:latin typeface="游ゴシック Light" pitchFamily="34" charset="0"/>
+                <a:ea typeface="游ゴシック Light" pitchFamily="34" charset="-122"/>
                 <a:cs typeface="Noto Sans JP" pitchFamily="34" charset="-120"/>
               </a:rPr>
               <a:t>表示名が映る場合があります</a:t>
@@ -15562,8 +15565,8 @@
                 <a:solidFill>
                   <a:srgbClr val="4B5563"/>
                 </a:solidFill>
-                <a:latin typeface="Noto Sans JP" pitchFamily="34" charset="0"/>
-                <a:ea typeface="Noto Sans JP" pitchFamily="34" charset="-122"/>
+                <a:latin typeface="游ゴシック Light" pitchFamily="34" charset="0"/>
+                <a:ea typeface="游ゴシック Light" pitchFamily="34" charset="-122"/>
                 <a:cs typeface="Noto Sans JP" pitchFamily="34" charset="-120"/>
               </a:rPr>
               <a:t>匿名参加で非表示にできます</a:t>
@@ -15693,8 +15696,8 @@
                 <a:solidFill>
                   <a:srgbClr val="1F2937"/>
                 </a:solidFill>
-                <a:latin typeface="Noto Sans JP" pitchFamily="34" charset="0"/>
-                <a:ea typeface="Noto Sans JP" pitchFamily="34" charset="-122"/>
+                <a:latin typeface="游ゴシック Light" pitchFamily="34" charset="0"/>
+                <a:ea typeface="游ゴシック Light" pitchFamily="34" charset="-122"/>
                 <a:cs typeface="Noto Sans JP" pitchFamily="34" charset="-120"/>
               </a:rPr>
               <a:t>チャットは気軽に</a:t>
@@ -15710,8 +15713,8 @@
                 <a:solidFill>
                   <a:srgbClr val="1F2937"/>
                 </a:solidFill>
-                <a:latin typeface="Noto Sans JP" pitchFamily="34" charset="0"/>
-                <a:ea typeface="Noto Sans JP" pitchFamily="34" charset="-122"/>
+                <a:latin typeface="游ゴシック Light" pitchFamily="34" charset="0"/>
+                <a:ea typeface="游ゴシック Light" pitchFamily="34" charset="-122"/>
                 <a:cs typeface="Noto Sans JP" pitchFamily="34" charset="-120"/>
               </a:rPr>
               <a:t>どうぞ</a:t>
@@ -15749,8 +15752,8 @@
                 <a:solidFill>
                   <a:srgbClr val="4B5563"/>
                 </a:solidFill>
-                <a:latin typeface="Noto Sans JP" pitchFamily="34" charset="0"/>
-                <a:ea typeface="Noto Sans JP" pitchFamily="34" charset="-122"/>
+                <a:latin typeface="游ゴシック Light" pitchFamily="34" charset="0"/>
+                <a:ea typeface="游ゴシック Light" pitchFamily="34" charset="-122"/>
                 <a:cs typeface="Noto Sans JP" pitchFamily="34" charset="-120"/>
               </a:rPr>
               <a:t>「できました！」の声など大歓迎</a:t>
@@ -15811,8 +15814,8 @@
                 <a:solidFill>
                   <a:srgbClr val="4B5563"/>
                 </a:solidFill>
-                <a:latin typeface="Noto Sans JP" pitchFamily="34" charset="0"/>
-                <a:ea typeface="Noto Sans JP" pitchFamily="34" charset="-122"/>
+                <a:latin typeface="游ゴシック Light" pitchFamily="34" charset="0"/>
+                <a:ea typeface="游ゴシック Light" pitchFamily="34" charset="-122"/>
                 <a:cs typeface="Noto Sans JP" pitchFamily="34" charset="-120"/>
               </a:rPr>
               <a:t>小さな質問でも</a:t>
@@ -15822,8 +15825,8 @@
                 <a:solidFill>
                   <a:srgbClr val="0078D4"/>
                 </a:solidFill>
-                <a:latin typeface="Noto Sans JP" pitchFamily="34" charset="0"/>
-                <a:ea typeface="Noto Sans JP" pitchFamily="34" charset="-122"/>
+                <a:latin typeface="游ゴシック Light" pitchFamily="34" charset="0"/>
+                <a:ea typeface="游ゴシック Light" pitchFamily="34" charset="-122"/>
                 <a:cs typeface="Noto Sans JP" pitchFamily="34" charset="-120"/>
               </a:rPr>
               <a:t>OK</a:t>
@@ -15833,8 +15836,8 @@
                 <a:solidFill>
                   <a:srgbClr val="4B5563"/>
                 </a:solidFill>
-                <a:latin typeface="Noto Sans JP" pitchFamily="34" charset="0"/>
-                <a:ea typeface="Noto Sans JP" pitchFamily="34" charset="-122"/>
+                <a:latin typeface="游ゴシック Light" pitchFamily="34" charset="0"/>
+                <a:ea typeface="游ゴシック Light" pitchFamily="34" charset="-122"/>
                 <a:cs typeface="Noto Sans JP" pitchFamily="34" charset="-120"/>
               </a:rPr>
               <a:t>です</a:t>
@@ -15895,8 +15898,8 @@
                 <a:solidFill>
                   <a:srgbClr val="4B5563"/>
                 </a:solidFill>
-                <a:latin typeface="Noto Sans JP" pitchFamily="34" charset="0"/>
-                <a:ea typeface="Noto Sans JP" pitchFamily="34" charset="-122"/>
+                <a:latin typeface="游ゴシック Light" pitchFamily="34" charset="0"/>
+                <a:ea typeface="游ゴシック Light" pitchFamily="34" charset="-122"/>
                 <a:cs typeface="Noto Sans JP" pitchFamily="34" charset="-120"/>
               </a:rPr>
               <a:t>反応があると講師も嬉しいです</a:t>
@@ -16189,8 +16192,8 @@
                 <a:solidFill>
                   <a:srgbClr val="4C1D95"/>
                 </a:solidFill>
-                <a:latin typeface="Noto Sans JP" pitchFamily="34" charset="0"/>
-                <a:ea typeface="Noto Sans JP" pitchFamily="34" charset="-122"/>
+                <a:latin typeface="游ゴシック Light" pitchFamily="34" charset="0"/>
+                <a:ea typeface="游ゴシック Light" pitchFamily="34" charset="-122"/>
                 <a:cs typeface="Noto Sans JP" pitchFamily="34" charset="-120"/>
               </a:rPr>
               <a:t>アウトプットで学びが定着</a:t>
@@ -16228,8 +16231,8 @@
                 <a:solidFill>
                   <a:srgbClr val="4C1D95"/>
                 </a:solidFill>
-                <a:latin typeface="Noto Sans JP" pitchFamily="34" charset="0"/>
-                <a:ea typeface="Noto Sans JP" pitchFamily="34" charset="-122"/>
+                <a:latin typeface="游ゴシック Light" pitchFamily="34" charset="0"/>
+                <a:ea typeface="游ゴシック Light" pitchFamily="34" charset="-122"/>
                 <a:cs typeface="Noto Sans JP" pitchFamily="34" charset="-120"/>
               </a:rPr>
               <a:t>#PA45</a:t>
@@ -16239,8 +16242,8 @@
                 <a:solidFill>
                   <a:srgbClr val="5B21B6"/>
                 </a:solidFill>
-                <a:latin typeface="Noto Sans JP" pitchFamily="34" charset="0"/>
-                <a:ea typeface="Noto Sans JP" pitchFamily="34" charset="-122"/>
+                <a:latin typeface="游ゴシック Light" pitchFamily="34" charset="0"/>
+                <a:ea typeface="游ゴシック Light" pitchFamily="34" charset="-122"/>
                 <a:cs typeface="Noto Sans JP" pitchFamily="34" charset="-120"/>
               </a:rPr>
               <a:t> をつけて投稿しよう！</a:t>
@@ -16278,8 +16281,8 @@
                 <a:solidFill>
                   <a:srgbClr val="5B21B6"/>
                 </a:solidFill>
-                <a:latin typeface="Noto Sans JP" pitchFamily="34" charset="0"/>
-                <a:ea typeface="Noto Sans JP" pitchFamily="34" charset="-122"/>
+                <a:latin typeface="游ゴシック Light" pitchFamily="34" charset="0"/>
+                <a:ea typeface="游ゴシック Light" pitchFamily="34" charset="-122"/>
                 <a:cs typeface="Noto Sans JP" pitchFamily="34" charset="-120"/>
               </a:rPr>
               <a:t>「作ったフロー」「気づき」など何でもOK</a:t>
@@ -16317,8 +16320,8 @@
                 <a:solidFill>
                   <a:srgbClr val="5B21B6"/>
                 </a:solidFill>
-                <a:latin typeface="Noto Sans JP" pitchFamily="34" charset="0"/>
-                <a:ea typeface="Noto Sans JP" pitchFamily="34" charset="-122"/>
+                <a:latin typeface="游ゴシック Light" pitchFamily="34" charset="0"/>
+                <a:ea typeface="游ゴシック Light" pitchFamily="34" charset="-122"/>
                 <a:cs typeface="Noto Sans JP" pitchFamily="34" charset="-120"/>
               </a:rPr>
               <a:t>投稿は</a:t>
@@ -16328,8 +16331,8 @@
                 <a:solidFill>
                   <a:srgbClr val="5B21B6"/>
                 </a:solidFill>
-                <a:latin typeface="Noto Sans JP" pitchFamily="34" charset="0"/>
-                <a:ea typeface="Noto Sans JP" pitchFamily="34" charset="-122"/>
+                <a:latin typeface="游ゴシック Light" pitchFamily="34" charset="0"/>
+                <a:ea typeface="游ゴシック Light" pitchFamily="34" charset="-122"/>
                 <a:cs typeface="Noto Sans JP" pitchFamily="34" charset="-120"/>
               </a:rPr>
               <a:t>運営</a:t>
@@ -16339,8 +16342,8 @@
                 <a:solidFill>
                   <a:srgbClr val="5B21B6"/>
                 </a:solidFill>
-                <a:latin typeface="Noto Sans JP" pitchFamily="34" charset="0"/>
-                <a:ea typeface="Noto Sans JP" pitchFamily="34" charset="-122"/>
+                <a:latin typeface="游ゴシック Light" pitchFamily="34" charset="0"/>
+                <a:ea typeface="游ゴシック Light" pitchFamily="34" charset="-122"/>
                 <a:cs typeface="Noto Sans JP" pitchFamily="34" charset="-120"/>
               </a:rPr>
               <a:t>の励みになります</a:t>
@@ -16350,8 +16353,8 @@
                 <a:solidFill>
                   <a:srgbClr val="5B21B6"/>
                 </a:solidFill>
-                <a:latin typeface="Noto Sans JP" pitchFamily="34" charset="0"/>
-                <a:ea typeface="Noto Sans JP" pitchFamily="34" charset="-122"/>
+                <a:latin typeface="游ゴシック Light" pitchFamily="34" charset="0"/>
+                <a:ea typeface="游ゴシック Light" pitchFamily="34" charset="-122"/>
                 <a:cs typeface="Noto Sans JP" pitchFamily="34" charset="-120"/>
               </a:rPr>
               <a:t>！</a:t>
@@ -16502,8 +16505,8 @@
                 <a:solidFill>
                   <a:srgbClr val="064E3B"/>
                 </a:solidFill>
-                <a:latin typeface="Noto Sans JP" pitchFamily="34" charset="0"/>
-                <a:ea typeface="Noto Sans JP" pitchFamily="34" charset="-122"/>
+                <a:latin typeface="游ゴシック Light" pitchFamily="34" charset="0"/>
+                <a:ea typeface="游ゴシック Light" pitchFamily="34" charset="-122"/>
                 <a:cs typeface="Noto Sans JP" pitchFamily="34" charset="-120"/>
               </a:rPr>
               <a:t>初心者大歓迎の講座です</a:t>
@@ -16541,8 +16544,8 @@
                 <a:solidFill>
                   <a:srgbClr val="065F46"/>
                 </a:solidFill>
-                <a:latin typeface="Noto Sans JP" pitchFamily="34" charset="0"/>
-                <a:ea typeface="Noto Sans JP" pitchFamily="34" charset="-122"/>
+                <a:latin typeface="游ゴシック Light" pitchFamily="34" charset="0"/>
+                <a:ea typeface="游ゴシック Light" pitchFamily="34" charset="-122"/>
                 <a:cs typeface="Noto Sans JP" pitchFamily="34" charset="-120"/>
               </a:rPr>
               <a:t>難しい専門用語は使いません</a:t>
@@ -16580,8 +16583,8 @@
                 <a:solidFill>
                   <a:srgbClr val="065F46"/>
                 </a:solidFill>
-                <a:latin typeface="Noto Sans JP" pitchFamily="34" charset="0"/>
-                <a:ea typeface="Noto Sans JP" pitchFamily="34" charset="-122"/>
+                <a:latin typeface="游ゴシック Light" pitchFamily="34" charset="0"/>
+                <a:ea typeface="游ゴシック Light" pitchFamily="34" charset="-122"/>
                 <a:cs typeface="Noto Sans JP" pitchFamily="34" charset="-120"/>
               </a:rPr>
               <a:t>置いてけぼりにならないようゆっくり進行</a:t>
@@ -16619,8 +16622,8 @@
                 <a:solidFill>
                   <a:srgbClr val="064E3B"/>
                 </a:solidFill>
-                <a:latin typeface="Noto Sans JP" pitchFamily="34" charset="0"/>
-                <a:ea typeface="Noto Sans JP" pitchFamily="34" charset="-122"/>
+                <a:latin typeface="游ゴシック Light" pitchFamily="34" charset="0"/>
+                <a:ea typeface="游ゴシック Light" pitchFamily="34" charset="-122"/>
                 <a:cs typeface="Noto Sans JP" pitchFamily="34" charset="-120"/>
               </a:rPr>
               <a:t>安心</a:t>
@@ -16630,8 +16633,8 @@
                 <a:solidFill>
                   <a:srgbClr val="065F46"/>
                 </a:solidFill>
-                <a:latin typeface="Noto Sans JP" pitchFamily="34" charset="0"/>
-                <a:ea typeface="Noto Sans JP" pitchFamily="34" charset="-122"/>
+                <a:latin typeface="游ゴシック Light" pitchFamily="34" charset="0"/>
+                <a:ea typeface="游ゴシック Light" pitchFamily="34" charset="-122"/>
                 <a:cs typeface="Noto Sans JP" pitchFamily="34" charset="-120"/>
               </a:rPr>
               <a:t>してご参加ください</a:t>
@@ -16799,8 +16802,8 @@
                 <a:solidFill>
                   <a:srgbClr val="6B7280"/>
                 </a:solidFill>
-                <a:latin typeface="Noto Sans JP" pitchFamily="34" charset="0"/>
-                <a:ea typeface="Noto Sans JP" pitchFamily="34" charset="-122"/>
+                <a:latin typeface="游ゴシック Light" pitchFamily="34" charset="0"/>
+                <a:ea typeface="游ゴシック Light" pitchFamily="34" charset="-122"/>
                 <a:cs typeface="Noto Sans JP" pitchFamily="34" charset="-120"/>
               </a:rPr>
               <a:t>PA45 Online Course</a:t>
@@ -16838,8 +16841,8 @@
                 <a:solidFill>
                   <a:srgbClr val="1F2937"/>
                 </a:solidFill>
-                <a:latin typeface="Noto Sans JP" pitchFamily="34" charset="0"/>
-                <a:ea typeface="Noto Sans JP" pitchFamily="34" charset="-122"/>
+                <a:latin typeface="游ゴシック Light" pitchFamily="34" charset="0"/>
+                <a:ea typeface="游ゴシック Light" pitchFamily="34" charset="-122"/>
                 <a:cs typeface="Noto Sans JP" pitchFamily="34" charset="-120"/>
               </a:rPr>
               <a:t>ご参加にあたっての</a:t>
@@ -16849,8 +16852,8 @@
                 <a:solidFill>
                   <a:srgbClr val="6B7280"/>
                 </a:solidFill>
-                <a:latin typeface="Noto Sans JP" pitchFamily="34" charset="0"/>
-                <a:ea typeface="Noto Sans JP" pitchFamily="34" charset="-122"/>
+                <a:latin typeface="游ゴシック Light" pitchFamily="34" charset="0"/>
+                <a:ea typeface="游ゴシック Light" pitchFamily="34" charset="-122"/>
                 <a:cs typeface="Noto Sans JP" pitchFamily="34" charset="-120"/>
               </a:rPr>
               <a:t>お願い</a:t>
@@ -16860,8 +16863,8 @@
                 <a:solidFill>
                   <a:srgbClr val="6B7280"/>
                 </a:solidFill>
-                <a:latin typeface="Noto Sans JP" pitchFamily="34" charset="0"/>
-                <a:ea typeface="Noto Sans JP" pitchFamily="34" charset="-122"/>
+                <a:latin typeface="游ゴシック Light" pitchFamily="34" charset="0"/>
+                <a:ea typeface="游ゴシック Light" pitchFamily="34" charset="-122"/>
                 <a:cs typeface="Noto Sans JP" pitchFamily="34" charset="-120"/>
               </a:rPr>
               <a:t>　（ルール）</a:t>
@@ -16933,8 +16936,8 @@
                 <a:solidFill>
                   <a:srgbClr val="9CA3AF"/>
                 </a:solidFill>
-                <a:latin typeface="ui-monospace" pitchFamily="34" charset="0"/>
-                <a:ea typeface="ui-monospace" pitchFamily="34" charset="-122"/>
+                <a:latin typeface="游ゴシック Light" pitchFamily="34" charset="0"/>
+                <a:ea typeface="游ゴシック Light" pitchFamily="34" charset="-122"/>
                 <a:cs typeface="ui-monospace" pitchFamily="34" charset="-120"/>
               </a:rPr>
               <a:t>Guidelines</a:t>
@@ -17033,8 +17036,8 @@
                 <a:solidFill>
                   <a:srgbClr val="9CA3AF"/>
                 </a:solidFill>
-                <a:latin typeface="Noto Sans JP" pitchFamily="34" charset="0"/>
-                <a:ea typeface="Noto Sans JP" pitchFamily="34" charset="-122"/>
+                <a:latin typeface="游ゴシック Light" pitchFamily="34" charset="0"/>
+                <a:ea typeface="游ゴシック Light" pitchFamily="34" charset="-122"/>
                 <a:cs typeface="Noto Sans JP" pitchFamily="34" charset="-120"/>
               </a:rPr>
               <a:t>Power Automate for Beginners</a:t>
@@ -17072,8 +17075,8 @@
                 <a:solidFill>
                   <a:srgbClr val="9CA3AF"/>
                 </a:solidFill>
-                <a:latin typeface="Noto Sans JP" pitchFamily="34" charset="0"/>
-                <a:ea typeface="Noto Sans JP" pitchFamily="34" charset="-122"/>
+                <a:latin typeface="游ゴシック Light" pitchFamily="34" charset="0"/>
+                <a:ea typeface="游ゴシック Light" pitchFamily="34" charset="-122"/>
                 <a:cs typeface="Noto Sans JP" pitchFamily="34" charset="-120"/>
               </a:rPr>
               <a:t>Copyright © PA45</a:t>
@@ -17586,8 +17589,8 @@
                 <a:solidFill>
                   <a:srgbClr val="1F2937"/>
                 </a:solidFill>
-                <a:latin typeface="BIZ UDGothic" pitchFamily="34" charset="0"/>
-                <a:ea typeface="BIZ UDGothic" pitchFamily="34" charset="-122"/>
+                <a:latin typeface="游ゴシック Light" pitchFamily="34" charset="0"/>
+                <a:ea typeface="游ゴシック Light" pitchFamily="34" charset="-122"/>
                 <a:cs typeface="BIZ UDGothic" pitchFamily="34" charset="-120"/>
               </a:rPr>
               <a:t>Power Automate 45 </a:t>
@@ -17597,8 +17600,8 @@
                 <a:solidFill>
                   <a:srgbClr val="2563EB"/>
                 </a:solidFill>
-                <a:latin typeface="BIZ UDGothic" pitchFamily="34" charset="0"/>
-                <a:ea typeface="BIZ UDGothic" pitchFamily="34" charset="-122"/>
+                <a:latin typeface="游ゴシック Light" pitchFamily="34" charset="0"/>
+                <a:ea typeface="游ゴシック Light" pitchFamily="34" charset="-122"/>
                 <a:cs typeface="BIZ UDGothic" pitchFamily="34" charset="-120"/>
               </a:rPr>
               <a:t>(PA45)</a:t>
@@ -17636,8 +17639,8 @@
                 <a:solidFill>
                   <a:srgbClr val="4B5563"/>
                 </a:solidFill>
-                <a:latin typeface="BIZ UDGothic" pitchFamily="34" charset="0"/>
-                <a:ea typeface="BIZ UDGothic" pitchFamily="34" charset="-122"/>
+                <a:latin typeface="游ゴシック Light" pitchFamily="34" charset="0"/>
+                <a:ea typeface="游ゴシック Light" pitchFamily="34" charset="-122"/>
                 <a:cs typeface="BIZ UDGothic" pitchFamily="34" charset="-120"/>
               </a:rPr>
               <a:t>今日も一緒に “1粒だけ” 深掘りします！</a:t>
@@ -17767,8 +17770,8 @@
                 <a:solidFill>
                   <a:srgbClr val="FFFFFF"/>
                 </a:solidFill>
-                <a:latin typeface="BIZ UDGothic" pitchFamily="34" charset="0"/>
-                <a:ea typeface="BIZ UDGothic" pitchFamily="34" charset="-122"/>
+                <a:latin typeface="游ゴシック Light" pitchFamily="34" charset="0"/>
+                <a:ea typeface="游ゴシック Light" pitchFamily="34" charset="-122"/>
                 <a:cs typeface="BIZ UDGothic" pitchFamily="34" charset="-120"/>
               </a:rPr>
               <a:t>Haru</a:t>
@@ -17778,8 +17781,8 @@
                 <a:solidFill>
                   <a:srgbClr val="FFFFFF"/>
                 </a:solidFill>
-                <a:latin typeface="BIZ UDGothic" pitchFamily="34" charset="0"/>
-                <a:ea typeface="BIZ UDGothic" pitchFamily="34" charset="-122"/>
+                <a:latin typeface="游ゴシック Light" pitchFamily="34" charset="0"/>
+                <a:ea typeface="游ゴシック Light" pitchFamily="34" charset="-122"/>
                 <a:cs typeface="BIZ UDGothic" pitchFamily="34" charset="-120"/>
               </a:rPr>
               <a:t> </a:t>
@@ -17817,8 +17820,8 @@
                 <a:solidFill>
                   <a:srgbClr val="374151"/>
                 </a:solidFill>
-                <a:latin typeface="BIZ UDGothic" pitchFamily="34" charset="0"/>
-                <a:ea typeface="BIZ UDGothic" pitchFamily="34" charset="-122"/>
+                <a:latin typeface="游ゴシック Light" pitchFamily="34" charset="0"/>
+                <a:ea typeface="游ゴシック Light" pitchFamily="34" charset="-122"/>
                 <a:cs typeface="BIZ UDGothic" pitchFamily="34" charset="-120"/>
               </a:rPr>
               <a:t>Power Platform / DX 推進</a:t>
@@ -17907,8 +17910,8 @@
                 <a:solidFill>
                   <a:srgbClr val="333333"/>
                 </a:solidFill>
-                <a:latin typeface="BIZ UDGothic" pitchFamily="34" charset="0"/>
-                <a:ea typeface="BIZ UDGothic" pitchFamily="34" charset="-122"/>
+                <a:latin typeface="游ゴシック Light" pitchFamily="34" charset="0"/>
+                <a:ea typeface="游ゴシック Light" pitchFamily="34" charset="-122"/>
                 <a:cs typeface="BIZ UDGothic" pitchFamily="34" charset="-120"/>
               </a:rPr>
               <a:t>社内外のコミュニティ運営</a:t>
@@ -17969,8 +17972,8 @@
                 <a:solidFill>
                   <a:srgbClr val="333333"/>
                 </a:solidFill>
-                <a:latin typeface="BIZ UDGothic" pitchFamily="34" charset="0"/>
-                <a:ea typeface="BIZ UDGothic" pitchFamily="34" charset="-122"/>
+                <a:latin typeface="游ゴシック Light" pitchFamily="34" charset="0"/>
+                <a:ea typeface="游ゴシック Light" pitchFamily="34" charset="-122"/>
                 <a:cs typeface="BIZ UDGothic" pitchFamily="34" charset="-120"/>
               </a:rPr>
               <a:t>・社内</a:t>
@@ -17980,8 +17983,8 @@
                 <a:solidFill>
                   <a:srgbClr val="333333"/>
                 </a:solidFill>
-                <a:latin typeface="BIZ UDGothic" pitchFamily="34" charset="0"/>
-                <a:ea typeface="BIZ UDGothic" pitchFamily="34" charset="-122"/>
+                <a:latin typeface="游ゴシック Light" pitchFamily="34" charset="0"/>
+                <a:ea typeface="游ゴシック Light" pitchFamily="34" charset="-122"/>
                 <a:cs typeface="BIZ UDGothic" pitchFamily="34" charset="-120"/>
               </a:rPr>
               <a:t>PowerPlatform</a:t>
@@ -17991,8 +17994,8 @@
                 <a:solidFill>
                   <a:srgbClr val="333333"/>
                 </a:solidFill>
-                <a:latin typeface="BIZ UDGothic" pitchFamily="34" charset="0"/>
-                <a:ea typeface="BIZ UDGothic" pitchFamily="34" charset="-122"/>
+                <a:latin typeface="游ゴシック Light" pitchFamily="34" charset="0"/>
+                <a:ea typeface="游ゴシック Light" pitchFamily="34" charset="-122"/>
                 <a:cs typeface="BIZ UDGothic" pitchFamily="34" charset="-120"/>
               </a:rPr>
               <a:t>コミュニティ</a:t>
@@ -18030,8 +18033,8 @@
                 <a:solidFill>
                   <a:srgbClr val="333333"/>
                 </a:solidFill>
-                <a:latin typeface="BIZ UDGothic" pitchFamily="34" charset="0"/>
-                <a:ea typeface="BIZ UDGothic" pitchFamily="34" charset="-122"/>
+                <a:latin typeface="游ゴシック Light" pitchFamily="34" charset="0"/>
+                <a:ea typeface="游ゴシック Light" pitchFamily="34" charset="-122"/>
                 <a:cs typeface="BIZ UDGothic" pitchFamily="34" charset="-120"/>
               </a:rPr>
               <a:t>・広島コミュニティ </a:t>
@@ -18041,8 +18044,8 @@
                 <a:solidFill>
                   <a:srgbClr val="333333"/>
                 </a:solidFill>
-                <a:latin typeface="BIZ UDGothic" pitchFamily="34" charset="0"/>
-                <a:ea typeface="BIZ UDGothic" pitchFamily="34" charset="-122"/>
+                <a:latin typeface="游ゴシック Light" pitchFamily="34" charset="0"/>
+                <a:ea typeface="游ゴシック Light" pitchFamily="34" charset="-122"/>
                 <a:cs typeface="BIZ UDGothic" pitchFamily="34" charset="-120"/>
               </a:rPr>
               <a:t>PLUG </a:t>
@@ -18052,8 +18055,8 @@
                 <a:solidFill>
                   <a:srgbClr val="333333"/>
                 </a:solidFill>
-                <a:latin typeface="BIZ UDGothic" pitchFamily="34" charset="0"/>
-                <a:ea typeface="BIZ UDGothic" pitchFamily="34" charset="-122"/>
+                <a:latin typeface="游ゴシック Light" pitchFamily="34" charset="0"/>
+                <a:ea typeface="游ゴシック Light" pitchFamily="34" charset="-122"/>
                 <a:cs typeface="BIZ UDGothic" pitchFamily="34" charset="-120"/>
               </a:rPr>
               <a:t>運営</a:t>
@@ -18135,8 +18138,8 @@
                 <a:solidFill>
                   <a:srgbClr val="1F2937"/>
                 </a:solidFill>
-                <a:latin typeface="BIZ UDGothic" pitchFamily="34" charset="0"/>
-                <a:ea typeface="BIZ UDGothic" pitchFamily="34" charset="-122"/>
+                <a:latin typeface="游ゴシック Light" pitchFamily="34" charset="0"/>
+                <a:ea typeface="游ゴシック Light" pitchFamily="34" charset="-122"/>
                 <a:cs typeface="BIZ UDGothic" pitchFamily="34" charset="-120"/>
               </a:rPr>
               <a:t>Power </a:t>
@@ -18146,8 +18149,8 @@
                 <a:solidFill>
                   <a:srgbClr val="1F2937"/>
                 </a:solidFill>
-                <a:latin typeface="BIZ UDGothic" pitchFamily="34" charset="0"/>
-                <a:ea typeface="BIZ UDGothic" pitchFamily="34" charset="-122"/>
+                <a:latin typeface="游ゴシック Light" pitchFamily="34" charset="0"/>
+                <a:ea typeface="游ゴシック Light" pitchFamily="34" charset="-122"/>
                 <a:cs typeface="BIZ UDGothic" pitchFamily="34" charset="-120"/>
               </a:rPr>
               <a:t>Automate 支援が専門</a:t>
@@ -18208,8 +18211,8 @@
                 <a:solidFill>
                   <a:srgbClr val="1E40AF"/>
                 </a:solidFill>
-                <a:latin typeface="BIZ UDGothic" pitchFamily="34" charset="0"/>
-                <a:ea typeface="BIZ UDGothic" pitchFamily="34" charset="-122"/>
+                <a:latin typeface="游ゴシック Light" pitchFamily="34" charset="0"/>
+                <a:ea typeface="游ゴシック Light" pitchFamily="34" charset="-122"/>
                 <a:cs typeface="BIZ UDGothic" pitchFamily="34" charset="-120"/>
               </a:rPr>
               <a:t> 主な活動・実績 </a:t>
@@ -18324,8 +18327,8 @@
                 <a:solidFill>
                   <a:srgbClr val="1F2937"/>
                 </a:solidFill>
-                <a:latin typeface="BIZ UDGothic" pitchFamily="34" charset="0"/>
-                <a:ea typeface="BIZ UDGothic" pitchFamily="34" charset="-122"/>
+                <a:latin typeface="游ゴシック Light" pitchFamily="34" charset="0"/>
+                <a:ea typeface="游ゴシック Light" pitchFamily="34" charset="-122"/>
                 <a:cs typeface="BIZ UDGothic" pitchFamily="34" charset="-120"/>
               </a:rPr>
               <a:t>社内講座の実施</a:t>
@@ -18386,8 +18389,8 @@
                 <a:solidFill>
                   <a:srgbClr val="4B5563"/>
                 </a:solidFill>
-                <a:latin typeface="BIZ UDGothic" pitchFamily="34" charset="0"/>
-                <a:ea typeface="BIZ UDGothic" pitchFamily="34" charset="-122"/>
+                <a:latin typeface="游ゴシック Light" pitchFamily="34" charset="0"/>
+                <a:ea typeface="游ゴシック Light" pitchFamily="34" charset="-122"/>
                 <a:cs typeface="BIZ UDGothic" pitchFamily="34" charset="-120"/>
               </a:rPr>
               <a:t>PA</a:t>
@@ -18397,8 +18400,8 @@
                 <a:solidFill>
                   <a:srgbClr val="4B5563"/>
                 </a:solidFill>
-                <a:latin typeface="BIZ UDGothic" pitchFamily="34" charset="0"/>
-                <a:ea typeface="BIZ UDGothic" pitchFamily="34" charset="-122"/>
+                <a:latin typeface="游ゴシック Light" pitchFamily="34" charset="0"/>
+                <a:ea typeface="游ゴシック Light" pitchFamily="34" charset="-122"/>
                 <a:cs typeface="BIZ UDGothic" pitchFamily="34" charset="-120"/>
               </a:rPr>
               <a:t>／Copilot</a:t>
@@ -18408,8 +18411,8 @@
                 <a:solidFill>
                   <a:srgbClr val="4B5563"/>
                 </a:solidFill>
-                <a:latin typeface="BIZ UDGothic" pitchFamily="34" charset="0"/>
-                <a:ea typeface="BIZ UDGothic" pitchFamily="34" charset="-122"/>
+                <a:latin typeface="游ゴシック Light" pitchFamily="34" charset="0"/>
+                <a:ea typeface="游ゴシック Light" pitchFamily="34" charset="-122"/>
                 <a:cs typeface="BIZ UDGothic" pitchFamily="34" charset="-120"/>
               </a:rPr>
               <a:t>　ハンズオン講座</a:t>
@@ -18419,8 +18422,8 @@
                 <a:solidFill>
                   <a:srgbClr val="4B5563"/>
                 </a:solidFill>
-                <a:latin typeface="BIZ UDGothic" pitchFamily="34" charset="0"/>
-                <a:ea typeface="BIZ UDGothic" pitchFamily="34" charset="-122"/>
+                <a:latin typeface="游ゴシック Light" pitchFamily="34" charset="0"/>
+                <a:ea typeface="游ゴシック Light" pitchFamily="34" charset="-122"/>
                 <a:cs typeface="BIZ UDGothic" pitchFamily="34" charset="-120"/>
               </a:rPr>
               <a:t>などを開催し</a:t>
@@ -18430,8 +18433,8 @@
                 <a:solidFill>
                   <a:srgbClr val="4B5563"/>
                 </a:solidFill>
-                <a:latin typeface="BIZ UDGothic" pitchFamily="34" charset="0"/>
-                <a:ea typeface="BIZ UDGothic" pitchFamily="34" charset="-122"/>
+                <a:latin typeface="游ゴシック Light" pitchFamily="34" charset="0"/>
+                <a:ea typeface="游ゴシック Light" pitchFamily="34" charset="-122"/>
                 <a:cs typeface="BIZ UDGothic" pitchFamily="34" charset="-120"/>
               </a:rPr>
               <a:t>、社内の</a:t>
@@ -18441,8 +18444,8 @@
                 <a:solidFill>
                   <a:srgbClr val="4B5563"/>
                 </a:solidFill>
-                <a:latin typeface="BIZ UDGothic" pitchFamily="34" charset="0"/>
-                <a:ea typeface="BIZ UDGothic" pitchFamily="34" charset="-122"/>
+                <a:latin typeface="游ゴシック Light" pitchFamily="34" charset="0"/>
+                <a:ea typeface="游ゴシック Light" pitchFamily="34" charset="-122"/>
                 <a:cs typeface="BIZ UDGothic" pitchFamily="34" charset="-120"/>
               </a:rPr>
               <a:t>DXを</a:t>
@@ -18452,8 +18455,8 @@
                 <a:solidFill>
                   <a:srgbClr val="4B5563"/>
                 </a:solidFill>
-                <a:latin typeface="BIZ UDGothic" pitchFamily="34" charset="0"/>
-                <a:ea typeface="BIZ UDGothic" pitchFamily="34" charset="-122"/>
+                <a:latin typeface="游ゴシック Light" pitchFamily="34" charset="0"/>
+                <a:ea typeface="游ゴシック Light" pitchFamily="34" charset="-122"/>
                 <a:cs typeface="BIZ UDGothic" pitchFamily="34" charset="-120"/>
               </a:rPr>
               <a:t>推進</a:t>
@@ -18568,8 +18571,8 @@
                 <a:solidFill>
                   <a:srgbClr val="1F2937"/>
                 </a:solidFill>
-                <a:latin typeface="BIZ UDGothic" pitchFamily="34" charset="0"/>
-                <a:ea typeface="BIZ UDGothic" pitchFamily="34" charset="-122"/>
+                <a:latin typeface="游ゴシック Light" pitchFamily="34" charset="0"/>
+                <a:ea typeface="游ゴシック Light" pitchFamily="34" charset="-122"/>
                 <a:cs typeface="BIZ UDGothic" pitchFamily="34" charset="-120"/>
               </a:rPr>
               <a:t>外部コミュニティ登壇</a:t>
@@ -18630,8 +18633,8 @@
                 <a:solidFill>
                   <a:srgbClr val="4B5563"/>
                 </a:solidFill>
-                <a:latin typeface="BIZ UDGothic" pitchFamily="34" charset="0"/>
-                <a:ea typeface="BIZ UDGothic" pitchFamily="34" charset="-122"/>
+                <a:latin typeface="游ゴシック Light" pitchFamily="34" charset="0"/>
+                <a:ea typeface="游ゴシック Light" pitchFamily="34" charset="-122"/>
                 <a:cs typeface="BIZ UDGothic" pitchFamily="34" charset="-120"/>
               </a:rPr>
               <a:t>広島コミュニティ「</a:t>
@@ -18641,8 +18644,8 @@
                 <a:solidFill>
                   <a:srgbClr val="4B5563"/>
                 </a:solidFill>
-                <a:latin typeface="BIZ UDGothic" pitchFamily="34" charset="0"/>
-                <a:ea typeface="BIZ UDGothic" pitchFamily="34" charset="-122"/>
+                <a:latin typeface="游ゴシック Light" pitchFamily="34" charset="0"/>
+                <a:ea typeface="游ゴシック Light" pitchFamily="34" charset="-122"/>
                 <a:cs typeface="BIZ UDGothic" pitchFamily="34" charset="-120"/>
               </a:rPr>
               <a:t>PLUG」</a:t>
@@ -18652,8 +18655,8 @@
                 <a:solidFill>
                   <a:srgbClr val="4B5563"/>
                 </a:solidFill>
-                <a:latin typeface="BIZ UDGothic" pitchFamily="34" charset="0"/>
-                <a:ea typeface="BIZ UDGothic" pitchFamily="34" charset="-122"/>
+                <a:latin typeface="游ゴシック Light" pitchFamily="34" charset="0"/>
+                <a:ea typeface="游ゴシック Light" pitchFamily="34" charset="-122"/>
                 <a:cs typeface="BIZ UDGothic" pitchFamily="34" charset="-120"/>
               </a:rPr>
               <a:t>運営。外部コミュニティ登壇</a:t>
@@ -18768,8 +18771,8 @@
                 <a:solidFill>
                   <a:srgbClr val="1F2937"/>
                 </a:solidFill>
-                <a:latin typeface="BIZ UDGothic" pitchFamily="34" charset="0"/>
-                <a:ea typeface="BIZ UDGothic" pitchFamily="34" charset="-122"/>
+                <a:latin typeface="游ゴシック Light" pitchFamily="34" charset="0"/>
+                <a:ea typeface="游ゴシック Light" pitchFamily="34" charset="-122"/>
                 <a:cs typeface="BIZ UDGothic" pitchFamily="34" charset="-120"/>
               </a:rPr>
               <a:t>X (Twitter) での情報発信</a:t>
@@ -18830,8 +18833,8 @@
                 <a:solidFill>
                   <a:srgbClr val="4B5563"/>
                 </a:solidFill>
-                <a:latin typeface="BIZ UDGothic" pitchFamily="34" charset="0"/>
-                <a:ea typeface="BIZ UDGothic" pitchFamily="34" charset="-122"/>
+                <a:latin typeface="游ゴシック Light" pitchFamily="34" charset="0"/>
+                <a:ea typeface="游ゴシック Light" pitchFamily="34" charset="-122"/>
                 <a:cs typeface="BIZ UDGothic" pitchFamily="34" charset="-120"/>
               </a:rPr>
               <a:t>初心者向けPAチップスを</a:t>
@@ -18841,8 +18844,8 @@
                 <a:solidFill>
                   <a:srgbClr val="0078D4"/>
                 </a:solidFill>
-                <a:latin typeface="BIZ UDGothic" pitchFamily="34" charset="0"/>
-                <a:ea typeface="BIZ UDGothic" pitchFamily="34" charset="-122"/>
+                <a:latin typeface="游ゴシック Light" pitchFamily="34" charset="0"/>
+                <a:ea typeface="游ゴシック Light" pitchFamily="34" charset="-122"/>
                 <a:cs typeface="BIZ UDGothic" pitchFamily="34" charset="-120"/>
               </a:rPr>
               <a:t>2日に1回</a:t>
@@ -18852,8 +18855,8 @@
                 <a:solidFill>
                   <a:srgbClr val="4B5563"/>
                 </a:solidFill>
-                <a:latin typeface="BIZ UDGothic" pitchFamily="34" charset="0"/>
-                <a:ea typeface="BIZ UDGothic" pitchFamily="34" charset="-122"/>
+                <a:latin typeface="游ゴシック Light" pitchFamily="34" charset="0"/>
+                <a:ea typeface="游ゴシック Light" pitchFamily="34" charset="-122"/>
                 <a:cs typeface="BIZ UDGothic" pitchFamily="34" charset="-120"/>
               </a:rPr>
               <a:t>継続発信中！</a:t>
@@ -18968,8 +18971,8 @@
                 <a:solidFill>
                   <a:srgbClr val="1F2937"/>
                 </a:solidFill>
-                <a:latin typeface="BIZ UDGothic" pitchFamily="34" charset="0"/>
-                <a:ea typeface="BIZ UDGothic" pitchFamily="34" charset="-122"/>
+                <a:latin typeface="游ゴシック Light" pitchFamily="34" charset="0"/>
+                <a:ea typeface="游ゴシック Light" pitchFamily="34" charset="-122"/>
                 <a:cs typeface="BIZ UDGothic" pitchFamily="34" charset="-120"/>
               </a:rPr>
               <a:t>Power Automate 45 (PA45)</a:t>
@@ -19030,8 +19033,8 @@
                 <a:solidFill>
                   <a:srgbClr val="4B5563"/>
                 </a:solidFill>
-                <a:latin typeface="BIZ UDGothic" pitchFamily="34" charset="0"/>
-                <a:ea typeface="BIZ UDGothic" pitchFamily="34" charset="-122"/>
+                <a:latin typeface="游ゴシック Light" pitchFamily="34" charset="0"/>
+                <a:ea typeface="游ゴシック Light" pitchFamily="34" charset="-122"/>
                 <a:cs typeface="BIZ UDGothic" pitchFamily="34" charset="-120"/>
               </a:rPr>
               <a:t>45分の</a:t>
@@ -19041,8 +19044,8 @@
                 <a:solidFill>
                   <a:srgbClr val="0078D4"/>
                 </a:solidFill>
-                <a:latin typeface="BIZ UDGothic" pitchFamily="34" charset="0"/>
-                <a:ea typeface="BIZ UDGothic" pitchFamily="34" charset="-122"/>
+                <a:latin typeface="游ゴシック Light" pitchFamily="34" charset="0"/>
+                <a:ea typeface="游ゴシック Light" pitchFamily="34" charset="-122"/>
                 <a:cs typeface="BIZ UDGothic" pitchFamily="34" charset="-120"/>
               </a:rPr>
               <a:t>“1粒ハンズオン”</a:t>
@@ -19052,8 +19055,8 @@
                 <a:solidFill>
                   <a:srgbClr val="4B5563"/>
                 </a:solidFill>
-                <a:latin typeface="BIZ UDGothic" pitchFamily="34" charset="0"/>
-                <a:ea typeface="BIZ UDGothic" pitchFamily="34" charset="-122"/>
+                <a:latin typeface="游ゴシック Light" pitchFamily="34" charset="0"/>
+                <a:ea typeface="游ゴシック Light" pitchFamily="34" charset="-122"/>
                 <a:cs typeface="BIZ UDGothic" pitchFamily="34" charset="-120"/>
               </a:rPr>
               <a:t>を毎週開催・運営</a:t>
@@ -19137,8 +19140,8 @@
                 <a:solidFill>
                   <a:srgbClr val="FFFFFF"/>
                 </a:solidFill>
-                <a:latin typeface="BIZ UDGothic" pitchFamily="34" charset="0"/>
-                <a:ea typeface="BIZ UDGothic" pitchFamily="34" charset="-122"/>
+                <a:latin typeface="游ゴシック Light" pitchFamily="34" charset="0"/>
+                <a:ea typeface="游ゴシック Light" pitchFamily="34" charset="-122"/>
                 <a:cs typeface="BIZ UDGothic" pitchFamily="34" charset="-120"/>
               </a:rPr>
               <a:t>今日は「できた！」を一緒に作っていきましょう😊</a:t>
@@ -19463,8 +19466,8 @@
                 <a:solidFill>
                   <a:srgbClr val="6B7280"/>
                 </a:solidFill>
-                <a:latin typeface="Noto Sans JP" pitchFamily="34" charset="0"/>
-                <a:ea typeface="Noto Sans JP" pitchFamily="34" charset="-122"/>
+                <a:latin typeface="游ゴシック Light" pitchFamily="34" charset="0"/>
+                <a:ea typeface="游ゴシック Light" pitchFamily="34" charset="-122"/>
                 <a:cs typeface="Noto Sans JP" pitchFamily="34" charset="-120"/>
               </a:rPr>
               <a:t>PA45｜第11回</a:t>
@@ -19502,8 +19505,8 @@
                 <a:solidFill>
                   <a:srgbClr val="1F2937"/>
                 </a:solidFill>
-                <a:latin typeface="Noto Sans JP" pitchFamily="34" charset="0"/>
-                <a:ea typeface="Noto Sans JP" pitchFamily="34" charset="-122"/>
+                <a:latin typeface="游ゴシック Light" pitchFamily="34" charset="0"/>
+                <a:ea typeface="游ゴシック Light" pitchFamily="34" charset="-122"/>
                 <a:cs typeface="Noto Sans JP" pitchFamily="34" charset="-120"/>
               </a:rPr>
               <a:t>今日やること（3つだけ）</a:t>
@@ -19575,8 +19578,8 @@
                 <a:solidFill>
                   <a:srgbClr val="9CA3AF"/>
                 </a:solidFill>
-                <a:latin typeface="ui-monospace" pitchFamily="34" charset="0"/>
-                <a:ea typeface="ui-monospace" pitchFamily="34" charset="-122"/>
+                <a:latin typeface="游ゴシック Light" pitchFamily="34" charset="0"/>
+                <a:ea typeface="游ゴシック Light" pitchFamily="34" charset="-122"/>
                 <a:cs typeface="ui-monospace" pitchFamily="34" charset="-120"/>
               </a:rPr>
               <a:t>Agenda</a:t>
@@ -19946,8 +19949,8 @@
                 <a:solidFill>
                   <a:srgbClr val="0078D4"/>
                 </a:solidFill>
-                <a:latin typeface="Noto Sans JP" pitchFamily="34" charset="0"/>
-                <a:ea typeface="Noto Sans JP" pitchFamily="34" charset="-122"/>
+                <a:latin typeface="游ゴシック Light" pitchFamily="34" charset="0"/>
+                <a:ea typeface="游ゴシック Light" pitchFamily="34" charset="-122"/>
                 <a:cs typeface="Noto Sans JP" pitchFamily="34" charset="-120"/>
               </a:rPr>
               <a:t>1</a:t>
@@ -19987,8 +19990,8 @@
                 <a:solidFill>
                   <a:srgbClr val="1F2937"/>
                 </a:solidFill>
-                <a:latin typeface="Noto Sans JP" pitchFamily="34" charset="0"/>
-                <a:ea typeface="Noto Sans JP" pitchFamily="34" charset="-122"/>
+                <a:latin typeface="游ゴシック Light" pitchFamily="34" charset="0"/>
+                <a:ea typeface="游ゴシック Light" pitchFamily="34" charset="-122"/>
                 <a:cs typeface="Noto Sans JP" pitchFamily="34" charset="-120"/>
               </a:rPr>
               <a:t>メール受信でフローを作る</a:t>
@@ -20026,8 +20029,8 @@
                 <a:solidFill>
                   <a:srgbClr val="6B7280"/>
                 </a:solidFill>
-                <a:latin typeface="Noto Sans JP" pitchFamily="34" charset="0"/>
-                <a:ea typeface="Noto Sans JP" pitchFamily="34" charset="-122"/>
+                <a:latin typeface="游ゴシック Light" pitchFamily="34" charset="0"/>
+                <a:ea typeface="游ゴシック Light" pitchFamily="34" charset="-122"/>
                 <a:cs typeface="Noto Sans JP" pitchFamily="34" charset="-120"/>
               </a:rPr>
               <a:t>「新しいメールが届いたとき」をトリガーに、</a:t>
@@ -20039,7 +20042,8 @@
                 <a:solidFill>
                   <a:srgbClr val="6B7280"/>
                 </a:solidFill>
-                <a:latin typeface="Noto Sans JP"/>
+                <a:latin typeface="游ゴシック Light"/>
+                <a:ea typeface="游ゴシック Light"/>
               </a:rPr>
               <a:t>届いたメールで動くフローを作ります。</a:t>
             </a:r>
@@ -20121,8 +20125,8 @@
                 <a:solidFill>
                   <a:srgbClr val="0078D4"/>
                 </a:solidFill>
-                <a:latin typeface="Noto Sans JP" pitchFamily="34" charset="0"/>
-                <a:ea typeface="Noto Sans JP" pitchFamily="34" charset="-122"/>
+                <a:latin typeface="游ゴシック Light" pitchFamily="34" charset="0"/>
+                <a:ea typeface="游ゴシック Light" pitchFamily="34" charset="-122"/>
                 <a:cs typeface="Noto Sans JP" pitchFamily="34" charset="-120"/>
               </a:rPr>
               <a:t>2</a:t>
@@ -20162,8 +20166,8 @@
                 <a:solidFill>
                   <a:srgbClr val="1F2937"/>
                 </a:solidFill>
-                <a:latin typeface="Noto Sans JP" pitchFamily="34" charset="0"/>
-                <a:ea typeface="Noto Sans JP" pitchFamily="34" charset="-122"/>
+                <a:latin typeface="游ゴシック Light" pitchFamily="34" charset="0"/>
+                <a:ea typeface="游ゴシック Light" pitchFamily="34" charset="-122"/>
                 <a:cs typeface="Noto Sans JP" pitchFamily="34" charset="-120"/>
               </a:rPr>
               <a:t>重要度で条件分岐させる</a:t>
@@ -20201,8 +20205,8 @@
                 <a:solidFill>
                   <a:srgbClr val="6B7280"/>
                 </a:solidFill>
-                <a:latin typeface="Noto Sans JP" pitchFamily="34" charset="0"/>
-                <a:ea typeface="Noto Sans JP" pitchFamily="34" charset="-122"/>
+                <a:latin typeface="游ゴシック Light" pitchFamily="34" charset="0"/>
+                <a:ea typeface="游ゴシック Light" pitchFamily="34" charset="-122"/>
                 <a:cs typeface="Noto Sans JP" pitchFamily="34" charset="-120"/>
               </a:rPr>
               <a:t>「条件」アクションで、メールの重要度が</a:t>
@@ -20214,7 +20218,8 @@
                 <a:solidFill>
                   <a:srgbClr val="6B7280"/>
                 </a:solidFill>
-                <a:latin typeface="Noto Sans JP"/>
+                <a:latin typeface="游ゴシック Light"/>
+                <a:ea typeface="游ゴシック Light"/>
               </a:rPr>
               <a:t>「高」かどうかで処理を分けます。</a:t>
             </a:r>
@@ -20296,8 +20301,8 @@
                 <a:solidFill>
                   <a:srgbClr val="0078D4"/>
                 </a:solidFill>
-                <a:latin typeface="Noto Sans JP" pitchFamily="34" charset="0"/>
-                <a:ea typeface="Noto Sans JP" pitchFamily="34" charset="-122"/>
+                <a:latin typeface="游ゴシック Light" pitchFamily="34" charset="0"/>
+                <a:ea typeface="游ゴシック Light" pitchFamily="34" charset="-122"/>
                 <a:cs typeface="Noto Sans JP" pitchFamily="34" charset="-120"/>
               </a:rPr>
               <a:t>3</a:t>
@@ -20337,8 +20342,8 @@
                 <a:solidFill>
                   <a:srgbClr val="1F2937"/>
                 </a:solidFill>
-                <a:latin typeface="Noto Sans JP" pitchFamily="34" charset="0"/>
-                <a:ea typeface="Noto Sans JP" pitchFamily="34" charset="-122"/>
+                <a:latin typeface="游ゴシック Light" pitchFamily="34" charset="0"/>
+                <a:ea typeface="游ゴシック Light" pitchFamily="34" charset="-122"/>
                 <a:cs typeface="Noto Sans JP" pitchFamily="34" charset="-120"/>
               </a:rPr>
               <a:t>実行履歴の出力を読む</a:t>
@@ -20376,8 +20381,8 @@
                 <a:solidFill>
                   <a:srgbClr val="6B7280"/>
                 </a:solidFill>
-                <a:latin typeface="Noto Sans JP" pitchFamily="34" charset="0"/>
-                <a:ea typeface="Noto Sans JP" pitchFamily="34" charset="-122"/>
+                <a:latin typeface="游ゴシック Light" pitchFamily="34" charset="0"/>
+                <a:ea typeface="游ゴシック Light" pitchFamily="34" charset="-122"/>
                 <a:cs typeface="Noto Sans JP" pitchFamily="34" charset="-120"/>
               </a:rPr>
               <a:t>わざと失敗させて、実行履歴の出力から</a:t>
@@ -20390,7 +20395,8 @@
                 <a:solidFill>
                   <a:srgbClr val="6B7280"/>
                 </a:solidFill>
-                <a:latin typeface="Noto Sans JP"/>
+                <a:latin typeface="游ゴシック Light"/>
+                <a:ea typeface="游ゴシック Light"/>
               </a:rPr>
               <a:t>原因を見つけ、直します。</a:t>
             </a:r>
@@ -20510,8 +20516,8 @@
                 <a:solidFill>
                   <a:srgbClr val="9CA3AF"/>
                 </a:solidFill>
-                <a:latin typeface="Noto Sans JP" pitchFamily="34" charset="0"/>
-                <a:ea typeface="Noto Sans JP" pitchFamily="34" charset="-122"/>
+                <a:latin typeface="游ゴシック Light" pitchFamily="34" charset="0"/>
+                <a:ea typeface="游ゴシック Light" pitchFamily="34" charset="-122"/>
                 <a:cs typeface="Noto Sans JP" pitchFamily="34" charset="-120"/>
               </a:rPr>
               <a:t>Power Automate for Beginners</a:t>
@@ -20549,8 +20555,8 @@
                 <a:solidFill>
                   <a:srgbClr val="9CA3AF"/>
                 </a:solidFill>
-                <a:latin typeface="Noto Sans JP" pitchFamily="34" charset="0"/>
-                <a:ea typeface="Noto Sans JP" pitchFamily="34" charset="-122"/>
+                <a:latin typeface="游ゴシック Light" pitchFamily="34" charset="0"/>
+                <a:ea typeface="游ゴシック Light" pitchFamily="34" charset="-122"/>
                 <a:cs typeface="Noto Sans JP" pitchFamily="34" charset="-120"/>
               </a:rPr>
               <a:t>Copyright © PA45</a:t>
@@ -20952,8 +20958,8 @@
                 <a:solidFill>
                   <a:srgbClr val="6B7280"/>
                 </a:solidFill>
-                <a:latin typeface="Noto Sans JP" pitchFamily="34" charset="0"/>
-                <a:ea typeface="Noto Sans JP" pitchFamily="34" charset="-122"/>
+                <a:latin typeface="游ゴシック Light" pitchFamily="34" charset="0"/>
+                <a:ea typeface="游ゴシック Light" pitchFamily="34" charset="-122"/>
                 <a:cs typeface="Noto Sans JP" pitchFamily="34" charset="-120"/>
               </a:rPr>
               <a:t>PA45｜第11回</a:t>
@@ -20991,8 +20997,8 @@
                 <a:solidFill>
                   <a:srgbClr val="1F2937"/>
                 </a:solidFill>
-                <a:latin typeface="Noto Sans JP" pitchFamily="34" charset="0"/>
-                <a:ea typeface="Noto Sans JP" pitchFamily="34" charset="-122"/>
+                <a:latin typeface="游ゴシック Light" pitchFamily="34" charset="0"/>
+                <a:ea typeface="游ゴシック Light" pitchFamily="34" charset="-122"/>
                 <a:cs typeface="Noto Sans JP" pitchFamily="34" charset="-120"/>
               </a:rPr>
               <a:t>テーマ解説 (1/2)：実行履歴って何？</a:t>
@@ -21064,8 +21070,8 @@
                 <a:solidFill>
                   <a:srgbClr val="9CA3AF"/>
                 </a:solidFill>
-                <a:latin typeface="ui-monospace" pitchFamily="34" charset="0"/>
-                <a:ea typeface="ui-monospace" pitchFamily="34" charset="-122"/>
+                <a:latin typeface="游ゴシック Light" pitchFamily="34" charset="0"/>
+                <a:ea typeface="游ゴシック Light" pitchFamily="34" charset="-122"/>
                 <a:cs typeface="ui-monospace" pitchFamily="34" charset="-120"/>
               </a:rPr>
               <a:t>Concept</a:t>
@@ -21221,8 +21227,8 @@
                 <a:solidFill>
                   <a:srgbClr val="9CA3AF"/>
                 </a:solidFill>
-                <a:latin typeface="Noto Sans JP" pitchFamily="34" charset="0"/>
-                <a:ea typeface="Noto Sans JP" pitchFamily="34" charset="-122"/>
+                <a:latin typeface="游ゴシック Light" pitchFamily="34" charset="0"/>
+                <a:ea typeface="游ゴシック Light" pitchFamily="34" charset="-122"/>
                 <a:cs typeface="Noto Sans JP" pitchFamily="34" charset="-120"/>
               </a:rPr>
               <a:t>Power Automate for Beginners</a:t>
@@ -21260,8 +21266,8 @@
                 <a:solidFill>
                   <a:srgbClr val="9CA3AF"/>
                 </a:solidFill>
-                <a:latin typeface="Noto Sans JP" pitchFamily="34" charset="0"/>
-                <a:ea typeface="Noto Sans JP" pitchFamily="34" charset="-122"/>
+                <a:latin typeface="游ゴシック Light" pitchFamily="34" charset="0"/>
+                <a:ea typeface="游ゴシック Light" pitchFamily="34" charset="-122"/>
                 <a:cs typeface="Noto Sans JP" pitchFamily="34" charset="-120"/>
               </a:rPr>
               <a:t>Copyright © PA45</a:t>
@@ -21487,8 +21493,8 @@
         </p:nvSpPr>
         <p:spPr>
           <a:xfrm>
-            <a:off x="265580" y="2195490"/>
-            <a:ext cx="5598507" cy="3947047"/>
+            <a:off x="182880" y="2195490"/>
+            <a:ext cx="6583680" cy="3947047"/>
           </a:xfrm>
           <a:prstGeom prst="rect">
             <a:avLst/>
@@ -21501,18 +21507,20 @@
           <a:lstStyle/>
           <a:p>
             <a:pPr marL="0" indent="0" algn="l">
+              <a:spcBef>
+                <a:spcPts val="1000"/>
+              </a:spcBef>
               <a:buNone/>
             </a:pPr>
             <a:r>
-              <a:rPr lang="ja-JP" altLang="en-US" sz="2000" b="1">
+              <a:rPr sz="2000" b="0">
                 <a:solidFill>
                   <a:srgbClr val="1F2937"/>
                 </a:solidFill>
-                <a:latin typeface="Noto Sans JP" pitchFamily="34" charset="0"/>
-                <a:ea typeface="Noto Sans JP" pitchFamily="34" charset="-122"/>
-                <a:cs typeface="Noto Sans JP" pitchFamily="34" charset="-120"/>
-              </a:rPr>
-              <a:t>①「実行履歴」は、フローを動かした記録です。</a:t>
+                <a:latin typeface="游ゴシック Light"/>
+                <a:ea typeface="游ゴシック Light"/>
+              </a:rPr>
+              <a:t>①「実行履歴」は、フローを動かした記録。いつ・どのアクションが・成功（緑）か失敗（赤）かが残ります。</a:t>
             </a:r>
             <a:endParaRPr lang="en-US" altLang="ja-JP" sz="2000" b="1">
               <a:solidFill>
@@ -21524,41 +21532,20 @@
             </a:endParaRPr>
           </a:p>
           <a:p>
-            <a:r>
-              <a:rPr sz="2000" b="1">
-                <a:solidFill>
-                  <a:srgbClr val="1F2937"/>
-                </a:solidFill>
-                <a:latin typeface="Noto Sans JP"/>
-              </a:rPr>
-              <a:t>　いつ・どのアクションが・成功（緑）か失敗（赤）か が残ります。</a:t>
-            </a:r>
-          </a:p>
-          <a:p>
             <a:pPr>
               <a:spcBef>
                 <a:spcPts val="1000"/>
               </a:spcBef>
             </a:pPr>
             <a:r>
-              <a:rPr sz="2000" b="1">
+              <a:rPr sz="2000" b="0">
                 <a:solidFill>
                   <a:srgbClr val="1F2937"/>
                 </a:solidFill>
-                <a:latin typeface="Noto Sans JP"/>
-              </a:rPr>
-              <a:t>②各アクションを開くと「入力」と「出力」が見られます。</a:t>
-            </a:r>
-          </a:p>
-          <a:p>
-            <a:r>
-              <a:rPr sz="2000" b="1">
-                <a:solidFill>
-                  <a:srgbClr val="1F2937"/>
-                </a:solidFill>
-                <a:latin typeface="Noto Sans JP"/>
-              </a:rPr>
-              <a:t>　入力＝受け取った値、出力＝次に渡す値。</a:t>
+                <a:latin typeface="游ゴシック Light"/>
+                <a:ea typeface="游ゴシック Light"/>
+              </a:rPr>
+              <a:t>②各アクションを開くと「入力」と「出力」が見られます。入力＝そのアクションが受け取った値、出力＝次に渡す値です。</a:t>
             </a:r>
           </a:p>
           <a:p>
@@ -21568,24 +21555,14 @@
               </a:spcBef>
             </a:pPr>
             <a:r>
-              <a:rPr sz="2000" b="1">
+              <a:rPr sz="2000" b="0">
                 <a:solidFill>
                   <a:srgbClr val="1F2937"/>
                 </a:solidFill>
-                <a:latin typeface="Noto Sans JP"/>
-              </a:rPr>
-              <a:t>③うまく動かないときは、実行履歴の入力・出力を見れば</a:t>
-            </a:r>
-          </a:p>
-          <a:p>
-            <a:r>
-              <a:rPr sz="2000" b="1">
-                <a:solidFill>
-                  <a:srgbClr val="1F2937"/>
-                </a:solidFill>
-                <a:latin typeface="Noto Sans JP"/>
-              </a:rPr>
-              <a:t>　「どこで・何が起きたか」が分かります。</a:t>
+                <a:latin typeface="游ゴシック Light"/>
+                <a:ea typeface="游ゴシック Light"/>
+              </a:rPr>
+              <a:t>③うまく動かないときは、実行履歴の入力・出力を見れば「どこで何が起きたか」が分かります。</a:t>
             </a:r>
           </a:p>
         </p:txBody>
@@ -21638,6 +21615,8 @@
                 <a:solidFill>
                   <a:srgbClr val="2A5E9E"/>
                 </a:solidFill>
+                <a:latin typeface="游ゴシック Light"/>
+                <a:ea typeface="游ゴシック Light"/>
               </a:rPr>
               <a:t>📷 ここにスクショを貼る</a:t>
             </a:r>
@@ -21649,6 +21628,8 @@
                 <a:solidFill>
                   <a:srgbClr val="556677"/>
                 </a:solidFill>
+                <a:latin typeface="游ゴシック Light"/>
+                <a:ea typeface="游ゴシック Light"/>
               </a:rPr>
               <a:t>実行履歴の一覧画面
 （緑＝成功・赤＝失敗が見える画面）</a:t>
@@ -21846,8 +21827,8 @@
                 <a:solidFill>
                   <a:srgbClr val="6B7280"/>
                 </a:solidFill>
-                <a:latin typeface="Noto Sans JP" pitchFamily="34" charset="0"/>
-                <a:ea typeface="Noto Sans JP" pitchFamily="34" charset="-122"/>
+                <a:latin typeface="游ゴシック Light" pitchFamily="34" charset="0"/>
+                <a:ea typeface="游ゴシック Light" pitchFamily="34" charset="-122"/>
                 <a:cs typeface="Noto Sans JP" pitchFamily="34" charset="-120"/>
               </a:rPr>
               <a:t>PA45｜第11回</a:t>
@@ -21885,8 +21866,8 @@
                 <a:solidFill>
                   <a:srgbClr val="1F2937"/>
                 </a:solidFill>
-                <a:latin typeface="Noto Sans JP" pitchFamily="34" charset="0"/>
-                <a:ea typeface="Noto Sans JP" pitchFamily="34" charset="-122"/>
+                <a:latin typeface="游ゴシック Light" pitchFamily="34" charset="0"/>
+                <a:ea typeface="游ゴシック Light" pitchFamily="34" charset="-122"/>
                 <a:cs typeface="Noto Sans JP" pitchFamily="34" charset="-120"/>
               </a:rPr>
               <a:t>テーマ解説 (2/2)：画面の「表示」と「値」は違う</a:t>
@@ -21958,8 +21939,8 @@
                 <a:solidFill>
                   <a:srgbClr val="9CA3AF"/>
                 </a:solidFill>
-                <a:latin typeface="ui-monospace" pitchFamily="34" charset="0"/>
-                <a:ea typeface="ui-monospace" pitchFamily="34" charset="-122"/>
+                <a:latin typeface="游ゴシック Light" pitchFamily="34" charset="0"/>
+                <a:ea typeface="游ゴシック Light" pitchFamily="34" charset="-122"/>
                 <a:cs typeface="ui-monospace" pitchFamily="34" charset="-120"/>
               </a:rPr>
               <a:t>Concept</a:t>
@@ -22115,8 +22096,8 @@
                 <a:solidFill>
                   <a:srgbClr val="9CA3AF"/>
                 </a:solidFill>
-                <a:latin typeface="Noto Sans JP" pitchFamily="34" charset="0"/>
-                <a:ea typeface="Noto Sans JP" pitchFamily="34" charset="-122"/>
+                <a:latin typeface="游ゴシック Light" pitchFamily="34" charset="0"/>
+                <a:ea typeface="游ゴシック Light" pitchFamily="34" charset="-122"/>
                 <a:cs typeface="Noto Sans JP" pitchFamily="34" charset="-120"/>
               </a:rPr>
               <a:t>Power Automate for Beginners</a:t>
@@ -22154,8 +22135,8 @@
                 <a:solidFill>
                   <a:srgbClr val="9CA3AF"/>
                 </a:solidFill>
-                <a:latin typeface="Noto Sans JP" pitchFamily="34" charset="0"/>
-                <a:ea typeface="Noto Sans JP" pitchFamily="34" charset="-122"/>
+                <a:latin typeface="游ゴシック Light" pitchFamily="34" charset="0"/>
+                <a:ea typeface="游ゴシック Light" pitchFamily="34" charset="-122"/>
                 <a:cs typeface="Noto Sans JP" pitchFamily="34" charset="-120"/>
               </a:rPr>
               <a:t>Copyright © PA45</a:t>
@@ -22381,8 +22362,8 @@
         </p:nvSpPr>
         <p:spPr>
           <a:xfrm>
-            <a:off x="265579" y="2229307"/>
-            <a:ext cx="6248431" cy="3913230"/>
+            <a:off x="182880" y="2229307"/>
+            <a:ext cx="6583680" cy="3913230"/>
           </a:xfrm>
           <a:prstGeom prst="rect">
             <a:avLst/>
@@ -22395,18 +22376,20 @@
           <a:lstStyle/>
           <a:p>
             <a:pPr marL="0" indent="0" algn="l">
+              <a:spcBef>
+                <a:spcPts val="1000"/>
+              </a:spcBef>
               <a:buNone/>
             </a:pPr>
             <a:r>
-              <a:rPr lang="ja-JP" altLang="en-US" sz="2000" b="1">
+              <a:rPr sz="2000" b="0">
                 <a:solidFill>
                   <a:srgbClr val="1F2937"/>
                 </a:solidFill>
-                <a:latin typeface="Noto Sans JP" pitchFamily="34" charset="0"/>
-                <a:ea typeface="Noto Sans JP" pitchFamily="34" charset="-122"/>
-                <a:cs typeface="Noto Sans JP" pitchFamily="34" charset="-120"/>
-              </a:rPr>
-              <a:t>④画面に見える「表示」と、フローに実際に渡る「値」は</a:t>
+                <a:latin typeface="游ゴシック Light"/>
+                <a:ea typeface="游ゴシック Light"/>
+              </a:rPr>
+              <a:t>④画面に見える「表示」と、フローに実際に渡る「値」は違うことがあります。</a:t>
             </a:r>
             <a:endParaRPr lang="en-US" altLang="ja-JP" sz="2000" b="1">
               <a:solidFill>
@@ -22418,41 +22401,20 @@
             </a:endParaRPr>
           </a:p>
           <a:p>
-            <a:r>
-              <a:rPr sz="2000" b="1">
-                <a:solidFill>
-                  <a:srgbClr val="1F2937"/>
-                </a:solidFill>
-                <a:latin typeface="Noto Sans JP"/>
-              </a:rPr>
-              <a:t>　違うことがあります。</a:t>
-            </a:r>
-          </a:p>
-          <a:p>
             <a:pPr>
               <a:spcBef>
                 <a:spcPts val="1000"/>
               </a:spcBef>
             </a:pPr>
             <a:r>
-              <a:rPr sz="2000" b="1">
+              <a:rPr sz="2000" b="0">
                 <a:solidFill>
                   <a:srgbClr val="1F2937"/>
                 </a:solidFill>
-                <a:latin typeface="Noto Sans JP"/>
-              </a:rPr>
-              <a:t>⑤例：メールの重要度。画面の表示は「高」でも、</a:t>
-            </a:r>
-          </a:p>
-          <a:p>
-            <a:r>
-              <a:rPr sz="2000" b="1">
-                <a:solidFill>
-                  <a:srgbClr val="1F2937"/>
-                </a:solidFill>
-                <a:latin typeface="Noto Sans JP"/>
-              </a:rPr>
-              <a:t>　出力に渡る値は英語の "High" です。</a:t>
+                <a:latin typeface="游ゴシック Light"/>
+                <a:ea typeface="游ゴシック Light"/>
+              </a:rPr>
+              <a:t>⑤例：メールの重要度。画面の表示は「高」でも、出力に渡る値は英語の "High" です。</a:t>
             </a:r>
           </a:p>
           <a:p>
@@ -22462,24 +22424,14 @@
               </a:spcBef>
             </a:pPr>
             <a:r>
-              <a:rPr sz="2000" b="1">
+              <a:rPr sz="2000" b="0">
                 <a:solidFill>
                   <a:srgbClr val="1F2937"/>
                 </a:solidFill>
-                <a:latin typeface="Noto Sans JP"/>
-              </a:rPr>
-              <a:t>⑥条件に「高」と書くと一致せず、フローは赤くならないまま</a:t>
-            </a:r>
-          </a:p>
-          <a:p>
-            <a:r>
-              <a:rPr sz="2000" b="1">
-                <a:solidFill>
-                  <a:srgbClr val="1F2937"/>
-                </a:solidFill>
-                <a:latin typeface="Noto Sans JP"/>
-              </a:rPr>
-              <a:t>　間違った方へ進みます。出力を見ないと気づけません。</a:t>
+                <a:latin typeface="游ゴシック Light"/>
+                <a:ea typeface="游ゴシック Light"/>
+              </a:rPr>
+              <a:t>⑥条件に「高」と書くと一致せず、フローは赤くならないまま間違った方へ進みます。出力を見ないと気づけません。</a:t>
             </a:r>
           </a:p>
         </p:txBody>
@@ -22532,6 +22484,8 @@
                 <a:solidFill>
                   <a:srgbClr val="2A5E9E"/>
                 </a:solidFill>
+                <a:latin typeface="游ゴシック Light"/>
+                <a:ea typeface="游ゴシック Light"/>
               </a:rPr>
               <a:t>📷 ここにスクショを貼る</a:t>
             </a:r>
@@ -22543,6 +22497,8 @@
                 <a:solidFill>
                   <a:srgbClr val="556677"/>
                 </a:solidFill>
+                <a:latin typeface="游ゴシック Light"/>
+                <a:ea typeface="游ゴシック Light"/>
               </a:rPr>
               <a:t>メールの重要度を「高」にしている画面
 または 条件アクションの設定画面</a:t>

--- a/assets/pa45/P011_PA45_RunHistory_20260521.pptx
+++ b/assets/pa45/P011_PA45_RunHistory_20260521.pptx
@@ -2510,8 +2510,8 @@
                 <a:solidFill>
                   <a:srgbClr val="FFFFFF"/>
                 </a:solidFill>
-                <a:latin typeface="游ゴシック Light"/>
-                <a:ea typeface="游ゴシック Light"/>
+                <a:latin typeface="Meiryo UI"/>
+                <a:ea typeface="Meiryo UI"/>
               </a:rPr>
               <a:t>PA45 — Power Automate 45</a:t>
             </a:r>
@@ -2549,8 +2549,8 @@
                 <a:solidFill>
                   <a:srgbClr val="C7D8FF"/>
                 </a:solidFill>
-                <a:latin typeface="游ゴシック Light"/>
-                <a:ea typeface="游ゴシック Light"/>
+                <a:latin typeface="Meiryo UI"/>
+                <a:ea typeface="Meiryo UI"/>
               </a:rPr>
               <a:t>第11回 / Vol.11</a:t>
             </a:r>
@@ -2588,8 +2588,8 @@
                 <a:solidFill>
                   <a:srgbClr val="475569"/>
                 </a:solidFill>
-                <a:latin typeface="游ゴシック Light"/>
-                <a:ea typeface="游ゴシック Light"/>
+                <a:latin typeface="Meiryo UI"/>
+                <a:ea typeface="Meiryo UI"/>
               </a:rPr>
               <a:t>まもなく開始します</a:t>
             </a:r>
@@ -2627,8 +2627,8 @@
                 <a:solidFill>
                   <a:srgbClr val="1E3A8A"/>
                 </a:solidFill>
-                <a:latin typeface="游ゴシック Light"/>
-                <a:ea typeface="游ゴシック Light"/>
+                <a:latin typeface="Meiryo UI"/>
+                <a:ea typeface="Meiryo UI"/>
               </a:rPr>
               <a:t>20:15 START</a:t>
             </a:r>
@@ -2666,8 +2666,8 @@
                 <a:solidFill>
                   <a:srgbClr val="0F172A"/>
                 </a:solidFill>
-                <a:latin typeface="游ゴシック Light"/>
-                <a:ea typeface="游ゴシック Light"/>
+                <a:latin typeface="Meiryo UI"/>
+                <a:ea typeface="Meiryo UI"/>
               </a:rPr>
               <a:t>第11回｜実行履歴を読めると自動化が楽しくなる</a:t>
             </a:r>
@@ -2705,8 +2705,8 @@
                 <a:solidFill>
                   <a:srgbClr val="475569"/>
                 </a:solidFill>
-                <a:latin typeface="游ゴシック Light"/>
-                <a:ea typeface="游ゴシック Light"/>
+                <a:latin typeface="Meiryo UI"/>
+                <a:ea typeface="Meiryo UI"/>
               </a:rPr>
               <a:t>失敗しないフロー設計｜メールの重要度で振り分け</a:t>
             </a:r>
@@ -2790,8 +2790,8 @@
                 <a:solidFill>
                   <a:srgbClr val="1E3A8A"/>
                 </a:solidFill>
-                <a:latin typeface="游ゴシック Light"/>
-                <a:ea typeface="游ゴシック Light"/>
+                <a:latin typeface="Meiryo UI"/>
+                <a:ea typeface="Meiryo UI"/>
               </a:rPr>
               <a:t>📥</a:t>
             </a:r>
@@ -2829,8 +2829,8 @@
                 <a:solidFill>
                   <a:srgbClr val="0F172A"/>
                 </a:solidFill>
-                <a:latin typeface="游ゴシック Light"/>
-                <a:ea typeface="游ゴシック Light"/>
+                <a:latin typeface="Meiryo UI"/>
+                <a:ea typeface="Meiryo UI"/>
               </a:rPr>
               <a:t>Power Automate と Outlook を</a:t>
             </a:r>
@@ -2841,8 +2841,8 @@
                 <a:solidFill>
                   <a:srgbClr val="0F172A"/>
                 </a:solidFill>
-                <a:latin typeface="游ゴシック Light"/>
-                <a:ea typeface="游ゴシック Light"/>
+                <a:latin typeface="Meiryo UI"/>
+                <a:ea typeface="Meiryo UI"/>
               </a:rPr>
               <a:t>事前に起動しておくとスムーズ</a:t>
             </a:r>
@@ -2926,8 +2926,8 @@
                 <a:solidFill>
                   <a:srgbClr val="1E3A8A"/>
                 </a:solidFill>
-                <a:latin typeface="游ゴシック Light"/>
-                <a:ea typeface="游ゴシック Light"/>
+                <a:latin typeface="Meiryo UI"/>
+                <a:ea typeface="Meiryo UI"/>
               </a:rPr>
               <a:t>🎥</a:t>
             </a:r>
@@ -2965,8 +2965,8 @@
                 <a:solidFill>
                   <a:srgbClr val="0F172A"/>
                 </a:solidFill>
-                <a:latin typeface="游ゴシック Light"/>
-                <a:ea typeface="游ゴシック Light"/>
+                <a:latin typeface="Meiryo UI"/>
+                <a:ea typeface="Meiryo UI"/>
               </a:rPr>
               <a:t>後日YouTubeで</a:t>
             </a:r>
@@ -2978,8 +2978,8 @@
                 <a:solidFill>
                   <a:srgbClr val="475569"/>
                 </a:solidFill>
-                <a:latin typeface="游ゴシック Light"/>
-                <a:ea typeface="游ゴシック Light"/>
+                <a:latin typeface="Meiryo UI"/>
+                <a:ea typeface="Meiryo UI"/>
               </a:rPr>
               <a:t>アーカイブ動画を公開予定</a:t>
             </a:r>
@@ -3063,8 +3063,8 @@
                 <a:solidFill>
                   <a:srgbClr val="1E3A8A"/>
                 </a:solidFill>
-                <a:latin typeface="游ゴシック Light"/>
-                <a:ea typeface="游ゴシック Light"/>
+                <a:latin typeface="Meiryo UI"/>
+                <a:ea typeface="Meiryo UI"/>
               </a:rPr>
               <a:t>🕵</a:t>
             </a:r>
@@ -3102,8 +3102,8 @@
                 <a:solidFill>
                   <a:srgbClr val="0F172A"/>
                 </a:solidFill>
-                <a:latin typeface="游ゴシック Light"/>
-                <a:ea typeface="游ゴシック Light"/>
+                <a:latin typeface="Meiryo UI"/>
+                <a:ea typeface="Meiryo UI"/>
               </a:rPr>
               <a:t>Teams表示名がNGの方は</a:t>
             </a:r>
@@ -3115,8 +3115,8 @@
                 <a:solidFill>
                   <a:srgbClr val="475569"/>
                 </a:solidFill>
-                <a:latin typeface="游ゴシック Light"/>
-                <a:ea typeface="游ゴシック Light"/>
+                <a:latin typeface="Meiryo UI"/>
+                <a:ea typeface="Meiryo UI"/>
               </a:rPr>
               <a:t>匿名参加でOKです</a:t>
             </a:r>
@@ -3154,8 +3154,8 @@
                 <a:solidFill>
                   <a:srgbClr val="94A3B8"/>
                 </a:solidFill>
-                <a:latin typeface="游ゴシック Light"/>
-                <a:ea typeface="游ゴシック Light"/>
+                <a:latin typeface="Meiryo UI"/>
+                <a:ea typeface="Meiryo UI"/>
               </a:rPr>
               <a:t>Power Automate 45  |  Copyright © PA45</a:t>
             </a:r>
@@ -3357,8 +3357,8 @@
                 <a:solidFill>
                   <a:srgbClr val="6B7280"/>
                 </a:solidFill>
-                <a:latin typeface="游ゴシック Light" pitchFamily="34" charset="0"/>
-                <a:ea typeface="游ゴシック Light" pitchFamily="34" charset="-122"/>
+                <a:latin typeface="Meiryo UI" pitchFamily="34" charset="0"/>
+                <a:ea typeface="Meiryo UI" pitchFamily="34" charset="-122"/>
                 <a:cs typeface="Noto Sans JP" pitchFamily="34" charset="-120"/>
               </a:rPr>
               <a:t>PA45｜第11回</a:t>
@@ -3396,8 +3396,8 @@
                 <a:solidFill>
                   <a:srgbClr val="1F2937"/>
                 </a:solidFill>
-                <a:latin typeface="游ゴシック Light" pitchFamily="34" charset="0"/>
-                <a:ea typeface="游ゴシック Light" pitchFamily="34" charset="-122"/>
+                <a:latin typeface="Meiryo UI" pitchFamily="34" charset="0"/>
+                <a:ea typeface="Meiryo UI" pitchFamily="34" charset="-122"/>
                 <a:cs typeface="Noto Sans JP" pitchFamily="34" charset="-120"/>
               </a:rPr>
               <a:t>入力と出力って何？</a:t>
@@ -3469,8 +3469,8 @@
                 <a:solidFill>
                   <a:srgbClr val="9CA3AF"/>
                 </a:solidFill>
-                <a:latin typeface="游ゴシック Light" pitchFamily="34" charset="0"/>
-                <a:ea typeface="游ゴシック Light" pitchFamily="34" charset="-122"/>
+                <a:latin typeface="Meiryo UI" pitchFamily="34" charset="0"/>
+                <a:ea typeface="Meiryo UI" pitchFamily="34" charset="-122"/>
                 <a:cs typeface="ui-monospace" pitchFamily="34" charset="-120"/>
               </a:rPr>
               <a:t>Concept</a:t>
@@ -3626,8 +3626,8 @@
                 <a:solidFill>
                   <a:srgbClr val="9CA3AF"/>
                 </a:solidFill>
-                <a:latin typeface="游ゴシック Light" pitchFamily="34" charset="0"/>
-                <a:ea typeface="游ゴシック Light" pitchFamily="34" charset="-122"/>
+                <a:latin typeface="Meiryo UI" pitchFamily="34" charset="0"/>
+                <a:ea typeface="Meiryo UI" pitchFamily="34" charset="-122"/>
                 <a:cs typeface="Noto Sans JP" pitchFamily="34" charset="-120"/>
               </a:rPr>
               <a:t>Power Automate for Beginners</a:t>
@@ -3665,8 +3665,8 @@
                 <a:solidFill>
                   <a:srgbClr val="9CA3AF"/>
                 </a:solidFill>
-                <a:latin typeface="游ゴシック Light" pitchFamily="34" charset="0"/>
-                <a:ea typeface="游ゴシック Light" pitchFamily="34" charset="-122"/>
+                <a:latin typeface="Meiryo UI" pitchFamily="34" charset="0"/>
+                <a:ea typeface="Meiryo UI" pitchFamily="34" charset="-122"/>
                 <a:cs typeface="Noto Sans JP" pitchFamily="34" charset="-120"/>
               </a:rPr>
               <a:t>Copyright © PA45</a:t>
@@ -3916,8 +3916,8 @@
                 <a:solidFill>
                   <a:srgbClr val="1F2937"/>
                 </a:solidFill>
-                <a:latin typeface="游ゴシック Light"/>
-                <a:ea typeface="游ゴシック Light"/>
+                <a:latin typeface="Meiryo UI"/>
+                <a:ea typeface="Meiryo UI"/>
               </a:rPr>
               <a:t>🎯 アクションには「入力」と「出力」があります</a:t>
             </a:r>
@@ -3936,8 +3936,8 @@
                 <a:solidFill>
                   <a:srgbClr val="1F2937"/>
                 </a:solidFill>
-                <a:latin typeface="游ゴシック Light"/>
-                <a:ea typeface="游ゴシック Light"/>
+                <a:latin typeface="Meiryo UI"/>
+                <a:ea typeface="Meiryo UI"/>
               </a:rPr>
               <a:t>・入力：そのアクションが受け取った値（例：条件の入力 ＝「重要度」と「高」）</a:t>
             </a:r>
@@ -3948,8 +3948,8 @@
                 <a:solidFill>
                   <a:srgbClr val="1F2937"/>
                 </a:solidFill>
-                <a:latin typeface="游ゴシック Light"/>
-                <a:ea typeface="游ゴシック Light"/>
+                <a:latin typeface="Meiryo UI"/>
+                <a:ea typeface="Meiryo UI"/>
               </a:rPr>
               <a:t>・出力：そのアクションが次に渡す値（例：トリガーの出力 ＝ 件名・差出人・重要度 など）</a:t>
             </a:r>
@@ -3960,8 +3960,8 @@
                 <a:solidFill>
                   <a:srgbClr val="1F2937"/>
                 </a:solidFill>
-                <a:latin typeface="游ゴシック Light"/>
-                <a:ea typeface="游ゴシック Light"/>
+                <a:latin typeface="Meiryo UI"/>
+                <a:ea typeface="Meiryo UI"/>
               </a:rPr>
               <a:t>・前のアクションの「出力」が、次のアクションの「入力」になる。この受け渡しでフローは動きます。</a:t>
             </a:r>
@@ -4016,8 +4016,8 @@
                 <a:solidFill>
                   <a:srgbClr val="2A5E9E"/>
                 </a:solidFill>
-                <a:latin typeface="游ゴシック Light"/>
-                <a:ea typeface="游ゴシック Light"/>
+                <a:latin typeface="Meiryo UI"/>
+                <a:ea typeface="Meiryo UI"/>
               </a:rPr>
               <a:t>📷 ここにスクショを貼る</a:t>
             </a:r>
@@ -4029,8 +4029,8 @@
                 <a:solidFill>
                   <a:srgbClr val="556677"/>
                 </a:solidFill>
-                <a:latin typeface="游ゴシック Light"/>
-                <a:ea typeface="游ゴシック Light"/>
+                <a:latin typeface="Meiryo UI"/>
+                <a:ea typeface="Meiryo UI"/>
               </a:rPr>
               <a:t>アクションを開いて
 「入力」「出力」が見えている画面</a:t>
@@ -4228,8 +4228,8 @@
                 <a:solidFill>
                   <a:srgbClr val="6B7280"/>
                 </a:solidFill>
-                <a:latin typeface="游ゴシック Light" pitchFamily="34" charset="0"/>
-                <a:ea typeface="游ゴシック Light" pitchFamily="34" charset="-122"/>
+                <a:latin typeface="Meiryo UI" pitchFamily="34" charset="0"/>
+                <a:ea typeface="Meiryo UI" pitchFamily="34" charset="-122"/>
                 <a:cs typeface="Noto Sans JP" pitchFamily="34" charset="-120"/>
               </a:rPr>
               <a:t>PA45｜第11回</a:t>
@@ -4267,8 +4267,8 @@
                 <a:solidFill>
                   <a:srgbClr val="1F2937"/>
                 </a:solidFill>
-                <a:latin typeface="游ゴシック Light" pitchFamily="34" charset="0"/>
-                <a:ea typeface="游ゴシック Light" pitchFamily="34" charset="-122"/>
+                <a:latin typeface="Meiryo UI" pitchFamily="34" charset="0"/>
+                <a:ea typeface="Meiryo UI" pitchFamily="34" charset="-122"/>
                 <a:cs typeface="Noto Sans JP" pitchFamily="34" charset="-120"/>
               </a:rPr>
               <a:t>実行履歴で入力・出力を見る</a:t>
@@ -4340,8 +4340,8 @@
                 <a:solidFill>
                   <a:srgbClr val="9CA3AF"/>
                 </a:solidFill>
-                <a:latin typeface="游ゴシック Light" pitchFamily="34" charset="0"/>
-                <a:ea typeface="游ゴシック Light" pitchFamily="34" charset="-122"/>
+                <a:latin typeface="Meiryo UI" pitchFamily="34" charset="0"/>
+                <a:ea typeface="Meiryo UI" pitchFamily="34" charset="-122"/>
                 <a:cs typeface="ui-monospace" pitchFamily="34" charset="-120"/>
               </a:rPr>
               <a:t>Concept</a:t>
@@ -4497,8 +4497,8 @@
                 <a:solidFill>
                   <a:srgbClr val="9CA3AF"/>
                 </a:solidFill>
-                <a:latin typeface="游ゴシック Light" pitchFamily="34" charset="0"/>
-                <a:ea typeface="游ゴシック Light" pitchFamily="34" charset="-122"/>
+                <a:latin typeface="Meiryo UI" pitchFamily="34" charset="0"/>
+                <a:ea typeface="Meiryo UI" pitchFamily="34" charset="-122"/>
                 <a:cs typeface="Noto Sans JP" pitchFamily="34" charset="-120"/>
               </a:rPr>
               <a:t>Power Automate for Beginners</a:t>
@@ -4536,8 +4536,8 @@
                 <a:solidFill>
                   <a:srgbClr val="9CA3AF"/>
                 </a:solidFill>
-                <a:latin typeface="游ゴシック Light" pitchFamily="34" charset="0"/>
-                <a:ea typeface="游ゴシック Light" pitchFamily="34" charset="-122"/>
+                <a:latin typeface="Meiryo UI" pitchFamily="34" charset="0"/>
+                <a:ea typeface="Meiryo UI" pitchFamily="34" charset="-122"/>
                 <a:cs typeface="Noto Sans JP" pitchFamily="34" charset="-120"/>
               </a:rPr>
               <a:t>Copyright © PA45</a:t>
@@ -4787,8 +4787,8 @@
                 <a:solidFill>
                   <a:srgbClr val="1F2937"/>
                 </a:solidFill>
-                <a:latin typeface="游ゴシック Light"/>
-                <a:ea typeface="游ゴシック Light"/>
+                <a:latin typeface="Meiryo UI"/>
+                <a:ea typeface="Meiryo UI"/>
               </a:rPr>
               <a:t>🎯 実行履歴を開くと、入力・出力が全部見えます</a:t>
             </a:r>
@@ -4806,8 +4806,8 @@
                 <a:solidFill>
                   <a:srgbClr val="1F2937"/>
                 </a:solidFill>
-                <a:latin typeface="游ゴシック Light"/>
-                <a:ea typeface="游ゴシック Light"/>
+                <a:latin typeface="Meiryo UI"/>
+                <a:ea typeface="Meiryo UI"/>
               </a:rPr>
               <a:t>・フローを実行 → 左メニューの「実行履歴」を開く</a:t>
             </a:r>
@@ -4818,8 +4818,8 @@
                 <a:solidFill>
                   <a:srgbClr val="1F2937"/>
                 </a:solidFill>
-                <a:latin typeface="游ゴシック Light"/>
-                <a:ea typeface="游ゴシック Light"/>
+                <a:latin typeface="Meiryo UI"/>
+                <a:ea typeface="Meiryo UI"/>
               </a:rPr>
               <a:t>・見たい実行をクリック → 各アクションをクリック</a:t>
             </a:r>
@@ -4830,8 +4830,8 @@
                 <a:solidFill>
                   <a:srgbClr val="1F2937"/>
                 </a:solidFill>
-                <a:latin typeface="游ゴシック Light"/>
-                <a:ea typeface="游ゴシック Light"/>
+                <a:latin typeface="Meiryo UI"/>
+                <a:ea typeface="Meiryo UI"/>
               </a:rPr>
               <a:t>・そのアクションの「入力」と「出力」が表示されます（例：トリガーの出力に "High" が入っている）</a:t>
             </a:r>
@@ -4842,8 +4842,8 @@
                 <a:solidFill>
                   <a:srgbClr val="1F2937"/>
                 </a:solidFill>
-                <a:latin typeface="游ゴシック Light"/>
-                <a:ea typeface="游ゴシック Light"/>
+                <a:latin typeface="Meiryo UI"/>
+                <a:ea typeface="Meiryo UI"/>
               </a:rPr>
               <a:t>・思ったとおりに動かないときは、まずここを見る。食い違っている値が必ず写っています。</a:t>
             </a:r>
@@ -4898,8 +4898,8 @@
                 <a:solidFill>
                   <a:srgbClr val="2A5E9E"/>
                 </a:solidFill>
-                <a:latin typeface="游ゴシック Light"/>
-                <a:ea typeface="游ゴシック Light"/>
+                <a:latin typeface="Meiryo UI"/>
+                <a:ea typeface="Meiryo UI"/>
               </a:rPr>
               <a:t>📷 ここにスクショを貼る</a:t>
             </a:r>
@@ -4911,8 +4911,8 @@
                 <a:solidFill>
                   <a:srgbClr val="556677"/>
                 </a:solidFill>
-                <a:latin typeface="游ゴシック Light"/>
-                <a:ea typeface="游ゴシック Light"/>
+                <a:latin typeface="Meiryo UI"/>
+                <a:ea typeface="Meiryo UI"/>
               </a:rPr>
               <a:t>実行履歴で トリガーの出力
 が見えている画面</a:t>
@@ -5110,8 +5110,8 @@
                 <a:solidFill>
                   <a:srgbClr val="6B7280"/>
                 </a:solidFill>
-                <a:latin typeface="游ゴシック Light" pitchFamily="34" charset="0"/>
-                <a:ea typeface="游ゴシック Light" pitchFamily="34" charset="-122"/>
+                <a:latin typeface="Meiryo UI" pitchFamily="34" charset="0"/>
+                <a:ea typeface="Meiryo UI" pitchFamily="34" charset="-122"/>
                 <a:cs typeface="Noto Sans JP" pitchFamily="34" charset="-120"/>
               </a:rPr>
               <a:t>PA45｜第11回</a:t>
@@ -5149,8 +5149,8 @@
                 <a:solidFill>
                   <a:srgbClr val="1F2937"/>
                 </a:solidFill>
-                <a:latin typeface="游ゴシック Light" pitchFamily="34" charset="0"/>
-                <a:ea typeface="游ゴシック Light" pitchFamily="34" charset="-122"/>
+                <a:latin typeface="Meiryo UI" pitchFamily="34" charset="0"/>
+                <a:ea typeface="Meiryo UI" pitchFamily="34" charset="-122"/>
                 <a:cs typeface="Noto Sans JP" pitchFamily="34" charset="-120"/>
               </a:rPr>
               <a:t>フロー解説 ①  トリガーと条件を置く</a:t>
@@ -5222,8 +5222,8 @@
                 <a:solidFill>
                   <a:srgbClr val="9CA3AF"/>
                 </a:solidFill>
-                <a:latin typeface="游ゴシック Light" pitchFamily="34" charset="0"/>
-                <a:ea typeface="游ゴシック Light" pitchFamily="34" charset="-122"/>
+                <a:latin typeface="Meiryo UI" pitchFamily="34" charset="0"/>
+                <a:ea typeface="Meiryo UI" pitchFamily="34" charset="-122"/>
                 <a:cs typeface="ui-monospace" pitchFamily="34" charset="-120"/>
               </a:rPr>
               <a:t>Concept</a:t>
@@ -5379,8 +5379,8 @@
                 <a:solidFill>
                   <a:srgbClr val="9CA3AF"/>
                 </a:solidFill>
-                <a:latin typeface="游ゴシック Light" pitchFamily="34" charset="0"/>
-                <a:ea typeface="游ゴシック Light" pitchFamily="34" charset="-122"/>
+                <a:latin typeface="Meiryo UI" pitchFamily="34" charset="0"/>
+                <a:ea typeface="Meiryo UI" pitchFamily="34" charset="-122"/>
                 <a:cs typeface="Noto Sans JP" pitchFamily="34" charset="-120"/>
               </a:rPr>
               <a:t>Power Automate for Beginners</a:t>
@@ -5418,8 +5418,8 @@
                 <a:solidFill>
                   <a:srgbClr val="9CA3AF"/>
                 </a:solidFill>
-                <a:latin typeface="游ゴシック Light" pitchFamily="34" charset="0"/>
-                <a:ea typeface="游ゴシック Light" pitchFamily="34" charset="-122"/>
+                <a:latin typeface="Meiryo UI" pitchFamily="34" charset="0"/>
+                <a:ea typeface="Meiryo UI" pitchFamily="34" charset="-122"/>
                 <a:cs typeface="Noto Sans JP" pitchFamily="34" charset="-120"/>
               </a:rPr>
               <a:t>Copyright © PA45</a:t>
@@ -5669,8 +5669,8 @@
                 <a:solidFill>
                   <a:srgbClr val="1F2937"/>
                 </a:solidFill>
-                <a:latin typeface="游ゴシック Light"/>
-                <a:ea typeface="游ゴシック Light"/>
+                <a:latin typeface="Meiryo UI"/>
+                <a:ea typeface="Meiryo UI"/>
               </a:rPr>
               <a:t>🎯 目的：メールが届いたら重要度で仕分けるフローの形を作る</a:t>
             </a:r>
@@ -5689,8 +5689,8 @@
                 <a:solidFill>
                   <a:srgbClr val="1F2937"/>
                 </a:solidFill>
-                <a:latin typeface="游ゴシック Light"/>
-                <a:ea typeface="游ゴシック Light"/>
+                <a:latin typeface="Meiryo UI"/>
+                <a:ea typeface="Meiryo UI"/>
               </a:rPr>
               <a:t>・トリガー「新しいメールが届いたとき」を置く</a:t>
             </a:r>
@@ -5701,8 +5701,8 @@
                 <a:solidFill>
                   <a:srgbClr val="1F2937"/>
                 </a:solidFill>
-                <a:latin typeface="游ゴシック Light"/>
-                <a:ea typeface="游ゴシック Light"/>
+                <a:latin typeface="Meiryo UI"/>
+                <a:ea typeface="Meiryo UI"/>
               </a:rPr>
               <a:t>・「条件」アクションを追加する</a:t>
             </a:r>
@@ -5713,8 +5713,8 @@
                 <a:solidFill>
                   <a:srgbClr val="1F2937"/>
                 </a:solidFill>
-                <a:latin typeface="游ゴシック Light"/>
-                <a:ea typeface="游ゴシック Light"/>
+                <a:latin typeface="Meiryo UI"/>
+                <a:ea typeface="Meiryo UI"/>
               </a:rPr>
               <a:t>・条件：メールの重要度 が次の値に等しい「高」（まずは、わざと日本語の「高」と書きます）</a:t>
             </a:r>
@@ -5725,8 +5725,8 @@
                 <a:solidFill>
                   <a:srgbClr val="1F2937"/>
                 </a:solidFill>
-                <a:latin typeface="游ゴシック Light"/>
-                <a:ea typeface="游ゴシック Light"/>
+                <a:latin typeface="Meiryo UI"/>
+                <a:ea typeface="Meiryo UI"/>
               </a:rPr>
               <a:t>・はい／いいえ それぞれに「作成」でメッセージを置く</a:t>
             </a:r>
@@ -5781,8 +5781,8 @@
                 <a:solidFill>
                   <a:srgbClr val="2A5E9E"/>
                 </a:solidFill>
-                <a:latin typeface="游ゴシック Light"/>
-                <a:ea typeface="游ゴシック Light"/>
+                <a:latin typeface="Meiryo UI"/>
+                <a:ea typeface="Meiryo UI"/>
               </a:rPr>
               <a:t>📷 ここにスクショを貼る</a:t>
             </a:r>
@@ -5794,8 +5794,8 @@
                 <a:solidFill>
                   <a:srgbClr val="556677"/>
                 </a:solidFill>
-                <a:latin typeface="游ゴシック Light"/>
-                <a:ea typeface="游ゴシック Light"/>
+                <a:latin typeface="Meiryo UI"/>
+                <a:ea typeface="Meiryo UI"/>
               </a:rPr>
               <a:t>完成したフロー全体
 （トリガー＋条件＋作成）</a:t>
@@ -5993,8 +5993,8 @@
                 <a:solidFill>
                   <a:srgbClr val="6B7280"/>
                 </a:solidFill>
-                <a:latin typeface="游ゴシック Light" pitchFamily="34" charset="0"/>
-                <a:ea typeface="游ゴシック Light" pitchFamily="34" charset="-122"/>
+                <a:latin typeface="Meiryo UI" pitchFamily="34" charset="0"/>
+                <a:ea typeface="Meiryo UI" pitchFamily="34" charset="-122"/>
                 <a:cs typeface="Noto Sans JP" pitchFamily="34" charset="-120"/>
               </a:rPr>
               <a:t>PA45｜第11回</a:t>
@@ -6032,8 +6032,8 @@
                 <a:solidFill>
                   <a:srgbClr val="1F2937"/>
                 </a:solidFill>
-                <a:latin typeface="游ゴシック Light" pitchFamily="34" charset="0"/>
-                <a:ea typeface="游ゴシック Light" pitchFamily="34" charset="-122"/>
+                <a:latin typeface="Meiryo UI" pitchFamily="34" charset="0"/>
+                <a:ea typeface="Meiryo UI" pitchFamily="34" charset="-122"/>
                 <a:cs typeface="Noto Sans JP" pitchFamily="34" charset="-120"/>
               </a:rPr>
               <a:t>フロー解説 ②  わざと失敗させてみる</a:t>
@@ -6105,8 +6105,8 @@
                 <a:solidFill>
                   <a:srgbClr val="9CA3AF"/>
                 </a:solidFill>
-                <a:latin typeface="游ゴシック Light" pitchFamily="34" charset="0"/>
-                <a:ea typeface="游ゴシック Light" pitchFamily="34" charset="-122"/>
+                <a:latin typeface="Meiryo UI" pitchFamily="34" charset="0"/>
+                <a:ea typeface="Meiryo UI" pitchFamily="34" charset="-122"/>
                 <a:cs typeface="ui-monospace" pitchFamily="34" charset="-120"/>
               </a:rPr>
               <a:t>Concept</a:t>
@@ -6262,8 +6262,8 @@
                 <a:solidFill>
                   <a:srgbClr val="9CA3AF"/>
                 </a:solidFill>
-                <a:latin typeface="游ゴシック Light" pitchFamily="34" charset="0"/>
-                <a:ea typeface="游ゴシック Light" pitchFamily="34" charset="-122"/>
+                <a:latin typeface="Meiryo UI" pitchFamily="34" charset="0"/>
+                <a:ea typeface="Meiryo UI" pitchFamily="34" charset="-122"/>
                 <a:cs typeface="Noto Sans JP" pitchFamily="34" charset="-120"/>
               </a:rPr>
               <a:t>Power Automate for Beginners</a:t>
@@ -6301,8 +6301,8 @@
                 <a:solidFill>
                   <a:srgbClr val="9CA3AF"/>
                 </a:solidFill>
-                <a:latin typeface="游ゴシック Light" pitchFamily="34" charset="0"/>
-                <a:ea typeface="游ゴシック Light" pitchFamily="34" charset="-122"/>
+                <a:latin typeface="Meiryo UI" pitchFamily="34" charset="0"/>
+                <a:ea typeface="Meiryo UI" pitchFamily="34" charset="-122"/>
                 <a:cs typeface="Noto Sans JP" pitchFamily="34" charset="-120"/>
               </a:rPr>
               <a:t>Copyright © PA45</a:t>
@@ -6552,8 +6552,8 @@
                 <a:solidFill>
                   <a:srgbClr val="1F2937"/>
                 </a:solidFill>
-                <a:latin typeface="游ゴシック Light"/>
-                <a:ea typeface="游ゴシック Light"/>
+                <a:latin typeface="Meiryo UI"/>
+                <a:ea typeface="Meiryo UI"/>
               </a:rPr>
               <a:t>🎯 目的：思いどおりに動かない場面を体験する</a:t>
             </a:r>
@@ -6572,8 +6572,8 @@
                 <a:solidFill>
                   <a:srgbClr val="1F2937"/>
                 </a:solidFill>
-                <a:latin typeface="游ゴシック Light"/>
-                <a:ea typeface="游ゴシック Light"/>
+                <a:latin typeface="Meiryo UI"/>
+                <a:ea typeface="Meiryo UI"/>
               </a:rPr>
               <a:t>・フローを保存して、自分宛に「重要度＝高」のメールを1通送る</a:t>
             </a:r>
@@ -6584,8 +6584,8 @@
                 <a:solidFill>
                   <a:srgbClr val="1F2937"/>
                 </a:solidFill>
-                <a:latin typeface="游ゴシック Light"/>
-                <a:ea typeface="游ゴシック Light"/>
+                <a:latin typeface="Meiryo UI"/>
+                <a:ea typeface="Meiryo UI"/>
               </a:rPr>
               <a:t>・フローは成功（緑）します。でも結果は「通常メール」！</a:t>
             </a:r>
@@ -6596,8 +6596,8 @@
                 <a:solidFill>
                   <a:srgbClr val="1F2937"/>
                 </a:solidFill>
-                <a:latin typeface="游ゴシック Light"/>
-                <a:ea typeface="游ゴシック Light"/>
+                <a:latin typeface="Meiryo UI"/>
+                <a:ea typeface="Meiryo UI"/>
               </a:rPr>
               <a:t>・「重要にして送ったのに、なぜ？」 → ここで実行履歴の出番です</a:t>
             </a:r>
@@ -6652,8 +6652,8 @@
                 <a:solidFill>
                   <a:srgbClr val="2A5E9E"/>
                 </a:solidFill>
-                <a:latin typeface="游ゴシック Light"/>
-                <a:ea typeface="游ゴシック Light"/>
+                <a:latin typeface="Meiryo UI"/>
+                <a:ea typeface="Meiryo UI"/>
               </a:rPr>
               <a:t>📷 ここにスクショを貼る</a:t>
             </a:r>
@@ -6665,8 +6665,8 @@
                 <a:solidFill>
                   <a:srgbClr val="556677"/>
                 </a:solidFill>
-                <a:latin typeface="游ゴシック Light"/>
-                <a:ea typeface="游ゴシック Light"/>
+                <a:latin typeface="Meiryo UI"/>
+                <a:ea typeface="Meiryo UI"/>
               </a:rPr>
               <a:t>実行結果：成功（緑）なのに
 「通常メール」になっている画面</a:t>
@@ -6864,8 +6864,8 @@
                 <a:solidFill>
                   <a:srgbClr val="6B7280"/>
                 </a:solidFill>
-                <a:latin typeface="游ゴシック Light" pitchFamily="34" charset="0"/>
-                <a:ea typeface="游ゴシック Light" pitchFamily="34" charset="-122"/>
+                <a:latin typeface="Meiryo UI" pitchFamily="34" charset="0"/>
+                <a:ea typeface="Meiryo UI" pitchFamily="34" charset="-122"/>
                 <a:cs typeface="Noto Sans JP" pitchFamily="34" charset="-120"/>
               </a:rPr>
               <a:t>PA45｜第11回</a:t>
@@ -6903,8 +6903,8 @@
                 <a:solidFill>
                   <a:srgbClr val="1F2937"/>
                 </a:solidFill>
-                <a:latin typeface="游ゴシック Light" pitchFamily="34" charset="0"/>
-                <a:ea typeface="游ゴシック Light" pitchFamily="34" charset="-122"/>
+                <a:latin typeface="Meiryo UI" pitchFamily="34" charset="0"/>
+                <a:ea typeface="Meiryo UI" pitchFamily="34" charset="-122"/>
                 <a:cs typeface="Noto Sans JP" pitchFamily="34" charset="-120"/>
               </a:rPr>
               <a:t>フロー解説 ③  出力で原因を見つけて直す</a:t>
@@ -6976,8 +6976,8 @@
                 <a:solidFill>
                   <a:srgbClr val="9CA3AF"/>
                 </a:solidFill>
-                <a:latin typeface="游ゴシック Light" pitchFamily="34" charset="0"/>
-                <a:ea typeface="游ゴシック Light" pitchFamily="34" charset="-122"/>
+                <a:latin typeface="Meiryo UI" pitchFamily="34" charset="0"/>
+                <a:ea typeface="Meiryo UI" pitchFamily="34" charset="-122"/>
                 <a:cs typeface="ui-monospace" pitchFamily="34" charset="-120"/>
               </a:rPr>
               <a:t>Concept</a:t>
@@ -7133,8 +7133,8 @@
                 <a:solidFill>
                   <a:srgbClr val="9CA3AF"/>
                 </a:solidFill>
-                <a:latin typeface="游ゴシック Light" pitchFamily="34" charset="0"/>
-                <a:ea typeface="游ゴシック Light" pitchFamily="34" charset="-122"/>
+                <a:latin typeface="Meiryo UI" pitchFamily="34" charset="0"/>
+                <a:ea typeface="Meiryo UI" pitchFamily="34" charset="-122"/>
                 <a:cs typeface="Noto Sans JP" pitchFamily="34" charset="-120"/>
               </a:rPr>
               <a:t>Power Automate for Beginners</a:t>
@@ -7172,8 +7172,8 @@
                 <a:solidFill>
                   <a:srgbClr val="9CA3AF"/>
                 </a:solidFill>
-                <a:latin typeface="游ゴシック Light" pitchFamily="34" charset="0"/>
-                <a:ea typeface="游ゴシック Light" pitchFamily="34" charset="-122"/>
+                <a:latin typeface="Meiryo UI" pitchFamily="34" charset="0"/>
+                <a:ea typeface="Meiryo UI" pitchFamily="34" charset="-122"/>
                 <a:cs typeface="Noto Sans JP" pitchFamily="34" charset="-120"/>
               </a:rPr>
               <a:t>Copyright © PA45</a:t>
@@ -7423,8 +7423,8 @@
                 <a:solidFill>
                   <a:srgbClr val="1F2937"/>
                 </a:solidFill>
-                <a:latin typeface="游ゴシック Light"/>
-                <a:ea typeface="游ゴシック Light"/>
+                <a:latin typeface="Meiryo UI"/>
+                <a:ea typeface="Meiryo UI"/>
               </a:rPr>
               <a:t>🎯 目的：実行履歴の出力から原因を突き止める</a:t>
             </a:r>
@@ -7443,8 +7443,8 @@
                 <a:solidFill>
                   <a:srgbClr val="1F2937"/>
                 </a:solidFill>
-                <a:latin typeface="游ゴシック Light"/>
-                <a:ea typeface="游ゴシック Light"/>
+                <a:latin typeface="Meiryo UI"/>
+                <a:ea typeface="Meiryo UI"/>
               </a:rPr>
               <a:t>・実行履歴を開き、トリガーの「出力」を見る</a:t>
             </a:r>
@@ -7455,8 +7455,8 @@
                 <a:solidFill>
                   <a:srgbClr val="1F2937"/>
                 </a:solidFill>
-                <a:latin typeface="游ゴシック Light"/>
-                <a:ea typeface="游ゴシック Light"/>
+                <a:latin typeface="Meiryo UI"/>
+                <a:ea typeface="Meiryo UI"/>
               </a:rPr>
               <a:t>・重要度（Importance）の値が "High"（英語）だと分かる</a:t>
             </a:r>
@@ -7467,8 +7467,8 @@
                 <a:solidFill>
                   <a:srgbClr val="1F2937"/>
                 </a:solidFill>
-                <a:latin typeface="游ゴシック Light"/>
-                <a:ea typeface="游ゴシック Light"/>
+                <a:latin typeface="Meiryo UI"/>
+                <a:ea typeface="Meiryo UI"/>
               </a:rPr>
               <a:t>・条件の「高」を "High" に直す</a:t>
             </a:r>
@@ -7479,8 +7479,8 @@
                 <a:solidFill>
                   <a:srgbClr val="1F2937"/>
                 </a:solidFill>
-                <a:latin typeface="游ゴシック Light"/>
-                <a:ea typeface="游ゴシック Light"/>
+                <a:latin typeface="Meiryo UI"/>
+                <a:ea typeface="Meiryo UI"/>
               </a:rPr>
               <a:t>・もう一度、重要度＝高のメールを送る → 今度こそ「⚠️ 重要メールです」に進みます。直った！</a:t>
             </a:r>
@@ -7535,8 +7535,8 @@
                 <a:solidFill>
                   <a:srgbClr val="2A5E9E"/>
                 </a:solidFill>
-                <a:latin typeface="游ゴシック Light"/>
-                <a:ea typeface="游ゴシック Light"/>
+                <a:latin typeface="Meiryo UI"/>
+                <a:ea typeface="Meiryo UI"/>
               </a:rPr>
               <a:t>📷 ここにスクショを貼る</a:t>
             </a:r>
@@ -7548,8 +7548,8 @@
                 <a:solidFill>
                   <a:srgbClr val="556677"/>
                 </a:solidFill>
-                <a:latin typeface="游ゴシック Light"/>
-                <a:ea typeface="游ゴシック Light"/>
+                <a:latin typeface="Meiryo UI"/>
+                <a:ea typeface="Meiryo UI"/>
               </a:rPr>
               <a:t>トリガーの出力で 重要度が
 "High" になっている箇所</a:t>
@@ -7747,8 +7747,8 @@
                 <a:solidFill>
                   <a:srgbClr val="6B7280"/>
                 </a:solidFill>
-                <a:latin typeface="游ゴシック Light" pitchFamily="34" charset="0"/>
-                <a:ea typeface="游ゴシック Light" pitchFamily="34" charset="-122"/>
+                <a:latin typeface="Meiryo UI" pitchFamily="34" charset="0"/>
+                <a:ea typeface="Meiryo UI" pitchFamily="34" charset="-122"/>
                 <a:cs typeface="Noto Sans JP" pitchFamily="34" charset="-120"/>
               </a:rPr>
               <a:t>PA45｜第11回</a:t>
@@ -7820,8 +7820,8 @@
                 <a:solidFill>
                   <a:srgbClr val="9CA3AF"/>
                 </a:solidFill>
-                <a:latin typeface="游ゴシック Light" pitchFamily="34" charset="0"/>
-                <a:ea typeface="游ゴシック Light" pitchFamily="34" charset="-122"/>
+                <a:latin typeface="Meiryo UI" pitchFamily="34" charset="0"/>
+                <a:ea typeface="Meiryo UI" pitchFamily="34" charset="-122"/>
                 <a:cs typeface="ui-monospace" pitchFamily="34" charset="-120"/>
               </a:rPr>
               <a:t>Concept</a:t>
@@ -7977,8 +7977,8 @@
                 <a:solidFill>
                   <a:srgbClr val="9CA3AF"/>
                 </a:solidFill>
-                <a:latin typeface="游ゴシック Light" pitchFamily="34" charset="0"/>
-                <a:ea typeface="游ゴシック Light" pitchFamily="34" charset="-122"/>
+                <a:latin typeface="Meiryo UI" pitchFamily="34" charset="0"/>
+                <a:ea typeface="Meiryo UI" pitchFamily="34" charset="-122"/>
                 <a:cs typeface="Noto Sans JP" pitchFamily="34" charset="-120"/>
               </a:rPr>
               <a:t>Power Automate for Beginners</a:t>
@@ -8016,8 +8016,8 @@
                 <a:solidFill>
                   <a:srgbClr val="9CA3AF"/>
                 </a:solidFill>
-                <a:latin typeface="游ゴシック Light" pitchFamily="34" charset="0"/>
-                <a:ea typeface="游ゴシック Light" pitchFamily="34" charset="-122"/>
+                <a:latin typeface="Meiryo UI" pitchFamily="34" charset="0"/>
+                <a:ea typeface="Meiryo UI" pitchFamily="34" charset="-122"/>
                 <a:cs typeface="Noto Sans JP" pitchFamily="34" charset="-120"/>
               </a:rPr>
               <a:t>Copyright © PA45</a:t>
@@ -8235,8 +8235,8 @@
                 <a:solidFill>
                   <a:srgbClr val="6B7280"/>
                 </a:solidFill>
-                <a:latin typeface="游ゴシック Light" pitchFamily="34" charset="0"/>
-                <a:ea typeface="游ゴシック Light" pitchFamily="34" charset="-122"/>
+                <a:latin typeface="Meiryo UI" pitchFamily="34" charset="0"/>
+                <a:ea typeface="Meiryo UI" pitchFamily="34" charset="-122"/>
               </a:rPr>
               <a:t>ハンズオン行きましょう。</a:t>
             </a:r>
@@ -8602,8 +8602,8 @@
                 <a:solidFill>
                   <a:srgbClr val="FFFFFF"/>
                 </a:solidFill>
-                <a:latin typeface="游ゴシック Light" pitchFamily="34" charset="0"/>
-                <a:ea typeface="游ゴシック Light" pitchFamily="34" charset="-122"/>
+                <a:latin typeface="Meiryo UI" pitchFamily="34" charset="0"/>
+                <a:ea typeface="Meiryo UI" pitchFamily="34" charset="-122"/>
                 <a:cs typeface="Noto Sans JP" pitchFamily="34" charset="-120"/>
               </a:rPr>
               <a:t>Vol.11</a:t>
@@ -8641,8 +8641,8 @@
                 <a:solidFill>
                   <a:srgbClr val="1F2937"/>
                 </a:solidFill>
-                <a:latin typeface="游ゴシック Light" pitchFamily="34" charset="0"/>
-                <a:ea typeface="游ゴシック Light" pitchFamily="34" charset="-122"/>
+                <a:latin typeface="Meiryo UI" pitchFamily="34" charset="0"/>
+                <a:ea typeface="Meiryo UI" pitchFamily="34" charset="-122"/>
               </a:rPr>
               <a:t>今日のポイント　３つ</a:t>
             </a:r>
@@ -8702,8 +8702,8 @@
                 <a:solidFill>
                   <a:srgbClr val="1F2937"/>
                 </a:solidFill>
-                <a:latin typeface="游ゴシック Light" pitchFamily="34" charset="0"/>
-                <a:ea typeface="游ゴシック Light" pitchFamily="34" charset="-122"/>
+                <a:latin typeface="Meiryo UI" pitchFamily="34" charset="0"/>
+                <a:ea typeface="Meiryo UI" pitchFamily="34" charset="-122"/>
                 <a:cs typeface="Noto Sans JP" pitchFamily="34" charset="-120"/>
               </a:rPr>
               <a:t>① フローが成功（緑）でも、結果が正しいとは限らない</a:t>
@@ -8744,8 +8744,8 @@
                 <a:solidFill>
                   <a:srgbClr val="4B5563"/>
                 </a:solidFill>
-                <a:latin typeface="游ゴシック Light" pitchFamily="34" charset="0"/>
-                <a:ea typeface="游ゴシック Light" pitchFamily="34" charset="-122"/>
+                <a:latin typeface="Meiryo UI" pitchFamily="34" charset="0"/>
+                <a:ea typeface="Meiryo UI" pitchFamily="34" charset="-122"/>
                 <a:cs typeface="Noto Sans JP" pitchFamily="34" charset="-120"/>
               </a:rPr>
               <a:t>赤いエラーが出なくても、間違った方へ静かに進むことがあります。</a:t>
@@ -8758,8 +8758,8 @@
                 <a:solidFill>
                   <a:srgbClr val="4B5563"/>
                 </a:solidFill>
-                <a:latin typeface="游ゴシック Light"/>
-                <a:ea typeface="游ゴシック Light"/>
+                <a:latin typeface="Meiryo UI"/>
+                <a:ea typeface="Meiryo UI"/>
               </a:rPr>
               <a:t>結果を信じる前に、実行履歴の出力で「本当に合っているか」を確かめましょう。</a:t>
             </a:r>
@@ -8818,8 +8818,8 @@
                 <a:solidFill>
                   <a:srgbClr val="1F2937"/>
                 </a:solidFill>
-                <a:latin typeface="游ゴシック Light" pitchFamily="34" charset="0"/>
-                <a:ea typeface="游ゴシック Light" pitchFamily="34" charset="-122"/>
+                <a:latin typeface="Meiryo UI" pitchFamily="34" charset="0"/>
+                <a:ea typeface="Meiryo UI" pitchFamily="34" charset="-122"/>
                 <a:cs typeface="Noto Sans JP" pitchFamily="34" charset="-120"/>
               </a:rPr>
               <a:t>② 後続に値を渡すアクションは、まず出力で「本当の値」を確認</a:t>
@@ -8860,8 +8860,8 @@
                 <a:solidFill>
                   <a:srgbClr val="4B5563"/>
                 </a:solidFill>
-                <a:latin typeface="游ゴシック Light" pitchFamily="34" charset="0"/>
-                <a:ea typeface="游ゴシック Light" pitchFamily="34" charset="-122"/>
+                <a:latin typeface="Meiryo UI" pitchFamily="34" charset="0"/>
+                <a:ea typeface="Meiryo UI" pitchFamily="34" charset="-122"/>
                 <a:cs typeface="Noto Sans JP" pitchFamily="34" charset="-120"/>
               </a:rPr>
               <a:t>条件に書く前に、実行履歴でそのアクションの出力を見る。</a:t>
@@ -8873,8 +8873,8 @@
                 <a:solidFill>
                   <a:srgbClr val="4B5563"/>
                 </a:solidFill>
-                <a:latin typeface="游ゴシック Light"/>
-                <a:ea typeface="游ゴシック Light"/>
+                <a:latin typeface="Meiryo UI"/>
+                <a:ea typeface="Meiryo UI"/>
               </a:rPr>
               <a:t>「画面の表示」と「渡る値」は違うことがある、と知っておく。</a:t>
             </a:r>
@@ -8933,8 +8933,8 @@
                 <a:solidFill>
                   <a:srgbClr val="1F2937"/>
                 </a:solidFill>
-                <a:latin typeface="游ゴシック Light" pitchFamily="34" charset="0"/>
-                <a:ea typeface="游ゴシック Light" pitchFamily="34" charset="-122"/>
+                <a:latin typeface="Meiryo UI" pitchFamily="34" charset="0"/>
+                <a:ea typeface="Meiryo UI" pitchFamily="34" charset="-122"/>
                 <a:cs typeface="Noto Sans JP" pitchFamily="34" charset="-120"/>
               </a:rPr>
               <a:t>③ 表示と値は違う ── 同じ罠があちこちに</a:t>
@@ -8975,8 +8975,8 @@
                 <a:solidFill>
                   <a:srgbClr val="4B5563"/>
                 </a:solidFill>
-                <a:latin typeface="游ゴシック Light" pitchFamily="34" charset="0"/>
-                <a:ea typeface="游ゴシック Light" pitchFamily="34" charset="-122"/>
+                <a:latin typeface="Meiryo UI" pitchFamily="34" charset="0"/>
+                <a:ea typeface="Meiryo UI" pitchFamily="34" charset="-122"/>
                 <a:cs typeface="Noto Sans JP" pitchFamily="34" charset="-120"/>
               </a:rPr>
               <a:t>重要度＝High/Normal/Low、承認結果＝Approve/Reject、はい・いいえ列＝true/false。</a:t>
@@ -8989,8 +8989,8 @@
                 <a:solidFill>
                   <a:srgbClr val="4B5563"/>
                 </a:solidFill>
-                <a:latin typeface="游ゴシック Light"/>
-                <a:ea typeface="游ゴシック Light"/>
+                <a:latin typeface="Meiryo UI"/>
+                <a:ea typeface="Meiryo UI"/>
               </a:rPr>
               <a:t>どれも英語や真偽値。出力を見れば「本当の値」が分かります。</a:t>
             </a:r>
@@ -9026,8 +9026,8 @@
                 <a:solidFill>
                   <a:srgbClr val="9CA3AF"/>
                 </a:solidFill>
-                <a:latin typeface="游ゴシック Light" pitchFamily="34" charset="0"/>
-                <a:ea typeface="游ゴシック Light" pitchFamily="34" charset="-122"/>
+                <a:latin typeface="Meiryo UI" pitchFamily="34" charset="0"/>
+                <a:ea typeface="Meiryo UI" pitchFamily="34" charset="-122"/>
                 <a:cs typeface="Noto Sans JP" pitchFamily="34" charset="-120"/>
               </a:rPr>
               <a:t>#PA45</a:t>
@@ -9345,8 +9345,8 @@
                 <a:solidFill>
                   <a:srgbClr val="6D28D9"/>
                 </a:solidFill>
-                <a:latin typeface="游ゴシック Light" pitchFamily="34" charset="0"/>
-                <a:ea typeface="游ゴシック Light" pitchFamily="34" charset="-122"/>
+                <a:latin typeface="Meiryo UI" pitchFamily="34" charset="0"/>
+                <a:ea typeface="Meiryo UI" pitchFamily="34" charset="-122"/>
                 <a:cs typeface="Noto Sans JP" pitchFamily="34" charset="-120"/>
               </a:rPr>
               <a:t>重要メール通知</a:t>
@@ -9384,8 +9384,8 @@
                 <a:solidFill>
                   <a:srgbClr val="1F2937"/>
                 </a:solidFill>
-                <a:latin typeface="游ゴシック Light" pitchFamily="34" charset="0"/>
-                <a:ea typeface="游ゴシック Light" pitchFamily="34" charset="-122"/>
+                <a:latin typeface="Meiryo UI" pitchFamily="34" charset="0"/>
+                <a:ea typeface="Meiryo UI" pitchFamily="34" charset="-122"/>
                 <a:cs typeface="Noto Sans JP" pitchFamily="34" charset="-120"/>
               </a:rPr>
               <a:t>重要度が高いメールを</a:t>
@@ -9397,8 +9397,8 @@
                 <a:solidFill>
                   <a:srgbClr val="1F2937"/>
                 </a:solidFill>
-                <a:latin typeface="游ゴシック Light"/>
-                <a:ea typeface="游ゴシック Light"/>
+                <a:latin typeface="Meiryo UI"/>
+                <a:ea typeface="Meiryo UI"/>
               </a:rPr>
               <a:t>Teams等へすぐ通知</a:t>
             </a:r>
@@ -9437,8 +9437,8 @@
                 <a:solidFill>
                   <a:srgbClr val="4B5563"/>
                 </a:solidFill>
-                <a:latin typeface="游ゴシック Light" pitchFamily="34" charset="0"/>
-                <a:ea typeface="游ゴシック Light" pitchFamily="34" charset="-122"/>
+                <a:latin typeface="Meiryo UI" pitchFamily="34" charset="0"/>
+                <a:ea typeface="Meiryo UI" pitchFamily="34" charset="-122"/>
                 <a:cs typeface="Noto Sans JP" pitchFamily="34" charset="-120"/>
               </a:rPr>
               <a:t>新しいメールが届いたとき</a:t>
@@ -9447,8 +9447,8 @@
           <a:p>
             <a:r>
               <a:rPr sz="1600" b="1">
-                <a:latin typeface="游ゴシック Light"/>
-                <a:ea typeface="游ゴシック Light"/>
+                <a:latin typeface="Meiryo UI"/>
+                <a:ea typeface="Meiryo UI"/>
               </a:rPr>
               <a:t>→ 条件（重要度）</a:t>
             </a:r>
@@ -9456,8 +9456,8 @@
           <a:p>
             <a:r>
               <a:rPr sz="1600" b="1">
-                <a:latin typeface="游ゴシック Light"/>
-                <a:ea typeface="游ゴシック Light"/>
+                <a:latin typeface="Meiryo UI"/>
+                <a:ea typeface="Meiryo UI"/>
               </a:rPr>
               <a:t>→ Teamsで通知</a:t>
             </a:r>
@@ -9527,8 +9527,8 @@
                 <a:solidFill>
                   <a:srgbClr val="A78BFA"/>
                 </a:solidFill>
-                <a:latin typeface="游ゴシック Light" pitchFamily="34" charset="0"/>
-                <a:ea typeface="游ゴシック Light" pitchFamily="34" charset="-122"/>
+                <a:latin typeface="Meiryo UI" pitchFamily="34" charset="0"/>
+                <a:ea typeface="Meiryo UI" pitchFamily="34" charset="-122"/>
                 <a:cs typeface="Noto Sans JP" pitchFamily="34" charset="-120"/>
               </a:rPr>
               <a:t>メール → 条件 → 通知</a:t>
@@ -9711,8 +9711,8 @@
                 <a:solidFill>
                   <a:srgbClr val="047857"/>
                 </a:solidFill>
-                <a:latin typeface="游ゴシック Light" pitchFamily="34" charset="0"/>
-                <a:ea typeface="游ゴシック Light" pitchFamily="34" charset="-122"/>
+                <a:latin typeface="Meiryo UI" pitchFamily="34" charset="0"/>
+                <a:ea typeface="Meiryo UI" pitchFamily="34" charset="-122"/>
                 <a:cs typeface="Noto Sans JP" pitchFamily="34" charset="-120"/>
               </a:rPr>
               <a:t>差出人で振分け</a:t>
@@ -9749,8 +9749,8 @@
                 <a:solidFill>
                   <a:srgbClr val="1F2937"/>
                 </a:solidFill>
-                <a:latin typeface="游ゴシック Light" pitchFamily="34" charset="0"/>
-                <a:ea typeface="游ゴシック Light" pitchFamily="34" charset="-122"/>
+                <a:latin typeface="Meiryo UI" pitchFamily="34" charset="0"/>
+                <a:ea typeface="Meiryo UI" pitchFamily="34" charset="-122"/>
                 <a:cs typeface="Noto Sans JP" pitchFamily="34" charset="-120"/>
               </a:rPr>
               <a:t>上司・取引先のメールを</a:t>
@@ -9763,8 +9763,8 @@
                 <a:solidFill>
                   <a:srgbClr val="1F2937"/>
                 </a:solidFill>
-                <a:latin typeface="游ゴシック Light"/>
-                <a:ea typeface="游ゴシック Light"/>
+                <a:latin typeface="Meiryo UI"/>
+                <a:ea typeface="Meiryo UI"/>
               </a:rPr>
               <a:t>別フォルダへ自動仕分け</a:t>
             </a:r>
@@ -9803,8 +9803,8 @@
                 <a:solidFill>
                   <a:srgbClr val="4B5563"/>
                 </a:solidFill>
-                <a:latin typeface="游ゴシック Light" pitchFamily="34" charset="0"/>
-                <a:ea typeface="游ゴシック Light" pitchFamily="34" charset="-122"/>
+                <a:latin typeface="Meiryo UI" pitchFamily="34" charset="0"/>
+                <a:ea typeface="Meiryo UI" pitchFamily="34" charset="-122"/>
                 <a:cs typeface="Noto Sans JP" pitchFamily="34" charset="-120"/>
               </a:rPr>
               <a:t>新しいメールが届いたとき</a:t>
@@ -9813,8 +9813,8 @@
           <a:p>
             <a:r>
               <a:rPr sz="1600" b="1">
-                <a:latin typeface="游ゴシック Light"/>
-                <a:ea typeface="游ゴシック Light"/>
+                <a:latin typeface="Meiryo UI"/>
+                <a:ea typeface="Meiryo UI"/>
               </a:rPr>
               <a:t>→ 条件（差出人）</a:t>
             </a:r>
@@ -9822,8 +9822,8 @@
           <a:p>
             <a:r>
               <a:rPr sz="1600" b="1">
-                <a:latin typeface="游ゴシック Light"/>
-                <a:ea typeface="游ゴシック Light"/>
+                <a:latin typeface="Meiryo UI"/>
+                <a:ea typeface="Meiryo UI"/>
               </a:rPr>
               <a:t>→ フォルダへ移動</a:t>
             </a:r>
@@ -9893,8 +9893,8 @@
                 <a:solidFill>
                   <a:srgbClr val="34D399"/>
                 </a:solidFill>
-                <a:latin typeface="游ゴシック Light" pitchFamily="34" charset="0"/>
-                <a:ea typeface="游ゴシック Light" pitchFamily="34" charset="-122"/>
+                <a:latin typeface="Meiryo UI" pitchFamily="34" charset="0"/>
+                <a:ea typeface="Meiryo UI" pitchFamily="34" charset="-122"/>
                 <a:cs typeface="Noto Sans JP" pitchFamily="34" charset="-120"/>
               </a:rPr>
               <a:t>メール → 条件 → 仕分け</a:t>
@@ -10077,8 +10077,8 @@
                 <a:solidFill>
                   <a:srgbClr val="1D4ED8"/>
                 </a:solidFill>
-                <a:latin typeface="游ゴシック Light" pitchFamily="34" charset="0"/>
-                <a:ea typeface="游ゴシック Light" pitchFamily="34" charset="-122"/>
+                <a:latin typeface="Meiryo UI" pitchFamily="34" charset="0"/>
+                <a:ea typeface="Meiryo UI" pitchFamily="34" charset="-122"/>
                 <a:cs typeface="Noto Sans JP" pitchFamily="34" charset="-120"/>
               </a:rPr>
               <a:t>件名で仕分け</a:t>
@@ -10115,8 +10115,8 @@
                 <a:solidFill>
                   <a:srgbClr val="1F2937"/>
                 </a:solidFill>
-                <a:latin typeface="游ゴシック Light" pitchFamily="34" charset="0"/>
-                <a:ea typeface="游ゴシック Light" pitchFamily="34" charset="-122"/>
+                <a:latin typeface="Meiryo UI" pitchFamily="34" charset="0"/>
+                <a:ea typeface="Meiryo UI" pitchFamily="34" charset="-122"/>
                 <a:cs typeface="Noto Sans JP" pitchFamily="34" charset="-120"/>
               </a:rPr>
               <a:t>件名に特定の語を含む</a:t>
@@ -10128,8 +10128,8 @@
                 <a:solidFill>
                   <a:srgbClr val="1F2937"/>
                 </a:solidFill>
-                <a:latin typeface="游ゴシック Light"/>
-                <a:ea typeface="游ゴシック Light"/>
+                <a:latin typeface="Meiryo UI"/>
+                <a:ea typeface="Meiryo UI"/>
               </a:rPr>
               <a:t>メールを自動で記録</a:t>
             </a:r>
@@ -10168,8 +10168,8 @@
                 <a:solidFill>
                   <a:srgbClr val="4B5563"/>
                 </a:solidFill>
-                <a:latin typeface="游ゴシック Light" pitchFamily="34" charset="0"/>
-                <a:ea typeface="游ゴシック Light" pitchFamily="34" charset="-122"/>
+                <a:latin typeface="Meiryo UI" pitchFamily="34" charset="0"/>
+                <a:ea typeface="Meiryo UI" pitchFamily="34" charset="-122"/>
                 <a:cs typeface="Noto Sans JP" pitchFamily="34" charset="-120"/>
               </a:rPr>
               <a:t>新しいメールが届いたとき</a:t>
@@ -10178,8 +10178,8 @@
           <a:p>
             <a:r>
               <a:rPr sz="1600" b="1">
-                <a:latin typeface="游ゴシック Light"/>
-                <a:ea typeface="游ゴシック Light"/>
+                <a:latin typeface="Meiryo UI"/>
+                <a:ea typeface="Meiryo UI"/>
               </a:rPr>
               <a:t>→ 条件（件名）</a:t>
             </a:r>
@@ -10187,8 +10187,8 @@
           <a:p>
             <a:r>
               <a:rPr sz="1600" b="1">
-                <a:latin typeface="游ゴシック Light"/>
-                <a:ea typeface="游ゴシック Light"/>
+                <a:latin typeface="Meiryo UI"/>
+                <a:ea typeface="Meiryo UI"/>
               </a:rPr>
               <a:t>→ リストに記録</a:t>
             </a:r>
@@ -10313,8 +10313,8 @@
                 <a:solidFill>
                   <a:srgbClr val="1F2937"/>
                 </a:solidFill>
-                <a:latin typeface="游ゴシック Light" pitchFamily="34" charset="0"/>
-                <a:ea typeface="游ゴシック Light" pitchFamily="34" charset="-122"/>
+                <a:latin typeface="Meiryo UI" pitchFamily="34" charset="0"/>
+                <a:ea typeface="Meiryo UI" pitchFamily="34" charset="-122"/>
                 <a:cs typeface="Noto Sans JP" pitchFamily="34" charset="-120"/>
               </a:rPr>
               <a:t>メールの仕分けは応用がきく</a:t>
@@ -10351,8 +10351,8 @@
                 <a:solidFill>
                   <a:srgbClr val="9CA3AF"/>
                 </a:solidFill>
-                <a:latin typeface="游ゴシック Light" pitchFamily="34" charset="0"/>
-                <a:ea typeface="游ゴシック Light" pitchFamily="34" charset="-122"/>
+                <a:latin typeface="Meiryo UI" pitchFamily="34" charset="0"/>
+                <a:ea typeface="Meiryo UI" pitchFamily="34" charset="-122"/>
                 <a:cs typeface="ui-monospace" pitchFamily="34" charset="-120"/>
               </a:rPr>
               <a:t>Use Cases</a:t>
@@ -10451,8 +10451,8 @@
                 <a:solidFill>
                   <a:srgbClr val="9CA3AF"/>
                 </a:solidFill>
-                <a:latin typeface="游ゴシック Light" pitchFamily="34" charset="0"/>
-                <a:ea typeface="游ゴシック Light" pitchFamily="34" charset="-122"/>
+                <a:latin typeface="Meiryo UI" pitchFamily="34" charset="0"/>
+                <a:ea typeface="Meiryo UI" pitchFamily="34" charset="-122"/>
                 <a:cs typeface="Noto Sans JP" pitchFamily="34" charset="-120"/>
               </a:rPr>
               <a:t>Power Automate for Beginners</a:t>
@@ -10490,8 +10490,8 @@
                 <a:solidFill>
                   <a:srgbClr val="9CA3AF"/>
                 </a:solidFill>
-                <a:latin typeface="游ゴシック Light" pitchFamily="34" charset="0"/>
-                <a:ea typeface="游ゴシック Light" pitchFamily="34" charset="-122"/>
+                <a:latin typeface="Meiryo UI" pitchFamily="34" charset="0"/>
+                <a:ea typeface="Meiryo UI" pitchFamily="34" charset="-122"/>
                 <a:cs typeface="Noto Sans JP" pitchFamily="34" charset="-120"/>
               </a:rPr>
               <a:t>Copyright © PA45</a:t>
@@ -10837,8 +10837,8 @@
                 <a:solidFill>
                   <a:srgbClr val="9CA3AF"/>
                 </a:solidFill>
-                <a:latin typeface="游ゴシック Light" pitchFamily="34" charset="0"/>
-                <a:ea typeface="游ゴシック Light" pitchFamily="34" charset="-122"/>
+                <a:latin typeface="Meiryo UI" pitchFamily="34" charset="0"/>
+                <a:ea typeface="Meiryo UI" pitchFamily="34" charset="-122"/>
                 <a:cs typeface="Noto Sans JP" pitchFamily="34" charset="-120"/>
               </a:rPr>
               <a:t>Next Action</a:t>
@@ -10876,8 +10876,8 @@
                 <a:solidFill>
                   <a:srgbClr val="1F2937"/>
                 </a:solidFill>
-                <a:latin typeface="游ゴシック Light" pitchFamily="34" charset="0"/>
-                <a:ea typeface="游ゴシック Light" pitchFamily="34" charset="-122"/>
+                <a:latin typeface="Meiryo UI" pitchFamily="34" charset="0"/>
+                <a:ea typeface="Meiryo UI" pitchFamily="34" charset="-122"/>
                 <a:cs typeface="Noto Sans JP" pitchFamily="34" charset="-120"/>
               </a:rPr>
               <a:t>アンケートのお願い</a:t>
@@ -10915,8 +10915,8 @@
                 <a:solidFill>
                   <a:srgbClr val="6B7280"/>
                 </a:solidFill>
-                <a:latin typeface="游ゴシック Light" pitchFamily="34" charset="0"/>
-                <a:ea typeface="游ゴシック Light" pitchFamily="34" charset="-122"/>
+                <a:latin typeface="Meiryo UI" pitchFamily="34" charset="0"/>
+                <a:ea typeface="Meiryo UI" pitchFamily="34" charset="-122"/>
                 <a:cs typeface="Noto Sans JP" pitchFamily="34" charset="-120"/>
               </a:rPr>
               <a:t>所要時間：約1分</a:t>
@@ -11000,8 +11000,8 @@
                 <a:solidFill>
                   <a:srgbClr val="1F2937"/>
                 </a:solidFill>
-                <a:latin typeface="游ゴシック Light" pitchFamily="34" charset="0"/>
-                <a:ea typeface="游ゴシック Light" pitchFamily="34" charset="-122"/>
+                <a:latin typeface="Meiryo UI" pitchFamily="34" charset="0"/>
+                <a:ea typeface="Meiryo UI" pitchFamily="34" charset="-122"/>
                 <a:cs typeface="Noto Sans JP" pitchFamily="34" charset="-120"/>
               </a:rPr>
               <a:t>チャットをご確認ください</a:t>
@@ -11039,8 +11039,8 @@
                 <a:solidFill>
                   <a:srgbClr val="4B5563"/>
                 </a:solidFill>
-                <a:latin typeface="游ゴシック Light" pitchFamily="34" charset="0"/>
-                <a:ea typeface="游ゴシック Light" pitchFamily="34" charset="-122"/>
+                <a:latin typeface="Meiryo UI" pitchFamily="34" charset="0"/>
+                <a:ea typeface="Meiryo UI" pitchFamily="34" charset="-122"/>
                 <a:cs typeface="Noto Sans JP" pitchFamily="34" charset="-120"/>
               </a:rPr>
               <a:t>このあとチャット欄にアンケートURLを貼ります。</a:t>
@@ -11124,8 +11124,8 @@
                 <a:solidFill>
                   <a:srgbClr val="1F2937"/>
                 </a:solidFill>
-                <a:latin typeface="游ゴシック Light" pitchFamily="34" charset="0"/>
-                <a:ea typeface="游ゴシック Light" pitchFamily="34" charset="-122"/>
+                <a:latin typeface="Meiryo UI" pitchFamily="34" charset="0"/>
+                <a:ea typeface="Meiryo UI" pitchFamily="34" charset="-122"/>
                 <a:cs typeface="Noto Sans JP" pitchFamily="34" charset="-120"/>
               </a:rPr>
               <a:t>安心の匿名フォーム</a:t>
@@ -11160,8 +11160,8 @@
             </a:pPr>
             <a:r>
               <a:rPr lang="ja-JP" altLang="en-US">
-                <a:latin typeface="游ゴシック Light"/>
-                <a:ea typeface="游ゴシック Light"/>
+                <a:latin typeface="Meiryo UI"/>
+                <a:ea typeface="Meiryo UI"/>
               </a:rPr>
               <a:t>バッジ送付ご希望の方のみ送信用の</a:t>
             </a:r>
@@ -11173,8 +11173,8 @@
             </a:pPr>
             <a:r>
               <a:rPr lang="ja-JP" altLang="en-US">
-                <a:latin typeface="游ゴシック Light"/>
-                <a:ea typeface="游ゴシック Light"/>
+                <a:latin typeface="Meiryo UI"/>
+                <a:ea typeface="Meiryo UI"/>
               </a:rPr>
               <a:t>メールアドレスを記入（任意）</a:t>
             </a:r>
@@ -11211,8 +11211,8 @@
                 <a:solidFill>
                   <a:srgbClr val="9CA3AF"/>
                 </a:solidFill>
-                <a:latin typeface="游ゴシック Light" pitchFamily="34" charset="0"/>
-                <a:ea typeface="游ゴシック Light" pitchFamily="34" charset="-122"/>
+                <a:latin typeface="Meiryo UI" pitchFamily="34" charset="0"/>
+                <a:ea typeface="Meiryo UI" pitchFamily="34" charset="-122"/>
                 <a:cs typeface="Noto Sans JP" pitchFamily="34" charset="-120"/>
               </a:rPr>
               <a:t>🎁 </a:t>
@@ -11222,8 +11222,8 @@
                 <a:solidFill>
                   <a:srgbClr val="9CA3AF"/>
                 </a:solidFill>
-                <a:latin typeface="游ゴシック Light" pitchFamily="34" charset="0"/>
-                <a:ea typeface="游ゴシック Light" pitchFamily="34" charset="-122"/>
+                <a:latin typeface="Meiryo UI" pitchFamily="34" charset="0"/>
+                <a:ea typeface="Meiryo UI" pitchFamily="34" charset="-122"/>
                 <a:cs typeface="Noto Sans JP" pitchFamily="34" charset="-120"/>
               </a:rPr>
               <a:t>Special </a:t>
@@ -11233,8 +11233,8 @@
                 <a:solidFill>
                   <a:srgbClr val="9CA3AF"/>
                 </a:solidFill>
-                <a:latin typeface="游ゴシック Light" pitchFamily="34" charset="0"/>
-                <a:ea typeface="游ゴシック Light" pitchFamily="34" charset="-122"/>
+                <a:latin typeface="Meiryo UI" pitchFamily="34" charset="0"/>
+                <a:ea typeface="Meiryo UI" pitchFamily="34" charset="-122"/>
                 <a:cs typeface="Noto Sans JP" pitchFamily="34" charset="-120"/>
               </a:rPr>
               <a:t>Gift</a:t>
@@ -11306,8 +11306,8 @@
                 <a:solidFill>
                   <a:srgbClr val="374151"/>
                 </a:solidFill>
-                <a:latin typeface="游ゴシック Light" pitchFamily="34" charset="0"/>
-                <a:ea typeface="游ゴシック Light" pitchFamily="34" charset="-122"/>
+                <a:latin typeface="Meiryo UI" pitchFamily="34" charset="0"/>
+                <a:ea typeface="Meiryo UI" pitchFamily="34" charset="-122"/>
                 <a:cs typeface="Noto Sans JP" pitchFamily="34" charset="-120"/>
               </a:rPr>
               <a:t>PA45 バッジ</a:t>
@@ -11463,8 +11463,8 @@
                 <a:solidFill>
                   <a:srgbClr val="374151"/>
                 </a:solidFill>
-                <a:latin typeface="游ゴシック Light" pitchFamily="34" charset="0"/>
-                <a:ea typeface="游ゴシック Light" pitchFamily="34" charset="-122"/>
+                <a:latin typeface="Meiryo UI" pitchFamily="34" charset="0"/>
+                <a:ea typeface="Meiryo UI" pitchFamily="34" charset="-122"/>
                 <a:cs typeface="Noto Sans JP" pitchFamily="34" charset="-120"/>
               </a:rPr>
               <a:t>後日、お届けします</a:t>
@@ -11536,8 +11536,8 @@
                 <a:solidFill>
                   <a:srgbClr val="1F2937"/>
                 </a:solidFill>
-                <a:latin typeface="游ゴシック Light" pitchFamily="34" charset="0"/>
-                <a:ea typeface="游ゴシック Light" pitchFamily="34" charset="-122"/>
+                <a:latin typeface="Meiryo UI" pitchFamily="34" charset="0"/>
+                <a:ea typeface="Meiryo UI" pitchFamily="34" charset="-122"/>
                 <a:cs typeface="Noto Sans JP" pitchFamily="34" charset="-120"/>
               </a:rPr>
               <a:t>PA45｜第11回</a:t>
@@ -11575,8 +11575,8 @@
                 <a:solidFill>
                   <a:srgbClr val="9CA3AF"/>
                 </a:solidFill>
-                <a:latin typeface="游ゴシック Light" pitchFamily="34" charset="0"/>
-                <a:ea typeface="游ゴシック Light" pitchFamily="34" charset="-122"/>
+                <a:latin typeface="Meiryo UI" pitchFamily="34" charset="0"/>
+                <a:ea typeface="Meiryo UI" pitchFamily="34" charset="-122"/>
                 <a:cs typeface="Noto Sans JP" pitchFamily="34" charset="-120"/>
               </a:rPr>
               <a:t>|</a:t>
@@ -11614,8 +11614,8 @@
                 <a:solidFill>
                   <a:srgbClr val="2563EB"/>
                 </a:solidFill>
-                <a:latin typeface="游ゴシック Light" pitchFamily="34" charset="0"/>
-                <a:ea typeface="游ゴシック Light" pitchFamily="34" charset="-122"/>
+                <a:latin typeface="Meiryo UI" pitchFamily="34" charset="0"/>
+                <a:ea typeface="Meiryo UI" pitchFamily="34" charset="-122"/>
                 <a:cs typeface="Noto Sans JP" pitchFamily="34" charset="-120"/>
               </a:rPr>
               <a:t>#PA45</a:t>
@@ -11653,8 +11653,8 @@
                 <a:solidFill>
                   <a:srgbClr val="6B7280"/>
                 </a:solidFill>
-                <a:latin typeface="游ゴシック Light" pitchFamily="34" charset="0"/>
-                <a:ea typeface="游ゴシック Light" pitchFamily="34" charset="-122"/>
+                <a:latin typeface="Meiryo UI" pitchFamily="34" charset="0"/>
+                <a:ea typeface="Meiryo UI" pitchFamily="34" charset="-122"/>
                 <a:cs typeface="Noto Sans JP" pitchFamily="34" charset="-120"/>
               </a:rPr>
               <a:t>Power Automate for Beginners</a:t>
@@ -11692,8 +11692,8 @@
                 <a:solidFill>
                   <a:srgbClr val="9CA3AF"/>
                 </a:solidFill>
-                <a:latin typeface="游ゴシック Light" pitchFamily="34" charset="0"/>
-                <a:ea typeface="游ゴシック Light" pitchFamily="34" charset="-122"/>
+                <a:latin typeface="Meiryo UI" pitchFamily="34" charset="0"/>
+                <a:ea typeface="Meiryo UI" pitchFamily="34" charset="-122"/>
                 <a:cs typeface="Noto Sans JP" pitchFamily="34" charset="-120"/>
               </a:rPr>
               <a:t>Copyright © PA45</a:t>
@@ -11777,8 +11777,8 @@
                 <a:solidFill>
                   <a:schemeClr val="bg1"/>
                 </a:solidFill>
-                <a:latin typeface="游ゴシック Light" pitchFamily="34" charset="0"/>
-                <a:ea typeface="游ゴシック Light" pitchFamily="34" charset="-122"/>
+                <a:latin typeface="Meiryo UI" pitchFamily="34" charset="0"/>
+                <a:ea typeface="Meiryo UI" pitchFamily="34" charset="-122"/>
                 <a:cs typeface="Noto Sans JP" pitchFamily="34" charset="-120"/>
               </a:rPr>
               <a:t>？</a:t>
@@ -12026,22 +12026,22 @@
             </a:pPr>
             <a:r>
               <a:rPr lang="ja-JP" altLang="en-US">
-                <a:latin typeface="游ゴシック Light"/>
-                <a:ea typeface="游ゴシック Light"/>
+                <a:latin typeface="Meiryo UI"/>
+                <a:ea typeface="Meiryo UI"/>
               </a:rPr>
               <a:t>チャット欄に</a:t>
             </a:r>
             <a:r>
               <a:rPr lang="en-US" altLang="ja-JP">
-                <a:latin typeface="游ゴシック Light"/>
-                <a:ea typeface="游ゴシック Light"/>
+                <a:latin typeface="Meiryo UI"/>
+                <a:ea typeface="Meiryo UI"/>
               </a:rPr>
               <a:t>URL</a:t>
             </a:r>
             <a:r>
               <a:rPr lang="ja-JP" altLang="en-US">
-                <a:latin typeface="游ゴシック Light"/>
-                <a:ea typeface="游ゴシック Light"/>
+                <a:latin typeface="Meiryo UI"/>
+                <a:ea typeface="Meiryo UI"/>
               </a:rPr>
               <a:t>を貼り付けます</a:t>
             </a:r>
@@ -12127,8 +12127,8 @@
                 <a:solidFill>
                   <a:srgbClr val="FFFFFF"/>
                 </a:solidFill>
-                <a:latin typeface="游ゴシック Light"/>
-                <a:ea typeface="游ゴシック Light"/>
+                <a:latin typeface="Meiryo UI"/>
+                <a:ea typeface="Meiryo UI"/>
               </a:rPr>
               <a:t>事前準備（今回はほぼ不要です）</a:t>
             </a:r>
@@ -12162,8 +12162,8 @@
                 <a:solidFill>
                   <a:srgbClr val="333333"/>
                 </a:solidFill>
-                <a:latin typeface="游ゴシック Light"/>
-                <a:ea typeface="游ゴシック Light"/>
+                <a:latin typeface="Meiryo UI"/>
+                <a:ea typeface="Meiryo UI"/>
               </a:rPr>
               <a:t>今回のハンズオンは特別な準備が要りません。下の2つだけ確認しておきましょう。</a:t>
             </a:r>
@@ -12217,8 +12217,8 @@
                 <a:solidFill>
                   <a:srgbClr val="2A7DD4"/>
                 </a:solidFill>
-                <a:latin typeface="游ゴシック Light"/>
-                <a:ea typeface="游ゴシック Light"/>
+                <a:latin typeface="Meiryo UI"/>
+                <a:ea typeface="Meiryo UI"/>
               </a:rPr>
               <a:t>STEP 1   Power Automate にサインインできる</a:t>
             </a:r>
@@ -12229,8 +12229,8 @@
                 <a:solidFill>
                   <a:srgbClr val="2A7DD4"/>
                 </a:solidFill>
-                <a:latin typeface="游ゴシック Light"/>
-                <a:ea typeface="游ゴシック Light"/>
+                <a:latin typeface="Meiryo UI"/>
+                <a:ea typeface="Meiryo UI"/>
               </a:rPr>
               <a:t>👉 make.powerautomate.com を開いて、サインインできる状態にしておきます</a:t>
             </a:r>
@@ -12284,8 +12284,8 @@
                 <a:solidFill>
                   <a:srgbClr val="2A7DD4"/>
                 </a:solidFill>
-                <a:latin typeface="游ゴシック Light"/>
-                <a:ea typeface="游ゴシック Light"/>
+                <a:latin typeface="Meiryo UI"/>
+                <a:ea typeface="Meiryo UI"/>
               </a:rPr>
               <a:t>STEP 2   自分のメール（Outlook）が使える</a:t>
             </a:r>
@@ -12296,8 +12296,8 @@
                 <a:solidFill>
                   <a:srgbClr val="2A7DD4"/>
                 </a:solidFill>
-                <a:latin typeface="游ゴシック Light"/>
-                <a:ea typeface="游ゴシック Light"/>
+                <a:latin typeface="Meiryo UI"/>
+                <a:ea typeface="Meiryo UI"/>
               </a:rPr>
               <a:t>👉 ハンズオン中、自分から自分へ1通メールを送ってフローを動かします。それだけです</a:t>
             </a:r>
@@ -12590,8 +12590,8 @@
                 <a:solidFill>
                   <a:srgbClr val="1E40AF"/>
                 </a:solidFill>
-                <a:latin typeface="游ゴシック Light" pitchFamily="34" charset="0"/>
-                <a:ea typeface="游ゴシック Light" pitchFamily="34" charset="-122"/>
+                <a:latin typeface="Meiryo UI" pitchFamily="34" charset="0"/>
+                <a:ea typeface="Meiryo UI" pitchFamily="34" charset="-122"/>
                 <a:cs typeface="Noto Sans JP" pitchFamily="34" charset="-120"/>
               </a:rPr>
               <a:t>Power Automate 入門講座</a:t>
@@ -12677,8 +12677,8 @@
                 <a:solidFill>
                   <a:srgbClr val="4B5563"/>
                 </a:solidFill>
-                <a:latin typeface="游ゴシック Light" pitchFamily="34" charset="0"/>
-                <a:ea typeface="游ゴシック Light" pitchFamily="34" charset="-122"/>
+                <a:latin typeface="Meiryo UI" pitchFamily="34" charset="0"/>
+                <a:ea typeface="Meiryo UI" pitchFamily="34" charset="-122"/>
                 <a:cs typeface="Noto Sans JP" pitchFamily="34" charset="-120"/>
               </a:rPr>
               <a:t>Vol.11</a:t>
@@ -12716,8 +12716,8 @@
                 <a:solidFill>
                   <a:srgbClr val="0078D4"/>
                 </a:solidFill>
-                <a:latin typeface="游ゴシック Light" pitchFamily="34" charset="0"/>
-                <a:ea typeface="游ゴシック Light" pitchFamily="34" charset="-122"/>
+                <a:latin typeface="Meiryo UI" pitchFamily="34" charset="0"/>
+                <a:ea typeface="Meiryo UI" pitchFamily="34" charset="-122"/>
                 <a:cs typeface="Noto Sans JP" pitchFamily="34" charset="-120"/>
               </a:rPr>
               <a:t>PA45【メール受信 × 条件分岐 × 実行履歴】</a:t>
@@ -12755,8 +12755,8 @@
                 <a:solidFill>
                   <a:srgbClr val="1F2937"/>
                 </a:solidFill>
-                <a:latin typeface="游ゴシック Light" pitchFamily="34" charset="0"/>
-                <a:ea typeface="游ゴシック Light" pitchFamily="34" charset="-122"/>
+                <a:latin typeface="Meiryo UI" pitchFamily="34" charset="0"/>
+                <a:ea typeface="Meiryo UI" pitchFamily="34" charset="-122"/>
                 <a:cs typeface="Noto Sans JP" pitchFamily="34" charset="-120"/>
               </a:rPr>
               <a:t>第11回： </a:t>
@@ -12768,8 +12768,8 @@
                 <a:solidFill>
                   <a:srgbClr val="1F2937"/>
                 </a:solidFill>
-                <a:latin typeface="游ゴシック Light"/>
-                <a:ea typeface="游ゴシック Light"/>
+                <a:latin typeface="Meiryo UI"/>
+                <a:ea typeface="Meiryo UI"/>
               </a:rPr>
               <a:t>失敗しないフロー設計</a:t>
             </a:r>
@@ -12780,8 +12780,8 @@
                 <a:solidFill>
                   <a:srgbClr val="1F2937"/>
                 </a:solidFill>
-                <a:latin typeface="游ゴシック Light"/>
-                <a:ea typeface="游ゴシック Light"/>
+                <a:latin typeface="Meiryo UI"/>
+                <a:ea typeface="Meiryo UI"/>
               </a:rPr>
               <a:t>実行履歴を読めるようになろう</a:t>
             </a:r>
@@ -12851,8 +12851,8 @@
                 <a:solidFill>
                   <a:srgbClr val="9CA3AF"/>
                 </a:solidFill>
-                <a:latin typeface="游ゴシック Light" pitchFamily="34" charset="0"/>
-                <a:ea typeface="游ゴシック Light" pitchFamily="34" charset="-122"/>
+                <a:latin typeface="Meiryo UI" pitchFamily="34" charset="0"/>
+                <a:ea typeface="Meiryo UI" pitchFamily="34" charset="-122"/>
                 <a:cs typeface="Noto Sans JP" pitchFamily="34" charset="-120"/>
               </a:rPr>
               <a:t>Theme　メールの重要度で条件分岐｜実行履歴の出力を読む</a:t>
@@ -12890,8 +12890,8 @@
                 <a:solidFill>
                   <a:srgbClr val="9CA3AF"/>
                 </a:solidFill>
-                <a:latin typeface="游ゴシック Light" pitchFamily="34" charset="0"/>
-                <a:ea typeface="游ゴシック Light" pitchFamily="34" charset="-122"/>
+                <a:latin typeface="Meiryo UI" pitchFamily="34" charset="0"/>
+                <a:ea typeface="Meiryo UI" pitchFamily="34" charset="-122"/>
                 <a:cs typeface="Noto Sans JP" pitchFamily="34" charset="-120"/>
               </a:rPr>
               <a:t>Target　条件分岐（Vol.3）を触った方／はじめての方も、見るだけでOK</a:t>
@@ -12928,8 +12928,8 @@
                 <a:solidFill>
                   <a:srgbClr val="9CA3AF"/>
                 </a:solidFill>
-                <a:latin typeface="游ゴシック Light" pitchFamily="34" charset="0"/>
-                <a:ea typeface="游ゴシック Light" pitchFamily="34" charset="-122"/>
+                <a:latin typeface="Meiryo UI" pitchFamily="34" charset="0"/>
+                <a:ea typeface="Meiryo UI" pitchFamily="34" charset="-122"/>
                 <a:cs typeface="Noto Sans JP" pitchFamily="34" charset="-120"/>
               </a:rPr>
               <a:t>Time</a:t>
@@ -12939,8 +12939,8 @@
                 <a:solidFill>
                   <a:srgbClr val="374151"/>
                 </a:solidFill>
-                <a:latin typeface="游ゴシック Light" pitchFamily="34" charset="0"/>
-                <a:ea typeface="游ゴシック Light" pitchFamily="34" charset="-122"/>
+                <a:latin typeface="Meiryo UI" pitchFamily="34" charset="0"/>
+                <a:ea typeface="Meiryo UI" pitchFamily="34" charset="-122"/>
                 <a:cs typeface="Noto Sans JP" pitchFamily="34" charset="-120"/>
               </a:rPr>
               <a:t> </a:t>
@@ -12950,8 +12950,8 @@
                 <a:solidFill>
                   <a:srgbClr val="374151"/>
                 </a:solidFill>
-                <a:latin typeface="游ゴシック Light" pitchFamily="34" charset="0"/>
-                <a:ea typeface="游ゴシック Light" pitchFamily="34" charset="-122"/>
+                <a:latin typeface="Meiryo UI" pitchFamily="34" charset="0"/>
+                <a:ea typeface="Meiryo UI" pitchFamily="34" charset="-122"/>
                 <a:cs typeface="Noto Sans JP" pitchFamily="34" charset="-120"/>
               </a:rPr>
               <a:t>　</a:t>
@@ -12961,8 +12961,8 @@
                 <a:solidFill>
                   <a:srgbClr val="374151"/>
                 </a:solidFill>
-                <a:latin typeface="游ゴシック Light" pitchFamily="34" charset="0"/>
-                <a:ea typeface="游ゴシック Light" pitchFamily="34" charset="-122"/>
+                <a:latin typeface="Meiryo UI" pitchFamily="34" charset="0"/>
+                <a:ea typeface="Meiryo UI" pitchFamily="34" charset="-122"/>
                 <a:cs typeface="Noto Sans JP" pitchFamily="34" charset="-120"/>
               </a:rPr>
               <a:t>約</a:t>
@@ -12972,8 +12972,8 @@
                 <a:solidFill>
                   <a:srgbClr val="374151"/>
                 </a:solidFill>
-                <a:latin typeface="游ゴシック Light" pitchFamily="34" charset="0"/>
-                <a:ea typeface="游ゴシック Light" pitchFamily="34" charset="-122"/>
+                <a:latin typeface="Meiryo UI" pitchFamily="34" charset="0"/>
+                <a:ea typeface="Meiryo UI" pitchFamily="34" charset="-122"/>
                 <a:cs typeface="Noto Sans JP" pitchFamily="34" charset="-120"/>
               </a:rPr>
               <a:t>10分ハンズオン </a:t>
@@ -13570,8 +13570,8 @@
                 <a:solidFill>
                   <a:srgbClr val="1F2937"/>
                 </a:solidFill>
-                <a:latin typeface="游ゴシック Light" pitchFamily="34" charset="0"/>
-                <a:ea typeface="游ゴシック Light" pitchFamily="34" charset="-122"/>
+                <a:latin typeface="Meiryo UI" pitchFamily="34" charset="0"/>
+                <a:ea typeface="Meiryo UI" pitchFamily="34" charset="-122"/>
                 <a:cs typeface="Noto Sans JP" pitchFamily="34" charset="-120"/>
               </a:rPr>
               <a:t> 忙しい人のための</a:t>
@@ -13587,8 +13587,8 @@
                 <a:solidFill>
                   <a:srgbClr val="0078D4"/>
                 </a:solidFill>
-                <a:latin typeface="游ゴシック Light" pitchFamily="34" charset="0"/>
-                <a:ea typeface="游ゴシック Light" pitchFamily="34" charset="-122"/>
+                <a:latin typeface="Meiryo UI" pitchFamily="34" charset="0"/>
+                <a:ea typeface="Meiryo UI" pitchFamily="34" charset="-122"/>
                 <a:cs typeface="Noto Sans JP" pitchFamily="34" charset="-120"/>
               </a:rPr>
               <a:t>45分ハンズオン</a:t>
@@ -13708,8 +13708,8 @@
                 <a:solidFill>
                   <a:srgbClr val="1F2937"/>
                 </a:solidFill>
-                <a:latin typeface="游ゴシック Light" pitchFamily="34" charset="0"/>
-                <a:ea typeface="游ゴシック Light" pitchFamily="34" charset="-122"/>
+                <a:latin typeface="Meiryo UI" pitchFamily="34" charset="0"/>
+                <a:ea typeface="Meiryo UI" pitchFamily="34" charset="-122"/>
                 <a:cs typeface="Noto Sans JP" pitchFamily="34" charset="-120"/>
               </a:rPr>
               <a:t>45分完結</a:t>
@@ -13747,8 +13747,8 @@
                 <a:solidFill>
                   <a:srgbClr val="6B7280"/>
                 </a:solidFill>
-                <a:latin typeface="游ゴシック Light" pitchFamily="34" charset="0"/>
-                <a:ea typeface="游ゴシック Light" pitchFamily="34" charset="-122"/>
+                <a:latin typeface="Meiryo UI" pitchFamily="34" charset="0"/>
+                <a:ea typeface="Meiryo UI" pitchFamily="34" charset="-122"/>
                 <a:cs typeface="Noto Sans JP" pitchFamily="34" charset="-120"/>
               </a:rPr>
               <a:t> 長時間の研修は不要。</a:t>
@@ -13764,8 +13764,8 @@
                 <a:solidFill>
                   <a:srgbClr val="6B7280"/>
                 </a:solidFill>
-                <a:latin typeface="游ゴシック Light" pitchFamily="34" charset="0"/>
-                <a:ea typeface="游ゴシック Light" pitchFamily="34" charset="-122"/>
+                <a:latin typeface="Meiryo UI" pitchFamily="34" charset="0"/>
+                <a:ea typeface="Meiryo UI" pitchFamily="34" charset="-122"/>
                 <a:cs typeface="Noto Sans JP" pitchFamily="34" charset="-120"/>
               </a:rPr>
               <a:t> 要点だけを凝縮して</a:t>
@@ -13781,8 +13781,8 @@
                 <a:solidFill>
                   <a:srgbClr val="6B7280"/>
                 </a:solidFill>
-                <a:latin typeface="游ゴシック Light" pitchFamily="34" charset="0"/>
-                <a:ea typeface="游ゴシック Light" pitchFamily="34" charset="-122"/>
+                <a:latin typeface="Meiryo UI" pitchFamily="34" charset="0"/>
+                <a:ea typeface="Meiryo UI" pitchFamily="34" charset="-122"/>
                 <a:cs typeface="Noto Sans JP" pitchFamily="34" charset="-120"/>
               </a:rPr>
               <a:t> 最短でスキル習得。 </a:t>
@@ -13902,8 +13902,8 @@
                 <a:solidFill>
                   <a:srgbClr val="1F2937"/>
                 </a:solidFill>
-                <a:latin typeface="游ゴシック Light" pitchFamily="34" charset="0"/>
-                <a:ea typeface="游ゴシック Light" pitchFamily="34" charset="-122"/>
+                <a:latin typeface="Meiryo UI" pitchFamily="34" charset="0"/>
+                <a:ea typeface="Meiryo UI" pitchFamily="34" charset="-122"/>
                 <a:cs typeface="Noto Sans JP" pitchFamily="34" charset="-120"/>
               </a:rPr>
               <a:t>実践型ハンズオン</a:t>
@@ -13941,8 +13941,8 @@
                 <a:solidFill>
                   <a:srgbClr val="6B7280"/>
                 </a:solidFill>
-                <a:latin typeface="游ゴシック Light" pitchFamily="34" charset="0"/>
-                <a:ea typeface="游ゴシック Light" pitchFamily="34" charset="-122"/>
+                <a:latin typeface="Meiryo UI" pitchFamily="34" charset="0"/>
+                <a:ea typeface="Meiryo UI" pitchFamily="34" charset="-122"/>
                 <a:cs typeface="Noto Sans JP" pitchFamily="34" charset="-120"/>
               </a:rPr>
               <a:t> 座学だけではありません。</a:t>
@@ -13958,8 +13958,8 @@
                 <a:solidFill>
                   <a:srgbClr val="6B7280"/>
                 </a:solidFill>
-                <a:latin typeface="游ゴシック Light" pitchFamily="34" charset="0"/>
-                <a:ea typeface="游ゴシック Light" pitchFamily="34" charset="-122"/>
+                <a:latin typeface="Meiryo UI" pitchFamily="34" charset="0"/>
+                <a:ea typeface="Meiryo UI" pitchFamily="34" charset="-122"/>
                 <a:cs typeface="Noto Sans JP" pitchFamily="34" charset="-120"/>
               </a:rPr>
               <a:t> その場で実際に手を動かし</a:t>
@@ -13975,8 +13975,8 @@
                 <a:solidFill>
                   <a:srgbClr val="6B7280"/>
                 </a:solidFill>
-                <a:latin typeface="游ゴシック Light" pitchFamily="34" charset="0"/>
-                <a:ea typeface="游ゴシック Light" pitchFamily="34" charset="-122"/>
+                <a:latin typeface="Meiryo UI" pitchFamily="34" charset="0"/>
+                <a:ea typeface="Meiryo UI" pitchFamily="34" charset="-122"/>
                 <a:cs typeface="Noto Sans JP" pitchFamily="34" charset="-120"/>
               </a:rPr>
               <a:t> 「使える」技術を学びます。 </a:t>
@@ -14096,8 +14096,8 @@
                 <a:solidFill>
                   <a:srgbClr val="1F2937"/>
                 </a:solidFill>
-                <a:latin typeface="游ゴシック Light" pitchFamily="34" charset="0"/>
-                <a:ea typeface="游ゴシック Light" pitchFamily="34" charset="-122"/>
+                <a:latin typeface="Meiryo UI" pitchFamily="34" charset="0"/>
+                <a:ea typeface="Meiryo UI" pitchFamily="34" charset="-122"/>
                 <a:cs typeface="Noto Sans JP" pitchFamily="34" charset="-120"/>
               </a:rPr>
               <a:t>一緒に作る</a:t>
@@ -14141,8 +14141,8 @@
                 <a:solidFill>
                   <a:srgbClr val="6B7280"/>
                 </a:solidFill>
-                <a:latin typeface="游ゴシック Light" pitchFamily="34" charset="0"/>
-                <a:ea typeface="游ゴシック Light" pitchFamily="34" charset="-122"/>
+                <a:latin typeface="Meiryo UI" pitchFamily="34" charset="0"/>
+                <a:ea typeface="Meiryo UI" pitchFamily="34" charset="-122"/>
                 <a:cs typeface="Noto Sans JP" pitchFamily="34" charset="-120"/>
               </a:rPr>
               <a:t> ゼロから一緒に作ることで</a:t>
@@ -14158,8 +14158,8 @@
                 <a:solidFill>
                   <a:srgbClr val="6B7280"/>
                 </a:solidFill>
-                <a:latin typeface="游ゴシック Light" pitchFamily="34" charset="0"/>
-                <a:ea typeface="游ゴシック Light" pitchFamily="34" charset="-122"/>
+                <a:latin typeface="Meiryo UI" pitchFamily="34" charset="0"/>
+                <a:ea typeface="Meiryo UI" pitchFamily="34" charset="-122"/>
                 <a:cs typeface="Noto Sans JP" pitchFamily="34" charset="-120"/>
               </a:rPr>
               <a:t> 仕組みを理解します</a:t>
@@ -14169,8 +14169,8 @@
                 <a:solidFill>
                   <a:srgbClr val="6B7280"/>
                 </a:solidFill>
-                <a:latin typeface="游ゴシック Light" pitchFamily="34" charset="0"/>
-                <a:ea typeface="游ゴシック Light" pitchFamily="34" charset="-122"/>
+                <a:latin typeface="Meiryo UI" pitchFamily="34" charset="0"/>
+                <a:ea typeface="Meiryo UI" pitchFamily="34" charset="-122"/>
                 <a:cs typeface="Noto Sans JP" pitchFamily="34" charset="-120"/>
               </a:rPr>
               <a:t>。 </a:t>
@@ -14267,8 +14267,8 @@
                 <a:solidFill>
                   <a:srgbClr val="374151"/>
                 </a:solidFill>
-                <a:latin typeface="游ゴシック Light" pitchFamily="34" charset="0"/>
-                <a:ea typeface="游ゴシック Light" pitchFamily="34" charset="-122"/>
+                <a:latin typeface="Meiryo UI" pitchFamily="34" charset="0"/>
+                <a:ea typeface="Meiryo UI" pitchFamily="34" charset="-122"/>
                 <a:cs typeface="Noto Sans JP" pitchFamily="34" charset="-120"/>
               </a:rPr>
               <a:t>Power Automate 未経験・知識ゼロでも大丈夫！</a:t>
@@ -14390,8 +14390,8 @@
                 <a:solidFill>
                   <a:srgbClr val="6B7280"/>
                 </a:solidFill>
-                <a:latin typeface="游ゴシック Light" pitchFamily="34" charset="0"/>
-                <a:ea typeface="游ゴシック Light" pitchFamily="34" charset="-122"/>
+                <a:latin typeface="Meiryo UI" pitchFamily="34" charset="0"/>
+                <a:ea typeface="Meiryo UI" pitchFamily="34" charset="-122"/>
                 <a:cs typeface="Noto Sans JP" pitchFamily="34" charset="-120"/>
               </a:rPr>
               <a:t>INTRODUCTION</a:t>
@@ -14429,8 +14429,8 @@
                 <a:solidFill>
                   <a:srgbClr val="1F2937"/>
                 </a:solidFill>
-                <a:latin typeface="游ゴシック Light" pitchFamily="34" charset="0"/>
-                <a:ea typeface="游ゴシック Light" pitchFamily="34" charset="-122"/>
+                <a:latin typeface="Meiryo UI" pitchFamily="34" charset="0"/>
+                <a:ea typeface="Meiryo UI" pitchFamily="34" charset="-122"/>
                 <a:cs typeface="Noto Sans JP" pitchFamily="34" charset="-120"/>
               </a:rPr>
               <a:t>PA45</a:t>
@@ -14440,8 +14440,8 @@
                 <a:solidFill>
                   <a:srgbClr val="6B7280"/>
                 </a:solidFill>
-                <a:latin typeface="游ゴシック Light" pitchFamily="34" charset="0"/>
-                <a:ea typeface="游ゴシック Light" pitchFamily="34" charset="-122"/>
+                <a:latin typeface="Meiryo UI" pitchFamily="34" charset="0"/>
+                <a:ea typeface="Meiryo UI" pitchFamily="34" charset="-122"/>
                 <a:cs typeface="Noto Sans JP" pitchFamily="34" charset="-120"/>
               </a:rPr>
               <a:t>とは？</a:t>
@@ -14513,8 +14513,8 @@
                 <a:solidFill>
                   <a:srgbClr val="9CA3AF"/>
                 </a:solidFill>
-                <a:latin typeface="游ゴシック Light" pitchFamily="34" charset="0"/>
-                <a:ea typeface="游ゴシック Light" pitchFamily="34" charset="-122"/>
+                <a:latin typeface="Meiryo UI" pitchFamily="34" charset="0"/>
+                <a:ea typeface="Meiryo UI" pitchFamily="34" charset="-122"/>
                 <a:cs typeface="ui-monospace" pitchFamily="34" charset="-120"/>
               </a:rPr>
               <a:t>Concept</a:t>
@@ -14613,8 +14613,8 @@
                 <a:solidFill>
                   <a:srgbClr val="9CA3AF"/>
                 </a:solidFill>
-                <a:latin typeface="游ゴシック Light" pitchFamily="34" charset="0"/>
-                <a:ea typeface="游ゴシック Light" pitchFamily="34" charset="-122"/>
+                <a:latin typeface="Meiryo UI" pitchFamily="34" charset="0"/>
+                <a:ea typeface="Meiryo UI" pitchFamily="34" charset="-122"/>
                 <a:cs typeface="Noto Sans JP" pitchFamily="34" charset="-120"/>
               </a:rPr>
               <a:t>Power Automate for Beginners</a:t>
@@ -14652,8 +14652,8 @@
                 <a:solidFill>
                   <a:srgbClr val="9CA3AF"/>
                 </a:solidFill>
-                <a:latin typeface="游ゴシック Light" pitchFamily="34" charset="0"/>
-                <a:ea typeface="游ゴシック Light" pitchFamily="34" charset="-122"/>
+                <a:latin typeface="Meiryo UI" pitchFamily="34" charset="0"/>
+                <a:ea typeface="Meiryo UI" pitchFamily="34" charset="-122"/>
                 <a:cs typeface="Noto Sans JP" pitchFamily="34" charset="-120"/>
               </a:rPr>
               <a:t>Copyright © PA45</a:t>
@@ -15120,8 +15120,8 @@
                 <a:solidFill>
                   <a:srgbClr val="1F2937"/>
                 </a:solidFill>
-                <a:latin typeface="游ゴシック Light" pitchFamily="34" charset="0"/>
-                <a:ea typeface="游ゴシック Light" pitchFamily="34" charset="-122"/>
+                <a:latin typeface="Meiryo UI" pitchFamily="34" charset="0"/>
+                <a:ea typeface="Meiryo UI" pitchFamily="34" charset="-122"/>
                 <a:cs typeface="Noto Sans JP" pitchFamily="34" charset="-120"/>
               </a:rPr>
               <a:t>みんなで気持ちよく</a:t>
@@ -15137,8 +15137,8 @@
                 <a:solidFill>
                   <a:srgbClr val="1F2937"/>
                 </a:solidFill>
-                <a:latin typeface="游ゴシック Light" pitchFamily="34" charset="0"/>
-                <a:ea typeface="游ゴシック Light" pitchFamily="34" charset="-122"/>
+                <a:latin typeface="Meiryo UI" pitchFamily="34" charset="0"/>
+                <a:ea typeface="Meiryo UI" pitchFamily="34" charset="-122"/>
                 <a:cs typeface="Noto Sans JP" pitchFamily="34" charset="-120"/>
               </a:rPr>
               <a:t>学ぶために</a:t>
@@ -15176,8 +15176,8 @@
                 <a:solidFill>
                   <a:srgbClr val="4B5563"/>
                 </a:solidFill>
-                <a:latin typeface="游ゴシック Light" pitchFamily="34" charset="0"/>
-                <a:ea typeface="游ゴシック Light" pitchFamily="34" charset="-122"/>
+                <a:latin typeface="Meiryo UI" pitchFamily="34" charset="0"/>
+                <a:ea typeface="Meiryo UI" pitchFamily="34" charset="-122"/>
                 <a:cs typeface="Noto Sans JP" pitchFamily="34" charset="-120"/>
               </a:rPr>
               <a:t>誹謗中傷・不適切な発言は</a:t>
@@ -15187,8 +15187,8 @@
                 <a:solidFill>
                   <a:srgbClr val="2563EB"/>
                 </a:solidFill>
-                <a:latin typeface="游ゴシック Light" pitchFamily="34" charset="0"/>
-                <a:ea typeface="游ゴシック Light" pitchFamily="34" charset="-122"/>
+                <a:latin typeface="Meiryo UI" pitchFamily="34" charset="0"/>
+                <a:ea typeface="Meiryo UI" pitchFamily="34" charset="-122"/>
                 <a:cs typeface="Noto Sans JP" pitchFamily="34" charset="-120"/>
               </a:rPr>
               <a:t>禁止</a:t>
@@ -15249,8 +15249,8 @@
                 <a:solidFill>
                   <a:srgbClr val="4B5563"/>
                 </a:solidFill>
-                <a:latin typeface="游ゴシック Light" pitchFamily="34" charset="0"/>
-                <a:ea typeface="游ゴシック Light" pitchFamily="34" charset="-122"/>
+                <a:latin typeface="Meiryo UI" pitchFamily="34" charset="0"/>
+                <a:ea typeface="Meiryo UI" pitchFamily="34" charset="-122"/>
                 <a:cs typeface="Noto Sans JP" pitchFamily="34" charset="-120"/>
               </a:rPr>
               <a:t>お互いを尊重し合いましょう</a:t>
@@ -15380,8 +15380,8 @@
                 <a:solidFill>
                   <a:srgbClr val="1F2937"/>
                 </a:solidFill>
-                <a:latin typeface="游ゴシック Light" pitchFamily="34" charset="0"/>
-                <a:ea typeface="游ゴシック Light" pitchFamily="34" charset="-122"/>
+                <a:latin typeface="Meiryo UI" pitchFamily="34" charset="0"/>
+                <a:ea typeface="Meiryo UI" pitchFamily="34" charset="-122"/>
                 <a:cs typeface="Noto Sans JP" pitchFamily="34" charset="-120"/>
               </a:rPr>
               <a:t>講座の録画について</a:t>
@@ -15419,8 +15419,8 @@
                 <a:solidFill>
                   <a:srgbClr val="4B5563"/>
                 </a:solidFill>
-                <a:latin typeface="游ゴシック Light" pitchFamily="34" charset="0"/>
-                <a:ea typeface="游ゴシック Light" pitchFamily="34" charset="-122"/>
+                <a:latin typeface="Meiryo UI" pitchFamily="34" charset="0"/>
+                <a:ea typeface="Meiryo UI" pitchFamily="34" charset="-122"/>
                 <a:cs typeface="Noto Sans JP" pitchFamily="34" charset="-120"/>
               </a:rPr>
               <a:t>後日</a:t>
@@ -15430,8 +15430,8 @@
                 <a:solidFill>
                   <a:srgbClr val="4B5563"/>
                 </a:solidFill>
-                <a:latin typeface="游ゴシック Light" pitchFamily="34" charset="0"/>
-                <a:ea typeface="游ゴシック Light" pitchFamily="34" charset="-122"/>
+                <a:latin typeface="Meiryo UI" pitchFamily="34" charset="0"/>
+                <a:ea typeface="Meiryo UI" pitchFamily="34" charset="-122"/>
                 <a:cs typeface="Noto Sans JP" pitchFamily="34" charset="-120"/>
               </a:rPr>
               <a:t>YouTube公開</a:t>
@@ -15441,8 +15441,8 @@
                 <a:solidFill>
                   <a:srgbClr val="4B5563"/>
                 </a:solidFill>
-                <a:latin typeface="游ゴシック Light" pitchFamily="34" charset="0"/>
-                <a:ea typeface="游ゴシック Light" pitchFamily="34" charset="-122"/>
+                <a:latin typeface="Meiryo UI" pitchFamily="34" charset="0"/>
+                <a:ea typeface="Meiryo UI" pitchFamily="34" charset="-122"/>
                 <a:cs typeface="Noto Sans JP" pitchFamily="34" charset="-120"/>
               </a:rPr>
               <a:t>予定</a:t>
@@ -15503,8 +15503,8 @@
                 <a:solidFill>
                   <a:srgbClr val="4B5563"/>
                 </a:solidFill>
-                <a:latin typeface="游ゴシック Light" pitchFamily="34" charset="0"/>
-                <a:ea typeface="游ゴシック Light" pitchFamily="34" charset="-122"/>
+                <a:latin typeface="Meiryo UI" pitchFamily="34" charset="0"/>
+                <a:ea typeface="Meiryo UI" pitchFamily="34" charset="-122"/>
                 <a:cs typeface="Noto Sans JP" pitchFamily="34" charset="-120"/>
               </a:rPr>
               <a:t>表示名が映る場合があります</a:t>
@@ -15565,8 +15565,8 @@
                 <a:solidFill>
                   <a:srgbClr val="4B5563"/>
                 </a:solidFill>
-                <a:latin typeface="游ゴシック Light" pitchFamily="34" charset="0"/>
-                <a:ea typeface="游ゴシック Light" pitchFamily="34" charset="-122"/>
+                <a:latin typeface="Meiryo UI" pitchFamily="34" charset="0"/>
+                <a:ea typeface="Meiryo UI" pitchFamily="34" charset="-122"/>
                 <a:cs typeface="Noto Sans JP" pitchFamily="34" charset="-120"/>
               </a:rPr>
               <a:t>匿名参加で非表示にできます</a:t>
@@ -15696,8 +15696,8 @@
                 <a:solidFill>
                   <a:srgbClr val="1F2937"/>
                 </a:solidFill>
-                <a:latin typeface="游ゴシック Light" pitchFamily="34" charset="0"/>
-                <a:ea typeface="游ゴシック Light" pitchFamily="34" charset="-122"/>
+                <a:latin typeface="Meiryo UI" pitchFamily="34" charset="0"/>
+                <a:ea typeface="Meiryo UI" pitchFamily="34" charset="-122"/>
                 <a:cs typeface="Noto Sans JP" pitchFamily="34" charset="-120"/>
               </a:rPr>
               <a:t>チャットは気軽に</a:t>
@@ -15713,8 +15713,8 @@
                 <a:solidFill>
                   <a:srgbClr val="1F2937"/>
                 </a:solidFill>
-                <a:latin typeface="游ゴシック Light" pitchFamily="34" charset="0"/>
-                <a:ea typeface="游ゴシック Light" pitchFamily="34" charset="-122"/>
+                <a:latin typeface="Meiryo UI" pitchFamily="34" charset="0"/>
+                <a:ea typeface="Meiryo UI" pitchFamily="34" charset="-122"/>
                 <a:cs typeface="Noto Sans JP" pitchFamily="34" charset="-120"/>
               </a:rPr>
               <a:t>どうぞ</a:t>
@@ -15752,8 +15752,8 @@
                 <a:solidFill>
                   <a:srgbClr val="4B5563"/>
                 </a:solidFill>
-                <a:latin typeface="游ゴシック Light" pitchFamily="34" charset="0"/>
-                <a:ea typeface="游ゴシック Light" pitchFamily="34" charset="-122"/>
+                <a:latin typeface="Meiryo UI" pitchFamily="34" charset="0"/>
+                <a:ea typeface="Meiryo UI" pitchFamily="34" charset="-122"/>
                 <a:cs typeface="Noto Sans JP" pitchFamily="34" charset="-120"/>
               </a:rPr>
               <a:t>「できました！」の声など大歓迎</a:t>
@@ -15814,8 +15814,8 @@
                 <a:solidFill>
                   <a:srgbClr val="4B5563"/>
                 </a:solidFill>
-                <a:latin typeface="游ゴシック Light" pitchFamily="34" charset="0"/>
-                <a:ea typeface="游ゴシック Light" pitchFamily="34" charset="-122"/>
+                <a:latin typeface="Meiryo UI" pitchFamily="34" charset="0"/>
+                <a:ea typeface="Meiryo UI" pitchFamily="34" charset="-122"/>
                 <a:cs typeface="Noto Sans JP" pitchFamily="34" charset="-120"/>
               </a:rPr>
               <a:t>小さな質問でも</a:t>
@@ -15825,8 +15825,8 @@
                 <a:solidFill>
                   <a:srgbClr val="0078D4"/>
                 </a:solidFill>
-                <a:latin typeface="游ゴシック Light" pitchFamily="34" charset="0"/>
-                <a:ea typeface="游ゴシック Light" pitchFamily="34" charset="-122"/>
+                <a:latin typeface="Meiryo UI" pitchFamily="34" charset="0"/>
+                <a:ea typeface="Meiryo UI" pitchFamily="34" charset="-122"/>
                 <a:cs typeface="Noto Sans JP" pitchFamily="34" charset="-120"/>
               </a:rPr>
               <a:t>OK</a:t>
@@ -15836,8 +15836,8 @@
                 <a:solidFill>
                   <a:srgbClr val="4B5563"/>
                 </a:solidFill>
-                <a:latin typeface="游ゴシック Light" pitchFamily="34" charset="0"/>
-                <a:ea typeface="游ゴシック Light" pitchFamily="34" charset="-122"/>
+                <a:latin typeface="Meiryo UI" pitchFamily="34" charset="0"/>
+                <a:ea typeface="Meiryo UI" pitchFamily="34" charset="-122"/>
                 <a:cs typeface="Noto Sans JP" pitchFamily="34" charset="-120"/>
               </a:rPr>
               <a:t>です</a:t>
@@ -15898,8 +15898,8 @@
                 <a:solidFill>
                   <a:srgbClr val="4B5563"/>
                 </a:solidFill>
-                <a:latin typeface="游ゴシック Light" pitchFamily="34" charset="0"/>
-                <a:ea typeface="游ゴシック Light" pitchFamily="34" charset="-122"/>
+                <a:latin typeface="Meiryo UI" pitchFamily="34" charset="0"/>
+                <a:ea typeface="Meiryo UI" pitchFamily="34" charset="-122"/>
                 <a:cs typeface="Noto Sans JP" pitchFamily="34" charset="-120"/>
               </a:rPr>
               <a:t>反応があると講師も嬉しいです</a:t>
@@ -16192,8 +16192,8 @@
                 <a:solidFill>
                   <a:srgbClr val="4C1D95"/>
                 </a:solidFill>
-                <a:latin typeface="游ゴシック Light" pitchFamily="34" charset="0"/>
-                <a:ea typeface="游ゴシック Light" pitchFamily="34" charset="-122"/>
+                <a:latin typeface="Meiryo UI" pitchFamily="34" charset="0"/>
+                <a:ea typeface="Meiryo UI" pitchFamily="34" charset="-122"/>
                 <a:cs typeface="Noto Sans JP" pitchFamily="34" charset="-120"/>
               </a:rPr>
               <a:t>アウトプットで学びが定着</a:t>
@@ -16231,8 +16231,8 @@
                 <a:solidFill>
                   <a:srgbClr val="4C1D95"/>
                 </a:solidFill>
-                <a:latin typeface="游ゴシック Light" pitchFamily="34" charset="0"/>
-                <a:ea typeface="游ゴシック Light" pitchFamily="34" charset="-122"/>
+                <a:latin typeface="Meiryo UI" pitchFamily="34" charset="0"/>
+                <a:ea typeface="Meiryo UI" pitchFamily="34" charset="-122"/>
                 <a:cs typeface="Noto Sans JP" pitchFamily="34" charset="-120"/>
               </a:rPr>
               <a:t>#PA45</a:t>
@@ -16242,8 +16242,8 @@
                 <a:solidFill>
                   <a:srgbClr val="5B21B6"/>
                 </a:solidFill>
-                <a:latin typeface="游ゴシック Light" pitchFamily="34" charset="0"/>
-                <a:ea typeface="游ゴシック Light" pitchFamily="34" charset="-122"/>
+                <a:latin typeface="Meiryo UI" pitchFamily="34" charset="0"/>
+                <a:ea typeface="Meiryo UI" pitchFamily="34" charset="-122"/>
                 <a:cs typeface="Noto Sans JP" pitchFamily="34" charset="-120"/>
               </a:rPr>
               <a:t> をつけて投稿しよう！</a:t>
@@ -16281,8 +16281,8 @@
                 <a:solidFill>
                   <a:srgbClr val="5B21B6"/>
                 </a:solidFill>
-                <a:latin typeface="游ゴシック Light" pitchFamily="34" charset="0"/>
-                <a:ea typeface="游ゴシック Light" pitchFamily="34" charset="-122"/>
+                <a:latin typeface="Meiryo UI" pitchFamily="34" charset="0"/>
+                <a:ea typeface="Meiryo UI" pitchFamily="34" charset="-122"/>
                 <a:cs typeface="Noto Sans JP" pitchFamily="34" charset="-120"/>
               </a:rPr>
               <a:t>「作ったフロー」「気づき」など何でもOK</a:t>
@@ -16320,8 +16320,8 @@
                 <a:solidFill>
                   <a:srgbClr val="5B21B6"/>
                 </a:solidFill>
-                <a:latin typeface="游ゴシック Light" pitchFamily="34" charset="0"/>
-                <a:ea typeface="游ゴシック Light" pitchFamily="34" charset="-122"/>
+                <a:latin typeface="Meiryo UI" pitchFamily="34" charset="0"/>
+                <a:ea typeface="Meiryo UI" pitchFamily="34" charset="-122"/>
                 <a:cs typeface="Noto Sans JP" pitchFamily="34" charset="-120"/>
               </a:rPr>
               <a:t>投稿は</a:t>
@@ -16331,8 +16331,8 @@
                 <a:solidFill>
                   <a:srgbClr val="5B21B6"/>
                 </a:solidFill>
-                <a:latin typeface="游ゴシック Light" pitchFamily="34" charset="0"/>
-                <a:ea typeface="游ゴシック Light" pitchFamily="34" charset="-122"/>
+                <a:latin typeface="Meiryo UI" pitchFamily="34" charset="0"/>
+                <a:ea typeface="Meiryo UI" pitchFamily="34" charset="-122"/>
                 <a:cs typeface="Noto Sans JP" pitchFamily="34" charset="-120"/>
               </a:rPr>
               <a:t>運営</a:t>
@@ -16342,8 +16342,8 @@
                 <a:solidFill>
                   <a:srgbClr val="5B21B6"/>
                 </a:solidFill>
-                <a:latin typeface="游ゴシック Light" pitchFamily="34" charset="0"/>
-                <a:ea typeface="游ゴシック Light" pitchFamily="34" charset="-122"/>
+                <a:latin typeface="Meiryo UI" pitchFamily="34" charset="0"/>
+                <a:ea typeface="Meiryo UI" pitchFamily="34" charset="-122"/>
                 <a:cs typeface="Noto Sans JP" pitchFamily="34" charset="-120"/>
               </a:rPr>
               <a:t>の励みになります</a:t>
@@ -16353,8 +16353,8 @@
                 <a:solidFill>
                   <a:srgbClr val="5B21B6"/>
                 </a:solidFill>
-                <a:latin typeface="游ゴシック Light" pitchFamily="34" charset="0"/>
-                <a:ea typeface="游ゴシック Light" pitchFamily="34" charset="-122"/>
+                <a:latin typeface="Meiryo UI" pitchFamily="34" charset="0"/>
+                <a:ea typeface="Meiryo UI" pitchFamily="34" charset="-122"/>
                 <a:cs typeface="Noto Sans JP" pitchFamily="34" charset="-120"/>
               </a:rPr>
               <a:t>！</a:t>
@@ -16505,8 +16505,8 @@
                 <a:solidFill>
                   <a:srgbClr val="064E3B"/>
                 </a:solidFill>
-                <a:latin typeface="游ゴシック Light" pitchFamily="34" charset="0"/>
-                <a:ea typeface="游ゴシック Light" pitchFamily="34" charset="-122"/>
+                <a:latin typeface="Meiryo UI" pitchFamily="34" charset="0"/>
+                <a:ea typeface="Meiryo UI" pitchFamily="34" charset="-122"/>
                 <a:cs typeface="Noto Sans JP" pitchFamily="34" charset="-120"/>
               </a:rPr>
               <a:t>初心者大歓迎の講座です</a:t>
@@ -16544,8 +16544,8 @@
                 <a:solidFill>
                   <a:srgbClr val="065F46"/>
                 </a:solidFill>
-                <a:latin typeface="游ゴシック Light" pitchFamily="34" charset="0"/>
-                <a:ea typeface="游ゴシック Light" pitchFamily="34" charset="-122"/>
+                <a:latin typeface="Meiryo UI" pitchFamily="34" charset="0"/>
+                <a:ea typeface="Meiryo UI" pitchFamily="34" charset="-122"/>
                 <a:cs typeface="Noto Sans JP" pitchFamily="34" charset="-120"/>
               </a:rPr>
               <a:t>難しい専門用語は使いません</a:t>
@@ -16583,8 +16583,8 @@
                 <a:solidFill>
                   <a:srgbClr val="065F46"/>
                 </a:solidFill>
-                <a:latin typeface="游ゴシック Light" pitchFamily="34" charset="0"/>
-                <a:ea typeface="游ゴシック Light" pitchFamily="34" charset="-122"/>
+                <a:latin typeface="Meiryo UI" pitchFamily="34" charset="0"/>
+                <a:ea typeface="Meiryo UI" pitchFamily="34" charset="-122"/>
                 <a:cs typeface="Noto Sans JP" pitchFamily="34" charset="-120"/>
               </a:rPr>
               <a:t>置いてけぼりにならないようゆっくり進行</a:t>
@@ -16622,8 +16622,8 @@
                 <a:solidFill>
                   <a:srgbClr val="064E3B"/>
                 </a:solidFill>
-                <a:latin typeface="游ゴシック Light" pitchFamily="34" charset="0"/>
-                <a:ea typeface="游ゴシック Light" pitchFamily="34" charset="-122"/>
+                <a:latin typeface="Meiryo UI" pitchFamily="34" charset="0"/>
+                <a:ea typeface="Meiryo UI" pitchFamily="34" charset="-122"/>
                 <a:cs typeface="Noto Sans JP" pitchFamily="34" charset="-120"/>
               </a:rPr>
               <a:t>安心</a:t>
@@ -16633,8 +16633,8 @@
                 <a:solidFill>
                   <a:srgbClr val="065F46"/>
                 </a:solidFill>
-                <a:latin typeface="游ゴシック Light" pitchFamily="34" charset="0"/>
-                <a:ea typeface="游ゴシック Light" pitchFamily="34" charset="-122"/>
+                <a:latin typeface="Meiryo UI" pitchFamily="34" charset="0"/>
+                <a:ea typeface="Meiryo UI" pitchFamily="34" charset="-122"/>
                 <a:cs typeface="Noto Sans JP" pitchFamily="34" charset="-120"/>
               </a:rPr>
               <a:t>してご参加ください</a:t>
@@ -16802,8 +16802,8 @@
                 <a:solidFill>
                   <a:srgbClr val="6B7280"/>
                 </a:solidFill>
-                <a:latin typeface="游ゴシック Light" pitchFamily="34" charset="0"/>
-                <a:ea typeface="游ゴシック Light" pitchFamily="34" charset="-122"/>
+                <a:latin typeface="Meiryo UI" pitchFamily="34" charset="0"/>
+                <a:ea typeface="Meiryo UI" pitchFamily="34" charset="-122"/>
                 <a:cs typeface="Noto Sans JP" pitchFamily="34" charset="-120"/>
               </a:rPr>
               <a:t>PA45 Online Course</a:t>
@@ -16841,8 +16841,8 @@
                 <a:solidFill>
                   <a:srgbClr val="1F2937"/>
                 </a:solidFill>
-                <a:latin typeface="游ゴシック Light" pitchFamily="34" charset="0"/>
-                <a:ea typeface="游ゴシック Light" pitchFamily="34" charset="-122"/>
+                <a:latin typeface="Meiryo UI" pitchFamily="34" charset="0"/>
+                <a:ea typeface="Meiryo UI" pitchFamily="34" charset="-122"/>
                 <a:cs typeface="Noto Sans JP" pitchFamily="34" charset="-120"/>
               </a:rPr>
               <a:t>ご参加にあたっての</a:t>
@@ -16852,8 +16852,8 @@
                 <a:solidFill>
                   <a:srgbClr val="6B7280"/>
                 </a:solidFill>
-                <a:latin typeface="游ゴシック Light" pitchFamily="34" charset="0"/>
-                <a:ea typeface="游ゴシック Light" pitchFamily="34" charset="-122"/>
+                <a:latin typeface="Meiryo UI" pitchFamily="34" charset="0"/>
+                <a:ea typeface="Meiryo UI" pitchFamily="34" charset="-122"/>
                 <a:cs typeface="Noto Sans JP" pitchFamily="34" charset="-120"/>
               </a:rPr>
               <a:t>お願い</a:t>
@@ -16863,8 +16863,8 @@
                 <a:solidFill>
                   <a:srgbClr val="6B7280"/>
                 </a:solidFill>
-                <a:latin typeface="游ゴシック Light" pitchFamily="34" charset="0"/>
-                <a:ea typeface="游ゴシック Light" pitchFamily="34" charset="-122"/>
+                <a:latin typeface="Meiryo UI" pitchFamily="34" charset="0"/>
+                <a:ea typeface="Meiryo UI" pitchFamily="34" charset="-122"/>
                 <a:cs typeface="Noto Sans JP" pitchFamily="34" charset="-120"/>
               </a:rPr>
               <a:t>　（ルール）</a:t>
@@ -16936,8 +16936,8 @@
                 <a:solidFill>
                   <a:srgbClr val="9CA3AF"/>
                 </a:solidFill>
-                <a:latin typeface="游ゴシック Light" pitchFamily="34" charset="0"/>
-                <a:ea typeface="游ゴシック Light" pitchFamily="34" charset="-122"/>
+                <a:latin typeface="Meiryo UI" pitchFamily="34" charset="0"/>
+                <a:ea typeface="Meiryo UI" pitchFamily="34" charset="-122"/>
                 <a:cs typeface="ui-monospace" pitchFamily="34" charset="-120"/>
               </a:rPr>
               <a:t>Guidelines</a:t>
@@ -17036,8 +17036,8 @@
                 <a:solidFill>
                   <a:srgbClr val="9CA3AF"/>
                 </a:solidFill>
-                <a:latin typeface="游ゴシック Light" pitchFamily="34" charset="0"/>
-                <a:ea typeface="游ゴシック Light" pitchFamily="34" charset="-122"/>
+                <a:latin typeface="Meiryo UI" pitchFamily="34" charset="0"/>
+                <a:ea typeface="Meiryo UI" pitchFamily="34" charset="-122"/>
                 <a:cs typeface="Noto Sans JP" pitchFamily="34" charset="-120"/>
               </a:rPr>
               <a:t>Power Automate for Beginners</a:t>
@@ -17075,8 +17075,8 @@
                 <a:solidFill>
                   <a:srgbClr val="9CA3AF"/>
                 </a:solidFill>
-                <a:latin typeface="游ゴシック Light" pitchFamily="34" charset="0"/>
-                <a:ea typeface="游ゴシック Light" pitchFamily="34" charset="-122"/>
+                <a:latin typeface="Meiryo UI" pitchFamily="34" charset="0"/>
+                <a:ea typeface="Meiryo UI" pitchFamily="34" charset="-122"/>
                 <a:cs typeface="Noto Sans JP" pitchFamily="34" charset="-120"/>
               </a:rPr>
               <a:t>Copyright © PA45</a:t>
@@ -17589,8 +17589,8 @@
                 <a:solidFill>
                   <a:srgbClr val="1F2937"/>
                 </a:solidFill>
-                <a:latin typeface="游ゴシック Light" pitchFamily="34" charset="0"/>
-                <a:ea typeface="游ゴシック Light" pitchFamily="34" charset="-122"/>
+                <a:latin typeface="Meiryo UI" pitchFamily="34" charset="0"/>
+                <a:ea typeface="Meiryo UI" pitchFamily="34" charset="-122"/>
                 <a:cs typeface="BIZ UDGothic" pitchFamily="34" charset="-120"/>
               </a:rPr>
               <a:t>Power Automate 45 </a:t>
@@ -17600,8 +17600,8 @@
                 <a:solidFill>
                   <a:srgbClr val="2563EB"/>
                 </a:solidFill>
-                <a:latin typeface="游ゴシック Light" pitchFamily="34" charset="0"/>
-                <a:ea typeface="游ゴシック Light" pitchFamily="34" charset="-122"/>
+                <a:latin typeface="Meiryo UI" pitchFamily="34" charset="0"/>
+                <a:ea typeface="Meiryo UI" pitchFamily="34" charset="-122"/>
                 <a:cs typeface="BIZ UDGothic" pitchFamily="34" charset="-120"/>
               </a:rPr>
               <a:t>(PA45)</a:t>
@@ -17639,8 +17639,8 @@
                 <a:solidFill>
                   <a:srgbClr val="4B5563"/>
                 </a:solidFill>
-                <a:latin typeface="游ゴシック Light" pitchFamily="34" charset="0"/>
-                <a:ea typeface="游ゴシック Light" pitchFamily="34" charset="-122"/>
+                <a:latin typeface="Meiryo UI" pitchFamily="34" charset="0"/>
+                <a:ea typeface="Meiryo UI" pitchFamily="34" charset="-122"/>
                 <a:cs typeface="BIZ UDGothic" pitchFamily="34" charset="-120"/>
               </a:rPr>
               <a:t>今日も一緒に “1粒だけ” 深掘りします！</a:t>
@@ -17770,8 +17770,8 @@
                 <a:solidFill>
                   <a:srgbClr val="FFFFFF"/>
                 </a:solidFill>
-                <a:latin typeface="游ゴシック Light" pitchFamily="34" charset="0"/>
-                <a:ea typeface="游ゴシック Light" pitchFamily="34" charset="-122"/>
+                <a:latin typeface="Meiryo UI" pitchFamily="34" charset="0"/>
+                <a:ea typeface="Meiryo UI" pitchFamily="34" charset="-122"/>
                 <a:cs typeface="BIZ UDGothic" pitchFamily="34" charset="-120"/>
               </a:rPr>
               <a:t>Haru</a:t>
@@ -17781,8 +17781,8 @@
                 <a:solidFill>
                   <a:srgbClr val="FFFFFF"/>
                 </a:solidFill>
-                <a:latin typeface="游ゴシック Light" pitchFamily="34" charset="0"/>
-                <a:ea typeface="游ゴシック Light" pitchFamily="34" charset="-122"/>
+                <a:latin typeface="Meiryo UI" pitchFamily="34" charset="0"/>
+                <a:ea typeface="Meiryo UI" pitchFamily="34" charset="-122"/>
                 <a:cs typeface="BIZ UDGothic" pitchFamily="34" charset="-120"/>
               </a:rPr>
               <a:t> </a:t>
@@ -17820,8 +17820,8 @@
                 <a:solidFill>
                   <a:srgbClr val="374151"/>
                 </a:solidFill>
-                <a:latin typeface="游ゴシック Light" pitchFamily="34" charset="0"/>
-                <a:ea typeface="游ゴシック Light" pitchFamily="34" charset="-122"/>
+                <a:latin typeface="Meiryo UI" pitchFamily="34" charset="0"/>
+                <a:ea typeface="Meiryo UI" pitchFamily="34" charset="-122"/>
                 <a:cs typeface="BIZ UDGothic" pitchFamily="34" charset="-120"/>
               </a:rPr>
               <a:t>Power Platform / DX 推進</a:t>
@@ -17910,8 +17910,8 @@
                 <a:solidFill>
                   <a:srgbClr val="333333"/>
                 </a:solidFill>
-                <a:latin typeface="游ゴシック Light" pitchFamily="34" charset="0"/>
-                <a:ea typeface="游ゴシック Light" pitchFamily="34" charset="-122"/>
+                <a:latin typeface="Meiryo UI" pitchFamily="34" charset="0"/>
+                <a:ea typeface="Meiryo UI" pitchFamily="34" charset="-122"/>
                 <a:cs typeface="BIZ UDGothic" pitchFamily="34" charset="-120"/>
               </a:rPr>
               <a:t>社内外のコミュニティ運営</a:t>
@@ -17972,8 +17972,8 @@
                 <a:solidFill>
                   <a:srgbClr val="333333"/>
                 </a:solidFill>
-                <a:latin typeface="游ゴシック Light" pitchFamily="34" charset="0"/>
-                <a:ea typeface="游ゴシック Light" pitchFamily="34" charset="-122"/>
+                <a:latin typeface="Meiryo UI" pitchFamily="34" charset="0"/>
+                <a:ea typeface="Meiryo UI" pitchFamily="34" charset="-122"/>
                 <a:cs typeface="BIZ UDGothic" pitchFamily="34" charset="-120"/>
               </a:rPr>
               <a:t>・社内</a:t>
@@ -17983,8 +17983,8 @@
                 <a:solidFill>
                   <a:srgbClr val="333333"/>
                 </a:solidFill>
-                <a:latin typeface="游ゴシック Light" pitchFamily="34" charset="0"/>
-                <a:ea typeface="游ゴシック Light" pitchFamily="34" charset="-122"/>
+                <a:latin typeface="Meiryo UI" pitchFamily="34" charset="0"/>
+                <a:ea typeface="Meiryo UI" pitchFamily="34" charset="-122"/>
                 <a:cs typeface="BIZ UDGothic" pitchFamily="34" charset="-120"/>
               </a:rPr>
               <a:t>PowerPlatform</a:t>
@@ -17994,8 +17994,8 @@
                 <a:solidFill>
                   <a:srgbClr val="333333"/>
                 </a:solidFill>
-                <a:latin typeface="游ゴシック Light" pitchFamily="34" charset="0"/>
-                <a:ea typeface="游ゴシック Light" pitchFamily="34" charset="-122"/>
+                <a:latin typeface="Meiryo UI" pitchFamily="34" charset="0"/>
+                <a:ea typeface="Meiryo UI" pitchFamily="34" charset="-122"/>
                 <a:cs typeface="BIZ UDGothic" pitchFamily="34" charset="-120"/>
               </a:rPr>
               <a:t>コミュニティ</a:t>
@@ -18033,8 +18033,8 @@
                 <a:solidFill>
                   <a:srgbClr val="333333"/>
                 </a:solidFill>
-                <a:latin typeface="游ゴシック Light" pitchFamily="34" charset="0"/>
-                <a:ea typeface="游ゴシック Light" pitchFamily="34" charset="-122"/>
+                <a:latin typeface="Meiryo UI" pitchFamily="34" charset="0"/>
+                <a:ea typeface="Meiryo UI" pitchFamily="34" charset="-122"/>
                 <a:cs typeface="BIZ UDGothic" pitchFamily="34" charset="-120"/>
               </a:rPr>
               <a:t>・広島コミュニティ </a:t>
@@ -18044,8 +18044,8 @@
                 <a:solidFill>
                   <a:srgbClr val="333333"/>
                 </a:solidFill>
-                <a:latin typeface="游ゴシック Light" pitchFamily="34" charset="0"/>
-                <a:ea typeface="游ゴシック Light" pitchFamily="34" charset="-122"/>
+                <a:latin typeface="Meiryo UI" pitchFamily="34" charset="0"/>
+                <a:ea typeface="Meiryo UI" pitchFamily="34" charset="-122"/>
                 <a:cs typeface="BIZ UDGothic" pitchFamily="34" charset="-120"/>
               </a:rPr>
               <a:t>PLUG </a:t>
@@ -18055,8 +18055,8 @@
                 <a:solidFill>
                   <a:srgbClr val="333333"/>
                 </a:solidFill>
-                <a:latin typeface="游ゴシック Light" pitchFamily="34" charset="0"/>
-                <a:ea typeface="游ゴシック Light" pitchFamily="34" charset="-122"/>
+                <a:latin typeface="Meiryo UI" pitchFamily="34" charset="0"/>
+                <a:ea typeface="Meiryo UI" pitchFamily="34" charset="-122"/>
                 <a:cs typeface="BIZ UDGothic" pitchFamily="34" charset="-120"/>
               </a:rPr>
               <a:t>運営</a:t>
@@ -18138,8 +18138,8 @@
                 <a:solidFill>
                   <a:srgbClr val="1F2937"/>
                 </a:solidFill>
-                <a:latin typeface="游ゴシック Light" pitchFamily="34" charset="0"/>
-                <a:ea typeface="游ゴシック Light" pitchFamily="34" charset="-122"/>
+                <a:latin typeface="Meiryo UI" pitchFamily="34" charset="0"/>
+                <a:ea typeface="Meiryo UI" pitchFamily="34" charset="-122"/>
                 <a:cs typeface="BIZ UDGothic" pitchFamily="34" charset="-120"/>
               </a:rPr>
               <a:t>Power </a:t>
@@ -18149,8 +18149,8 @@
                 <a:solidFill>
                   <a:srgbClr val="1F2937"/>
                 </a:solidFill>
-                <a:latin typeface="游ゴシック Light" pitchFamily="34" charset="0"/>
-                <a:ea typeface="游ゴシック Light" pitchFamily="34" charset="-122"/>
+                <a:latin typeface="Meiryo UI" pitchFamily="34" charset="0"/>
+                <a:ea typeface="Meiryo UI" pitchFamily="34" charset="-122"/>
                 <a:cs typeface="BIZ UDGothic" pitchFamily="34" charset="-120"/>
               </a:rPr>
               <a:t>Automate 支援が専門</a:t>
@@ -18211,8 +18211,8 @@
                 <a:solidFill>
                   <a:srgbClr val="1E40AF"/>
                 </a:solidFill>
-                <a:latin typeface="游ゴシック Light" pitchFamily="34" charset="0"/>
-                <a:ea typeface="游ゴシック Light" pitchFamily="34" charset="-122"/>
+                <a:latin typeface="Meiryo UI" pitchFamily="34" charset="0"/>
+                <a:ea typeface="Meiryo UI" pitchFamily="34" charset="-122"/>
                 <a:cs typeface="BIZ UDGothic" pitchFamily="34" charset="-120"/>
               </a:rPr>
               <a:t> 主な活動・実績 </a:t>
@@ -18327,8 +18327,8 @@
                 <a:solidFill>
                   <a:srgbClr val="1F2937"/>
                 </a:solidFill>
-                <a:latin typeface="游ゴシック Light" pitchFamily="34" charset="0"/>
-                <a:ea typeface="游ゴシック Light" pitchFamily="34" charset="-122"/>
+                <a:latin typeface="Meiryo UI" pitchFamily="34" charset="0"/>
+                <a:ea typeface="Meiryo UI" pitchFamily="34" charset="-122"/>
                 <a:cs typeface="BIZ UDGothic" pitchFamily="34" charset="-120"/>
               </a:rPr>
               <a:t>社内講座の実施</a:t>
@@ -18389,8 +18389,8 @@
                 <a:solidFill>
                   <a:srgbClr val="4B5563"/>
                 </a:solidFill>
-                <a:latin typeface="游ゴシック Light" pitchFamily="34" charset="0"/>
-                <a:ea typeface="游ゴシック Light" pitchFamily="34" charset="-122"/>
+                <a:latin typeface="Meiryo UI" pitchFamily="34" charset="0"/>
+                <a:ea typeface="Meiryo UI" pitchFamily="34" charset="-122"/>
                 <a:cs typeface="BIZ UDGothic" pitchFamily="34" charset="-120"/>
               </a:rPr>
               <a:t>PA</a:t>
@@ -18400,8 +18400,8 @@
                 <a:solidFill>
                   <a:srgbClr val="4B5563"/>
                 </a:solidFill>
-                <a:latin typeface="游ゴシック Light" pitchFamily="34" charset="0"/>
-                <a:ea typeface="游ゴシック Light" pitchFamily="34" charset="-122"/>
+                <a:latin typeface="Meiryo UI" pitchFamily="34" charset="0"/>
+                <a:ea typeface="Meiryo UI" pitchFamily="34" charset="-122"/>
                 <a:cs typeface="BIZ UDGothic" pitchFamily="34" charset="-120"/>
               </a:rPr>
               <a:t>／Copilot</a:t>
@@ -18411,8 +18411,8 @@
                 <a:solidFill>
                   <a:srgbClr val="4B5563"/>
                 </a:solidFill>
-                <a:latin typeface="游ゴシック Light" pitchFamily="34" charset="0"/>
-                <a:ea typeface="游ゴシック Light" pitchFamily="34" charset="-122"/>
+                <a:latin typeface="Meiryo UI" pitchFamily="34" charset="0"/>
+                <a:ea typeface="Meiryo UI" pitchFamily="34" charset="-122"/>
                 <a:cs typeface="BIZ UDGothic" pitchFamily="34" charset="-120"/>
               </a:rPr>
               <a:t>　ハンズオン講座</a:t>
@@ -18422,8 +18422,8 @@
                 <a:solidFill>
                   <a:srgbClr val="4B5563"/>
                 </a:solidFill>
-                <a:latin typeface="游ゴシック Light" pitchFamily="34" charset="0"/>
-                <a:ea typeface="游ゴシック Light" pitchFamily="34" charset="-122"/>
+                <a:latin typeface="Meiryo UI" pitchFamily="34" charset="0"/>
+                <a:ea typeface="Meiryo UI" pitchFamily="34" charset="-122"/>
                 <a:cs typeface="BIZ UDGothic" pitchFamily="34" charset="-120"/>
               </a:rPr>
               <a:t>などを開催し</a:t>
@@ -18433,8 +18433,8 @@
                 <a:solidFill>
                   <a:srgbClr val="4B5563"/>
                 </a:solidFill>
-                <a:latin typeface="游ゴシック Light" pitchFamily="34" charset="0"/>
-                <a:ea typeface="游ゴシック Light" pitchFamily="34" charset="-122"/>
+                <a:latin typeface="Meiryo UI" pitchFamily="34" charset="0"/>
+                <a:ea typeface="Meiryo UI" pitchFamily="34" charset="-122"/>
                 <a:cs typeface="BIZ UDGothic" pitchFamily="34" charset="-120"/>
               </a:rPr>
               <a:t>、社内の</a:t>
@@ -18444,8 +18444,8 @@
                 <a:solidFill>
                   <a:srgbClr val="4B5563"/>
                 </a:solidFill>
-                <a:latin typeface="游ゴシック Light" pitchFamily="34" charset="0"/>
-                <a:ea typeface="游ゴシック Light" pitchFamily="34" charset="-122"/>
+                <a:latin typeface="Meiryo UI" pitchFamily="34" charset="0"/>
+                <a:ea typeface="Meiryo UI" pitchFamily="34" charset="-122"/>
                 <a:cs typeface="BIZ UDGothic" pitchFamily="34" charset="-120"/>
               </a:rPr>
               <a:t>DXを</a:t>
@@ -18455,8 +18455,8 @@
                 <a:solidFill>
                   <a:srgbClr val="4B5563"/>
                 </a:solidFill>
-                <a:latin typeface="游ゴシック Light" pitchFamily="34" charset="0"/>
-                <a:ea typeface="游ゴシック Light" pitchFamily="34" charset="-122"/>
+                <a:latin typeface="Meiryo UI" pitchFamily="34" charset="0"/>
+                <a:ea typeface="Meiryo UI" pitchFamily="34" charset="-122"/>
                 <a:cs typeface="BIZ UDGothic" pitchFamily="34" charset="-120"/>
               </a:rPr>
               <a:t>推進</a:t>
@@ -18571,8 +18571,8 @@
                 <a:solidFill>
                   <a:srgbClr val="1F2937"/>
                 </a:solidFill>
-                <a:latin typeface="游ゴシック Light" pitchFamily="34" charset="0"/>
-                <a:ea typeface="游ゴシック Light" pitchFamily="34" charset="-122"/>
+                <a:latin typeface="Meiryo UI" pitchFamily="34" charset="0"/>
+                <a:ea typeface="Meiryo UI" pitchFamily="34" charset="-122"/>
                 <a:cs typeface="BIZ UDGothic" pitchFamily="34" charset="-120"/>
               </a:rPr>
               <a:t>外部コミュニティ登壇</a:t>
@@ -18633,8 +18633,8 @@
                 <a:solidFill>
                   <a:srgbClr val="4B5563"/>
                 </a:solidFill>
-                <a:latin typeface="游ゴシック Light" pitchFamily="34" charset="0"/>
-                <a:ea typeface="游ゴシック Light" pitchFamily="34" charset="-122"/>
+                <a:latin typeface="Meiryo UI" pitchFamily="34" charset="0"/>
+                <a:ea typeface="Meiryo UI" pitchFamily="34" charset="-122"/>
                 <a:cs typeface="BIZ UDGothic" pitchFamily="34" charset="-120"/>
               </a:rPr>
               <a:t>広島コミュニティ「</a:t>
@@ -18644,8 +18644,8 @@
                 <a:solidFill>
                   <a:srgbClr val="4B5563"/>
                 </a:solidFill>
-                <a:latin typeface="游ゴシック Light" pitchFamily="34" charset="0"/>
-                <a:ea typeface="游ゴシック Light" pitchFamily="34" charset="-122"/>
+                <a:latin typeface="Meiryo UI" pitchFamily="34" charset="0"/>
+                <a:ea typeface="Meiryo UI" pitchFamily="34" charset="-122"/>
                 <a:cs typeface="BIZ UDGothic" pitchFamily="34" charset="-120"/>
               </a:rPr>
               <a:t>PLUG」</a:t>
@@ -18655,8 +18655,8 @@
                 <a:solidFill>
                   <a:srgbClr val="4B5563"/>
                 </a:solidFill>
-                <a:latin typeface="游ゴシック Light" pitchFamily="34" charset="0"/>
-                <a:ea typeface="游ゴシック Light" pitchFamily="34" charset="-122"/>
+                <a:latin typeface="Meiryo UI" pitchFamily="34" charset="0"/>
+                <a:ea typeface="Meiryo UI" pitchFamily="34" charset="-122"/>
                 <a:cs typeface="BIZ UDGothic" pitchFamily="34" charset="-120"/>
               </a:rPr>
               <a:t>運営。外部コミュニティ登壇</a:t>
@@ -18771,8 +18771,8 @@
                 <a:solidFill>
                   <a:srgbClr val="1F2937"/>
                 </a:solidFill>
-                <a:latin typeface="游ゴシック Light" pitchFamily="34" charset="0"/>
-                <a:ea typeface="游ゴシック Light" pitchFamily="34" charset="-122"/>
+                <a:latin typeface="Meiryo UI" pitchFamily="34" charset="0"/>
+                <a:ea typeface="Meiryo UI" pitchFamily="34" charset="-122"/>
                 <a:cs typeface="BIZ UDGothic" pitchFamily="34" charset="-120"/>
               </a:rPr>
               <a:t>X (Twitter) での情報発信</a:t>
@@ -18833,8 +18833,8 @@
                 <a:solidFill>
                   <a:srgbClr val="4B5563"/>
                 </a:solidFill>
-                <a:latin typeface="游ゴシック Light" pitchFamily="34" charset="0"/>
-                <a:ea typeface="游ゴシック Light" pitchFamily="34" charset="-122"/>
+                <a:latin typeface="Meiryo UI" pitchFamily="34" charset="0"/>
+                <a:ea typeface="Meiryo UI" pitchFamily="34" charset="-122"/>
                 <a:cs typeface="BIZ UDGothic" pitchFamily="34" charset="-120"/>
               </a:rPr>
               <a:t>初心者向けPAチップスを</a:t>
@@ -18844,8 +18844,8 @@
                 <a:solidFill>
                   <a:srgbClr val="0078D4"/>
                 </a:solidFill>
-                <a:latin typeface="游ゴシック Light" pitchFamily="34" charset="0"/>
-                <a:ea typeface="游ゴシック Light" pitchFamily="34" charset="-122"/>
+                <a:latin typeface="Meiryo UI" pitchFamily="34" charset="0"/>
+                <a:ea typeface="Meiryo UI" pitchFamily="34" charset="-122"/>
                 <a:cs typeface="BIZ UDGothic" pitchFamily="34" charset="-120"/>
               </a:rPr>
               <a:t>2日に1回</a:t>
@@ -18855,8 +18855,8 @@
                 <a:solidFill>
                   <a:srgbClr val="4B5563"/>
                 </a:solidFill>
-                <a:latin typeface="游ゴシック Light" pitchFamily="34" charset="0"/>
-                <a:ea typeface="游ゴシック Light" pitchFamily="34" charset="-122"/>
+                <a:latin typeface="Meiryo UI" pitchFamily="34" charset="0"/>
+                <a:ea typeface="Meiryo UI" pitchFamily="34" charset="-122"/>
                 <a:cs typeface="BIZ UDGothic" pitchFamily="34" charset="-120"/>
               </a:rPr>
               <a:t>継続発信中！</a:t>
@@ -18971,8 +18971,8 @@
                 <a:solidFill>
                   <a:srgbClr val="1F2937"/>
                 </a:solidFill>
-                <a:latin typeface="游ゴシック Light" pitchFamily="34" charset="0"/>
-                <a:ea typeface="游ゴシック Light" pitchFamily="34" charset="-122"/>
+                <a:latin typeface="Meiryo UI" pitchFamily="34" charset="0"/>
+                <a:ea typeface="Meiryo UI" pitchFamily="34" charset="-122"/>
                 <a:cs typeface="BIZ UDGothic" pitchFamily="34" charset="-120"/>
               </a:rPr>
               <a:t>Power Automate 45 (PA45)</a:t>
@@ -19033,8 +19033,8 @@
                 <a:solidFill>
                   <a:srgbClr val="4B5563"/>
                 </a:solidFill>
-                <a:latin typeface="游ゴシック Light" pitchFamily="34" charset="0"/>
-                <a:ea typeface="游ゴシック Light" pitchFamily="34" charset="-122"/>
+                <a:latin typeface="Meiryo UI" pitchFamily="34" charset="0"/>
+                <a:ea typeface="Meiryo UI" pitchFamily="34" charset="-122"/>
                 <a:cs typeface="BIZ UDGothic" pitchFamily="34" charset="-120"/>
               </a:rPr>
               <a:t>45分の</a:t>
@@ -19044,8 +19044,8 @@
                 <a:solidFill>
                   <a:srgbClr val="0078D4"/>
                 </a:solidFill>
-                <a:latin typeface="游ゴシック Light" pitchFamily="34" charset="0"/>
-                <a:ea typeface="游ゴシック Light" pitchFamily="34" charset="-122"/>
+                <a:latin typeface="Meiryo UI" pitchFamily="34" charset="0"/>
+                <a:ea typeface="Meiryo UI" pitchFamily="34" charset="-122"/>
                 <a:cs typeface="BIZ UDGothic" pitchFamily="34" charset="-120"/>
               </a:rPr>
               <a:t>“1粒ハンズオン”</a:t>
@@ -19055,8 +19055,8 @@
                 <a:solidFill>
                   <a:srgbClr val="4B5563"/>
                 </a:solidFill>
-                <a:latin typeface="游ゴシック Light" pitchFamily="34" charset="0"/>
-                <a:ea typeface="游ゴシック Light" pitchFamily="34" charset="-122"/>
+                <a:latin typeface="Meiryo UI" pitchFamily="34" charset="0"/>
+                <a:ea typeface="Meiryo UI" pitchFamily="34" charset="-122"/>
                 <a:cs typeface="BIZ UDGothic" pitchFamily="34" charset="-120"/>
               </a:rPr>
               <a:t>を毎週開催・運営</a:t>
@@ -19140,8 +19140,8 @@
                 <a:solidFill>
                   <a:srgbClr val="FFFFFF"/>
                 </a:solidFill>
-                <a:latin typeface="游ゴシック Light" pitchFamily="34" charset="0"/>
-                <a:ea typeface="游ゴシック Light" pitchFamily="34" charset="-122"/>
+                <a:latin typeface="Meiryo UI" pitchFamily="34" charset="0"/>
+                <a:ea typeface="Meiryo UI" pitchFamily="34" charset="-122"/>
                 <a:cs typeface="BIZ UDGothic" pitchFamily="34" charset="-120"/>
               </a:rPr>
               <a:t>今日は「できた！」を一緒に作っていきましょう😊</a:t>
@@ -19466,8 +19466,8 @@
                 <a:solidFill>
                   <a:srgbClr val="6B7280"/>
                 </a:solidFill>
-                <a:latin typeface="游ゴシック Light" pitchFamily="34" charset="0"/>
-                <a:ea typeface="游ゴシック Light" pitchFamily="34" charset="-122"/>
+                <a:latin typeface="Meiryo UI" pitchFamily="34" charset="0"/>
+                <a:ea typeface="Meiryo UI" pitchFamily="34" charset="-122"/>
                 <a:cs typeface="Noto Sans JP" pitchFamily="34" charset="-120"/>
               </a:rPr>
               <a:t>PA45｜第11回</a:t>
@@ -19505,8 +19505,8 @@
                 <a:solidFill>
                   <a:srgbClr val="1F2937"/>
                 </a:solidFill>
-                <a:latin typeface="游ゴシック Light" pitchFamily="34" charset="0"/>
-                <a:ea typeface="游ゴシック Light" pitchFamily="34" charset="-122"/>
+                <a:latin typeface="Meiryo UI" pitchFamily="34" charset="0"/>
+                <a:ea typeface="Meiryo UI" pitchFamily="34" charset="-122"/>
                 <a:cs typeface="Noto Sans JP" pitchFamily="34" charset="-120"/>
               </a:rPr>
               <a:t>今日やること（3つだけ）</a:t>
@@ -19578,8 +19578,8 @@
                 <a:solidFill>
                   <a:srgbClr val="9CA3AF"/>
                 </a:solidFill>
-                <a:latin typeface="游ゴシック Light" pitchFamily="34" charset="0"/>
-                <a:ea typeface="游ゴシック Light" pitchFamily="34" charset="-122"/>
+                <a:latin typeface="Meiryo UI" pitchFamily="34" charset="0"/>
+                <a:ea typeface="Meiryo UI" pitchFamily="34" charset="-122"/>
                 <a:cs typeface="ui-monospace" pitchFamily="34" charset="-120"/>
               </a:rPr>
               <a:t>Agenda</a:t>
@@ -19949,8 +19949,8 @@
                 <a:solidFill>
                   <a:srgbClr val="0078D4"/>
                 </a:solidFill>
-                <a:latin typeface="游ゴシック Light" pitchFamily="34" charset="0"/>
-                <a:ea typeface="游ゴシック Light" pitchFamily="34" charset="-122"/>
+                <a:latin typeface="Meiryo UI" pitchFamily="34" charset="0"/>
+                <a:ea typeface="Meiryo UI" pitchFamily="34" charset="-122"/>
                 <a:cs typeface="Noto Sans JP" pitchFamily="34" charset="-120"/>
               </a:rPr>
               <a:t>1</a:t>
@@ -19990,8 +19990,8 @@
                 <a:solidFill>
                   <a:srgbClr val="1F2937"/>
                 </a:solidFill>
-                <a:latin typeface="游ゴシック Light" pitchFamily="34" charset="0"/>
-                <a:ea typeface="游ゴシック Light" pitchFamily="34" charset="-122"/>
+                <a:latin typeface="Meiryo UI" pitchFamily="34" charset="0"/>
+                <a:ea typeface="Meiryo UI" pitchFamily="34" charset="-122"/>
                 <a:cs typeface="Noto Sans JP" pitchFamily="34" charset="-120"/>
               </a:rPr>
               <a:t>メール受信でフローを作る</a:t>
@@ -20029,8 +20029,8 @@
                 <a:solidFill>
                   <a:srgbClr val="6B7280"/>
                 </a:solidFill>
-                <a:latin typeface="游ゴシック Light" pitchFamily="34" charset="0"/>
-                <a:ea typeface="游ゴシック Light" pitchFamily="34" charset="-122"/>
+                <a:latin typeface="Meiryo UI" pitchFamily="34" charset="0"/>
+                <a:ea typeface="Meiryo UI" pitchFamily="34" charset="-122"/>
                 <a:cs typeface="Noto Sans JP" pitchFamily="34" charset="-120"/>
               </a:rPr>
               <a:t>「新しいメールが届いたとき」をトリガーに、</a:t>
@@ -20042,8 +20042,8 @@
                 <a:solidFill>
                   <a:srgbClr val="6B7280"/>
                 </a:solidFill>
-                <a:latin typeface="游ゴシック Light"/>
-                <a:ea typeface="游ゴシック Light"/>
+                <a:latin typeface="Meiryo UI"/>
+                <a:ea typeface="Meiryo UI"/>
               </a:rPr>
               <a:t>届いたメールで動くフローを作ります。</a:t>
             </a:r>
@@ -20125,8 +20125,8 @@
                 <a:solidFill>
                   <a:srgbClr val="0078D4"/>
                 </a:solidFill>
-                <a:latin typeface="游ゴシック Light" pitchFamily="34" charset="0"/>
-                <a:ea typeface="游ゴシック Light" pitchFamily="34" charset="-122"/>
+                <a:latin typeface="Meiryo UI" pitchFamily="34" charset="0"/>
+                <a:ea typeface="Meiryo UI" pitchFamily="34" charset="-122"/>
                 <a:cs typeface="Noto Sans JP" pitchFamily="34" charset="-120"/>
               </a:rPr>
               <a:t>2</a:t>
@@ -20166,8 +20166,8 @@
                 <a:solidFill>
                   <a:srgbClr val="1F2937"/>
                 </a:solidFill>
-                <a:latin typeface="游ゴシック Light" pitchFamily="34" charset="0"/>
-                <a:ea typeface="游ゴシック Light" pitchFamily="34" charset="-122"/>
+                <a:latin typeface="Meiryo UI" pitchFamily="34" charset="0"/>
+                <a:ea typeface="Meiryo UI" pitchFamily="34" charset="-122"/>
                 <a:cs typeface="Noto Sans JP" pitchFamily="34" charset="-120"/>
               </a:rPr>
               <a:t>重要度で条件分岐させる</a:t>
@@ -20205,8 +20205,8 @@
                 <a:solidFill>
                   <a:srgbClr val="6B7280"/>
                 </a:solidFill>
-                <a:latin typeface="游ゴシック Light" pitchFamily="34" charset="0"/>
-                <a:ea typeface="游ゴシック Light" pitchFamily="34" charset="-122"/>
+                <a:latin typeface="Meiryo UI" pitchFamily="34" charset="0"/>
+                <a:ea typeface="Meiryo UI" pitchFamily="34" charset="-122"/>
                 <a:cs typeface="Noto Sans JP" pitchFamily="34" charset="-120"/>
               </a:rPr>
               <a:t>「条件」アクションで、メールの重要度が</a:t>
@@ -20218,8 +20218,8 @@
                 <a:solidFill>
                   <a:srgbClr val="6B7280"/>
                 </a:solidFill>
-                <a:latin typeface="游ゴシック Light"/>
-                <a:ea typeface="游ゴシック Light"/>
+                <a:latin typeface="Meiryo UI"/>
+                <a:ea typeface="Meiryo UI"/>
               </a:rPr>
               <a:t>「高」かどうかで処理を分けます。</a:t>
             </a:r>
@@ -20301,8 +20301,8 @@
                 <a:solidFill>
                   <a:srgbClr val="0078D4"/>
                 </a:solidFill>
-                <a:latin typeface="游ゴシック Light" pitchFamily="34" charset="0"/>
-                <a:ea typeface="游ゴシック Light" pitchFamily="34" charset="-122"/>
+                <a:latin typeface="Meiryo UI" pitchFamily="34" charset="0"/>
+                <a:ea typeface="Meiryo UI" pitchFamily="34" charset="-122"/>
                 <a:cs typeface="Noto Sans JP" pitchFamily="34" charset="-120"/>
               </a:rPr>
               <a:t>3</a:t>
@@ -20342,8 +20342,8 @@
                 <a:solidFill>
                   <a:srgbClr val="1F2937"/>
                 </a:solidFill>
-                <a:latin typeface="游ゴシック Light" pitchFamily="34" charset="0"/>
-                <a:ea typeface="游ゴシック Light" pitchFamily="34" charset="-122"/>
+                <a:latin typeface="Meiryo UI" pitchFamily="34" charset="0"/>
+                <a:ea typeface="Meiryo UI" pitchFamily="34" charset="-122"/>
                 <a:cs typeface="Noto Sans JP" pitchFamily="34" charset="-120"/>
               </a:rPr>
               <a:t>実行履歴の出力を読む</a:t>
@@ -20381,8 +20381,8 @@
                 <a:solidFill>
                   <a:srgbClr val="6B7280"/>
                 </a:solidFill>
-                <a:latin typeface="游ゴシック Light" pitchFamily="34" charset="0"/>
-                <a:ea typeface="游ゴシック Light" pitchFamily="34" charset="-122"/>
+                <a:latin typeface="Meiryo UI" pitchFamily="34" charset="0"/>
+                <a:ea typeface="Meiryo UI" pitchFamily="34" charset="-122"/>
                 <a:cs typeface="Noto Sans JP" pitchFamily="34" charset="-120"/>
               </a:rPr>
               <a:t>わざと失敗させて、実行履歴の出力から</a:t>
@@ -20395,8 +20395,8 @@
                 <a:solidFill>
                   <a:srgbClr val="6B7280"/>
                 </a:solidFill>
-                <a:latin typeface="游ゴシック Light"/>
-                <a:ea typeface="游ゴシック Light"/>
+                <a:latin typeface="Meiryo UI"/>
+                <a:ea typeface="Meiryo UI"/>
               </a:rPr>
               <a:t>原因を見つけ、直します。</a:t>
             </a:r>
@@ -20516,8 +20516,8 @@
                 <a:solidFill>
                   <a:srgbClr val="9CA3AF"/>
                 </a:solidFill>
-                <a:latin typeface="游ゴシック Light" pitchFamily="34" charset="0"/>
-                <a:ea typeface="游ゴシック Light" pitchFamily="34" charset="-122"/>
+                <a:latin typeface="Meiryo UI" pitchFamily="34" charset="0"/>
+                <a:ea typeface="Meiryo UI" pitchFamily="34" charset="-122"/>
                 <a:cs typeface="Noto Sans JP" pitchFamily="34" charset="-120"/>
               </a:rPr>
               <a:t>Power Automate for Beginners</a:t>
@@ -20555,8 +20555,8 @@
                 <a:solidFill>
                   <a:srgbClr val="9CA3AF"/>
                 </a:solidFill>
-                <a:latin typeface="游ゴシック Light" pitchFamily="34" charset="0"/>
-                <a:ea typeface="游ゴシック Light" pitchFamily="34" charset="-122"/>
+                <a:latin typeface="Meiryo UI" pitchFamily="34" charset="0"/>
+                <a:ea typeface="Meiryo UI" pitchFamily="34" charset="-122"/>
                 <a:cs typeface="Noto Sans JP" pitchFamily="34" charset="-120"/>
               </a:rPr>
               <a:t>Copyright © PA45</a:t>
@@ -20958,8 +20958,8 @@
                 <a:solidFill>
                   <a:srgbClr val="6B7280"/>
                 </a:solidFill>
-                <a:latin typeface="游ゴシック Light" pitchFamily="34" charset="0"/>
-                <a:ea typeface="游ゴシック Light" pitchFamily="34" charset="-122"/>
+                <a:latin typeface="Meiryo UI" pitchFamily="34" charset="0"/>
+                <a:ea typeface="Meiryo UI" pitchFamily="34" charset="-122"/>
                 <a:cs typeface="Noto Sans JP" pitchFamily="34" charset="-120"/>
               </a:rPr>
               <a:t>PA45｜第11回</a:t>
@@ -20997,8 +20997,8 @@
                 <a:solidFill>
                   <a:srgbClr val="1F2937"/>
                 </a:solidFill>
-                <a:latin typeface="游ゴシック Light" pitchFamily="34" charset="0"/>
-                <a:ea typeface="游ゴシック Light" pitchFamily="34" charset="-122"/>
+                <a:latin typeface="Meiryo UI" pitchFamily="34" charset="0"/>
+                <a:ea typeface="Meiryo UI" pitchFamily="34" charset="-122"/>
                 <a:cs typeface="Noto Sans JP" pitchFamily="34" charset="-120"/>
               </a:rPr>
               <a:t>テーマ解説 (1/2)：実行履歴って何？</a:t>
@@ -21070,8 +21070,8 @@
                 <a:solidFill>
                   <a:srgbClr val="9CA3AF"/>
                 </a:solidFill>
-                <a:latin typeface="游ゴシック Light" pitchFamily="34" charset="0"/>
-                <a:ea typeface="游ゴシック Light" pitchFamily="34" charset="-122"/>
+                <a:latin typeface="Meiryo UI" pitchFamily="34" charset="0"/>
+                <a:ea typeface="Meiryo UI" pitchFamily="34" charset="-122"/>
                 <a:cs typeface="ui-monospace" pitchFamily="34" charset="-120"/>
               </a:rPr>
               <a:t>Concept</a:t>
@@ -21227,8 +21227,8 @@
                 <a:solidFill>
                   <a:srgbClr val="9CA3AF"/>
                 </a:solidFill>
-                <a:latin typeface="游ゴシック Light" pitchFamily="34" charset="0"/>
-                <a:ea typeface="游ゴシック Light" pitchFamily="34" charset="-122"/>
+                <a:latin typeface="Meiryo UI" pitchFamily="34" charset="0"/>
+                <a:ea typeface="Meiryo UI" pitchFamily="34" charset="-122"/>
                 <a:cs typeface="Noto Sans JP" pitchFamily="34" charset="-120"/>
               </a:rPr>
               <a:t>Power Automate for Beginners</a:t>
@@ -21266,8 +21266,8 @@
                 <a:solidFill>
                   <a:srgbClr val="9CA3AF"/>
                 </a:solidFill>
-                <a:latin typeface="游ゴシック Light" pitchFamily="34" charset="0"/>
-                <a:ea typeface="游ゴシック Light" pitchFamily="34" charset="-122"/>
+                <a:latin typeface="Meiryo UI" pitchFamily="34" charset="0"/>
+                <a:ea typeface="Meiryo UI" pitchFamily="34" charset="-122"/>
                 <a:cs typeface="Noto Sans JP" pitchFamily="34" charset="-120"/>
               </a:rPr>
               <a:t>Copyright © PA45</a:t>
@@ -21517,8 +21517,8 @@
                 <a:solidFill>
                   <a:srgbClr val="1F2937"/>
                 </a:solidFill>
-                <a:latin typeface="游ゴシック Light"/>
-                <a:ea typeface="游ゴシック Light"/>
+                <a:latin typeface="Meiryo UI"/>
+                <a:ea typeface="Meiryo UI"/>
               </a:rPr>
               <a:t>①「実行履歴」は、フローを動かした記録。いつ・どのアクションが・成功（緑）か失敗（赤）かが残ります。</a:t>
             </a:r>
@@ -21542,8 +21542,8 @@
                 <a:solidFill>
                   <a:srgbClr val="1F2937"/>
                 </a:solidFill>
-                <a:latin typeface="游ゴシック Light"/>
-                <a:ea typeface="游ゴシック Light"/>
+                <a:latin typeface="Meiryo UI"/>
+                <a:ea typeface="Meiryo UI"/>
               </a:rPr>
               <a:t>②各アクションを開くと「入力」と「出力」が見られます。入力＝そのアクションが受け取った値、出力＝次に渡す値です。</a:t>
             </a:r>
@@ -21559,8 +21559,8 @@
                 <a:solidFill>
                   <a:srgbClr val="1F2937"/>
                 </a:solidFill>
-                <a:latin typeface="游ゴシック Light"/>
-                <a:ea typeface="游ゴシック Light"/>
+                <a:latin typeface="Meiryo UI"/>
+                <a:ea typeface="Meiryo UI"/>
               </a:rPr>
               <a:t>③うまく動かないときは、実行履歴の入力・出力を見れば「どこで何が起きたか」が分かります。</a:t>
             </a:r>
@@ -21615,8 +21615,8 @@
                 <a:solidFill>
                   <a:srgbClr val="2A5E9E"/>
                 </a:solidFill>
-                <a:latin typeface="游ゴシック Light"/>
-                <a:ea typeface="游ゴシック Light"/>
+                <a:latin typeface="Meiryo UI"/>
+                <a:ea typeface="Meiryo UI"/>
               </a:rPr>
               <a:t>📷 ここにスクショを貼る</a:t>
             </a:r>
@@ -21628,8 +21628,8 @@
                 <a:solidFill>
                   <a:srgbClr val="556677"/>
                 </a:solidFill>
-                <a:latin typeface="游ゴシック Light"/>
-                <a:ea typeface="游ゴシック Light"/>
+                <a:latin typeface="Meiryo UI"/>
+                <a:ea typeface="Meiryo UI"/>
               </a:rPr>
               <a:t>実行履歴の一覧画面
 （緑＝成功・赤＝失敗が見える画面）</a:t>
@@ -21827,8 +21827,8 @@
                 <a:solidFill>
                   <a:srgbClr val="6B7280"/>
                 </a:solidFill>
-                <a:latin typeface="游ゴシック Light" pitchFamily="34" charset="0"/>
-                <a:ea typeface="游ゴシック Light" pitchFamily="34" charset="-122"/>
+                <a:latin typeface="Meiryo UI" pitchFamily="34" charset="0"/>
+                <a:ea typeface="Meiryo UI" pitchFamily="34" charset="-122"/>
                 <a:cs typeface="Noto Sans JP" pitchFamily="34" charset="-120"/>
               </a:rPr>
               <a:t>PA45｜第11回</a:t>
@@ -21866,8 +21866,8 @@
                 <a:solidFill>
                   <a:srgbClr val="1F2937"/>
                 </a:solidFill>
-                <a:latin typeface="游ゴシック Light" pitchFamily="34" charset="0"/>
-                <a:ea typeface="游ゴシック Light" pitchFamily="34" charset="-122"/>
+                <a:latin typeface="Meiryo UI" pitchFamily="34" charset="0"/>
+                <a:ea typeface="Meiryo UI" pitchFamily="34" charset="-122"/>
                 <a:cs typeface="Noto Sans JP" pitchFamily="34" charset="-120"/>
               </a:rPr>
               <a:t>テーマ解説 (2/2)：画面の「表示」と「値」は違う</a:t>
@@ -21939,8 +21939,8 @@
                 <a:solidFill>
                   <a:srgbClr val="9CA3AF"/>
                 </a:solidFill>
-                <a:latin typeface="游ゴシック Light" pitchFamily="34" charset="0"/>
-                <a:ea typeface="游ゴシック Light" pitchFamily="34" charset="-122"/>
+                <a:latin typeface="Meiryo UI" pitchFamily="34" charset="0"/>
+                <a:ea typeface="Meiryo UI" pitchFamily="34" charset="-122"/>
                 <a:cs typeface="ui-monospace" pitchFamily="34" charset="-120"/>
               </a:rPr>
               <a:t>Concept</a:t>
@@ -22096,8 +22096,8 @@
                 <a:solidFill>
                   <a:srgbClr val="9CA3AF"/>
                 </a:solidFill>
-                <a:latin typeface="游ゴシック Light" pitchFamily="34" charset="0"/>
-                <a:ea typeface="游ゴシック Light" pitchFamily="34" charset="-122"/>
+                <a:latin typeface="Meiryo UI" pitchFamily="34" charset="0"/>
+                <a:ea typeface="Meiryo UI" pitchFamily="34" charset="-122"/>
                 <a:cs typeface="Noto Sans JP" pitchFamily="34" charset="-120"/>
               </a:rPr>
               <a:t>Power Automate for Beginners</a:t>
@@ -22135,8 +22135,8 @@
                 <a:solidFill>
                   <a:srgbClr val="9CA3AF"/>
                 </a:solidFill>
-                <a:latin typeface="游ゴシック Light" pitchFamily="34" charset="0"/>
-                <a:ea typeface="游ゴシック Light" pitchFamily="34" charset="-122"/>
+                <a:latin typeface="Meiryo UI" pitchFamily="34" charset="0"/>
+                <a:ea typeface="Meiryo UI" pitchFamily="34" charset="-122"/>
                 <a:cs typeface="Noto Sans JP" pitchFamily="34" charset="-120"/>
               </a:rPr>
               <a:t>Copyright © PA45</a:t>
@@ -22386,8 +22386,8 @@
                 <a:solidFill>
                   <a:srgbClr val="1F2937"/>
                 </a:solidFill>
-                <a:latin typeface="游ゴシック Light"/>
-                <a:ea typeface="游ゴシック Light"/>
+                <a:latin typeface="Meiryo UI"/>
+                <a:ea typeface="Meiryo UI"/>
               </a:rPr>
               <a:t>④画面に見える「表示」と、フローに実際に渡る「値」は違うことがあります。</a:t>
             </a:r>
@@ -22411,8 +22411,8 @@
                 <a:solidFill>
                   <a:srgbClr val="1F2937"/>
                 </a:solidFill>
-                <a:latin typeface="游ゴシック Light"/>
-                <a:ea typeface="游ゴシック Light"/>
+                <a:latin typeface="Meiryo UI"/>
+                <a:ea typeface="Meiryo UI"/>
               </a:rPr>
               <a:t>⑤例：メールの重要度。画面の表示は「高」でも、出力に渡る値は英語の "High" です。</a:t>
             </a:r>
@@ -22428,8 +22428,8 @@
                 <a:solidFill>
                   <a:srgbClr val="1F2937"/>
                 </a:solidFill>
-                <a:latin typeface="游ゴシック Light"/>
-                <a:ea typeface="游ゴシック Light"/>
+                <a:latin typeface="Meiryo UI"/>
+                <a:ea typeface="Meiryo UI"/>
               </a:rPr>
               <a:t>⑥条件に「高」と書くと一致せず、フローは赤くならないまま間違った方へ進みます。出力を見ないと気づけません。</a:t>
             </a:r>
@@ -22484,8 +22484,8 @@
                 <a:solidFill>
                   <a:srgbClr val="2A5E9E"/>
                 </a:solidFill>
-                <a:latin typeface="游ゴシック Light"/>
-                <a:ea typeface="游ゴシック Light"/>
+                <a:latin typeface="Meiryo UI"/>
+                <a:ea typeface="Meiryo UI"/>
               </a:rPr>
               <a:t>📷 ここにスクショを貼る</a:t>
             </a:r>
@@ -22497,8 +22497,8 @@
                 <a:solidFill>
                   <a:srgbClr val="556677"/>
                 </a:solidFill>
-                <a:latin typeface="游ゴシック Light"/>
-                <a:ea typeface="游ゴシック Light"/>
+                <a:latin typeface="Meiryo UI"/>
+                <a:ea typeface="Meiryo UI"/>
               </a:rPr>
               <a:t>メールの重要度を「高」にしている画面
 または 条件アクションの設定画面</a:t>

--- a/assets/pa45/P011_PA45_RunHistory_20260521.pptx
+++ b/assets/pa45/P011_PA45_RunHistory_20260521.pptx
@@ -5,7 +5,7 @@
     <p:sldMasterId id="2147483648" r:id="rId1"/>
   </p:sldMasterIdLst>
   <p:notesMasterIdLst>
-    <p:notesMasterId r:id="rId20"/>
+    <p:notesMasterId r:id="rId18"/>
   </p:notesMasterIdLst>
   <p:sldIdLst>
     <p:sldId id="279" r:id="rId2"/>
@@ -20,12 +20,10 @@
     <p:sldId id="289" r:id="rId11"/>
     <p:sldId id="290" r:id="rId12"/>
     <p:sldId id="286" r:id="rId13"/>
-    <p:sldId id="287" r:id="rId14"/>
-    <p:sldId id="288" r:id="rId15"/>
-    <p:sldId id="284" r:id="rId16"/>
-    <p:sldId id="272" r:id="rId17"/>
-    <p:sldId id="268" r:id="rId18"/>
-    <p:sldId id="269" r:id="rId19"/>
+    <p:sldId id="284" r:id="rId14"/>
+    <p:sldId id="272" r:id="rId15"/>
+    <p:sldId id="268" r:id="rId16"/>
+    <p:sldId id="269" r:id="rId17"/>
   </p:sldIdLst>
   <p:sldSz cx="12192000" cy="6858000"/>
   <p:notesSz cx="6858000" cy="12192000"/>
@@ -1647,7 +1645,7 @@
           <a:p>
             <a:fld id="{F7021451-1387-4CA6-816F-3879F97B5CBC}" type="slidenum">
               <a:rPr lang="en-US"/>
-              <a:t>16</a:t>
+              <a:t>14</a:t>
             </a:fld>
             <a:endParaRPr lang="en-US"/>
           </a:p>
@@ -1848,7 +1846,7 @@
           <a:p>
             <a:fld id="{F7021451-1387-4CA6-816F-3879F97B5CBC}" type="slidenum">
               <a:rPr lang="en-US"/>
-              <a:t>17</a:t>
+              <a:t>15</a:t>
             </a:fld>
             <a:endParaRPr lang="en-US"/>
           </a:p>
@@ -2019,7 +2017,7 @@
           <a:p>
             <a:fld id="{F7021451-1387-4CA6-816F-3879F97B5CBC}" type="slidenum">
               <a:rPr lang="en-US"/>
-              <a:t>18</a:t>
+              <a:t>16</a:t>
             </a:fld>
             <a:endParaRPr lang="en-US"/>
           </a:p>
@@ -2433,6 +2431,7 @@
           <a:lstStyle/>
           <a:p>
             <a:pPr algn="ctr"/>
+            <a:endParaRPr/>
           </a:p>
         </p:txBody>
       </p:sp>
@@ -2476,6 +2475,7 @@
           <a:lstStyle/>
           <a:p>
             <a:pPr algn="ctr"/>
+            <a:endParaRPr/>
           </a:p>
         </p:txBody>
       </p:sp>
@@ -2499,7 +2499,7 @@
           </a:ln>
         </p:spPr>
         <p:txBody>
-          <a:bodyPr wrap="square" anchor="ctr" lIns="20000" rIns="20000" tIns="0" bIns="0">
+          <a:bodyPr wrap="square" lIns="20000" tIns="0" rIns="20000" bIns="0" anchor="ctr">
             <a:spAutoFit/>
           </a:bodyPr>
           <a:lstStyle/>
@@ -2538,7 +2538,7 @@
           </a:ln>
         </p:spPr>
         <p:txBody>
-          <a:bodyPr wrap="square" anchor="ctr" lIns="20000" rIns="20000" tIns="0" bIns="0">
+          <a:bodyPr wrap="square" lIns="20000" tIns="0" rIns="20000" bIns="0" anchor="ctr">
             <a:spAutoFit/>
           </a:bodyPr>
           <a:lstStyle/>
@@ -2577,7 +2577,7 @@
           </a:ln>
         </p:spPr>
         <p:txBody>
-          <a:bodyPr wrap="square" anchor="ctr" lIns="20000" rIns="20000" tIns="0" bIns="0">
+          <a:bodyPr wrap="square" lIns="20000" tIns="0" rIns="20000" bIns="0" anchor="ctr">
             <a:spAutoFit/>
           </a:bodyPr>
           <a:lstStyle/>
@@ -2616,7 +2616,7 @@
           </a:ln>
         </p:spPr>
         <p:txBody>
-          <a:bodyPr wrap="square" anchor="ctr" lIns="20000" rIns="20000" tIns="0" bIns="0">
+          <a:bodyPr wrap="square" lIns="20000" tIns="0" rIns="20000" bIns="0" anchor="ctr">
             <a:spAutoFit/>
           </a:bodyPr>
           <a:lstStyle/>
@@ -2643,8 +2643,8 @@
         </p:nvSpPr>
         <p:spPr>
           <a:xfrm>
-            <a:off x="0" y="3700000"/>
-            <a:ext cx="12192000" cy="500000"/>
+            <a:off x="0" y="3749945"/>
+            <a:ext cx="12192000" cy="400110"/>
           </a:xfrm>
           <a:prstGeom prst="rect">
             <a:avLst/>
@@ -2655,7 +2655,7 @@
           </a:ln>
         </p:spPr>
         <p:txBody>
-          <a:bodyPr wrap="square" anchor="ctr" lIns="20000" rIns="20000" tIns="0" bIns="0">
+          <a:bodyPr wrap="square" lIns="20000" tIns="0" rIns="20000" bIns="0" anchor="ctr">
             <a:spAutoFit/>
           </a:bodyPr>
           <a:lstStyle/>
@@ -2669,7 +2669,27 @@
                 <a:latin typeface="Meiryo UI"/>
                 <a:ea typeface="Meiryo UI"/>
               </a:rPr>
-              <a:t>第11回｜実行履歴を読めると自動化が楽しくなる</a:t>
+              <a:t>第11回｜実行履歴</a:t>
+            </a:r>
+            <a:r>
+              <a:rPr lang="ja-JP" altLang="en-US" sz="2600" b="1">
+                <a:solidFill>
+                  <a:srgbClr val="0F172A"/>
+                </a:solidFill>
+                <a:latin typeface="Meiryo UI"/>
+                <a:ea typeface="Meiryo UI"/>
+              </a:rPr>
+              <a:t>と出力</a:t>
+            </a:r>
+            <a:r>
+              <a:rPr sz="2600" b="1">
+                <a:solidFill>
+                  <a:srgbClr val="0F172A"/>
+                </a:solidFill>
+                <a:latin typeface="Meiryo UI"/>
+                <a:ea typeface="Meiryo UI"/>
+              </a:rPr>
+              <a:t>を読めると自動化が楽しくなる</a:t>
             </a:r>
           </a:p>
         </p:txBody>
@@ -2694,7 +2714,7 @@
           </a:ln>
         </p:spPr>
         <p:txBody>
-          <a:bodyPr wrap="square" anchor="ctr" lIns="20000" rIns="20000" tIns="0" bIns="0">
+          <a:bodyPr wrap="square" lIns="20000" tIns="0" rIns="20000" bIns="0" anchor="ctr">
             <a:spAutoFit/>
           </a:bodyPr>
           <a:lstStyle/>
@@ -2756,6 +2776,7 @@
           <a:lstStyle/>
           <a:p>
             <a:pPr algn="ctr"/>
+            <a:endParaRPr/>
           </a:p>
         </p:txBody>
       </p:sp>
@@ -2779,7 +2800,7 @@
           </a:ln>
         </p:spPr>
         <p:txBody>
-          <a:bodyPr wrap="square" anchor="ctr" lIns="20000" rIns="20000" tIns="0" bIns="0">
+          <a:bodyPr wrap="square" lIns="20000" tIns="0" rIns="20000" bIns="0" anchor="ctr">
             <a:spAutoFit/>
           </a:bodyPr>
           <a:lstStyle/>
@@ -2892,6 +2913,7 @@
           <a:lstStyle/>
           <a:p>
             <a:pPr algn="ctr"/>
+            <a:endParaRPr/>
           </a:p>
         </p:txBody>
       </p:sp>
@@ -2915,7 +2937,7 @@
           </a:ln>
         </p:spPr>
         <p:txBody>
-          <a:bodyPr wrap="square" anchor="ctr" lIns="20000" rIns="20000" tIns="0" bIns="0">
+          <a:bodyPr wrap="square" lIns="20000" tIns="0" rIns="20000" bIns="0" anchor="ctr">
             <a:spAutoFit/>
           </a:bodyPr>
           <a:lstStyle/>
@@ -3029,6 +3051,7 @@
           <a:lstStyle/>
           <a:p>
             <a:pPr algn="ctr"/>
+            <a:endParaRPr/>
           </a:p>
         </p:txBody>
       </p:sp>
@@ -3052,7 +3075,7 @@
           </a:ln>
         </p:spPr>
         <p:txBody>
-          <a:bodyPr wrap="square" anchor="ctr" lIns="20000" rIns="20000" tIns="0" bIns="0">
+          <a:bodyPr wrap="square" lIns="20000" tIns="0" rIns="20000" bIns="0" anchor="ctr">
             <a:spAutoFit/>
           </a:bodyPr>
           <a:lstStyle/>
@@ -3143,7 +3166,7 @@
           </a:ln>
         </p:spPr>
         <p:txBody>
-          <a:bodyPr wrap="square" anchor="ctr" lIns="20000" rIns="20000" tIns="0" bIns="0">
+          <a:bodyPr wrap="square" lIns="20000" tIns="0" rIns="20000" bIns="0" anchor="ctr">
             <a:spAutoFit/>
           </a:bodyPr>
           <a:lstStyle/>
@@ -3912,7 +3935,7 @@
               <a:buNone/>
             </a:pPr>
             <a:r>
-              <a:rPr sz="2000" b="0">
+              <a:rPr sz="2000" b="1">
                 <a:solidFill>
                   <a:srgbClr val="1F2937"/>
                 </a:solidFill>
@@ -3921,6 +3944,15 @@
               </a:rPr>
               <a:t>🎯 アクションには「入力」と「出力」があります</a:t>
             </a:r>
+            <a:br>
+              <a:rPr lang="en-US" sz="2000" b="0">
+                <a:solidFill>
+                  <a:srgbClr val="1F2937"/>
+                </a:solidFill>
+                <a:latin typeface="Meiryo UI"/>
+                <a:ea typeface="Meiryo UI"/>
+              </a:rPr>
+            </a:br>
             <a:endParaRPr lang="en-US" altLang="ja-JP" sz="2000">
               <a:solidFill>
                 <a:srgbClr val="1F2937"/>
@@ -3939,22 +3971,18 @@
                 <a:latin typeface="Meiryo UI"/>
                 <a:ea typeface="Meiryo UI"/>
               </a:rPr>
-              <a:t>・入力：そのアクションが受け取った値（例：条件の入力 ＝「重要度」と「高」）</a:t>
-            </a:r>
-          </a:p>
-          <a:p>
-            <a:r>
-              <a:rPr sz="2000" b="0">
+              <a:t>・</a:t>
+            </a:r>
+            <a:r>
+              <a:rPr sz="2000" b="1">
                 <a:solidFill>
                   <a:srgbClr val="1F2937"/>
                 </a:solidFill>
                 <a:latin typeface="Meiryo UI"/>
                 <a:ea typeface="Meiryo UI"/>
               </a:rPr>
-              <a:t>・出力：そのアクションが次に渡す値（例：トリガーの出力 ＝ 件名・差出人・重要度 など）</a:t>
-            </a:r>
-          </a:p>
-          <a:p>
+              <a:t>入力</a:t>
+            </a:r>
             <a:r>
               <a:rPr sz="2000" b="0">
                 <a:solidFill>
@@ -3963,7 +3991,160 @@
                 <a:latin typeface="Meiryo UI"/>
                 <a:ea typeface="Meiryo UI"/>
               </a:rPr>
-              <a:t>・前のアクションの「出力」が、次のアクションの「入力」になる。この受け渡しでフローは動きます。</a:t>
+              <a:t>：そのアクションが受け取った値</a:t>
+            </a:r>
+            <a:br>
+              <a:rPr lang="en-US" sz="2000" b="0">
+                <a:solidFill>
+                  <a:srgbClr val="1F2937"/>
+                </a:solidFill>
+                <a:latin typeface="Meiryo UI"/>
+                <a:ea typeface="Meiryo UI"/>
+              </a:rPr>
+            </a:br>
+            <a:r>
+              <a:rPr sz="2000" b="0">
+                <a:solidFill>
+                  <a:srgbClr val="1F2937"/>
+                </a:solidFill>
+                <a:latin typeface="Meiryo UI"/>
+                <a:ea typeface="Meiryo UI"/>
+              </a:rPr>
+              <a:t>（例：条件の入力 ＝「重要度」と「高」）</a:t>
+            </a:r>
+            <a:br>
+              <a:rPr lang="en-US" sz="2000" b="0">
+                <a:solidFill>
+                  <a:srgbClr val="1F2937"/>
+                </a:solidFill>
+                <a:latin typeface="Meiryo UI"/>
+                <a:ea typeface="Meiryo UI"/>
+              </a:rPr>
+            </a:br>
+            <a:endParaRPr sz="2000" b="0">
+              <a:solidFill>
+                <a:srgbClr val="1F2937"/>
+              </a:solidFill>
+              <a:latin typeface="Meiryo UI"/>
+              <a:ea typeface="Meiryo UI"/>
+            </a:endParaRPr>
+          </a:p>
+          <a:p>
+            <a:r>
+              <a:rPr sz="2000" b="0">
+                <a:solidFill>
+                  <a:srgbClr val="1F2937"/>
+                </a:solidFill>
+                <a:latin typeface="Meiryo UI"/>
+                <a:ea typeface="Meiryo UI"/>
+              </a:rPr>
+              <a:t>・</a:t>
+            </a:r>
+            <a:r>
+              <a:rPr sz="2000" b="1">
+                <a:solidFill>
+                  <a:srgbClr val="1F2937"/>
+                </a:solidFill>
+                <a:latin typeface="Meiryo UI"/>
+                <a:ea typeface="Meiryo UI"/>
+              </a:rPr>
+              <a:t>出力</a:t>
+            </a:r>
+            <a:r>
+              <a:rPr sz="2000" b="0">
+                <a:solidFill>
+                  <a:srgbClr val="1F2937"/>
+                </a:solidFill>
+                <a:latin typeface="Meiryo UI"/>
+                <a:ea typeface="Meiryo UI"/>
+              </a:rPr>
+              <a:t>：そのアクションが次に渡す値</a:t>
+            </a:r>
+            <a:br>
+              <a:rPr lang="en-US" sz="2000" b="0">
+                <a:solidFill>
+                  <a:srgbClr val="1F2937"/>
+                </a:solidFill>
+                <a:latin typeface="Meiryo UI"/>
+                <a:ea typeface="Meiryo UI"/>
+              </a:rPr>
+            </a:br>
+            <a:r>
+              <a:rPr sz="2000" b="0">
+                <a:solidFill>
+                  <a:srgbClr val="1F2937"/>
+                </a:solidFill>
+                <a:latin typeface="Meiryo UI"/>
+                <a:ea typeface="Meiryo UI"/>
+              </a:rPr>
+              <a:t>（例：トリガーの出力 ＝ 件名・差出人・重要度 など）</a:t>
+            </a:r>
+            <a:endParaRPr lang="en-US" sz="2000" b="0">
+              <a:solidFill>
+                <a:srgbClr val="1F2937"/>
+              </a:solidFill>
+              <a:latin typeface="Meiryo UI"/>
+              <a:ea typeface="Meiryo UI"/>
+            </a:endParaRPr>
+          </a:p>
+          <a:p>
+            <a:endParaRPr sz="2000" b="0">
+              <a:solidFill>
+                <a:srgbClr val="1F2937"/>
+              </a:solidFill>
+              <a:latin typeface="Meiryo UI"/>
+              <a:ea typeface="Meiryo UI"/>
+            </a:endParaRPr>
+          </a:p>
+          <a:p>
+            <a:r>
+              <a:rPr sz="2000" b="0">
+                <a:solidFill>
+                  <a:srgbClr val="1F2937"/>
+                </a:solidFill>
+                <a:latin typeface="Meiryo UI"/>
+                <a:ea typeface="Meiryo UI"/>
+              </a:rPr>
+              <a:t>・</a:t>
+            </a:r>
+            <a:r>
+              <a:rPr sz="2000" b="1">
+                <a:solidFill>
+                  <a:srgbClr val="C00000"/>
+                </a:solidFill>
+                <a:latin typeface="Meiryo UI"/>
+                <a:ea typeface="Meiryo UI"/>
+              </a:rPr>
+              <a:t>前のアクションの「出力」が、次のアクションの「入力」</a:t>
+            </a:r>
+            <a:r>
+              <a:rPr sz="2000" b="0">
+                <a:solidFill>
+                  <a:srgbClr val="1F2937"/>
+                </a:solidFill>
+                <a:latin typeface="Meiryo UI"/>
+                <a:ea typeface="Meiryo UI"/>
+              </a:rPr>
+              <a:t>になる。</a:t>
+            </a:r>
+            <a:br>
+              <a:rPr lang="en-US" sz="2000" b="0">
+                <a:solidFill>
+                  <a:srgbClr val="1F2937"/>
+                </a:solidFill>
+                <a:latin typeface="Meiryo UI"/>
+                <a:ea typeface="Meiryo UI"/>
+              </a:rPr>
+            </a:br>
+            <a:r>
+              <a:rPr sz="2000" b="0">
+                <a:solidFill>
+                  <a:srgbClr val="1F2937"/>
+                </a:solidFill>
+                <a:latin typeface="Meiryo UI"/>
+                <a:ea typeface="Meiryo UI"/>
+              </a:rPr>
+              <a:t>この受け渡しでフローは動きます。</a:t>
             </a:r>
           </a:p>
         </p:txBody>
@@ -3976,8 +4157,8 @@
         </p:nvSpPr>
         <p:spPr>
           <a:xfrm>
-            <a:off x="7040880" y="1737360"/>
-            <a:ext cx="4572000" cy="4114800"/>
+            <a:off x="6444343" y="1737360"/>
+            <a:ext cx="5634446" cy="4114800"/>
           </a:xfrm>
           <a:prstGeom prst="roundRect">
             <a:avLst/>
@@ -4007,7 +4188,7 @@
           </a:fontRef>
         </p:style>
         <p:txBody>
-          <a:bodyPr rtlCol="0" anchor="ctr" wrap="square"/>
+          <a:bodyPr wrap="square" rtlCol="0" anchor="ctr"/>
           <a:lstStyle/>
           <a:p>
             <a:pPr algn="ctr"/>
@@ -4038,6 +4219,76 @@
           </a:p>
         </p:txBody>
       </p:sp>
+      <p:pic>
+        <p:nvPicPr>
+          <p:cNvPr id="11" name="図 10" descr="The image shows a user interface with a form or dashboard for monitoring and managing a new email notification, specifically for the V3 version, with fields for time, input, and various status indicators.&#10;&#10;AI 生成コンテンツは誤りを含む可能性があります。">
+            <a:extLst>
+              <a:ext uri="{FF2B5EF4-FFF2-40B4-BE49-F238E27FC236}">
+                <a16:creationId xmlns:a16="http://schemas.microsoft.com/office/drawing/2014/main" id="{9075CAAA-BE7F-0705-74DC-CF9BA2487F11}"/>
+              </a:ext>
+            </a:extLst>
+          </p:cNvPr>
+          <p:cNvPicPr>
+            <a:picLocks noChangeAspect="1"/>
+          </p:cNvPicPr>
+          <p:nvPr/>
+        </p:nvPicPr>
+        <p:blipFill>
+          <a:blip r:embed="rId2"/>
+          <a:stretch>
+            <a:fillRect/>
+          </a:stretch>
+        </p:blipFill>
+        <p:spPr>
+          <a:xfrm>
+            <a:off x="6577723" y="2266908"/>
+            <a:ext cx="5242726" cy="2978963"/>
+          </a:xfrm>
+          <a:prstGeom prst="rect">
+            <a:avLst/>
+          </a:prstGeom>
+          <a:ln>
+            <a:noFill/>
+          </a:ln>
+          <a:effectLst>
+            <a:outerShdw blurRad="292100" dist="139700" dir="2700000" algn="tl" rotWithShape="0">
+              <a:srgbClr val="333333">
+                <a:alpha val="65000"/>
+              </a:srgbClr>
+            </a:outerShdw>
+          </a:effectLst>
+        </p:spPr>
+      </p:pic>
+      <p:pic>
+        <p:nvPicPr>
+          <p:cNvPr id="14" name="図 13" descr="The image depicts two animated characters, one in a business suit and the other in traditional attire, energetically waving a sword in motion.&#10;&#10;AI 生成コンテンツは誤りを含む可能性があります。">
+            <a:extLst>
+              <a:ext uri="{FF2B5EF4-FFF2-40B4-BE49-F238E27FC236}">
+                <a16:creationId xmlns:a16="http://schemas.microsoft.com/office/drawing/2014/main" id="{1FA4F8A3-E816-D610-5316-58E852D90900}"/>
+              </a:ext>
+            </a:extLst>
+          </p:cNvPr>
+          <p:cNvPicPr>
+            <a:picLocks noChangeAspect="1"/>
+          </p:cNvPicPr>
+          <p:nvPr/>
+        </p:nvPicPr>
+        <p:blipFill>
+          <a:blip r:embed="rId3"/>
+          <a:stretch>
+            <a:fillRect/>
+          </a:stretch>
+        </p:blipFill>
+        <p:spPr>
+          <a:xfrm>
+            <a:off x="7807718" y="101365"/>
+            <a:ext cx="2823576" cy="2133368"/>
+          </a:xfrm>
+          <a:prstGeom prst="rect">
+            <a:avLst/>
+          </a:prstGeom>
+        </p:spPr>
+      </p:pic>
     </p:spTree>
   </p:cSld>
   <p:clrMapOvr>
@@ -4146,7 +4397,7 @@
         </p:nvSpPr>
         <p:spPr>
           <a:xfrm>
-            <a:off x="0" y="0"/>
+            <a:off x="305" y="0"/>
             <a:ext cx="12191695" cy="1485900"/>
           </a:xfrm>
           <a:prstGeom prst="rect">
@@ -4783,15 +5034,50 @@
               <a:buNone/>
             </a:pPr>
             <a:r>
-              <a:rPr sz="2000" b="0">
+              <a:rPr sz="2000" b="1">
                 <a:solidFill>
                   <a:srgbClr val="1F2937"/>
                 </a:solidFill>
                 <a:latin typeface="Meiryo UI"/>
                 <a:ea typeface="Meiryo UI"/>
               </a:rPr>
-              <a:t>🎯 実行履歴を開くと、入力・出力が全部見えます</a:t>
-            </a:r>
+              <a:t>🎯 実行</a:t>
+            </a:r>
+            <a:r>
+              <a:rPr lang="ja-JP" altLang="en-US" sz="2000" b="1">
+                <a:solidFill>
+                  <a:srgbClr val="1F2937"/>
+                </a:solidFill>
+                <a:latin typeface="Meiryo UI"/>
+                <a:ea typeface="Meiryo UI"/>
+              </a:rPr>
+              <a:t>結果</a:t>
+            </a:r>
+            <a:r>
+              <a:rPr sz="2000" b="1">
+                <a:solidFill>
+                  <a:srgbClr val="1F2937"/>
+                </a:solidFill>
+                <a:latin typeface="Meiryo UI"/>
+                <a:ea typeface="Meiryo UI"/>
+              </a:rPr>
+              <a:t>を開くと、入力・出力が全部見えます</a:t>
+            </a:r>
+            <a:endParaRPr lang="en-US" sz="2000" b="1">
+              <a:solidFill>
+                <a:srgbClr val="1F2937"/>
+              </a:solidFill>
+              <a:latin typeface="Meiryo UI"/>
+              <a:ea typeface="Meiryo UI"/>
+            </a:endParaRPr>
+          </a:p>
+          <a:p>
+            <a:pPr marL="0" indent="0" algn="l">
+              <a:spcBef>
+                <a:spcPts val="1000"/>
+              </a:spcBef>
+              <a:buNone/>
+            </a:pPr>
             <a:endParaRPr lang="en-US" altLang="ja-JP" sz="2000" b="1">
               <a:solidFill>
                 <a:srgbClr val="1F2937"/>
@@ -4811,18 +5097,22 @@
               </a:rPr>
               <a:t>・フローを実行 → 左メニューの「実行履歴」を開く</a:t>
             </a:r>
-          </a:p>
-          <a:p>
-            <a:r>
-              <a:rPr sz="2000" b="0">
+            <a:br>
+              <a:rPr lang="en-US" sz="2000" b="0">
                 <a:solidFill>
                   <a:srgbClr val="1F2937"/>
                 </a:solidFill>
                 <a:latin typeface="Meiryo UI"/>
                 <a:ea typeface="Meiryo UI"/>
               </a:rPr>
-              <a:t>・見たい実行をクリック → 各アクションをクリック</a:t>
-            </a:r>
+            </a:br>
+            <a:endParaRPr sz="2000" b="0">
+              <a:solidFill>
+                <a:srgbClr val="1F2937"/>
+              </a:solidFill>
+              <a:latin typeface="Meiryo UI"/>
+              <a:ea typeface="Meiryo UI"/>
+            </a:endParaRPr>
           </a:p>
           <a:p>
             <a:r>
@@ -4833,19 +5123,121 @@
                 <a:latin typeface="Meiryo UI"/>
                 <a:ea typeface="Meiryo UI"/>
               </a:rPr>
-              <a:t>・そのアクションの「入力」と「出力」が表示されます（例：トリガーの出力に "High" が入っている）</a:t>
-            </a:r>
-          </a:p>
-          <a:p>
-            <a:r>
-              <a:rPr sz="2000" b="0">
+              <a:t>・見たい実行をクリック → 各アクションをクリック</a:t>
+            </a:r>
+            <a:br>
+              <a:rPr lang="en-US" sz="2000" b="0">
                 <a:solidFill>
                   <a:srgbClr val="1F2937"/>
                 </a:solidFill>
                 <a:latin typeface="Meiryo UI"/>
                 <a:ea typeface="Meiryo UI"/>
               </a:rPr>
-              <a:t>・思ったとおりに動かないときは、まずここを見る。食い違っている値が必ず写っています。</a:t>
+            </a:br>
+            <a:endParaRPr sz="2000" b="0">
+              <a:solidFill>
+                <a:srgbClr val="1F2937"/>
+              </a:solidFill>
+              <a:latin typeface="Meiryo UI"/>
+              <a:ea typeface="Meiryo UI"/>
+            </a:endParaRPr>
+          </a:p>
+          <a:p>
+            <a:r>
+              <a:rPr sz="2000" b="0">
+                <a:solidFill>
+                  <a:srgbClr val="1F2937"/>
+                </a:solidFill>
+                <a:latin typeface="Meiryo UI"/>
+                <a:ea typeface="Meiryo UI"/>
+              </a:rPr>
+              <a:t>・そのアクションの「入力」と「出力」が表示されます</a:t>
+            </a:r>
+            <a:br>
+              <a:rPr lang="en-US" sz="2000" b="0">
+                <a:solidFill>
+                  <a:srgbClr val="1F2937"/>
+                </a:solidFill>
+                <a:latin typeface="Meiryo UI"/>
+                <a:ea typeface="Meiryo UI"/>
+              </a:rPr>
+            </a:br>
+            <a:r>
+              <a:rPr sz="2000" b="0">
+                <a:solidFill>
+                  <a:srgbClr val="1F2937"/>
+                </a:solidFill>
+                <a:latin typeface="Meiryo UI"/>
+                <a:ea typeface="Meiryo UI"/>
+              </a:rPr>
+              <a:t>（例：トリガーの出力に </a:t>
+            </a:r>
+            <a:r>
+              <a:rPr sz="2000" b="1">
+                <a:solidFill>
+                  <a:srgbClr val="C00000"/>
+                </a:solidFill>
+                <a:latin typeface="Meiryo UI"/>
+                <a:ea typeface="Meiryo UI"/>
+              </a:rPr>
+              <a:t>"High" </a:t>
+            </a:r>
+            <a:r>
+              <a:rPr sz="2000" b="0">
+                <a:solidFill>
+                  <a:srgbClr val="1F2937"/>
+                </a:solidFill>
+                <a:latin typeface="Meiryo UI"/>
+                <a:ea typeface="Meiryo UI"/>
+              </a:rPr>
+              <a:t>が入っている）</a:t>
+            </a:r>
+            <a:br>
+              <a:rPr lang="en-US" sz="2000" b="0">
+                <a:solidFill>
+                  <a:srgbClr val="1F2937"/>
+                </a:solidFill>
+                <a:latin typeface="Meiryo UI"/>
+                <a:ea typeface="Meiryo UI"/>
+              </a:rPr>
+            </a:br>
+            <a:endParaRPr sz="2000" b="0">
+              <a:solidFill>
+                <a:srgbClr val="1F2937"/>
+              </a:solidFill>
+              <a:latin typeface="Meiryo UI"/>
+              <a:ea typeface="Meiryo UI"/>
+            </a:endParaRPr>
+          </a:p>
+          <a:p>
+            <a:r>
+              <a:rPr sz="2000" b="0">
+                <a:solidFill>
+                  <a:srgbClr val="1F2937"/>
+                </a:solidFill>
+                <a:latin typeface="Meiryo UI"/>
+                <a:ea typeface="Meiryo UI"/>
+              </a:rPr>
+              <a:t>・思ったとおりに動かないときは、まずここを見る。</a:t>
+            </a:r>
+            <a:br>
+              <a:rPr lang="en-US" sz="2000" b="0">
+                <a:solidFill>
+                  <a:srgbClr val="1F2937"/>
+                </a:solidFill>
+                <a:latin typeface="Meiryo UI"/>
+                <a:ea typeface="Meiryo UI"/>
+              </a:rPr>
+            </a:br>
+            <a:r>
+              <a:rPr sz="2000" b="0">
+                <a:solidFill>
+                  <a:srgbClr val="1F2937"/>
+                </a:solidFill>
+                <a:latin typeface="Meiryo UI"/>
+                <a:ea typeface="Meiryo UI"/>
+              </a:rPr>
+              <a:t>食い違っている値が必ず写っています。</a:t>
             </a:r>
           </a:p>
         </p:txBody>
@@ -4858,8 +5250,8 @@
         </p:nvSpPr>
         <p:spPr>
           <a:xfrm>
-            <a:off x="7040880" y="1737360"/>
-            <a:ext cx="4572000" cy="4114800"/>
+            <a:off x="6217920" y="1737360"/>
+            <a:ext cx="5394960" cy="4114800"/>
           </a:xfrm>
           <a:prstGeom prst="roundRect">
             <a:avLst/>
@@ -4889,7 +5281,7 @@
           </a:fontRef>
         </p:style>
         <p:txBody>
-          <a:bodyPr rtlCol="0" anchor="ctr" wrap="square"/>
+          <a:bodyPr wrap="square" rtlCol="0" anchor="ctr"/>
           <a:lstStyle/>
           <a:p>
             <a:pPr algn="ctr"/>
@@ -4917,6 +5309,98 @@
               <a:t>実行履歴で トリガーの出力
 が見えている画面</a:t>
             </a:r>
+          </a:p>
+        </p:txBody>
+      </p:sp>
+      <p:pic>
+        <p:nvPicPr>
+          <p:cNvPr id="11" name="図 10" descr="The image displays a JSON object representing an email with attributes like subject, body preview, importance, and various identifiers.&#10;&#10;AI 生成コンテンツは誤りを含む可能性があります。">
+            <a:extLst>
+              <a:ext uri="{FF2B5EF4-FFF2-40B4-BE49-F238E27FC236}">
+                <a16:creationId xmlns:a16="http://schemas.microsoft.com/office/drawing/2014/main" id="{F3CBCE24-76A1-A5BD-25FC-AACDE068997B}"/>
+              </a:ext>
+            </a:extLst>
+          </p:cNvPr>
+          <p:cNvPicPr>
+            <a:picLocks noChangeAspect="1"/>
+          </p:cNvPicPr>
+          <p:nvPr/>
+        </p:nvPicPr>
+        <p:blipFill>
+          <a:blip r:embed="rId2"/>
+          <a:stretch>
+            <a:fillRect/>
+          </a:stretch>
+        </p:blipFill>
+        <p:spPr>
+          <a:xfrm>
+            <a:off x="6573289" y="2019910"/>
+            <a:ext cx="4660115" cy="3519190"/>
+          </a:xfrm>
+          <a:prstGeom prst="rect">
+            <a:avLst/>
+          </a:prstGeom>
+          <a:ln>
+            <a:noFill/>
+          </a:ln>
+          <a:effectLst>
+            <a:outerShdw blurRad="292100" dist="139700" dir="2700000" algn="tl" rotWithShape="0">
+              <a:srgbClr val="333333">
+                <a:alpha val="65000"/>
+              </a:srgbClr>
+            </a:outerShdw>
+          </a:effectLst>
+        </p:spPr>
+      </p:pic>
+      <p:sp>
+        <p:nvSpPr>
+          <p:cNvPr id="12" name="四角形: 角を丸くする 11">
+            <a:extLst>
+              <a:ext uri="{FF2B5EF4-FFF2-40B4-BE49-F238E27FC236}">
+                <a16:creationId xmlns:a16="http://schemas.microsoft.com/office/drawing/2014/main" id="{BCFCC7EF-7393-925D-E760-242DDE64CAA5}"/>
+              </a:ext>
+            </a:extLst>
+          </p:cNvPr>
+          <p:cNvSpPr/>
+          <p:nvPr/>
+        </p:nvSpPr>
+        <p:spPr>
+          <a:xfrm>
+            <a:off x="8536577" y="4130061"/>
+            <a:ext cx="1306286" cy="348343"/>
+          </a:xfrm>
+          <a:prstGeom prst="roundRect">
+            <a:avLst/>
+          </a:prstGeom>
+          <a:noFill/>
+          <a:ln w="31750">
+            <a:solidFill>
+              <a:srgbClr val="C00000"/>
+            </a:solidFill>
+          </a:ln>
+        </p:spPr>
+        <p:style>
+          <a:lnRef idx="2">
+            <a:schemeClr val="accent1">
+              <a:shade val="15000"/>
+            </a:schemeClr>
+          </a:lnRef>
+          <a:fillRef idx="1">
+            <a:schemeClr val="accent1"/>
+          </a:fillRef>
+          <a:effectRef idx="0">
+            <a:schemeClr val="accent1"/>
+          </a:effectRef>
+          <a:fontRef idx="minor">
+            <a:schemeClr val="lt1"/>
+          </a:fontRef>
+        </p:style>
+        <p:txBody>
+          <a:bodyPr rtlCol="0" anchor="ctr"/>
+          <a:lstStyle/>
+          <a:p>
+            <a:pPr algn="ctr"/>
+            <a:endParaRPr kumimoji="1" lang="ja-JP" altLang="en-US"/>
           </a:p>
         </p:txBody>
       </p:sp>
@@ -5665,7 +6149,7 @@
               <a:buNone/>
             </a:pPr>
             <a:r>
-              <a:rPr b="0">
+              <a:rPr b="1">
                 <a:solidFill>
                   <a:srgbClr val="1F2937"/>
                 </a:solidFill>
@@ -5674,7 +6158,7 @@
               </a:rPr>
               <a:t>🎯 目的：メールが届いたら重要度で仕分けるフローの形を作る</a:t>
             </a:r>
-            <a:endParaRPr lang="en-US" altLang="ja-JP">
+            <a:endParaRPr lang="en-US" altLang="ja-JP" b="1">
               <a:solidFill>
                 <a:srgbClr val="1F2937"/>
               </a:solidFill>
@@ -5694,6 +6178,22 @@
               </a:rPr>
               <a:t>・トリガー「新しいメールが届いたとき」を置く</a:t>
             </a:r>
+            <a:endParaRPr lang="en-US" b="0">
+              <a:solidFill>
+                <a:srgbClr val="1F2937"/>
+              </a:solidFill>
+              <a:latin typeface="Meiryo UI"/>
+              <a:ea typeface="Meiryo UI"/>
+            </a:endParaRPr>
+          </a:p>
+          <a:p>
+            <a:endParaRPr b="0">
+              <a:solidFill>
+                <a:srgbClr val="1F2937"/>
+              </a:solidFill>
+              <a:latin typeface="Meiryo UI"/>
+              <a:ea typeface="Meiryo UI"/>
+            </a:endParaRPr>
           </a:p>
           <a:p>
             <a:r>
@@ -5706,6 +6206,22 @@
               </a:rPr>
               <a:t>・「条件」アクションを追加する</a:t>
             </a:r>
+            <a:endParaRPr lang="en-US" b="0">
+              <a:solidFill>
+                <a:srgbClr val="1F2937"/>
+              </a:solidFill>
+              <a:latin typeface="Meiryo UI"/>
+              <a:ea typeface="Meiryo UI"/>
+            </a:endParaRPr>
+          </a:p>
+          <a:p>
+            <a:endParaRPr b="0">
+              <a:solidFill>
+                <a:srgbClr val="1F2937"/>
+              </a:solidFill>
+              <a:latin typeface="Meiryo UI"/>
+              <a:ea typeface="Meiryo UI"/>
+            </a:endParaRPr>
           </a:p>
           <a:p>
             <a:r>
@@ -5716,18 +6232,53 @@
                 <a:latin typeface="Meiryo UI"/>
                 <a:ea typeface="Meiryo UI"/>
               </a:rPr>
-              <a:t>・条件：メールの重要度 が次の値に等しい「高」（まずは、わざと日本語の「高」と書きます）</a:t>
-            </a:r>
-          </a:p>
-          <a:p>
-            <a:r>
-              <a:rPr b="0">
+              <a:t>・条件：メールの重要度 が次の値に等しい「高」</a:t>
+            </a:r>
+            <a:br>
+              <a:rPr lang="en-US" b="0">
                 <a:solidFill>
                   <a:srgbClr val="1F2937"/>
                 </a:solidFill>
                 <a:latin typeface="Meiryo UI"/>
                 <a:ea typeface="Meiryo UI"/>
               </a:rPr>
+            </a:br>
+            <a:r>
+              <a:rPr b="0">
+                <a:solidFill>
+                  <a:srgbClr val="1F2937"/>
+                </a:solidFill>
+                <a:latin typeface="Meiryo UI"/>
+                <a:ea typeface="Meiryo UI"/>
+              </a:rPr>
+              <a:t>（まずは、わざと日本語の「高」と書きます）</a:t>
+            </a:r>
+            <a:endParaRPr lang="en-US" b="0">
+              <a:solidFill>
+                <a:srgbClr val="1F2937"/>
+              </a:solidFill>
+              <a:latin typeface="Meiryo UI"/>
+              <a:ea typeface="Meiryo UI"/>
+            </a:endParaRPr>
+          </a:p>
+          <a:p>
+            <a:endParaRPr b="0">
+              <a:solidFill>
+                <a:srgbClr val="1F2937"/>
+              </a:solidFill>
+              <a:latin typeface="Meiryo UI"/>
+              <a:ea typeface="Meiryo UI"/>
+            </a:endParaRPr>
+          </a:p>
+          <a:p>
+            <a:r>
+              <a:rPr b="0">
+                <a:solidFill>
+                  <a:srgbClr val="1F2937"/>
+                </a:solidFill>
+                <a:latin typeface="Meiryo UI"/>
+                <a:ea typeface="Meiryo UI"/>
+              </a:rPr>
               <a:t>・はい／いいえ それぞれに「作成」でメッセージを置く</a:t>
             </a:r>
           </a:p>
@@ -5741,11 +6292,13 @@
         </p:nvSpPr>
         <p:spPr>
           <a:xfrm>
-            <a:off x="7040880" y="1737360"/>
-            <a:ext cx="4572000" cy="4114800"/>
+            <a:off x="6431242" y="1737360"/>
+            <a:ext cx="5181638" cy="4114800"/>
           </a:xfrm>
           <a:prstGeom prst="roundRect">
-            <a:avLst/>
+            <a:avLst>
+              <a:gd name="adj" fmla="val 11164"/>
+            </a:avLst>
           </a:prstGeom>
           <a:solidFill>
             <a:srgbClr val="F1F5FB"/>
@@ -5772,7 +6325,7 @@
           </a:fontRef>
         </p:style>
         <p:txBody>
-          <a:bodyPr rtlCol="0" anchor="ctr" wrap="square"/>
+          <a:bodyPr wrap="square" rtlCol="0" anchor="ctr"/>
           <a:lstStyle/>
           <a:p>
             <a:pPr algn="ctr"/>
@@ -5803,6 +6356,46 @@
           </a:p>
         </p:txBody>
       </p:sp>
+      <p:pic>
+        <p:nvPicPr>
+          <p:cNvPr id="11" name="図 10" descr="The image depicts a decision-making flowchart with a message received (V3) being marked as important, leading to a True or False outcome, and a message creation process with various steps.&#10;&#10;AI 生成コンテンツは誤りを含む可能性があります。">
+            <a:extLst>
+              <a:ext uri="{FF2B5EF4-FFF2-40B4-BE49-F238E27FC236}">
+                <a16:creationId xmlns:a16="http://schemas.microsoft.com/office/drawing/2014/main" id="{BD7A203F-F9C5-A916-279D-CCBA430D44A7}"/>
+              </a:ext>
+            </a:extLst>
+          </p:cNvPr>
+          <p:cNvPicPr>
+            <a:picLocks noChangeAspect="1"/>
+          </p:cNvPicPr>
+          <p:nvPr/>
+        </p:nvPicPr>
+        <p:blipFill>
+          <a:blip r:embed="rId2"/>
+          <a:stretch>
+            <a:fillRect/>
+          </a:stretch>
+        </p:blipFill>
+        <p:spPr>
+          <a:xfrm>
+            <a:off x="6626883" y="1920657"/>
+            <a:ext cx="4790356" cy="3760077"/>
+          </a:xfrm>
+          <a:prstGeom prst="rect">
+            <a:avLst/>
+          </a:prstGeom>
+          <a:ln>
+            <a:noFill/>
+          </a:ln>
+          <a:effectLst>
+            <a:outerShdw blurRad="292100" dist="139700" dir="2700000" algn="tl" rotWithShape="0">
+              <a:srgbClr val="333333">
+                <a:alpha val="65000"/>
+              </a:srgbClr>
+            </a:outerShdw>
+          </a:effectLst>
+        </p:spPr>
+      </p:pic>
     </p:spTree>
   </p:cSld>
   <p:clrMapOvr>
@@ -5812,1760 +6405,6 @@
 </file>
 
 <file path=ppt/slides/slide13.xml><?xml version="1.0" encoding="utf-8"?>
-<p:sld xmlns:a="http://schemas.openxmlformats.org/drawingml/2006/main" xmlns:r="http://schemas.openxmlformats.org/officeDocument/2006/relationships" xmlns:p="http://schemas.openxmlformats.org/presentationml/2006/main">
-  <p:cSld>
-    <p:spTree>
-      <p:nvGrpSpPr>
-        <p:cNvPr id="1" name=""/>
-        <p:cNvGrpSpPr/>
-        <p:nvPr/>
-      </p:nvGrpSpPr>
-      <p:grpSpPr>
-        <a:xfrm>
-          <a:off x="0" y="0"/>
-          <a:ext cx="0" cy="0"/>
-          <a:chOff x="0" y="0"/>
-          <a:chExt cx="0" cy="0"/>
-        </a:xfrm>
-      </p:grpSpPr>
-      <p:sp>
-        <p:nvSpPr>
-          <p:cNvPr id="2" name="Shape 0"/>
-          <p:cNvSpPr/>
-          <p:nvPr/>
-        </p:nvSpPr>
-        <p:spPr>
-          <a:xfrm>
-            <a:off x="0" y="0"/>
-            <a:ext cx="12191695" cy="6858000"/>
-          </a:xfrm>
-          <a:prstGeom prst="rect">
-            <a:avLst/>
-          </a:prstGeom>
-          <a:solidFill>
-            <a:srgbClr val="F3F4F6"/>
-          </a:solidFill>
-          <a:ln w="12700">
-            <a:solidFill>
-              <a:srgbClr val="FFFFFF">
-                <a:alpha val="0"/>
-              </a:srgbClr>
-            </a:solidFill>
-            <a:prstDash val="solid"/>
-          </a:ln>
-        </p:spPr>
-        <p:txBody>
-          <a:bodyPr/>
-          <a:lstStyle/>
-          <a:p>
-            <a:endParaRPr lang="ja-JP" altLang="en-US"/>
-          </a:p>
-        </p:txBody>
-      </p:sp>
-      <p:sp>
-        <p:nvSpPr>
-          <p:cNvPr id="3" name="Shape 1"/>
-          <p:cNvSpPr/>
-          <p:nvPr/>
-        </p:nvSpPr>
-        <p:spPr>
-          <a:xfrm>
-            <a:off x="0" y="0"/>
-            <a:ext cx="12191695" cy="6858000"/>
-          </a:xfrm>
-          <a:prstGeom prst="rect">
-            <a:avLst/>
-          </a:prstGeom>
-          <a:solidFill>
-            <a:srgbClr val="FFFFFF"/>
-          </a:solidFill>
-          <a:ln w="12700">
-            <a:solidFill>
-              <a:srgbClr val="FFFFFF">
-                <a:alpha val="0"/>
-              </a:srgbClr>
-            </a:solidFill>
-            <a:prstDash val="solid"/>
-          </a:ln>
-          <a:effectLst>
-            <a:outerShdw blurRad="63500" dist="38100" dir="16200000" algn="bl" rotWithShape="0">
-              <a:srgbClr val="000000">
-                <a:alpha val="10000"/>
-              </a:srgbClr>
-            </a:outerShdw>
-          </a:effectLst>
-        </p:spPr>
-        <p:txBody>
-          <a:bodyPr/>
-          <a:lstStyle/>
-          <a:p>
-            <a:endParaRPr lang="ja-JP" altLang="en-US"/>
-          </a:p>
-        </p:txBody>
-      </p:sp>
-      <p:sp>
-        <p:nvSpPr>
-          <p:cNvPr id="4" name="Shape 2"/>
-          <p:cNvSpPr/>
-          <p:nvPr/>
-        </p:nvSpPr>
-        <p:spPr>
-          <a:xfrm>
-            <a:off x="0" y="0"/>
-            <a:ext cx="12191695" cy="1485900"/>
-          </a:xfrm>
-          <a:prstGeom prst="rect">
-            <a:avLst/>
-          </a:prstGeom>
-          <a:solidFill>
-            <a:srgbClr val="FFFFFF"/>
-          </a:solidFill>
-          <a:ln/>
-        </p:spPr>
-        <p:txBody>
-          <a:bodyPr/>
-          <a:lstStyle/>
-          <a:p>
-            <a:endParaRPr lang="ja-JP" altLang="en-US"/>
-          </a:p>
-        </p:txBody>
-      </p:sp>
-      <p:sp>
-        <p:nvSpPr>
-          <p:cNvPr id="5" name="Shape 3"/>
-          <p:cNvSpPr/>
-          <p:nvPr/>
-        </p:nvSpPr>
-        <p:spPr>
-          <a:xfrm>
-            <a:off x="0" y="1476756"/>
-            <a:ext cx="12191695" cy="9144"/>
-          </a:xfrm>
-          <a:prstGeom prst="rect">
-            <a:avLst/>
-          </a:prstGeom>
-          <a:solidFill>
-            <a:srgbClr val="F3F4F6"/>
-          </a:solidFill>
-          <a:ln w="12700">
-            <a:solidFill>
-              <a:srgbClr val="F3F4F6">
-                <a:alpha val="0"/>
-              </a:srgbClr>
-            </a:solidFill>
-            <a:prstDash val="solid"/>
-          </a:ln>
-        </p:spPr>
-        <p:txBody>
-          <a:bodyPr/>
-          <a:lstStyle/>
-          <a:p>
-            <a:endParaRPr lang="ja-JP" altLang="en-US"/>
-          </a:p>
-        </p:txBody>
-      </p:sp>
-      <p:sp>
-        <p:nvSpPr>
-          <p:cNvPr id="6" name="Text 4"/>
-          <p:cNvSpPr txBox="1"/>
-          <p:nvPr/>
-        </p:nvSpPr>
-        <p:spPr>
-          <a:xfrm>
-            <a:off x="457200" y="228600"/>
-            <a:ext cx="5600700" cy="267005"/>
-          </a:xfrm>
-          <a:prstGeom prst="rect">
-            <a:avLst/>
-          </a:prstGeom>
-          <a:noFill/>
-          <a:ln/>
-        </p:spPr>
-        <p:txBody>
-          <a:bodyPr wrap="square" lIns="0" tIns="0" rIns="0" bIns="0" rtlCol="0" anchor="ctr"/>
-          <a:lstStyle/>
-          <a:p>
-            <a:pPr marL="0" indent="0" algn="l">
-              <a:buNone/>
-            </a:pPr>
-            <a:r>
-              <a:rPr lang="en-US" sz="1600" b="1" kern="0" spc="150" dirty="0">
-                <a:solidFill>
-                  <a:srgbClr val="6B7280"/>
-                </a:solidFill>
-                <a:latin typeface="Meiryo UI" pitchFamily="34" charset="0"/>
-                <a:ea typeface="Meiryo UI" pitchFamily="34" charset="-122"/>
-                <a:cs typeface="Noto Sans JP" pitchFamily="34" charset="-120"/>
-              </a:rPr>
-              <a:t>PA45｜第11回</a:t>
-            </a:r>
-            <a:endParaRPr lang="en-US" sz="1500" dirty="0"/>
-          </a:p>
-        </p:txBody>
-      </p:sp>
-      <p:sp>
-        <p:nvSpPr>
-          <p:cNvPr id="7" name="Text 5"/>
-          <p:cNvSpPr txBox="1"/>
-          <p:nvPr/>
-        </p:nvSpPr>
-        <p:spPr>
-          <a:xfrm>
-            <a:off x="457200" y="533095"/>
-            <a:ext cx="11038114" cy="715061"/>
-          </a:xfrm>
-          <a:prstGeom prst="rect">
-            <a:avLst/>
-          </a:prstGeom>
-          <a:noFill/>
-          <a:ln/>
-        </p:spPr>
-        <p:txBody>
-          <a:bodyPr wrap="square" lIns="0" tIns="0" rIns="0" bIns="0" rtlCol="0" anchor="ctr"/>
-          <a:lstStyle/>
-          <a:p>
-            <a:pPr marL="0" indent="0" algn="l">
-              <a:buNone/>
-            </a:pPr>
-            <a:r>
-              <a:rPr lang="en-US" sz="3000" b="1" dirty="0">
-                <a:solidFill>
-                  <a:srgbClr val="1F2937"/>
-                </a:solidFill>
-                <a:latin typeface="Meiryo UI" pitchFamily="34" charset="0"/>
-                <a:ea typeface="Meiryo UI" pitchFamily="34" charset="-122"/>
-                <a:cs typeface="Noto Sans JP" pitchFamily="34" charset="-120"/>
-              </a:rPr>
-              <a:t>フロー解説 ②  わざと失敗させてみる</a:t>
-            </a:r>
-            <a:endParaRPr lang="en-US" sz="3200" dirty="0"/>
-          </a:p>
-        </p:txBody>
-      </p:sp>
-      <p:sp>
-        <p:nvSpPr>
-          <p:cNvPr id="8" name="Shape 6"/>
-          <p:cNvSpPr/>
-          <p:nvPr/>
-        </p:nvSpPr>
-        <p:spPr>
-          <a:xfrm>
-            <a:off x="10858500" y="828446"/>
-            <a:ext cx="114300" cy="114300"/>
-          </a:xfrm>
-          <a:prstGeom prst="ellipse">
-            <a:avLst/>
-          </a:prstGeom>
-          <a:solidFill>
-            <a:srgbClr val="0078D4"/>
-          </a:solidFill>
-          <a:ln w="12700">
-            <a:solidFill>
-              <a:srgbClr val="FFFFFF">
-                <a:alpha val="0"/>
-              </a:srgbClr>
-            </a:solidFill>
-            <a:prstDash val="solid"/>
-          </a:ln>
-        </p:spPr>
-        <p:txBody>
-          <a:bodyPr/>
-          <a:lstStyle/>
-          <a:p>
-            <a:endParaRPr lang="ja-JP" altLang="en-US"/>
-          </a:p>
-        </p:txBody>
-      </p:sp>
-      <p:sp>
-        <p:nvSpPr>
-          <p:cNvPr id="9" name="Text 7"/>
-          <p:cNvSpPr txBox="1"/>
-          <p:nvPr/>
-        </p:nvSpPr>
-        <p:spPr>
-          <a:xfrm>
-            <a:off x="11048695" y="752551"/>
-            <a:ext cx="771754" cy="267005"/>
-          </a:xfrm>
-          <a:prstGeom prst="rect">
-            <a:avLst/>
-          </a:prstGeom>
-          <a:noFill/>
-          <a:ln/>
-        </p:spPr>
-        <p:txBody>
-          <a:bodyPr wrap="square" lIns="0" tIns="0" rIns="0" bIns="0" rtlCol="0" anchor="ctr"/>
-          <a:lstStyle/>
-          <a:p>
-            <a:pPr marL="0" indent="0" algn="l">
-              <a:buNone/>
-            </a:pPr>
-            <a:r>
-              <a:rPr lang="en-US" sz="1600" dirty="0">
-                <a:solidFill>
-                  <a:srgbClr val="9CA3AF"/>
-                </a:solidFill>
-                <a:latin typeface="Meiryo UI" pitchFamily="34" charset="0"/>
-                <a:ea typeface="Meiryo UI" pitchFamily="34" charset="-122"/>
-                <a:cs typeface="ui-monospace" pitchFamily="34" charset="-120"/>
-              </a:rPr>
-              <a:t>Concept</a:t>
-            </a:r>
-            <a:endParaRPr lang="en-US" sz="1500" dirty="0"/>
-          </a:p>
-        </p:txBody>
-      </p:sp>
-      <p:sp>
-        <p:nvSpPr>
-          <p:cNvPr id="13" name="Shape 9"/>
-          <p:cNvSpPr/>
-          <p:nvPr/>
-        </p:nvSpPr>
-        <p:spPr>
-          <a:xfrm>
-            <a:off x="305" y="1485900"/>
-            <a:ext cx="12191695" cy="4914900"/>
-          </a:xfrm>
-          <a:prstGeom prst="rect">
-            <a:avLst/>
-          </a:prstGeom>
-          <a:solidFill>
-            <a:srgbClr val="F9FAFB"/>
-          </a:solidFill>
-          <a:ln w="12700">
-            <a:solidFill>
-              <a:srgbClr val="FFFFFF">
-                <a:alpha val="0"/>
-              </a:srgbClr>
-            </a:solidFill>
-            <a:prstDash val="solid"/>
-          </a:ln>
-        </p:spPr>
-        <p:txBody>
-          <a:bodyPr/>
-          <a:lstStyle/>
-          <a:p>
-            <a:endParaRPr lang="ja-JP" altLang="en-US"/>
-          </a:p>
-        </p:txBody>
-      </p:sp>
-      <p:pic>
-        <p:nvPicPr>
-          <p:cNvPr id="23" name="Image 8" descr="preencoded.png"/>
-          <p:cNvPicPr>
-            <a:picLocks noChangeAspect="1"/>
-          </p:cNvPicPr>
-          <p:nvPr/>
-        </p:nvPicPr>
-        <p:blipFill>
-          <a:blip/>
-          <a:srcRect t="-401" b="-401"/>
-          <a:stretch/>
-        </p:blipFill>
-        <p:spPr>
-          <a:xfrm>
-            <a:off x="0" y="6801307"/>
-            <a:ext cx="12191695" cy="57607"/>
-          </a:xfrm>
-          <a:prstGeom prst="rect">
-            <a:avLst/>
-          </a:prstGeom>
-        </p:spPr>
-      </p:pic>
-      <p:sp>
-        <p:nvSpPr>
-          <p:cNvPr id="39" name="Shape 22"/>
-          <p:cNvSpPr/>
-          <p:nvPr/>
-        </p:nvSpPr>
-        <p:spPr>
-          <a:xfrm>
-            <a:off x="0" y="6400800"/>
-            <a:ext cx="12191695" cy="457200"/>
-          </a:xfrm>
-          <a:prstGeom prst="rect">
-            <a:avLst/>
-          </a:prstGeom>
-          <a:solidFill>
-            <a:srgbClr val="FFFFFF"/>
-          </a:solidFill>
-          <a:ln/>
-        </p:spPr>
-        <p:txBody>
-          <a:bodyPr/>
-          <a:lstStyle/>
-          <a:p>
-            <a:endParaRPr lang="ja-JP" altLang="en-US"/>
-          </a:p>
-        </p:txBody>
-      </p:sp>
-      <p:sp>
-        <p:nvSpPr>
-          <p:cNvPr id="40" name="Shape 23"/>
-          <p:cNvSpPr/>
-          <p:nvPr/>
-        </p:nvSpPr>
-        <p:spPr>
-          <a:xfrm>
-            <a:off x="0" y="6400800"/>
-            <a:ext cx="12191695" cy="9144"/>
-          </a:xfrm>
-          <a:prstGeom prst="rect">
-            <a:avLst/>
-          </a:prstGeom>
-          <a:solidFill>
-            <a:srgbClr val="E5E7EB"/>
-          </a:solidFill>
-          <a:ln w="12700">
-            <a:solidFill>
-              <a:srgbClr val="E5E7EB">
-                <a:alpha val="0"/>
-              </a:srgbClr>
-            </a:solidFill>
-            <a:prstDash val="solid"/>
-          </a:ln>
-        </p:spPr>
-        <p:txBody>
-          <a:bodyPr/>
-          <a:lstStyle/>
-          <a:p>
-            <a:endParaRPr lang="ja-JP" altLang="en-US"/>
-          </a:p>
-        </p:txBody>
-      </p:sp>
-      <p:sp>
-        <p:nvSpPr>
-          <p:cNvPr id="41" name="Text 24"/>
-          <p:cNvSpPr txBox="1"/>
-          <p:nvPr/>
-        </p:nvSpPr>
-        <p:spPr>
-          <a:xfrm>
-            <a:off x="457200" y="6519672"/>
-            <a:ext cx="2573122" cy="228600"/>
-          </a:xfrm>
-          <a:prstGeom prst="rect">
-            <a:avLst/>
-          </a:prstGeom>
-          <a:noFill/>
-          <a:ln/>
-        </p:spPr>
-        <p:txBody>
-          <a:bodyPr wrap="square" lIns="0" tIns="0" rIns="0" bIns="0" rtlCol="0" anchor="ctr"/>
-          <a:lstStyle/>
-          <a:p>
-            <a:pPr marL="0" indent="0" algn="l">
-              <a:buNone/>
-            </a:pPr>
-            <a:r>
-              <a:rPr lang="en-US" sz="1600" dirty="0">
-                <a:solidFill>
-                  <a:srgbClr val="9CA3AF"/>
-                </a:solidFill>
-                <a:latin typeface="Meiryo UI" pitchFamily="34" charset="0"/>
-                <a:ea typeface="Meiryo UI" pitchFamily="34" charset="-122"/>
-                <a:cs typeface="Noto Sans JP" pitchFamily="34" charset="-120"/>
-              </a:rPr>
-              <a:t>Power Automate for Beginners</a:t>
-            </a:r>
-            <a:endParaRPr lang="en-US" sz="1200" dirty="0"/>
-          </a:p>
-        </p:txBody>
-      </p:sp>
-      <p:sp>
-        <p:nvSpPr>
-          <p:cNvPr id="42" name="Text 25"/>
-          <p:cNvSpPr txBox="1"/>
-          <p:nvPr/>
-        </p:nvSpPr>
-        <p:spPr>
-          <a:xfrm>
-            <a:off x="10490911" y="6519672"/>
-            <a:ext cx="1484986" cy="228600"/>
-          </a:xfrm>
-          <a:prstGeom prst="rect">
-            <a:avLst/>
-          </a:prstGeom>
-          <a:noFill/>
-          <a:ln/>
-        </p:spPr>
-        <p:txBody>
-          <a:bodyPr wrap="square" lIns="0" tIns="0" rIns="0" bIns="0" rtlCol="0" anchor="ctr"/>
-          <a:lstStyle/>
-          <a:p>
-            <a:pPr marL="0" indent="0" algn="l">
-              <a:buNone/>
-            </a:pPr>
-            <a:r>
-              <a:rPr lang="en-US" sz="1600" dirty="0">
-                <a:solidFill>
-                  <a:srgbClr val="9CA3AF"/>
-                </a:solidFill>
-                <a:latin typeface="Meiryo UI" pitchFamily="34" charset="0"/>
-                <a:ea typeface="Meiryo UI" pitchFamily="34" charset="-122"/>
-                <a:cs typeface="Noto Sans JP" pitchFamily="34" charset="-120"/>
-              </a:rPr>
-              <a:t>Copyright © PA45</a:t>
-            </a:r>
-            <a:endParaRPr lang="en-US" sz="1200" dirty="0"/>
-          </a:p>
-        </p:txBody>
-      </p:sp>
-      <p:grpSp>
-        <p:nvGrpSpPr>
-          <p:cNvPr id="47" name="グループ化 46">
-            <a:extLst>
-              <a:ext uri="{FF2B5EF4-FFF2-40B4-BE49-F238E27FC236}">
-                <a16:creationId xmlns:a16="http://schemas.microsoft.com/office/drawing/2014/main" id="{722FBEAE-8CB7-7493-F595-CD1F2E21BD05}"/>
-              </a:ext>
-            </a:extLst>
-          </p:cNvPr>
-          <p:cNvGrpSpPr/>
-          <p:nvPr/>
-        </p:nvGrpSpPr>
-        <p:grpSpPr>
-          <a:xfrm>
-            <a:off x="4603551" y="6322778"/>
-            <a:ext cx="7350682" cy="405017"/>
-            <a:chOff x="5861349" y="604238"/>
-            <a:chExt cx="6035909" cy="405017"/>
-          </a:xfrm>
-        </p:grpSpPr>
-        <p:sp>
-          <p:nvSpPr>
-            <p:cNvPr id="48" name="Shape 31">
-              <a:extLst>
-                <a:ext uri="{FF2B5EF4-FFF2-40B4-BE49-F238E27FC236}">
-                  <a16:creationId xmlns:a16="http://schemas.microsoft.com/office/drawing/2014/main" id="{DD44BB3C-F859-7A5E-7E34-CC1C35ECEA4D}"/>
-                </a:ext>
-              </a:extLst>
-            </p:cNvPr>
-            <p:cNvSpPr/>
-            <p:nvPr/>
-          </p:nvSpPr>
-          <p:spPr>
-            <a:xfrm>
-              <a:off x="6034969" y="604238"/>
-              <a:ext cx="5854549" cy="386057"/>
-            </a:xfrm>
-            <a:prstGeom prst="roundRect">
-              <a:avLst>
-                <a:gd name="adj" fmla="val 342465"/>
-              </a:avLst>
-            </a:prstGeom>
-            <a:solidFill>
-              <a:srgbClr val="EFF6FF"/>
-            </a:solidFill>
-            <a:ln w="12700">
-              <a:solidFill>
-                <a:srgbClr val="FFFFFF">
-                  <a:alpha val="0"/>
-                </a:srgbClr>
-              </a:solidFill>
-              <a:prstDash val="solid"/>
-            </a:ln>
-          </p:spPr>
-          <p:txBody>
-            <a:bodyPr/>
-            <a:lstStyle/>
-            <a:p>
-              <a:endParaRPr lang="ja-JP" altLang="en-US"/>
-            </a:p>
-          </p:txBody>
-        </p:sp>
-        <p:sp>
-          <p:nvSpPr>
-            <p:cNvPr id="49" name="Text 21">
-              <a:extLst>
-                <a:ext uri="{FF2B5EF4-FFF2-40B4-BE49-F238E27FC236}">
-                  <a16:creationId xmlns:a16="http://schemas.microsoft.com/office/drawing/2014/main" id="{A7F44BB1-1667-BB85-557B-D7C1AAD8A0FA}"/>
-                </a:ext>
-              </a:extLst>
-            </p:cNvPr>
-            <p:cNvSpPr txBox="1"/>
-            <p:nvPr/>
-          </p:nvSpPr>
-          <p:spPr>
-            <a:xfrm>
-              <a:off x="6287649" y="612651"/>
-              <a:ext cx="5609609" cy="396593"/>
-            </a:xfrm>
-            <a:prstGeom prst="rect">
-              <a:avLst/>
-            </a:prstGeom>
-            <a:noFill/>
-            <a:ln/>
-          </p:spPr>
-          <p:txBody>
-            <a:bodyPr wrap="square" lIns="0" tIns="0" rIns="0" bIns="0" rtlCol="0" anchor="ctr"/>
-            <a:lstStyle/>
-            <a:p>
-              <a:pPr marL="0" indent="0" algn="l">
-                <a:buNone/>
-              </a:pPr>
-              <a:r>
-                <a:rPr lang="en-US" sz="1400" b="1" dirty="0">
-                  <a:solidFill>
-                    <a:srgbClr val="2563EB"/>
-                  </a:solidFill>
-                  <a:latin typeface="Noto Sans JP" pitchFamily="34" charset="0"/>
-                  <a:ea typeface="Noto Sans JP" pitchFamily="34" charset="-122"/>
-                  <a:cs typeface="Noto Sans JP" pitchFamily="34" charset="-120"/>
-                </a:rPr>
-                <a:t>学んだこと・気づいたことを #</a:t>
-              </a:r>
-              <a:r>
-                <a:rPr lang="en-US" sz="1400" b="1">
-                  <a:solidFill>
-                    <a:srgbClr val="2563EB"/>
-                  </a:solidFill>
-                  <a:latin typeface="Noto Sans JP" pitchFamily="34" charset="0"/>
-                  <a:ea typeface="Noto Sans JP" pitchFamily="34" charset="-122"/>
-                  <a:cs typeface="Noto Sans JP" pitchFamily="34" charset="-120"/>
-                </a:rPr>
-                <a:t>PA45 で</a:t>
-              </a:r>
-              <a:r>
-                <a:rPr lang="ja-JP" altLang="en-US" sz="1400" b="1">
-                  <a:solidFill>
-                    <a:srgbClr val="2563EB"/>
-                  </a:solidFill>
-                  <a:latin typeface="Noto Sans JP" pitchFamily="34" charset="0"/>
-                  <a:ea typeface="Noto Sans JP" pitchFamily="34" charset="-122"/>
-                  <a:cs typeface="Noto Sans JP" pitchFamily="34" charset="-120"/>
-                </a:rPr>
-                <a:t>リアルタイムに</a:t>
-              </a:r>
-              <a:r>
-                <a:rPr lang="en-US" sz="1400" b="1">
-                  <a:solidFill>
-                    <a:srgbClr val="2563EB"/>
-                  </a:solidFill>
-                  <a:latin typeface="Noto Sans JP" pitchFamily="34" charset="0"/>
-                  <a:ea typeface="Noto Sans JP" pitchFamily="34" charset="-122"/>
-                  <a:cs typeface="Noto Sans JP" pitchFamily="34" charset="-120"/>
-                </a:rPr>
-                <a:t>投稿しよう！</a:t>
-              </a:r>
-              <a:r>
-                <a:rPr lang="ja-JP" altLang="en-US" sz="1400" b="1">
-                  <a:solidFill>
-                    <a:srgbClr val="2563EB"/>
-                  </a:solidFill>
-                  <a:latin typeface="Noto Sans JP" pitchFamily="34" charset="0"/>
-                  <a:ea typeface="Noto Sans JP" pitchFamily="34" charset="-122"/>
-                  <a:cs typeface="Noto Sans JP" pitchFamily="34" charset="-120"/>
-                </a:rPr>
-                <a:t>スクショ</a:t>
-              </a:r>
-              <a:r>
-                <a:rPr lang="en-US" altLang="ja-JP" sz="1400" b="1">
-                  <a:solidFill>
-                    <a:srgbClr val="2563EB"/>
-                  </a:solidFill>
-                  <a:latin typeface="Noto Sans JP" pitchFamily="34" charset="0"/>
-                  <a:ea typeface="Noto Sans JP" pitchFamily="34" charset="-122"/>
-                  <a:cs typeface="Noto Sans JP" pitchFamily="34" charset="-120"/>
-                </a:rPr>
-                <a:t>OK</a:t>
-              </a:r>
-              <a:r>
-                <a:rPr lang="ja-JP" altLang="en-US" sz="1400" b="1">
-                  <a:solidFill>
-                    <a:srgbClr val="2563EB"/>
-                  </a:solidFill>
-                  <a:latin typeface="Noto Sans JP" pitchFamily="34" charset="0"/>
-                  <a:ea typeface="Noto Sans JP" pitchFamily="34" charset="-122"/>
-                  <a:cs typeface="Noto Sans JP" pitchFamily="34" charset="-120"/>
-                </a:rPr>
-                <a:t>！</a:t>
-              </a:r>
-              <a:endParaRPr lang="en-US" sz="1400" dirty="0"/>
-            </a:p>
-          </p:txBody>
-        </p:sp>
-        <p:pic>
-          <p:nvPicPr>
-            <p:cNvPr id="50" name="Image 2" descr="preencoded.png">
-              <a:extLst>
-                <a:ext uri="{FF2B5EF4-FFF2-40B4-BE49-F238E27FC236}">
-                  <a16:creationId xmlns:a16="http://schemas.microsoft.com/office/drawing/2014/main" id="{003A3C3D-15E3-1F1A-D918-AB2472E8059D}"/>
-                </a:ext>
-              </a:extLst>
-            </p:cNvPr>
-            <p:cNvPicPr>
-              <a:picLocks noChangeAspect="1"/>
-            </p:cNvPicPr>
-            <p:nvPr/>
-          </p:nvPicPr>
-          <p:blipFill>
-            <a:blip/>
-            <a:srcRect/>
-            <a:stretch/>
-          </p:blipFill>
-          <p:spPr>
-            <a:xfrm>
-              <a:off x="5861349" y="619679"/>
-              <a:ext cx="263236" cy="389576"/>
-            </a:xfrm>
-            <a:prstGeom prst="rect">
-              <a:avLst/>
-            </a:prstGeom>
-          </p:spPr>
-        </p:pic>
-      </p:grpSp>
-      <p:sp>
-        <p:nvSpPr>
-          <p:cNvPr id="51" name="Text 5">
-            <a:extLst>
-              <a:ext uri="{FF2B5EF4-FFF2-40B4-BE49-F238E27FC236}">
-                <a16:creationId xmlns:a16="http://schemas.microsoft.com/office/drawing/2014/main" id="{F34FF253-528E-97DF-BF89-4A55B2E7EBC4}"/>
-              </a:ext>
-            </a:extLst>
-          </p:cNvPr>
-          <p:cNvSpPr txBox="1"/>
-          <p:nvPr/>
-        </p:nvSpPr>
-        <p:spPr>
-          <a:xfrm>
-            <a:off x="182880" y="1948175"/>
-            <a:ext cx="6583680" cy="3947047"/>
-          </a:xfrm>
-          <a:prstGeom prst="rect">
-            <a:avLst/>
-          </a:prstGeom>
-          <a:noFill/>
-          <a:ln/>
-        </p:spPr>
-        <p:txBody>
-          <a:bodyPr wrap="square" lIns="0" tIns="0" rIns="0" bIns="0" rtlCol="0" anchor="ctr"/>
-          <a:lstStyle/>
-          <a:p>
-            <a:pPr marL="0" indent="0" algn="l">
-              <a:spcBef>
-                <a:spcPts val="1000"/>
-              </a:spcBef>
-              <a:buNone/>
-            </a:pPr>
-            <a:r>
-              <a:rPr sz="2000" b="0">
-                <a:solidFill>
-                  <a:srgbClr val="1F2937"/>
-                </a:solidFill>
-                <a:latin typeface="Meiryo UI"/>
-                <a:ea typeface="Meiryo UI"/>
-              </a:rPr>
-              <a:t>🎯 目的：思いどおりに動かない場面を体験する</a:t>
-            </a:r>
-            <a:endParaRPr lang="en-US" altLang="ja-JP" sz="2000">
-              <a:solidFill>
-                <a:srgbClr val="1F2937"/>
-              </a:solidFill>
-              <a:latin typeface="Noto Sans JP" pitchFamily="34" charset="0"/>
-              <a:ea typeface="Noto Sans JP" pitchFamily="34" charset="-122"/>
-              <a:cs typeface="Noto Sans JP" pitchFamily="34" charset="-120"/>
-            </a:endParaRPr>
-          </a:p>
-          <a:p>
-            <a:r>
-              <a:rPr sz="2000" b="0">
-                <a:solidFill>
-                  <a:srgbClr val="1F2937"/>
-                </a:solidFill>
-                <a:latin typeface="Meiryo UI"/>
-                <a:ea typeface="Meiryo UI"/>
-              </a:rPr>
-              <a:t>・フローを保存して、自分宛に「重要度＝高」のメールを1通送る</a:t>
-            </a:r>
-          </a:p>
-          <a:p>
-            <a:r>
-              <a:rPr sz="2000" b="0">
-                <a:solidFill>
-                  <a:srgbClr val="1F2937"/>
-                </a:solidFill>
-                <a:latin typeface="Meiryo UI"/>
-                <a:ea typeface="Meiryo UI"/>
-              </a:rPr>
-              <a:t>・フローは成功（緑）します。でも結果は「通常メール」！</a:t>
-            </a:r>
-          </a:p>
-          <a:p>
-            <a:r>
-              <a:rPr sz="2000" b="0">
-                <a:solidFill>
-                  <a:srgbClr val="1F2937"/>
-                </a:solidFill>
-                <a:latin typeface="Meiryo UI"/>
-                <a:ea typeface="Meiryo UI"/>
-              </a:rPr>
-              <a:t>・「重要にして送ったのに、なぜ？」 → ここで実行履歴の出番です</a:t>
-            </a:r>
-          </a:p>
-        </p:txBody>
-      </p:sp>
-      <p:sp>
-        <p:nvSpPr>
-          <p:cNvPr id="52" name="Rounded Rectangle 51"/>
-          <p:cNvSpPr/>
-          <p:nvPr/>
-        </p:nvSpPr>
-        <p:spPr>
-          <a:xfrm>
-            <a:off x="7040880" y="1737360"/>
-            <a:ext cx="4572000" cy="4114800"/>
-          </a:xfrm>
-          <a:prstGeom prst="roundRect">
-            <a:avLst/>
-          </a:prstGeom>
-          <a:solidFill>
-            <a:srgbClr val="F1F5FB"/>
-          </a:solidFill>
-          <a:ln w="19050">
-            <a:solidFill>
-              <a:srgbClr val="9CB8D8"/>
-            </a:solidFill>
-          </a:ln>
-          <a:effectLst/>
-        </p:spPr>
-        <p:style>
-          <a:lnRef idx="1">
-            <a:schemeClr val="accent1"/>
-          </a:lnRef>
-          <a:fillRef idx="3">
-            <a:schemeClr val="accent1"/>
-          </a:fillRef>
-          <a:effectRef idx="2">
-            <a:schemeClr val="accent1"/>
-          </a:effectRef>
-          <a:fontRef idx="minor">
-            <a:schemeClr val="lt1"/>
-          </a:fontRef>
-        </p:style>
-        <p:txBody>
-          <a:bodyPr rtlCol="0" anchor="ctr" wrap="square"/>
-          <a:lstStyle/>
-          <a:p>
-            <a:pPr algn="ctr"/>
-            <a:r>
-              <a:rPr sz="1800" b="1">
-                <a:solidFill>
-                  <a:srgbClr val="2A5E9E"/>
-                </a:solidFill>
-                <a:latin typeface="Meiryo UI"/>
-                <a:ea typeface="Meiryo UI"/>
-              </a:rPr>
-              <a:t>📷 ここにスクショを貼る</a:t>
-            </a:r>
-          </a:p>
-          <a:p>
-            <a:pPr algn="ctr"/>
-            <a:r>
-              <a:rPr sz="1400">
-                <a:solidFill>
-                  <a:srgbClr val="556677"/>
-                </a:solidFill>
-                <a:latin typeface="Meiryo UI"/>
-                <a:ea typeface="Meiryo UI"/>
-              </a:rPr>
-              <a:t>実行結果：成功（緑）なのに
-「通常メール」になっている画面</a:t>
-            </a:r>
-          </a:p>
-        </p:txBody>
-      </p:sp>
-    </p:spTree>
-  </p:cSld>
-  <p:clrMapOvr>
-    <a:masterClrMapping/>
-  </p:clrMapOvr>
-</p:sld>
-</file>
-
-<file path=ppt/slides/slide14.xml><?xml version="1.0" encoding="utf-8"?>
-<p:sld xmlns:a="http://schemas.openxmlformats.org/drawingml/2006/main" xmlns:r="http://schemas.openxmlformats.org/officeDocument/2006/relationships" xmlns:p="http://schemas.openxmlformats.org/presentationml/2006/main">
-  <p:cSld>
-    <p:spTree>
-      <p:nvGrpSpPr>
-        <p:cNvPr id="1" name=""/>
-        <p:cNvGrpSpPr/>
-        <p:nvPr/>
-      </p:nvGrpSpPr>
-      <p:grpSpPr>
-        <a:xfrm>
-          <a:off x="0" y="0"/>
-          <a:ext cx="0" cy="0"/>
-          <a:chOff x="0" y="0"/>
-          <a:chExt cx="0" cy="0"/>
-        </a:xfrm>
-      </p:grpSpPr>
-      <p:sp>
-        <p:nvSpPr>
-          <p:cNvPr id="2" name="Shape 0"/>
-          <p:cNvSpPr/>
-          <p:nvPr/>
-        </p:nvSpPr>
-        <p:spPr>
-          <a:xfrm>
-            <a:off x="0" y="0"/>
-            <a:ext cx="12191695" cy="6858000"/>
-          </a:xfrm>
-          <a:prstGeom prst="rect">
-            <a:avLst/>
-          </a:prstGeom>
-          <a:solidFill>
-            <a:srgbClr val="F3F4F6"/>
-          </a:solidFill>
-          <a:ln w="12700">
-            <a:solidFill>
-              <a:srgbClr val="FFFFFF">
-                <a:alpha val="0"/>
-              </a:srgbClr>
-            </a:solidFill>
-            <a:prstDash val="solid"/>
-          </a:ln>
-        </p:spPr>
-        <p:txBody>
-          <a:bodyPr/>
-          <a:lstStyle/>
-          <a:p>
-            <a:endParaRPr lang="ja-JP" altLang="en-US"/>
-          </a:p>
-        </p:txBody>
-      </p:sp>
-      <p:sp>
-        <p:nvSpPr>
-          <p:cNvPr id="3" name="Shape 1"/>
-          <p:cNvSpPr/>
-          <p:nvPr/>
-        </p:nvSpPr>
-        <p:spPr>
-          <a:xfrm>
-            <a:off x="0" y="0"/>
-            <a:ext cx="12191695" cy="6858000"/>
-          </a:xfrm>
-          <a:prstGeom prst="rect">
-            <a:avLst/>
-          </a:prstGeom>
-          <a:solidFill>
-            <a:srgbClr val="FFFFFF"/>
-          </a:solidFill>
-          <a:ln w="12700">
-            <a:solidFill>
-              <a:srgbClr val="FFFFFF">
-                <a:alpha val="0"/>
-              </a:srgbClr>
-            </a:solidFill>
-            <a:prstDash val="solid"/>
-          </a:ln>
-          <a:effectLst>
-            <a:outerShdw blurRad="63500" dist="38100" dir="16200000" algn="bl" rotWithShape="0">
-              <a:srgbClr val="000000">
-                <a:alpha val="10000"/>
-              </a:srgbClr>
-            </a:outerShdw>
-          </a:effectLst>
-        </p:spPr>
-        <p:txBody>
-          <a:bodyPr/>
-          <a:lstStyle/>
-          <a:p>
-            <a:endParaRPr lang="ja-JP" altLang="en-US"/>
-          </a:p>
-        </p:txBody>
-      </p:sp>
-      <p:sp>
-        <p:nvSpPr>
-          <p:cNvPr id="4" name="Shape 2"/>
-          <p:cNvSpPr/>
-          <p:nvPr/>
-        </p:nvSpPr>
-        <p:spPr>
-          <a:xfrm>
-            <a:off x="0" y="0"/>
-            <a:ext cx="12191695" cy="1485900"/>
-          </a:xfrm>
-          <a:prstGeom prst="rect">
-            <a:avLst/>
-          </a:prstGeom>
-          <a:solidFill>
-            <a:srgbClr val="FFFFFF"/>
-          </a:solidFill>
-          <a:ln/>
-        </p:spPr>
-        <p:txBody>
-          <a:bodyPr/>
-          <a:lstStyle/>
-          <a:p>
-            <a:endParaRPr lang="ja-JP" altLang="en-US"/>
-          </a:p>
-        </p:txBody>
-      </p:sp>
-      <p:sp>
-        <p:nvSpPr>
-          <p:cNvPr id="5" name="Shape 3"/>
-          <p:cNvSpPr/>
-          <p:nvPr/>
-        </p:nvSpPr>
-        <p:spPr>
-          <a:xfrm>
-            <a:off x="0" y="1476756"/>
-            <a:ext cx="12191695" cy="9144"/>
-          </a:xfrm>
-          <a:prstGeom prst="rect">
-            <a:avLst/>
-          </a:prstGeom>
-          <a:solidFill>
-            <a:srgbClr val="F3F4F6"/>
-          </a:solidFill>
-          <a:ln w="12700">
-            <a:solidFill>
-              <a:srgbClr val="F3F4F6">
-                <a:alpha val="0"/>
-              </a:srgbClr>
-            </a:solidFill>
-            <a:prstDash val="solid"/>
-          </a:ln>
-        </p:spPr>
-        <p:txBody>
-          <a:bodyPr/>
-          <a:lstStyle/>
-          <a:p>
-            <a:endParaRPr lang="ja-JP" altLang="en-US"/>
-          </a:p>
-        </p:txBody>
-      </p:sp>
-      <p:sp>
-        <p:nvSpPr>
-          <p:cNvPr id="6" name="Text 4"/>
-          <p:cNvSpPr txBox="1"/>
-          <p:nvPr/>
-        </p:nvSpPr>
-        <p:spPr>
-          <a:xfrm>
-            <a:off x="457200" y="228600"/>
-            <a:ext cx="5600700" cy="267005"/>
-          </a:xfrm>
-          <a:prstGeom prst="rect">
-            <a:avLst/>
-          </a:prstGeom>
-          <a:noFill/>
-          <a:ln/>
-        </p:spPr>
-        <p:txBody>
-          <a:bodyPr wrap="square" lIns="0" tIns="0" rIns="0" bIns="0" rtlCol="0" anchor="ctr"/>
-          <a:lstStyle/>
-          <a:p>
-            <a:pPr marL="0" indent="0" algn="l">
-              <a:buNone/>
-            </a:pPr>
-            <a:r>
-              <a:rPr lang="en-US" sz="1600" b="1" kern="0" spc="150" dirty="0">
-                <a:solidFill>
-                  <a:srgbClr val="6B7280"/>
-                </a:solidFill>
-                <a:latin typeface="Meiryo UI" pitchFamily="34" charset="0"/>
-                <a:ea typeface="Meiryo UI" pitchFamily="34" charset="-122"/>
-                <a:cs typeface="Noto Sans JP" pitchFamily="34" charset="-120"/>
-              </a:rPr>
-              <a:t>PA45｜第11回</a:t>
-            </a:r>
-            <a:endParaRPr lang="en-US" sz="1500" dirty="0"/>
-          </a:p>
-        </p:txBody>
-      </p:sp>
-      <p:sp>
-        <p:nvSpPr>
-          <p:cNvPr id="7" name="Text 5"/>
-          <p:cNvSpPr txBox="1"/>
-          <p:nvPr/>
-        </p:nvSpPr>
-        <p:spPr>
-          <a:xfrm>
-            <a:off x="457199" y="533095"/>
-            <a:ext cx="10837817" cy="715061"/>
-          </a:xfrm>
-          <a:prstGeom prst="rect">
-            <a:avLst/>
-          </a:prstGeom>
-          <a:noFill/>
-          <a:ln/>
-        </p:spPr>
-        <p:txBody>
-          <a:bodyPr wrap="square" lIns="0" tIns="0" rIns="0" bIns="0" rtlCol="0" anchor="ctr"/>
-          <a:lstStyle/>
-          <a:p>
-            <a:pPr marL="0" indent="0" algn="l">
-              <a:buNone/>
-            </a:pPr>
-            <a:r>
-              <a:rPr lang="en-US" sz="3000" b="1" dirty="0">
-                <a:solidFill>
-                  <a:srgbClr val="1F2937"/>
-                </a:solidFill>
-                <a:latin typeface="Meiryo UI" pitchFamily="34" charset="0"/>
-                <a:ea typeface="Meiryo UI" pitchFamily="34" charset="-122"/>
-                <a:cs typeface="Noto Sans JP" pitchFamily="34" charset="-120"/>
-              </a:rPr>
-              <a:t>フロー解説 ③  出力で原因を見つけて直す</a:t>
-            </a:r>
-            <a:endParaRPr lang="en-US" sz="2800" dirty="0"/>
-          </a:p>
-        </p:txBody>
-      </p:sp>
-      <p:sp>
-        <p:nvSpPr>
-          <p:cNvPr id="8" name="Shape 6"/>
-          <p:cNvSpPr/>
-          <p:nvPr/>
-        </p:nvSpPr>
-        <p:spPr>
-          <a:xfrm>
-            <a:off x="10858500" y="828446"/>
-            <a:ext cx="114300" cy="114300"/>
-          </a:xfrm>
-          <a:prstGeom prst="ellipse">
-            <a:avLst/>
-          </a:prstGeom>
-          <a:solidFill>
-            <a:srgbClr val="0078D4"/>
-          </a:solidFill>
-          <a:ln w="12700">
-            <a:solidFill>
-              <a:srgbClr val="FFFFFF">
-                <a:alpha val="0"/>
-              </a:srgbClr>
-            </a:solidFill>
-            <a:prstDash val="solid"/>
-          </a:ln>
-        </p:spPr>
-        <p:txBody>
-          <a:bodyPr/>
-          <a:lstStyle/>
-          <a:p>
-            <a:endParaRPr lang="ja-JP" altLang="en-US"/>
-          </a:p>
-        </p:txBody>
-      </p:sp>
-      <p:sp>
-        <p:nvSpPr>
-          <p:cNvPr id="9" name="Text 7"/>
-          <p:cNvSpPr txBox="1"/>
-          <p:nvPr/>
-        </p:nvSpPr>
-        <p:spPr>
-          <a:xfrm>
-            <a:off x="11048695" y="752551"/>
-            <a:ext cx="771754" cy="267005"/>
-          </a:xfrm>
-          <a:prstGeom prst="rect">
-            <a:avLst/>
-          </a:prstGeom>
-          <a:noFill/>
-          <a:ln/>
-        </p:spPr>
-        <p:txBody>
-          <a:bodyPr wrap="square" lIns="0" tIns="0" rIns="0" bIns="0" rtlCol="0" anchor="ctr"/>
-          <a:lstStyle/>
-          <a:p>
-            <a:pPr marL="0" indent="0" algn="l">
-              <a:buNone/>
-            </a:pPr>
-            <a:r>
-              <a:rPr lang="en-US" sz="1600" dirty="0">
-                <a:solidFill>
-                  <a:srgbClr val="9CA3AF"/>
-                </a:solidFill>
-                <a:latin typeface="Meiryo UI" pitchFamily="34" charset="0"/>
-                <a:ea typeface="Meiryo UI" pitchFamily="34" charset="-122"/>
-                <a:cs typeface="ui-monospace" pitchFamily="34" charset="-120"/>
-              </a:rPr>
-              <a:t>Concept</a:t>
-            </a:r>
-            <a:endParaRPr lang="en-US" sz="1500" dirty="0"/>
-          </a:p>
-        </p:txBody>
-      </p:sp>
-      <p:sp>
-        <p:nvSpPr>
-          <p:cNvPr id="13" name="Shape 9"/>
-          <p:cNvSpPr/>
-          <p:nvPr/>
-        </p:nvSpPr>
-        <p:spPr>
-          <a:xfrm>
-            <a:off x="0" y="1523390"/>
-            <a:ext cx="11975897" cy="4914900"/>
-          </a:xfrm>
-          <a:prstGeom prst="rect">
-            <a:avLst/>
-          </a:prstGeom>
-          <a:solidFill>
-            <a:srgbClr val="F9FAFB"/>
-          </a:solidFill>
-          <a:ln w="12700">
-            <a:solidFill>
-              <a:srgbClr val="FFFFFF">
-                <a:alpha val="0"/>
-              </a:srgbClr>
-            </a:solidFill>
-            <a:prstDash val="solid"/>
-          </a:ln>
-        </p:spPr>
-        <p:txBody>
-          <a:bodyPr/>
-          <a:lstStyle/>
-          <a:p>
-            <a:endParaRPr lang="ja-JP" altLang="en-US"/>
-          </a:p>
-        </p:txBody>
-      </p:sp>
-      <p:pic>
-        <p:nvPicPr>
-          <p:cNvPr id="23" name="Image 8" descr="preencoded.png"/>
-          <p:cNvPicPr>
-            <a:picLocks noChangeAspect="1"/>
-          </p:cNvPicPr>
-          <p:nvPr/>
-        </p:nvPicPr>
-        <p:blipFill>
-          <a:blip/>
-          <a:srcRect t="-401" b="-401"/>
-          <a:stretch/>
-        </p:blipFill>
-        <p:spPr>
-          <a:xfrm>
-            <a:off x="0" y="6801307"/>
-            <a:ext cx="12191695" cy="57607"/>
-          </a:xfrm>
-          <a:prstGeom prst="rect">
-            <a:avLst/>
-          </a:prstGeom>
-        </p:spPr>
-      </p:pic>
-      <p:sp>
-        <p:nvSpPr>
-          <p:cNvPr id="39" name="Shape 22"/>
-          <p:cNvSpPr/>
-          <p:nvPr/>
-        </p:nvSpPr>
-        <p:spPr>
-          <a:xfrm>
-            <a:off x="0" y="6400800"/>
-            <a:ext cx="12191695" cy="457200"/>
-          </a:xfrm>
-          <a:prstGeom prst="rect">
-            <a:avLst/>
-          </a:prstGeom>
-          <a:solidFill>
-            <a:srgbClr val="FFFFFF"/>
-          </a:solidFill>
-          <a:ln/>
-        </p:spPr>
-        <p:txBody>
-          <a:bodyPr/>
-          <a:lstStyle/>
-          <a:p>
-            <a:endParaRPr lang="ja-JP" altLang="en-US"/>
-          </a:p>
-        </p:txBody>
-      </p:sp>
-      <p:sp>
-        <p:nvSpPr>
-          <p:cNvPr id="40" name="Shape 23"/>
-          <p:cNvSpPr/>
-          <p:nvPr/>
-        </p:nvSpPr>
-        <p:spPr>
-          <a:xfrm>
-            <a:off x="0" y="6400800"/>
-            <a:ext cx="12191695" cy="9144"/>
-          </a:xfrm>
-          <a:prstGeom prst="rect">
-            <a:avLst/>
-          </a:prstGeom>
-          <a:solidFill>
-            <a:srgbClr val="E5E7EB"/>
-          </a:solidFill>
-          <a:ln w="12700">
-            <a:solidFill>
-              <a:srgbClr val="E5E7EB">
-                <a:alpha val="0"/>
-              </a:srgbClr>
-            </a:solidFill>
-            <a:prstDash val="solid"/>
-          </a:ln>
-        </p:spPr>
-        <p:txBody>
-          <a:bodyPr/>
-          <a:lstStyle/>
-          <a:p>
-            <a:endParaRPr lang="ja-JP" altLang="en-US"/>
-          </a:p>
-        </p:txBody>
-      </p:sp>
-      <p:sp>
-        <p:nvSpPr>
-          <p:cNvPr id="41" name="Text 24"/>
-          <p:cNvSpPr txBox="1"/>
-          <p:nvPr/>
-        </p:nvSpPr>
-        <p:spPr>
-          <a:xfrm>
-            <a:off x="457200" y="6519672"/>
-            <a:ext cx="2573122" cy="228600"/>
-          </a:xfrm>
-          <a:prstGeom prst="rect">
-            <a:avLst/>
-          </a:prstGeom>
-          <a:noFill/>
-          <a:ln/>
-        </p:spPr>
-        <p:txBody>
-          <a:bodyPr wrap="square" lIns="0" tIns="0" rIns="0" bIns="0" rtlCol="0" anchor="ctr"/>
-          <a:lstStyle/>
-          <a:p>
-            <a:pPr marL="0" indent="0" algn="l">
-              <a:buNone/>
-            </a:pPr>
-            <a:r>
-              <a:rPr lang="en-US" sz="1600" dirty="0">
-                <a:solidFill>
-                  <a:srgbClr val="9CA3AF"/>
-                </a:solidFill>
-                <a:latin typeface="Meiryo UI" pitchFamily="34" charset="0"/>
-                <a:ea typeface="Meiryo UI" pitchFamily="34" charset="-122"/>
-                <a:cs typeface="Noto Sans JP" pitchFamily="34" charset="-120"/>
-              </a:rPr>
-              <a:t>Power Automate for Beginners</a:t>
-            </a:r>
-            <a:endParaRPr lang="en-US" sz="1200" dirty="0"/>
-          </a:p>
-        </p:txBody>
-      </p:sp>
-      <p:sp>
-        <p:nvSpPr>
-          <p:cNvPr id="42" name="Text 25"/>
-          <p:cNvSpPr txBox="1"/>
-          <p:nvPr/>
-        </p:nvSpPr>
-        <p:spPr>
-          <a:xfrm>
-            <a:off x="10490911" y="6519672"/>
-            <a:ext cx="1484986" cy="228600"/>
-          </a:xfrm>
-          <a:prstGeom prst="rect">
-            <a:avLst/>
-          </a:prstGeom>
-          <a:noFill/>
-          <a:ln/>
-        </p:spPr>
-        <p:txBody>
-          <a:bodyPr wrap="square" lIns="0" tIns="0" rIns="0" bIns="0" rtlCol="0" anchor="ctr"/>
-          <a:lstStyle/>
-          <a:p>
-            <a:pPr marL="0" indent="0" algn="l">
-              <a:buNone/>
-            </a:pPr>
-            <a:r>
-              <a:rPr lang="en-US" sz="1600" dirty="0">
-                <a:solidFill>
-                  <a:srgbClr val="9CA3AF"/>
-                </a:solidFill>
-                <a:latin typeface="Meiryo UI" pitchFamily="34" charset="0"/>
-                <a:ea typeface="Meiryo UI" pitchFamily="34" charset="-122"/>
-                <a:cs typeface="Noto Sans JP" pitchFamily="34" charset="-120"/>
-              </a:rPr>
-              <a:t>Copyright © PA45</a:t>
-            </a:r>
-            <a:endParaRPr lang="en-US" sz="1200" dirty="0"/>
-          </a:p>
-        </p:txBody>
-      </p:sp>
-      <p:grpSp>
-        <p:nvGrpSpPr>
-          <p:cNvPr id="47" name="グループ化 46">
-            <a:extLst>
-              <a:ext uri="{FF2B5EF4-FFF2-40B4-BE49-F238E27FC236}">
-                <a16:creationId xmlns:a16="http://schemas.microsoft.com/office/drawing/2014/main" id="{722FBEAE-8CB7-7493-F595-CD1F2E21BD05}"/>
-              </a:ext>
-            </a:extLst>
-          </p:cNvPr>
-          <p:cNvGrpSpPr/>
-          <p:nvPr/>
-        </p:nvGrpSpPr>
-        <p:grpSpPr>
-          <a:xfrm>
-            <a:off x="4603551" y="6322778"/>
-            <a:ext cx="7350682" cy="405017"/>
-            <a:chOff x="5861349" y="604238"/>
-            <a:chExt cx="6035909" cy="405017"/>
-          </a:xfrm>
-        </p:grpSpPr>
-        <p:sp>
-          <p:nvSpPr>
-            <p:cNvPr id="48" name="Shape 31">
-              <a:extLst>
-                <a:ext uri="{FF2B5EF4-FFF2-40B4-BE49-F238E27FC236}">
-                  <a16:creationId xmlns:a16="http://schemas.microsoft.com/office/drawing/2014/main" id="{DD44BB3C-F859-7A5E-7E34-CC1C35ECEA4D}"/>
-                </a:ext>
-              </a:extLst>
-            </p:cNvPr>
-            <p:cNvSpPr/>
-            <p:nvPr/>
-          </p:nvSpPr>
-          <p:spPr>
-            <a:xfrm>
-              <a:off x="6034969" y="604238"/>
-              <a:ext cx="5854549" cy="386057"/>
-            </a:xfrm>
-            <a:prstGeom prst="roundRect">
-              <a:avLst>
-                <a:gd name="adj" fmla="val 342465"/>
-              </a:avLst>
-            </a:prstGeom>
-            <a:solidFill>
-              <a:srgbClr val="EFF6FF"/>
-            </a:solidFill>
-            <a:ln w="12700">
-              <a:solidFill>
-                <a:srgbClr val="FFFFFF">
-                  <a:alpha val="0"/>
-                </a:srgbClr>
-              </a:solidFill>
-              <a:prstDash val="solid"/>
-            </a:ln>
-          </p:spPr>
-          <p:txBody>
-            <a:bodyPr/>
-            <a:lstStyle/>
-            <a:p>
-              <a:endParaRPr lang="ja-JP" altLang="en-US"/>
-            </a:p>
-          </p:txBody>
-        </p:sp>
-        <p:sp>
-          <p:nvSpPr>
-            <p:cNvPr id="49" name="Text 21">
-              <a:extLst>
-                <a:ext uri="{FF2B5EF4-FFF2-40B4-BE49-F238E27FC236}">
-                  <a16:creationId xmlns:a16="http://schemas.microsoft.com/office/drawing/2014/main" id="{A7F44BB1-1667-BB85-557B-D7C1AAD8A0FA}"/>
-                </a:ext>
-              </a:extLst>
-            </p:cNvPr>
-            <p:cNvSpPr txBox="1"/>
-            <p:nvPr/>
-          </p:nvSpPr>
-          <p:spPr>
-            <a:xfrm>
-              <a:off x="6287649" y="612651"/>
-              <a:ext cx="5609609" cy="396593"/>
-            </a:xfrm>
-            <a:prstGeom prst="rect">
-              <a:avLst/>
-            </a:prstGeom>
-            <a:noFill/>
-            <a:ln/>
-          </p:spPr>
-          <p:txBody>
-            <a:bodyPr wrap="square" lIns="0" tIns="0" rIns="0" bIns="0" rtlCol="0" anchor="ctr"/>
-            <a:lstStyle/>
-            <a:p>
-              <a:pPr marL="0" indent="0" algn="l">
-                <a:buNone/>
-              </a:pPr>
-              <a:r>
-                <a:rPr lang="en-US" sz="1400" b="1" dirty="0">
-                  <a:solidFill>
-                    <a:srgbClr val="2563EB"/>
-                  </a:solidFill>
-                  <a:latin typeface="Noto Sans JP" pitchFamily="34" charset="0"/>
-                  <a:ea typeface="Noto Sans JP" pitchFamily="34" charset="-122"/>
-                  <a:cs typeface="Noto Sans JP" pitchFamily="34" charset="-120"/>
-                </a:rPr>
-                <a:t>学んだこと・気づいたことを #</a:t>
-              </a:r>
-              <a:r>
-                <a:rPr lang="en-US" sz="1400" b="1">
-                  <a:solidFill>
-                    <a:srgbClr val="2563EB"/>
-                  </a:solidFill>
-                  <a:latin typeface="Noto Sans JP" pitchFamily="34" charset="0"/>
-                  <a:ea typeface="Noto Sans JP" pitchFamily="34" charset="-122"/>
-                  <a:cs typeface="Noto Sans JP" pitchFamily="34" charset="-120"/>
-                </a:rPr>
-                <a:t>PA45 で</a:t>
-              </a:r>
-              <a:r>
-                <a:rPr lang="ja-JP" altLang="en-US" sz="1400" b="1">
-                  <a:solidFill>
-                    <a:srgbClr val="2563EB"/>
-                  </a:solidFill>
-                  <a:latin typeface="Noto Sans JP" pitchFamily="34" charset="0"/>
-                  <a:ea typeface="Noto Sans JP" pitchFamily="34" charset="-122"/>
-                  <a:cs typeface="Noto Sans JP" pitchFamily="34" charset="-120"/>
-                </a:rPr>
-                <a:t>リアルタイムに</a:t>
-              </a:r>
-              <a:r>
-                <a:rPr lang="en-US" sz="1400" b="1">
-                  <a:solidFill>
-                    <a:srgbClr val="2563EB"/>
-                  </a:solidFill>
-                  <a:latin typeface="Noto Sans JP" pitchFamily="34" charset="0"/>
-                  <a:ea typeface="Noto Sans JP" pitchFamily="34" charset="-122"/>
-                  <a:cs typeface="Noto Sans JP" pitchFamily="34" charset="-120"/>
-                </a:rPr>
-                <a:t>投稿しよう！</a:t>
-              </a:r>
-              <a:r>
-                <a:rPr lang="ja-JP" altLang="en-US" sz="1400" b="1">
-                  <a:solidFill>
-                    <a:srgbClr val="2563EB"/>
-                  </a:solidFill>
-                  <a:latin typeface="Noto Sans JP" pitchFamily="34" charset="0"/>
-                  <a:ea typeface="Noto Sans JP" pitchFamily="34" charset="-122"/>
-                  <a:cs typeface="Noto Sans JP" pitchFamily="34" charset="-120"/>
-                </a:rPr>
-                <a:t>スクショ</a:t>
-              </a:r>
-              <a:r>
-                <a:rPr lang="en-US" altLang="ja-JP" sz="1400" b="1">
-                  <a:solidFill>
-                    <a:srgbClr val="2563EB"/>
-                  </a:solidFill>
-                  <a:latin typeface="Noto Sans JP" pitchFamily="34" charset="0"/>
-                  <a:ea typeface="Noto Sans JP" pitchFamily="34" charset="-122"/>
-                  <a:cs typeface="Noto Sans JP" pitchFamily="34" charset="-120"/>
-                </a:rPr>
-                <a:t>OK</a:t>
-              </a:r>
-              <a:r>
-                <a:rPr lang="ja-JP" altLang="en-US" sz="1400" b="1">
-                  <a:solidFill>
-                    <a:srgbClr val="2563EB"/>
-                  </a:solidFill>
-                  <a:latin typeface="Noto Sans JP" pitchFamily="34" charset="0"/>
-                  <a:ea typeface="Noto Sans JP" pitchFamily="34" charset="-122"/>
-                  <a:cs typeface="Noto Sans JP" pitchFamily="34" charset="-120"/>
-                </a:rPr>
-                <a:t>！</a:t>
-              </a:r>
-              <a:endParaRPr lang="en-US" sz="1400" dirty="0"/>
-            </a:p>
-          </p:txBody>
-        </p:sp>
-        <p:pic>
-          <p:nvPicPr>
-            <p:cNvPr id="50" name="Image 2" descr="preencoded.png">
-              <a:extLst>
-                <a:ext uri="{FF2B5EF4-FFF2-40B4-BE49-F238E27FC236}">
-                  <a16:creationId xmlns:a16="http://schemas.microsoft.com/office/drawing/2014/main" id="{003A3C3D-15E3-1F1A-D918-AB2472E8059D}"/>
-                </a:ext>
-              </a:extLst>
-            </p:cNvPr>
-            <p:cNvPicPr>
-              <a:picLocks noChangeAspect="1"/>
-            </p:cNvPicPr>
-            <p:nvPr/>
-          </p:nvPicPr>
-          <p:blipFill>
-            <a:blip/>
-            <a:srcRect/>
-            <a:stretch/>
-          </p:blipFill>
-          <p:spPr>
-            <a:xfrm>
-              <a:off x="5861349" y="619679"/>
-              <a:ext cx="263236" cy="389576"/>
-            </a:xfrm>
-            <a:prstGeom prst="rect">
-              <a:avLst/>
-            </a:prstGeom>
-          </p:spPr>
-        </p:pic>
-      </p:grpSp>
-      <p:sp>
-        <p:nvSpPr>
-          <p:cNvPr id="51" name="Text 5">
-            <a:extLst>
-              <a:ext uri="{FF2B5EF4-FFF2-40B4-BE49-F238E27FC236}">
-                <a16:creationId xmlns:a16="http://schemas.microsoft.com/office/drawing/2014/main" id="{F34FF253-528E-97DF-BF89-4A55B2E7EBC4}"/>
-              </a:ext>
-            </a:extLst>
-          </p:cNvPr>
-          <p:cNvSpPr txBox="1"/>
-          <p:nvPr/>
-        </p:nvSpPr>
-        <p:spPr>
-          <a:xfrm>
-            <a:off x="182880" y="2164046"/>
-            <a:ext cx="6583680" cy="3947047"/>
-          </a:xfrm>
-          <a:prstGeom prst="rect">
-            <a:avLst/>
-          </a:prstGeom>
-          <a:noFill/>
-          <a:ln/>
-        </p:spPr>
-        <p:txBody>
-          <a:bodyPr wrap="square" lIns="0" tIns="0" rIns="0" bIns="0" rtlCol="0" anchor="ctr"/>
-          <a:lstStyle/>
-          <a:p>
-            <a:pPr marL="0" indent="0" algn="l">
-              <a:spcBef>
-                <a:spcPts val="1000"/>
-              </a:spcBef>
-              <a:buNone/>
-            </a:pPr>
-            <a:r>
-              <a:rPr b="0">
-                <a:solidFill>
-                  <a:srgbClr val="1F2937"/>
-                </a:solidFill>
-                <a:latin typeface="Meiryo UI"/>
-                <a:ea typeface="Meiryo UI"/>
-              </a:rPr>
-              <a:t>🎯 目的：実行履歴の出力から原因を突き止める</a:t>
-            </a:r>
-            <a:endParaRPr lang="en-US" altLang="ja-JP">
-              <a:solidFill>
-                <a:srgbClr val="1F2937"/>
-              </a:solidFill>
-              <a:latin typeface="Noto Sans JP" pitchFamily="34" charset="0"/>
-              <a:ea typeface="Noto Sans JP" pitchFamily="34" charset="-122"/>
-              <a:cs typeface="Noto Sans JP" pitchFamily="34" charset="-120"/>
-            </a:endParaRPr>
-          </a:p>
-          <a:p>
-            <a:r>
-              <a:rPr b="0">
-                <a:solidFill>
-                  <a:srgbClr val="1F2937"/>
-                </a:solidFill>
-                <a:latin typeface="Meiryo UI"/>
-                <a:ea typeface="Meiryo UI"/>
-              </a:rPr>
-              <a:t>・実行履歴を開き、トリガーの「出力」を見る</a:t>
-            </a:r>
-          </a:p>
-          <a:p>
-            <a:r>
-              <a:rPr b="0">
-                <a:solidFill>
-                  <a:srgbClr val="1F2937"/>
-                </a:solidFill>
-                <a:latin typeface="Meiryo UI"/>
-                <a:ea typeface="Meiryo UI"/>
-              </a:rPr>
-              <a:t>・重要度（Importance）の値が "High"（英語）だと分かる</a:t>
-            </a:r>
-          </a:p>
-          <a:p>
-            <a:r>
-              <a:rPr b="0">
-                <a:solidFill>
-                  <a:srgbClr val="1F2937"/>
-                </a:solidFill>
-                <a:latin typeface="Meiryo UI"/>
-                <a:ea typeface="Meiryo UI"/>
-              </a:rPr>
-              <a:t>・条件の「高」を "High" に直す</a:t>
-            </a:r>
-          </a:p>
-          <a:p>
-            <a:r>
-              <a:rPr b="0">
-                <a:solidFill>
-                  <a:srgbClr val="1F2937"/>
-                </a:solidFill>
-                <a:latin typeface="Meiryo UI"/>
-                <a:ea typeface="Meiryo UI"/>
-              </a:rPr>
-              <a:t>・もう一度、重要度＝高のメールを送る → 今度こそ「⚠️ 重要メールです」に進みます。直った！</a:t>
-            </a:r>
-          </a:p>
-        </p:txBody>
-      </p:sp>
-      <p:sp>
-        <p:nvSpPr>
-          <p:cNvPr id="52" name="Rounded Rectangle 51"/>
-          <p:cNvSpPr/>
-          <p:nvPr/>
-        </p:nvSpPr>
-        <p:spPr>
-          <a:xfrm>
-            <a:off x="7040880" y="1737360"/>
-            <a:ext cx="4572000" cy="4114800"/>
-          </a:xfrm>
-          <a:prstGeom prst="roundRect">
-            <a:avLst/>
-          </a:prstGeom>
-          <a:solidFill>
-            <a:srgbClr val="F1F5FB"/>
-          </a:solidFill>
-          <a:ln w="19050">
-            <a:solidFill>
-              <a:srgbClr val="9CB8D8"/>
-            </a:solidFill>
-          </a:ln>
-          <a:effectLst/>
-        </p:spPr>
-        <p:style>
-          <a:lnRef idx="1">
-            <a:schemeClr val="accent1"/>
-          </a:lnRef>
-          <a:fillRef idx="3">
-            <a:schemeClr val="accent1"/>
-          </a:fillRef>
-          <a:effectRef idx="2">
-            <a:schemeClr val="accent1"/>
-          </a:effectRef>
-          <a:fontRef idx="minor">
-            <a:schemeClr val="lt1"/>
-          </a:fontRef>
-        </p:style>
-        <p:txBody>
-          <a:bodyPr rtlCol="0" anchor="ctr" wrap="square"/>
-          <a:lstStyle/>
-          <a:p>
-            <a:pPr algn="ctr"/>
-            <a:r>
-              <a:rPr sz="1800" b="1">
-                <a:solidFill>
-                  <a:srgbClr val="2A5E9E"/>
-                </a:solidFill>
-                <a:latin typeface="Meiryo UI"/>
-                <a:ea typeface="Meiryo UI"/>
-              </a:rPr>
-              <a:t>📷 ここにスクショを貼る</a:t>
-            </a:r>
-          </a:p>
-          <a:p>
-            <a:pPr algn="ctr"/>
-            <a:r>
-              <a:rPr sz="1400">
-                <a:solidFill>
-                  <a:srgbClr val="556677"/>
-                </a:solidFill>
-                <a:latin typeface="Meiryo UI"/>
-                <a:ea typeface="Meiryo UI"/>
-              </a:rPr>
-              <a:t>トリガーの出力で 重要度が
-"High" になっている箇所</a:t>
-            </a:r>
-          </a:p>
-        </p:txBody>
-      </p:sp>
-    </p:spTree>
-  </p:cSld>
-  <p:clrMapOvr>
-    <a:masterClrMapping/>
-  </p:clrMapOvr>
-</p:sld>
-</file>
-
-<file path=ppt/slides/slide15.xml><?xml version="1.0" encoding="utf-8"?>
 <p:sld xmlns:a="http://schemas.openxmlformats.org/drawingml/2006/main" xmlns:r="http://schemas.openxmlformats.org/officeDocument/2006/relationships" xmlns:p="http://schemas.openxmlformats.org/presentationml/2006/main">
   <p:cSld>
     <p:spTree>
@@ -8257,7 +7096,7 @@
 </p:sld>
 </file>
 
-<file path=ppt/slides/slide16.xml><?xml version="1.0" encoding="utf-8"?>
+<file path=ppt/slides/slide14.xml><?xml version="1.0" encoding="utf-8"?>
 <p:sld xmlns:a="http://schemas.openxmlformats.org/drawingml/2006/main" xmlns:r="http://schemas.openxmlformats.org/officeDocument/2006/relationships" xmlns:p="http://schemas.openxmlformats.org/presentationml/2006/main">
   <p:cSld>
     <p:spTree>
@@ -9044,7 +7883,7 @@
 </p:sld>
 </file>
 
-<file path=ppt/slides/slide17.xml><?xml version="1.0" encoding="utf-8"?>
+<file path=ppt/slides/slide15.xml><?xml version="1.0" encoding="utf-8"?>
 <p:sld xmlns:a="http://schemas.openxmlformats.org/drawingml/2006/main" xmlns:r="http://schemas.openxmlformats.org/officeDocument/2006/relationships" xmlns:p="http://schemas.openxmlformats.org/presentationml/2006/main">
   <p:cSld name="Slide 13">
     <p:spTree>
@@ -10734,7 +9573,7 @@
 </p:sld>
 </file>
 
-<file path=ppt/slides/slide18.xml><?xml version="1.0" encoding="utf-8"?>
+<file path=ppt/slides/slide16.xml><?xml version="1.0" encoding="utf-8"?>
 <p:sld xmlns:a="http://schemas.openxmlformats.org/drawingml/2006/main" xmlns:r="http://schemas.openxmlformats.org/officeDocument/2006/relationships" xmlns:p="http://schemas.openxmlformats.org/presentationml/2006/main">
   <p:cSld>
     <p:spTree>
@@ -12394,7 +11233,7 @@
         </p:nvSpPr>
         <p:spPr>
           <a:xfrm>
-            <a:off x="-915" y="-5028"/>
+            <a:off x="915" y="-5028"/>
             <a:ext cx="12191695" cy="6858000"/>
           </a:xfrm>
           <a:prstGeom prst="rect">
@@ -12646,8 +11485,8 @@
         </p:nvSpPr>
         <p:spPr>
           <a:xfrm>
-            <a:off x="8996224" y="230202"/>
-            <a:ext cx="2360005" cy="777205"/>
+            <a:off x="8901205" y="220370"/>
+            <a:ext cx="2438705" cy="777205"/>
           </a:xfrm>
           <a:prstGeom prst="rect">
             <a:avLst/>
@@ -12783,8 +11622,25 @@
                 <a:latin typeface="Meiryo UI"/>
                 <a:ea typeface="Meiryo UI"/>
               </a:rPr>
-              <a:t>実行履歴を読めるようになろう</a:t>
-            </a:r>
+              <a:t>実行履歴</a:t>
+            </a:r>
+            <a:r>
+              <a:rPr lang="ja-JP" altLang="en-US" sz="3200" b="1">
+                <a:solidFill>
+                  <a:srgbClr val="1F2937"/>
+                </a:solidFill>
+                <a:latin typeface="Meiryo UI"/>
+                <a:ea typeface="Meiryo UI"/>
+              </a:rPr>
+              <a:t>と出力をみてみよう</a:t>
+            </a:r>
+            <a:endParaRPr sz="3200" b="1">
+              <a:solidFill>
+                <a:srgbClr val="1F2937"/>
+              </a:solidFill>
+              <a:latin typeface="Meiryo UI"/>
+              <a:ea typeface="Meiryo UI"/>
+            </a:endParaRPr>
           </a:p>
         </p:txBody>
       </p:sp>
@@ -18153,7 +17009,7 @@
                 <a:ea typeface="Meiryo UI" pitchFamily="34" charset="-122"/>
                 <a:cs typeface="BIZ UDGothic" pitchFamily="34" charset="-120"/>
               </a:rPr>
-              <a:t>Automate 支援が専門</a:t>
+              <a:t>Automate 支援</a:t>
             </a:r>
             <a:endParaRPr lang="en-US" sz="1600" dirty="0"/>
           </a:p>
@@ -20008,8 +18864,8 @@
         </p:nvSpPr>
         <p:spPr>
           <a:xfrm>
-            <a:off x="1175032" y="4542282"/>
-            <a:ext cx="2557549" cy="1320394"/>
+            <a:off x="768937" y="4828031"/>
+            <a:ext cx="3269054" cy="794614"/>
           </a:xfrm>
           <a:prstGeom prst="rect">
             <a:avLst/>
@@ -20185,7 +19041,7 @@
         <p:spPr>
           <a:xfrm>
             <a:off x="4673600" y="4718304"/>
-            <a:ext cx="2665375" cy="838505"/>
+            <a:ext cx="2790106" cy="838505"/>
           </a:xfrm>
           <a:prstGeom prst="rect">
             <a:avLst/>
@@ -20209,7 +19065,23 @@
                 <a:ea typeface="Meiryo UI" pitchFamily="34" charset="-122"/>
                 <a:cs typeface="Noto Sans JP" pitchFamily="34" charset="-120"/>
               </a:rPr>
-              <a:t>「条件」アクションで、メールの重要度が</a:t>
+              <a:t>「条件」アクションで、</a:t>
+            </a:r>
+          </a:p>
+          <a:p>
+            <a:pPr marL="0" indent="0" algn="ctr">
+              <a:buNone/>
+            </a:pPr>
+            <a:r>
+              <a:rPr lang="en-US" sz="1600">
+                <a:solidFill>
+                  <a:srgbClr val="6B7280"/>
+                </a:solidFill>
+                <a:latin typeface="Meiryo UI" pitchFamily="34" charset="0"/>
+                <a:ea typeface="Meiryo UI" pitchFamily="34" charset="-122"/>
+                <a:cs typeface="Noto Sans JP" pitchFamily="34" charset="-120"/>
+              </a:rPr>
+              <a:t>メールの重要度が</a:t>
             </a:r>
           </a:p>
           <a:p>
@@ -20338,7 +19210,7 @@
               <a:buNone/>
             </a:pPr>
             <a:r>
-              <a:rPr lang="en-US" sz="1400" b="1" dirty="0">
+              <a:rPr lang="en-US" sz="1400" b="1">
                 <a:solidFill>
                   <a:srgbClr val="1F2937"/>
                 </a:solidFill>
@@ -20346,7 +19218,29 @@
                 <a:ea typeface="Meiryo UI" pitchFamily="34" charset="-122"/>
                 <a:cs typeface="Noto Sans JP" pitchFamily="34" charset="-120"/>
               </a:rPr>
-              <a:t>実行履歴の出力を読む</a:t>
+              <a:t>実行履歴</a:t>
+            </a:r>
+            <a:r>
+              <a:rPr lang="ja-JP" altLang="en-US" sz="1400" b="1">
+                <a:solidFill>
+                  <a:srgbClr val="1F2937"/>
+                </a:solidFill>
+                <a:latin typeface="Meiryo UI" pitchFamily="34" charset="0"/>
+                <a:ea typeface="Meiryo UI" pitchFamily="34" charset="-122"/>
+                <a:cs typeface="Noto Sans JP" pitchFamily="34" charset="-120"/>
+              </a:rPr>
+              <a:t>と</a:t>
+            </a:r>
+            <a:r>
+              <a:rPr lang="en-US" sz="1400" b="1">
+                <a:solidFill>
+                  <a:srgbClr val="1F2937"/>
+                </a:solidFill>
+                <a:latin typeface="Meiryo UI" pitchFamily="34" charset="0"/>
+                <a:ea typeface="Meiryo UI" pitchFamily="34" charset="-122"/>
+                <a:cs typeface="Noto Sans JP" pitchFamily="34" charset="-120"/>
+              </a:rPr>
+              <a:t>出力を読む</a:t>
             </a:r>
             <a:endParaRPr lang="en-US" sz="1400" dirty="0"/>
           </a:p>
@@ -20361,7 +19255,7 @@
         <p:spPr>
           <a:xfrm>
             <a:off x="8212590" y="4718304"/>
-            <a:ext cx="3218324" cy="838505"/>
+            <a:ext cx="3427722" cy="838505"/>
           </a:xfrm>
           <a:prstGeom prst="rect">
             <a:avLst/>
@@ -20377,9 +19271,12 @@
               <a:buNone/>
             </a:pPr>
             <a:r>
-              <a:rPr lang="ja-JP" altLang="en-US" sz="1600">
-                <a:solidFill>
-                  <a:srgbClr val="6B7280"/>
+              <a:rPr lang="ja-JP" altLang="en-US" sz="1600" b="1">
+                <a:solidFill>
+                  <a:schemeClr val="tx1">
+                    <a:lumMod val="65000"/>
+                    <a:lumOff val="35000"/>
+                  </a:schemeClr>
                 </a:solidFill>
                 <a:latin typeface="Meiryo UI" pitchFamily="34" charset="0"/>
                 <a:ea typeface="Meiryo UI" pitchFamily="34" charset="-122"/>
@@ -20387,13 +19284,23 @@
               </a:rPr>
               <a:t>わざと失敗させて、実行履歴の出力から</a:t>
             </a:r>
-            <a:endParaRPr lang="en-US" sz="1400" dirty="0"/>
-          </a:p>
-          <a:p>
-            <a:r>
-              <a:rPr sz="1600">
-                <a:solidFill>
-                  <a:srgbClr val="6B7280"/>
+            <a:endParaRPr lang="en-US" sz="1400" b="1" dirty="0">
+              <a:solidFill>
+                <a:schemeClr val="tx1">
+                  <a:lumMod val="65000"/>
+                  <a:lumOff val="35000"/>
+                </a:schemeClr>
+              </a:solidFill>
+            </a:endParaRPr>
+          </a:p>
+          <a:p>
+            <a:r>
+              <a:rPr sz="1600" b="1">
+                <a:solidFill>
+                  <a:schemeClr val="tx1">
+                    <a:lumMod val="65000"/>
+                    <a:lumOff val="35000"/>
+                  </a:schemeClr>
                 </a:solidFill>
                 <a:latin typeface="Meiryo UI"/>
                 <a:ea typeface="Meiryo UI"/>
@@ -21290,6 +20197,943 @@
         </p:nvGrpSpPr>
         <p:grpSpPr>
           <a:xfrm>
+            <a:off x="4814990" y="6322778"/>
+            <a:ext cx="7139243" cy="405006"/>
+            <a:chOff x="6034969" y="604238"/>
+            <a:chExt cx="5862289" cy="405006"/>
+          </a:xfrm>
+        </p:grpSpPr>
+        <p:sp>
+          <p:nvSpPr>
+            <p:cNvPr id="48" name="Shape 31">
+              <a:extLst>
+                <a:ext uri="{FF2B5EF4-FFF2-40B4-BE49-F238E27FC236}">
+                  <a16:creationId xmlns:a16="http://schemas.microsoft.com/office/drawing/2014/main" id="{DD44BB3C-F859-7A5E-7E34-CC1C35ECEA4D}"/>
+                </a:ext>
+              </a:extLst>
+            </p:cNvPr>
+            <p:cNvSpPr/>
+            <p:nvPr/>
+          </p:nvSpPr>
+          <p:spPr>
+            <a:xfrm>
+              <a:off x="6034969" y="604238"/>
+              <a:ext cx="5854549" cy="386057"/>
+            </a:xfrm>
+            <a:prstGeom prst="roundRect">
+              <a:avLst>
+                <a:gd name="adj" fmla="val 342465"/>
+              </a:avLst>
+            </a:prstGeom>
+            <a:solidFill>
+              <a:srgbClr val="EFF6FF"/>
+            </a:solidFill>
+            <a:ln w="12700">
+              <a:solidFill>
+                <a:srgbClr val="FFFFFF">
+                  <a:alpha val="0"/>
+                </a:srgbClr>
+              </a:solidFill>
+              <a:prstDash val="solid"/>
+            </a:ln>
+          </p:spPr>
+          <p:txBody>
+            <a:bodyPr/>
+            <a:lstStyle/>
+            <a:p>
+              <a:endParaRPr lang="ja-JP" altLang="en-US"/>
+            </a:p>
+          </p:txBody>
+        </p:sp>
+        <p:sp>
+          <p:nvSpPr>
+            <p:cNvPr id="49" name="Text 21">
+              <a:extLst>
+                <a:ext uri="{FF2B5EF4-FFF2-40B4-BE49-F238E27FC236}">
+                  <a16:creationId xmlns:a16="http://schemas.microsoft.com/office/drawing/2014/main" id="{A7F44BB1-1667-BB85-557B-D7C1AAD8A0FA}"/>
+                </a:ext>
+              </a:extLst>
+            </p:cNvPr>
+            <p:cNvSpPr txBox="1"/>
+            <p:nvPr/>
+          </p:nvSpPr>
+          <p:spPr>
+            <a:xfrm>
+              <a:off x="6287649" y="612651"/>
+              <a:ext cx="5609609" cy="396593"/>
+            </a:xfrm>
+            <a:prstGeom prst="rect">
+              <a:avLst/>
+            </a:prstGeom>
+            <a:noFill/>
+            <a:ln/>
+          </p:spPr>
+          <p:txBody>
+            <a:bodyPr wrap="square" lIns="0" tIns="0" rIns="0" bIns="0" rtlCol="0" anchor="ctr"/>
+            <a:lstStyle/>
+            <a:p>
+              <a:pPr marL="0" indent="0" algn="l">
+                <a:buNone/>
+              </a:pPr>
+              <a:r>
+                <a:rPr lang="en-US" sz="1400" b="1" dirty="0">
+                  <a:solidFill>
+                    <a:srgbClr val="2563EB"/>
+                  </a:solidFill>
+                  <a:latin typeface="Noto Sans JP" pitchFamily="34" charset="0"/>
+                  <a:ea typeface="Noto Sans JP" pitchFamily="34" charset="-122"/>
+                  <a:cs typeface="Noto Sans JP" pitchFamily="34" charset="-120"/>
+                </a:rPr>
+                <a:t>学んだこと・気づいたことを #</a:t>
+              </a:r>
+              <a:r>
+                <a:rPr lang="en-US" sz="1400" b="1">
+                  <a:solidFill>
+                    <a:srgbClr val="2563EB"/>
+                  </a:solidFill>
+                  <a:latin typeface="Noto Sans JP" pitchFamily="34" charset="0"/>
+                  <a:ea typeface="Noto Sans JP" pitchFamily="34" charset="-122"/>
+                  <a:cs typeface="Noto Sans JP" pitchFamily="34" charset="-120"/>
+                </a:rPr>
+                <a:t>PA45 で</a:t>
+              </a:r>
+              <a:r>
+                <a:rPr lang="ja-JP" altLang="en-US" sz="1400" b="1">
+                  <a:solidFill>
+                    <a:srgbClr val="2563EB"/>
+                  </a:solidFill>
+                  <a:latin typeface="Noto Sans JP" pitchFamily="34" charset="0"/>
+                  <a:ea typeface="Noto Sans JP" pitchFamily="34" charset="-122"/>
+                  <a:cs typeface="Noto Sans JP" pitchFamily="34" charset="-120"/>
+                </a:rPr>
+                <a:t>リアルタイムに</a:t>
+              </a:r>
+              <a:r>
+                <a:rPr lang="en-US" sz="1400" b="1">
+                  <a:solidFill>
+                    <a:srgbClr val="2563EB"/>
+                  </a:solidFill>
+                  <a:latin typeface="Noto Sans JP" pitchFamily="34" charset="0"/>
+                  <a:ea typeface="Noto Sans JP" pitchFamily="34" charset="-122"/>
+                  <a:cs typeface="Noto Sans JP" pitchFamily="34" charset="-120"/>
+                </a:rPr>
+                <a:t>投稿しよう！</a:t>
+              </a:r>
+              <a:r>
+                <a:rPr lang="ja-JP" altLang="en-US" sz="1400" b="1">
+                  <a:solidFill>
+                    <a:srgbClr val="2563EB"/>
+                  </a:solidFill>
+                  <a:latin typeface="Noto Sans JP" pitchFamily="34" charset="0"/>
+                  <a:ea typeface="Noto Sans JP" pitchFamily="34" charset="-122"/>
+                  <a:cs typeface="Noto Sans JP" pitchFamily="34" charset="-120"/>
+                </a:rPr>
+                <a:t>スクショ</a:t>
+              </a:r>
+              <a:r>
+                <a:rPr lang="en-US" altLang="ja-JP" sz="1400" b="1">
+                  <a:solidFill>
+                    <a:srgbClr val="2563EB"/>
+                  </a:solidFill>
+                  <a:latin typeface="Noto Sans JP" pitchFamily="34" charset="0"/>
+                  <a:ea typeface="Noto Sans JP" pitchFamily="34" charset="-122"/>
+                  <a:cs typeface="Noto Sans JP" pitchFamily="34" charset="-120"/>
+                </a:rPr>
+                <a:t>OK</a:t>
+              </a:r>
+              <a:r>
+                <a:rPr lang="ja-JP" altLang="en-US" sz="1400" b="1">
+                  <a:solidFill>
+                    <a:srgbClr val="2563EB"/>
+                  </a:solidFill>
+                  <a:latin typeface="Noto Sans JP" pitchFamily="34" charset="0"/>
+                  <a:ea typeface="Noto Sans JP" pitchFamily="34" charset="-122"/>
+                  <a:cs typeface="Noto Sans JP" pitchFamily="34" charset="-120"/>
+                </a:rPr>
+                <a:t>！</a:t>
+              </a:r>
+              <a:endParaRPr lang="en-US" sz="1400" dirty="0"/>
+            </a:p>
+          </p:txBody>
+        </p:sp>
+      </p:grpSp>
+      <p:sp>
+        <p:nvSpPr>
+          <p:cNvPr id="51" name="Text 5">
+            <a:extLst>
+              <a:ext uri="{FF2B5EF4-FFF2-40B4-BE49-F238E27FC236}">
+                <a16:creationId xmlns:a16="http://schemas.microsoft.com/office/drawing/2014/main" id="{F34FF253-528E-97DF-BF89-4A55B2E7EBC4}"/>
+              </a:ext>
+            </a:extLst>
+          </p:cNvPr>
+          <p:cNvSpPr txBox="1"/>
+          <p:nvPr/>
+        </p:nvSpPr>
+        <p:spPr>
+          <a:xfrm>
+            <a:off x="342678" y="1807073"/>
+            <a:ext cx="6583680" cy="3947047"/>
+          </a:xfrm>
+          <a:prstGeom prst="rect">
+            <a:avLst/>
+          </a:prstGeom>
+          <a:noFill/>
+          <a:ln/>
+        </p:spPr>
+        <p:txBody>
+          <a:bodyPr wrap="square" lIns="0" tIns="0" rIns="0" bIns="0" rtlCol="0" anchor="ctr"/>
+          <a:lstStyle/>
+          <a:p>
+            <a:pPr marL="0" indent="0" algn="l">
+              <a:spcBef>
+                <a:spcPts val="1000"/>
+              </a:spcBef>
+              <a:buNone/>
+            </a:pPr>
+            <a:r>
+              <a:rPr sz="2000" b="0">
+                <a:solidFill>
+                  <a:srgbClr val="1F2937"/>
+                </a:solidFill>
+                <a:latin typeface="Meiryo UI"/>
+                <a:ea typeface="Meiryo UI"/>
+              </a:rPr>
+              <a:t>①「実行履歴」は、フローを動かした記録。</a:t>
+            </a:r>
+            <a:endParaRPr lang="en-US" sz="2000" b="0">
+              <a:solidFill>
+                <a:srgbClr val="1F2937"/>
+              </a:solidFill>
+              <a:latin typeface="Meiryo UI"/>
+              <a:ea typeface="Meiryo UI"/>
+            </a:endParaRPr>
+          </a:p>
+          <a:p>
+            <a:pPr marL="0" indent="0" algn="l">
+              <a:spcBef>
+                <a:spcPts val="1000"/>
+              </a:spcBef>
+              <a:buNone/>
+            </a:pPr>
+            <a:r>
+              <a:rPr sz="2000" b="0">
+                <a:solidFill>
+                  <a:srgbClr val="1F2937"/>
+                </a:solidFill>
+                <a:latin typeface="Meiryo UI"/>
+                <a:ea typeface="Meiryo UI"/>
+              </a:rPr>
+              <a:t>いつ・どのアクションが・成功（緑）か失敗（赤）かが残ります。</a:t>
+            </a:r>
+            <a:endParaRPr lang="en-US" altLang="ja-JP" sz="2000" b="1">
+              <a:solidFill>
+                <a:srgbClr val="1F2937"/>
+              </a:solidFill>
+              <a:latin typeface="Noto Sans JP" pitchFamily="34" charset="0"/>
+              <a:ea typeface="Noto Sans JP" pitchFamily="34" charset="-122"/>
+              <a:cs typeface="Noto Sans JP" pitchFamily="34" charset="-120"/>
+            </a:endParaRPr>
+          </a:p>
+          <a:p>
+            <a:pPr>
+              <a:spcBef>
+                <a:spcPts val="1000"/>
+              </a:spcBef>
+            </a:pPr>
+            <a:r>
+              <a:rPr sz="2000" b="0">
+                <a:solidFill>
+                  <a:srgbClr val="1F2937"/>
+                </a:solidFill>
+                <a:latin typeface="Meiryo UI"/>
+                <a:ea typeface="Meiryo UI"/>
+              </a:rPr>
+              <a:t>②各アクションを開くと「入力」と「出力」が見られます。</a:t>
+            </a:r>
+            <a:br>
+              <a:rPr lang="en-US" sz="2000" b="0">
+                <a:solidFill>
+                  <a:srgbClr val="1F2937"/>
+                </a:solidFill>
+                <a:latin typeface="Meiryo UI"/>
+                <a:ea typeface="Meiryo UI"/>
+              </a:rPr>
+            </a:br>
+            <a:br>
+              <a:rPr lang="en-US" sz="2000" b="0">
+                <a:solidFill>
+                  <a:srgbClr val="1F2937"/>
+                </a:solidFill>
+                <a:latin typeface="Meiryo UI"/>
+                <a:ea typeface="Meiryo UI"/>
+              </a:rPr>
+            </a:br>
+            <a:endParaRPr sz="2000" b="0">
+              <a:solidFill>
+                <a:srgbClr val="1F2937"/>
+              </a:solidFill>
+              <a:latin typeface="Meiryo UI"/>
+              <a:ea typeface="Meiryo UI"/>
+            </a:endParaRPr>
+          </a:p>
+        </p:txBody>
+      </p:sp>
+      <p:sp>
+        <p:nvSpPr>
+          <p:cNvPr id="52" name="Rounded Rectangle 51"/>
+          <p:cNvSpPr/>
+          <p:nvPr/>
+        </p:nvSpPr>
+        <p:spPr>
+          <a:xfrm>
+            <a:off x="6601097" y="1737360"/>
+            <a:ext cx="5486400" cy="4114800"/>
+          </a:xfrm>
+          <a:prstGeom prst="roundRect">
+            <a:avLst>
+              <a:gd name="adj" fmla="val 10741"/>
+            </a:avLst>
+          </a:prstGeom>
+          <a:solidFill>
+            <a:srgbClr val="F1F5FB"/>
+          </a:solidFill>
+          <a:ln w="19050">
+            <a:solidFill>
+              <a:srgbClr val="9CB8D8"/>
+            </a:solidFill>
+          </a:ln>
+          <a:effectLst/>
+        </p:spPr>
+        <p:style>
+          <a:lnRef idx="1">
+            <a:schemeClr val="accent1"/>
+          </a:lnRef>
+          <a:fillRef idx="3">
+            <a:schemeClr val="accent1"/>
+          </a:fillRef>
+          <a:effectRef idx="2">
+            <a:schemeClr val="accent1"/>
+          </a:effectRef>
+          <a:fontRef idx="minor">
+            <a:schemeClr val="lt1"/>
+          </a:fontRef>
+        </p:style>
+        <p:txBody>
+          <a:bodyPr wrap="square" rtlCol="0" anchor="ctr"/>
+          <a:lstStyle/>
+          <a:p>
+            <a:pPr algn="ctr"/>
+            <a:r>
+              <a:rPr sz="1800" b="1">
+                <a:solidFill>
+                  <a:srgbClr val="2A5E9E"/>
+                </a:solidFill>
+                <a:latin typeface="Meiryo UI"/>
+                <a:ea typeface="Meiryo UI"/>
+              </a:rPr>
+              <a:t>📷 ここにスクショを貼る</a:t>
+            </a:r>
+          </a:p>
+          <a:p>
+            <a:pPr algn="ctr"/>
+            <a:r>
+              <a:rPr sz="1400">
+                <a:solidFill>
+                  <a:srgbClr val="556677"/>
+                </a:solidFill>
+                <a:latin typeface="Meiryo UI"/>
+                <a:ea typeface="Meiryo UI"/>
+              </a:rPr>
+              <a:t>実行履歴の一覧画面
+（緑＝成功・赤＝失敗が見える画面）</a:t>
+            </a:r>
+          </a:p>
+        </p:txBody>
+      </p:sp>
+      <p:pic>
+        <p:nvPicPr>
+          <p:cNvPr id="11" name="図 10" descr="The image displays a log of execution history for a software application, detailing various successful test events that occurred on different dates and times.&#10;&#10;AI 生成コンテンツは誤りを含む可能性があります。">
+            <a:extLst>
+              <a:ext uri="{FF2B5EF4-FFF2-40B4-BE49-F238E27FC236}">
+                <a16:creationId xmlns:a16="http://schemas.microsoft.com/office/drawing/2014/main" id="{63FB1985-BEE1-52FF-70DD-1FFFBC99E063}"/>
+              </a:ext>
+            </a:extLst>
+          </p:cNvPr>
+          <p:cNvPicPr>
+            <a:picLocks noChangeAspect="1"/>
+          </p:cNvPicPr>
+          <p:nvPr/>
+        </p:nvPicPr>
+        <p:blipFill>
+          <a:blip r:embed="rId2"/>
+          <a:stretch>
+            <a:fillRect/>
+          </a:stretch>
+        </p:blipFill>
+        <p:spPr>
+          <a:xfrm>
+            <a:off x="6750140" y="2496312"/>
+            <a:ext cx="5194667" cy="2571762"/>
+          </a:xfrm>
+          <a:prstGeom prst="rect">
+            <a:avLst/>
+          </a:prstGeom>
+          <a:ln>
+            <a:noFill/>
+          </a:ln>
+          <a:effectLst>
+            <a:outerShdw blurRad="292100" dist="139700" dir="2700000" algn="tl" rotWithShape="0">
+              <a:srgbClr val="333333">
+                <a:alpha val="65000"/>
+              </a:srgbClr>
+            </a:outerShdw>
+          </a:effectLst>
+        </p:spPr>
+      </p:pic>
+    </p:spTree>
+  </p:cSld>
+  <p:clrMapOvr>
+    <a:masterClrMapping/>
+  </p:clrMapOvr>
+</p:sld>
+</file>
+
+<file path=ppt/slides/slide9.xml><?xml version="1.0" encoding="utf-8"?>
+<p:sld xmlns:a="http://schemas.openxmlformats.org/drawingml/2006/main" xmlns:r="http://schemas.openxmlformats.org/officeDocument/2006/relationships" xmlns:p="http://schemas.openxmlformats.org/presentationml/2006/main">
+  <p:cSld>
+    <p:spTree>
+      <p:nvGrpSpPr>
+        <p:cNvPr id="1" name=""/>
+        <p:cNvGrpSpPr/>
+        <p:nvPr/>
+      </p:nvGrpSpPr>
+      <p:grpSpPr>
+        <a:xfrm>
+          <a:off x="0" y="0"/>
+          <a:ext cx="0" cy="0"/>
+          <a:chOff x="0" y="0"/>
+          <a:chExt cx="0" cy="0"/>
+        </a:xfrm>
+      </p:grpSpPr>
+      <p:sp>
+        <p:nvSpPr>
+          <p:cNvPr id="2" name="Shape 0"/>
+          <p:cNvSpPr/>
+          <p:nvPr/>
+        </p:nvSpPr>
+        <p:spPr>
+          <a:xfrm>
+            <a:off x="0" y="0"/>
+            <a:ext cx="12191695" cy="6858000"/>
+          </a:xfrm>
+          <a:prstGeom prst="rect">
+            <a:avLst/>
+          </a:prstGeom>
+          <a:solidFill>
+            <a:srgbClr val="F3F4F6"/>
+          </a:solidFill>
+          <a:ln w="12700">
+            <a:solidFill>
+              <a:srgbClr val="FFFFFF">
+                <a:alpha val="0"/>
+              </a:srgbClr>
+            </a:solidFill>
+            <a:prstDash val="solid"/>
+          </a:ln>
+        </p:spPr>
+        <p:txBody>
+          <a:bodyPr/>
+          <a:lstStyle/>
+          <a:p>
+            <a:endParaRPr lang="ja-JP" altLang="en-US"/>
+          </a:p>
+        </p:txBody>
+      </p:sp>
+      <p:sp>
+        <p:nvSpPr>
+          <p:cNvPr id="3" name="Shape 1"/>
+          <p:cNvSpPr/>
+          <p:nvPr/>
+        </p:nvSpPr>
+        <p:spPr>
+          <a:xfrm>
+            <a:off x="0" y="0"/>
+            <a:ext cx="12191695" cy="6858000"/>
+          </a:xfrm>
+          <a:prstGeom prst="rect">
+            <a:avLst/>
+          </a:prstGeom>
+          <a:solidFill>
+            <a:srgbClr val="FFFFFF"/>
+          </a:solidFill>
+          <a:ln w="12700">
+            <a:solidFill>
+              <a:srgbClr val="FFFFFF">
+                <a:alpha val="0"/>
+              </a:srgbClr>
+            </a:solidFill>
+            <a:prstDash val="solid"/>
+          </a:ln>
+          <a:effectLst>
+            <a:outerShdw blurRad="63500" dist="38100" dir="16200000" algn="bl" rotWithShape="0">
+              <a:srgbClr val="000000">
+                <a:alpha val="10000"/>
+              </a:srgbClr>
+            </a:outerShdw>
+          </a:effectLst>
+        </p:spPr>
+        <p:txBody>
+          <a:bodyPr/>
+          <a:lstStyle/>
+          <a:p>
+            <a:endParaRPr lang="ja-JP" altLang="en-US"/>
+          </a:p>
+        </p:txBody>
+      </p:sp>
+      <p:sp>
+        <p:nvSpPr>
+          <p:cNvPr id="4" name="Shape 2"/>
+          <p:cNvSpPr/>
+          <p:nvPr/>
+        </p:nvSpPr>
+        <p:spPr>
+          <a:xfrm>
+            <a:off x="0" y="0"/>
+            <a:ext cx="12191695" cy="1485900"/>
+          </a:xfrm>
+          <a:prstGeom prst="rect">
+            <a:avLst/>
+          </a:prstGeom>
+          <a:solidFill>
+            <a:srgbClr val="FFFFFF"/>
+          </a:solidFill>
+          <a:ln/>
+        </p:spPr>
+        <p:txBody>
+          <a:bodyPr/>
+          <a:lstStyle/>
+          <a:p>
+            <a:endParaRPr lang="ja-JP" altLang="en-US"/>
+          </a:p>
+        </p:txBody>
+      </p:sp>
+      <p:sp>
+        <p:nvSpPr>
+          <p:cNvPr id="5" name="Shape 3"/>
+          <p:cNvSpPr/>
+          <p:nvPr/>
+        </p:nvSpPr>
+        <p:spPr>
+          <a:xfrm>
+            <a:off x="0" y="1476756"/>
+            <a:ext cx="12191695" cy="9144"/>
+          </a:xfrm>
+          <a:prstGeom prst="rect">
+            <a:avLst/>
+          </a:prstGeom>
+          <a:solidFill>
+            <a:srgbClr val="F3F4F6"/>
+          </a:solidFill>
+          <a:ln w="12700">
+            <a:solidFill>
+              <a:srgbClr val="F3F4F6">
+                <a:alpha val="0"/>
+              </a:srgbClr>
+            </a:solidFill>
+            <a:prstDash val="solid"/>
+          </a:ln>
+        </p:spPr>
+        <p:txBody>
+          <a:bodyPr/>
+          <a:lstStyle/>
+          <a:p>
+            <a:endParaRPr lang="ja-JP" altLang="en-US"/>
+          </a:p>
+        </p:txBody>
+      </p:sp>
+      <p:sp>
+        <p:nvSpPr>
+          <p:cNvPr id="6" name="Text 4"/>
+          <p:cNvSpPr txBox="1"/>
+          <p:nvPr/>
+        </p:nvSpPr>
+        <p:spPr>
+          <a:xfrm>
+            <a:off x="457200" y="228600"/>
+            <a:ext cx="5600700" cy="267005"/>
+          </a:xfrm>
+          <a:prstGeom prst="rect">
+            <a:avLst/>
+          </a:prstGeom>
+          <a:noFill/>
+          <a:ln/>
+        </p:spPr>
+        <p:txBody>
+          <a:bodyPr wrap="square" lIns="0" tIns="0" rIns="0" bIns="0" rtlCol="0" anchor="ctr"/>
+          <a:lstStyle/>
+          <a:p>
+            <a:pPr marL="0" indent="0" algn="l">
+              <a:buNone/>
+            </a:pPr>
+            <a:r>
+              <a:rPr lang="en-US" sz="1600" b="1" kern="0" spc="150" dirty="0">
+                <a:solidFill>
+                  <a:srgbClr val="6B7280"/>
+                </a:solidFill>
+                <a:latin typeface="Meiryo UI" pitchFamily="34" charset="0"/>
+                <a:ea typeface="Meiryo UI" pitchFamily="34" charset="-122"/>
+                <a:cs typeface="Noto Sans JP" pitchFamily="34" charset="-120"/>
+              </a:rPr>
+              <a:t>PA45｜第11回</a:t>
+            </a:r>
+            <a:endParaRPr lang="en-US" sz="1500" dirty="0"/>
+          </a:p>
+        </p:txBody>
+      </p:sp>
+      <p:sp>
+        <p:nvSpPr>
+          <p:cNvPr id="7" name="Text 5"/>
+          <p:cNvSpPr txBox="1"/>
+          <p:nvPr/>
+        </p:nvSpPr>
+        <p:spPr>
+          <a:xfrm>
+            <a:off x="457199" y="533095"/>
+            <a:ext cx="10815277" cy="715061"/>
+          </a:xfrm>
+          <a:prstGeom prst="rect">
+            <a:avLst/>
+          </a:prstGeom>
+          <a:noFill/>
+          <a:ln/>
+        </p:spPr>
+        <p:txBody>
+          <a:bodyPr wrap="square" lIns="0" tIns="0" rIns="0" bIns="0" rtlCol="0" anchor="ctr"/>
+          <a:lstStyle/>
+          <a:p>
+            <a:pPr marL="0" indent="0" algn="l">
+              <a:buNone/>
+            </a:pPr>
+            <a:r>
+              <a:rPr lang="en-US" sz="3000" b="1" dirty="0">
+                <a:solidFill>
+                  <a:srgbClr val="1F2937"/>
+                </a:solidFill>
+                <a:latin typeface="Meiryo UI" pitchFamily="34" charset="0"/>
+                <a:ea typeface="Meiryo UI" pitchFamily="34" charset="-122"/>
+                <a:cs typeface="Noto Sans JP" pitchFamily="34" charset="-120"/>
+              </a:rPr>
+              <a:t>テーマ解説 (2/2)：画面の「表示」と「値</a:t>
+            </a:r>
+            <a:r>
+              <a:rPr lang="en-US" sz="3000" b="1">
+                <a:solidFill>
+                  <a:srgbClr val="1F2937"/>
+                </a:solidFill>
+                <a:latin typeface="Meiryo UI" pitchFamily="34" charset="0"/>
+                <a:ea typeface="Meiryo UI" pitchFamily="34" charset="-122"/>
+                <a:cs typeface="Noto Sans JP" pitchFamily="34" charset="-120"/>
+              </a:rPr>
+              <a:t>」は違う</a:t>
+            </a:r>
+            <a:r>
+              <a:rPr lang="ja-JP" altLang="en-US" sz="3000" b="1">
+                <a:solidFill>
+                  <a:srgbClr val="1F2937"/>
+                </a:solidFill>
+                <a:latin typeface="Meiryo UI" pitchFamily="34" charset="0"/>
+                <a:ea typeface="Meiryo UI" pitchFamily="34" charset="-122"/>
+                <a:cs typeface="Noto Sans JP" pitchFamily="34" charset="-120"/>
+              </a:rPr>
+              <a:t>時がある</a:t>
+            </a:r>
+            <a:endParaRPr lang="en-US" sz="2800" dirty="0"/>
+          </a:p>
+        </p:txBody>
+      </p:sp>
+      <p:sp>
+        <p:nvSpPr>
+          <p:cNvPr id="8" name="Shape 6"/>
+          <p:cNvSpPr/>
+          <p:nvPr/>
+        </p:nvSpPr>
+        <p:spPr>
+          <a:xfrm>
+            <a:off x="10858500" y="828446"/>
+            <a:ext cx="114300" cy="114300"/>
+          </a:xfrm>
+          <a:prstGeom prst="ellipse">
+            <a:avLst/>
+          </a:prstGeom>
+          <a:solidFill>
+            <a:srgbClr val="0078D4"/>
+          </a:solidFill>
+          <a:ln w="12700">
+            <a:solidFill>
+              <a:srgbClr val="FFFFFF">
+                <a:alpha val="0"/>
+              </a:srgbClr>
+            </a:solidFill>
+            <a:prstDash val="solid"/>
+          </a:ln>
+        </p:spPr>
+        <p:txBody>
+          <a:bodyPr/>
+          <a:lstStyle/>
+          <a:p>
+            <a:endParaRPr lang="ja-JP" altLang="en-US"/>
+          </a:p>
+        </p:txBody>
+      </p:sp>
+      <p:sp>
+        <p:nvSpPr>
+          <p:cNvPr id="9" name="Text 7"/>
+          <p:cNvSpPr txBox="1"/>
+          <p:nvPr/>
+        </p:nvSpPr>
+        <p:spPr>
+          <a:xfrm>
+            <a:off x="11048695" y="752551"/>
+            <a:ext cx="896112" cy="267005"/>
+          </a:xfrm>
+          <a:prstGeom prst="rect">
+            <a:avLst/>
+          </a:prstGeom>
+          <a:noFill/>
+          <a:ln/>
+        </p:spPr>
+        <p:txBody>
+          <a:bodyPr wrap="square" lIns="0" tIns="0" rIns="0" bIns="0" rtlCol="0" anchor="ctr"/>
+          <a:lstStyle/>
+          <a:p>
+            <a:pPr marL="0" indent="0" algn="l">
+              <a:buNone/>
+            </a:pPr>
+            <a:r>
+              <a:rPr lang="en-US" sz="1600" dirty="0">
+                <a:solidFill>
+                  <a:srgbClr val="9CA3AF"/>
+                </a:solidFill>
+                <a:latin typeface="Meiryo UI" pitchFamily="34" charset="0"/>
+                <a:ea typeface="Meiryo UI" pitchFamily="34" charset="-122"/>
+                <a:cs typeface="ui-monospace" pitchFamily="34" charset="-120"/>
+              </a:rPr>
+              <a:t>Concept</a:t>
+            </a:r>
+            <a:endParaRPr lang="en-US" sz="1500" dirty="0"/>
+          </a:p>
+        </p:txBody>
+      </p:sp>
+      <p:sp>
+        <p:nvSpPr>
+          <p:cNvPr id="13" name="Shape 9"/>
+          <p:cNvSpPr/>
+          <p:nvPr/>
+        </p:nvSpPr>
+        <p:spPr>
+          <a:xfrm>
+            <a:off x="305" y="1485900"/>
+            <a:ext cx="12191695" cy="4914900"/>
+          </a:xfrm>
+          <a:prstGeom prst="rect">
+            <a:avLst/>
+          </a:prstGeom>
+          <a:solidFill>
+            <a:srgbClr val="F9FAFB"/>
+          </a:solidFill>
+          <a:ln w="12700">
+            <a:solidFill>
+              <a:srgbClr val="FFFFFF">
+                <a:alpha val="0"/>
+              </a:srgbClr>
+            </a:solidFill>
+            <a:prstDash val="solid"/>
+          </a:ln>
+        </p:spPr>
+        <p:txBody>
+          <a:bodyPr/>
+          <a:lstStyle/>
+          <a:p>
+            <a:endParaRPr lang="ja-JP" altLang="en-US"/>
+          </a:p>
+        </p:txBody>
+      </p:sp>
+      <p:pic>
+        <p:nvPicPr>
+          <p:cNvPr id="23" name="Image 8" descr="preencoded.png"/>
+          <p:cNvPicPr>
+            <a:picLocks noChangeAspect="1"/>
+          </p:cNvPicPr>
+          <p:nvPr/>
+        </p:nvPicPr>
+        <p:blipFill>
+          <a:blip/>
+          <a:srcRect t="-401" b="-401"/>
+          <a:stretch/>
+        </p:blipFill>
+        <p:spPr>
+          <a:xfrm>
+            <a:off x="0" y="6801307"/>
+            <a:ext cx="12191695" cy="57607"/>
+          </a:xfrm>
+          <a:prstGeom prst="rect">
+            <a:avLst/>
+          </a:prstGeom>
+        </p:spPr>
+      </p:pic>
+      <p:sp>
+        <p:nvSpPr>
+          <p:cNvPr id="39" name="Shape 22"/>
+          <p:cNvSpPr/>
+          <p:nvPr/>
+        </p:nvSpPr>
+        <p:spPr>
+          <a:xfrm>
+            <a:off x="0" y="6400800"/>
+            <a:ext cx="12191695" cy="457200"/>
+          </a:xfrm>
+          <a:prstGeom prst="rect">
+            <a:avLst/>
+          </a:prstGeom>
+          <a:solidFill>
+            <a:srgbClr val="FFFFFF"/>
+          </a:solidFill>
+          <a:ln/>
+        </p:spPr>
+        <p:txBody>
+          <a:bodyPr/>
+          <a:lstStyle/>
+          <a:p>
+            <a:endParaRPr lang="ja-JP" altLang="en-US"/>
+          </a:p>
+        </p:txBody>
+      </p:sp>
+      <p:sp>
+        <p:nvSpPr>
+          <p:cNvPr id="40" name="Shape 23"/>
+          <p:cNvSpPr/>
+          <p:nvPr/>
+        </p:nvSpPr>
+        <p:spPr>
+          <a:xfrm>
+            <a:off x="0" y="6400800"/>
+            <a:ext cx="12191695" cy="9144"/>
+          </a:xfrm>
+          <a:prstGeom prst="rect">
+            <a:avLst/>
+          </a:prstGeom>
+          <a:solidFill>
+            <a:srgbClr val="E5E7EB"/>
+          </a:solidFill>
+          <a:ln w="12700">
+            <a:solidFill>
+              <a:srgbClr val="E5E7EB">
+                <a:alpha val="0"/>
+              </a:srgbClr>
+            </a:solidFill>
+            <a:prstDash val="solid"/>
+          </a:ln>
+        </p:spPr>
+        <p:txBody>
+          <a:bodyPr/>
+          <a:lstStyle/>
+          <a:p>
+            <a:endParaRPr lang="ja-JP" altLang="en-US"/>
+          </a:p>
+        </p:txBody>
+      </p:sp>
+      <p:sp>
+        <p:nvSpPr>
+          <p:cNvPr id="41" name="Text 24"/>
+          <p:cNvSpPr txBox="1"/>
+          <p:nvPr/>
+        </p:nvSpPr>
+        <p:spPr>
+          <a:xfrm>
+            <a:off x="457200" y="6519672"/>
+            <a:ext cx="2573122" cy="228600"/>
+          </a:xfrm>
+          <a:prstGeom prst="rect">
+            <a:avLst/>
+          </a:prstGeom>
+          <a:noFill/>
+          <a:ln/>
+        </p:spPr>
+        <p:txBody>
+          <a:bodyPr wrap="square" lIns="0" tIns="0" rIns="0" bIns="0" rtlCol="0" anchor="ctr"/>
+          <a:lstStyle/>
+          <a:p>
+            <a:pPr marL="0" indent="0" algn="l">
+              <a:buNone/>
+            </a:pPr>
+            <a:r>
+              <a:rPr lang="en-US" sz="1600" dirty="0">
+                <a:solidFill>
+                  <a:srgbClr val="9CA3AF"/>
+                </a:solidFill>
+                <a:latin typeface="Meiryo UI" pitchFamily="34" charset="0"/>
+                <a:ea typeface="Meiryo UI" pitchFamily="34" charset="-122"/>
+                <a:cs typeface="Noto Sans JP" pitchFamily="34" charset="-120"/>
+              </a:rPr>
+              <a:t>Power Automate for Beginners</a:t>
+            </a:r>
+            <a:endParaRPr lang="en-US" sz="1200" dirty="0"/>
+          </a:p>
+        </p:txBody>
+      </p:sp>
+      <p:sp>
+        <p:nvSpPr>
+          <p:cNvPr id="42" name="Text 25"/>
+          <p:cNvSpPr txBox="1"/>
+          <p:nvPr/>
+        </p:nvSpPr>
+        <p:spPr>
+          <a:xfrm>
+            <a:off x="10490911" y="6519672"/>
+            <a:ext cx="1484986" cy="228600"/>
+          </a:xfrm>
+          <a:prstGeom prst="rect">
+            <a:avLst/>
+          </a:prstGeom>
+          <a:noFill/>
+          <a:ln/>
+        </p:spPr>
+        <p:txBody>
+          <a:bodyPr wrap="square" lIns="0" tIns="0" rIns="0" bIns="0" rtlCol="0" anchor="ctr"/>
+          <a:lstStyle/>
+          <a:p>
+            <a:pPr marL="0" indent="0" algn="l">
+              <a:buNone/>
+            </a:pPr>
+            <a:r>
+              <a:rPr lang="en-US" sz="1600" dirty="0">
+                <a:solidFill>
+                  <a:srgbClr val="9CA3AF"/>
+                </a:solidFill>
+                <a:latin typeface="Meiryo UI" pitchFamily="34" charset="0"/>
+                <a:ea typeface="Meiryo UI" pitchFamily="34" charset="-122"/>
+                <a:cs typeface="Noto Sans JP" pitchFamily="34" charset="-120"/>
+              </a:rPr>
+              <a:t>Copyright © PA45</a:t>
+            </a:r>
+            <a:endParaRPr lang="en-US" sz="1200" dirty="0"/>
+          </a:p>
+        </p:txBody>
+      </p:sp>
+      <p:grpSp>
+        <p:nvGrpSpPr>
+          <p:cNvPr id="47" name="グループ化 46">
+            <a:extLst>
+              <a:ext uri="{FF2B5EF4-FFF2-40B4-BE49-F238E27FC236}">
+                <a16:creationId xmlns:a16="http://schemas.microsoft.com/office/drawing/2014/main" id="{722FBEAE-8CB7-7493-F595-CD1F2E21BD05}"/>
+              </a:ext>
+            </a:extLst>
+          </p:cNvPr>
+          <p:cNvGrpSpPr/>
+          <p:nvPr/>
+        </p:nvGrpSpPr>
+        <p:grpSpPr>
+          <a:xfrm>
             <a:off x="4603551" y="6322778"/>
             <a:ext cx="7350682" cy="405017"/>
             <a:chOff x="5861349" y="604238"/>
@@ -21493,8 +21337,8 @@
         </p:nvSpPr>
         <p:spPr>
           <a:xfrm>
-            <a:off x="182880" y="2195490"/>
-            <a:ext cx="6583680" cy="3947047"/>
+            <a:off x="182880" y="2107458"/>
+            <a:ext cx="6583680" cy="3265078"/>
           </a:xfrm>
           <a:prstGeom prst="rect">
             <a:avLst/>
@@ -21513,14 +21357,53 @@
               <a:buNone/>
             </a:pPr>
             <a:r>
-              <a:rPr sz="2000" b="0">
-                <a:solidFill>
-                  <a:srgbClr val="1F2937"/>
+              <a:rPr sz="2000" b="1">
+                <a:solidFill>
+                  <a:srgbClr val="C00000"/>
                 </a:solidFill>
                 <a:latin typeface="Meiryo UI"/>
                 <a:ea typeface="Meiryo UI"/>
               </a:rPr>
-              <a:t>①「実行履歴」は、フローを動かした記録。いつ・どのアクションが・成功（緑）か失敗（赤）かが残ります。</a:t>
+              <a:t>④画面に見える「表示」と、</a:t>
+            </a:r>
+            <a:br>
+              <a:rPr lang="en-US" sz="2000" b="1">
+                <a:solidFill>
+                  <a:srgbClr val="C00000"/>
+                </a:solidFill>
+                <a:latin typeface="Meiryo UI"/>
+                <a:ea typeface="Meiryo UI"/>
+              </a:rPr>
+            </a:br>
+            <a:r>
+              <a:rPr lang="ja-JP" altLang="en-US" sz="2000" b="1">
+                <a:solidFill>
+                  <a:srgbClr val="C00000"/>
+                </a:solidFill>
+                <a:latin typeface="Meiryo UI"/>
+                <a:ea typeface="Meiryo UI"/>
+              </a:rPr>
+              <a:t>　</a:t>
+            </a:r>
+            <a:r>
+              <a:rPr sz="2000" b="1">
+                <a:solidFill>
+                  <a:srgbClr val="C00000"/>
+                </a:solidFill>
+                <a:latin typeface="Meiryo UI"/>
+                <a:ea typeface="Meiryo UI"/>
+              </a:rPr>
+              <a:t>フローに実際に渡る「値」は違うことがあります</a:t>
+            </a:r>
+            <a:r>
+              <a:rPr sz="2000" b="0">
+                <a:solidFill>
+                  <a:srgbClr val="1F2937"/>
+                </a:solidFill>
+                <a:latin typeface="Meiryo UI"/>
+                <a:ea typeface="Meiryo UI"/>
+              </a:rPr>
+              <a:t>。</a:t>
             </a:r>
             <a:endParaRPr lang="en-US" altLang="ja-JP" sz="2000" b="1">
               <a:solidFill>
@@ -21545,7 +21428,7 @@
                 <a:latin typeface="Meiryo UI"/>
                 <a:ea typeface="Meiryo UI"/>
               </a:rPr>
-              <a:t>②各アクションを開くと「入力」と「出力」が見られます。入力＝そのアクションが受け取った値、出力＝次に渡す値です。</a:t>
+              <a:t>⑤例：メールの重要度。画面の表示は「高」でも、出力に渡る値は英語の "High" です。</a:t>
             </a:r>
           </a:p>
           <a:p>
@@ -21562,7 +21445,17 @@
                 <a:latin typeface="Meiryo UI"/>
                 <a:ea typeface="Meiryo UI"/>
               </a:rPr>
-              <a:t>③うまく動かないときは、実行履歴の入力・出力を見れば「どこで何が起きたか」が分かります。</a:t>
+              <a:t>⑥条件に「高」と書くと一致せず、フローは赤くならないまま間違った方へ進みます。</a:t>
+            </a:r>
+            <a:r>
+              <a:rPr sz="2000" b="1">
+                <a:solidFill>
+                  <a:srgbClr val="C00000"/>
+                </a:solidFill>
+                <a:latin typeface="Meiryo UI"/>
+                <a:ea typeface="Meiryo UI"/>
+              </a:rPr>
+              <a:t>出力を見ないと気づけません。</a:t>
             </a:r>
           </a:p>
         </p:txBody>
@@ -21606,7 +21499,7 @@
           </a:fontRef>
         </p:style>
         <p:txBody>
-          <a:bodyPr rtlCol="0" anchor="ctr" wrap="square"/>
+          <a:bodyPr wrap="square" rtlCol="0" anchor="ctr"/>
           <a:lstStyle/>
           <a:p>
             <a:pPr algn="ctr"/>
@@ -21631,375 +21524,76 @@
                 <a:latin typeface="Meiryo UI"/>
                 <a:ea typeface="Meiryo UI"/>
               </a:rPr>
-              <a:t>実行履歴の一覧画面
-（緑＝成功・赤＝失敗が見える画面）</a:t>
-            </a:r>
-          </a:p>
-        </p:txBody>
-      </p:sp>
-    </p:spTree>
-  </p:cSld>
-  <p:clrMapOvr>
-    <a:masterClrMapping/>
-  </p:clrMapOvr>
-</p:sld>
-</file>
-
-<file path=ppt/slides/slide9.xml><?xml version="1.0" encoding="utf-8"?>
-<p:sld xmlns:a="http://schemas.openxmlformats.org/drawingml/2006/main" xmlns:r="http://schemas.openxmlformats.org/officeDocument/2006/relationships" xmlns:p="http://schemas.openxmlformats.org/presentationml/2006/main">
-  <p:cSld>
-    <p:spTree>
-      <p:nvGrpSpPr>
-        <p:cNvPr id="1" name=""/>
-        <p:cNvGrpSpPr/>
-        <p:nvPr/>
-      </p:nvGrpSpPr>
-      <p:grpSpPr>
-        <a:xfrm>
-          <a:off x="0" y="0"/>
-          <a:ext cx="0" cy="0"/>
-          <a:chOff x="0" y="0"/>
-          <a:chExt cx="0" cy="0"/>
-        </a:xfrm>
-      </p:grpSpPr>
-      <p:sp>
-        <p:nvSpPr>
-          <p:cNvPr id="2" name="Shape 0"/>
-          <p:cNvSpPr/>
-          <p:nvPr/>
-        </p:nvSpPr>
-        <p:spPr>
-          <a:xfrm>
-            <a:off x="0" y="0"/>
-            <a:ext cx="12191695" cy="6858000"/>
-          </a:xfrm>
-          <a:prstGeom prst="rect">
-            <a:avLst/>
-          </a:prstGeom>
-          <a:solidFill>
-            <a:srgbClr val="F3F4F6"/>
-          </a:solidFill>
-          <a:ln w="12700">
-            <a:solidFill>
-              <a:srgbClr val="FFFFFF">
-                <a:alpha val="0"/>
-              </a:srgbClr>
-            </a:solidFill>
-            <a:prstDash val="solid"/>
-          </a:ln>
-        </p:spPr>
-        <p:txBody>
-          <a:bodyPr/>
-          <a:lstStyle/>
-          <a:p>
-            <a:endParaRPr lang="ja-JP" altLang="en-US"/>
-          </a:p>
-        </p:txBody>
-      </p:sp>
-      <p:sp>
-        <p:nvSpPr>
-          <p:cNvPr id="3" name="Shape 1"/>
-          <p:cNvSpPr/>
-          <p:nvPr/>
-        </p:nvSpPr>
-        <p:spPr>
-          <a:xfrm>
-            <a:off x="0" y="0"/>
-            <a:ext cx="12191695" cy="6858000"/>
-          </a:xfrm>
-          <a:prstGeom prst="rect">
-            <a:avLst/>
-          </a:prstGeom>
-          <a:solidFill>
-            <a:srgbClr val="FFFFFF"/>
-          </a:solidFill>
-          <a:ln w="12700">
-            <a:solidFill>
-              <a:srgbClr val="FFFFFF">
-                <a:alpha val="0"/>
-              </a:srgbClr>
-            </a:solidFill>
-            <a:prstDash val="solid"/>
+              <a:t>メールの重要度を「高」にしている画面
+または 条件アクションの設定画面</a:t>
+            </a:r>
+          </a:p>
+        </p:txBody>
+      </p:sp>
+      <p:pic>
+        <p:nvPicPr>
+          <p:cNvPr id="11" name="図 10" descr="The image shows a software interface with a Japanese text section, detailing how to set up a condition expression with parameters, including comparison operators and values.&#10;&#10;AI 生成コンテンツは誤りを含む可能性があります。">
+            <a:extLst>
+              <a:ext uri="{FF2B5EF4-FFF2-40B4-BE49-F238E27FC236}">
+                <a16:creationId xmlns:a16="http://schemas.microsoft.com/office/drawing/2014/main" id="{864EEDAE-9E79-48C1-2375-93B16C5A26EC}"/>
+              </a:ext>
+            </a:extLst>
+          </p:cNvPr>
+          <p:cNvPicPr>
+            <a:picLocks noChangeAspect="1"/>
+          </p:cNvPicPr>
+          <p:nvPr/>
+        </p:nvPicPr>
+        <p:blipFill>
+          <a:blip r:embed="rId2"/>
+          <a:stretch>
+            <a:fillRect/>
+          </a:stretch>
+        </p:blipFill>
+        <p:spPr>
+          <a:xfrm>
+            <a:off x="7145383" y="2470664"/>
+            <a:ext cx="4362994" cy="2626407"/>
+          </a:xfrm>
+          <a:prstGeom prst="rect">
+            <a:avLst/>
+          </a:prstGeom>
+          <a:ln>
+            <a:noFill/>
           </a:ln>
           <a:effectLst>
-            <a:outerShdw blurRad="63500" dist="38100" dir="16200000" algn="bl" rotWithShape="0">
-              <a:srgbClr val="000000">
-                <a:alpha val="10000"/>
+            <a:outerShdw blurRad="292100" dist="139700" dir="2700000" algn="tl" rotWithShape="0">
+              <a:srgbClr val="333333">
+                <a:alpha val="65000"/>
               </a:srgbClr>
             </a:outerShdw>
           </a:effectLst>
         </p:spPr>
-        <p:txBody>
-          <a:bodyPr/>
-          <a:lstStyle/>
-          <a:p>
-            <a:endParaRPr lang="ja-JP" altLang="en-US"/>
-          </a:p>
-        </p:txBody>
-      </p:sp>
-      <p:sp>
-        <p:nvSpPr>
-          <p:cNvPr id="4" name="Shape 2"/>
-          <p:cNvSpPr/>
-          <p:nvPr/>
-        </p:nvSpPr>
-        <p:spPr>
-          <a:xfrm>
-            <a:off x="0" y="0"/>
-            <a:ext cx="12191695" cy="1485900"/>
-          </a:xfrm>
-          <a:prstGeom prst="rect">
-            <a:avLst/>
-          </a:prstGeom>
-          <a:solidFill>
-            <a:srgbClr val="FFFFFF"/>
-          </a:solidFill>
-          <a:ln/>
-        </p:spPr>
-        <p:txBody>
-          <a:bodyPr/>
-          <a:lstStyle/>
-          <a:p>
-            <a:endParaRPr lang="ja-JP" altLang="en-US"/>
-          </a:p>
-        </p:txBody>
-      </p:sp>
-      <p:sp>
-        <p:nvSpPr>
-          <p:cNvPr id="5" name="Shape 3"/>
-          <p:cNvSpPr/>
-          <p:nvPr/>
-        </p:nvSpPr>
-        <p:spPr>
-          <a:xfrm>
-            <a:off x="0" y="1476756"/>
-            <a:ext cx="12191695" cy="9144"/>
-          </a:xfrm>
-          <a:prstGeom prst="rect">
-            <a:avLst/>
-          </a:prstGeom>
-          <a:solidFill>
-            <a:srgbClr val="F3F4F6"/>
-          </a:solidFill>
-          <a:ln w="12700">
-            <a:solidFill>
-              <a:srgbClr val="F3F4F6">
-                <a:alpha val="0"/>
-              </a:srgbClr>
-            </a:solidFill>
-            <a:prstDash val="solid"/>
-          </a:ln>
-        </p:spPr>
-        <p:txBody>
-          <a:bodyPr/>
-          <a:lstStyle/>
-          <a:p>
-            <a:endParaRPr lang="ja-JP" altLang="en-US"/>
-          </a:p>
-        </p:txBody>
-      </p:sp>
-      <p:sp>
-        <p:nvSpPr>
-          <p:cNvPr id="6" name="Text 4"/>
-          <p:cNvSpPr txBox="1"/>
-          <p:nvPr/>
-        </p:nvSpPr>
-        <p:spPr>
-          <a:xfrm>
-            <a:off x="457200" y="228600"/>
-            <a:ext cx="5600700" cy="267005"/>
-          </a:xfrm>
-          <a:prstGeom prst="rect">
-            <a:avLst/>
-          </a:prstGeom>
-          <a:noFill/>
-          <a:ln/>
-        </p:spPr>
-        <p:txBody>
-          <a:bodyPr wrap="square" lIns="0" tIns="0" rIns="0" bIns="0" rtlCol="0" anchor="ctr"/>
-          <a:lstStyle/>
-          <a:p>
-            <a:pPr marL="0" indent="0" algn="l">
-              <a:buNone/>
-            </a:pPr>
-            <a:r>
-              <a:rPr lang="en-US" sz="1600" b="1" kern="0" spc="150" dirty="0">
-                <a:solidFill>
-                  <a:srgbClr val="6B7280"/>
-                </a:solidFill>
-                <a:latin typeface="Meiryo UI" pitchFamily="34" charset="0"/>
-                <a:ea typeface="Meiryo UI" pitchFamily="34" charset="-122"/>
-                <a:cs typeface="Noto Sans JP" pitchFamily="34" charset="-120"/>
-              </a:rPr>
-              <a:t>PA45｜第11回</a:t>
-            </a:r>
-            <a:endParaRPr lang="en-US" sz="1500" dirty="0"/>
-          </a:p>
-        </p:txBody>
-      </p:sp>
-      <p:sp>
-        <p:nvSpPr>
-          <p:cNvPr id="7" name="Text 5"/>
-          <p:cNvSpPr txBox="1"/>
-          <p:nvPr/>
-        </p:nvSpPr>
-        <p:spPr>
-          <a:xfrm>
-            <a:off x="457199" y="533095"/>
-            <a:ext cx="10815277" cy="715061"/>
-          </a:xfrm>
-          <a:prstGeom prst="rect">
-            <a:avLst/>
-          </a:prstGeom>
-          <a:noFill/>
-          <a:ln/>
-        </p:spPr>
-        <p:txBody>
-          <a:bodyPr wrap="square" lIns="0" tIns="0" rIns="0" bIns="0" rtlCol="0" anchor="ctr"/>
-          <a:lstStyle/>
-          <a:p>
-            <a:pPr marL="0" indent="0" algn="l">
-              <a:buNone/>
-            </a:pPr>
-            <a:r>
-              <a:rPr lang="en-US" sz="3000" b="1" dirty="0">
-                <a:solidFill>
-                  <a:srgbClr val="1F2937"/>
-                </a:solidFill>
-                <a:latin typeface="Meiryo UI" pitchFamily="34" charset="0"/>
-                <a:ea typeface="Meiryo UI" pitchFamily="34" charset="-122"/>
-                <a:cs typeface="Noto Sans JP" pitchFamily="34" charset="-120"/>
-              </a:rPr>
-              <a:t>テーマ解説 (2/2)：画面の「表示」と「値」は違う</a:t>
-            </a:r>
-            <a:endParaRPr lang="en-US" sz="2800" dirty="0"/>
-          </a:p>
-        </p:txBody>
-      </p:sp>
-      <p:sp>
-        <p:nvSpPr>
-          <p:cNvPr id="8" name="Shape 6"/>
-          <p:cNvSpPr/>
-          <p:nvPr/>
-        </p:nvSpPr>
-        <p:spPr>
-          <a:xfrm>
-            <a:off x="10858500" y="828446"/>
-            <a:ext cx="114300" cy="114300"/>
-          </a:xfrm>
-          <a:prstGeom prst="ellipse">
-            <a:avLst/>
-          </a:prstGeom>
-          <a:solidFill>
-            <a:srgbClr val="0078D4"/>
-          </a:solidFill>
-          <a:ln w="12700">
-            <a:solidFill>
-              <a:srgbClr val="FFFFFF">
-                <a:alpha val="0"/>
-              </a:srgbClr>
-            </a:solidFill>
-            <a:prstDash val="solid"/>
-          </a:ln>
-        </p:spPr>
-        <p:txBody>
-          <a:bodyPr/>
-          <a:lstStyle/>
-          <a:p>
-            <a:endParaRPr lang="ja-JP" altLang="en-US"/>
-          </a:p>
-        </p:txBody>
-      </p:sp>
-      <p:sp>
-        <p:nvSpPr>
-          <p:cNvPr id="9" name="Text 7"/>
-          <p:cNvSpPr txBox="1"/>
-          <p:nvPr/>
-        </p:nvSpPr>
-        <p:spPr>
-          <a:xfrm>
-            <a:off x="11048695" y="752551"/>
-            <a:ext cx="771754" cy="267005"/>
-          </a:xfrm>
-          <a:prstGeom prst="rect">
-            <a:avLst/>
-          </a:prstGeom>
-          <a:noFill/>
-          <a:ln/>
-        </p:spPr>
-        <p:txBody>
-          <a:bodyPr wrap="square" lIns="0" tIns="0" rIns="0" bIns="0" rtlCol="0" anchor="ctr"/>
-          <a:lstStyle/>
-          <a:p>
-            <a:pPr marL="0" indent="0" algn="l">
-              <a:buNone/>
-            </a:pPr>
-            <a:r>
-              <a:rPr lang="en-US" sz="1600" dirty="0">
-                <a:solidFill>
-                  <a:srgbClr val="9CA3AF"/>
-                </a:solidFill>
-                <a:latin typeface="Meiryo UI" pitchFamily="34" charset="0"/>
-                <a:ea typeface="Meiryo UI" pitchFamily="34" charset="-122"/>
-                <a:cs typeface="ui-monospace" pitchFamily="34" charset="-120"/>
-              </a:rPr>
-              <a:t>Concept</a:t>
-            </a:r>
-            <a:endParaRPr lang="en-US" sz="1500" dirty="0"/>
-          </a:p>
-        </p:txBody>
-      </p:sp>
-      <p:sp>
-        <p:nvSpPr>
-          <p:cNvPr id="13" name="Shape 9"/>
-          <p:cNvSpPr/>
-          <p:nvPr/>
-        </p:nvSpPr>
-        <p:spPr>
-          <a:xfrm>
-            <a:off x="305" y="1485900"/>
-            <a:ext cx="12191695" cy="4914900"/>
-          </a:xfrm>
-          <a:prstGeom prst="rect">
-            <a:avLst/>
-          </a:prstGeom>
-          <a:solidFill>
-            <a:srgbClr val="F9FAFB"/>
-          </a:solidFill>
-          <a:ln w="12700">
-            <a:solidFill>
-              <a:srgbClr val="FFFFFF">
-                <a:alpha val="0"/>
-              </a:srgbClr>
-            </a:solidFill>
-            <a:prstDash val="solid"/>
-          </a:ln>
-        </p:spPr>
-        <p:txBody>
-          <a:bodyPr/>
-          <a:lstStyle/>
-          <a:p>
-            <a:endParaRPr lang="ja-JP" altLang="en-US"/>
-          </a:p>
-        </p:txBody>
-      </p:sp>
+      </p:pic>
       <p:pic>
         <p:nvPicPr>
-          <p:cNvPr id="23" name="Image 8" descr="preencoded.png"/>
+          <p:cNvPr id="16" name="図 15" descr="The image depicts a highly noticeable, yellow warning triangle with a black border and an exclamation mark inside, typically used to denote caution or danger.&#10;&#10;AI 生成コンテンツは誤りを含む可能性があります。">
+            <a:extLst>
+              <a:ext uri="{FF2B5EF4-FFF2-40B4-BE49-F238E27FC236}">
+                <a16:creationId xmlns:a16="http://schemas.microsoft.com/office/drawing/2014/main" id="{C8432271-4886-A028-0343-4894A3D4B31C}"/>
+              </a:ext>
+            </a:extLst>
+          </p:cNvPr>
           <p:cNvPicPr>
             <a:picLocks noChangeAspect="1"/>
           </p:cNvPicPr>
           <p:nvPr/>
         </p:nvPicPr>
         <p:blipFill>
-          <a:blip/>
-          <a:srcRect t="-401" b="-401"/>
-          <a:stretch/>
+          <a:blip r:embed="rId3"/>
+          <a:stretch>
+            <a:fillRect/>
+          </a:stretch>
         </p:blipFill>
         <p:spPr>
           <a:xfrm>
-            <a:off x="0" y="6801307"/>
-            <a:ext cx="12191695" cy="57607"/>
+            <a:off x="10146754" y="241059"/>
+            <a:ext cx="1086650" cy="1086650"/>
           </a:xfrm>
           <a:prstGeom prst="rect">
             <a:avLst/>
@@ -22008,466 +21602,41 @@
       </p:pic>
       <p:sp>
         <p:nvSpPr>
-          <p:cNvPr id="39" name="Shape 22"/>
-          <p:cNvSpPr/>
-          <p:nvPr/>
-        </p:nvSpPr>
-        <p:spPr>
-          <a:xfrm>
-            <a:off x="0" y="6400800"/>
-            <a:ext cx="12191695" cy="457200"/>
-          </a:xfrm>
-          <a:prstGeom prst="rect">
-            <a:avLst/>
-          </a:prstGeom>
-          <a:solidFill>
-            <a:srgbClr val="FFFFFF"/>
-          </a:solidFill>
-          <a:ln/>
-        </p:spPr>
-        <p:txBody>
-          <a:bodyPr/>
-          <a:lstStyle/>
-          <a:p>
-            <a:endParaRPr lang="ja-JP" altLang="en-US"/>
-          </a:p>
-        </p:txBody>
-      </p:sp>
-      <p:sp>
-        <p:nvSpPr>
-          <p:cNvPr id="40" name="Shape 23"/>
-          <p:cNvSpPr/>
-          <p:nvPr/>
-        </p:nvSpPr>
-        <p:spPr>
-          <a:xfrm>
-            <a:off x="0" y="6400800"/>
-            <a:ext cx="12191695" cy="9144"/>
-          </a:xfrm>
-          <a:prstGeom prst="rect">
-            <a:avLst/>
-          </a:prstGeom>
-          <a:solidFill>
-            <a:srgbClr val="E5E7EB"/>
-          </a:solidFill>
-          <a:ln w="12700">
-            <a:solidFill>
-              <a:srgbClr val="E5E7EB">
-                <a:alpha val="0"/>
-              </a:srgbClr>
-            </a:solidFill>
-            <a:prstDash val="solid"/>
-          </a:ln>
-        </p:spPr>
-        <p:txBody>
-          <a:bodyPr/>
-          <a:lstStyle/>
-          <a:p>
-            <a:endParaRPr lang="ja-JP" altLang="en-US"/>
-          </a:p>
-        </p:txBody>
-      </p:sp>
-      <p:sp>
-        <p:nvSpPr>
-          <p:cNvPr id="41" name="Text 24"/>
-          <p:cNvSpPr txBox="1"/>
-          <p:nvPr/>
-        </p:nvSpPr>
-        <p:spPr>
-          <a:xfrm>
-            <a:off x="457200" y="6519672"/>
-            <a:ext cx="2573122" cy="228600"/>
-          </a:xfrm>
-          <a:prstGeom prst="rect">
-            <a:avLst/>
-          </a:prstGeom>
-          <a:noFill/>
-          <a:ln/>
-        </p:spPr>
-        <p:txBody>
-          <a:bodyPr wrap="square" lIns="0" tIns="0" rIns="0" bIns="0" rtlCol="0" anchor="ctr"/>
-          <a:lstStyle/>
-          <a:p>
-            <a:pPr marL="0" indent="0" algn="l">
-              <a:buNone/>
-            </a:pPr>
-            <a:r>
-              <a:rPr lang="en-US" sz="1600" dirty="0">
-                <a:solidFill>
-                  <a:srgbClr val="9CA3AF"/>
-                </a:solidFill>
-                <a:latin typeface="Meiryo UI" pitchFamily="34" charset="0"/>
-                <a:ea typeface="Meiryo UI" pitchFamily="34" charset="-122"/>
-                <a:cs typeface="Noto Sans JP" pitchFamily="34" charset="-120"/>
-              </a:rPr>
-              <a:t>Power Automate for Beginners</a:t>
-            </a:r>
-            <a:endParaRPr lang="en-US" sz="1200" dirty="0"/>
-          </a:p>
-        </p:txBody>
-      </p:sp>
-      <p:sp>
-        <p:nvSpPr>
-          <p:cNvPr id="42" name="Text 25"/>
-          <p:cNvSpPr txBox="1"/>
-          <p:nvPr/>
-        </p:nvSpPr>
-        <p:spPr>
-          <a:xfrm>
-            <a:off x="10490911" y="6519672"/>
-            <a:ext cx="1484986" cy="228600"/>
-          </a:xfrm>
-          <a:prstGeom prst="rect">
-            <a:avLst/>
-          </a:prstGeom>
-          <a:noFill/>
-          <a:ln/>
-        </p:spPr>
-        <p:txBody>
-          <a:bodyPr wrap="square" lIns="0" tIns="0" rIns="0" bIns="0" rtlCol="0" anchor="ctr"/>
-          <a:lstStyle/>
-          <a:p>
-            <a:pPr marL="0" indent="0" algn="l">
-              <a:buNone/>
-            </a:pPr>
-            <a:r>
-              <a:rPr lang="en-US" sz="1600" dirty="0">
-                <a:solidFill>
-                  <a:srgbClr val="9CA3AF"/>
-                </a:solidFill>
-                <a:latin typeface="Meiryo UI" pitchFamily="34" charset="0"/>
-                <a:ea typeface="Meiryo UI" pitchFamily="34" charset="-122"/>
-                <a:cs typeface="Noto Sans JP" pitchFamily="34" charset="-120"/>
-              </a:rPr>
-              <a:t>Copyright © PA45</a:t>
-            </a:r>
-            <a:endParaRPr lang="en-US" sz="1200" dirty="0"/>
-          </a:p>
-        </p:txBody>
-      </p:sp>
-      <p:grpSp>
-        <p:nvGrpSpPr>
-          <p:cNvPr id="47" name="グループ化 46">
+          <p:cNvPr id="17" name="四角形: 角を丸くする 16">
             <a:extLst>
               <a:ext uri="{FF2B5EF4-FFF2-40B4-BE49-F238E27FC236}">
-                <a16:creationId xmlns:a16="http://schemas.microsoft.com/office/drawing/2014/main" id="{722FBEAE-8CB7-7493-F595-CD1F2E21BD05}"/>
+                <a16:creationId xmlns:a16="http://schemas.microsoft.com/office/drawing/2014/main" id="{EC4BE0E6-C887-3F7B-7B2A-B7AB36E89626}"/>
               </a:ext>
             </a:extLst>
           </p:cNvPr>
-          <p:cNvGrpSpPr/>
-          <p:nvPr/>
-        </p:nvGrpSpPr>
-        <p:grpSpPr>
-          <a:xfrm>
-            <a:off x="4603551" y="6322778"/>
-            <a:ext cx="7350682" cy="405017"/>
-            <a:chOff x="5861349" y="604238"/>
-            <a:chExt cx="6035909" cy="405017"/>
-          </a:xfrm>
-        </p:grpSpPr>
-        <p:sp>
-          <p:nvSpPr>
-            <p:cNvPr id="48" name="Shape 31">
-              <a:extLst>
-                <a:ext uri="{FF2B5EF4-FFF2-40B4-BE49-F238E27FC236}">
-                  <a16:creationId xmlns:a16="http://schemas.microsoft.com/office/drawing/2014/main" id="{DD44BB3C-F859-7A5E-7E34-CC1C35ECEA4D}"/>
-                </a:ext>
-              </a:extLst>
-            </p:cNvPr>
-            <p:cNvSpPr/>
-            <p:nvPr/>
-          </p:nvSpPr>
-          <p:spPr>
-            <a:xfrm>
-              <a:off x="6034969" y="604238"/>
-              <a:ext cx="5854549" cy="386057"/>
-            </a:xfrm>
-            <a:prstGeom prst="roundRect">
-              <a:avLst>
-                <a:gd name="adj" fmla="val 342465"/>
-              </a:avLst>
-            </a:prstGeom>
+          <p:cNvSpPr/>
+          <p:nvPr/>
+        </p:nvSpPr>
+        <p:spPr>
+          <a:xfrm>
+            <a:off x="9805851" y="4119154"/>
+            <a:ext cx="1306286" cy="348343"/>
+          </a:xfrm>
+          <a:prstGeom prst="roundRect">
+            <a:avLst/>
+          </a:prstGeom>
+          <a:noFill/>
+          <a:ln w="31750">
             <a:solidFill>
-              <a:srgbClr val="EFF6FF"/>
-            </a:solidFill>
-            <a:ln w="12700">
-              <a:solidFill>
-                <a:srgbClr val="FFFFFF">
-                  <a:alpha val="0"/>
-                </a:srgbClr>
-              </a:solidFill>
-              <a:prstDash val="solid"/>
-            </a:ln>
-          </p:spPr>
-          <p:txBody>
-            <a:bodyPr/>
-            <a:lstStyle/>
-            <a:p>
-              <a:endParaRPr lang="ja-JP" altLang="en-US"/>
-            </a:p>
-          </p:txBody>
-        </p:sp>
-        <p:sp>
-          <p:nvSpPr>
-            <p:cNvPr id="49" name="Text 21">
-              <a:extLst>
-                <a:ext uri="{FF2B5EF4-FFF2-40B4-BE49-F238E27FC236}">
-                  <a16:creationId xmlns:a16="http://schemas.microsoft.com/office/drawing/2014/main" id="{A7F44BB1-1667-BB85-557B-D7C1AAD8A0FA}"/>
-                </a:ext>
-              </a:extLst>
-            </p:cNvPr>
-            <p:cNvSpPr txBox="1"/>
-            <p:nvPr/>
-          </p:nvSpPr>
-          <p:spPr>
-            <a:xfrm>
-              <a:off x="6287649" y="612651"/>
-              <a:ext cx="5609609" cy="396593"/>
-            </a:xfrm>
-            <a:prstGeom prst="rect">
-              <a:avLst/>
-            </a:prstGeom>
-            <a:noFill/>
-            <a:ln/>
-          </p:spPr>
-          <p:txBody>
-            <a:bodyPr wrap="square" lIns="0" tIns="0" rIns="0" bIns="0" rtlCol="0" anchor="ctr"/>
-            <a:lstStyle/>
-            <a:p>
-              <a:pPr marL="0" indent="0" algn="l">
-                <a:buNone/>
-              </a:pPr>
-              <a:r>
-                <a:rPr lang="en-US" sz="1400" b="1" dirty="0">
-                  <a:solidFill>
-                    <a:srgbClr val="2563EB"/>
-                  </a:solidFill>
-                  <a:latin typeface="Noto Sans JP" pitchFamily="34" charset="0"/>
-                  <a:ea typeface="Noto Sans JP" pitchFamily="34" charset="-122"/>
-                  <a:cs typeface="Noto Sans JP" pitchFamily="34" charset="-120"/>
-                </a:rPr>
-                <a:t>学んだこと・気づいたことを #</a:t>
-              </a:r>
-              <a:r>
-                <a:rPr lang="en-US" sz="1400" b="1">
-                  <a:solidFill>
-                    <a:srgbClr val="2563EB"/>
-                  </a:solidFill>
-                  <a:latin typeface="Noto Sans JP" pitchFamily="34" charset="0"/>
-                  <a:ea typeface="Noto Sans JP" pitchFamily="34" charset="-122"/>
-                  <a:cs typeface="Noto Sans JP" pitchFamily="34" charset="-120"/>
-                </a:rPr>
-                <a:t>PA45 で</a:t>
-              </a:r>
-              <a:r>
-                <a:rPr lang="ja-JP" altLang="en-US" sz="1400" b="1">
-                  <a:solidFill>
-                    <a:srgbClr val="2563EB"/>
-                  </a:solidFill>
-                  <a:latin typeface="Noto Sans JP" pitchFamily="34" charset="0"/>
-                  <a:ea typeface="Noto Sans JP" pitchFamily="34" charset="-122"/>
-                  <a:cs typeface="Noto Sans JP" pitchFamily="34" charset="-120"/>
-                </a:rPr>
-                <a:t>リアルタイムに</a:t>
-              </a:r>
-              <a:r>
-                <a:rPr lang="en-US" sz="1400" b="1">
-                  <a:solidFill>
-                    <a:srgbClr val="2563EB"/>
-                  </a:solidFill>
-                  <a:latin typeface="Noto Sans JP" pitchFamily="34" charset="0"/>
-                  <a:ea typeface="Noto Sans JP" pitchFamily="34" charset="-122"/>
-                  <a:cs typeface="Noto Sans JP" pitchFamily="34" charset="-120"/>
-                </a:rPr>
-                <a:t>投稿しよう！</a:t>
-              </a:r>
-              <a:r>
-                <a:rPr lang="ja-JP" altLang="en-US" sz="1400" b="1">
-                  <a:solidFill>
-                    <a:srgbClr val="2563EB"/>
-                  </a:solidFill>
-                  <a:latin typeface="Noto Sans JP" pitchFamily="34" charset="0"/>
-                  <a:ea typeface="Noto Sans JP" pitchFamily="34" charset="-122"/>
-                  <a:cs typeface="Noto Sans JP" pitchFamily="34" charset="-120"/>
-                </a:rPr>
-                <a:t>スクショ</a:t>
-              </a:r>
-              <a:r>
-                <a:rPr lang="en-US" altLang="ja-JP" sz="1400" b="1">
-                  <a:solidFill>
-                    <a:srgbClr val="2563EB"/>
-                  </a:solidFill>
-                  <a:latin typeface="Noto Sans JP" pitchFamily="34" charset="0"/>
-                  <a:ea typeface="Noto Sans JP" pitchFamily="34" charset="-122"/>
-                  <a:cs typeface="Noto Sans JP" pitchFamily="34" charset="-120"/>
-                </a:rPr>
-                <a:t>OK</a:t>
-              </a:r>
-              <a:r>
-                <a:rPr lang="ja-JP" altLang="en-US" sz="1400" b="1">
-                  <a:solidFill>
-                    <a:srgbClr val="2563EB"/>
-                  </a:solidFill>
-                  <a:latin typeface="Noto Sans JP" pitchFamily="34" charset="0"/>
-                  <a:ea typeface="Noto Sans JP" pitchFamily="34" charset="-122"/>
-                  <a:cs typeface="Noto Sans JP" pitchFamily="34" charset="-120"/>
-                </a:rPr>
-                <a:t>！</a:t>
-              </a:r>
-              <a:endParaRPr lang="en-US" sz="1400" dirty="0"/>
-            </a:p>
-          </p:txBody>
-        </p:sp>
-        <p:pic>
-          <p:nvPicPr>
-            <p:cNvPr id="50" name="Image 2" descr="preencoded.png">
-              <a:extLst>
-                <a:ext uri="{FF2B5EF4-FFF2-40B4-BE49-F238E27FC236}">
-                  <a16:creationId xmlns:a16="http://schemas.microsoft.com/office/drawing/2014/main" id="{003A3C3D-15E3-1F1A-D918-AB2472E8059D}"/>
-                </a:ext>
-              </a:extLst>
-            </p:cNvPr>
-            <p:cNvPicPr>
-              <a:picLocks noChangeAspect="1"/>
-            </p:cNvPicPr>
-            <p:nvPr/>
-          </p:nvPicPr>
-          <p:blipFill>
-            <a:blip/>
-            <a:srcRect/>
-            <a:stretch/>
-          </p:blipFill>
-          <p:spPr>
-            <a:xfrm>
-              <a:off x="5861349" y="619679"/>
-              <a:ext cx="263236" cy="389576"/>
-            </a:xfrm>
-            <a:prstGeom prst="rect">
-              <a:avLst/>
-            </a:prstGeom>
-          </p:spPr>
-        </p:pic>
-      </p:grpSp>
-      <p:sp>
-        <p:nvSpPr>
-          <p:cNvPr id="51" name="Text 5">
-            <a:extLst>
-              <a:ext uri="{FF2B5EF4-FFF2-40B4-BE49-F238E27FC236}">
-                <a16:creationId xmlns:a16="http://schemas.microsoft.com/office/drawing/2014/main" id="{F34FF253-528E-97DF-BF89-4A55B2E7EBC4}"/>
-              </a:ext>
-            </a:extLst>
-          </p:cNvPr>
-          <p:cNvSpPr txBox="1"/>
-          <p:nvPr/>
-        </p:nvSpPr>
-        <p:spPr>
-          <a:xfrm>
-            <a:off x="182880" y="2229307"/>
-            <a:ext cx="6583680" cy="3913230"/>
-          </a:xfrm>
-          <a:prstGeom prst="rect">
-            <a:avLst/>
-          </a:prstGeom>
-          <a:noFill/>
-          <a:ln/>
-        </p:spPr>
-        <p:txBody>
-          <a:bodyPr wrap="square" lIns="0" tIns="0" rIns="0" bIns="0" rtlCol="0" anchor="ctr"/>
-          <a:lstStyle/>
-          <a:p>
-            <a:pPr marL="0" indent="0" algn="l">
-              <a:spcBef>
-                <a:spcPts val="1000"/>
-              </a:spcBef>
-              <a:buNone/>
-            </a:pPr>
-            <a:r>
-              <a:rPr sz="2000" b="0">
-                <a:solidFill>
-                  <a:srgbClr val="1F2937"/>
-                </a:solidFill>
-                <a:latin typeface="Meiryo UI"/>
-                <a:ea typeface="Meiryo UI"/>
-              </a:rPr>
-              <a:t>④画面に見える「表示」と、フローに実際に渡る「値」は違うことがあります。</a:t>
-            </a:r>
-            <a:endParaRPr lang="en-US" altLang="ja-JP" sz="2000" b="1">
-              <a:solidFill>
-                <a:srgbClr val="1F2937"/>
-              </a:solidFill>
-              <a:latin typeface="Noto Sans JP" pitchFamily="34" charset="0"/>
-              <a:ea typeface="Noto Sans JP" pitchFamily="34" charset="-122"/>
-              <a:cs typeface="Noto Sans JP" pitchFamily="34" charset="-120"/>
-            </a:endParaRPr>
-          </a:p>
-          <a:p>
-            <a:pPr>
-              <a:spcBef>
-                <a:spcPts val="1000"/>
-              </a:spcBef>
-            </a:pPr>
-            <a:r>
-              <a:rPr sz="2000" b="0">
-                <a:solidFill>
-                  <a:srgbClr val="1F2937"/>
-                </a:solidFill>
-                <a:latin typeface="Meiryo UI"/>
-                <a:ea typeface="Meiryo UI"/>
-              </a:rPr>
-              <a:t>⑤例：メールの重要度。画面の表示は「高」でも、出力に渡る値は英語の "High" です。</a:t>
-            </a:r>
-          </a:p>
-          <a:p>
-            <a:pPr>
-              <a:spcBef>
-                <a:spcPts val="1000"/>
-              </a:spcBef>
-            </a:pPr>
-            <a:r>
-              <a:rPr sz="2000" b="0">
-                <a:solidFill>
-                  <a:srgbClr val="1F2937"/>
-                </a:solidFill>
-                <a:latin typeface="Meiryo UI"/>
-                <a:ea typeface="Meiryo UI"/>
-              </a:rPr>
-              <a:t>⑥条件に「高」と書くと一致せず、フローは赤くならないまま間違った方へ進みます。出力を見ないと気づけません。</a:t>
-            </a:r>
-          </a:p>
-        </p:txBody>
-      </p:sp>
-      <p:sp>
-        <p:nvSpPr>
-          <p:cNvPr id="52" name="Rounded Rectangle 51"/>
-          <p:cNvSpPr/>
-          <p:nvPr/>
-        </p:nvSpPr>
-        <p:spPr>
-          <a:xfrm>
-            <a:off x="7040880" y="1737360"/>
-            <a:ext cx="4572000" cy="4114800"/>
-          </a:xfrm>
-          <a:prstGeom prst="roundRect">
-            <a:avLst/>
-          </a:prstGeom>
-          <a:solidFill>
-            <a:srgbClr val="F1F5FB"/>
-          </a:solidFill>
-          <a:ln w="19050">
-            <a:solidFill>
-              <a:srgbClr val="9CB8D8"/>
+              <a:srgbClr val="C00000"/>
             </a:solidFill>
           </a:ln>
-          <a:effectLst/>
         </p:spPr>
         <p:style>
-          <a:lnRef idx="1">
-            <a:schemeClr val="accent1"/>
+          <a:lnRef idx="2">
+            <a:schemeClr val="accent1">
+              <a:shade val="15000"/>
+            </a:schemeClr>
           </a:lnRef>
-          <a:fillRef idx="3">
+          <a:fillRef idx="1">
             <a:schemeClr val="accent1"/>
           </a:fillRef>
-          <a:effectRef idx="2">
+          <a:effectRef idx="0">
             <a:schemeClr val="accent1"/>
           </a:effectRef>
           <a:fontRef idx="minor">
@@ -22475,34 +21644,11 @@
           </a:fontRef>
         </p:style>
         <p:txBody>
-          <a:bodyPr rtlCol="0" anchor="ctr" wrap="square"/>
+          <a:bodyPr rtlCol="0" anchor="ctr"/>
           <a:lstStyle/>
           <a:p>
             <a:pPr algn="ctr"/>
-            <a:r>
-              <a:rPr sz="1800" b="1">
-                <a:solidFill>
-                  <a:srgbClr val="2A5E9E"/>
-                </a:solidFill>
-                <a:latin typeface="Meiryo UI"/>
-                <a:ea typeface="Meiryo UI"/>
-              </a:rPr>
-              <a:t>📷 ここにスクショを貼る</a:t>
-            </a:r>
-          </a:p>
-          <a:p>
-            <a:pPr algn="ctr"/>
-            <a:r>
-              <a:rPr sz="1400">
-                <a:solidFill>
-                  <a:srgbClr val="556677"/>
-                </a:solidFill>
-                <a:latin typeface="Meiryo UI"/>
-                <a:ea typeface="Meiryo UI"/>
-              </a:rPr>
-              <a:t>メールの重要度を「高」にしている画面
-または 条件アクションの設定画面</a:t>
-            </a:r>
+            <a:endParaRPr kumimoji="1" lang="ja-JP" altLang="en-US"/>
           </a:p>
         </p:txBody>
       </p:sp>
